--- a/papers/unified-report/slides/safety_guard_exec_deck.pptx
+++ b/papers/unified-report/slides/safety_guard_exec_deck.pptx
@@ -7742,829 +7742,40 @@
           </a:p>
         </p:txBody>
       </p:sp>
-      <p:sp>
-        <p:nvSpPr>
-          <p:cNvPr id="9" name="Rectangle 8"/>
+      <p:pic>
+        <p:nvPicPr>
+          <p:cNvPr id="9" name="Picture 8" descr="exec_gap.png"/>
+          <p:cNvPicPr>
+            <a:picLocks noChangeAspect="1"/>
+          </p:cNvPicPr>
+          <p:nvPr/>
+        </p:nvPicPr>
+        <p:blipFill>
+          <a:blip r:embed="rId2"/>
+          <a:stretch>
+            <a:fillRect/>
+          </a:stretch>
+        </p:blipFill>
+        <p:spPr>
+          <a:xfrm>
+            <a:off x="777240" y="2103120"/>
+            <a:ext cx="6754624" cy="3931920"/>
+          </a:xfrm>
+          <a:prstGeom prst="rect">
+            <a:avLst/>
+          </a:prstGeom>
+        </p:spPr>
+      </p:pic>
+      <p:sp>
+        <p:nvSpPr>
+          <p:cNvPr id="10" name="Rounded Rectangle 9"/>
           <p:cNvSpPr/>
           <p:nvPr/>
         </p:nvSpPr>
         <p:spPr>
           <a:xfrm>
-            <a:off x="777240" y="2249424"/>
-            <a:ext cx="6766560" cy="420624"/>
-          </a:xfrm>
-          <a:prstGeom prst="rect">
-            <a:avLst/>
-          </a:prstGeom>
-          <a:solidFill>
-            <a:srgbClr val="12263A"/>
-          </a:solidFill>
-          <a:ln>
-            <a:noFill/>
-          </a:ln>
-          <a:effectLst/>
-        </p:spPr>
-        <p:style>
-          <a:lnRef idx="1">
-            <a:schemeClr val="accent1"/>
-          </a:lnRef>
-          <a:fillRef idx="3">
-            <a:schemeClr val="accent1"/>
-          </a:fillRef>
-          <a:effectRef idx="2">
-            <a:schemeClr val="accent1"/>
-          </a:effectRef>
-          <a:fontRef idx="minor">
-            <a:schemeClr val="lt1"/>
-          </a:fontRef>
-        </p:style>
-        <p:txBody>
-          <a:bodyPr rtlCol="0" anchor="ctr" wrap="square"/>
-          <a:lstStyle/>
-          <a:p>
-            <a:pPr algn="ctr"/>
-          </a:p>
-        </p:txBody>
-      </p:sp>
-      <p:sp>
-        <p:nvSpPr>
-          <p:cNvPr id="10" name="TextBox 9"/>
-          <p:cNvSpPr txBox="1"/>
-          <p:nvPr/>
-        </p:nvSpPr>
-        <p:spPr>
-          <a:xfrm>
-            <a:off x="905256" y="2249424"/>
-            <a:ext cx="2856585" cy="420624"/>
-          </a:xfrm>
-          <a:prstGeom prst="rect">
-            <a:avLst/>
-          </a:prstGeom>
-          <a:noFill/>
-        </p:spPr>
-        <p:txBody>
-          <a:bodyPr wrap="square" anchor="ctr" lIns="0" rIns="0" tIns="0" bIns="0">
-            <a:spAutoFit/>
-          </a:bodyPr>
-          <a:lstStyle/>
-          <a:p>
-            <a:pPr algn="l">
-              <a:spcAft>
-                <a:spcPts val="0"/>
-              </a:spcAft>
-            </a:pPr>
-            <a:r>
-              <a:rPr sz="1300" b="1" i="0">
-                <a:solidFill>
-                  <a:srgbClr val="FFFFFF"/>
-                </a:solidFill>
-                <a:latin typeface="Arial"/>
-              </a:rPr>
-              <a:t>Guard</a:t>
-            </a:r>
-          </a:p>
-        </p:txBody>
-      </p:sp>
-      <p:sp>
-        <p:nvSpPr>
-          <p:cNvPr id="11" name="TextBox 10"/>
-          <p:cNvSpPr txBox="1"/>
-          <p:nvPr/>
-        </p:nvSpPr>
-        <p:spPr>
-          <a:xfrm>
-            <a:off x="4017873" y="2249424"/>
-            <a:ext cx="1570939" cy="420624"/>
-          </a:xfrm>
-          <a:prstGeom prst="rect">
-            <a:avLst/>
-          </a:prstGeom>
-          <a:noFill/>
-        </p:spPr>
-        <p:txBody>
-          <a:bodyPr wrap="square" anchor="ctr" lIns="0" rIns="0" tIns="0" bIns="0">
-            <a:spAutoFit/>
-          </a:bodyPr>
-          <a:lstStyle/>
-          <a:p>
-            <a:pPr algn="ctr">
-              <a:spcAft>
-                <a:spcPts val="0"/>
-              </a:spcAft>
-            </a:pPr>
-            <a:r>
-              <a:rPr sz="1300" b="1" i="0">
-                <a:solidFill>
-                  <a:srgbClr val="FFFFFF"/>
-                </a:solidFill>
-                <a:latin typeface="Arial"/>
-              </a:rPr>
-              <a:t>Catch rate</a:t>
-            </a:r>
-          </a:p>
-        </p:txBody>
-      </p:sp>
-      <p:sp>
-        <p:nvSpPr>
-          <p:cNvPr id="12" name="TextBox 11"/>
-          <p:cNvSpPr txBox="1"/>
-          <p:nvPr/>
-        </p:nvSpPr>
-        <p:spPr>
-          <a:xfrm>
-            <a:off x="5844844" y="2249424"/>
-            <a:ext cx="1570939" cy="420624"/>
-          </a:xfrm>
-          <a:prstGeom prst="rect">
-            <a:avLst/>
-          </a:prstGeom>
-          <a:noFill/>
-        </p:spPr>
-        <p:txBody>
-          <a:bodyPr wrap="square" anchor="ctr" lIns="0" rIns="0" tIns="0" bIns="0">
-            <a:spAutoFit/>
-          </a:bodyPr>
-          <a:lstStyle/>
-          <a:p>
-            <a:pPr algn="ctr">
-              <a:spcAft>
-                <a:spcPts val="0"/>
-              </a:spcAft>
-            </a:pPr>
-            <a:r>
-              <a:rPr sz="1300" b="1" i="0">
-                <a:solidFill>
-                  <a:srgbClr val="FFFFFF"/>
-                </a:solidFill>
-                <a:latin typeface="Arial"/>
-              </a:rPr>
-              <a:t>Where it runs</a:t>
-            </a:r>
-          </a:p>
-        </p:txBody>
-      </p:sp>
-      <p:sp>
-        <p:nvSpPr>
-          <p:cNvPr id="13" name="Rectangle 12"/>
-          <p:cNvSpPr/>
-          <p:nvPr/>
-        </p:nvSpPr>
-        <p:spPr>
-          <a:xfrm>
-            <a:off x="777240" y="2670048"/>
-            <a:ext cx="6766560" cy="420624"/>
-          </a:xfrm>
-          <a:prstGeom prst="rect">
-            <a:avLst/>
-          </a:prstGeom>
-          <a:solidFill>
-            <a:srgbClr val="F7F9FA"/>
-          </a:solidFill>
-          <a:ln w="6350">
-            <a:solidFill>
-              <a:srgbClr val="D8DEE4"/>
-            </a:solidFill>
-          </a:ln>
-          <a:effectLst/>
-        </p:spPr>
-        <p:style>
-          <a:lnRef idx="1">
-            <a:schemeClr val="accent1"/>
-          </a:lnRef>
-          <a:fillRef idx="3">
-            <a:schemeClr val="accent1"/>
-          </a:fillRef>
-          <a:effectRef idx="2">
-            <a:schemeClr val="accent1"/>
-          </a:effectRef>
-          <a:fontRef idx="minor">
-            <a:schemeClr val="lt1"/>
-          </a:fontRef>
-        </p:style>
-        <p:txBody>
-          <a:bodyPr rtlCol="0" anchor="ctr" wrap="square"/>
-          <a:lstStyle/>
-          <a:p>
-            <a:pPr algn="ctr"/>
-          </a:p>
-        </p:txBody>
-      </p:sp>
-      <p:sp>
-        <p:nvSpPr>
-          <p:cNvPr id="14" name="TextBox 13"/>
-          <p:cNvSpPr txBox="1"/>
-          <p:nvPr/>
-        </p:nvSpPr>
-        <p:spPr>
-          <a:xfrm>
-            <a:off x="905256" y="2670048"/>
-            <a:ext cx="2856585" cy="420624"/>
-          </a:xfrm>
-          <a:prstGeom prst="rect">
-            <a:avLst/>
-          </a:prstGeom>
-          <a:noFill/>
-        </p:spPr>
-        <p:txBody>
-          <a:bodyPr wrap="square" anchor="ctr" lIns="0" rIns="0" tIns="0" bIns="0">
-            <a:spAutoFit/>
-          </a:bodyPr>
-          <a:lstStyle/>
-          <a:p>
-            <a:pPr algn="l">
-              <a:spcAft>
-                <a:spcPts val="0"/>
-              </a:spcAft>
-            </a:pPr>
-            <a:r>
-              <a:rPr sz="1300" b="1" i="0">
-                <a:solidFill>
-                  <a:srgbClr val="12263A"/>
-                </a:solidFill>
-                <a:latin typeface="Arial"/>
-              </a:rPr>
-              <a:t>gpt-5.4 (low)</a:t>
-            </a:r>
-          </a:p>
-        </p:txBody>
-      </p:sp>
-      <p:sp>
-        <p:nvSpPr>
-          <p:cNvPr id="15" name="TextBox 14"/>
-          <p:cNvSpPr txBox="1"/>
-          <p:nvPr/>
-        </p:nvSpPr>
-        <p:spPr>
-          <a:xfrm>
-            <a:off x="4017873" y="2670048"/>
-            <a:ext cx="1570939" cy="420624"/>
-          </a:xfrm>
-          <a:prstGeom prst="rect">
-            <a:avLst/>
-          </a:prstGeom>
-          <a:noFill/>
-        </p:spPr>
-        <p:txBody>
-          <a:bodyPr wrap="square" anchor="ctr" lIns="0" rIns="0" tIns="0" bIns="0">
-            <a:spAutoFit/>
-          </a:bodyPr>
-          <a:lstStyle/>
-          <a:p>
-            <a:pPr algn="ctr">
-              <a:spcAft>
-                <a:spcPts val="0"/>
-              </a:spcAft>
-            </a:pPr>
-            <a:r>
-              <a:rPr sz="1300" b="0" i="0">
-                <a:solidFill>
-                  <a:srgbClr val="12263A"/>
-                </a:solidFill>
-                <a:latin typeface="Arial"/>
-              </a:rPr>
-              <a:t>90%</a:t>
-            </a:r>
-          </a:p>
-        </p:txBody>
-      </p:sp>
-      <p:sp>
-        <p:nvSpPr>
-          <p:cNvPr id="16" name="TextBox 15"/>
-          <p:cNvSpPr txBox="1"/>
-          <p:nvPr/>
-        </p:nvSpPr>
-        <p:spPr>
-          <a:xfrm>
-            <a:off x="5844844" y="2670048"/>
-            <a:ext cx="1570939" cy="420624"/>
-          </a:xfrm>
-          <a:prstGeom prst="rect">
-            <a:avLst/>
-          </a:prstGeom>
-          <a:noFill/>
-        </p:spPr>
-        <p:txBody>
-          <a:bodyPr wrap="square" anchor="ctr" lIns="0" rIns="0" tIns="0" bIns="0">
-            <a:spAutoFit/>
-          </a:bodyPr>
-          <a:lstStyle/>
-          <a:p>
-            <a:pPr algn="ctr">
-              <a:spcAft>
-                <a:spcPts val="0"/>
-              </a:spcAft>
-            </a:pPr>
-            <a:r>
-              <a:rPr sz="1300" b="0" i="0">
-                <a:solidFill>
-                  <a:srgbClr val="12263A"/>
-                </a:solidFill>
-                <a:latin typeface="Arial"/>
-              </a:rPr>
-              <a:t>hosted API</a:t>
-            </a:r>
-          </a:p>
-        </p:txBody>
-      </p:sp>
-      <p:sp>
-        <p:nvSpPr>
-          <p:cNvPr id="17" name="Rectangle 16"/>
-          <p:cNvSpPr/>
-          <p:nvPr/>
-        </p:nvSpPr>
-        <p:spPr>
-          <a:xfrm>
-            <a:off x="777240" y="3090672"/>
-            <a:ext cx="6766560" cy="420624"/>
-          </a:xfrm>
-          <a:prstGeom prst="rect">
-            <a:avLst/>
-          </a:prstGeom>
-          <a:solidFill>
-            <a:srgbClr val="FFFFFF"/>
-          </a:solidFill>
-          <a:ln w="6350">
-            <a:solidFill>
-              <a:srgbClr val="D8DEE4"/>
-            </a:solidFill>
-          </a:ln>
-          <a:effectLst/>
-        </p:spPr>
-        <p:style>
-          <a:lnRef idx="1">
-            <a:schemeClr val="accent1"/>
-          </a:lnRef>
-          <a:fillRef idx="3">
-            <a:schemeClr val="accent1"/>
-          </a:fillRef>
-          <a:effectRef idx="2">
-            <a:schemeClr val="accent1"/>
-          </a:effectRef>
-          <a:fontRef idx="minor">
-            <a:schemeClr val="lt1"/>
-          </a:fontRef>
-        </p:style>
-        <p:txBody>
-          <a:bodyPr rtlCol="0" anchor="ctr" wrap="square"/>
-          <a:lstStyle/>
-          <a:p>
-            <a:pPr algn="ctr"/>
-          </a:p>
-        </p:txBody>
-      </p:sp>
-      <p:sp>
-        <p:nvSpPr>
-          <p:cNvPr id="18" name="TextBox 17"/>
-          <p:cNvSpPr txBox="1"/>
-          <p:nvPr/>
-        </p:nvSpPr>
-        <p:spPr>
-          <a:xfrm>
-            <a:off x="905256" y="3090672"/>
-            <a:ext cx="2856585" cy="420624"/>
-          </a:xfrm>
-          <a:prstGeom prst="rect">
-            <a:avLst/>
-          </a:prstGeom>
-          <a:noFill/>
-        </p:spPr>
-        <p:txBody>
-          <a:bodyPr wrap="square" anchor="ctr" lIns="0" rIns="0" tIns="0" bIns="0">
-            <a:spAutoFit/>
-          </a:bodyPr>
-          <a:lstStyle/>
-          <a:p>
-            <a:pPr algn="l">
-              <a:spcAft>
-                <a:spcPts val="0"/>
-              </a:spcAft>
-            </a:pPr>
-            <a:r>
-              <a:rPr sz="1300" b="1" i="0">
-                <a:solidFill>
-                  <a:srgbClr val="12263A"/>
-                </a:solidFill>
-                <a:latin typeface="Arial"/>
-              </a:rPr>
-              <a:t>Qwen3-32B (32B)</a:t>
-            </a:r>
-          </a:p>
-        </p:txBody>
-      </p:sp>
-      <p:sp>
-        <p:nvSpPr>
-          <p:cNvPr id="19" name="TextBox 18"/>
-          <p:cNvSpPr txBox="1"/>
-          <p:nvPr/>
-        </p:nvSpPr>
-        <p:spPr>
-          <a:xfrm>
-            <a:off x="4017873" y="3090672"/>
-            <a:ext cx="1570939" cy="420624"/>
-          </a:xfrm>
-          <a:prstGeom prst="rect">
-            <a:avLst/>
-          </a:prstGeom>
-          <a:noFill/>
-        </p:spPr>
-        <p:txBody>
-          <a:bodyPr wrap="square" anchor="ctr" lIns="0" rIns="0" tIns="0" bIns="0">
-            <a:spAutoFit/>
-          </a:bodyPr>
-          <a:lstStyle/>
-          <a:p>
-            <a:pPr algn="ctr">
-              <a:spcAft>
-                <a:spcPts val="0"/>
-              </a:spcAft>
-            </a:pPr>
-            <a:r>
-              <a:rPr sz="1300" b="0" i="0">
-                <a:solidFill>
-                  <a:srgbClr val="12263A"/>
-                </a:solidFill>
-                <a:latin typeface="Arial"/>
-              </a:rPr>
-              <a:t>83%</a:t>
-            </a:r>
-          </a:p>
-        </p:txBody>
-      </p:sp>
-      <p:sp>
-        <p:nvSpPr>
-          <p:cNvPr id="20" name="TextBox 19"/>
-          <p:cNvSpPr txBox="1"/>
-          <p:nvPr/>
-        </p:nvSpPr>
-        <p:spPr>
-          <a:xfrm>
-            <a:off x="5844844" y="3090672"/>
-            <a:ext cx="1570939" cy="420624"/>
-          </a:xfrm>
-          <a:prstGeom prst="rect">
-            <a:avLst/>
-          </a:prstGeom>
-          <a:noFill/>
-        </p:spPr>
-        <p:txBody>
-          <a:bodyPr wrap="square" anchor="ctr" lIns="0" rIns="0" tIns="0" bIns="0">
-            <a:spAutoFit/>
-          </a:bodyPr>
-          <a:lstStyle/>
-          <a:p>
-            <a:pPr algn="ctr">
-              <a:spcAft>
-                <a:spcPts val="0"/>
-              </a:spcAft>
-            </a:pPr>
-            <a:r>
-              <a:rPr sz="1300" b="0" i="0">
-                <a:solidFill>
-                  <a:srgbClr val="12263A"/>
-                </a:solidFill>
-                <a:latin typeface="Arial"/>
-              </a:rPr>
-              <a:t>self-hosted</a:t>
-            </a:r>
-          </a:p>
-        </p:txBody>
-      </p:sp>
-      <p:sp>
-        <p:nvSpPr>
-          <p:cNvPr id="21" name="Rectangle 20"/>
-          <p:cNvSpPr/>
-          <p:nvPr/>
-        </p:nvSpPr>
-        <p:spPr>
-          <a:xfrm>
-            <a:off x="777240" y="3511296"/>
-            <a:ext cx="6766560" cy="420624"/>
-          </a:xfrm>
-          <a:prstGeom prst="rect">
-            <a:avLst/>
-          </a:prstGeom>
-          <a:solidFill>
-            <a:srgbClr val="F7F9FA"/>
-          </a:solidFill>
-          <a:ln w="6350">
-            <a:solidFill>
-              <a:srgbClr val="D8DEE4"/>
-            </a:solidFill>
-          </a:ln>
-          <a:effectLst/>
-        </p:spPr>
-        <p:style>
-          <a:lnRef idx="1">
-            <a:schemeClr val="accent1"/>
-          </a:lnRef>
-          <a:fillRef idx="3">
-            <a:schemeClr val="accent1"/>
-          </a:fillRef>
-          <a:effectRef idx="2">
-            <a:schemeClr val="accent1"/>
-          </a:effectRef>
-          <a:fontRef idx="minor">
-            <a:schemeClr val="lt1"/>
-          </a:fontRef>
-        </p:style>
-        <p:txBody>
-          <a:bodyPr rtlCol="0" anchor="ctr" wrap="square"/>
-          <a:lstStyle/>
-          <a:p>
-            <a:pPr algn="ctr"/>
-          </a:p>
-        </p:txBody>
-      </p:sp>
-      <p:sp>
-        <p:nvSpPr>
-          <p:cNvPr id="22" name="TextBox 21"/>
-          <p:cNvSpPr txBox="1"/>
-          <p:nvPr/>
-        </p:nvSpPr>
-        <p:spPr>
-          <a:xfrm>
-            <a:off x="905256" y="3511296"/>
-            <a:ext cx="2856585" cy="420624"/>
-          </a:xfrm>
-          <a:prstGeom prst="rect">
-            <a:avLst/>
-          </a:prstGeom>
-          <a:noFill/>
-        </p:spPr>
-        <p:txBody>
-          <a:bodyPr wrap="square" anchor="ctr" lIns="0" rIns="0" tIns="0" bIns="0">
-            <a:spAutoFit/>
-          </a:bodyPr>
-          <a:lstStyle/>
-          <a:p>
-            <a:pPr algn="l">
-              <a:spcAft>
-                <a:spcPts val="0"/>
-              </a:spcAft>
-            </a:pPr>
-            <a:r>
-              <a:rPr sz="1300" b="1" i="0">
-                <a:solidFill>
-                  <a:srgbClr val="12263A"/>
-                </a:solidFill>
-                <a:latin typeface="Arial"/>
-              </a:rPr>
-              <a:t>SmolLM3-3B, tuned</a:t>
-            </a:r>
-          </a:p>
-        </p:txBody>
-      </p:sp>
-      <p:sp>
-        <p:nvSpPr>
-          <p:cNvPr id="23" name="TextBox 22"/>
-          <p:cNvSpPr txBox="1"/>
-          <p:nvPr/>
-        </p:nvSpPr>
-        <p:spPr>
-          <a:xfrm>
-            <a:off x="4017873" y="3511296"/>
-            <a:ext cx="1570939" cy="420624"/>
-          </a:xfrm>
-          <a:prstGeom prst="rect">
-            <a:avLst/>
-          </a:prstGeom>
-          <a:noFill/>
-        </p:spPr>
-        <p:txBody>
-          <a:bodyPr wrap="square" anchor="ctr" lIns="0" rIns="0" tIns="0" bIns="0">
-            <a:spAutoFit/>
-          </a:bodyPr>
-          <a:lstStyle/>
-          <a:p>
-            <a:pPr algn="ctr">
-              <a:spcAft>
-                <a:spcPts val="0"/>
-              </a:spcAft>
-            </a:pPr>
-            <a:r>
-              <a:rPr sz="1300" b="0" i="0">
-                <a:solidFill>
-                  <a:srgbClr val="12263A"/>
-                </a:solidFill>
-                <a:latin typeface="Arial"/>
-              </a:rPr>
-              <a:t>81%</a:t>
-            </a:r>
-          </a:p>
-        </p:txBody>
-      </p:sp>
-      <p:sp>
-        <p:nvSpPr>
-          <p:cNvPr id="24" name="TextBox 23"/>
-          <p:cNvSpPr txBox="1"/>
-          <p:nvPr/>
-        </p:nvSpPr>
-        <p:spPr>
-          <a:xfrm>
-            <a:off x="5844844" y="3511296"/>
-            <a:ext cx="1570939" cy="420624"/>
-          </a:xfrm>
-          <a:prstGeom prst="rect">
-            <a:avLst/>
-          </a:prstGeom>
-          <a:noFill/>
-        </p:spPr>
-        <p:txBody>
-          <a:bodyPr wrap="square" anchor="ctr" lIns="0" rIns="0" tIns="0" bIns="0">
-            <a:spAutoFit/>
-          </a:bodyPr>
-          <a:lstStyle/>
-          <a:p>
-            <a:pPr algn="ctr">
-              <a:spcAft>
-                <a:spcPts val="0"/>
-              </a:spcAft>
-            </a:pPr>
-            <a:r>
-              <a:rPr sz="1300" b="0" i="0">
-                <a:solidFill>
-                  <a:srgbClr val="12263A"/>
-                </a:solidFill>
-                <a:latin typeface="Arial"/>
-              </a:rPr>
-              <a:t>self-hosted</a:t>
-            </a:r>
-          </a:p>
-        </p:txBody>
-      </p:sp>
-      <p:sp>
-        <p:nvSpPr>
-          <p:cNvPr id="25" name="Rectangle 24"/>
-          <p:cNvSpPr/>
-          <p:nvPr/>
-        </p:nvSpPr>
-        <p:spPr>
-          <a:xfrm>
-            <a:off x="777240" y="3931920"/>
-            <a:ext cx="6766560" cy="420624"/>
-          </a:xfrm>
-          <a:prstGeom prst="rect">
-            <a:avLst/>
-          </a:prstGeom>
-          <a:solidFill>
-            <a:srgbClr val="FFFFFF"/>
-          </a:solidFill>
-          <a:ln w="6350">
-            <a:solidFill>
-              <a:srgbClr val="D8DEE4"/>
-            </a:solidFill>
-          </a:ln>
-          <a:effectLst/>
-        </p:spPr>
-        <p:style>
-          <a:lnRef idx="1">
-            <a:schemeClr val="accent1"/>
-          </a:lnRef>
-          <a:fillRef idx="3">
-            <a:schemeClr val="accent1"/>
-          </a:fillRef>
-          <a:effectRef idx="2">
-            <a:schemeClr val="accent1"/>
-          </a:effectRef>
-          <a:fontRef idx="minor">
-            <a:schemeClr val="lt1"/>
-          </a:fontRef>
-        </p:style>
-        <p:txBody>
-          <a:bodyPr rtlCol="0" anchor="ctr" wrap="square"/>
-          <a:lstStyle/>
-          <a:p>
-            <a:pPr algn="ctr"/>
-          </a:p>
-        </p:txBody>
-      </p:sp>
-      <p:sp>
-        <p:nvSpPr>
-          <p:cNvPr id="26" name="TextBox 25"/>
-          <p:cNvSpPr txBox="1"/>
-          <p:nvPr/>
-        </p:nvSpPr>
-        <p:spPr>
-          <a:xfrm>
-            <a:off x="905256" y="3931920"/>
-            <a:ext cx="2856585" cy="420624"/>
-          </a:xfrm>
-          <a:prstGeom prst="rect">
-            <a:avLst/>
-          </a:prstGeom>
-          <a:noFill/>
-        </p:spPr>
-        <p:txBody>
-          <a:bodyPr wrap="square" anchor="ctr" lIns="0" rIns="0" tIns="0" bIns="0">
-            <a:spAutoFit/>
-          </a:bodyPr>
-          <a:lstStyle/>
-          <a:p>
-            <a:pPr algn="l">
-              <a:spcAft>
-                <a:spcPts val="0"/>
-              </a:spcAft>
-            </a:pPr>
-            <a:r>
-              <a:rPr sz="1300" b="1" i="0">
-                <a:solidFill>
-                  <a:srgbClr val="12263A"/>
-                </a:solidFill>
-                <a:latin typeface="Arial"/>
-              </a:rPr>
-              <a:t>SmolLM3-3B</a:t>
-            </a:r>
-          </a:p>
-        </p:txBody>
-      </p:sp>
-      <p:sp>
-        <p:nvSpPr>
-          <p:cNvPr id="27" name="TextBox 26"/>
-          <p:cNvSpPr txBox="1"/>
-          <p:nvPr/>
-        </p:nvSpPr>
-        <p:spPr>
-          <a:xfrm>
-            <a:off x="4017873" y="3931920"/>
-            <a:ext cx="1570939" cy="420624"/>
-          </a:xfrm>
-          <a:prstGeom prst="rect">
-            <a:avLst/>
-          </a:prstGeom>
-          <a:noFill/>
-        </p:spPr>
-        <p:txBody>
-          <a:bodyPr wrap="square" anchor="ctr" lIns="0" rIns="0" tIns="0" bIns="0">
-            <a:spAutoFit/>
-          </a:bodyPr>
-          <a:lstStyle/>
-          <a:p>
-            <a:pPr algn="ctr">
-              <a:spcAft>
-                <a:spcPts val="0"/>
-              </a:spcAft>
-            </a:pPr>
-            <a:r>
-              <a:rPr sz="1300" b="0" i="0">
-                <a:solidFill>
-                  <a:srgbClr val="12263A"/>
-                </a:solidFill>
-                <a:latin typeface="Arial"/>
-              </a:rPr>
-              <a:t>79%</a:t>
-            </a:r>
-          </a:p>
-        </p:txBody>
-      </p:sp>
-      <p:sp>
-        <p:nvSpPr>
-          <p:cNvPr id="28" name="TextBox 27"/>
-          <p:cNvSpPr txBox="1"/>
-          <p:nvPr/>
-        </p:nvSpPr>
-        <p:spPr>
-          <a:xfrm>
-            <a:off x="5844844" y="3931920"/>
-            <a:ext cx="1570939" cy="420624"/>
-          </a:xfrm>
-          <a:prstGeom prst="rect">
-            <a:avLst/>
-          </a:prstGeom>
-          <a:noFill/>
-        </p:spPr>
-        <p:txBody>
-          <a:bodyPr wrap="square" anchor="ctr" lIns="0" rIns="0" tIns="0" bIns="0">
-            <a:spAutoFit/>
-          </a:bodyPr>
-          <a:lstStyle/>
-          <a:p>
-            <a:pPr algn="ctr">
-              <a:spcAft>
-                <a:spcPts val="0"/>
-              </a:spcAft>
-            </a:pPr>
-            <a:r>
-              <a:rPr sz="1300" b="0" i="0">
-                <a:solidFill>
-                  <a:srgbClr val="12263A"/>
-                </a:solidFill>
-                <a:latin typeface="Arial"/>
-              </a:rPr>
-              <a:t>self-hosted</a:t>
-            </a:r>
-          </a:p>
-        </p:txBody>
-      </p:sp>
-      <p:sp>
-        <p:nvSpPr>
-          <p:cNvPr id="29" name="Rounded Rectangle 28"/>
-          <p:cNvSpPr/>
-          <p:nvPr/>
-        </p:nvSpPr>
-        <p:spPr>
-          <a:xfrm>
-            <a:off x="7909560" y="2249424"/>
-            <a:ext cx="3504895" cy="1627632"/>
+            <a:off x="8412480" y="2176272"/>
+            <a:ext cx="3001975" cy="1700784"/>
           </a:xfrm>
           <a:prstGeom prst="roundRect">
             <a:avLst/>
@@ -8601,14 +7812,14 @@
       </p:sp>
       <p:sp>
         <p:nvSpPr>
-          <p:cNvPr id="30" name="Rectangle 29"/>
+          <p:cNvPr id="11" name="Rectangle 10"/>
           <p:cNvSpPr/>
           <p:nvPr/>
         </p:nvSpPr>
         <p:spPr>
           <a:xfrm>
-            <a:off x="7909560" y="2249424"/>
-            <a:ext cx="50292" cy="1627632"/>
+            <a:off x="8412480" y="2176272"/>
+            <a:ext cx="50292" cy="1700784"/>
           </a:xfrm>
           <a:prstGeom prst="rect">
             <a:avLst/>
@@ -8645,14 +7856,14 @@
       </p:sp>
       <p:sp>
         <p:nvSpPr>
-          <p:cNvPr id="31" name="TextBox 30"/>
+          <p:cNvPr id="12" name="TextBox 11"/>
           <p:cNvSpPr txBox="1"/>
           <p:nvPr/>
         </p:nvSpPr>
         <p:spPr>
           <a:xfrm>
-            <a:off x="8147304" y="2414016"/>
-            <a:ext cx="3047695" cy="1298448"/>
+            <a:off x="8650224" y="2340864"/>
+            <a:ext cx="2544775" cy="1371600"/>
           </a:xfrm>
           <a:prstGeom prst="rect">
             <a:avLst/>
@@ -8703,14 +7914,14 @@
       </p:sp>
       <p:sp>
         <p:nvSpPr>
-          <p:cNvPr id="32" name="Rounded Rectangle 31"/>
+          <p:cNvPr id="13" name="Rounded Rectangle 12"/>
           <p:cNvSpPr/>
           <p:nvPr/>
         </p:nvSpPr>
         <p:spPr>
           <a:xfrm>
-            <a:off x="7909560" y="4005072"/>
-            <a:ext cx="3504895" cy="1627632"/>
+            <a:off x="8412480" y="4041648"/>
+            <a:ext cx="3001975" cy="1700784"/>
           </a:xfrm>
           <a:prstGeom prst="roundRect">
             <a:avLst/>
@@ -8747,14 +7958,14 @@
       </p:sp>
       <p:sp>
         <p:nvSpPr>
-          <p:cNvPr id="33" name="Rectangle 32"/>
+          <p:cNvPr id="14" name="Rectangle 13"/>
           <p:cNvSpPr/>
           <p:nvPr/>
         </p:nvSpPr>
         <p:spPr>
           <a:xfrm>
-            <a:off x="7909560" y="4005072"/>
-            <a:ext cx="50292" cy="1627632"/>
+            <a:off x="8412480" y="4041648"/>
+            <a:ext cx="50292" cy="1700784"/>
           </a:xfrm>
           <a:prstGeom prst="rect">
             <a:avLst/>
@@ -8791,14 +8002,14 @@
       </p:sp>
       <p:sp>
         <p:nvSpPr>
-          <p:cNvPr id="34" name="TextBox 33"/>
+          <p:cNvPr id="15" name="TextBox 14"/>
           <p:cNvSpPr txBox="1"/>
           <p:nvPr/>
         </p:nvSpPr>
         <p:spPr>
           <a:xfrm>
-            <a:off x="8147304" y="4169664"/>
-            <a:ext cx="3047695" cy="1298448"/>
+            <a:off x="8650224" y="4206240"/>
+            <a:ext cx="2544775" cy="1371600"/>
           </a:xfrm>
           <a:prstGeom prst="rect">
             <a:avLst/>
@@ -8842,7 +8053,7 @@
                 </a:solidFill>
                 <a:latin typeface="Arial"/>
               </a:rPr>
-              <a:t>Any guard can raise its catch rate by alarming more often. Holding the alarm rate fixed at 5% is what makes these four numbers comparable at all.</a:t>
+              <a:t>Any guard can raise its catch rate by alarming more often. Holding the alarm rate fixed at 5% is what makes every bar here comparable at all.</a:t>
             </a:r>
           </a:p>
         </p:txBody>
@@ -9151,165 +8362,30 @@
           </a:p>
         </p:txBody>
       </p:sp>
-      <p:sp>
-        <p:nvSpPr>
-          <p:cNvPr id="9" name="TextBox 8"/>
-          <p:cNvSpPr txBox="1"/>
-          <p:nvPr/>
-        </p:nvSpPr>
-        <p:spPr>
-          <a:xfrm>
-            <a:off x="777240" y="2212848"/>
-            <a:ext cx="5112867" cy="2651760"/>
-          </a:xfrm>
-          <a:prstGeom prst="rect">
-            <a:avLst/>
-          </a:prstGeom>
-          <a:noFill/>
-        </p:spPr>
-        <p:txBody>
-          <a:bodyPr wrap="square" anchor="t" lIns="0" rIns="0" tIns="0" bIns="0">
-            <a:spAutoFit/>
-          </a:bodyPr>
-          <a:lstStyle/>
-          <a:p>
-            <a:pPr algn="l">
-              <a:spcAft>
-                <a:spcPts val="1200"/>
-              </a:spcAft>
-            </a:pPr>
-            <a:r>
-              <a:rPr sz="1450" b="1" i="0">
-                <a:solidFill>
-                  <a:srgbClr val="A02128"/>
-                </a:solidFill>
-                <a:latin typeface="Arial"/>
-              </a:rPr>
-              <a:t>—  </a:t>
-            </a:r>
-            <a:r>
-              <a:rPr sz="1450" b="1" i="0">
-                <a:solidFill>
-                  <a:srgbClr val="12263A"/>
-                </a:solidFill>
-                <a:latin typeface="Arial"/>
-              </a:rPr>
-              <a:t>Best case +0.122. </a:t>
-            </a:r>
-            <a:r>
-              <a:rPr sz="1450" b="0" i="0">
-                <a:solidFill>
-                  <a:srgbClr val="5A6B7C"/>
-                </a:solidFill>
-                <a:latin typeface="Arial"/>
-              </a:rPr>
-              <a:t>On SmolLM2-1.7B, our weakest model, tuning helped substantially.</a:t>
-            </a:r>
-          </a:p>
-          <a:p>
-            <a:pPr algn="l">
-              <a:spcAft>
-                <a:spcPts val="1200"/>
-              </a:spcAft>
-            </a:pPr>
-            <a:r>
-              <a:rPr sz="1450" b="1" i="0">
-                <a:solidFill>
-                  <a:srgbClr val="A02128"/>
-                </a:solidFill>
-                <a:latin typeface="Arial"/>
-              </a:rPr>
-              <a:t>—  </a:t>
-            </a:r>
-            <a:r>
-              <a:rPr sz="1450" b="1" i="0">
-                <a:solidFill>
-                  <a:srgbClr val="12263A"/>
-                </a:solidFill>
-                <a:latin typeface="Arial"/>
-              </a:rPr>
-              <a:t>Worst case -0.059. </a:t>
-            </a:r>
-            <a:r>
-              <a:rPr sz="1450" b="0" i="0">
-                <a:solidFill>
-                  <a:srgbClr val="5A6B7C"/>
-                </a:solidFill>
-                <a:latin typeface="Arial"/>
-              </a:rPr>
-              <a:t>On SmolLM3-3B, one of our strongest, it took accuracy away.</a:t>
-            </a:r>
-          </a:p>
-          <a:p>
-            <a:pPr algn="l">
-              <a:spcAft>
-                <a:spcPts val="1200"/>
-              </a:spcAft>
-            </a:pPr>
-            <a:r>
-              <a:rPr sz="1450" b="1" i="0">
-                <a:solidFill>
-                  <a:srgbClr val="A02128"/>
-                </a:solidFill>
-                <a:latin typeface="Arial"/>
-              </a:rPr>
-              <a:t>—  </a:t>
-            </a:r>
-            <a:r>
-              <a:rPr sz="1450" b="1" i="0">
-                <a:solidFill>
-                  <a:srgbClr val="12263A"/>
-                </a:solidFill>
-                <a:latin typeface="Arial"/>
-              </a:rPr>
-              <a:t>4 of 6 models got worse. </a:t>
-            </a:r>
-            <a:r>
-              <a:rPr sz="1450" b="0" i="0">
-                <a:solidFill>
-                  <a:srgbClr val="5A6B7C"/>
-                </a:solidFill>
-                <a:latin typeface="Arial"/>
-              </a:rPr>
-              <a:t>The average across all of them is +0.005 — close to zero, and it hides swings ten times its own size.</a:t>
-            </a:r>
-          </a:p>
-          <a:p>
-            <a:pPr algn="l">
-              <a:spcAft>
-                <a:spcPts val="1200"/>
-              </a:spcAft>
-            </a:pPr>
-            <a:r>
-              <a:rPr sz="1450" b="1" i="0">
-                <a:solidFill>
-                  <a:srgbClr val="A02128"/>
-                </a:solidFill>
-                <a:latin typeface="Arial"/>
-              </a:rPr>
-              <a:t>—  </a:t>
-            </a:r>
-            <a:r>
-              <a:rPr sz="1450" b="1" i="0">
-                <a:solidFill>
-                  <a:srgbClr val="12263A"/>
-                </a:solidFill>
-                <a:latin typeface="Arial"/>
-              </a:rPr>
-              <a:t>Best tuned result still loses. </a:t>
-            </a:r>
-            <a:r>
-              <a:rPr sz="1450" b="0" i="0">
-                <a:solidFill>
-                  <a:srgbClr val="5A6B7C"/>
-                </a:solidFill>
-                <a:latin typeface="Arial"/>
-              </a:rPr>
-              <a:t>Qwen3-32B tuned reaches 81%, against 90% hosted.</a:t>
-            </a:r>
-          </a:p>
-        </p:txBody>
-      </p:sp>
+      <p:pic>
+        <p:nvPicPr>
+          <p:cNvPr id="9" name="Picture 8" descr="exec_tax.png"/>
+          <p:cNvPicPr>
+            <a:picLocks noChangeAspect="1"/>
+          </p:cNvPicPr>
+          <p:nvPr/>
+        </p:nvPicPr>
+        <p:blipFill>
+          <a:blip r:embed="rId2"/>
+          <a:stretch>
+            <a:fillRect/>
+          </a:stretch>
+        </p:blipFill>
+        <p:spPr>
+          <a:xfrm>
+            <a:off x="777240" y="2103120"/>
+            <a:ext cx="6953290" cy="3840480"/>
+          </a:xfrm>
+          <a:prstGeom prst="rect">
+            <a:avLst/>
+          </a:prstGeom>
+        </p:spPr>
+      </p:pic>
       <p:sp>
         <p:nvSpPr>
           <p:cNvPr id="10" name="Rounded Rectangle 9"/>
@@ -9318,8 +8394,8 @@
         </p:nvSpPr>
         <p:spPr>
           <a:xfrm>
-            <a:off x="6301587" y="2212848"/>
-            <a:ext cx="5112867" cy="1645920"/>
+            <a:off x="8503919" y="2176272"/>
+            <a:ext cx="2910536" cy="1828800"/>
           </a:xfrm>
           <a:prstGeom prst="roundRect">
             <a:avLst/>
@@ -9362,8 +8438,8 @@
         </p:nvSpPr>
         <p:spPr>
           <a:xfrm>
-            <a:off x="6301587" y="2212848"/>
-            <a:ext cx="50292" cy="1645920"/>
+            <a:off x="8503919" y="2176272"/>
+            <a:ext cx="50292" cy="1828800"/>
           </a:xfrm>
           <a:prstGeom prst="rect">
             <a:avLst/>
@@ -9406,8 +8482,8 @@
         </p:nvSpPr>
         <p:spPr>
           <a:xfrm>
-            <a:off x="6539331" y="2377440"/>
-            <a:ext cx="4655667" cy="1316736"/>
+            <a:off x="8741663" y="2340864"/>
+            <a:ext cx="2453336" cy="1499616"/>
           </a:xfrm>
           <a:prstGeom prst="rect">
             <a:avLst/>
@@ -9451,7 +8527,7 @@
                 </a:solidFill>
                 <a:latin typeface="Arial"/>
               </a:rPr>
-              <a:t>Fine-tuning teaches a model the traffic you trained it on and costs it accuracy on traffic you did not. The stronger the starting model, the less it gains and the more it loses.</a:t>
+              <a:t>Fine-tuning teaches a model the traffic you trained it on and costs it accuracy on traffic you did not. Read the chart downward: the blue gain shrinks and the red cost grows as the starting model gets stronger.</a:t>
             </a:r>
           </a:p>
         </p:txBody>
@@ -9464,8 +8540,8 @@
         </p:nvSpPr>
         <p:spPr>
           <a:xfrm>
-            <a:off x="6301587" y="3986784"/>
-            <a:ext cx="5112867" cy="1645920"/>
+            <a:off x="8503919" y="4169664"/>
+            <a:ext cx="2910536" cy="1572768"/>
           </a:xfrm>
           <a:prstGeom prst="roundRect">
             <a:avLst/>
@@ -9508,8 +8584,8 @@
         </p:nvSpPr>
         <p:spPr>
           <a:xfrm>
-            <a:off x="6301587" y="3986784"/>
-            <a:ext cx="50292" cy="1645920"/>
+            <a:off x="8503919" y="4169664"/>
+            <a:ext cx="50292" cy="1572768"/>
           </a:xfrm>
           <a:prstGeom prst="rect">
             <a:avLst/>
@@ -9552,8 +8628,8 @@
         </p:nvSpPr>
         <p:spPr>
           <a:xfrm>
-            <a:off x="6539331" y="4151376"/>
-            <a:ext cx="4655667" cy="1316736"/>
+            <a:off x="8741663" y="4334256"/>
+            <a:ext cx="2453336" cy="1243584"/>
           </a:xfrm>
           <a:prstGeom prst="rect">
             <a:avLst/>
@@ -9597,7 +8673,7 @@
                 </a:solidFill>
                 <a:latin typeface="Arial"/>
               </a:rPr>
-              <a:t>Budgeting a tuning project to close a vendor gap is not supported by this evidence. Tuning is worth doing to rescue a weak model, not to beat a strong one.</a:t>
+              <a:t>Budgeting a tuning project to close a vendor gap is not supported here. The best tuned result anywhere (81%) still loses to hosted (90%).</a:t>
             </a:r>
           </a:p>
         </p:txBody>
@@ -9906,50 +8982,30 @@
           </a:p>
         </p:txBody>
       </p:sp>
-      <p:sp>
-        <p:nvSpPr>
-          <p:cNvPr id="9" name="Rectangle 8"/>
-          <p:cNvSpPr/>
-          <p:nvPr/>
-        </p:nvSpPr>
-        <p:spPr>
-          <a:xfrm>
-            <a:off x="777240" y="2249424"/>
-            <a:ext cx="6400800" cy="420624"/>
-          </a:xfrm>
-          <a:prstGeom prst="rect">
-            <a:avLst/>
-          </a:prstGeom>
-          <a:solidFill>
-            <a:srgbClr val="12263A"/>
-          </a:solidFill>
-          <a:ln>
-            <a:noFill/>
-          </a:ln>
-          <a:effectLst/>
-        </p:spPr>
-        <p:style>
-          <a:lnRef idx="1">
-            <a:schemeClr val="accent1"/>
-          </a:lnRef>
-          <a:fillRef idx="3">
-            <a:schemeClr val="accent1"/>
-          </a:fillRef>
-          <a:effectRef idx="2">
-            <a:schemeClr val="accent1"/>
-          </a:effectRef>
-          <a:fontRef idx="minor">
-            <a:schemeClr val="lt1"/>
-          </a:fontRef>
-        </p:style>
-        <p:txBody>
-          <a:bodyPr rtlCol="0" anchor="ctr" wrap="square"/>
-          <a:lstStyle/>
-          <a:p>
-            <a:pPr algn="ctr"/>
-          </a:p>
-        </p:txBody>
-      </p:sp>
+      <p:pic>
+        <p:nvPicPr>
+          <p:cNvPr id="9" name="Picture 8" descr="exec_scale.png"/>
+          <p:cNvPicPr>
+            <a:picLocks noChangeAspect="1"/>
+          </p:cNvPicPr>
+          <p:nvPr/>
+        </p:nvPicPr>
+        <p:blipFill>
+          <a:blip r:embed="rId2"/>
+          <a:stretch>
+            <a:fillRect/>
+          </a:stretch>
+        </p:blipFill>
+        <p:spPr>
+          <a:xfrm>
+            <a:off x="777240" y="2066544"/>
+            <a:ext cx="5864232" cy="2788920"/>
+          </a:xfrm>
+          <a:prstGeom prst="rect">
+            <a:avLst/>
+          </a:prstGeom>
+        </p:spPr>
+      </p:pic>
       <p:sp>
         <p:nvSpPr>
           <p:cNvPr id="10" name="TextBox 9"/>
@@ -9958,777 +9014,8 @@
         </p:nvSpPr>
         <p:spPr>
           <a:xfrm>
-            <a:off x="905256" y="2249424"/>
-            <a:ext cx="2688336" cy="420624"/>
-          </a:xfrm>
-          <a:prstGeom prst="rect">
-            <a:avLst/>
-          </a:prstGeom>
-          <a:noFill/>
-        </p:spPr>
-        <p:txBody>
-          <a:bodyPr wrap="square" anchor="ctr" lIns="0" rIns="0" tIns="0" bIns="0">
-            <a:spAutoFit/>
-          </a:bodyPr>
-          <a:lstStyle/>
-          <a:p>
-            <a:pPr algn="l">
-              <a:spcAft>
-                <a:spcPts val="0"/>
-              </a:spcAft>
-            </a:pPr>
-            <a:r>
-              <a:rPr sz="1300" b="1" i="0">
-                <a:solidFill>
-                  <a:srgbClr val="FFFFFF"/>
-                </a:solidFill>
-                <a:latin typeface="Arial"/>
-              </a:rPr>
-              <a:t>Open model</a:t>
-            </a:r>
-          </a:p>
-        </p:txBody>
-      </p:sp>
-      <p:sp>
-        <p:nvSpPr>
-          <p:cNvPr id="11" name="TextBox 10"/>
-          <p:cNvSpPr txBox="1"/>
-          <p:nvPr/>
-        </p:nvSpPr>
-        <p:spPr>
-          <a:xfrm>
-            <a:off x="3849624" y="2249424"/>
-            <a:ext cx="1280160" cy="420624"/>
-          </a:xfrm>
-          <a:prstGeom prst="rect">
-            <a:avLst/>
-          </a:prstGeom>
-          <a:noFill/>
-        </p:spPr>
-        <p:txBody>
-          <a:bodyPr wrap="square" anchor="ctr" lIns="0" rIns="0" tIns="0" bIns="0">
-            <a:spAutoFit/>
-          </a:bodyPr>
-          <a:lstStyle/>
-          <a:p>
-            <a:pPr algn="ctr">
-              <a:spcAft>
-                <a:spcPts val="0"/>
-              </a:spcAft>
-            </a:pPr>
-            <a:r>
-              <a:rPr sz="1300" b="1" i="0">
-                <a:solidFill>
-                  <a:srgbClr val="FFFFFF"/>
-                </a:solidFill>
-                <a:latin typeface="Arial"/>
-              </a:rPr>
-              <a:t>Size</a:t>
-            </a:r>
-          </a:p>
-        </p:txBody>
-      </p:sp>
-      <p:sp>
-        <p:nvSpPr>
-          <p:cNvPr id="12" name="TextBox 11"/>
-          <p:cNvSpPr txBox="1"/>
-          <p:nvPr/>
-        </p:nvSpPr>
-        <p:spPr>
-          <a:xfrm>
-            <a:off x="5385816" y="2249424"/>
-            <a:ext cx="1664208" cy="420624"/>
-          </a:xfrm>
-          <a:prstGeom prst="rect">
-            <a:avLst/>
-          </a:prstGeom>
-          <a:noFill/>
-        </p:spPr>
-        <p:txBody>
-          <a:bodyPr wrap="square" anchor="ctr" lIns="0" rIns="0" tIns="0" bIns="0">
-            <a:spAutoFit/>
-          </a:bodyPr>
-          <a:lstStyle/>
-          <a:p>
-            <a:pPr algn="ctr">
-              <a:spcAft>
-                <a:spcPts val="0"/>
-              </a:spcAft>
-            </a:pPr>
-            <a:r>
-              <a:rPr sz="1300" b="1" i="0">
-                <a:solidFill>
-                  <a:srgbClr val="FFFFFF"/>
-                </a:solidFill>
-                <a:latin typeface="Arial"/>
-              </a:rPr>
-              <a:t>Catch rate</a:t>
-            </a:r>
-          </a:p>
-        </p:txBody>
-      </p:sp>
-      <p:sp>
-        <p:nvSpPr>
-          <p:cNvPr id="13" name="Rectangle 12"/>
-          <p:cNvSpPr/>
-          <p:nvPr/>
-        </p:nvSpPr>
-        <p:spPr>
-          <a:xfrm>
-            <a:off x="777240" y="2670048"/>
-            <a:ext cx="6400800" cy="420624"/>
-          </a:xfrm>
-          <a:prstGeom prst="rect">
-            <a:avLst/>
-          </a:prstGeom>
-          <a:solidFill>
-            <a:srgbClr val="F7F9FA"/>
-          </a:solidFill>
-          <a:ln w="6350">
-            <a:solidFill>
-              <a:srgbClr val="D8DEE4"/>
-            </a:solidFill>
-          </a:ln>
-          <a:effectLst/>
-        </p:spPr>
-        <p:style>
-          <a:lnRef idx="1">
-            <a:schemeClr val="accent1"/>
-          </a:lnRef>
-          <a:fillRef idx="3">
-            <a:schemeClr val="accent1"/>
-          </a:fillRef>
-          <a:effectRef idx="2">
-            <a:schemeClr val="accent1"/>
-          </a:effectRef>
-          <a:fontRef idx="minor">
-            <a:schemeClr val="lt1"/>
-          </a:fontRef>
-        </p:style>
-        <p:txBody>
-          <a:bodyPr rtlCol="0" anchor="ctr" wrap="square"/>
-          <a:lstStyle/>
-          <a:p>
-            <a:pPr algn="ctr"/>
-          </a:p>
-        </p:txBody>
-      </p:sp>
-      <p:sp>
-        <p:nvSpPr>
-          <p:cNvPr id="14" name="TextBox 13"/>
-          <p:cNvSpPr txBox="1"/>
-          <p:nvPr/>
-        </p:nvSpPr>
-        <p:spPr>
-          <a:xfrm>
-            <a:off x="905256" y="2670048"/>
-            <a:ext cx="2688336" cy="420624"/>
-          </a:xfrm>
-          <a:prstGeom prst="rect">
-            <a:avLst/>
-          </a:prstGeom>
-          <a:noFill/>
-        </p:spPr>
-        <p:txBody>
-          <a:bodyPr wrap="square" anchor="ctr" lIns="0" rIns="0" tIns="0" bIns="0">
-            <a:spAutoFit/>
-          </a:bodyPr>
-          <a:lstStyle/>
-          <a:p>
-            <a:pPr algn="l">
-              <a:spcAft>
-                <a:spcPts val="0"/>
-              </a:spcAft>
-            </a:pPr>
-            <a:r>
-              <a:rPr sz="1300" b="1" i="0">
-                <a:solidFill>
-                  <a:srgbClr val="12263A"/>
-                </a:solidFill>
-                <a:latin typeface="Arial"/>
-              </a:rPr>
-              <a:t>Qwen3-4B</a:t>
-            </a:r>
-          </a:p>
-        </p:txBody>
-      </p:sp>
-      <p:sp>
-        <p:nvSpPr>
-          <p:cNvPr id="15" name="TextBox 14"/>
-          <p:cNvSpPr txBox="1"/>
-          <p:nvPr/>
-        </p:nvSpPr>
-        <p:spPr>
-          <a:xfrm>
-            <a:off x="3849624" y="2670048"/>
-            <a:ext cx="1280160" cy="420624"/>
-          </a:xfrm>
-          <a:prstGeom prst="rect">
-            <a:avLst/>
-          </a:prstGeom>
-          <a:noFill/>
-        </p:spPr>
-        <p:txBody>
-          <a:bodyPr wrap="square" anchor="ctr" lIns="0" rIns="0" tIns="0" bIns="0">
-            <a:spAutoFit/>
-          </a:bodyPr>
-          <a:lstStyle/>
-          <a:p>
-            <a:pPr algn="ctr">
-              <a:spcAft>
-                <a:spcPts val="0"/>
-              </a:spcAft>
-            </a:pPr>
-            <a:r>
-              <a:rPr sz="1300" b="0" i="0">
-                <a:solidFill>
-                  <a:srgbClr val="12263A"/>
-                </a:solidFill>
-                <a:latin typeface="Arial"/>
-              </a:rPr>
-              <a:t>4B</a:t>
-            </a:r>
-          </a:p>
-        </p:txBody>
-      </p:sp>
-      <p:sp>
-        <p:nvSpPr>
-          <p:cNvPr id="16" name="TextBox 15"/>
-          <p:cNvSpPr txBox="1"/>
-          <p:nvPr/>
-        </p:nvSpPr>
-        <p:spPr>
-          <a:xfrm>
-            <a:off x="5385816" y="2670048"/>
-            <a:ext cx="1664208" cy="420624"/>
-          </a:xfrm>
-          <a:prstGeom prst="rect">
-            <a:avLst/>
-          </a:prstGeom>
-          <a:noFill/>
-        </p:spPr>
-        <p:txBody>
-          <a:bodyPr wrap="square" anchor="ctr" lIns="0" rIns="0" tIns="0" bIns="0">
-            <a:spAutoFit/>
-          </a:bodyPr>
-          <a:lstStyle/>
-          <a:p>
-            <a:pPr algn="ctr">
-              <a:spcAft>
-                <a:spcPts val="0"/>
-              </a:spcAft>
-            </a:pPr>
-            <a:r>
-              <a:rPr sz="1300" b="0" i="0">
-                <a:solidFill>
-                  <a:srgbClr val="12263A"/>
-                </a:solidFill>
-                <a:latin typeface="Arial"/>
-              </a:rPr>
-              <a:t>77%</a:t>
-            </a:r>
-          </a:p>
-        </p:txBody>
-      </p:sp>
-      <p:sp>
-        <p:nvSpPr>
-          <p:cNvPr id="17" name="Rectangle 16"/>
-          <p:cNvSpPr/>
-          <p:nvPr/>
-        </p:nvSpPr>
-        <p:spPr>
-          <a:xfrm>
-            <a:off x="777240" y="3090672"/>
-            <a:ext cx="6400800" cy="420624"/>
-          </a:xfrm>
-          <a:prstGeom prst="rect">
-            <a:avLst/>
-          </a:prstGeom>
-          <a:solidFill>
-            <a:srgbClr val="FFFFFF"/>
-          </a:solidFill>
-          <a:ln w="6350">
-            <a:solidFill>
-              <a:srgbClr val="D8DEE4"/>
-            </a:solidFill>
-          </a:ln>
-          <a:effectLst/>
-        </p:spPr>
-        <p:style>
-          <a:lnRef idx="1">
-            <a:schemeClr val="accent1"/>
-          </a:lnRef>
-          <a:fillRef idx="3">
-            <a:schemeClr val="accent1"/>
-          </a:fillRef>
-          <a:effectRef idx="2">
-            <a:schemeClr val="accent1"/>
-          </a:effectRef>
-          <a:fontRef idx="minor">
-            <a:schemeClr val="lt1"/>
-          </a:fontRef>
-        </p:style>
-        <p:txBody>
-          <a:bodyPr rtlCol="0" anchor="ctr" wrap="square"/>
-          <a:lstStyle/>
-          <a:p>
-            <a:pPr algn="ctr"/>
-          </a:p>
-        </p:txBody>
-      </p:sp>
-      <p:sp>
-        <p:nvSpPr>
-          <p:cNvPr id="18" name="TextBox 17"/>
-          <p:cNvSpPr txBox="1"/>
-          <p:nvPr/>
-        </p:nvSpPr>
-        <p:spPr>
-          <a:xfrm>
-            <a:off x="905256" y="3090672"/>
-            <a:ext cx="2688336" cy="420624"/>
-          </a:xfrm>
-          <a:prstGeom prst="rect">
-            <a:avLst/>
-          </a:prstGeom>
-          <a:noFill/>
-        </p:spPr>
-        <p:txBody>
-          <a:bodyPr wrap="square" anchor="ctr" lIns="0" rIns="0" tIns="0" bIns="0">
-            <a:spAutoFit/>
-          </a:bodyPr>
-          <a:lstStyle/>
-          <a:p>
-            <a:pPr algn="l">
-              <a:spcAft>
-                <a:spcPts val="0"/>
-              </a:spcAft>
-            </a:pPr>
-            <a:r>
-              <a:rPr sz="1300" b="1" i="0">
-                <a:solidFill>
-                  <a:srgbClr val="12263A"/>
-                </a:solidFill>
-                <a:latin typeface="Arial"/>
-              </a:rPr>
-              <a:t>Qwen3-8B</a:t>
-            </a:r>
-          </a:p>
-        </p:txBody>
-      </p:sp>
-      <p:sp>
-        <p:nvSpPr>
-          <p:cNvPr id="19" name="TextBox 18"/>
-          <p:cNvSpPr txBox="1"/>
-          <p:nvPr/>
-        </p:nvSpPr>
-        <p:spPr>
-          <a:xfrm>
-            <a:off x="3849624" y="3090672"/>
-            <a:ext cx="1280160" cy="420624"/>
-          </a:xfrm>
-          <a:prstGeom prst="rect">
-            <a:avLst/>
-          </a:prstGeom>
-          <a:noFill/>
-        </p:spPr>
-        <p:txBody>
-          <a:bodyPr wrap="square" anchor="ctr" lIns="0" rIns="0" tIns="0" bIns="0">
-            <a:spAutoFit/>
-          </a:bodyPr>
-          <a:lstStyle/>
-          <a:p>
-            <a:pPr algn="ctr">
-              <a:spcAft>
-                <a:spcPts val="0"/>
-              </a:spcAft>
-            </a:pPr>
-            <a:r>
-              <a:rPr sz="1300" b="0" i="0">
-                <a:solidFill>
-                  <a:srgbClr val="12263A"/>
-                </a:solidFill>
-                <a:latin typeface="Arial"/>
-              </a:rPr>
-              <a:t>8B</a:t>
-            </a:r>
-          </a:p>
-        </p:txBody>
-      </p:sp>
-      <p:sp>
-        <p:nvSpPr>
-          <p:cNvPr id="20" name="TextBox 19"/>
-          <p:cNvSpPr txBox="1"/>
-          <p:nvPr/>
-        </p:nvSpPr>
-        <p:spPr>
-          <a:xfrm>
-            <a:off x="5385816" y="3090672"/>
-            <a:ext cx="1664208" cy="420624"/>
-          </a:xfrm>
-          <a:prstGeom prst="rect">
-            <a:avLst/>
-          </a:prstGeom>
-          <a:noFill/>
-        </p:spPr>
-        <p:txBody>
-          <a:bodyPr wrap="square" anchor="ctr" lIns="0" rIns="0" tIns="0" bIns="0">
-            <a:spAutoFit/>
-          </a:bodyPr>
-          <a:lstStyle/>
-          <a:p>
-            <a:pPr algn="ctr">
-              <a:spcAft>
-                <a:spcPts val="0"/>
-              </a:spcAft>
-            </a:pPr>
-            <a:r>
-              <a:rPr sz="1300" b="0" i="0">
-                <a:solidFill>
-                  <a:srgbClr val="12263A"/>
-                </a:solidFill>
-                <a:latin typeface="Arial"/>
-              </a:rPr>
-              <a:t>75%</a:t>
-            </a:r>
-          </a:p>
-        </p:txBody>
-      </p:sp>
-      <p:sp>
-        <p:nvSpPr>
-          <p:cNvPr id="21" name="Rectangle 20"/>
-          <p:cNvSpPr/>
-          <p:nvPr/>
-        </p:nvSpPr>
-        <p:spPr>
-          <a:xfrm>
-            <a:off x="777240" y="3511296"/>
-            <a:ext cx="6400800" cy="420624"/>
-          </a:xfrm>
-          <a:prstGeom prst="rect">
-            <a:avLst/>
-          </a:prstGeom>
-          <a:solidFill>
-            <a:srgbClr val="F7F9FA"/>
-          </a:solidFill>
-          <a:ln w="6350">
-            <a:solidFill>
-              <a:srgbClr val="D8DEE4"/>
-            </a:solidFill>
-          </a:ln>
-          <a:effectLst/>
-        </p:spPr>
-        <p:style>
-          <a:lnRef idx="1">
-            <a:schemeClr val="accent1"/>
-          </a:lnRef>
-          <a:fillRef idx="3">
-            <a:schemeClr val="accent1"/>
-          </a:fillRef>
-          <a:effectRef idx="2">
-            <a:schemeClr val="accent1"/>
-          </a:effectRef>
-          <a:fontRef idx="minor">
-            <a:schemeClr val="lt1"/>
-          </a:fontRef>
-        </p:style>
-        <p:txBody>
-          <a:bodyPr rtlCol="0" anchor="ctr" wrap="square"/>
-          <a:lstStyle/>
-          <a:p>
-            <a:pPr algn="ctr"/>
-          </a:p>
-        </p:txBody>
-      </p:sp>
-      <p:sp>
-        <p:nvSpPr>
-          <p:cNvPr id="22" name="TextBox 21"/>
-          <p:cNvSpPr txBox="1"/>
-          <p:nvPr/>
-        </p:nvSpPr>
-        <p:spPr>
-          <a:xfrm>
-            <a:off x="905256" y="3511296"/>
-            <a:ext cx="2688336" cy="420624"/>
-          </a:xfrm>
-          <a:prstGeom prst="rect">
-            <a:avLst/>
-          </a:prstGeom>
-          <a:noFill/>
-        </p:spPr>
-        <p:txBody>
-          <a:bodyPr wrap="square" anchor="ctr" lIns="0" rIns="0" tIns="0" bIns="0">
-            <a:spAutoFit/>
-          </a:bodyPr>
-          <a:lstStyle/>
-          <a:p>
-            <a:pPr algn="l">
-              <a:spcAft>
-                <a:spcPts val="0"/>
-              </a:spcAft>
-            </a:pPr>
-            <a:r>
-              <a:rPr sz="1300" b="1" i="0">
-                <a:solidFill>
-                  <a:srgbClr val="12263A"/>
-                </a:solidFill>
-                <a:latin typeface="Arial"/>
-              </a:rPr>
-              <a:t>Qwen3-32B</a:t>
-            </a:r>
-          </a:p>
-        </p:txBody>
-      </p:sp>
-      <p:sp>
-        <p:nvSpPr>
-          <p:cNvPr id="23" name="TextBox 22"/>
-          <p:cNvSpPr txBox="1"/>
-          <p:nvPr/>
-        </p:nvSpPr>
-        <p:spPr>
-          <a:xfrm>
-            <a:off x="3849624" y="3511296"/>
-            <a:ext cx="1280160" cy="420624"/>
-          </a:xfrm>
-          <a:prstGeom prst="rect">
-            <a:avLst/>
-          </a:prstGeom>
-          <a:noFill/>
-        </p:spPr>
-        <p:txBody>
-          <a:bodyPr wrap="square" anchor="ctr" lIns="0" rIns="0" tIns="0" bIns="0">
-            <a:spAutoFit/>
-          </a:bodyPr>
-          <a:lstStyle/>
-          <a:p>
-            <a:pPr algn="ctr">
-              <a:spcAft>
-                <a:spcPts val="0"/>
-              </a:spcAft>
-            </a:pPr>
-            <a:r>
-              <a:rPr sz="1300" b="0" i="0">
-                <a:solidFill>
-                  <a:srgbClr val="12263A"/>
-                </a:solidFill>
-                <a:latin typeface="Arial"/>
-              </a:rPr>
-              <a:t>32B</a:t>
-            </a:r>
-          </a:p>
-        </p:txBody>
-      </p:sp>
-      <p:sp>
-        <p:nvSpPr>
-          <p:cNvPr id="24" name="TextBox 23"/>
-          <p:cNvSpPr txBox="1"/>
-          <p:nvPr/>
-        </p:nvSpPr>
-        <p:spPr>
-          <a:xfrm>
-            <a:off x="5385816" y="3511296"/>
-            <a:ext cx="1664208" cy="420624"/>
-          </a:xfrm>
-          <a:prstGeom prst="rect">
-            <a:avLst/>
-          </a:prstGeom>
-          <a:noFill/>
-        </p:spPr>
-        <p:txBody>
-          <a:bodyPr wrap="square" anchor="ctr" lIns="0" rIns="0" tIns="0" bIns="0">
-            <a:spAutoFit/>
-          </a:bodyPr>
-          <a:lstStyle/>
-          <a:p>
-            <a:pPr algn="ctr">
-              <a:spcAft>
-                <a:spcPts val="0"/>
-              </a:spcAft>
-            </a:pPr>
-            <a:r>
-              <a:rPr sz="1300" b="0" i="0">
-                <a:solidFill>
-                  <a:srgbClr val="15803D"/>
-                </a:solidFill>
-                <a:latin typeface="Arial"/>
-              </a:rPr>
-              <a:t>83%</a:t>
-            </a:r>
-          </a:p>
-        </p:txBody>
-      </p:sp>
-      <p:sp>
-        <p:nvSpPr>
-          <p:cNvPr id="25" name="Rectangle 24"/>
-          <p:cNvSpPr/>
-          <p:nvPr/>
-        </p:nvSpPr>
-        <p:spPr>
-          <a:xfrm>
-            <a:off x="777240" y="3931920"/>
-            <a:ext cx="6400800" cy="420624"/>
-          </a:xfrm>
-          <a:prstGeom prst="rect">
-            <a:avLst/>
-          </a:prstGeom>
-          <a:solidFill>
-            <a:srgbClr val="FFFFFF"/>
-          </a:solidFill>
-          <a:ln w="6350">
-            <a:solidFill>
-              <a:srgbClr val="D8DEE4"/>
-            </a:solidFill>
-          </a:ln>
-          <a:effectLst/>
-        </p:spPr>
-        <p:style>
-          <a:lnRef idx="1">
-            <a:schemeClr val="accent1"/>
-          </a:lnRef>
-          <a:fillRef idx="3">
-            <a:schemeClr val="accent1"/>
-          </a:fillRef>
-          <a:effectRef idx="2">
-            <a:schemeClr val="accent1"/>
-          </a:effectRef>
-          <a:fontRef idx="minor">
-            <a:schemeClr val="lt1"/>
-          </a:fontRef>
-        </p:style>
-        <p:txBody>
-          <a:bodyPr rtlCol="0" anchor="ctr" wrap="square"/>
-          <a:lstStyle/>
-          <a:p>
-            <a:pPr algn="ctr"/>
-          </a:p>
-        </p:txBody>
-      </p:sp>
-      <p:sp>
-        <p:nvSpPr>
-          <p:cNvPr id="26" name="TextBox 25"/>
-          <p:cNvSpPr txBox="1"/>
-          <p:nvPr/>
-        </p:nvSpPr>
-        <p:spPr>
-          <a:xfrm>
-            <a:off x="905256" y="3931920"/>
-            <a:ext cx="2688336" cy="420624"/>
-          </a:xfrm>
-          <a:prstGeom prst="rect">
-            <a:avLst/>
-          </a:prstGeom>
-          <a:noFill/>
-        </p:spPr>
-        <p:txBody>
-          <a:bodyPr wrap="square" anchor="ctr" lIns="0" rIns="0" tIns="0" bIns="0">
-            <a:spAutoFit/>
-          </a:bodyPr>
-          <a:lstStyle/>
-          <a:p>
-            <a:pPr algn="l">
-              <a:spcAft>
-                <a:spcPts val="0"/>
-              </a:spcAft>
-            </a:pPr>
-            <a:r>
-              <a:rPr sz="1300" b="1" i="0">
-                <a:solidFill>
-                  <a:srgbClr val="12263A"/>
-                </a:solidFill>
-                <a:latin typeface="Arial"/>
-              </a:rPr>
-              <a:t>gpt-5.4 (low) (hosted)</a:t>
-            </a:r>
-          </a:p>
-        </p:txBody>
-      </p:sp>
-      <p:sp>
-        <p:nvSpPr>
-          <p:cNvPr id="27" name="TextBox 26"/>
-          <p:cNvSpPr txBox="1"/>
-          <p:nvPr/>
-        </p:nvSpPr>
-        <p:spPr>
-          <a:xfrm>
-            <a:off x="3849624" y="3931920"/>
-            <a:ext cx="1280160" cy="420624"/>
-          </a:xfrm>
-          <a:prstGeom prst="rect">
-            <a:avLst/>
-          </a:prstGeom>
-          <a:noFill/>
-        </p:spPr>
-        <p:txBody>
-          <a:bodyPr wrap="square" anchor="ctr" lIns="0" rIns="0" tIns="0" bIns="0">
-            <a:spAutoFit/>
-          </a:bodyPr>
-          <a:lstStyle/>
-          <a:p>
-            <a:pPr algn="ctr">
-              <a:spcAft>
-                <a:spcPts val="0"/>
-              </a:spcAft>
-            </a:pPr>
-            <a:r>
-              <a:rPr sz="1300" b="0" i="0">
-                <a:solidFill>
-                  <a:srgbClr val="12263A"/>
-                </a:solidFill>
-                <a:latin typeface="Arial"/>
-              </a:rPr>
-              <a:t>—</a:t>
-            </a:r>
-          </a:p>
-        </p:txBody>
-      </p:sp>
-      <p:sp>
-        <p:nvSpPr>
-          <p:cNvPr id="28" name="TextBox 27"/>
-          <p:cNvSpPr txBox="1"/>
-          <p:nvPr/>
-        </p:nvSpPr>
-        <p:spPr>
-          <a:xfrm>
-            <a:off x="5385816" y="3931920"/>
-            <a:ext cx="1664208" cy="420624"/>
-          </a:xfrm>
-          <a:prstGeom prst="rect">
-            <a:avLst/>
-          </a:prstGeom>
-          <a:noFill/>
-        </p:spPr>
-        <p:txBody>
-          <a:bodyPr wrap="square" anchor="ctr" lIns="0" rIns="0" tIns="0" bIns="0">
-            <a:spAutoFit/>
-          </a:bodyPr>
-          <a:lstStyle/>
-          <a:p>
-            <a:pPr algn="ctr">
-              <a:spcAft>
-                <a:spcPts val="0"/>
-              </a:spcAft>
-            </a:pPr>
-            <a:r>
-              <a:rPr sz="1300" b="0" i="0">
-                <a:solidFill>
-                  <a:srgbClr val="A02128"/>
-                </a:solidFill>
-                <a:latin typeface="Arial"/>
-              </a:rPr>
-              <a:t>90%</a:t>
-            </a:r>
-          </a:p>
-        </p:txBody>
-      </p:sp>
-      <p:sp>
-        <p:nvSpPr>
-          <p:cNvPr id="29" name="TextBox 28"/>
-          <p:cNvSpPr txBox="1"/>
-          <p:nvPr/>
-        </p:nvSpPr>
-        <p:spPr>
-          <a:xfrm>
-            <a:off x="7543800" y="2249424"/>
-            <a:ext cx="3870655" cy="2743200"/>
+            <a:off x="8458200" y="2194560"/>
+            <a:ext cx="2956255" cy="2743200"/>
           </a:xfrm>
           <a:prstGeom prst="rect">
             <a:avLst/>
@@ -10743,11 +9030,11 @@
           <a:p>
             <a:pPr algn="l">
               <a:spcAft>
-                <a:spcPts val="1200"/>
+                <a:spcPts val="1100"/>
               </a:spcAft>
             </a:pPr>
             <a:r>
-              <a:rPr sz="1450" b="1" i="0">
+              <a:rPr sz="1350" b="1" i="0">
                 <a:solidFill>
                   <a:srgbClr val="A02128"/>
                 </a:solidFill>
@@ -10756,7 +9043,7 @@
               <a:t>—  </a:t>
             </a:r>
             <a:r>
-              <a:rPr sz="1450" b="1" i="0">
+              <a:rPr sz="1350" b="1" i="0">
                 <a:solidFill>
                   <a:srgbClr val="12263A"/>
                 </a:solidFill>
@@ -10765,7 +9052,7 @@
               <a:t>8× the parameters bought +6 pts. </a:t>
             </a:r>
             <a:r>
-              <a:rPr sz="1450" b="0" i="0">
+              <a:rPr sz="1350" b="0" i="0">
                 <a:solidFill>
                   <a:srgbClr val="5A6B7C"/>
                 </a:solidFill>
@@ -10777,11 +9064,11 @@
           <a:p>
             <a:pPr algn="l">
               <a:spcAft>
-                <a:spcPts val="1200"/>
+                <a:spcPts val="1100"/>
               </a:spcAft>
             </a:pPr>
             <a:r>
-              <a:rPr sz="1450" b="1" i="0">
+              <a:rPr sz="1350" b="1" i="0">
                 <a:solidFill>
                   <a:srgbClr val="A02128"/>
                 </a:solidFill>
@@ -10790,7 +9077,7 @@
               <a:t>—  </a:t>
             </a:r>
             <a:r>
-              <a:rPr sz="1450" b="1" i="0">
+              <a:rPr sz="1350" b="1" i="0">
                 <a:solidFill>
                   <a:srgbClr val="12263A"/>
                 </a:solidFill>
@@ -10799,7 +9086,7 @@
               <a:t>The gap left is +7 pts. </a:t>
             </a:r>
             <a:r>
-              <a:rPr sz="1450" b="0" i="0">
+              <a:rPr sz="1350" b="0" i="0">
                 <a:solidFill>
                   <a:srgbClr val="5A6B7C"/>
                 </a:solidFill>
@@ -10811,11 +9098,11 @@
           <a:p>
             <a:pPr algn="l">
               <a:spcAft>
-                <a:spcPts val="1200"/>
+                <a:spcPts val="1100"/>
               </a:spcAft>
             </a:pPr>
             <a:r>
-              <a:rPr sz="1450" b="1" i="0">
+              <a:rPr sz="1350" b="1" i="0">
                 <a:solidFill>
                   <a:srgbClr val="A02128"/>
                 </a:solidFill>
@@ -10824,16 +9111,16 @@
               <a:t>—  </a:t>
             </a:r>
             <a:r>
-              <a:rPr sz="1450" b="1" i="0">
+              <a:rPr sz="1350" b="1" i="0">
                 <a:solidFill>
                   <a:srgbClr val="12263A"/>
                 </a:solidFill>
                 <a:latin typeface="Arial"/>
               </a:rPr>
-              <a:t>Going 4B to 8B bought nothing. </a:t>
-            </a:r>
-            <a:r>
-              <a:rPr sz="1450" b="0" i="0">
+              <a:t>4B to 8B bought nothing. </a:t>
+            </a:r>
+            <a:r>
+              <a:rPr sz="1350" b="0" i="0">
                 <a:solidFill>
                   <a:srgbClr val="5A6B7C"/>
                 </a:solidFill>
@@ -10846,14 +9133,14 @@
       </p:sp>
       <p:sp>
         <p:nvSpPr>
-          <p:cNvPr id="30" name="Rounded Rectangle 29"/>
+          <p:cNvPr id="11" name="Rounded Rectangle 10"/>
           <p:cNvSpPr/>
           <p:nvPr/>
         </p:nvSpPr>
         <p:spPr>
           <a:xfrm>
-            <a:off x="777240" y="4535424"/>
-            <a:ext cx="10637215" cy="914400"/>
+            <a:off x="777240" y="4992624"/>
+            <a:ext cx="10637215" cy="896112"/>
           </a:xfrm>
           <a:prstGeom prst="roundRect">
             <a:avLst/>
@@ -10890,14 +9177,14 @@
       </p:sp>
       <p:sp>
         <p:nvSpPr>
-          <p:cNvPr id="31" name="Rectangle 30"/>
+          <p:cNvPr id="12" name="Rectangle 11"/>
           <p:cNvSpPr/>
           <p:nvPr/>
         </p:nvSpPr>
         <p:spPr>
           <a:xfrm>
-            <a:off x="777240" y="4535424"/>
-            <a:ext cx="50292" cy="914400"/>
+            <a:off x="777240" y="4992624"/>
+            <a:ext cx="50292" cy="896112"/>
           </a:xfrm>
           <a:prstGeom prst="rect">
             <a:avLst/>
@@ -10934,14 +9221,14 @@
       </p:sp>
       <p:sp>
         <p:nvSpPr>
-          <p:cNvPr id="32" name="TextBox 31"/>
+          <p:cNvPr id="13" name="TextBox 12"/>
           <p:cNvSpPr txBox="1"/>
           <p:nvPr/>
         </p:nvSpPr>
         <p:spPr>
           <a:xfrm>
-            <a:off x="1014984" y="4700016"/>
-            <a:ext cx="10180015" cy="585216"/>
+            <a:off x="1014984" y="5157216"/>
+            <a:ext cx="10180015" cy="566928"/>
           </a:xfrm>
           <a:prstGeom prst="rect">
             <a:avLst/>
@@ -10985,7 +9272,7 @@
                 </a:solidFill>
                 <a:latin typeface="Arial"/>
               </a:rPr>
-              <a:t>Closing the remaining gap by size alone would take at least another order of magnitude -- and 32B is already past the point where a guard is cheap to run on every request, which was the reason to self-host in the first place.</a:t>
+              <a:t>Closing the remaining gap by size alone would take at least another order of magnitude — and 32B is already past the point where a guard is cheap to run on every request, which was the reason to self-host in the first place.</a:t>
             </a:r>
           </a:p>
         </p:txBody>

--- a/papers/unified-report/slides/safety_guard_exec_deck.pptx
+++ b/papers/unified-report/slides/safety_guard_exec_deck.pptx
@@ -7759,7 +7759,7 @@
         <p:spPr>
           <a:xfrm>
             <a:off x="777240" y="2103120"/>
-            <a:ext cx="6754624" cy="3931920"/>
+            <a:ext cx="5013198" cy="3931920"/>
           </a:xfrm>
           <a:prstGeom prst="rect">
             <a:avLst/>

--- a/papers/unified-report/slides/safety_guard_exec_deck.pptx
+++ b/papers/unified-report/slides/safety_guard_exec_deck.pptx
@@ -15,6 +15,7 @@
     <p:sldId id="263" r:id="rId15"/>
     <p:sldId id="264" r:id="rId16"/>
     <p:sldId id="265" r:id="rId17"/>
+    <p:sldId id="266" r:id="rId18"/>
   </p:sldIdLst>
   <p:sldSz cx="12191695" cy="6858000" type="screen4x3"/>
   <p:notesSz cx="6858000" cy="9144000"/>
@@ -618,6 +619,134 @@
           <a:lstStyle/>
           <a:p>
             <a:r>
+              <a:t>Do not rush this slide, and do not apologise through it. Naming the limits is what makes the</a:t>
+            </a:r>
+          </a:p>
+          <a:p>
+            <a:r>
+              <a:t>recommendation on slide 3 credible.</a:t>
+            </a:r>
+          </a:p>
+          <a:p/>
+          <a:p>
+            <a:r>
+              <a:t>The first bullet is the most important and the most self-undermining, which is why it belongs</a:t>
+            </a:r>
+          </a:p>
+          <a:p>
+            <a:r>
+              <a:t>here: the underlying research finding is that guard rankings depend on the benchmark. We are</a:t>
+            </a:r>
+          </a:p>
+          <a:p>
+            <a:r>
+              <a:t>handing you a recommendation derived from one benchmark. It is external and expert-annotated,</a:t>
+            </a:r>
+          </a:p>
+          <a:p>
+            <a:r>
+              <a:t>which is the best tier available to us, but a different instrument could reorder the middle of</a:t>
+            </a:r>
+          </a:p>
+          <a:p>
+            <a:r>
+              <a:t>the table. It is unlikely to reverse a ten-point gap.</a:t>
+            </a:r>
+          </a:p>
+          <a:p/>
+          <a:p>
+            <a:r>
+              <a:t>The pinning point matters more than it sounds. A hosted model can change under a fixed</a:t>
+            </a:r>
+          </a:p>
+          <a:p>
+            <a:r>
+              <a:t>deployment; that is a change-control problem for a compliance control. Our own checkpoints are</a:t>
+            </a:r>
+          </a:p>
+          <a:p>
+            <a:r>
+              <a:t>pinned to a content hash and will reproduce in a year.</a:t>
+            </a:r>
+          </a:p>
+          <a:p/>
+          <a:p>
+            <a:r>
+              <a:t>Close on the final callout: the thing worth funding is the measuring instrument for our actual</a:t>
+            </a:r>
+          </a:p>
+          <a:p>
+            <a:r>
+              <a:t>domain, not more guard comparisons on general safety.</a:t>
+            </a:r>
+          </a:p>
+        </p:txBody>
+      </p:sp>
+      <p:sp>
+        <p:nvSpPr>
+          <p:cNvPr id="4" name="Slide Number Placeholder 3"/>
+          <p:cNvSpPr>
+            <a:spLocks noGrp="1"/>
+          </p:cNvSpPr>
+          <p:nvPr>
+            <p:ph type="sldNum" idx="5" sz="quarter"/>
+          </p:nvPr>
+        </p:nvSpPr>
+        <p:spPr/>
+      </p:sp>
+    </p:spTree>
+  </p:cSld>
+  <p:clrMapOvr>
+    <a:masterClrMapping/>
+  </p:clrMapOvr>
+</p:notes>
+</file>
+
+<file path=ppt/notesSlides/notesSlide11.xml><?xml version="1.0" encoding="utf-8"?>
+<p:notes xmlns:a="http://schemas.openxmlformats.org/drawingml/2006/main" xmlns:p="http://schemas.openxmlformats.org/presentationml/2006/main" xmlns:r="http://schemas.openxmlformats.org/officeDocument/2006/relationships">
+  <p:cSld>
+    <p:spTree>
+      <p:nvGrpSpPr>
+        <p:cNvPr id="1" name=""/>
+        <p:cNvGrpSpPr/>
+        <p:nvPr/>
+      </p:nvGrpSpPr>
+      <p:grpSpPr>
+        <a:xfrm>
+          <a:off x="0" y="0"/>
+          <a:ext cx="0" cy="0"/>
+          <a:chOff x="0" y="0"/>
+          <a:chExt cx="0" cy="0"/>
+        </a:xfrm>
+      </p:grpSpPr>
+      <p:sp>
+        <p:nvSpPr>
+          <p:cNvPr id="2" name="Slide Image Placeholder 1"/>
+          <p:cNvSpPr>
+            <a:spLocks noGrp="1"/>
+          </p:cNvSpPr>
+          <p:nvPr>
+            <p:ph type="sldImg" idx="2"/>
+          </p:nvPr>
+        </p:nvSpPr>
+        <p:spPr/>
+      </p:sp>
+      <p:sp>
+        <p:nvSpPr>
+          <p:cNvPr id="3" name="Notes Placeholder 2"/>
+          <p:cNvSpPr>
+            <a:spLocks noGrp="1"/>
+          </p:cNvSpPr>
+          <p:nvPr>
+            <p:ph type="body" idx="3" sz="quarter"/>
+          </p:nvPr>
+        </p:nvSpPr>
+        <p:spPr/>
+        <p:txBody>
+          <a:bodyPr/>
+          <a:lstStyle/>
+          <a:p>
+            <a:r>
               <a:t>Two minutes. The first two items need no budget. The third frees capacity. The fourth is the</a:t>
             </a:r>
           </a:p>
@@ -1390,71 +1519,70 @@
           <a:lstStyle/>
           <a:p>
             <a:r>
-              <a:t>Work down the table, then land on the two callouts, which are the non-obvious costs.</a:t>
+              <a:t>This is the evidence slide for the rule on slide 3. One claim: the relationship is smooth and</a:t>
+            </a:r>
+          </a:p>
+          <a:p>
+            <a:r>
+              <a:t>steep early, so escalation is a dial rather than an architecture decision.</a:t>
             </a:r>
           </a:p>
           <a:p/>
           <a:p>
             <a:r>
-              <a:t>Latency: 1,553 ms median measured under load at high concurrency, so treat it as</a:t>
-            </a:r>
-          </a:p>
-          <a:p>
-            <a:r>
-              <a:t>an upper bound for a single request; the small-model figure is a batched GPU measurement. Even</a:t>
-            </a:r>
-          </a:p>
-          <a:p>
-            <a:r>
-              <a:t>allowing for that, the ratio is roughly 77x.</a:t>
+              <a:t>Mechanism, and it is why this works at all: the requests chosen for escalation are the ones</a:t>
+            </a:r>
+          </a:p>
+          <a:p>
+            <a:r>
+              <a:t>nearest the in-house guard's own decision line -- exactly the cases where a second opinion can</a:t>
+            </a:r>
+          </a:p>
+          <a:p>
+            <a:r>
+              <a:t>change the answer. Escalating confident rows adds cost and no accuracy.</a:t>
             </a:r>
           </a:p>
           <a:p/>
           <a:p>
             <a:r>
-              <a:t>Cost: billed tokens at public list prices. It excludes the amortised GPU on the self-hosted</a:t>
-            </a:r>
-          </a:p>
-          <a:p>
-            <a:r>
-              <a:t>side, which is exactly why the comparison is about where to spend rather than a like-for-like</a:t>
-            </a:r>
-          </a:p>
-          <a:p>
-            <a:r>
-              <a:t>price.</a:t>
+              <a:t>Method, if challenged. One global false-alarm budget across the whole curve, so every point is</a:t>
+            </a:r>
+          </a:p>
+          <a:p>
+            <a:r>
+              <a:t>comparable and we are not buying recall by alarming more. The two guards are fused on RANK, not</a:t>
+            </a:r>
+          </a:p>
+          <a:p>
+            <a:r>
+              <a:t>raw score, because a logit margin and a self-reported 0-100 risk are not on the same scale. We</a:t>
+            </a:r>
+          </a:p>
+          <a:p>
+            <a:r>
+              <a:t>tried a per-band threshold first and rejected it: with a small escalated slice there are too few</a:t>
+            </a:r>
+          </a:p>
+          <a:p>
+            <a:r>
+              <a:t>deferred negatives to place a stable threshold, and the curve went non-monotone for purely</a:t>
+            </a:r>
+          </a:p>
+          <a:p>
+            <a:r>
+              <a:t>numerical reasons. The figure stops at 50% because past that you have outsourced the majority;</a:t>
+            </a:r>
+          </a:p>
+          <a:p>
+            <a:r>
+              <a:t>the upper rule shows where full escalation lands.</a:t>
             </a:r>
           </a:p>
           <a:p/>
           <a:p>
             <a:r>
-              <a:t>The refusal finding is the one to say slowly. We saw a set of prompts refused by the provider's</a:t>
-            </a:r>
-          </a:p>
-          <a:p>
-            <a:r>
-              <a:t>own input filter before the model ever saw them, and the refusals were not reproducible --</a:t>
-            </a:r>
-          </a:p>
-          <a:p>
-            <a:r>
-              <a:t>different runs, different outcomes, no row refused every time. For a control that has to be</a:t>
-            </a:r>
-          </a:p>
-          <a:p>
-            <a:r>
-              <a:t>auditable, "sometimes declines, for reasons we cannot inspect or appeal" is a compliance</a:t>
-            </a:r>
-          </a:p>
-          <a:p>
-            <a:r>
-              <a:t>property, not a technical footnote.</a:t>
-            </a:r>
-          </a:p>
-          <a:p/>
-          <a:p>
-            <a:r>
-              <a:t>Close on the scoping sentence. The answer is a split, and this slide is why.</a:t>
+              <a:t>Cost is linear in the escalated share, so a fifth of the traffic is a fifth of the bill.</a:t>
             </a:r>
           </a:p>
         </p:txBody>
@@ -1524,64 +1652,71 @@
           <a:lstStyle/>
           <a:p>
             <a:r>
-              <a:t>This slide did not exist in the plan. It fell out of the scale experiment and is probably the</a:t>
-            </a:r>
-          </a:p>
-          <a:p>
-            <a:r>
-              <a:t>most commercially useful thing in the deck.</a:t>
+              <a:t>Work down the table, then land on the two callouts, which are the non-obvious costs.</a:t>
             </a:r>
           </a:p>
           <a:p/>
           <a:p>
             <a:r>
-              <a:t>The mechanism: fine-tuning specialises. It buys accuracy on the sources you trained on and</a:t>
-            </a:r>
-          </a:p>
-          <a:p>
-            <a:r>
-              <a:t>withdraws it from sources you did not. A bigger base model arrives with broad competence</a:t>
-            </a:r>
-          </a:p>
-          <a:p>
-            <a:r>
-              <a:t>already and does not have to trade any of it away. For a guardrail, the traffic you did not</a:t>
-            </a:r>
-          </a:p>
-          <a:p>
-            <a:r>
-              <a:t>anticipate is precisely the traffic that matters, so a technique that trades away</a:t>
-            </a:r>
-          </a:p>
-          <a:p>
-            <a:r>
-              <a:t>unfamiliar-traffic accuracy is badly matched to the job.</a:t>
+              <a:t>Latency: 1,553 ms median measured under load at high concurrency, so treat it as</a:t>
+            </a:r>
+          </a:p>
+          <a:p>
+            <a:r>
+              <a:t>an upper bound for a single request; the small-model figure is a batched GPU measurement. Even</a:t>
+            </a:r>
+          </a:p>
+          <a:p>
+            <a:r>
+              <a:t>allowing for that, the ratio is roughly 77x.</a:t>
             </a:r>
           </a:p>
           <a:p/>
           <a:p>
             <a:r>
-              <a:t>Numbers are in the technical report; the honest caveat is on the slide. Comparing a 32B untuned</a:t>
-            </a:r>
-          </a:p>
-          <a:p>
-            <a:r>
-              <a:t>model to a tuned 4B is a deployment-choice comparison, not a controlled one -- the 32B costs</a:t>
-            </a:r>
-          </a:p>
-          <a:p>
-            <a:r>
-              <a:t>much more to serve. What we can say is that the tuning route did not close the vendor gap and</a:t>
-            </a:r>
-          </a:p>
-          <a:p>
-            <a:r>
-              <a:t>made held-out accuracy worse on most models, while the size route at least moved in the right</a:t>
-            </a:r>
-          </a:p>
-          <a:p>
-            <a:r>
-              <a:t>direction on both regimes.</a:t>
+              <a:t>Cost: billed tokens at public list prices. It excludes the amortised GPU on the self-hosted</a:t>
+            </a:r>
+          </a:p>
+          <a:p>
+            <a:r>
+              <a:t>side, which is exactly why the comparison is about where to spend rather than a like-for-like</a:t>
+            </a:r>
+          </a:p>
+          <a:p>
+            <a:r>
+              <a:t>price.</a:t>
+            </a:r>
+          </a:p>
+          <a:p/>
+          <a:p>
+            <a:r>
+              <a:t>The refusal finding is the one to say slowly. We saw a set of prompts refused by the provider's</a:t>
+            </a:r>
+          </a:p>
+          <a:p>
+            <a:r>
+              <a:t>own input filter before the model ever saw them, and the refusals were not reproducible --</a:t>
+            </a:r>
+          </a:p>
+          <a:p>
+            <a:r>
+              <a:t>different runs, different outcomes, no row refused every time. For a control that has to be</a:t>
+            </a:r>
+          </a:p>
+          <a:p>
+            <a:r>
+              <a:t>auditable, "sometimes declines, for reasons we cannot inspect or appeal" is a compliance</a:t>
+            </a:r>
+          </a:p>
+          <a:p>
+            <a:r>
+              <a:t>property, not a technical footnote.</a:t>
+            </a:r>
+          </a:p>
+          <a:p/>
+          <a:p>
+            <a:r>
+              <a:t>Close on the scoping sentence. The answer is a split, and this slide is why.</a:t>
             </a:r>
           </a:p>
         </p:txBody>
@@ -1651,65 +1786,64 @@
           <a:lstStyle/>
           <a:p>
             <a:r>
-              <a:t>Do not rush this slide, and do not apologise through it. Naming the limits is what makes the</a:t>
-            </a:r>
-          </a:p>
-          <a:p>
-            <a:r>
-              <a:t>recommendation on slide 3 credible.</a:t>
+              <a:t>This slide did not exist in the plan. It fell out of the scale experiment and is probably the</a:t>
+            </a:r>
+          </a:p>
+          <a:p>
+            <a:r>
+              <a:t>most commercially useful thing in the deck.</a:t>
             </a:r>
           </a:p>
           <a:p/>
           <a:p>
             <a:r>
-              <a:t>The first bullet is the most important and the most self-undermining, which is why it belongs</a:t>
-            </a:r>
-          </a:p>
-          <a:p>
-            <a:r>
-              <a:t>here: the underlying research finding is that guard rankings depend on the benchmark. We are</a:t>
-            </a:r>
-          </a:p>
-          <a:p>
-            <a:r>
-              <a:t>handing you a recommendation derived from one benchmark. It is external and expert-annotated,</a:t>
-            </a:r>
-          </a:p>
-          <a:p>
-            <a:r>
-              <a:t>which is the best tier available to us, but a different instrument could reorder the middle of</a:t>
-            </a:r>
-          </a:p>
-          <a:p>
-            <a:r>
-              <a:t>the table. It is unlikely to reverse a ten-point gap.</a:t>
+              <a:t>The mechanism: fine-tuning specialises. It buys accuracy on the sources you trained on and</a:t>
+            </a:r>
+          </a:p>
+          <a:p>
+            <a:r>
+              <a:t>withdraws it from sources you did not. A bigger base model arrives with broad competence</a:t>
+            </a:r>
+          </a:p>
+          <a:p>
+            <a:r>
+              <a:t>already and does not have to trade any of it away. For a guardrail, the traffic you did not</a:t>
+            </a:r>
+          </a:p>
+          <a:p>
+            <a:r>
+              <a:t>anticipate is precisely the traffic that matters, so a technique that trades away</a:t>
+            </a:r>
+          </a:p>
+          <a:p>
+            <a:r>
+              <a:t>unfamiliar-traffic accuracy is badly matched to the job.</a:t>
             </a:r>
           </a:p>
           <a:p/>
           <a:p>
             <a:r>
-              <a:t>The pinning point matters more than it sounds. A hosted model can change under a fixed</a:t>
-            </a:r>
-          </a:p>
-          <a:p>
-            <a:r>
-              <a:t>deployment; that is a change-control problem for a compliance control. Our own checkpoints are</a:t>
-            </a:r>
-          </a:p>
-          <a:p>
-            <a:r>
-              <a:t>pinned to a content hash and will reproduce in a year.</a:t>
-            </a:r>
-          </a:p>
-          <a:p/>
-          <a:p>
-            <a:r>
-              <a:t>Close on the final callout: the thing worth funding is the measuring instrument for our actual</a:t>
-            </a:r>
-          </a:p>
-          <a:p>
-            <a:r>
-              <a:t>domain, not more guard comparisons on general safety.</a:t>
+              <a:t>Numbers are in the technical report; the honest caveat is on the slide. Comparing a 32B untuned</a:t>
+            </a:r>
+          </a:p>
+          <a:p>
+            <a:r>
+              <a:t>model to a tuned 4B is a deployment-choice comparison, not a controlled one -- the 32B costs</a:t>
+            </a:r>
+          </a:p>
+          <a:p>
+            <a:r>
+              <a:t>much more to serve. What we can say is that the tuning route did not close the vendor gap and</a:t>
+            </a:r>
+          </a:p>
+          <a:p>
+            <a:r>
+              <a:t>made held-out accuracy worse on most models, while the size route at least moved in the right</a:t>
+            </a:r>
+          </a:p>
+          <a:p>
+            <a:r>
+              <a:t>direction on both regimes.</a:t>
             </a:r>
           </a:p>
         </p:txBody>
@@ -5166,7 +5300,7 @@
                 </a:solidFill>
                 <a:latin typeface="Arial"/>
               </a:rPr>
-              <a:t>Guardrail sourcing · hosted frontier vs self-hosted small model</a:t>
+              <a:t>Guardrail sourcing · in-house inline, escalate the uncertain slice</a:t>
             </a:r>
           </a:p>
         </p:txBody>
@@ -5244,7 +5378,7 @@
                 </a:solidFill>
                 <a:latin typeface="Arial"/>
               </a:rPr>
-              <a:t>PROPOSAL</a:t>
+              <a:t>CONFIDENCE AND LIMITS</a:t>
             </a:r>
           </a:p>
         </p:txBody>
@@ -5286,7 +5420,7 @@
                 </a:solidFill>
                 <a:latin typeface="Georgia"/>
               </a:rPr>
-              <a:t>What we would do next</a:t>
+              <a:t>What this does not tell you</a:t>
             </a:r>
           </a:p>
         </p:txBody>
@@ -5325,7 +5459,7 @@
                 </a:solidFill>
                 <a:latin typeface="Arial"/>
               </a:rPr>
-              <a:t>Sequenced so each step is cheap and the expensive one is last</a:t>
+              <a:t>Stated plainly, so the recommendation can be trusted where it does apply</a:t>
             </a:r>
           </a:p>
         </p:txBody>
@@ -5383,7 +5517,7 @@
         <p:spPr>
           <a:xfrm>
             <a:off x="777240" y="2212848"/>
-            <a:ext cx="5112867" cy="3017520"/>
+            <a:ext cx="10637215" cy="2926080"/>
           </a:xfrm>
           <a:prstGeom prst="rect">
             <a:avLst/>
@@ -5417,7 +5551,7 @@
                 </a:solidFill>
                 <a:latin typeface="Arial"/>
               </a:rPr>
-              <a:t>Now · split the traffic. </a:t>
+              <a:t>It is one benchmark. </a:t>
             </a:r>
             <a:r>
               <a:rPr sz="1450" b="0" i="0">
@@ -5426,7 +5560,7 @@
                 </a:solidFill>
                 <a:latin typeface="Arial"/>
               </a:rPr>
-              <a:t>Hosted guard where the prompt may lawfully leave; the small self-hosted guard on the regulated path. No new build.</a:t>
+              <a:t>Expert-annotated finance, healthcare and law prompt safety. It is the strongest external evidence we have, and it is still a single instrument — and our own research shows guard rankings reorder when the benchmark changes.</a:t>
             </a:r>
           </a:p>
           <a:p>
@@ -5451,7 +5585,7 @@
                 </a:solidFill>
                 <a:latin typeface="Arial"/>
               </a:rPr>
-              <a:t>Now · handle provider refusals explicitly. </a:t>
+              <a:t>It is prompt-only. </a:t>
             </a:r>
             <a:r>
               <a:rPr sz="1450" b="0" i="0">
@@ -5460,7 +5594,7 @@
                 </a:solidFill>
                 <a:latin typeface="Arial"/>
               </a:rPr>
-              <a:t>Treat a provider refusal as 'needs review', never as 'safe'. It is a one-line policy change and today it is a silent gap.</a:t>
+              <a:t>We judged incoming prompts, not the assistant's replies, and not the harder mortgage-compliance question of whether a specific answer breaks a specific rule.</a:t>
             </a:r>
           </a:p>
           <a:p>
@@ -5485,10 +5619,653 @@
                 </a:solidFill>
                 <a:latin typeface="Arial"/>
               </a:rPr>
+              <a:t>Vendor behaviour is a moving target. </a:t>
+            </a:r>
+            <a:r>
+              <a:rPr sz="1450" b="0" i="0">
+                <a:solidFill>
+                  <a:srgbClr val="5A6B7C"/>
+                </a:solidFill>
+                <a:latin typeface="Arial"/>
+              </a:rPr>
+              <a:t>Model versions change under you. The self-hosted side is pinned to an exact revision and reproduces indefinitely; the hosted side does not.</a:t>
+            </a:r>
+          </a:p>
+          <a:p>
+            <a:pPr algn="l">
+              <a:spcAft>
+                <a:spcPts val="1200"/>
+              </a:spcAft>
+            </a:pPr>
+            <a:r>
+              <a:rPr sz="1450" b="1" i="0">
+                <a:solidFill>
+                  <a:srgbClr val="A02128"/>
+                </a:solidFill>
+                <a:latin typeface="Arial"/>
+              </a:rPr>
+              <a:t>—  </a:t>
+            </a:r>
+            <a:r>
+              <a:rPr sz="1450" b="1" i="0">
+                <a:solidFill>
+                  <a:srgbClr val="12263A"/>
+                </a:solidFill>
+                <a:latin typeface="Arial"/>
+              </a:rPr>
+              <a:t>Prices are list, not invoices. </a:t>
+            </a:r>
+            <a:r>
+              <a:rPr sz="1450" b="0" i="0">
+                <a:solidFill>
+                  <a:srgbClr val="5A6B7C"/>
+                </a:solidFill>
+                <a:latin typeface="Arial"/>
+              </a:rPr>
+              <a:t>Cost figures are billed tokens at public rates and exclude the GPU cost on our own side.</a:t>
+            </a:r>
+          </a:p>
+        </p:txBody>
+      </p:sp>
+      <p:sp>
+        <p:nvSpPr>
+          <p:cNvPr id="10" name="Rounded Rectangle 9"/>
+          <p:cNvSpPr/>
+          <p:nvPr/>
+        </p:nvSpPr>
+        <p:spPr>
+          <a:xfrm>
+            <a:off x="777240" y="5221224"/>
+            <a:ext cx="10637215" cy="987552"/>
+          </a:xfrm>
+          <a:prstGeom prst="roundRect">
+            <a:avLst/>
+          </a:prstGeom>
+          <a:solidFill>
+            <a:srgbClr val="EFF4FE"/>
+          </a:solidFill>
+          <a:ln>
+            <a:noFill/>
+          </a:ln>
+          <a:effectLst/>
+        </p:spPr>
+        <p:style>
+          <a:lnRef idx="1">
+            <a:schemeClr val="accent1"/>
+          </a:lnRef>
+          <a:fillRef idx="3">
+            <a:schemeClr val="accent1"/>
+          </a:fillRef>
+          <a:effectRef idx="2">
+            <a:schemeClr val="accent1"/>
+          </a:effectRef>
+          <a:fontRef idx="minor">
+            <a:schemeClr val="lt1"/>
+          </a:fontRef>
+        </p:style>
+        <p:txBody>
+          <a:bodyPr rtlCol="0" anchor="ctr" wrap="square"/>
+          <a:lstStyle/>
+          <a:p>
+            <a:pPr algn="ctr"/>
+          </a:p>
+        </p:txBody>
+      </p:sp>
+      <p:sp>
+        <p:nvSpPr>
+          <p:cNvPr id="11" name="Rectangle 10"/>
+          <p:cNvSpPr/>
+          <p:nvPr/>
+        </p:nvSpPr>
+        <p:spPr>
+          <a:xfrm>
+            <a:off x="777240" y="5221224"/>
+            <a:ext cx="50292" cy="987552"/>
+          </a:xfrm>
+          <a:prstGeom prst="rect">
+            <a:avLst/>
+          </a:prstGeom>
+          <a:solidFill>
+            <a:srgbClr val="2563EB"/>
+          </a:solidFill>
+          <a:ln>
+            <a:noFill/>
+          </a:ln>
+          <a:effectLst/>
+        </p:spPr>
+        <p:style>
+          <a:lnRef idx="1">
+            <a:schemeClr val="accent1"/>
+          </a:lnRef>
+          <a:fillRef idx="3">
+            <a:schemeClr val="accent1"/>
+          </a:fillRef>
+          <a:effectRef idx="2">
+            <a:schemeClr val="accent1"/>
+          </a:effectRef>
+          <a:fontRef idx="minor">
+            <a:schemeClr val="lt1"/>
+          </a:fontRef>
+        </p:style>
+        <p:txBody>
+          <a:bodyPr rtlCol="0" anchor="ctr" wrap="square"/>
+          <a:lstStyle/>
+          <a:p>
+            <a:pPr algn="ctr"/>
+          </a:p>
+        </p:txBody>
+      </p:sp>
+      <p:sp>
+        <p:nvSpPr>
+          <p:cNvPr id="12" name="TextBox 11"/>
+          <p:cNvSpPr txBox="1"/>
+          <p:nvPr/>
+        </p:nvSpPr>
+        <p:spPr>
+          <a:xfrm>
+            <a:off x="1014984" y="5385816"/>
+            <a:ext cx="10180015" cy="658368"/>
+          </a:xfrm>
+          <a:prstGeom prst="rect">
+            <a:avLst/>
+          </a:prstGeom>
+          <a:noFill/>
+        </p:spPr>
+        <p:txBody>
+          <a:bodyPr wrap="square" anchor="t" lIns="0" rIns="0" tIns="0" bIns="0">
+            <a:spAutoFit/>
+          </a:bodyPr>
+          <a:lstStyle/>
+          <a:p>
+            <a:pPr algn="l">
+              <a:spcAft>
+                <a:spcPts val="500"/>
+              </a:spcAft>
+            </a:pPr>
+            <a:r>
+              <a:rPr sz="1100" b="1" i="0" spc="110">
+                <a:solidFill>
+                  <a:srgbClr val="2563EB"/>
+                </a:solidFill>
+                <a:latin typeface="Arial"/>
+              </a:rPr>
+              <a:t>WHAT WOULD CHANGE THE RECOMMENDATION</a:t>
+            </a:r>
+          </a:p>
+          <a:p>
+            <a:pPr algn="l">
+              <a:lnSpc>
+                <a:spcPct val="106000"/>
+              </a:lnSpc>
+              <a:spcAft>
+                <a:spcPts val="0"/>
+              </a:spcAft>
+            </a:pPr>
+            <a:r>
+              <a:rPr sz="1350" b="0" i="0">
+                <a:solidFill>
+                  <a:srgbClr val="12263A"/>
+                </a:solidFill>
+                <a:latin typeface="Arial"/>
+              </a:rPr>
+              <a:t>A regulated-domain benchmark that scores whole answers against specific rules, with expert adjudication. That is the instrument we do not have, and building it is the highest-value next step.</a:t>
+            </a:r>
+          </a:p>
+        </p:txBody>
+      </p:sp>
+    </p:spTree>
+  </p:cSld>
+  <p:clrMapOvr>
+    <a:masterClrMapping/>
+  </p:clrMapOvr>
+</p:sld>
+</file>
+
+<file path=ppt/slides/slide11.xml><?xml version="1.0" encoding="utf-8"?>
+<p:sld xmlns:a="http://schemas.openxmlformats.org/drawingml/2006/main" xmlns:p="http://schemas.openxmlformats.org/presentationml/2006/main" xmlns:r="http://schemas.openxmlformats.org/officeDocument/2006/relationships">
+  <p:cSld>
+    <p:spTree>
+      <p:nvGrpSpPr>
+        <p:cNvPr id="1" name=""/>
+        <p:cNvGrpSpPr/>
+        <p:nvPr/>
+      </p:nvGrpSpPr>
+      <p:grpSpPr/>
+      <p:sp>
+        <p:nvSpPr>
+          <p:cNvPr id="2" name="Rectangle 1"/>
+          <p:cNvSpPr/>
+          <p:nvPr/>
+        </p:nvSpPr>
+        <p:spPr>
+          <a:xfrm>
+            <a:off x="0" y="0"/>
+            <a:ext cx="12191695" cy="56692"/>
+          </a:xfrm>
+          <a:prstGeom prst="rect">
+            <a:avLst/>
+          </a:prstGeom>
+          <a:solidFill>
+            <a:srgbClr val="A02128"/>
+          </a:solidFill>
+          <a:ln>
+            <a:noFill/>
+          </a:ln>
+          <a:effectLst/>
+        </p:spPr>
+        <p:style>
+          <a:lnRef idx="1">
+            <a:schemeClr val="accent1"/>
+          </a:lnRef>
+          <a:fillRef idx="3">
+            <a:schemeClr val="accent1"/>
+          </a:fillRef>
+          <a:effectRef idx="2">
+            <a:schemeClr val="accent1"/>
+          </a:effectRef>
+          <a:fontRef idx="minor">
+            <a:schemeClr val="lt1"/>
+          </a:fontRef>
+        </p:style>
+        <p:txBody>
+          <a:bodyPr rtlCol="0" anchor="ctr" wrap="square"/>
+          <a:lstStyle/>
+          <a:p>
+            <a:pPr algn="ctr"/>
+          </a:p>
+        </p:txBody>
+      </p:sp>
+      <p:sp>
+        <p:nvSpPr>
+          <p:cNvPr id="3" name="TextBox 2"/>
+          <p:cNvSpPr txBox="1"/>
+          <p:nvPr/>
+        </p:nvSpPr>
+        <p:spPr>
+          <a:xfrm>
+            <a:off x="777240" y="6400800"/>
+            <a:ext cx="8686800" cy="256032"/>
+          </a:xfrm>
+          <a:prstGeom prst="rect">
+            <a:avLst/>
+          </a:prstGeom>
+          <a:noFill/>
+        </p:spPr>
+        <p:txBody>
+          <a:bodyPr wrap="square" anchor="t" lIns="0" rIns="0" tIns="0" bIns="0">
+            <a:spAutoFit/>
+          </a:bodyPr>
+          <a:lstStyle/>
+          <a:p>
+            <a:pPr algn="l">
+              <a:spcAft>
+                <a:spcPts val="0"/>
+              </a:spcAft>
+            </a:pPr>
+            <a:r>
+              <a:rPr sz="950" b="0" i="0">
+                <a:solidFill>
+                  <a:srgbClr val="8A97A5"/>
+                </a:solidFill>
+                <a:latin typeface="Arial"/>
+              </a:rPr>
+              <a:t>Guardrail sourcing · in-house inline, escalate the uncertain slice</a:t>
+            </a:r>
+          </a:p>
+        </p:txBody>
+      </p:sp>
+      <p:sp>
+        <p:nvSpPr>
+          <p:cNvPr id="4" name="TextBox 3"/>
+          <p:cNvSpPr txBox="1"/>
+          <p:nvPr/>
+        </p:nvSpPr>
+        <p:spPr>
+          <a:xfrm>
+            <a:off x="10317175" y="6400800"/>
+            <a:ext cx="1097280" cy="256032"/>
+          </a:xfrm>
+          <a:prstGeom prst="rect">
+            <a:avLst/>
+          </a:prstGeom>
+          <a:noFill/>
+        </p:spPr>
+        <p:txBody>
+          <a:bodyPr wrap="square" anchor="t" lIns="0" rIns="0" tIns="0" bIns="0">
+            <a:spAutoFit/>
+          </a:bodyPr>
+          <a:lstStyle/>
+          <a:p>
+            <a:pPr algn="r">
+              <a:spcAft>
+                <a:spcPts val="0"/>
+              </a:spcAft>
+            </a:pPr>
+            <a:r>
+              <a:rPr sz="1050" b="1" i="0" spc="60">
+                <a:solidFill>
+                  <a:srgbClr val="A02128"/>
+                </a:solidFill>
+                <a:latin typeface="Arial"/>
+              </a:rPr>
+              <a:t>10</a:t>
+            </a:r>
+          </a:p>
+        </p:txBody>
+      </p:sp>
+      <p:sp>
+        <p:nvSpPr>
+          <p:cNvPr id="5" name="TextBox 4"/>
+          <p:cNvSpPr txBox="1"/>
+          <p:nvPr/>
+        </p:nvSpPr>
+        <p:spPr>
+          <a:xfrm>
+            <a:off x="777240" y="384048"/>
+            <a:ext cx="10637215" cy="237744"/>
+          </a:xfrm>
+          <a:prstGeom prst="rect">
+            <a:avLst/>
+          </a:prstGeom>
+          <a:noFill/>
+        </p:spPr>
+        <p:txBody>
+          <a:bodyPr wrap="square" anchor="t" lIns="0" rIns="0" tIns="0" bIns="0">
+            <a:spAutoFit/>
+          </a:bodyPr>
+          <a:lstStyle/>
+          <a:p>
+            <a:pPr algn="l">
+              <a:spcAft>
+                <a:spcPts val="0"/>
+              </a:spcAft>
+            </a:pPr>
+            <a:r>
+              <a:rPr sz="1050" b="1" i="0" spc="140">
+                <a:solidFill>
+                  <a:srgbClr val="A02128"/>
+                </a:solidFill>
+                <a:latin typeface="Arial"/>
+              </a:rPr>
+              <a:t>PROPOSAL</a:t>
+            </a:r>
+          </a:p>
+        </p:txBody>
+      </p:sp>
+      <p:sp>
+        <p:nvSpPr>
+          <p:cNvPr id="6" name="TextBox 5"/>
+          <p:cNvSpPr txBox="1"/>
+          <p:nvPr/>
+        </p:nvSpPr>
+        <p:spPr>
+          <a:xfrm>
+            <a:off x="777240" y="713232"/>
+            <a:ext cx="10637215" cy="731520"/>
+          </a:xfrm>
+          <a:prstGeom prst="rect">
+            <a:avLst/>
+          </a:prstGeom>
+          <a:noFill/>
+        </p:spPr>
+        <p:txBody>
+          <a:bodyPr wrap="square" anchor="t" lIns="0" rIns="0" tIns="0" bIns="0">
+            <a:spAutoFit/>
+          </a:bodyPr>
+          <a:lstStyle/>
+          <a:p>
+            <a:pPr algn="l">
+              <a:lnSpc>
+                <a:spcPct val="102000"/>
+              </a:lnSpc>
+              <a:spcAft>
+                <a:spcPts val="0"/>
+              </a:spcAft>
+            </a:pPr>
+            <a:r>
+              <a:rPr sz="3000" b="1" i="0">
+                <a:solidFill>
+                  <a:srgbClr val="12263A"/>
+                </a:solidFill>
+                <a:latin typeface="Georgia"/>
+              </a:rPr>
+              <a:t>What we would do next</a:t>
+            </a:r>
+          </a:p>
+        </p:txBody>
+      </p:sp>
+      <p:sp>
+        <p:nvSpPr>
+          <p:cNvPr id="7" name="TextBox 6"/>
+          <p:cNvSpPr txBox="1"/>
+          <p:nvPr/>
+        </p:nvSpPr>
+        <p:spPr>
+          <a:xfrm>
+            <a:off x="777240" y="1481328"/>
+            <a:ext cx="10637215" cy="365760"/>
+          </a:xfrm>
+          <a:prstGeom prst="rect">
+            <a:avLst/>
+          </a:prstGeom>
+          <a:noFill/>
+        </p:spPr>
+        <p:txBody>
+          <a:bodyPr wrap="square" anchor="t" lIns="0" rIns="0" tIns="0" bIns="0">
+            <a:spAutoFit/>
+          </a:bodyPr>
+          <a:lstStyle/>
+          <a:p>
+            <a:pPr algn="l">
+              <a:spcAft>
+                <a:spcPts val="0"/>
+              </a:spcAft>
+            </a:pPr>
+            <a:r>
+              <a:rPr sz="1500" b="0" i="0">
+                <a:solidFill>
+                  <a:srgbClr val="5A6B7C"/>
+                </a:solidFill>
+                <a:latin typeface="Arial"/>
+              </a:rPr>
+              <a:t>Sequenced so each step is cheap and the expensive one is last</a:t>
+            </a:r>
+          </a:p>
+        </p:txBody>
+      </p:sp>
+      <p:sp>
+        <p:nvSpPr>
+          <p:cNvPr id="8" name="Rectangle 7"/>
+          <p:cNvSpPr/>
+          <p:nvPr/>
+        </p:nvSpPr>
+        <p:spPr>
+          <a:xfrm>
+            <a:off x="777240" y="1920240"/>
+            <a:ext cx="10637215" cy="11430"/>
+          </a:xfrm>
+          <a:prstGeom prst="rect">
+            <a:avLst/>
+          </a:prstGeom>
+          <a:solidFill>
+            <a:srgbClr val="D8DEE4"/>
+          </a:solidFill>
+          <a:ln>
+            <a:noFill/>
+          </a:ln>
+          <a:effectLst/>
+        </p:spPr>
+        <p:style>
+          <a:lnRef idx="1">
+            <a:schemeClr val="accent1"/>
+          </a:lnRef>
+          <a:fillRef idx="3">
+            <a:schemeClr val="accent1"/>
+          </a:fillRef>
+          <a:effectRef idx="2">
+            <a:schemeClr val="accent1"/>
+          </a:effectRef>
+          <a:fontRef idx="minor">
+            <a:schemeClr val="lt1"/>
+          </a:fontRef>
+        </p:style>
+        <p:txBody>
+          <a:bodyPr rtlCol="0" anchor="ctr" wrap="square"/>
+          <a:lstStyle/>
+          <a:p>
+            <a:pPr algn="ctr"/>
+          </a:p>
+        </p:txBody>
+      </p:sp>
+      <p:sp>
+        <p:nvSpPr>
+          <p:cNvPr id="9" name="TextBox 8"/>
+          <p:cNvSpPr txBox="1"/>
+          <p:nvPr/>
+        </p:nvSpPr>
+        <p:spPr>
+          <a:xfrm>
+            <a:off x="777240" y="2212848"/>
+            <a:ext cx="5112867" cy="3017520"/>
+          </a:xfrm>
+          <a:prstGeom prst="rect">
+            <a:avLst/>
+          </a:prstGeom>
+          <a:noFill/>
+        </p:spPr>
+        <p:txBody>
+          <a:bodyPr wrap="square" anchor="t" lIns="0" rIns="0" tIns="0" bIns="0">
+            <a:spAutoFit/>
+          </a:bodyPr>
+          <a:lstStyle/>
+          <a:p>
+            <a:pPr algn="l">
+              <a:spcAft>
+                <a:spcPts val="1000"/>
+              </a:spcAft>
+            </a:pPr>
+            <a:r>
+              <a:rPr sz="1350" b="1" i="0">
+                <a:solidFill>
+                  <a:srgbClr val="A02128"/>
+                </a:solidFill>
+                <a:latin typeface="Arial"/>
+              </a:rPr>
+              <a:t>—  </a:t>
+            </a:r>
+            <a:r>
+              <a:rPr sz="1350" b="1" i="0">
+                <a:solidFill>
+                  <a:srgbClr val="12263A"/>
+                </a:solidFill>
+                <a:latin typeface="Arial"/>
+              </a:rPr>
+              <a:t>Now · keep the in-house guard inline on everything. </a:t>
+            </a:r>
+            <a:r>
+              <a:rPr sz="1350" b="0" i="0">
+                <a:solidFill>
+                  <a:srgbClr val="5A6B7C"/>
+                </a:solidFill>
+                <a:latin typeface="Arial"/>
+              </a:rPr>
+              <a:t>It already runs, it answers in ~20 ms, and it is the only lane available for regulated traffic. No new build.</a:t>
+            </a:r>
+          </a:p>
+          <a:p>
+            <a:pPr algn="l">
+              <a:spcAft>
+                <a:spcPts val="1000"/>
+              </a:spcAft>
+            </a:pPr>
+            <a:r>
+              <a:rPr sz="1350" b="1" i="0">
+                <a:solidFill>
+                  <a:srgbClr val="A02128"/>
+                </a:solidFill>
+                <a:latin typeface="Arial"/>
+              </a:rPr>
+              <a:t>—  </a:t>
+            </a:r>
+            <a:r>
+              <a:rPr sz="1350" b="1" i="0">
+                <a:solidFill>
+                  <a:srgbClr val="12263A"/>
+                </a:solidFill>
+                <a:latin typeface="Arial"/>
+              </a:rPr>
+              <a:t>Now · add the escalation lane. </a:t>
+            </a:r>
+            <a:r>
+              <a:rPr sz="1350" b="0" i="0">
+                <a:solidFill>
+                  <a:srgbClr val="5A6B7C"/>
+                </a:solidFill>
+                <a:latin typeface="Arial"/>
+              </a:rPr>
+              <a:t>Route the least-confident band to the hosted model where the data may lawfully leave. Start at 10–20% and read the curve.</a:t>
+            </a:r>
+          </a:p>
+          <a:p>
+            <a:pPr algn="l">
+              <a:spcAft>
+                <a:spcPts val="1000"/>
+              </a:spcAft>
+            </a:pPr>
+            <a:r>
+              <a:rPr sz="1350" b="1" i="0">
+                <a:solidFill>
+                  <a:srgbClr val="A02128"/>
+                </a:solidFill>
+                <a:latin typeface="Arial"/>
+              </a:rPr>
+              <a:t>—  </a:t>
+            </a:r>
+            <a:r>
+              <a:rPr sz="1350" b="1" i="0">
+                <a:solidFill>
+                  <a:srgbClr val="12263A"/>
+                </a:solidFill>
+                <a:latin typeface="Arial"/>
+              </a:rPr>
+              <a:t>Now · treat a provider refusal as 'needs review'. </a:t>
+            </a:r>
+            <a:r>
+              <a:rPr sz="1350" b="0" i="0">
+                <a:solidFill>
+                  <a:srgbClr val="5A6B7C"/>
+                </a:solidFill>
+                <a:latin typeface="Arial"/>
+              </a:rPr>
+              <a:t>Never as 'safe'. A one-line policy change, and today it is a silent gap.</a:t>
+            </a:r>
+          </a:p>
+          <a:p>
+            <a:pPr algn="l">
+              <a:spcAft>
+                <a:spcPts val="1000"/>
+              </a:spcAft>
+            </a:pPr>
+            <a:r>
+              <a:rPr sz="1350" b="1" i="0">
+                <a:solidFill>
+                  <a:srgbClr val="A02128"/>
+                </a:solidFill>
+                <a:latin typeface="Arial"/>
+              </a:rPr>
+              <a:t>—  </a:t>
+            </a:r>
+            <a:r>
+              <a:rPr sz="1350" b="1" i="0">
+                <a:solidFill>
+                  <a:srgbClr val="12263A"/>
+                </a:solidFill>
+                <a:latin typeface="Arial"/>
+              </a:rPr>
               <a:t>Next · stop the tuning workstream as a gap-closer. </a:t>
             </a:r>
             <a:r>
-              <a:rPr sz="1450" b="0" i="0">
+              <a:rPr sz="1350" b="0" i="0">
                 <a:solidFill>
                   <a:srgbClr val="5A6B7C"/>
                 </a:solidFill>
@@ -5500,11 +6277,11 @@
           <a:p>
             <a:pPr algn="l">
               <a:spcAft>
-                <a:spcPts val="1200"/>
-              </a:spcAft>
-            </a:pPr>
-            <a:r>
-              <a:rPr sz="1450" b="1" i="0">
+                <a:spcPts val="1000"/>
+              </a:spcAft>
+            </a:pPr>
+            <a:r>
+              <a:rPr sz="1350" b="1" i="0">
                 <a:solidFill>
                   <a:srgbClr val="A02128"/>
                 </a:solidFill>
@@ -5513,7 +6290,7 @@
               <a:t>—  </a:t>
             </a:r>
             <a:r>
-              <a:rPr sz="1450" b="1" i="0">
+              <a:rPr sz="1350" b="1" i="0">
                 <a:solidFill>
                   <a:srgbClr val="12263A"/>
                 </a:solidFill>
@@ -5522,7 +6299,7 @@
               <a:t>Then · build the domain instrument. </a:t>
             </a:r>
             <a:r>
-              <a:rPr sz="1450" b="0" i="0">
+              <a:rPr sz="1350" b="0" i="0">
                 <a:solidFill>
                   <a:srgbClr val="5A6B7C"/>
                 </a:solidFill>
@@ -5921,7 +6698,7 @@
                 </a:solidFill>
                 <a:latin typeface="Arial"/>
               </a:rPr>
-              <a:t>Guardrail sourcing · hosted frontier vs self-hosted small model</a:t>
+              <a:t>Guardrail sourcing · in-house inline, escalate the uncertain slice</a:t>
             </a:r>
           </a:p>
         </p:txBody>
@@ -6676,7 +7453,7 @@
                 </a:solidFill>
                 <a:latin typeface="Arial"/>
               </a:rPr>
-              <a:t>Guardrail sourcing · hosted frontier vs self-hosted small model</a:t>
+              <a:t>Guardrail sourcing · in-house inline, escalate the uncertain slice</a:t>
             </a:r>
           </a:p>
         </p:txBody>
@@ -6754,7 +7531,7 @@
                 </a:solidFill>
                 <a:latin typeface="Arial"/>
               </a:rPr>
-              <a:t>RECOMMENDATION</a:t>
+              <a:t>THE ANSWER</a:t>
             </a:r>
           </a:p>
         </p:txBody>
@@ -6796,7 +7573,7 @@
                 </a:solidFill>
                 <a:latin typeface="Georgia"/>
               </a:rPr>
-              <a:t>Hosted is materially more accurate. Run it where the prompt can leave, and a small model where it cannot</a:t>
+              <a:t>Run the small guard in-house on every request. Send out only the ones it is unsure about</a:t>
             </a:r>
           </a:p>
         </p:txBody>
@@ -6835,7 +7612,7 @@
                 </a:solidFill>
                 <a:latin typeface="Arial"/>
               </a:rPr>
-              <a:t>And do not expect to close the gap by tuning or by buying a bigger open model</a:t>
+              <a:t>One rule, three lanes. The question is not in-house OR outsource — it is which requests go out</a:t>
             </a:r>
           </a:p>
         </p:txBody>
@@ -6892,8 +7669,957 @@
         </p:nvSpPr>
         <p:spPr>
           <a:xfrm>
-            <a:off x="777240" y="2212848"/>
-            <a:ext cx="3362858" cy="1481328"/>
+            <a:off x="777240" y="2194560"/>
+            <a:ext cx="10637215" cy="566928"/>
+          </a:xfrm>
+          <a:prstGeom prst="rect">
+            <a:avLst/>
+          </a:prstGeom>
+          <a:solidFill>
+            <a:srgbClr val="12263A"/>
+          </a:solidFill>
+          <a:ln>
+            <a:noFill/>
+          </a:ln>
+          <a:effectLst/>
+        </p:spPr>
+        <p:style>
+          <a:lnRef idx="1">
+            <a:schemeClr val="accent1"/>
+          </a:lnRef>
+          <a:fillRef idx="3">
+            <a:schemeClr val="accent1"/>
+          </a:fillRef>
+          <a:effectRef idx="2">
+            <a:schemeClr val="accent1"/>
+          </a:effectRef>
+          <a:fontRef idx="minor">
+            <a:schemeClr val="lt1"/>
+          </a:fontRef>
+        </p:style>
+        <p:txBody>
+          <a:bodyPr rtlCol="0" anchor="ctr" wrap="square"/>
+          <a:lstStyle/>
+          <a:p>
+            <a:pPr algn="ctr"/>
+          </a:p>
+        </p:txBody>
+      </p:sp>
+      <p:sp>
+        <p:nvSpPr>
+          <p:cNvPr id="10" name="TextBox 9"/>
+          <p:cNvSpPr txBox="1"/>
+          <p:nvPr/>
+        </p:nvSpPr>
+        <p:spPr>
+          <a:xfrm>
+            <a:off x="905256" y="2194560"/>
+            <a:ext cx="1552294" cy="566928"/>
+          </a:xfrm>
+          <a:prstGeom prst="rect">
+            <a:avLst/>
+          </a:prstGeom>
+          <a:noFill/>
+        </p:spPr>
+        <p:txBody>
+          <a:bodyPr wrap="square" anchor="ctr" lIns="0" rIns="0" tIns="0" bIns="0">
+            <a:spAutoFit/>
+          </a:bodyPr>
+          <a:lstStyle/>
+          <a:p>
+            <a:pPr algn="l">
+              <a:spcAft>
+                <a:spcPts val="0"/>
+              </a:spcAft>
+            </a:pPr>
+            <a:r>
+              <a:rPr sz="1300" b="1" i="0">
+                <a:solidFill>
+                  <a:srgbClr val="FFFFFF"/>
+                </a:solidFill>
+                <a:latin typeface="Arial"/>
+              </a:rPr>
+              <a:t>Lane</a:t>
+            </a:r>
+          </a:p>
+        </p:txBody>
+      </p:sp>
+      <p:sp>
+        <p:nvSpPr>
+          <p:cNvPr id="11" name="TextBox 10"/>
+          <p:cNvSpPr txBox="1"/>
+          <p:nvPr/>
+        </p:nvSpPr>
+        <p:spPr>
+          <a:xfrm>
+            <a:off x="2713582" y="2194560"/>
+            <a:ext cx="3360621" cy="566928"/>
+          </a:xfrm>
+          <a:prstGeom prst="rect">
+            <a:avLst/>
+          </a:prstGeom>
+          <a:noFill/>
+        </p:spPr>
+        <p:txBody>
+          <a:bodyPr wrap="square" anchor="ctr" lIns="0" rIns="0" tIns="0" bIns="0">
+            <a:spAutoFit/>
+          </a:bodyPr>
+          <a:lstStyle/>
+          <a:p>
+            <a:pPr algn="ctr">
+              <a:spcAft>
+                <a:spcPts val="0"/>
+              </a:spcAft>
+            </a:pPr>
+            <a:r>
+              <a:rPr sz="1300" b="1" i="0">
+                <a:solidFill>
+                  <a:srgbClr val="FFFFFF"/>
+                </a:solidFill>
+                <a:latin typeface="Arial"/>
+              </a:rPr>
+              <a:t>Which requests</a:t>
+            </a:r>
+          </a:p>
+        </p:txBody>
+      </p:sp>
+      <p:sp>
+        <p:nvSpPr>
+          <p:cNvPr id="12" name="TextBox 11"/>
+          <p:cNvSpPr txBox="1"/>
+          <p:nvPr/>
+        </p:nvSpPr>
+        <p:spPr>
+          <a:xfrm>
+            <a:off x="6330235" y="2194560"/>
+            <a:ext cx="1977783" cy="566928"/>
+          </a:xfrm>
+          <a:prstGeom prst="rect">
+            <a:avLst/>
+          </a:prstGeom>
+          <a:noFill/>
+        </p:spPr>
+        <p:txBody>
+          <a:bodyPr wrap="square" anchor="ctr" lIns="0" rIns="0" tIns="0" bIns="0">
+            <a:spAutoFit/>
+          </a:bodyPr>
+          <a:lstStyle/>
+          <a:p>
+            <a:pPr algn="ctr">
+              <a:spcAft>
+                <a:spcPts val="0"/>
+              </a:spcAft>
+            </a:pPr>
+            <a:r>
+              <a:rPr sz="1300" b="1" i="0">
+                <a:solidFill>
+                  <a:srgbClr val="FFFFFF"/>
+                </a:solidFill>
+                <a:latin typeface="Arial"/>
+              </a:rPr>
+              <a:t>Guard</a:t>
+            </a:r>
+          </a:p>
+        </p:txBody>
+      </p:sp>
+      <p:sp>
+        <p:nvSpPr>
+          <p:cNvPr id="13" name="TextBox 12"/>
+          <p:cNvSpPr txBox="1"/>
+          <p:nvPr/>
+        </p:nvSpPr>
+        <p:spPr>
+          <a:xfrm>
+            <a:off x="8564050" y="2194560"/>
+            <a:ext cx="2722388" cy="566928"/>
+          </a:xfrm>
+          <a:prstGeom prst="rect">
+            <a:avLst/>
+          </a:prstGeom>
+          <a:noFill/>
+        </p:spPr>
+        <p:txBody>
+          <a:bodyPr wrap="square" anchor="ctr" lIns="0" rIns="0" tIns="0" bIns="0">
+            <a:spAutoFit/>
+          </a:bodyPr>
+          <a:lstStyle/>
+          <a:p>
+            <a:pPr algn="ctr">
+              <a:spcAft>
+                <a:spcPts val="0"/>
+              </a:spcAft>
+            </a:pPr>
+            <a:r>
+              <a:rPr sz="1300" b="1" i="0">
+                <a:solidFill>
+                  <a:srgbClr val="FFFFFF"/>
+                </a:solidFill>
+                <a:latin typeface="Arial"/>
+              </a:rPr>
+              <a:t>Why</a:t>
+            </a:r>
+          </a:p>
+        </p:txBody>
+      </p:sp>
+      <p:sp>
+        <p:nvSpPr>
+          <p:cNvPr id="14" name="Rectangle 13"/>
+          <p:cNvSpPr/>
+          <p:nvPr/>
+        </p:nvSpPr>
+        <p:spPr>
+          <a:xfrm>
+            <a:off x="777240" y="2761488"/>
+            <a:ext cx="10637215" cy="566928"/>
+          </a:xfrm>
+          <a:prstGeom prst="rect">
+            <a:avLst/>
+          </a:prstGeom>
+          <a:solidFill>
+            <a:srgbClr val="F7F9FA"/>
+          </a:solidFill>
+          <a:ln w="6350">
+            <a:solidFill>
+              <a:srgbClr val="D8DEE4"/>
+            </a:solidFill>
+          </a:ln>
+          <a:effectLst/>
+        </p:spPr>
+        <p:style>
+          <a:lnRef idx="1">
+            <a:schemeClr val="accent1"/>
+          </a:lnRef>
+          <a:fillRef idx="3">
+            <a:schemeClr val="accent1"/>
+          </a:fillRef>
+          <a:effectRef idx="2">
+            <a:schemeClr val="accent1"/>
+          </a:effectRef>
+          <a:fontRef idx="minor">
+            <a:schemeClr val="lt1"/>
+          </a:fontRef>
+        </p:style>
+        <p:txBody>
+          <a:bodyPr rtlCol="0" anchor="ctr" wrap="square"/>
+          <a:lstStyle/>
+          <a:p>
+            <a:pPr algn="ctr"/>
+          </a:p>
+        </p:txBody>
+      </p:sp>
+      <p:sp>
+        <p:nvSpPr>
+          <p:cNvPr id="15" name="TextBox 14"/>
+          <p:cNvSpPr txBox="1"/>
+          <p:nvPr/>
+        </p:nvSpPr>
+        <p:spPr>
+          <a:xfrm>
+            <a:off x="905256" y="2761488"/>
+            <a:ext cx="1552294" cy="566928"/>
+          </a:xfrm>
+          <a:prstGeom prst="rect">
+            <a:avLst/>
+          </a:prstGeom>
+          <a:noFill/>
+        </p:spPr>
+        <p:txBody>
+          <a:bodyPr wrap="square" anchor="ctr" lIns="0" rIns="0" tIns="0" bIns="0">
+            <a:spAutoFit/>
+          </a:bodyPr>
+          <a:lstStyle/>
+          <a:p>
+            <a:pPr algn="l">
+              <a:spcAft>
+                <a:spcPts val="0"/>
+              </a:spcAft>
+            </a:pPr>
+            <a:r>
+              <a:rPr sz="1300" b="1" i="0">
+                <a:solidFill>
+                  <a:srgbClr val="12263A"/>
+                </a:solidFill>
+                <a:latin typeface="Arial"/>
+              </a:rPr>
+              <a:t>1  Regulated</a:t>
+            </a:r>
+          </a:p>
+        </p:txBody>
+      </p:sp>
+      <p:sp>
+        <p:nvSpPr>
+          <p:cNvPr id="16" name="TextBox 15"/>
+          <p:cNvSpPr txBox="1"/>
+          <p:nvPr/>
+        </p:nvSpPr>
+        <p:spPr>
+          <a:xfrm>
+            <a:off x="2713582" y="2761488"/>
+            <a:ext cx="3360621" cy="566928"/>
+          </a:xfrm>
+          <a:prstGeom prst="rect">
+            <a:avLst/>
+          </a:prstGeom>
+          <a:noFill/>
+        </p:spPr>
+        <p:txBody>
+          <a:bodyPr wrap="square" anchor="ctr" lIns="0" rIns="0" tIns="0" bIns="0">
+            <a:spAutoFit/>
+          </a:bodyPr>
+          <a:lstStyle/>
+          <a:p>
+            <a:pPr algn="ctr">
+              <a:spcAft>
+                <a:spcPts val="0"/>
+              </a:spcAft>
+            </a:pPr>
+            <a:r>
+              <a:rPr sz="1300" b="0" i="0">
+                <a:solidFill>
+                  <a:srgbClr val="12263A"/>
+                </a:solidFill>
+                <a:latin typeface="Arial"/>
+              </a:rPr>
+              <a:t>prompt contains borrower or patient data</a:t>
+            </a:r>
+          </a:p>
+        </p:txBody>
+      </p:sp>
+      <p:sp>
+        <p:nvSpPr>
+          <p:cNvPr id="17" name="TextBox 16"/>
+          <p:cNvSpPr txBox="1"/>
+          <p:nvPr/>
+        </p:nvSpPr>
+        <p:spPr>
+          <a:xfrm>
+            <a:off x="6330235" y="2761488"/>
+            <a:ext cx="1977783" cy="566928"/>
+          </a:xfrm>
+          <a:prstGeom prst="rect">
+            <a:avLst/>
+          </a:prstGeom>
+          <a:noFill/>
+        </p:spPr>
+        <p:txBody>
+          <a:bodyPr wrap="square" anchor="ctr" lIns="0" rIns="0" tIns="0" bIns="0">
+            <a:spAutoFit/>
+          </a:bodyPr>
+          <a:lstStyle/>
+          <a:p>
+            <a:pPr algn="ctr">
+              <a:spcAft>
+                <a:spcPts val="0"/>
+              </a:spcAft>
+            </a:pPr>
+            <a:r>
+              <a:rPr sz="1300" b="0" i="0">
+                <a:solidFill>
+                  <a:srgbClr val="15803D"/>
+                </a:solidFill>
+                <a:latin typeface="Arial"/>
+              </a:rPr>
+              <a:t>in-house only</a:t>
+            </a:r>
+          </a:p>
+        </p:txBody>
+      </p:sp>
+      <p:sp>
+        <p:nvSpPr>
+          <p:cNvPr id="18" name="TextBox 17"/>
+          <p:cNvSpPr txBox="1"/>
+          <p:nvPr/>
+        </p:nvSpPr>
+        <p:spPr>
+          <a:xfrm>
+            <a:off x="8564050" y="2761488"/>
+            <a:ext cx="2722388" cy="566928"/>
+          </a:xfrm>
+          <a:prstGeom prst="rect">
+            <a:avLst/>
+          </a:prstGeom>
+          <a:noFill/>
+        </p:spPr>
+        <p:txBody>
+          <a:bodyPr wrap="square" anchor="ctr" lIns="0" rIns="0" tIns="0" bIns="0">
+            <a:spAutoFit/>
+          </a:bodyPr>
+          <a:lstStyle/>
+          <a:p>
+            <a:pPr algn="ctr">
+              <a:spcAft>
+                <a:spcPts val="0"/>
+              </a:spcAft>
+            </a:pPr>
+            <a:r>
+              <a:rPr sz="1300" b="0" i="0">
+                <a:solidFill>
+                  <a:srgbClr val="12263A"/>
+                </a:solidFill>
+                <a:latin typeface="Arial"/>
+              </a:rPr>
+              <a:t>cannot lawfully leave</a:t>
+            </a:r>
+          </a:p>
+        </p:txBody>
+      </p:sp>
+      <p:sp>
+        <p:nvSpPr>
+          <p:cNvPr id="19" name="Rectangle 18"/>
+          <p:cNvSpPr/>
+          <p:nvPr/>
+        </p:nvSpPr>
+        <p:spPr>
+          <a:xfrm>
+            <a:off x="777240" y="3328416"/>
+            <a:ext cx="10637215" cy="566928"/>
+          </a:xfrm>
+          <a:prstGeom prst="rect">
+            <a:avLst/>
+          </a:prstGeom>
+          <a:solidFill>
+            <a:srgbClr val="FFFFFF"/>
+          </a:solidFill>
+          <a:ln w="6350">
+            <a:solidFill>
+              <a:srgbClr val="D8DEE4"/>
+            </a:solidFill>
+          </a:ln>
+          <a:effectLst/>
+        </p:spPr>
+        <p:style>
+          <a:lnRef idx="1">
+            <a:schemeClr val="accent1"/>
+          </a:lnRef>
+          <a:fillRef idx="3">
+            <a:schemeClr val="accent1"/>
+          </a:fillRef>
+          <a:effectRef idx="2">
+            <a:schemeClr val="accent1"/>
+          </a:effectRef>
+          <a:fontRef idx="minor">
+            <a:schemeClr val="lt1"/>
+          </a:fontRef>
+        </p:style>
+        <p:txBody>
+          <a:bodyPr rtlCol="0" anchor="ctr" wrap="square"/>
+          <a:lstStyle/>
+          <a:p>
+            <a:pPr algn="ctr"/>
+          </a:p>
+        </p:txBody>
+      </p:sp>
+      <p:sp>
+        <p:nvSpPr>
+          <p:cNvPr id="20" name="TextBox 19"/>
+          <p:cNvSpPr txBox="1"/>
+          <p:nvPr/>
+        </p:nvSpPr>
+        <p:spPr>
+          <a:xfrm>
+            <a:off x="905256" y="3328416"/>
+            <a:ext cx="1552294" cy="566928"/>
+          </a:xfrm>
+          <a:prstGeom prst="rect">
+            <a:avLst/>
+          </a:prstGeom>
+          <a:noFill/>
+        </p:spPr>
+        <p:txBody>
+          <a:bodyPr wrap="square" anchor="ctr" lIns="0" rIns="0" tIns="0" bIns="0">
+            <a:spAutoFit/>
+          </a:bodyPr>
+          <a:lstStyle/>
+          <a:p>
+            <a:pPr algn="l">
+              <a:spcAft>
+                <a:spcPts val="0"/>
+              </a:spcAft>
+            </a:pPr>
+            <a:r>
+              <a:rPr sz="1300" b="1" i="0">
+                <a:solidFill>
+                  <a:srgbClr val="12263A"/>
+                </a:solidFill>
+                <a:latin typeface="Arial"/>
+              </a:rPr>
+              <a:t>2  Uncertain</a:t>
+            </a:r>
+          </a:p>
+        </p:txBody>
+      </p:sp>
+      <p:sp>
+        <p:nvSpPr>
+          <p:cNvPr id="21" name="TextBox 20"/>
+          <p:cNvSpPr txBox="1"/>
+          <p:nvPr/>
+        </p:nvSpPr>
+        <p:spPr>
+          <a:xfrm>
+            <a:off x="2713582" y="3328416"/>
+            <a:ext cx="3360621" cy="566928"/>
+          </a:xfrm>
+          <a:prstGeom prst="rect">
+            <a:avLst/>
+          </a:prstGeom>
+          <a:noFill/>
+        </p:spPr>
+        <p:txBody>
+          <a:bodyPr wrap="square" anchor="ctr" lIns="0" rIns="0" tIns="0" bIns="0">
+            <a:spAutoFit/>
+          </a:bodyPr>
+          <a:lstStyle/>
+          <a:p>
+            <a:pPr algn="ctr">
+              <a:spcAft>
+                <a:spcPts val="0"/>
+              </a:spcAft>
+            </a:pPr>
+            <a:r>
+              <a:rPr sz="1300" b="0" i="0">
+                <a:solidFill>
+                  <a:srgbClr val="12263A"/>
+                </a:solidFill>
+                <a:latin typeface="Arial"/>
+              </a:rPr>
+              <a:t>in-house guard is near its decision line</a:t>
+            </a:r>
+          </a:p>
+        </p:txBody>
+      </p:sp>
+      <p:sp>
+        <p:nvSpPr>
+          <p:cNvPr id="22" name="TextBox 21"/>
+          <p:cNvSpPr txBox="1"/>
+          <p:nvPr/>
+        </p:nvSpPr>
+        <p:spPr>
+          <a:xfrm>
+            <a:off x="6330235" y="3328416"/>
+            <a:ext cx="1977783" cy="566928"/>
+          </a:xfrm>
+          <a:prstGeom prst="rect">
+            <a:avLst/>
+          </a:prstGeom>
+          <a:noFill/>
+        </p:spPr>
+        <p:txBody>
+          <a:bodyPr wrap="square" anchor="ctr" lIns="0" rIns="0" tIns="0" bIns="0">
+            <a:spAutoFit/>
+          </a:bodyPr>
+          <a:lstStyle/>
+          <a:p>
+            <a:pPr algn="ctr">
+              <a:spcAft>
+                <a:spcPts val="0"/>
+              </a:spcAft>
+            </a:pPr>
+            <a:r>
+              <a:rPr sz="1300" b="0" i="0">
+                <a:solidFill>
+                  <a:srgbClr val="A02128"/>
+                </a:solidFill>
+                <a:latin typeface="Arial"/>
+              </a:rPr>
+              <a:t>escalate to hosted</a:t>
+            </a:r>
+          </a:p>
+        </p:txBody>
+      </p:sp>
+      <p:sp>
+        <p:nvSpPr>
+          <p:cNvPr id="23" name="TextBox 22"/>
+          <p:cNvSpPr txBox="1"/>
+          <p:nvPr/>
+        </p:nvSpPr>
+        <p:spPr>
+          <a:xfrm>
+            <a:off x="8564050" y="3328416"/>
+            <a:ext cx="2722388" cy="566928"/>
+          </a:xfrm>
+          <a:prstGeom prst="rect">
+            <a:avLst/>
+          </a:prstGeom>
+          <a:noFill/>
+        </p:spPr>
+        <p:txBody>
+          <a:bodyPr wrap="square" anchor="ctr" lIns="0" rIns="0" tIns="0" bIns="0">
+            <a:spAutoFit/>
+          </a:bodyPr>
+          <a:lstStyle/>
+          <a:p>
+            <a:pPr algn="ctr">
+              <a:spcAft>
+                <a:spcPts val="0"/>
+              </a:spcAft>
+            </a:pPr>
+            <a:r>
+              <a:rPr sz="1300" b="0" i="0">
+                <a:solidFill>
+                  <a:srgbClr val="12263A"/>
+                </a:solidFill>
+                <a:latin typeface="Arial"/>
+              </a:rPr>
+              <a:t>this is where the accuracy is won</a:t>
+            </a:r>
+          </a:p>
+        </p:txBody>
+      </p:sp>
+      <p:sp>
+        <p:nvSpPr>
+          <p:cNvPr id="24" name="Rectangle 23"/>
+          <p:cNvSpPr/>
+          <p:nvPr/>
+        </p:nvSpPr>
+        <p:spPr>
+          <a:xfrm>
+            <a:off x="777240" y="3895344"/>
+            <a:ext cx="10637215" cy="566928"/>
+          </a:xfrm>
+          <a:prstGeom prst="rect">
+            <a:avLst/>
+          </a:prstGeom>
+          <a:solidFill>
+            <a:srgbClr val="F7F9FA"/>
+          </a:solidFill>
+          <a:ln w="6350">
+            <a:solidFill>
+              <a:srgbClr val="D8DEE4"/>
+            </a:solidFill>
+          </a:ln>
+          <a:effectLst/>
+        </p:spPr>
+        <p:style>
+          <a:lnRef idx="1">
+            <a:schemeClr val="accent1"/>
+          </a:lnRef>
+          <a:fillRef idx="3">
+            <a:schemeClr val="accent1"/>
+          </a:fillRef>
+          <a:effectRef idx="2">
+            <a:schemeClr val="accent1"/>
+          </a:effectRef>
+          <a:fontRef idx="minor">
+            <a:schemeClr val="lt1"/>
+          </a:fontRef>
+        </p:style>
+        <p:txBody>
+          <a:bodyPr rtlCol="0" anchor="ctr" wrap="square"/>
+          <a:lstStyle/>
+          <a:p>
+            <a:pPr algn="ctr"/>
+          </a:p>
+        </p:txBody>
+      </p:sp>
+      <p:sp>
+        <p:nvSpPr>
+          <p:cNvPr id="25" name="TextBox 24"/>
+          <p:cNvSpPr txBox="1"/>
+          <p:nvPr/>
+        </p:nvSpPr>
+        <p:spPr>
+          <a:xfrm>
+            <a:off x="905256" y="3895344"/>
+            <a:ext cx="1552294" cy="566928"/>
+          </a:xfrm>
+          <a:prstGeom prst="rect">
+            <a:avLst/>
+          </a:prstGeom>
+          <a:noFill/>
+        </p:spPr>
+        <p:txBody>
+          <a:bodyPr wrap="square" anchor="ctr" lIns="0" rIns="0" tIns="0" bIns="0">
+            <a:spAutoFit/>
+          </a:bodyPr>
+          <a:lstStyle/>
+          <a:p>
+            <a:pPr algn="l">
+              <a:spcAft>
+                <a:spcPts val="0"/>
+              </a:spcAft>
+            </a:pPr>
+            <a:r>
+              <a:rPr sz="1300" b="1" i="0">
+                <a:solidFill>
+                  <a:srgbClr val="12263A"/>
+                </a:solidFill>
+                <a:latin typeface="Arial"/>
+              </a:rPr>
+              <a:t>3  Clear-cut</a:t>
+            </a:r>
+          </a:p>
+        </p:txBody>
+      </p:sp>
+      <p:sp>
+        <p:nvSpPr>
+          <p:cNvPr id="26" name="TextBox 25"/>
+          <p:cNvSpPr txBox="1"/>
+          <p:nvPr/>
+        </p:nvSpPr>
+        <p:spPr>
+          <a:xfrm>
+            <a:off x="2713582" y="3895344"/>
+            <a:ext cx="3360621" cy="566928"/>
+          </a:xfrm>
+          <a:prstGeom prst="rect">
+            <a:avLst/>
+          </a:prstGeom>
+          <a:noFill/>
+        </p:spPr>
+        <p:txBody>
+          <a:bodyPr wrap="square" anchor="ctr" lIns="0" rIns="0" tIns="0" bIns="0">
+            <a:spAutoFit/>
+          </a:bodyPr>
+          <a:lstStyle/>
+          <a:p>
+            <a:pPr algn="ctr">
+              <a:spcAft>
+                <a:spcPts val="0"/>
+              </a:spcAft>
+            </a:pPr>
+            <a:r>
+              <a:rPr sz="1300" b="0" i="0">
+                <a:solidFill>
+                  <a:srgbClr val="12263A"/>
+                </a:solidFill>
+                <a:latin typeface="Arial"/>
+              </a:rPr>
+              <a:t>in-house guard is confident either way</a:t>
+            </a:r>
+          </a:p>
+        </p:txBody>
+      </p:sp>
+      <p:sp>
+        <p:nvSpPr>
+          <p:cNvPr id="27" name="TextBox 26"/>
+          <p:cNvSpPr txBox="1"/>
+          <p:nvPr/>
+        </p:nvSpPr>
+        <p:spPr>
+          <a:xfrm>
+            <a:off x="6330235" y="3895344"/>
+            <a:ext cx="1977783" cy="566928"/>
+          </a:xfrm>
+          <a:prstGeom prst="rect">
+            <a:avLst/>
+          </a:prstGeom>
+          <a:noFill/>
+        </p:spPr>
+        <p:txBody>
+          <a:bodyPr wrap="square" anchor="ctr" lIns="0" rIns="0" tIns="0" bIns="0">
+            <a:spAutoFit/>
+          </a:bodyPr>
+          <a:lstStyle/>
+          <a:p>
+            <a:pPr algn="ctr">
+              <a:spcAft>
+                <a:spcPts val="0"/>
+              </a:spcAft>
+            </a:pPr>
+            <a:r>
+              <a:rPr sz="1300" b="0" i="0">
+                <a:solidFill>
+                  <a:srgbClr val="15803D"/>
+                </a:solidFill>
+                <a:latin typeface="Arial"/>
+              </a:rPr>
+              <a:t>in-house only</a:t>
+            </a:r>
+          </a:p>
+        </p:txBody>
+      </p:sp>
+      <p:sp>
+        <p:nvSpPr>
+          <p:cNvPr id="28" name="TextBox 27"/>
+          <p:cNvSpPr txBox="1"/>
+          <p:nvPr/>
+        </p:nvSpPr>
+        <p:spPr>
+          <a:xfrm>
+            <a:off x="8564050" y="3895344"/>
+            <a:ext cx="2722388" cy="566928"/>
+          </a:xfrm>
+          <a:prstGeom prst="rect">
+            <a:avLst/>
+          </a:prstGeom>
+          <a:noFill/>
+        </p:spPr>
+        <p:txBody>
+          <a:bodyPr wrap="square" anchor="ctr" lIns="0" rIns="0" tIns="0" bIns="0">
+            <a:spAutoFit/>
+          </a:bodyPr>
+          <a:lstStyle/>
+          <a:p>
+            <a:pPr algn="ctr">
+              <a:spcAft>
+                <a:spcPts val="0"/>
+              </a:spcAft>
+            </a:pPr>
+            <a:r>
+              <a:rPr sz="1300" b="0" i="0">
+                <a:solidFill>
+                  <a:srgbClr val="12263A"/>
+                </a:solidFill>
+                <a:latin typeface="Arial"/>
+              </a:rPr>
+              <a:t>hosted would not change the answer</a:t>
+            </a:r>
+          </a:p>
+        </p:txBody>
+      </p:sp>
+      <p:sp>
+        <p:nvSpPr>
+          <p:cNvPr id="29" name="Rectangle 28"/>
+          <p:cNvSpPr/>
+          <p:nvPr/>
+        </p:nvSpPr>
+        <p:spPr>
+          <a:xfrm>
+            <a:off x="777240" y="4645152"/>
+            <a:ext cx="3362858" cy="1371600"/>
+          </a:xfrm>
+          <a:prstGeom prst="rect">
+            <a:avLst/>
+          </a:prstGeom>
+          <a:solidFill>
+            <a:srgbClr val="FAF0F0"/>
+          </a:solidFill>
+          <a:ln>
+            <a:noFill/>
+          </a:ln>
+          <a:effectLst/>
+        </p:spPr>
+        <p:style>
+          <a:lnRef idx="1">
+            <a:schemeClr val="accent1"/>
+          </a:lnRef>
+          <a:fillRef idx="3">
+            <a:schemeClr val="accent1"/>
+          </a:fillRef>
+          <a:effectRef idx="2">
+            <a:schemeClr val="accent1"/>
+          </a:effectRef>
+          <a:fontRef idx="minor">
+            <a:schemeClr val="lt1"/>
+          </a:fontRef>
+        </p:style>
+        <p:txBody>
+          <a:bodyPr rtlCol="0" anchor="ctr" wrap="square"/>
+          <a:lstStyle/>
+          <a:p>
+            <a:pPr algn="ctr"/>
+          </a:p>
+        </p:txBody>
+      </p:sp>
+      <p:sp>
+        <p:nvSpPr>
+          <p:cNvPr id="30" name="Rectangle 29"/>
+          <p:cNvSpPr/>
+          <p:nvPr/>
+        </p:nvSpPr>
+        <p:spPr>
+          <a:xfrm>
+            <a:off x="777240" y="4645152"/>
+            <a:ext cx="3362858" cy="45720"/>
+          </a:xfrm>
+          <a:prstGeom prst="rect">
+            <a:avLst/>
+          </a:prstGeom>
+          <a:solidFill>
+            <a:srgbClr val="A02128"/>
+          </a:solidFill>
+          <a:ln>
+            <a:noFill/>
+          </a:ln>
+          <a:effectLst/>
+        </p:spPr>
+        <p:style>
+          <a:lnRef idx="1">
+            <a:schemeClr val="accent1"/>
+          </a:lnRef>
+          <a:fillRef idx="3">
+            <a:schemeClr val="accent1"/>
+          </a:fillRef>
+          <a:effectRef idx="2">
+            <a:schemeClr val="accent1"/>
+          </a:effectRef>
+          <a:fontRef idx="minor">
+            <a:schemeClr val="lt1"/>
+          </a:fontRef>
+        </p:style>
+        <p:txBody>
+          <a:bodyPr rtlCol="0" anchor="ctr" wrap="square"/>
+          <a:lstStyle/>
+          <a:p>
+            <a:pPr algn="ctr"/>
+          </a:p>
+        </p:txBody>
+      </p:sp>
+      <p:sp>
+        <p:nvSpPr>
+          <p:cNvPr id="31" name="TextBox 30"/>
+          <p:cNvSpPr txBox="1"/>
+          <p:nvPr/>
+        </p:nvSpPr>
+        <p:spPr>
+          <a:xfrm>
+            <a:off x="996696" y="4882896"/>
+            <a:ext cx="2923946" cy="914400"/>
+          </a:xfrm>
+          <a:prstGeom prst="rect">
+            <a:avLst/>
+          </a:prstGeom>
+          <a:noFill/>
+        </p:spPr>
+        <p:txBody>
+          <a:bodyPr wrap="square" anchor="t" lIns="0" rIns="0" tIns="0" bIns="0">
+            <a:spAutoFit/>
+          </a:bodyPr>
+          <a:lstStyle/>
+          <a:p>
+            <a:pPr algn="l">
+              <a:spcAft>
+                <a:spcPts val="400"/>
+              </a:spcAft>
+            </a:pPr>
+            <a:r>
+              <a:rPr sz="4000" b="1" i="0">
+                <a:solidFill>
+                  <a:srgbClr val="A02128"/>
+                </a:solidFill>
+                <a:latin typeface="Georgia"/>
+              </a:rPr>
+              <a:t>20%</a:t>
+            </a:r>
+          </a:p>
+          <a:p>
+            <a:pPr algn="l">
+              <a:spcAft>
+                <a:spcPts val="0"/>
+              </a:spcAft>
+            </a:pPr>
+            <a:r>
+              <a:rPr sz="1200" b="0" i="0">
+                <a:solidFill>
+                  <a:srgbClr val="5A6B7C"/>
+                </a:solidFill>
+                <a:latin typeface="Arial"/>
+              </a:rPr>
+              <a:t>of requests escalated — lane 2 only</a:t>
+            </a:r>
+          </a:p>
+        </p:txBody>
+      </p:sp>
+      <p:sp>
+        <p:nvSpPr>
+          <p:cNvPr id="32" name="Rectangle 31"/>
+          <p:cNvSpPr/>
+          <p:nvPr/>
+        </p:nvSpPr>
+        <p:spPr>
+          <a:xfrm>
+            <a:off x="4414418" y="4645152"/>
+            <a:ext cx="3362858" cy="1371600"/>
           </a:xfrm>
           <a:prstGeom prst="rect">
             <a:avLst/>
@@ -6930,13 +8656,13 @@
       </p:sp>
       <p:sp>
         <p:nvSpPr>
-          <p:cNvPr id="10" name="Rectangle 9"/>
+          <p:cNvPr id="33" name="Rectangle 32"/>
           <p:cNvSpPr/>
           <p:nvPr/>
         </p:nvSpPr>
         <p:spPr>
           <a:xfrm>
-            <a:off x="777240" y="2212848"/>
+            <a:off x="4414418" y="4645152"/>
             <a:ext cx="3362858" cy="45720"/>
           </a:xfrm>
           <a:prstGeom prst="rect">
@@ -6974,14 +8700,14 @@
       </p:sp>
       <p:sp>
         <p:nvSpPr>
-          <p:cNvPr id="11" name="TextBox 10"/>
+          <p:cNvPr id="34" name="TextBox 33"/>
           <p:cNvSpPr txBox="1"/>
           <p:nvPr/>
         </p:nvSpPr>
         <p:spPr>
           <a:xfrm>
-            <a:off x="996696" y="2450592"/>
-            <a:ext cx="2923946" cy="1024128"/>
+            <a:off x="4633874" y="4882896"/>
+            <a:ext cx="2923946" cy="914400"/>
           </a:xfrm>
           <a:prstGeom prst="rect">
             <a:avLst/>
@@ -7006,7 +8732,7 @@
                 </a:solidFill>
                 <a:latin typeface="Georgia"/>
               </a:rPr>
-              <a:t>+7 pts</a:t>
+              <a:t>51%</a:t>
             </a:r>
           </a:p>
           <a:p>
@@ -7022,27 +8748,27 @@
                 </a:solidFill>
                 <a:latin typeface="Arial"/>
               </a:rPr>
-              <a:t>more unsafe prompts caught by gpt-5.4 (low) than by the best open model we tested, at the same false-alarm rate</a:t>
-            </a:r>
-          </a:p>
-        </p:txBody>
-      </p:sp>
-      <p:sp>
-        <p:nvSpPr>
-          <p:cNvPr id="12" name="Rectangle 11"/>
+              <a:t>of the accuracy gap to hosted, closed</a:t>
+            </a:r>
+          </a:p>
+        </p:txBody>
+      </p:sp>
+      <p:sp>
+        <p:nvSpPr>
+          <p:cNvPr id="35" name="Rectangle 34"/>
           <p:cNvSpPr/>
           <p:nvPr/>
         </p:nvSpPr>
         <p:spPr>
           <a:xfrm>
-            <a:off x="4414418" y="2212848"/>
-            <a:ext cx="3362858" cy="1481328"/>
+            <a:off x="8051596" y="4645152"/>
+            <a:ext cx="3362858" cy="1371600"/>
           </a:xfrm>
           <a:prstGeom prst="rect">
             <a:avLst/>
           </a:prstGeom>
           <a:solidFill>
-            <a:srgbClr val="FAF0F0"/>
+            <a:srgbClr val="EFF4FE"/>
           </a:solidFill>
           <a:ln>
             <a:noFill/>
@@ -7073,20 +8799,20 @@
       </p:sp>
       <p:sp>
         <p:nvSpPr>
-          <p:cNvPr id="13" name="Rectangle 12"/>
+          <p:cNvPr id="36" name="Rectangle 35"/>
           <p:cNvSpPr/>
           <p:nvPr/>
         </p:nvSpPr>
         <p:spPr>
           <a:xfrm>
-            <a:off x="4414418" y="2212848"/>
+            <a:off x="8051596" y="4645152"/>
             <a:ext cx="3362858" cy="45720"/>
           </a:xfrm>
           <a:prstGeom prst="rect">
             <a:avLst/>
           </a:prstGeom>
           <a:solidFill>
-            <a:srgbClr val="A02128"/>
+            <a:srgbClr val="2563EB"/>
           </a:solidFill>
           <a:ln>
             <a:noFill/>
@@ -7117,14 +8843,14 @@
       </p:sp>
       <p:sp>
         <p:nvSpPr>
-          <p:cNvPr id="14" name="TextBox 13"/>
+          <p:cNvPr id="37" name="TextBox 36"/>
           <p:cNvSpPr txBox="1"/>
           <p:nvPr/>
         </p:nvSpPr>
         <p:spPr>
           <a:xfrm>
-            <a:off x="4633874" y="2450592"/>
-            <a:ext cx="2923946" cy="1024128"/>
+            <a:off x="8271052" y="4882896"/>
+            <a:ext cx="2923946" cy="914400"/>
           </a:xfrm>
           <a:prstGeom prst="rect">
             <a:avLst/>
@@ -7145,11 +8871,11 @@
             <a:r>
               <a:rPr sz="4000" b="1" i="0">
                 <a:solidFill>
-                  <a:srgbClr val="A02128"/>
+                  <a:srgbClr val="2563EB"/>
                 </a:solidFill>
                 <a:latin typeface="Georgia"/>
               </a:rPr>
-              <a:t>77×</a:t>
+              <a:t>80%</a:t>
             </a:r>
           </a:p>
           <a:p>
@@ -7165,275 +8891,7 @@
                 </a:solidFill>
                 <a:latin typeface="Arial"/>
               </a:rPr>
-              <a:t>slower per request than a small self-hosted guard</a:t>
-            </a:r>
-          </a:p>
-        </p:txBody>
-      </p:sp>
-      <p:sp>
-        <p:nvSpPr>
-          <p:cNvPr id="15" name="Rectangle 14"/>
-          <p:cNvSpPr/>
-          <p:nvPr/>
-        </p:nvSpPr>
-        <p:spPr>
-          <a:xfrm>
-            <a:off x="8051596" y="2212848"/>
-            <a:ext cx="3362858" cy="1481328"/>
-          </a:xfrm>
-          <a:prstGeom prst="rect">
-            <a:avLst/>
-          </a:prstGeom>
-          <a:solidFill>
-            <a:srgbClr val="FDF7EC"/>
-          </a:solidFill>
-          <a:ln>
-            <a:noFill/>
-          </a:ln>
-          <a:effectLst/>
-        </p:spPr>
-        <p:style>
-          <a:lnRef idx="1">
-            <a:schemeClr val="accent1"/>
-          </a:lnRef>
-          <a:fillRef idx="3">
-            <a:schemeClr val="accent1"/>
-          </a:fillRef>
-          <a:effectRef idx="2">
-            <a:schemeClr val="accent1"/>
-          </a:effectRef>
-          <a:fontRef idx="minor">
-            <a:schemeClr val="lt1"/>
-          </a:fontRef>
-        </p:style>
-        <p:txBody>
-          <a:bodyPr rtlCol="0" anchor="ctr" wrap="square"/>
-          <a:lstStyle/>
-          <a:p>
-            <a:pPr algn="ctr"/>
-          </a:p>
-        </p:txBody>
-      </p:sp>
-      <p:sp>
-        <p:nvSpPr>
-          <p:cNvPr id="16" name="Rectangle 15"/>
-          <p:cNvSpPr/>
-          <p:nvPr/>
-        </p:nvSpPr>
-        <p:spPr>
-          <a:xfrm>
-            <a:off x="8051596" y="2212848"/>
-            <a:ext cx="3362858" cy="45720"/>
-          </a:xfrm>
-          <a:prstGeom prst="rect">
-            <a:avLst/>
-          </a:prstGeom>
-          <a:solidFill>
-            <a:srgbClr val="B7791F"/>
-          </a:solidFill>
-          <a:ln>
-            <a:noFill/>
-          </a:ln>
-          <a:effectLst/>
-        </p:spPr>
-        <p:style>
-          <a:lnRef idx="1">
-            <a:schemeClr val="accent1"/>
-          </a:lnRef>
-          <a:fillRef idx="3">
-            <a:schemeClr val="accent1"/>
-          </a:fillRef>
-          <a:effectRef idx="2">
-            <a:schemeClr val="accent1"/>
-          </a:effectRef>
-          <a:fontRef idx="minor">
-            <a:schemeClr val="lt1"/>
-          </a:fontRef>
-        </p:style>
-        <p:txBody>
-          <a:bodyPr rtlCol="0" anchor="ctr" wrap="square"/>
-          <a:lstStyle/>
-          <a:p>
-            <a:pPr algn="ctr"/>
-          </a:p>
-        </p:txBody>
-      </p:sp>
-      <p:sp>
-        <p:nvSpPr>
-          <p:cNvPr id="17" name="TextBox 16"/>
-          <p:cNvSpPr txBox="1"/>
-          <p:nvPr/>
-        </p:nvSpPr>
-        <p:spPr>
-          <a:xfrm>
-            <a:off x="8271052" y="2450592"/>
-            <a:ext cx="2923946" cy="1024128"/>
-          </a:xfrm>
-          <a:prstGeom prst="rect">
-            <a:avLst/>
-          </a:prstGeom>
-          <a:noFill/>
-        </p:spPr>
-        <p:txBody>
-          <a:bodyPr wrap="square" anchor="t" lIns="0" rIns="0" tIns="0" bIns="0">
-            <a:spAutoFit/>
-          </a:bodyPr>
-          <a:lstStyle/>
-          <a:p>
-            <a:pPr algn="l">
-              <a:spcAft>
-                <a:spcPts val="400"/>
-              </a:spcAft>
-            </a:pPr>
-            <a:r>
-              <a:rPr sz="4000" b="1" i="0">
-                <a:solidFill>
-                  <a:srgbClr val="B7791F"/>
-                </a:solidFill>
-                <a:latin typeface="Georgia"/>
-              </a:rPr>
-              <a:t>$0.80</a:t>
-            </a:r>
-          </a:p>
-          <a:p>
-            <a:pPr algn="l">
-              <a:spcAft>
-                <a:spcPts val="0"/>
-              </a:spcAft>
-            </a:pPr>
-            <a:r>
-              <a:rPr sz="1200" b="0" i="0">
-                <a:solidFill>
-                  <a:srgbClr val="5A6B7C"/>
-                </a:solidFill>
-                <a:latin typeface="Arial"/>
-              </a:rPr>
-              <a:t>per 1,000 prompts, on top of the model call itself</a:t>
-            </a:r>
-          </a:p>
-        </p:txBody>
-      </p:sp>
-      <p:sp>
-        <p:nvSpPr>
-          <p:cNvPr id="18" name="TextBox 17"/>
-          <p:cNvSpPr txBox="1"/>
-          <p:nvPr/>
-        </p:nvSpPr>
-        <p:spPr>
-          <a:xfrm>
-            <a:off x="777240" y="3941064"/>
-            <a:ext cx="10637215" cy="2011680"/>
-          </a:xfrm>
-          <a:prstGeom prst="rect">
-            <a:avLst/>
-          </a:prstGeom>
-          <a:noFill/>
-        </p:spPr>
-        <p:txBody>
-          <a:bodyPr wrap="square" anchor="t" lIns="0" rIns="0" tIns="0" bIns="0">
-            <a:spAutoFit/>
-          </a:bodyPr>
-          <a:lstStyle/>
-          <a:p>
-            <a:pPr algn="l">
-              <a:spcAft>
-                <a:spcPts val="1200"/>
-              </a:spcAft>
-            </a:pPr>
-            <a:r>
-              <a:rPr sz="1450" b="1" i="0">
-                <a:solidFill>
-                  <a:srgbClr val="A02128"/>
-                </a:solidFill>
-                <a:latin typeface="Arial"/>
-              </a:rPr>
-              <a:t>—  </a:t>
-            </a:r>
-            <a:r>
-              <a:rPr sz="1450" b="1" i="0">
-                <a:solidFill>
-                  <a:srgbClr val="12263A"/>
-                </a:solidFill>
-                <a:latin typeface="Arial"/>
-              </a:rPr>
-              <a:t>Use hosted where the prompt may lawfully leave. </a:t>
-            </a:r>
-            <a:r>
-              <a:rPr sz="1450" b="0" i="0">
-                <a:solidFill>
-                  <a:srgbClr val="5A6B7C"/>
-                </a:solidFill>
-                <a:latin typeface="Arial"/>
-              </a:rPr>
-              <a:t>The accuracy gain is real, it is statistically solid, and on general safety traffic the latency is tolerable.</a:t>
-            </a:r>
-          </a:p>
-          <a:p>
-            <a:pPr algn="l">
-              <a:spcAft>
-                <a:spcPts val="1200"/>
-              </a:spcAft>
-            </a:pPr>
-            <a:r>
-              <a:rPr sz="1450" b="1" i="0">
-                <a:solidFill>
-                  <a:srgbClr val="A02128"/>
-                </a:solidFill>
-                <a:latin typeface="Arial"/>
-              </a:rPr>
-              <a:t>—  </a:t>
-            </a:r>
-            <a:r>
-              <a:rPr sz="1450" b="1" i="0">
-                <a:solidFill>
-                  <a:srgbClr val="12263A"/>
-                </a:solidFill>
-                <a:latin typeface="Arial"/>
-              </a:rPr>
-              <a:t>Keep a self-hosted small guard on the regulated path. </a:t>
-            </a:r>
-            <a:r>
-              <a:rPr sz="1450" b="0" i="0">
-                <a:solidFill>
-                  <a:srgbClr val="5A6B7C"/>
-                </a:solidFill>
-                <a:latin typeface="Arial"/>
-              </a:rPr>
-              <a:t>Not because it is better -- it is not -- but because it is the only option when the prompt cannot leave, and it answers in milliseconds.</a:t>
-            </a:r>
-          </a:p>
-          <a:p>
-            <a:pPr algn="l">
-              <a:spcAft>
-                <a:spcPts val="1200"/>
-              </a:spcAft>
-            </a:pPr>
-            <a:r>
-              <a:rPr sz="1450" b="1" i="0">
-                <a:solidFill>
-                  <a:srgbClr val="A02128"/>
-                </a:solidFill>
-                <a:latin typeface="Arial"/>
-              </a:rPr>
-              <a:t>—  </a:t>
-            </a:r>
-            <a:r>
-              <a:rPr sz="1450" b="1" i="0">
-                <a:solidFill>
-                  <a:srgbClr val="12263A"/>
-                </a:solidFill>
-                <a:latin typeface="Arial"/>
-              </a:rPr>
-              <a:t>Do not budget for closing the gap. </a:t>
-            </a:r>
-            <a:r>
-              <a:rPr sz="1450" b="0" i="0">
-                <a:solidFill>
-                  <a:srgbClr val="5A6B7C"/>
-                </a:solidFill>
-                <a:latin typeface="Arial"/>
-              </a:rPr>
-              <a:t>We tried the two obvious routes. Fine-tuning did not close it and hurt 4 of 6 models on unfamiliar traffic; 8× more parameters bought less than the gap that remained.</a:t>
+              <a:t>of prompts never leave our network</a:t>
             </a:r>
           </a:p>
         </p:txBody>
@@ -7534,7 +8992,7 @@
                 </a:solidFill>
                 <a:latin typeface="Arial"/>
               </a:rPr>
-              <a:t>Guardrail sourcing · hosted frontier vs self-hosted small model</a:t>
+              <a:t>Guardrail sourcing · in-house inline, escalate the uncertain slice</a:t>
             </a:r>
           </a:p>
         </p:txBody>
@@ -8154,7 +9612,7 @@
                 </a:solidFill>
                 <a:latin typeface="Arial"/>
               </a:rPr>
-              <a:t>Guardrail sourcing · hosted frontier vs self-hosted small model</a:t>
+              <a:t>Guardrail sourcing · in-house inline, escalate the uncertain slice</a:t>
             </a:r>
           </a:p>
         </p:txBody>
@@ -8774,7 +10232,7 @@
                 </a:solidFill>
                 <a:latin typeface="Arial"/>
               </a:rPr>
-              <a:t>Guardrail sourcing · hosted frontier vs self-hosted small model</a:t>
+              <a:t>Guardrail sourcing · in-house inline, escalate the uncertain slice</a:t>
             </a:r>
           </a:p>
         </p:txBody>
@@ -9373,7 +10831,7 @@
                 </a:solidFill>
                 <a:latin typeface="Arial"/>
               </a:rPr>
-              <a:t>Guardrail sourcing · hosted frontier vs self-hosted small model</a:t>
+              <a:t>Guardrail sourcing · in-house inline, escalate the uncertain slice</a:t>
             </a:r>
           </a:p>
         </p:txBody>
@@ -9451,7 +10909,7 @@
                 </a:solidFill>
                 <a:latin typeface="Arial"/>
               </a:rPr>
-              <a:t>WHAT HOSTED COSTS</a:t>
+              <a:t>WHY THE RULE WORKS</a:t>
             </a:r>
           </a:p>
         </p:txBody>
@@ -9493,7 +10951,7 @@
                 </a:solidFill>
                 <a:latin typeface="Georgia"/>
               </a:rPr>
-              <a:t>The accuracy is real. So is the bill, the latency, and the loss of control</a:t>
+              <a:t>You do not have to choose. Escalating the uncertain fifth buys half the difference</a:t>
             </a:r>
           </a:p>
         </p:txBody>
@@ -9532,7 +10990,7 @@
                 </a:solidFill>
                 <a:latin typeface="Arial"/>
               </a:rPr>
-              <a:t>Four costs, three of which do not appear on an invoice</a:t>
+              <a:t>Recall against the share of requests sent out, at a fixed 5% false-alarm budget</a:t>
             </a:r>
           </a:p>
         </p:txBody>
@@ -9581,975 +11039,40 @@
           </a:p>
         </p:txBody>
       </p:sp>
-      <p:sp>
-        <p:nvSpPr>
-          <p:cNvPr id="9" name="Rectangle 8"/>
+      <p:pic>
+        <p:nvPicPr>
+          <p:cNvPr id="9" name="Picture 8" descr="exec_cascade.png"/>
+          <p:cNvPicPr>
+            <a:picLocks noChangeAspect="1"/>
+          </p:cNvPicPr>
+          <p:nvPr/>
+        </p:nvPicPr>
+        <p:blipFill>
+          <a:blip r:embed="rId2"/>
+          <a:stretch>
+            <a:fillRect/>
+          </a:stretch>
+        </p:blipFill>
+        <p:spPr>
+          <a:xfrm>
+            <a:off x="777240" y="2084832"/>
+            <a:ext cx="5610201" cy="3108960"/>
+          </a:xfrm>
+          <a:prstGeom prst="rect">
+            <a:avLst/>
+          </a:prstGeom>
+        </p:spPr>
+      </p:pic>
+      <p:sp>
+        <p:nvSpPr>
+          <p:cNvPr id="10" name="Rounded Rectangle 9"/>
           <p:cNvSpPr/>
           <p:nvPr/>
         </p:nvSpPr>
         <p:spPr>
           <a:xfrm>
-            <a:off x="777240" y="2249424"/>
-            <a:ext cx="5112867" cy="420624"/>
-          </a:xfrm>
-          <a:prstGeom prst="rect">
-            <a:avLst/>
-          </a:prstGeom>
-          <a:solidFill>
-            <a:srgbClr val="12263A"/>
-          </a:solidFill>
-          <a:ln>
-            <a:noFill/>
-          </a:ln>
-          <a:effectLst/>
-        </p:spPr>
-        <p:style>
-          <a:lnRef idx="1">
-            <a:schemeClr val="accent1"/>
-          </a:lnRef>
-          <a:fillRef idx="3">
-            <a:schemeClr val="accent1"/>
-          </a:fillRef>
-          <a:effectRef idx="2">
-            <a:schemeClr val="accent1"/>
-          </a:effectRef>
-          <a:fontRef idx="minor">
-            <a:schemeClr val="lt1"/>
-          </a:fontRef>
-        </p:style>
-        <p:txBody>
-          <a:bodyPr rtlCol="0" anchor="ctr" wrap="square"/>
-          <a:lstStyle/>
-          <a:p>
-            <a:pPr algn="ctr"/>
-          </a:p>
-        </p:txBody>
-      </p:sp>
-      <p:sp>
-        <p:nvSpPr>
-          <p:cNvPr id="10" name="TextBox 9"/>
-          <p:cNvSpPr txBox="1"/>
-          <p:nvPr/>
-        </p:nvSpPr>
-        <p:spPr>
-          <a:xfrm>
-            <a:off x="905256" y="2249424"/>
-            <a:ext cx="1993629" cy="420624"/>
-          </a:xfrm>
-          <a:prstGeom prst="rect">
-            <a:avLst/>
-          </a:prstGeom>
-          <a:noFill/>
-        </p:spPr>
-        <p:txBody>
-          <a:bodyPr wrap="square" anchor="ctr" lIns="0" rIns="0" tIns="0" bIns="0">
-            <a:spAutoFit/>
-          </a:bodyPr>
-          <a:lstStyle/>
-          <a:p>
-            <a:pPr algn="l">
-              <a:spcAft>
-                <a:spcPts val="0"/>
-              </a:spcAft>
-            </a:pPr>
-            <a:r>
-              <a:rPr sz="1300" b="1" i="0">
-                <a:solidFill>
-                  <a:srgbClr val="FFFFFF"/>
-                </a:solidFill>
-                <a:latin typeface="Arial"/>
-              </a:rPr>
-              <a:t/>
-            </a:r>
-          </a:p>
-        </p:txBody>
-      </p:sp>
-      <p:sp>
-        <p:nvSpPr>
-          <p:cNvPr id="11" name="TextBox 10"/>
-          <p:cNvSpPr txBox="1"/>
-          <p:nvPr/>
-        </p:nvSpPr>
-        <p:spPr>
-          <a:xfrm>
-            <a:off x="3154917" y="2249424"/>
-            <a:ext cx="1175570" cy="420624"/>
-          </a:xfrm>
-          <a:prstGeom prst="rect">
-            <a:avLst/>
-          </a:prstGeom>
-          <a:noFill/>
-        </p:spPr>
-        <p:txBody>
-          <a:bodyPr wrap="square" anchor="ctr" lIns="0" rIns="0" tIns="0" bIns="0">
-            <a:spAutoFit/>
-          </a:bodyPr>
-          <a:lstStyle/>
-          <a:p>
-            <a:pPr algn="ctr">
-              <a:spcAft>
-                <a:spcPts val="0"/>
-              </a:spcAft>
-            </a:pPr>
-            <a:r>
-              <a:rPr sz="1300" b="1" i="0">
-                <a:solidFill>
-                  <a:srgbClr val="FFFFFF"/>
-                </a:solidFill>
-                <a:latin typeface="Arial"/>
-              </a:rPr>
-              <a:t>Self-hosted small</a:t>
-            </a:r>
-          </a:p>
-        </p:txBody>
-      </p:sp>
-      <p:sp>
-        <p:nvSpPr>
-          <p:cNvPr id="12" name="TextBox 11"/>
-          <p:cNvSpPr txBox="1"/>
-          <p:nvPr/>
-        </p:nvSpPr>
-        <p:spPr>
-          <a:xfrm>
-            <a:off x="4586519" y="2249424"/>
-            <a:ext cx="1175570" cy="420624"/>
-          </a:xfrm>
-          <a:prstGeom prst="rect">
-            <a:avLst/>
-          </a:prstGeom>
-          <a:noFill/>
-        </p:spPr>
-        <p:txBody>
-          <a:bodyPr wrap="square" anchor="ctr" lIns="0" rIns="0" tIns="0" bIns="0">
-            <a:spAutoFit/>
-          </a:bodyPr>
-          <a:lstStyle/>
-          <a:p>
-            <a:pPr algn="ctr">
-              <a:spcAft>
-                <a:spcPts val="0"/>
-              </a:spcAft>
-            </a:pPr>
-            <a:r>
-              <a:rPr sz="1300" b="1" i="0">
-                <a:solidFill>
-                  <a:srgbClr val="FFFFFF"/>
-                </a:solidFill>
-                <a:latin typeface="Arial"/>
-              </a:rPr>
-              <a:t>Hosted frontier</a:t>
-            </a:r>
-          </a:p>
-        </p:txBody>
-      </p:sp>
-      <p:sp>
-        <p:nvSpPr>
-          <p:cNvPr id="13" name="Rectangle 12"/>
-          <p:cNvSpPr/>
-          <p:nvPr/>
-        </p:nvSpPr>
-        <p:spPr>
-          <a:xfrm>
-            <a:off x="777240" y="2670048"/>
-            <a:ext cx="5112867" cy="420624"/>
-          </a:xfrm>
-          <a:prstGeom prst="rect">
-            <a:avLst/>
-          </a:prstGeom>
-          <a:solidFill>
-            <a:srgbClr val="F7F9FA"/>
-          </a:solidFill>
-          <a:ln w="6350">
-            <a:solidFill>
-              <a:srgbClr val="D8DEE4"/>
-            </a:solidFill>
-          </a:ln>
-          <a:effectLst/>
-        </p:spPr>
-        <p:style>
-          <a:lnRef idx="1">
-            <a:schemeClr val="accent1"/>
-          </a:lnRef>
-          <a:fillRef idx="3">
-            <a:schemeClr val="accent1"/>
-          </a:fillRef>
-          <a:effectRef idx="2">
-            <a:schemeClr val="accent1"/>
-          </a:effectRef>
-          <a:fontRef idx="minor">
-            <a:schemeClr val="lt1"/>
-          </a:fontRef>
-        </p:style>
-        <p:txBody>
-          <a:bodyPr rtlCol="0" anchor="ctr" wrap="square"/>
-          <a:lstStyle/>
-          <a:p>
-            <a:pPr algn="ctr"/>
-          </a:p>
-        </p:txBody>
-      </p:sp>
-      <p:sp>
-        <p:nvSpPr>
-          <p:cNvPr id="14" name="TextBox 13"/>
-          <p:cNvSpPr txBox="1"/>
-          <p:nvPr/>
-        </p:nvSpPr>
-        <p:spPr>
-          <a:xfrm>
-            <a:off x="905256" y="2670048"/>
-            <a:ext cx="1993629" cy="420624"/>
-          </a:xfrm>
-          <a:prstGeom prst="rect">
-            <a:avLst/>
-          </a:prstGeom>
-          <a:noFill/>
-        </p:spPr>
-        <p:txBody>
-          <a:bodyPr wrap="square" anchor="ctr" lIns="0" rIns="0" tIns="0" bIns="0">
-            <a:spAutoFit/>
-          </a:bodyPr>
-          <a:lstStyle/>
-          <a:p>
-            <a:pPr algn="l">
-              <a:spcAft>
-                <a:spcPts val="0"/>
-              </a:spcAft>
-            </a:pPr>
-            <a:r>
-              <a:rPr sz="1300" b="1" i="0">
-                <a:solidFill>
-                  <a:srgbClr val="12263A"/>
-                </a:solidFill>
-                <a:latin typeface="Arial"/>
-              </a:rPr>
-              <a:t>Median latency</a:t>
-            </a:r>
-          </a:p>
-        </p:txBody>
-      </p:sp>
-      <p:sp>
-        <p:nvSpPr>
-          <p:cNvPr id="15" name="TextBox 14"/>
-          <p:cNvSpPr txBox="1"/>
-          <p:nvPr/>
-        </p:nvSpPr>
-        <p:spPr>
-          <a:xfrm>
-            <a:off x="3154917" y="2670048"/>
-            <a:ext cx="1175570" cy="420624"/>
-          </a:xfrm>
-          <a:prstGeom prst="rect">
-            <a:avLst/>
-          </a:prstGeom>
-          <a:noFill/>
-        </p:spPr>
-        <p:txBody>
-          <a:bodyPr wrap="square" anchor="ctr" lIns="0" rIns="0" tIns="0" bIns="0">
-            <a:spAutoFit/>
-          </a:bodyPr>
-          <a:lstStyle/>
-          <a:p>
-            <a:pPr algn="ctr">
-              <a:spcAft>
-                <a:spcPts val="0"/>
-              </a:spcAft>
-            </a:pPr>
-            <a:r>
-              <a:rPr sz="1300" b="0" i="0">
-                <a:solidFill>
-                  <a:srgbClr val="12263A"/>
-                </a:solidFill>
-                <a:latin typeface="Arial"/>
-              </a:rPr>
-              <a:t>10–25 ms</a:t>
-            </a:r>
-          </a:p>
-        </p:txBody>
-      </p:sp>
-      <p:sp>
-        <p:nvSpPr>
-          <p:cNvPr id="16" name="TextBox 15"/>
-          <p:cNvSpPr txBox="1"/>
-          <p:nvPr/>
-        </p:nvSpPr>
-        <p:spPr>
-          <a:xfrm>
-            <a:off x="4586519" y="2670048"/>
-            <a:ext cx="1175570" cy="420624"/>
-          </a:xfrm>
-          <a:prstGeom prst="rect">
-            <a:avLst/>
-          </a:prstGeom>
-          <a:noFill/>
-        </p:spPr>
-        <p:txBody>
-          <a:bodyPr wrap="square" anchor="ctr" lIns="0" rIns="0" tIns="0" bIns="0">
-            <a:spAutoFit/>
-          </a:bodyPr>
-          <a:lstStyle/>
-          <a:p>
-            <a:pPr algn="ctr">
-              <a:spcAft>
-                <a:spcPts val="0"/>
-              </a:spcAft>
-            </a:pPr>
-            <a:r>
-              <a:rPr sz="1300" b="0" i="0">
-                <a:solidFill>
-                  <a:srgbClr val="12263A"/>
-                </a:solidFill>
-                <a:latin typeface="Arial"/>
-              </a:rPr>
-              <a:t>~1,553 ms</a:t>
-            </a:r>
-          </a:p>
-        </p:txBody>
-      </p:sp>
-      <p:sp>
-        <p:nvSpPr>
-          <p:cNvPr id="17" name="Rectangle 16"/>
-          <p:cNvSpPr/>
-          <p:nvPr/>
-        </p:nvSpPr>
-        <p:spPr>
-          <a:xfrm>
-            <a:off x="777240" y="3090672"/>
-            <a:ext cx="5112867" cy="420624"/>
-          </a:xfrm>
-          <a:prstGeom prst="rect">
-            <a:avLst/>
-          </a:prstGeom>
-          <a:solidFill>
-            <a:srgbClr val="FFFFFF"/>
-          </a:solidFill>
-          <a:ln w="6350">
-            <a:solidFill>
-              <a:srgbClr val="D8DEE4"/>
-            </a:solidFill>
-          </a:ln>
-          <a:effectLst/>
-        </p:spPr>
-        <p:style>
-          <a:lnRef idx="1">
-            <a:schemeClr val="accent1"/>
-          </a:lnRef>
-          <a:fillRef idx="3">
-            <a:schemeClr val="accent1"/>
-          </a:fillRef>
-          <a:effectRef idx="2">
-            <a:schemeClr val="accent1"/>
-          </a:effectRef>
-          <a:fontRef idx="minor">
-            <a:schemeClr val="lt1"/>
-          </a:fontRef>
-        </p:style>
-        <p:txBody>
-          <a:bodyPr rtlCol="0" anchor="ctr" wrap="square"/>
-          <a:lstStyle/>
-          <a:p>
-            <a:pPr algn="ctr"/>
-          </a:p>
-        </p:txBody>
-      </p:sp>
-      <p:sp>
-        <p:nvSpPr>
-          <p:cNvPr id="18" name="TextBox 17"/>
-          <p:cNvSpPr txBox="1"/>
-          <p:nvPr/>
-        </p:nvSpPr>
-        <p:spPr>
-          <a:xfrm>
-            <a:off x="905256" y="3090672"/>
-            <a:ext cx="1993629" cy="420624"/>
-          </a:xfrm>
-          <a:prstGeom prst="rect">
-            <a:avLst/>
-          </a:prstGeom>
-          <a:noFill/>
-        </p:spPr>
-        <p:txBody>
-          <a:bodyPr wrap="square" anchor="ctr" lIns="0" rIns="0" tIns="0" bIns="0">
-            <a:spAutoFit/>
-          </a:bodyPr>
-          <a:lstStyle/>
-          <a:p>
-            <a:pPr algn="l">
-              <a:spcAft>
-                <a:spcPts val="0"/>
-              </a:spcAft>
-            </a:pPr>
-            <a:r>
-              <a:rPr sz="1300" b="1" i="0">
-                <a:solidFill>
-                  <a:srgbClr val="12263A"/>
-                </a:solidFill>
-                <a:latin typeface="Arial"/>
-              </a:rPr>
-              <a:t>Cost per 1k prompts</a:t>
-            </a:r>
-          </a:p>
-        </p:txBody>
-      </p:sp>
-      <p:sp>
-        <p:nvSpPr>
-          <p:cNvPr id="19" name="TextBox 18"/>
-          <p:cNvSpPr txBox="1"/>
-          <p:nvPr/>
-        </p:nvSpPr>
-        <p:spPr>
-          <a:xfrm>
-            <a:off x="3154917" y="3090672"/>
-            <a:ext cx="1175570" cy="420624"/>
-          </a:xfrm>
-          <a:prstGeom prst="rect">
-            <a:avLst/>
-          </a:prstGeom>
-          <a:noFill/>
-        </p:spPr>
-        <p:txBody>
-          <a:bodyPr wrap="square" anchor="ctr" lIns="0" rIns="0" tIns="0" bIns="0">
-            <a:spAutoFit/>
-          </a:bodyPr>
-          <a:lstStyle/>
-          <a:p>
-            <a:pPr algn="ctr">
-              <a:spcAft>
-                <a:spcPts val="0"/>
-              </a:spcAft>
-            </a:pPr>
-            <a:r>
-              <a:rPr sz="1300" b="0" i="0">
-                <a:solidFill>
-                  <a:srgbClr val="12263A"/>
-                </a:solidFill>
-                <a:latin typeface="Arial"/>
-              </a:rPr>
-              <a:t>GPU you own</a:t>
-            </a:r>
-          </a:p>
-        </p:txBody>
-      </p:sp>
-      <p:sp>
-        <p:nvSpPr>
-          <p:cNvPr id="20" name="TextBox 19"/>
-          <p:cNvSpPr txBox="1"/>
-          <p:nvPr/>
-        </p:nvSpPr>
-        <p:spPr>
-          <a:xfrm>
-            <a:off x="4586519" y="3090672"/>
-            <a:ext cx="1175570" cy="420624"/>
-          </a:xfrm>
-          <a:prstGeom prst="rect">
-            <a:avLst/>
-          </a:prstGeom>
-          <a:noFill/>
-        </p:spPr>
-        <p:txBody>
-          <a:bodyPr wrap="square" anchor="ctr" lIns="0" rIns="0" tIns="0" bIns="0">
-            <a:spAutoFit/>
-          </a:bodyPr>
-          <a:lstStyle/>
-          <a:p>
-            <a:pPr algn="ctr">
-              <a:spcAft>
-                <a:spcPts val="0"/>
-              </a:spcAft>
-            </a:pPr>
-            <a:r>
-              <a:rPr sz="1300" b="0" i="0">
-                <a:solidFill>
-                  <a:srgbClr val="12263A"/>
-                </a:solidFill>
-                <a:latin typeface="Arial"/>
-              </a:rPr>
-              <a:t>$0.80</a:t>
-            </a:r>
-          </a:p>
-        </p:txBody>
-      </p:sp>
-      <p:sp>
-        <p:nvSpPr>
-          <p:cNvPr id="21" name="Rectangle 20"/>
-          <p:cNvSpPr/>
-          <p:nvPr/>
-        </p:nvSpPr>
-        <p:spPr>
-          <a:xfrm>
-            <a:off x="777240" y="3511296"/>
-            <a:ext cx="5112867" cy="420624"/>
-          </a:xfrm>
-          <a:prstGeom prst="rect">
-            <a:avLst/>
-          </a:prstGeom>
-          <a:solidFill>
-            <a:srgbClr val="F7F9FA"/>
-          </a:solidFill>
-          <a:ln w="6350">
-            <a:solidFill>
-              <a:srgbClr val="D8DEE4"/>
-            </a:solidFill>
-          </a:ln>
-          <a:effectLst/>
-        </p:spPr>
-        <p:style>
-          <a:lnRef idx="1">
-            <a:schemeClr val="accent1"/>
-          </a:lnRef>
-          <a:fillRef idx="3">
-            <a:schemeClr val="accent1"/>
-          </a:fillRef>
-          <a:effectRef idx="2">
-            <a:schemeClr val="accent1"/>
-          </a:effectRef>
-          <a:fontRef idx="minor">
-            <a:schemeClr val="lt1"/>
-          </a:fontRef>
-        </p:style>
-        <p:txBody>
-          <a:bodyPr rtlCol="0" anchor="ctr" wrap="square"/>
-          <a:lstStyle/>
-          <a:p>
-            <a:pPr algn="ctr"/>
-          </a:p>
-        </p:txBody>
-      </p:sp>
-      <p:sp>
-        <p:nvSpPr>
-          <p:cNvPr id="22" name="TextBox 21"/>
-          <p:cNvSpPr txBox="1"/>
-          <p:nvPr/>
-        </p:nvSpPr>
-        <p:spPr>
-          <a:xfrm>
-            <a:off x="905256" y="3511296"/>
-            <a:ext cx="1993629" cy="420624"/>
-          </a:xfrm>
-          <a:prstGeom prst="rect">
-            <a:avLst/>
-          </a:prstGeom>
-          <a:noFill/>
-        </p:spPr>
-        <p:txBody>
-          <a:bodyPr wrap="square" anchor="ctr" lIns="0" rIns="0" tIns="0" bIns="0">
-            <a:spAutoFit/>
-          </a:bodyPr>
-          <a:lstStyle/>
-          <a:p>
-            <a:pPr algn="l">
-              <a:spcAft>
-                <a:spcPts val="0"/>
-              </a:spcAft>
-            </a:pPr>
-            <a:r>
-              <a:rPr sz="1300" b="1" i="0">
-                <a:solidFill>
-                  <a:srgbClr val="12263A"/>
-                </a:solidFill>
-                <a:latin typeface="Arial"/>
-              </a:rPr>
-              <a:t>Prompt leaves our network</a:t>
-            </a:r>
-          </a:p>
-        </p:txBody>
-      </p:sp>
-      <p:sp>
-        <p:nvSpPr>
-          <p:cNvPr id="23" name="TextBox 22"/>
-          <p:cNvSpPr txBox="1"/>
-          <p:nvPr/>
-        </p:nvSpPr>
-        <p:spPr>
-          <a:xfrm>
-            <a:off x="3154917" y="3511296"/>
-            <a:ext cx="1175570" cy="420624"/>
-          </a:xfrm>
-          <a:prstGeom prst="rect">
-            <a:avLst/>
-          </a:prstGeom>
-          <a:noFill/>
-        </p:spPr>
-        <p:txBody>
-          <a:bodyPr wrap="square" anchor="ctr" lIns="0" rIns="0" tIns="0" bIns="0">
-            <a:spAutoFit/>
-          </a:bodyPr>
-          <a:lstStyle/>
-          <a:p>
-            <a:pPr algn="ctr">
-              <a:spcAft>
-                <a:spcPts val="0"/>
-              </a:spcAft>
-            </a:pPr>
-            <a:r>
-              <a:rPr sz="1300" b="0" i="0">
-                <a:solidFill>
-                  <a:srgbClr val="12263A"/>
-                </a:solidFill>
-                <a:latin typeface="Arial"/>
-              </a:rPr>
-              <a:t>no</a:t>
-            </a:r>
-          </a:p>
-        </p:txBody>
-      </p:sp>
-      <p:sp>
-        <p:nvSpPr>
-          <p:cNvPr id="24" name="TextBox 23"/>
-          <p:cNvSpPr txBox="1"/>
-          <p:nvPr/>
-        </p:nvSpPr>
-        <p:spPr>
-          <a:xfrm>
-            <a:off x="4586519" y="3511296"/>
-            <a:ext cx="1175570" cy="420624"/>
-          </a:xfrm>
-          <a:prstGeom prst="rect">
-            <a:avLst/>
-          </a:prstGeom>
-          <a:noFill/>
-        </p:spPr>
-        <p:txBody>
-          <a:bodyPr wrap="square" anchor="ctr" lIns="0" rIns="0" tIns="0" bIns="0">
-            <a:spAutoFit/>
-          </a:bodyPr>
-          <a:lstStyle/>
-          <a:p>
-            <a:pPr algn="ctr">
-              <a:spcAft>
-                <a:spcPts val="0"/>
-              </a:spcAft>
-            </a:pPr>
-            <a:r>
-              <a:rPr sz="1300" b="0" i="0">
-                <a:solidFill>
-                  <a:srgbClr val="12263A"/>
-                </a:solidFill>
-                <a:latin typeface="Arial"/>
-              </a:rPr>
-              <a:t>yes</a:t>
-            </a:r>
-          </a:p>
-        </p:txBody>
-      </p:sp>
-      <p:sp>
-        <p:nvSpPr>
-          <p:cNvPr id="25" name="Rectangle 24"/>
-          <p:cNvSpPr/>
-          <p:nvPr/>
-        </p:nvSpPr>
-        <p:spPr>
-          <a:xfrm>
-            <a:off x="777240" y="3931920"/>
-            <a:ext cx="5112867" cy="420624"/>
-          </a:xfrm>
-          <a:prstGeom prst="rect">
-            <a:avLst/>
-          </a:prstGeom>
-          <a:solidFill>
-            <a:srgbClr val="FFFFFF"/>
-          </a:solidFill>
-          <a:ln w="6350">
-            <a:solidFill>
-              <a:srgbClr val="D8DEE4"/>
-            </a:solidFill>
-          </a:ln>
-          <a:effectLst/>
-        </p:spPr>
-        <p:style>
-          <a:lnRef idx="1">
-            <a:schemeClr val="accent1"/>
-          </a:lnRef>
-          <a:fillRef idx="3">
-            <a:schemeClr val="accent1"/>
-          </a:fillRef>
-          <a:effectRef idx="2">
-            <a:schemeClr val="accent1"/>
-          </a:effectRef>
-          <a:fontRef idx="minor">
-            <a:schemeClr val="lt1"/>
-          </a:fontRef>
-        </p:style>
-        <p:txBody>
-          <a:bodyPr rtlCol="0" anchor="ctr" wrap="square"/>
-          <a:lstStyle/>
-          <a:p>
-            <a:pPr algn="ctr"/>
-          </a:p>
-        </p:txBody>
-      </p:sp>
-      <p:sp>
-        <p:nvSpPr>
-          <p:cNvPr id="26" name="TextBox 25"/>
-          <p:cNvSpPr txBox="1"/>
-          <p:nvPr/>
-        </p:nvSpPr>
-        <p:spPr>
-          <a:xfrm>
-            <a:off x="905256" y="3931920"/>
-            <a:ext cx="1993629" cy="420624"/>
-          </a:xfrm>
-          <a:prstGeom prst="rect">
-            <a:avLst/>
-          </a:prstGeom>
-          <a:noFill/>
-        </p:spPr>
-        <p:txBody>
-          <a:bodyPr wrap="square" anchor="ctr" lIns="0" rIns="0" tIns="0" bIns="0">
-            <a:spAutoFit/>
-          </a:bodyPr>
-          <a:lstStyle/>
-          <a:p>
-            <a:pPr algn="l">
-              <a:spcAft>
-                <a:spcPts val="0"/>
-              </a:spcAft>
-            </a:pPr>
-            <a:r>
-              <a:rPr sz="1300" b="1" i="0">
-                <a:solidFill>
-                  <a:srgbClr val="12263A"/>
-                </a:solidFill>
-                <a:latin typeface="Arial"/>
-              </a:rPr>
-              <a:t>We choose the alarm rate</a:t>
-            </a:r>
-          </a:p>
-        </p:txBody>
-      </p:sp>
-      <p:sp>
-        <p:nvSpPr>
-          <p:cNvPr id="27" name="TextBox 26"/>
-          <p:cNvSpPr txBox="1"/>
-          <p:nvPr/>
-        </p:nvSpPr>
-        <p:spPr>
-          <a:xfrm>
-            <a:off x="3154917" y="3931920"/>
-            <a:ext cx="1175570" cy="420624"/>
-          </a:xfrm>
-          <a:prstGeom prst="rect">
-            <a:avLst/>
-          </a:prstGeom>
-          <a:noFill/>
-        </p:spPr>
-        <p:txBody>
-          <a:bodyPr wrap="square" anchor="ctr" lIns="0" rIns="0" tIns="0" bIns="0">
-            <a:spAutoFit/>
-          </a:bodyPr>
-          <a:lstStyle/>
-          <a:p>
-            <a:pPr algn="ctr">
-              <a:spcAft>
-                <a:spcPts val="0"/>
-              </a:spcAft>
-            </a:pPr>
-            <a:r>
-              <a:rPr sz="1300" b="0" i="0">
-                <a:solidFill>
-                  <a:srgbClr val="12263A"/>
-                </a:solidFill>
-                <a:latin typeface="Arial"/>
-              </a:rPr>
-              <a:t>exactly</a:t>
-            </a:r>
-          </a:p>
-        </p:txBody>
-      </p:sp>
-      <p:sp>
-        <p:nvSpPr>
-          <p:cNvPr id="28" name="TextBox 27"/>
-          <p:cNvSpPr txBox="1"/>
-          <p:nvPr/>
-        </p:nvSpPr>
-        <p:spPr>
-          <a:xfrm>
-            <a:off x="4586519" y="3931920"/>
-            <a:ext cx="1175570" cy="420624"/>
-          </a:xfrm>
-          <a:prstGeom prst="rect">
-            <a:avLst/>
-          </a:prstGeom>
-          <a:noFill/>
-        </p:spPr>
-        <p:txBody>
-          <a:bodyPr wrap="square" anchor="ctr" lIns="0" rIns="0" tIns="0" bIns="0">
-            <a:spAutoFit/>
-          </a:bodyPr>
-          <a:lstStyle/>
-          <a:p>
-            <a:pPr algn="ctr">
-              <a:spcAft>
-                <a:spcPts val="0"/>
-              </a:spcAft>
-            </a:pPr>
-            <a:r>
-              <a:rPr sz="1300" b="0" i="0">
-                <a:solidFill>
-                  <a:srgbClr val="12263A"/>
-                </a:solidFill>
-                <a:latin typeface="Arial"/>
-              </a:rPr>
-              <a:t>approximately</a:t>
-            </a:r>
-          </a:p>
-        </p:txBody>
-      </p:sp>
-      <p:sp>
-        <p:nvSpPr>
-          <p:cNvPr id="29" name="Rounded Rectangle 28"/>
-          <p:cNvSpPr/>
-          <p:nvPr/>
-        </p:nvSpPr>
-        <p:spPr>
-          <a:xfrm>
-            <a:off x="6301587" y="2249424"/>
-            <a:ext cx="5112867" cy="1481328"/>
-          </a:xfrm>
-          <a:prstGeom prst="roundRect">
-            <a:avLst/>
-          </a:prstGeom>
-          <a:solidFill>
-            <a:srgbClr val="FAF0F0"/>
-          </a:solidFill>
-          <a:ln>
-            <a:noFill/>
-          </a:ln>
-          <a:effectLst/>
-        </p:spPr>
-        <p:style>
-          <a:lnRef idx="1">
-            <a:schemeClr val="accent1"/>
-          </a:lnRef>
-          <a:fillRef idx="3">
-            <a:schemeClr val="accent1"/>
-          </a:fillRef>
-          <a:effectRef idx="2">
-            <a:schemeClr val="accent1"/>
-          </a:effectRef>
-          <a:fontRef idx="minor">
-            <a:schemeClr val="lt1"/>
-          </a:fontRef>
-        </p:style>
-        <p:txBody>
-          <a:bodyPr rtlCol="0" anchor="ctr" wrap="square"/>
-          <a:lstStyle/>
-          <a:p>
-            <a:pPr algn="ctr"/>
-          </a:p>
-        </p:txBody>
-      </p:sp>
-      <p:sp>
-        <p:nvSpPr>
-          <p:cNvPr id="30" name="Rectangle 29"/>
-          <p:cNvSpPr/>
-          <p:nvPr/>
-        </p:nvSpPr>
-        <p:spPr>
-          <a:xfrm>
-            <a:off x="6301587" y="2249424"/>
-            <a:ext cx="50292" cy="1481328"/>
-          </a:xfrm>
-          <a:prstGeom prst="rect">
-            <a:avLst/>
-          </a:prstGeom>
-          <a:solidFill>
-            <a:srgbClr val="A02128"/>
-          </a:solidFill>
-          <a:ln>
-            <a:noFill/>
-          </a:ln>
-          <a:effectLst/>
-        </p:spPr>
-        <p:style>
-          <a:lnRef idx="1">
-            <a:schemeClr val="accent1"/>
-          </a:lnRef>
-          <a:fillRef idx="3">
-            <a:schemeClr val="accent1"/>
-          </a:fillRef>
-          <a:effectRef idx="2">
-            <a:schemeClr val="accent1"/>
-          </a:effectRef>
-          <a:fontRef idx="minor">
-            <a:schemeClr val="lt1"/>
-          </a:fontRef>
-        </p:style>
-        <p:txBody>
-          <a:bodyPr rtlCol="0" anchor="ctr" wrap="square"/>
-          <a:lstStyle/>
-          <a:p>
-            <a:pPr algn="ctr"/>
-          </a:p>
-        </p:txBody>
-      </p:sp>
-      <p:sp>
-        <p:nvSpPr>
-          <p:cNvPr id="31" name="TextBox 30"/>
-          <p:cNvSpPr txBox="1"/>
-          <p:nvPr/>
-        </p:nvSpPr>
-        <p:spPr>
-          <a:xfrm>
-            <a:off x="6539331" y="2414016"/>
-            <a:ext cx="4655667" cy="1152144"/>
-          </a:xfrm>
-          <a:prstGeom prst="rect">
-            <a:avLst/>
-          </a:prstGeom>
-          <a:noFill/>
-        </p:spPr>
-        <p:txBody>
-          <a:bodyPr wrap="square" anchor="t" lIns="0" rIns="0" tIns="0" bIns="0">
-            <a:spAutoFit/>
-          </a:bodyPr>
-          <a:lstStyle/>
-          <a:p>
-            <a:pPr algn="l">
-              <a:spcAft>
-                <a:spcPts val="500"/>
-              </a:spcAft>
-            </a:pPr>
-            <a:r>
-              <a:rPr sz="1100" b="1" i="0" spc="110">
-                <a:solidFill>
-                  <a:srgbClr val="A02128"/>
-                </a:solidFill>
-                <a:latin typeface="Arial"/>
-              </a:rPr>
-              <a:t>THE ONE WE DID NOT EXPECT</a:t>
-            </a:r>
-          </a:p>
-          <a:p>
-            <a:pPr algn="l">
-              <a:lnSpc>
-                <a:spcPct val="106000"/>
-              </a:lnSpc>
-              <a:spcAft>
-                <a:spcPts val="0"/>
-              </a:spcAft>
-            </a:pPr>
-            <a:r>
-              <a:rPr sz="1350" b="0" i="0">
-                <a:solidFill>
-                  <a:srgbClr val="12263A"/>
-                </a:solidFill>
-                <a:latin typeface="Arial"/>
-              </a:rPr>
-              <a:t>The provider refused to evaluate a subset of prompts outright, and did so inconsistently — the same prompt was refused on some runs and not others. A guardrail that intermittently declines to answer is itself an audit finding.</a:t>
-            </a:r>
-          </a:p>
-        </p:txBody>
-      </p:sp>
-      <p:sp>
-        <p:nvSpPr>
-          <p:cNvPr id="32" name="Rounded Rectangle 31"/>
-          <p:cNvSpPr/>
-          <p:nvPr/>
-        </p:nvSpPr>
-        <p:spPr>
-          <a:xfrm>
-            <a:off x="6301587" y="3858768"/>
-            <a:ext cx="5112867" cy="1371600"/>
+            <a:off x="8641080" y="2157984"/>
+            <a:ext cx="2773375" cy="1572768"/>
           </a:xfrm>
           <a:prstGeom prst="roundRect">
             <a:avLst/>
@@ -10586,14 +11109,14 @@
       </p:sp>
       <p:sp>
         <p:nvSpPr>
-          <p:cNvPr id="33" name="Rectangle 32"/>
+          <p:cNvPr id="11" name="Rectangle 10"/>
           <p:cNvSpPr/>
           <p:nvPr/>
         </p:nvSpPr>
         <p:spPr>
           <a:xfrm>
-            <a:off x="6301587" y="3858768"/>
-            <a:ext cx="50292" cy="1371600"/>
+            <a:off x="8641080" y="2157984"/>
+            <a:ext cx="50292" cy="1572768"/>
           </a:xfrm>
           <a:prstGeom prst="rect">
             <a:avLst/>
@@ -10630,14 +11153,14 @@
       </p:sp>
       <p:sp>
         <p:nvSpPr>
-          <p:cNvPr id="34" name="TextBox 33"/>
+          <p:cNvPr id="12" name="TextBox 11"/>
           <p:cNvSpPr txBox="1"/>
           <p:nvPr/>
         </p:nvSpPr>
         <p:spPr>
           <a:xfrm>
-            <a:off x="6539331" y="4023360"/>
-            <a:ext cx="4655667" cy="1042416"/>
+            <a:off x="8878824" y="2322576"/>
+            <a:ext cx="2316175" cy="1243584"/>
           </a:xfrm>
           <a:prstGeom prst="rect">
             <a:avLst/>
@@ -10662,7 +11185,7 @@
                 </a:solidFill>
                 <a:latin typeface="Arial"/>
               </a:rPr>
-              <a:t>CONTROL OVER THE ALARM RATE</a:t>
+              <a:t>THE CURVE IS STEEP EARLY</a:t>
             </a:r>
           </a:p>
           <a:p>
@@ -10681,21 +11204,21 @@
                 </a:solidFill>
                 <a:latin typeface="Arial"/>
               </a:rPr>
-              <a:t>Our own model exposes a continuous score, so we can set the false-alarm budget precisely. The hosted model reports a coarse 0–100 value, so we can only land near a target.</a:t>
-            </a:r>
-          </a:p>
-        </p:txBody>
-      </p:sp>
-      <p:sp>
-        <p:nvSpPr>
-          <p:cNvPr id="35" name="Rounded Rectangle 34"/>
+              <a:t>The first requests escalated are the ones the in-house guard is least sure about, so they carry the most information. Value per escalated request falls as the share rises — which is why a fifth buys half.</a:t>
+            </a:r>
+          </a:p>
+        </p:txBody>
+      </p:sp>
+      <p:sp>
+        <p:nvSpPr>
+          <p:cNvPr id="13" name="Rounded Rectangle 12"/>
           <p:cNvSpPr/>
           <p:nvPr/>
         </p:nvSpPr>
         <p:spPr>
           <a:xfrm>
-            <a:off x="777240" y="5321808"/>
-            <a:ext cx="10637215" cy="969264"/>
+            <a:off x="8641080" y="3895344"/>
+            <a:ext cx="2773375" cy="1371600"/>
           </a:xfrm>
           <a:prstGeom prst="roundRect">
             <a:avLst/>
@@ -10732,14 +11255,14 @@
       </p:sp>
       <p:sp>
         <p:nvSpPr>
-          <p:cNvPr id="36" name="Rectangle 35"/>
+          <p:cNvPr id="14" name="Rectangle 13"/>
           <p:cNvSpPr/>
           <p:nvPr/>
         </p:nvSpPr>
         <p:spPr>
           <a:xfrm>
-            <a:off x="777240" y="5321808"/>
-            <a:ext cx="50292" cy="969264"/>
+            <a:off x="8641080" y="3895344"/>
+            <a:ext cx="50292" cy="1371600"/>
           </a:xfrm>
           <a:prstGeom prst="rect">
             <a:avLst/>
@@ -10776,14 +11299,14 @@
       </p:sp>
       <p:sp>
         <p:nvSpPr>
-          <p:cNvPr id="37" name="TextBox 36"/>
+          <p:cNvPr id="15" name="TextBox 14"/>
           <p:cNvSpPr txBox="1"/>
           <p:nvPr/>
         </p:nvSpPr>
         <p:spPr>
           <a:xfrm>
-            <a:off x="1014984" y="5486400"/>
-            <a:ext cx="10180015" cy="640080"/>
+            <a:off x="8878824" y="4059936"/>
+            <a:ext cx="2316175" cy="1042416"/>
           </a:xfrm>
           <a:prstGeom prst="rect">
             <a:avLst/>
@@ -10808,7 +11331,7 @@
                 </a:solidFill>
                 <a:latin typeface="Arial"/>
               </a:rPr>
-              <a:t>NOT A REASON TO REFUSE HOSTED</a:t>
+              <a:t>IT IS A DIAL, NOT A SWITCH</a:t>
             </a:r>
           </a:p>
           <a:p>
@@ -10827,7 +11350,153 @@
                 </a:solidFill>
                 <a:latin typeface="Arial"/>
               </a:rPr>
-              <a:t>It is a reason to scope it: hosted on traffic where the prompt may leave and latency is not critical; self-hosted on the regulated, latency-sensitive path.</a:t>
+              <a:t>Legal sets the ceiling on what may leave; budget sets the rest. Pick a point on the curve — the architecture does not change.</a:t>
+            </a:r>
+          </a:p>
+        </p:txBody>
+      </p:sp>
+      <p:sp>
+        <p:nvSpPr>
+          <p:cNvPr id="16" name="Rounded Rectangle 15"/>
+          <p:cNvSpPr/>
+          <p:nvPr/>
+        </p:nvSpPr>
+        <p:spPr>
+          <a:xfrm>
+            <a:off x="777240" y="5376672"/>
+            <a:ext cx="10637215" cy="841248"/>
+          </a:xfrm>
+          <a:prstGeom prst="roundRect">
+            <a:avLst/>
+          </a:prstGeom>
+          <a:solidFill>
+            <a:srgbClr val="FDF7EC"/>
+          </a:solidFill>
+          <a:ln>
+            <a:noFill/>
+          </a:ln>
+          <a:effectLst/>
+        </p:spPr>
+        <p:style>
+          <a:lnRef idx="1">
+            <a:schemeClr val="accent1"/>
+          </a:lnRef>
+          <a:fillRef idx="3">
+            <a:schemeClr val="accent1"/>
+          </a:fillRef>
+          <a:effectRef idx="2">
+            <a:schemeClr val="accent1"/>
+          </a:effectRef>
+          <a:fontRef idx="minor">
+            <a:schemeClr val="lt1"/>
+          </a:fontRef>
+        </p:style>
+        <p:txBody>
+          <a:bodyPr rtlCol="0" anchor="ctr" wrap="square"/>
+          <a:lstStyle/>
+          <a:p>
+            <a:pPr algn="ctr"/>
+          </a:p>
+        </p:txBody>
+      </p:sp>
+      <p:sp>
+        <p:nvSpPr>
+          <p:cNvPr id="17" name="Rectangle 16"/>
+          <p:cNvSpPr/>
+          <p:nvPr/>
+        </p:nvSpPr>
+        <p:spPr>
+          <a:xfrm>
+            <a:off x="777240" y="5376672"/>
+            <a:ext cx="50292" cy="841248"/>
+          </a:xfrm>
+          <a:prstGeom prst="rect">
+            <a:avLst/>
+          </a:prstGeom>
+          <a:solidFill>
+            <a:srgbClr val="B7791F"/>
+          </a:solidFill>
+          <a:ln>
+            <a:noFill/>
+          </a:ln>
+          <a:effectLst/>
+        </p:spPr>
+        <p:style>
+          <a:lnRef idx="1">
+            <a:schemeClr val="accent1"/>
+          </a:lnRef>
+          <a:fillRef idx="3">
+            <a:schemeClr val="accent1"/>
+          </a:fillRef>
+          <a:effectRef idx="2">
+            <a:schemeClr val="accent1"/>
+          </a:effectRef>
+          <a:fontRef idx="minor">
+            <a:schemeClr val="lt1"/>
+          </a:fontRef>
+        </p:style>
+        <p:txBody>
+          <a:bodyPr rtlCol="0" anchor="ctr" wrap="square"/>
+          <a:lstStyle/>
+          <a:p>
+            <a:pPr algn="ctr"/>
+          </a:p>
+        </p:txBody>
+      </p:sp>
+      <p:sp>
+        <p:nvSpPr>
+          <p:cNvPr id="18" name="TextBox 17"/>
+          <p:cNvSpPr txBox="1"/>
+          <p:nvPr/>
+        </p:nvSpPr>
+        <p:spPr>
+          <a:xfrm>
+            <a:off x="1014984" y="5541264"/>
+            <a:ext cx="10180015" cy="512064"/>
+          </a:xfrm>
+          <a:prstGeom prst="rect">
+            <a:avLst/>
+          </a:prstGeom>
+          <a:noFill/>
+        </p:spPr>
+        <p:txBody>
+          <a:bodyPr wrap="square" anchor="t" lIns="0" rIns="0" tIns="0" bIns="0">
+            <a:spAutoFit/>
+          </a:bodyPr>
+          <a:lstStyle/>
+          <a:p>
+            <a:pPr algn="l">
+              <a:spcAft>
+                <a:spcPts val="500"/>
+              </a:spcAft>
+            </a:pPr>
+            <a:r>
+              <a:rPr sz="1100" b="1" i="0" spc="110">
+                <a:solidFill>
+                  <a:srgbClr val="B7791F"/>
+                </a:solidFill>
+                <a:latin typeface="Arial"/>
+              </a:rPr>
+              <a:t>WHAT THIS COSTS</a:t>
+            </a:r>
+          </a:p>
+          <a:p>
+            <a:pPr algn="l">
+              <a:lnSpc>
+                <a:spcPct val="106000"/>
+              </a:lnSpc>
+              <a:spcAft>
+                <a:spcPts val="0"/>
+              </a:spcAft>
+            </a:pPr>
+            <a:r>
+              <a:rPr sz="1350" b="0" i="0">
+                <a:solidFill>
+                  <a:srgbClr val="12263A"/>
+                </a:solidFill>
+                <a:latin typeface="Arial"/>
+              </a:rPr>
+              <a:t>At a 20% escalated share: about $0.16 per thousand requests instead of $0.80, and the 1,553 ms hosted round-trip lands on one request in five rather than on all of them.</a:t>
             </a:r>
           </a:p>
         </p:txBody>
@@ -10928,7 +11597,7 @@
                 </a:solidFill>
                 <a:latin typeface="Arial"/>
               </a:rPr>
-              <a:t>Guardrail sourcing · hosted frontier vs self-hosted small model</a:t>
+              <a:t>Guardrail sourcing · in-house inline, escalate the uncertain slice</a:t>
             </a:r>
           </a:p>
         </p:txBody>
@@ -11006,7 +11675,7 @@
                 </a:solidFill>
                 <a:latin typeface="Arial"/>
               </a:rPr>
-              <a:t>THE USEFUL FINDING</a:t>
+              <a:t>WHAT HOSTED COSTS</a:t>
             </a:r>
           </a:p>
         </p:txBody>
@@ -11048,7 +11717,7 @@
                 </a:solidFill>
                 <a:latin typeface="Georgia"/>
               </a:rPr>
-              <a:t>If we must self-host, a bigger untuned model beats a tuned small one</a:t>
+              <a:t>The accuracy is real. So is the bill, the latency, and the loss of control</a:t>
             </a:r>
           </a:p>
         </p:txBody>
@@ -11087,7 +11756,7 @@
                 </a:solidFill>
                 <a:latin typeface="Arial"/>
               </a:rPr>
-              <a:t>Because tuning's cost lands on exactly the traffic a guardrail exists to catch</a:t>
+              <a:t>Four costs, three of which do not appear on an invoice</a:t>
             </a:r>
           </a:p>
         </p:txBody>
@@ -11138,14 +11807,915 @@
       </p:sp>
       <p:sp>
         <p:nvSpPr>
-          <p:cNvPr id="9" name="TextBox 8"/>
+          <p:cNvPr id="9" name="Rectangle 8"/>
+          <p:cNvSpPr/>
+          <p:nvPr/>
+        </p:nvSpPr>
+        <p:spPr>
+          <a:xfrm>
+            <a:off x="777240" y="2249424"/>
+            <a:ext cx="5112867" cy="420624"/>
+          </a:xfrm>
+          <a:prstGeom prst="rect">
+            <a:avLst/>
+          </a:prstGeom>
+          <a:solidFill>
+            <a:srgbClr val="12263A"/>
+          </a:solidFill>
+          <a:ln>
+            <a:noFill/>
+          </a:ln>
+          <a:effectLst/>
+        </p:spPr>
+        <p:style>
+          <a:lnRef idx="1">
+            <a:schemeClr val="accent1"/>
+          </a:lnRef>
+          <a:fillRef idx="3">
+            <a:schemeClr val="accent1"/>
+          </a:fillRef>
+          <a:effectRef idx="2">
+            <a:schemeClr val="accent1"/>
+          </a:effectRef>
+          <a:fontRef idx="minor">
+            <a:schemeClr val="lt1"/>
+          </a:fontRef>
+        </p:style>
+        <p:txBody>
+          <a:bodyPr rtlCol="0" anchor="ctr" wrap="square"/>
+          <a:lstStyle/>
+          <a:p>
+            <a:pPr algn="ctr"/>
+          </a:p>
+        </p:txBody>
+      </p:sp>
+      <p:sp>
+        <p:nvSpPr>
+          <p:cNvPr id="10" name="TextBox 9"/>
           <p:cNvSpPr txBox="1"/>
           <p:nvPr/>
         </p:nvSpPr>
         <p:spPr>
           <a:xfrm>
-            <a:off x="777240" y="2212848"/>
-            <a:ext cx="5112867" cy="2651760"/>
+            <a:off x="905256" y="2249424"/>
+            <a:ext cx="1993629" cy="420624"/>
+          </a:xfrm>
+          <a:prstGeom prst="rect">
+            <a:avLst/>
+          </a:prstGeom>
+          <a:noFill/>
+        </p:spPr>
+        <p:txBody>
+          <a:bodyPr wrap="square" anchor="ctr" lIns="0" rIns="0" tIns="0" bIns="0">
+            <a:spAutoFit/>
+          </a:bodyPr>
+          <a:lstStyle/>
+          <a:p>
+            <a:pPr algn="l">
+              <a:spcAft>
+                <a:spcPts val="0"/>
+              </a:spcAft>
+            </a:pPr>
+            <a:r>
+              <a:rPr sz="1300" b="1" i="0">
+                <a:solidFill>
+                  <a:srgbClr val="FFFFFF"/>
+                </a:solidFill>
+                <a:latin typeface="Arial"/>
+              </a:rPr>
+              <a:t/>
+            </a:r>
+          </a:p>
+        </p:txBody>
+      </p:sp>
+      <p:sp>
+        <p:nvSpPr>
+          <p:cNvPr id="11" name="TextBox 10"/>
+          <p:cNvSpPr txBox="1"/>
+          <p:nvPr/>
+        </p:nvSpPr>
+        <p:spPr>
+          <a:xfrm>
+            <a:off x="3154917" y="2249424"/>
+            <a:ext cx="1175570" cy="420624"/>
+          </a:xfrm>
+          <a:prstGeom prst="rect">
+            <a:avLst/>
+          </a:prstGeom>
+          <a:noFill/>
+        </p:spPr>
+        <p:txBody>
+          <a:bodyPr wrap="square" anchor="ctr" lIns="0" rIns="0" tIns="0" bIns="0">
+            <a:spAutoFit/>
+          </a:bodyPr>
+          <a:lstStyle/>
+          <a:p>
+            <a:pPr algn="ctr">
+              <a:spcAft>
+                <a:spcPts val="0"/>
+              </a:spcAft>
+            </a:pPr>
+            <a:r>
+              <a:rPr sz="1300" b="1" i="0">
+                <a:solidFill>
+                  <a:srgbClr val="FFFFFF"/>
+                </a:solidFill>
+                <a:latin typeface="Arial"/>
+              </a:rPr>
+              <a:t>Self-hosted small</a:t>
+            </a:r>
+          </a:p>
+        </p:txBody>
+      </p:sp>
+      <p:sp>
+        <p:nvSpPr>
+          <p:cNvPr id="12" name="TextBox 11"/>
+          <p:cNvSpPr txBox="1"/>
+          <p:nvPr/>
+        </p:nvSpPr>
+        <p:spPr>
+          <a:xfrm>
+            <a:off x="4586519" y="2249424"/>
+            <a:ext cx="1175570" cy="420624"/>
+          </a:xfrm>
+          <a:prstGeom prst="rect">
+            <a:avLst/>
+          </a:prstGeom>
+          <a:noFill/>
+        </p:spPr>
+        <p:txBody>
+          <a:bodyPr wrap="square" anchor="ctr" lIns="0" rIns="0" tIns="0" bIns="0">
+            <a:spAutoFit/>
+          </a:bodyPr>
+          <a:lstStyle/>
+          <a:p>
+            <a:pPr algn="ctr">
+              <a:spcAft>
+                <a:spcPts val="0"/>
+              </a:spcAft>
+            </a:pPr>
+            <a:r>
+              <a:rPr sz="1300" b="1" i="0">
+                <a:solidFill>
+                  <a:srgbClr val="FFFFFF"/>
+                </a:solidFill>
+                <a:latin typeface="Arial"/>
+              </a:rPr>
+              <a:t>Hosted frontier</a:t>
+            </a:r>
+          </a:p>
+        </p:txBody>
+      </p:sp>
+      <p:sp>
+        <p:nvSpPr>
+          <p:cNvPr id="13" name="Rectangle 12"/>
+          <p:cNvSpPr/>
+          <p:nvPr/>
+        </p:nvSpPr>
+        <p:spPr>
+          <a:xfrm>
+            <a:off x="777240" y="2670048"/>
+            <a:ext cx="5112867" cy="420624"/>
+          </a:xfrm>
+          <a:prstGeom prst="rect">
+            <a:avLst/>
+          </a:prstGeom>
+          <a:solidFill>
+            <a:srgbClr val="F7F9FA"/>
+          </a:solidFill>
+          <a:ln w="6350">
+            <a:solidFill>
+              <a:srgbClr val="D8DEE4"/>
+            </a:solidFill>
+          </a:ln>
+          <a:effectLst/>
+        </p:spPr>
+        <p:style>
+          <a:lnRef idx="1">
+            <a:schemeClr val="accent1"/>
+          </a:lnRef>
+          <a:fillRef idx="3">
+            <a:schemeClr val="accent1"/>
+          </a:fillRef>
+          <a:effectRef idx="2">
+            <a:schemeClr val="accent1"/>
+          </a:effectRef>
+          <a:fontRef idx="minor">
+            <a:schemeClr val="lt1"/>
+          </a:fontRef>
+        </p:style>
+        <p:txBody>
+          <a:bodyPr rtlCol="0" anchor="ctr" wrap="square"/>
+          <a:lstStyle/>
+          <a:p>
+            <a:pPr algn="ctr"/>
+          </a:p>
+        </p:txBody>
+      </p:sp>
+      <p:sp>
+        <p:nvSpPr>
+          <p:cNvPr id="14" name="TextBox 13"/>
+          <p:cNvSpPr txBox="1"/>
+          <p:nvPr/>
+        </p:nvSpPr>
+        <p:spPr>
+          <a:xfrm>
+            <a:off x="905256" y="2670048"/>
+            <a:ext cx="1993629" cy="420624"/>
+          </a:xfrm>
+          <a:prstGeom prst="rect">
+            <a:avLst/>
+          </a:prstGeom>
+          <a:noFill/>
+        </p:spPr>
+        <p:txBody>
+          <a:bodyPr wrap="square" anchor="ctr" lIns="0" rIns="0" tIns="0" bIns="0">
+            <a:spAutoFit/>
+          </a:bodyPr>
+          <a:lstStyle/>
+          <a:p>
+            <a:pPr algn="l">
+              <a:spcAft>
+                <a:spcPts val="0"/>
+              </a:spcAft>
+            </a:pPr>
+            <a:r>
+              <a:rPr sz="1300" b="1" i="0">
+                <a:solidFill>
+                  <a:srgbClr val="12263A"/>
+                </a:solidFill>
+                <a:latin typeface="Arial"/>
+              </a:rPr>
+              <a:t>Median latency</a:t>
+            </a:r>
+          </a:p>
+        </p:txBody>
+      </p:sp>
+      <p:sp>
+        <p:nvSpPr>
+          <p:cNvPr id="15" name="TextBox 14"/>
+          <p:cNvSpPr txBox="1"/>
+          <p:nvPr/>
+        </p:nvSpPr>
+        <p:spPr>
+          <a:xfrm>
+            <a:off x="3154917" y="2670048"/>
+            <a:ext cx="1175570" cy="420624"/>
+          </a:xfrm>
+          <a:prstGeom prst="rect">
+            <a:avLst/>
+          </a:prstGeom>
+          <a:noFill/>
+        </p:spPr>
+        <p:txBody>
+          <a:bodyPr wrap="square" anchor="ctr" lIns="0" rIns="0" tIns="0" bIns="0">
+            <a:spAutoFit/>
+          </a:bodyPr>
+          <a:lstStyle/>
+          <a:p>
+            <a:pPr algn="ctr">
+              <a:spcAft>
+                <a:spcPts val="0"/>
+              </a:spcAft>
+            </a:pPr>
+            <a:r>
+              <a:rPr sz="1300" b="0" i="0">
+                <a:solidFill>
+                  <a:srgbClr val="12263A"/>
+                </a:solidFill>
+                <a:latin typeface="Arial"/>
+              </a:rPr>
+              <a:t>10–25 ms</a:t>
+            </a:r>
+          </a:p>
+        </p:txBody>
+      </p:sp>
+      <p:sp>
+        <p:nvSpPr>
+          <p:cNvPr id="16" name="TextBox 15"/>
+          <p:cNvSpPr txBox="1"/>
+          <p:nvPr/>
+        </p:nvSpPr>
+        <p:spPr>
+          <a:xfrm>
+            <a:off x="4586519" y="2670048"/>
+            <a:ext cx="1175570" cy="420624"/>
+          </a:xfrm>
+          <a:prstGeom prst="rect">
+            <a:avLst/>
+          </a:prstGeom>
+          <a:noFill/>
+        </p:spPr>
+        <p:txBody>
+          <a:bodyPr wrap="square" anchor="ctr" lIns="0" rIns="0" tIns="0" bIns="0">
+            <a:spAutoFit/>
+          </a:bodyPr>
+          <a:lstStyle/>
+          <a:p>
+            <a:pPr algn="ctr">
+              <a:spcAft>
+                <a:spcPts val="0"/>
+              </a:spcAft>
+            </a:pPr>
+            <a:r>
+              <a:rPr sz="1300" b="0" i="0">
+                <a:solidFill>
+                  <a:srgbClr val="12263A"/>
+                </a:solidFill>
+                <a:latin typeface="Arial"/>
+              </a:rPr>
+              <a:t>~1,553 ms</a:t>
+            </a:r>
+          </a:p>
+        </p:txBody>
+      </p:sp>
+      <p:sp>
+        <p:nvSpPr>
+          <p:cNvPr id="17" name="Rectangle 16"/>
+          <p:cNvSpPr/>
+          <p:nvPr/>
+        </p:nvSpPr>
+        <p:spPr>
+          <a:xfrm>
+            <a:off x="777240" y="3090672"/>
+            <a:ext cx="5112867" cy="420624"/>
+          </a:xfrm>
+          <a:prstGeom prst="rect">
+            <a:avLst/>
+          </a:prstGeom>
+          <a:solidFill>
+            <a:srgbClr val="FFFFFF"/>
+          </a:solidFill>
+          <a:ln w="6350">
+            <a:solidFill>
+              <a:srgbClr val="D8DEE4"/>
+            </a:solidFill>
+          </a:ln>
+          <a:effectLst/>
+        </p:spPr>
+        <p:style>
+          <a:lnRef idx="1">
+            <a:schemeClr val="accent1"/>
+          </a:lnRef>
+          <a:fillRef idx="3">
+            <a:schemeClr val="accent1"/>
+          </a:fillRef>
+          <a:effectRef idx="2">
+            <a:schemeClr val="accent1"/>
+          </a:effectRef>
+          <a:fontRef idx="minor">
+            <a:schemeClr val="lt1"/>
+          </a:fontRef>
+        </p:style>
+        <p:txBody>
+          <a:bodyPr rtlCol="0" anchor="ctr" wrap="square"/>
+          <a:lstStyle/>
+          <a:p>
+            <a:pPr algn="ctr"/>
+          </a:p>
+        </p:txBody>
+      </p:sp>
+      <p:sp>
+        <p:nvSpPr>
+          <p:cNvPr id="18" name="TextBox 17"/>
+          <p:cNvSpPr txBox="1"/>
+          <p:nvPr/>
+        </p:nvSpPr>
+        <p:spPr>
+          <a:xfrm>
+            <a:off x="905256" y="3090672"/>
+            <a:ext cx="1993629" cy="420624"/>
+          </a:xfrm>
+          <a:prstGeom prst="rect">
+            <a:avLst/>
+          </a:prstGeom>
+          <a:noFill/>
+        </p:spPr>
+        <p:txBody>
+          <a:bodyPr wrap="square" anchor="ctr" lIns="0" rIns="0" tIns="0" bIns="0">
+            <a:spAutoFit/>
+          </a:bodyPr>
+          <a:lstStyle/>
+          <a:p>
+            <a:pPr algn="l">
+              <a:spcAft>
+                <a:spcPts val="0"/>
+              </a:spcAft>
+            </a:pPr>
+            <a:r>
+              <a:rPr sz="1300" b="1" i="0">
+                <a:solidFill>
+                  <a:srgbClr val="12263A"/>
+                </a:solidFill>
+                <a:latin typeface="Arial"/>
+              </a:rPr>
+              <a:t>Cost per 1k prompts</a:t>
+            </a:r>
+          </a:p>
+        </p:txBody>
+      </p:sp>
+      <p:sp>
+        <p:nvSpPr>
+          <p:cNvPr id="19" name="TextBox 18"/>
+          <p:cNvSpPr txBox="1"/>
+          <p:nvPr/>
+        </p:nvSpPr>
+        <p:spPr>
+          <a:xfrm>
+            <a:off x="3154917" y="3090672"/>
+            <a:ext cx="1175570" cy="420624"/>
+          </a:xfrm>
+          <a:prstGeom prst="rect">
+            <a:avLst/>
+          </a:prstGeom>
+          <a:noFill/>
+        </p:spPr>
+        <p:txBody>
+          <a:bodyPr wrap="square" anchor="ctr" lIns="0" rIns="0" tIns="0" bIns="0">
+            <a:spAutoFit/>
+          </a:bodyPr>
+          <a:lstStyle/>
+          <a:p>
+            <a:pPr algn="ctr">
+              <a:spcAft>
+                <a:spcPts val="0"/>
+              </a:spcAft>
+            </a:pPr>
+            <a:r>
+              <a:rPr sz="1300" b="0" i="0">
+                <a:solidFill>
+                  <a:srgbClr val="12263A"/>
+                </a:solidFill>
+                <a:latin typeface="Arial"/>
+              </a:rPr>
+              <a:t>GPU you own</a:t>
+            </a:r>
+          </a:p>
+        </p:txBody>
+      </p:sp>
+      <p:sp>
+        <p:nvSpPr>
+          <p:cNvPr id="20" name="TextBox 19"/>
+          <p:cNvSpPr txBox="1"/>
+          <p:nvPr/>
+        </p:nvSpPr>
+        <p:spPr>
+          <a:xfrm>
+            <a:off x="4586519" y="3090672"/>
+            <a:ext cx="1175570" cy="420624"/>
+          </a:xfrm>
+          <a:prstGeom prst="rect">
+            <a:avLst/>
+          </a:prstGeom>
+          <a:noFill/>
+        </p:spPr>
+        <p:txBody>
+          <a:bodyPr wrap="square" anchor="ctr" lIns="0" rIns="0" tIns="0" bIns="0">
+            <a:spAutoFit/>
+          </a:bodyPr>
+          <a:lstStyle/>
+          <a:p>
+            <a:pPr algn="ctr">
+              <a:spcAft>
+                <a:spcPts val="0"/>
+              </a:spcAft>
+            </a:pPr>
+            <a:r>
+              <a:rPr sz="1300" b="0" i="0">
+                <a:solidFill>
+                  <a:srgbClr val="12263A"/>
+                </a:solidFill>
+                <a:latin typeface="Arial"/>
+              </a:rPr>
+              <a:t>$0.80</a:t>
+            </a:r>
+          </a:p>
+        </p:txBody>
+      </p:sp>
+      <p:sp>
+        <p:nvSpPr>
+          <p:cNvPr id="21" name="Rectangle 20"/>
+          <p:cNvSpPr/>
+          <p:nvPr/>
+        </p:nvSpPr>
+        <p:spPr>
+          <a:xfrm>
+            <a:off x="777240" y="3511296"/>
+            <a:ext cx="5112867" cy="420624"/>
+          </a:xfrm>
+          <a:prstGeom prst="rect">
+            <a:avLst/>
+          </a:prstGeom>
+          <a:solidFill>
+            <a:srgbClr val="F7F9FA"/>
+          </a:solidFill>
+          <a:ln w="6350">
+            <a:solidFill>
+              <a:srgbClr val="D8DEE4"/>
+            </a:solidFill>
+          </a:ln>
+          <a:effectLst/>
+        </p:spPr>
+        <p:style>
+          <a:lnRef idx="1">
+            <a:schemeClr val="accent1"/>
+          </a:lnRef>
+          <a:fillRef idx="3">
+            <a:schemeClr val="accent1"/>
+          </a:fillRef>
+          <a:effectRef idx="2">
+            <a:schemeClr val="accent1"/>
+          </a:effectRef>
+          <a:fontRef idx="minor">
+            <a:schemeClr val="lt1"/>
+          </a:fontRef>
+        </p:style>
+        <p:txBody>
+          <a:bodyPr rtlCol="0" anchor="ctr" wrap="square"/>
+          <a:lstStyle/>
+          <a:p>
+            <a:pPr algn="ctr"/>
+          </a:p>
+        </p:txBody>
+      </p:sp>
+      <p:sp>
+        <p:nvSpPr>
+          <p:cNvPr id="22" name="TextBox 21"/>
+          <p:cNvSpPr txBox="1"/>
+          <p:nvPr/>
+        </p:nvSpPr>
+        <p:spPr>
+          <a:xfrm>
+            <a:off x="905256" y="3511296"/>
+            <a:ext cx="1993629" cy="420624"/>
+          </a:xfrm>
+          <a:prstGeom prst="rect">
+            <a:avLst/>
+          </a:prstGeom>
+          <a:noFill/>
+        </p:spPr>
+        <p:txBody>
+          <a:bodyPr wrap="square" anchor="ctr" lIns="0" rIns="0" tIns="0" bIns="0">
+            <a:spAutoFit/>
+          </a:bodyPr>
+          <a:lstStyle/>
+          <a:p>
+            <a:pPr algn="l">
+              <a:spcAft>
+                <a:spcPts val="0"/>
+              </a:spcAft>
+            </a:pPr>
+            <a:r>
+              <a:rPr sz="1300" b="1" i="0">
+                <a:solidFill>
+                  <a:srgbClr val="12263A"/>
+                </a:solidFill>
+                <a:latin typeface="Arial"/>
+              </a:rPr>
+              <a:t>Prompt leaves our network</a:t>
+            </a:r>
+          </a:p>
+        </p:txBody>
+      </p:sp>
+      <p:sp>
+        <p:nvSpPr>
+          <p:cNvPr id="23" name="TextBox 22"/>
+          <p:cNvSpPr txBox="1"/>
+          <p:nvPr/>
+        </p:nvSpPr>
+        <p:spPr>
+          <a:xfrm>
+            <a:off x="3154917" y="3511296"/>
+            <a:ext cx="1175570" cy="420624"/>
+          </a:xfrm>
+          <a:prstGeom prst="rect">
+            <a:avLst/>
+          </a:prstGeom>
+          <a:noFill/>
+        </p:spPr>
+        <p:txBody>
+          <a:bodyPr wrap="square" anchor="ctr" lIns="0" rIns="0" tIns="0" bIns="0">
+            <a:spAutoFit/>
+          </a:bodyPr>
+          <a:lstStyle/>
+          <a:p>
+            <a:pPr algn="ctr">
+              <a:spcAft>
+                <a:spcPts val="0"/>
+              </a:spcAft>
+            </a:pPr>
+            <a:r>
+              <a:rPr sz="1300" b="0" i="0">
+                <a:solidFill>
+                  <a:srgbClr val="12263A"/>
+                </a:solidFill>
+                <a:latin typeface="Arial"/>
+              </a:rPr>
+              <a:t>no</a:t>
+            </a:r>
+          </a:p>
+        </p:txBody>
+      </p:sp>
+      <p:sp>
+        <p:nvSpPr>
+          <p:cNvPr id="24" name="TextBox 23"/>
+          <p:cNvSpPr txBox="1"/>
+          <p:nvPr/>
+        </p:nvSpPr>
+        <p:spPr>
+          <a:xfrm>
+            <a:off x="4586519" y="3511296"/>
+            <a:ext cx="1175570" cy="420624"/>
+          </a:xfrm>
+          <a:prstGeom prst="rect">
+            <a:avLst/>
+          </a:prstGeom>
+          <a:noFill/>
+        </p:spPr>
+        <p:txBody>
+          <a:bodyPr wrap="square" anchor="ctr" lIns="0" rIns="0" tIns="0" bIns="0">
+            <a:spAutoFit/>
+          </a:bodyPr>
+          <a:lstStyle/>
+          <a:p>
+            <a:pPr algn="ctr">
+              <a:spcAft>
+                <a:spcPts val="0"/>
+              </a:spcAft>
+            </a:pPr>
+            <a:r>
+              <a:rPr sz="1300" b="0" i="0">
+                <a:solidFill>
+                  <a:srgbClr val="12263A"/>
+                </a:solidFill>
+                <a:latin typeface="Arial"/>
+              </a:rPr>
+              <a:t>yes</a:t>
+            </a:r>
+          </a:p>
+        </p:txBody>
+      </p:sp>
+      <p:sp>
+        <p:nvSpPr>
+          <p:cNvPr id="25" name="Rectangle 24"/>
+          <p:cNvSpPr/>
+          <p:nvPr/>
+        </p:nvSpPr>
+        <p:spPr>
+          <a:xfrm>
+            <a:off x="777240" y="3931920"/>
+            <a:ext cx="5112867" cy="420624"/>
+          </a:xfrm>
+          <a:prstGeom prst="rect">
+            <a:avLst/>
+          </a:prstGeom>
+          <a:solidFill>
+            <a:srgbClr val="FFFFFF"/>
+          </a:solidFill>
+          <a:ln w="6350">
+            <a:solidFill>
+              <a:srgbClr val="D8DEE4"/>
+            </a:solidFill>
+          </a:ln>
+          <a:effectLst/>
+        </p:spPr>
+        <p:style>
+          <a:lnRef idx="1">
+            <a:schemeClr val="accent1"/>
+          </a:lnRef>
+          <a:fillRef idx="3">
+            <a:schemeClr val="accent1"/>
+          </a:fillRef>
+          <a:effectRef idx="2">
+            <a:schemeClr val="accent1"/>
+          </a:effectRef>
+          <a:fontRef idx="minor">
+            <a:schemeClr val="lt1"/>
+          </a:fontRef>
+        </p:style>
+        <p:txBody>
+          <a:bodyPr rtlCol="0" anchor="ctr" wrap="square"/>
+          <a:lstStyle/>
+          <a:p>
+            <a:pPr algn="ctr"/>
+          </a:p>
+        </p:txBody>
+      </p:sp>
+      <p:sp>
+        <p:nvSpPr>
+          <p:cNvPr id="26" name="TextBox 25"/>
+          <p:cNvSpPr txBox="1"/>
+          <p:nvPr/>
+        </p:nvSpPr>
+        <p:spPr>
+          <a:xfrm>
+            <a:off x="905256" y="3931920"/>
+            <a:ext cx="1993629" cy="420624"/>
+          </a:xfrm>
+          <a:prstGeom prst="rect">
+            <a:avLst/>
+          </a:prstGeom>
+          <a:noFill/>
+        </p:spPr>
+        <p:txBody>
+          <a:bodyPr wrap="square" anchor="ctr" lIns="0" rIns="0" tIns="0" bIns="0">
+            <a:spAutoFit/>
+          </a:bodyPr>
+          <a:lstStyle/>
+          <a:p>
+            <a:pPr algn="l">
+              <a:spcAft>
+                <a:spcPts val="0"/>
+              </a:spcAft>
+            </a:pPr>
+            <a:r>
+              <a:rPr sz="1300" b="1" i="0">
+                <a:solidFill>
+                  <a:srgbClr val="12263A"/>
+                </a:solidFill>
+                <a:latin typeface="Arial"/>
+              </a:rPr>
+              <a:t>We choose the alarm rate</a:t>
+            </a:r>
+          </a:p>
+        </p:txBody>
+      </p:sp>
+      <p:sp>
+        <p:nvSpPr>
+          <p:cNvPr id="27" name="TextBox 26"/>
+          <p:cNvSpPr txBox="1"/>
+          <p:nvPr/>
+        </p:nvSpPr>
+        <p:spPr>
+          <a:xfrm>
+            <a:off x="3154917" y="3931920"/>
+            <a:ext cx="1175570" cy="420624"/>
+          </a:xfrm>
+          <a:prstGeom prst="rect">
+            <a:avLst/>
+          </a:prstGeom>
+          <a:noFill/>
+        </p:spPr>
+        <p:txBody>
+          <a:bodyPr wrap="square" anchor="ctr" lIns="0" rIns="0" tIns="0" bIns="0">
+            <a:spAutoFit/>
+          </a:bodyPr>
+          <a:lstStyle/>
+          <a:p>
+            <a:pPr algn="ctr">
+              <a:spcAft>
+                <a:spcPts val="0"/>
+              </a:spcAft>
+            </a:pPr>
+            <a:r>
+              <a:rPr sz="1300" b="0" i="0">
+                <a:solidFill>
+                  <a:srgbClr val="12263A"/>
+                </a:solidFill>
+                <a:latin typeface="Arial"/>
+              </a:rPr>
+              <a:t>exactly</a:t>
+            </a:r>
+          </a:p>
+        </p:txBody>
+      </p:sp>
+      <p:sp>
+        <p:nvSpPr>
+          <p:cNvPr id="28" name="TextBox 27"/>
+          <p:cNvSpPr txBox="1"/>
+          <p:nvPr/>
+        </p:nvSpPr>
+        <p:spPr>
+          <a:xfrm>
+            <a:off x="4586519" y="3931920"/>
+            <a:ext cx="1175570" cy="420624"/>
+          </a:xfrm>
+          <a:prstGeom prst="rect">
+            <a:avLst/>
+          </a:prstGeom>
+          <a:noFill/>
+        </p:spPr>
+        <p:txBody>
+          <a:bodyPr wrap="square" anchor="ctr" lIns="0" rIns="0" tIns="0" bIns="0">
+            <a:spAutoFit/>
+          </a:bodyPr>
+          <a:lstStyle/>
+          <a:p>
+            <a:pPr algn="ctr">
+              <a:spcAft>
+                <a:spcPts val="0"/>
+              </a:spcAft>
+            </a:pPr>
+            <a:r>
+              <a:rPr sz="1300" b="0" i="0">
+                <a:solidFill>
+                  <a:srgbClr val="12263A"/>
+                </a:solidFill>
+                <a:latin typeface="Arial"/>
+              </a:rPr>
+              <a:t>approximately</a:t>
+            </a:r>
+          </a:p>
+        </p:txBody>
+      </p:sp>
+      <p:sp>
+        <p:nvSpPr>
+          <p:cNvPr id="29" name="Rounded Rectangle 28"/>
+          <p:cNvSpPr/>
+          <p:nvPr/>
+        </p:nvSpPr>
+        <p:spPr>
+          <a:xfrm>
+            <a:off x="6301587" y="2249424"/>
+            <a:ext cx="5112867" cy="1481328"/>
+          </a:xfrm>
+          <a:prstGeom prst="roundRect">
+            <a:avLst/>
+          </a:prstGeom>
+          <a:solidFill>
+            <a:srgbClr val="FAF0F0"/>
+          </a:solidFill>
+          <a:ln>
+            <a:noFill/>
+          </a:ln>
+          <a:effectLst/>
+        </p:spPr>
+        <p:style>
+          <a:lnRef idx="1">
+            <a:schemeClr val="accent1"/>
+          </a:lnRef>
+          <a:fillRef idx="3">
+            <a:schemeClr val="accent1"/>
+          </a:fillRef>
+          <a:effectRef idx="2">
+            <a:schemeClr val="accent1"/>
+          </a:effectRef>
+          <a:fontRef idx="minor">
+            <a:schemeClr val="lt1"/>
+          </a:fontRef>
+        </p:style>
+        <p:txBody>
+          <a:bodyPr rtlCol="0" anchor="ctr" wrap="square"/>
+          <a:lstStyle/>
+          <a:p>
+            <a:pPr algn="ctr"/>
+          </a:p>
+        </p:txBody>
+      </p:sp>
+      <p:sp>
+        <p:nvSpPr>
+          <p:cNvPr id="30" name="Rectangle 29"/>
+          <p:cNvSpPr/>
+          <p:nvPr/>
+        </p:nvSpPr>
+        <p:spPr>
+          <a:xfrm>
+            <a:off x="6301587" y="2249424"/>
+            <a:ext cx="50292" cy="1481328"/>
+          </a:xfrm>
+          <a:prstGeom prst="rect">
+            <a:avLst/>
+          </a:prstGeom>
+          <a:solidFill>
+            <a:srgbClr val="A02128"/>
+          </a:solidFill>
+          <a:ln>
+            <a:noFill/>
+          </a:ln>
+          <a:effectLst/>
+        </p:spPr>
+        <p:style>
+          <a:lnRef idx="1">
+            <a:schemeClr val="accent1"/>
+          </a:lnRef>
+          <a:fillRef idx="3">
+            <a:schemeClr val="accent1"/>
+          </a:fillRef>
+          <a:effectRef idx="2">
+            <a:schemeClr val="accent1"/>
+          </a:effectRef>
+          <a:fontRef idx="minor">
+            <a:schemeClr val="lt1"/>
+          </a:fontRef>
+        </p:style>
+        <p:txBody>
+          <a:bodyPr rtlCol="0" anchor="ctr" wrap="square"/>
+          <a:lstStyle/>
+          <a:p>
+            <a:pPr algn="ctr"/>
+          </a:p>
+        </p:txBody>
+      </p:sp>
+      <p:sp>
+        <p:nvSpPr>
+          <p:cNvPr id="31" name="TextBox 30"/>
+          <p:cNvSpPr txBox="1"/>
+          <p:nvPr/>
+        </p:nvSpPr>
+        <p:spPr>
+          <a:xfrm>
+            <a:off x="6539331" y="2414016"/>
+            <a:ext cx="4655667" cy="1152144"/>
           </a:xfrm>
           <a:prstGeom prst="rect">
             <a:avLst/>
@@ -11160,117 +12730,196 @@
           <a:p>
             <a:pPr algn="l">
               <a:spcAft>
-                <a:spcPts val="1200"/>
-              </a:spcAft>
-            </a:pPr>
-            <a:r>
-              <a:rPr sz="1450" b="1" i="0">
+                <a:spcPts val="500"/>
+              </a:spcAft>
+            </a:pPr>
+            <a:r>
+              <a:rPr sz="1100" b="1" i="0" spc="110">
                 <a:solidFill>
                   <a:srgbClr val="A02128"/>
                 </a:solidFill>
                 <a:latin typeface="Arial"/>
               </a:rPr>
-              <a:t>—  </a:t>
-            </a:r>
-            <a:r>
-              <a:rPr sz="1450" b="1" i="0">
+              <a:t>THE ONE WE DID NOT EXPECT</a:t>
+            </a:r>
+          </a:p>
+          <a:p>
+            <a:pPr algn="l">
+              <a:lnSpc>
+                <a:spcPct val="106000"/>
+              </a:lnSpc>
+              <a:spcAft>
+                <a:spcPts val="0"/>
+              </a:spcAft>
+            </a:pPr>
+            <a:r>
+              <a:rPr sz="1350" b="0" i="0">
                 <a:solidFill>
                   <a:srgbClr val="12263A"/>
                 </a:solidFill>
                 <a:latin typeface="Arial"/>
               </a:rPr>
-              <a:t>Tuning a small model. </a:t>
-            </a:r>
-            <a:r>
-              <a:rPr sz="1450" b="0" i="0">
-                <a:solidFill>
-                  <a:srgbClr val="5A6B7C"/>
-                </a:solidFill>
-                <a:latin typeface="Arial"/>
-              </a:rPr>
-              <a:t>Large gain on familiar traffic, and it gives back accuracy on unfamiliar traffic — which is where novel attacks arrive.</a:t>
-            </a:r>
-          </a:p>
+              <a:t>The provider refused to evaluate a subset of prompts outright, and did so inconsistently — the same prompt was refused on some runs and not others. A guardrail that intermittently declines to answer is itself an audit finding.</a:t>
+            </a:r>
+          </a:p>
+        </p:txBody>
+      </p:sp>
+      <p:sp>
+        <p:nvSpPr>
+          <p:cNvPr id="32" name="Rounded Rectangle 31"/>
+          <p:cNvSpPr/>
+          <p:nvPr/>
+        </p:nvSpPr>
+        <p:spPr>
+          <a:xfrm>
+            <a:off x="6301587" y="3858768"/>
+            <a:ext cx="5112867" cy="1371600"/>
+          </a:xfrm>
+          <a:prstGeom prst="roundRect">
+            <a:avLst/>
+          </a:prstGeom>
+          <a:solidFill>
+            <a:srgbClr val="EFF4FE"/>
+          </a:solidFill>
+          <a:ln>
+            <a:noFill/>
+          </a:ln>
+          <a:effectLst/>
+        </p:spPr>
+        <p:style>
+          <a:lnRef idx="1">
+            <a:schemeClr val="accent1"/>
+          </a:lnRef>
+          <a:fillRef idx="3">
+            <a:schemeClr val="accent1"/>
+          </a:fillRef>
+          <a:effectRef idx="2">
+            <a:schemeClr val="accent1"/>
+          </a:effectRef>
+          <a:fontRef idx="minor">
+            <a:schemeClr val="lt1"/>
+          </a:fontRef>
+        </p:style>
+        <p:txBody>
+          <a:bodyPr rtlCol="0" anchor="ctr" wrap="square"/>
+          <a:lstStyle/>
+          <a:p>
+            <a:pPr algn="ctr"/>
+          </a:p>
+        </p:txBody>
+      </p:sp>
+      <p:sp>
+        <p:nvSpPr>
+          <p:cNvPr id="33" name="Rectangle 32"/>
+          <p:cNvSpPr/>
+          <p:nvPr/>
+        </p:nvSpPr>
+        <p:spPr>
+          <a:xfrm>
+            <a:off x="6301587" y="3858768"/>
+            <a:ext cx="50292" cy="1371600"/>
+          </a:xfrm>
+          <a:prstGeom prst="rect">
+            <a:avLst/>
+          </a:prstGeom>
+          <a:solidFill>
+            <a:srgbClr val="2563EB"/>
+          </a:solidFill>
+          <a:ln>
+            <a:noFill/>
+          </a:ln>
+          <a:effectLst/>
+        </p:spPr>
+        <p:style>
+          <a:lnRef idx="1">
+            <a:schemeClr val="accent1"/>
+          </a:lnRef>
+          <a:fillRef idx="3">
+            <a:schemeClr val="accent1"/>
+          </a:fillRef>
+          <a:effectRef idx="2">
+            <a:schemeClr val="accent1"/>
+          </a:effectRef>
+          <a:fontRef idx="minor">
+            <a:schemeClr val="lt1"/>
+          </a:fontRef>
+        </p:style>
+        <p:txBody>
+          <a:bodyPr rtlCol="0" anchor="ctr" wrap="square"/>
+          <a:lstStyle/>
+          <a:p>
+            <a:pPr algn="ctr"/>
+          </a:p>
+        </p:txBody>
+      </p:sp>
+      <p:sp>
+        <p:nvSpPr>
+          <p:cNvPr id="34" name="TextBox 33"/>
+          <p:cNvSpPr txBox="1"/>
+          <p:nvPr/>
+        </p:nvSpPr>
+        <p:spPr>
+          <a:xfrm>
+            <a:off x="6539331" y="4023360"/>
+            <a:ext cx="4655667" cy="1042416"/>
+          </a:xfrm>
+          <a:prstGeom prst="rect">
+            <a:avLst/>
+          </a:prstGeom>
+          <a:noFill/>
+        </p:spPr>
+        <p:txBody>
+          <a:bodyPr wrap="square" anchor="t" lIns="0" rIns="0" tIns="0" bIns="0">
+            <a:spAutoFit/>
+          </a:bodyPr>
+          <a:lstStyle/>
           <a:p>
             <a:pPr algn="l">
               <a:spcAft>
-                <a:spcPts val="1200"/>
-              </a:spcAft>
-            </a:pPr>
-            <a:r>
-              <a:rPr sz="1450" b="1" i="0">
-                <a:solidFill>
-                  <a:srgbClr val="A02128"/>
-                </a:solidFill>
-                <a:latin typeface="Arial"/>
-              </a:rPr>
-              <a:t>—  </a:t>
-            </a:r>
-            <a:r>
-              <a:rPr sz="1450" b="1" i="0">
+                <a:spcPts val="500"/>
+              </a:spcAft>
+            </a:pPr>
+            <a:r>
+              <a:rPr sz="1100" b="1" i="0" spc="110">
+                <a:solidFill>
+                  <a:srgbClr val="2563EB"/>
+                </a:solidFill>
+                <a:latin typeface="Arial"/>
+              </a:rPr>
+              <a:t>CONTROL OVER THE ALARM RATE</a:t>
+            </a:r>
+          </a:p>
+          <a:p>
+            <a:pPr algn="l">
+              <a:lnSpc>
+                <a:spcPct val="106000"/>
+              </a:lnSpc>
+              <a:spcAft>
+                <a:spcPts val="0"/>
+              </a:spcAft>
+            </a:pPr>
+            <a:r>
+              <a:rPr sz="1350" b="0" i="0">
                 <a:solidFill>
                   <a:srgbClr val="12263A"/>
                 </a:solidFill>
                 <a:latin typeface="Arial"/>
               </a:rPr>
-              <a:t>A bigger untuned model. </a:t>
-            </a:r>
-            <a:r>
-              <a:rPr sz="1450" b="0" i="0">
-                <a:solidFill>
-                  <a:srgbClr val="5A6B7C"/>
-                </a:solidFill>
-                <a:latin typeface="Arial"/>
-              </a:rPr>
-              <a:t>Recovers most of that same gain on familiar traffic, and holds its accuracy on unfamiliar traffic.</a:t>
-            </a:r>
-          </a:p>
-          <a:p>
-            <a:pPr algn="l">
-              <a:spcAft>
-                <a:spcPts val="1200"/>
-              </a:spcAft>
-            </a:pPr>
-            <a:r>
-              <a:rPr sz="1450" b="1" i="0">
-                <a:solidFill>
-                  <a:srgbClr val="A02128"/>
-                </a:solidFill>
-                <a:latin typeface="Arial"/>
-              </a:rPr>
-              <a:t>—  </a:t>
-            </a:r>
-            <a:r>
-              <a:rPr sz="1450" b="1" i="0">
-                <a:solidFill>
-                  <a:srgbClr val="12263A"/>
-                </a:solidFill>
-                <a:latin typeface="Arial"/>
-              </a:rPr>
-              <a:t>So for a guardrail specifically. </a:t>
-            </a:r>
-            <a:r>
-              <a:rPr sz="1450" b="0" i="0">
-                <a:solidFill>
-                  <a:srgbClr val="5A6B7C"/>
-                </a:solidFill>
-                <a:latin typeface="Arial"/>
-              </a:rPr>
-              <a:t>Prefer spending on a stronger base model over spending on a tuning programme.</a:t>
-            </a:r>
-          </a:p>
-        </p:txBody>
-      </p:sp>
-      <p:sp>
-        <p:nvSpPr>
-          <p:cNvPr id="10" name="Rounded Rectangle 9"/>
+              <a:t>Our own model exposes a continuous score, so we can set the false-alarm budget precisely. The hosted model reports a coarse 0–100 value, so we can only land near a target.</a:t>
+            </a:r>
+          </a:p>
+        </p:txBody>
+      </p:sp>
+      <p:sp>
+        <p:nvSpPr>
+          <p:cNvPr id="35" name="Rounded Rectangle 34"/>
           <p:cNvSpPr/>
           <p:nvPr/>
         </p:nvSpPr>
         <p:spPr>
           <a:xfrm>
-            <a:off x="6301587" y="2212848"/>
-            <a:ext cx="5112867" cy="1554480"/>
+            <a:off x="777240" y="5321808"/>
+            <a:ext cx="10637215" cy="969264"/>
           </a:xfrm>
           <a:prstGeom prst="roundRect">
             <a:avLst/>
@@ -11307,14 +12956,14 @@
       </p:sp>
       <p:sp>
         <p:nvSpPr>
-          <p:cNvPr id="11" name="Rectangle 10"/>
+          <p:cNvPr id="36" name="Rectangle 35"/>
           <p:cNvSpPr/>
           <p:nvPr/>
         </p:nvSpPr>
         <p:spPr>
           <a:xfrm>
-            <a:off x="6301587" y="2212848"/>
-            <a:ext cx="50292" cy="1554480"/>
+            <a:off x="777240" y="5321808"/>
+            <a:ext cx="50292" cy="969264"/>
           </a:xfrm>
           <a:prstGeom prst="rect">
             <a:avLst/>
@@ -11351,14 +13000,14 @@
       </p:sp>
       <p:sp>
         <p:nvSpPr>
-          <p:cNvPr id="12" name="TextBox 11"/>
+          <p:cNvPr id="37" name="TextBox 36"/>
           <p:cNvSpPr txBox="1"/>
           <p:nvPr/>
         </p:nvSpPr>
         <p:spPr>
           <a:xfrm>
-            <a:off x="6539331" y="2377440"/>
-            <a:ext cx="4655667" cy="1225296"/>
+            <a:off x="1014984" y="5486400"/>
+            <a:ext cx="10180015" cy="640080"/>
           </a:xfrm>
           <a:prstGeom prst="rect">
             <a:avLst/>
@@ -11383,7 +13032,7 @@
                 </a:solidFill>
                 <a:latin typeface="Arial"/>
               </a:rPr>
-              <a:t>WHY THIS IS WORTH MONEY</a:t>
+              <a:t>NOT A REASON TO REFUSE HOSTED</a:t>
             </a:r>
           </a:p>
           <a:p>
@@ -11402,153 +13051,7 @@
                 </a:solidFill>
                 <a:latin typeface="Arial"/>
               </a:rPr>
-              <a:t>It reverses the intuitive plan. Tuning looks like the cheap, targeted option; measured on held-out traffic it is the one that quietly costs you coverage.</a:t>
-            </a:r>
-          </a:p>
-        </p:txBody>
-      </p:sp>
-      <p:sp>
-        <p:nvSpPr>
-          <p:cNvPr id="13" name="Rounded Rectangle 12"/>
-          <p:cNvSpPr/>
-          <p:nvPr/>
-        </p:nvSpPr>
-        <p:spPr>
-          <a:xfrm>
-            <a:off x="6301587" y="3913632"/>
-            <a:ext cx="5112867" cy="1554480"/>
-          </a:xfrm>
-          <a:prstGeom prst="roundRect">
-            <a:avLst/>
-          </a:prstGeom>
-          <a:solidFill>
-            <a:srgbClr val="FDF7EC"/>
-          </a:solidFill>
-          <a:ln>
-            <a:noFill/>
-          </a:ln>
-          <a:effectLst/>
-        </p:spPr>
-        <p:style>
-          <a:lnRef idx="1">
-            <a:schemeClr val="accent1"/>
-          </a:lnRef>
-          <a:fillRef idx="3">
-            <a:schemeClr val="accent1"/>
-          </a:fillRef>
-          <a:effectRef idx="2">
-            <a:schemeClr val="accent1"/>
-          </a:effectRef>
-          <a:fontRef idx="minor">
-            <a:schemeClr val="lt1"/>
-          </a:fontRef>
-        </p:style>
-        <p:txBody>
-          <a:bodyPr rtlCol="0" anchor="ctr" wrap="square"/>
-          <a:lstStyle/>
-          <a:p>
-            <a:pPr algn="ctr"/>
-          </a:p>
-        </p:txBody>
-      </p:sp>
-      <p:sp>
-        <p:nvSpPr>
-          <p:cNvPr id="14" name="Rectangle 13"/>
-          <p:cNvSpPr/>
-          <p:nvPr/>
-        </p:nvSpPr>
-        <p:spPr>
-          <a:xfrm>
-            <a:off x="6301587" y="3913632"/>
-            <a:ext cx="50292" cy="1554480"/>
-          </a:xfrm>
-          <a:prstGeom prst="rect">
-            <a:avLst/>
-          </a:prstGeom>
-          <a:solidFill>
-            <a:srgbClr val="B7791F"/>
-          </a:solidFill>
-          <a:ln>
-            <a:noFill/>
-          </a:ln>
-          <a:effectLst/>
-        </p:spPr>
-        <p:style>
-          <a:lnRef idx="1">
-            <a:schemeClr val="accent1"/>
-          </a:lnRef>
-          <a:fillRef idx="3">
-            <a:schemeClr val="accent1"/>
-          </a:fillRef>
-          <a:effectRef idx="2">
-            <a:schemeClr val="accent1"/>
-          </a:effectRef>
-          <a:fontRef idx="minor">
-            <a:schemeClr val="lt1"/>
-          </a:fontRef>
-        </p:style>
-        <p:txBody>
-          <a:bodyPr rtlCol="0" anchor="ctr" wrap="square"/>
-          <a:lstStyle/>
-          <a:p>
-            <a:pPr algn="ctr"/>
-          </a:p>
-        </p:txBody>
-      </p:sp>
-      <p:sp>
-        <p:nvSpPr>
-          <p:cNvPr id="15" name="TextBox 14"/>
-          <p:cNvSpPr txBox="1"/>
-          <p:nvPr/>
-        </p:nvSpPr>
-        <p:spPr>
-          <a:xfrm>
-            <a:off x="6539331" y="4078224"/>
-            <a:ext cx="4655667" cy="1225296"/>
-          </a:xfrm>
-          <a:prstGeom prst="rect">
-            <a:avLst/>
-          </a:prstGeom>
-          <a:noFill/>
-        </p:spPr>
-        <p:txBody>
-          <a:bodyPr wrap="square" anchor="t" lIns="0" rIns="0" tIns="0" bIns="0">
-            <a:spAutoFit/>
-          </a:bodyPr>
-          <a:lstStyle/>
-          <a:p>
-            <a:pPr algn="l">
-              <a:spcAft>
-                <a:spcPts val="500"/>
-              </a:spcAft>
-            </a:pPr>
-            <a:r>
-              <a:rPr sz="1100" b="1" i="0" spc="110">
-                <a:solidFill>
-                  <a:srgbClr val="B7791F"/>
-                </a:solidFill>
-                <a:latin typeface="Arial"/>
-              </a:rPr>
-              <a:t>CONFIDENCE LEVEL</a:t>
-            </a:r>
-          </a:p>
-          <a:p>
-            <a:pPr algn="l">
-              <a:lnSpc>
-                <a:spcPct val="106000"/>
-              </a:lnSpc>
-              <a:spcAft>
-                <a:spcPts val="0"/>
-              </a:spcAft>
-            </a:pPr>
-            <a:r>
-              <a:rPr sz="1350" b="0" i="0">
-                <a:solidFill>
-                  <a:srgbClr val="12263A"/>
-                </a:solidFill>
-                <a:latin typeface="Arial"/>
-              </a:rPr>
-              <a:t>This is a comparison between different model sizes, not a controlled experiment at fixed size. Treat it as a strong steer on where to spend, not a proven law.</a:t>
+              <a:t>It is a reason to scope it: hosted on traffic where the prompt may leave and latency is not critical; self-hosted on the regulated, latency-sensitive path.</a:t>
             </a:r>
           </a:p>
         </p:txBody>
@@ -11649,7 +13152,7 @@
                 </a:solidFill>
                 <a:latin typeface="Arial"/>
               </a:rPr>
-              <a:t>Guardrail sourcing · hosted frontier vs self-hosted small model</a:t>
+              <a:t>Guardrail sourcing · in-house inline, escalate the uncertain slice</a:t>
             </a:r>
           </a:p>
         </p:txBody>
@@ -11727,7 +13230,7 @@
                 </a:solidFill>
                 <a:latin typeface="Arial"/>
               </a:rPr>
-              <a:t>CONFIDENCE AND LIMITS</a:t>
+              <a:t>THE USEFUL FINDING</a:t>
             </a:r>
           </a:p>
         </p:txBody>
@@ -11769,7 +13272,7 @@
                 </a:solidFill>
                 <a:latin typeface="Georgia"/>
               </a:rPr>
-              <a:t>What this does not tell you</a:t>
+              <a:t>If we must self-host, a bigger untuned model beats a tuned small one</a:t>
             </a:r>
           </a:p>
         </p:txBody>
@@ -11808,7 +13311,7 @@
                 </a:solidFill>
                 <a:latin typeface="Arial"/>
               </a:rPr>
-              <a:t>Stated plainly, so the recommendation can be trusted where it does apply</a:t>
+              <a:t>Because tuning's cost lands on exactly the traffic a guardrail exists to catch</a:t>
             </a:r>
           </a:p>
         </p:txBody>
@@ -11866,7 +13369,7 @@
         <p:spPr>
           <a:xfrm>
             <a:off x="777240" y="2212848"/>
-            <a:ext cx="10637215" cy="2926080"/>
+            <a:ext cx="5112867" cy="2651760"/>
           </a:xfrm>
           <a:prstGeom prst="rect">
             <a:avLst/>
@@ -11900,7 +13403,7 @@
                 </a:solidFill>
                 <a:latin typeface="Arial"/>
               </a:rPr>
-              <a:t>It is one benchmark. </a:t>
+              <a:t>Tuning a small model. </a:t>
             </a:r>
             <a:r>
               <a:rPr sz="1450" b="0" i="0">
@@ -11909,7 +13412,7 @@
                 </a:solidFill>
                 <a:latin typeface="Arial"/>
               </a:rPr>
-              <a:t>Expert-annotated finance, healthcare and law prompt safety. It is the strongest external evidence we have, and it is still a single instrument — and our own research shows guard rankings reorder when the benchmark changes.</a:t>
+              <a:t>Large gain on familiar traffic, and it gives back accuracy on unfamiliar traffic — which is where novel attacks arrive.</a:t>
             </a:r>
           </a:p>
           <a:p>
@@ -11934,7 +13437,7 @@
                 </a:solidFill>
                 <a:latin typeface="Arial"/>
               </a:rPr>
-              <a:t>It is prompt-only. </a:t>
+              <a:t>A bigger untuned model. </a:t>
             </a:r>
             <a:r>
               <a:rPr sz="1450" b="0" i="0">
@@ -11943,7 +13446,7 @@
                 </a:solidFill>
                 <a:latin typeface="Arial"/>
               </a:rPr>
-              <a:t>We judged incoming prompts, not the assistant's replies, and not the harder mortgage-compliance question of whether a specific answer breaks a specific rule.</a:t>
+              <a:t>Recovers most of that same gain on familiar traffic, and holds its accuracy on unfamiliar traffic.</a:t>
             </a:r>
           </a:p>
           <a:p>
@@ -11968,7 +13471,7 @@
                 </a:solidFill>
                 <a:latin typeface="Arial"/>
               </a:rPr>
-              <a:t>Vendor behaviour is a moving target. </a:t>
+              <a:t>So for a guardrail specifically. </a:t>
             </a:r>
             <a:r>
               <a:rPr sz="1450" b="0" i="0">
@@ -11977,41 +13480,7 @@
                 </a:solidFill>
                 <a:latin typeface="Arial"/>
               </a:rPr>
-              <a:t>Model versions change under you. The self-hosted side is pinned to an exact revision and reproduces indefinitely; the hosted side does not.</a:t>
-            </a:r>
-          </a:p>
-          <a:p>
-            <a:pPr algn="l">
-              <a:spcAft>
-                <a:spcPts val="1200"/>
-              </a:spcAft>
-            </a:pPr>
-            <a:r>
-              <a:rPr sz="1450" b="1" i="0">
-                <a:solidFill>
-                  <a:srgbClr val="A02128"/>
-                </a:solidFill>
-                <a:latin typeface="Arial"/>
-              </a:rPr>
-              <a:t>—  </a:t>
-            </a:r>
-            <a:r>
-              <a:rPr sz="1450" b="1" i="0">
-                <a:solidFill>
-                  <a:srgbClr val="12263A"/>
-                </a:solidFill>
-                <a:latin typeface="Arial"/>
-              </a:rPr>
-              <a:t>Prices are list, not invoices. </a:t>
-            </a:r>
-            <a:r>
-              <a:rPr sz="1450" b="0" i="0">
-                <a:solidFill>
-                  <a:srgbClr val="5A6B7C"/>
-                </a:solidFill>
-                <a:latin typeface="Arial"/>
-              </a:rPr>
-              <a:t>Cost figures are billed tokens at public rates and exclude the GPU cost on our own side.</a:t>
+              <a:t>Prefer spending on a stronger base model over spending on a tuning programme.</a:t>
             </a:r>
           </a:p>
         </p:txBody>
@@ -12024,14 +13493,14 @@
         </p:nvSpPr>
         <p:spPr>
           <a:xfrm>
-            <a:off x="777240" y="5221224"/>
-            <a:ext cx="10637215" cy="987552"/>
+            <a:off x="6301587" y="2212848"/>
+            <a:ext cx="5112867" cy="1554480"/>
           </a:xfrm>
           <a:prstGeom prst="roundRect">
             <a:avLst/>
           </a:prstGeom>
           <a:solidFill>
-            <a:srgbClr val="EFF4FE"/>
+            <a:srgbClr val="EFF7F1"/>
           </a:solidFill>
           <a:ln>
             <a:noFill/>
@@ -12068,14 +13537,14 @@
         </p:nvSpPr>
         <p:spPr>
           <a:xfrm>
-            <a:off x="777240" y="5221224"/>
-            <a:ext cx="50292" cy="987552"/>
+            <a:off x="6301587" y="2212848"/>
+            <a:ext cx="50292" cy="1554480"/>
           </a:xfrm>
           <a:prstGeom prst="rect">
             <a:avLst/>
           </a:prstGeom>
           <a:solidFill>
-            <a:srgbClr val="2563EB"/>
+            <a:srgbClr val="15803D"/>
           </a:solidFill>
           <a:ln>
             <a:noFill/>
@@ -12112,8 +13581,8 @@
         </p:nvSpPr>
         <p:spPr>
           <a:xfrm>
-            <a:off x="1014984" y="5385816"/>
-            <a:ext cx="10180015" cy="658368"/>
+            <a:off x="6539331" y="2377440"/>
+            <a:ext cx="4655667" cy="1225296"/>
           </a:xfrm>
           <a:prstGeom prst="rect">
             <a:avLst/>
@@ -12134,11 +13603,11 @@
             <a:r>
               <a:rPr sz="1100" b="1" i="0" spc="110">
                 <a:solidFill>
-                  <a:srgbClr val="2563EB"/>
-                </a:solidFill>
-                <a:latin typeface="Arial"/>
-              </a:rPr>
-              <a:t>WHAT WOULD CHANGE THE RECOMMENDATION</a:t>
+                  <a:srgbClr val="15803D"/>
+                </a:solidFill>
+                <a:latin typeface="Arial"/>
+              </a:rPr>
+              <a:t>WHY THIS IS WORTH MONEY</a:t>
             </a:r>
           </a:p>
           <a:p>
@@ -12157,7 +13626,153 @@
                 </a:solidFill>
                 <a:latin typeface="Arial"/>
               </a:rPr>
-              <a:t>A regulated-domain benchmark that scores whole answers against specific rules, with expert adjudication. That is the instrument we do not have, and building it is the highest-value next step.</a:t>
+              <a:t>It reverses the intuitive plan. Tuning looks like the cheap, targeted option; measured on held-out traffic it is the one that quietly costs you coverage.</a:t>
+            </a:r>
+          </a:p>
+        </p:txBody>
+      </p:sp>
+      <p:sp>
+        <p:nvSpPr>
+          <p:cNvPr id="13" name="Rounded Rectangle 12"/>
+          <p:cNvSpPr/>
+          <p:nvPr/>
+        </p:nvSpPr>
+        <p:spPr>
+          <a:xfrm>
+            <a:off x="6301587" y="3913632"/>
+            <a:ext cx="5112867" cy="1554480"/>
+          </a:xfrm>
+          <a:prstGeom prst="roundRect">
+            <a:avLst/>
+          </a:prstGeom>
+          <a:solidFill>
+            <a:srgbClr val="FDF7EC"/>
+          </a:solidFill>
+          <a:ln>
+            <a:noFill/>
+          </a:ln>
+          <a:effectLst/>
+        </p:spPr>
+        <p:style>
+          <a:lnRef idx="1">
+            <a:schemeClr val="accent1"/>
+          </a:lnRef>
+          <a:fillRef idx="3">
+            <a:schemeClr val="accent1"/>
+          </a:fillRef>
+          <a:effectRef idx="2">
+            <a:schemeClr val="accent1"/>
+          </a:effectRef>
+          <a:fontRef idx="minor">
+            <a:schemeClr val="lt1"/>
+          </a:fontRef>
+        </p:style>
+        <p:txBody>
+          <a:bodyPr rtlCol="0" anchor="ctr" wrap="square"/>
+          <a:lstStyle/>
+          <a:p>
+            <a:pPr algn="ctr"/>
+          </a:p>
+        </p:txBody>
+      </p:sp>
+      <p:sp>
+        <p:nvSpPr>
+          <p:cNvPr id="14" name="Rectangle 13"/>
+          <p:cNvSpPr/>
+          <p:nvPr/>
+        </p:nvSpPr>
+        <p:spPr>
+          <a:xfrm>
+            <a:off x="6301587" y="3913632"/>
+            <a:ext cx="50292" cy="1554480"/>
+          </a:xfrm>
+          <a:prstGeom prst="rect">
+            <a:avLst/>
+          </a:prstGeom>
+          <a:solidFill>
+            <a:srgbClr val="B7791F"/>
+          </a:solidFill>
+          <a:ln>
+            <a:noFill/>
+          </a:ln>
+          <a:effectLst/>
+        </p:spPr>
+        <p:style>
+          <a:lnRef idx="1">
+            <a:schemeClr val="accent1"/>
+          </a:lnRef>
+          <a:fillRef idx="3">
+            <a:schemeClr val="accent1"/>
+          </a:fillRef>
+          <a:effectRef idx="2">
+            <a:schemeClr val="accent1"/>
+          </a:effectRef>
+          <a:fontRef idx="minor">
+            <a:schemeClr val="lt1"/>
+          </a:fontRef>
+        </p:style>
+        <p:txBody>
+          <a:bodyPr rtlCol="0" anchor="ctr" wrap="square"/>
+          <a:lstStyle/>
+          <a:p>
+            <a:pPr algn="ctr"/>
+          </a:p>
+        </p:txBody>
+      </p:sp>
+      <p:sp>
+        <p:nvSpPr>
+          <p:cNvPr id="15" name="TextBox 14"/>
+          <p:cNvSpPr txBox="1"/>
+          <p:nvPr/>
+        </p:nvSpPr>
+        <p:spPr>
+          <a:xfrm>
+            <a:off x="6539331" y="4078224"/>
+            <a:ext cx="4655667" cy="1225296"/>
+          </a:xfrm>
+          <a:prstGeom prst="rect">
+            <a:avLst/>
+          </a:prstGeom>
+          <a:noFill/>
+        </p:spPr>
+        <p:txBody>
+          <a:bodyPr wrap="square" anchor="t" lIns="0" rIns="0" tIns="0" bIns="0">
+            <a:spAutoFit/>
+          </a:bodyPr>
+          <a:lstStyle/>
+          <a:p>
+            <a:pPr algn="l">
+              <a:spcAft>
+                <a:spcPts val="500"/>
+              </a:spcAft>
+            </a:pPr>
+            <a:r>
+              <a:rPr sz="1100" b="1" i="0" spc="110">
+                <a:solidFill>
+                  <a:srgbClr val="B7791F"/>
+                </a:solidFill>
+                <a:latin typeface="Arial"/>
+              </a:rPr>
+              <a:t>CONFIDENCE LEVEL</a:t>
+            </a:r>
+          </a:p>
+          <a:p>
+            <a:pPr algn="l">
+              <a:lnSpc>
+                <a:spcPct val="106000"/>
+              </a:lnSpc>
+              <a:spcAft>
+                <a:spcPts val="0"/>
+              </a:spcAft>
+            </a:pPr>
+            <a:r>
+              <a:rPr sz="1350" b="0" i="0">
+                <a:solidFill>
+                  <a:srgbClr val="12263A"/>
+                </a:solidFill>
+                <a:latin typeface="Arial"/>
+              </a:rPr>
+              <a:t>This is a comparison between different model sizes, not a controlled experiment at fixed size. Treat it as a strong steer on where to spend, not a proven law.</a:t>
             </a:r>
           </a:p>
         </p:txBody>

--- a/papers/unified-report/slides/safety_guard_exec_deck.pptx
+++ b/papers/unified-report/slides/safety_guard_exec_deck.pptx
@@ -16,6 +16,7 @@
     <p:sldId id="264" r:id="rId16"/>
     <p:sldId id="265" r:id="rId17"/>
     <p:sldId id="266" r:id="rId18"/>
+    <p:sldId id="267" r:id="rId19"/>
   </p:sldIdLst>
   <p:sldSz cx="12191695" cy="6858000" type="screen4x3"/>
   <p:notesSz cx="6858000" cy="9144000"/>
@@ -619,65 +620,64 @@
           <a:lstStyle/>
           <a:p>
             <a:r>
-              <a:t>Do not rush this slide, and do not apologise through it. Naming the limits is what makes the</a:t>
-            </a:r>
-          </a:p>
-          <a:p>
-            <a:r>
-              <a:t>recommendation on slide 3 credible.</a:t>
+              <a:t>This slide did not exist in the plan. It fell out of the scale experiment and is probably the</a:t>
+            </a:r>
+          </a:p>
+          <a:p>
+            <a:r>
+              <a:t>most commercially useful thing in the deck.</a:t>
             </a:r>
           </a:p>
           <a:p/>
           <a:p>
             <a:r>
-              <a:t>The first bullet is the most important and the most self-undermining, which is why it belongs</a:t>
-            </a:r>
-          </a:p>
-          <a:p>
-            <a:r>
-              <a:t>here: the underlying research finding is that guard rankings depend on the benchmark. We are</a:t>
-            </a:r>
-          </a:p>
-          <a:p>
-            <a:r>
-              <a:t>handing you a recommendation derived from one benchmark. It is external and expert-annotated,</a:t>
-            </a:r>
-          </a:p>
-          <a:p>
-            <a:r>
-              <a:t>which is the best tier available to us, but a different instrument could reorder the middle of</a:t>
-            </a:r>
-          </a:p>
-          <a:p>
-            <a:r>
-              <a:t>the table. It is unlikely to reverse a ten-point gap.</a:t>
+              <a:t>The mechanism: fine-tuning specialises. It buys accuracy on the sources you trained on and</a:t>
+            </a:r>
+          </a:p>
+          <a:p>
+            <a:r>
+              <a:t>withdraws it from sources you did not. A bigger base model arrives with broad competence</a:t>
+            </a:r>
+          </a:p>
+          <a:p>
+            <a:r>
+              <a:t>already and does not have to trade any of it away. For a guardrail, the traffic you did not</a:t>
+            </a:r>
+          </a:p>
+          <a:p>
+            <a:r>
+              <a:t>anticipate is precisely the traffic that matters, so a technique that trades away</a:t>
+            </a:r>
+          </a:p>
+          <a:p>
+            <a:r>
+              <a:t>unfamiliar-traffic accuracy is badly matched to the job.</a:t>
             </a:r>
           </a:p>
           <a:p/>
           <a:p>
             <a:r>
-              <a:t>The pinning point matters more than it sounds. A hosted model can change under a fixed</a:t>
-            </a:r>
-          </a:p>
-          <a:p>
-            <a:r>
-              <a:t>deployment; that is a change-control problem for a compliance control. Our own checkpoints are</a:t>
-            </a:r>
-          </a:p>
-          <a:p>
-            <a:r>
-              <a:t>pinned to a content hash and will reproduce in a year.</a:t>
-            </a:r>
-          </a:p>
-          <a:p/>
-          <a:p>
-            <a:r>
-              <a:t>Close on the final callout: the thing worth funding is the measuring instrument for our actual</a:t>
-            </a:r>
-          </a:p>
-          <a:p>
-            <a:r>
-              <a:t>domain, not more guard comparisons on general safety.</a:t>
+              <a:t>Numbers are in the technical report; the honest caveat is on the slide. Comparing a 32B untuned</a:t>
+            </a:r>
+          </a:p>
+          <a:p>
+            <a:r>
+              <a:t>model to a tuned 4B is a deployment-choice comparison, not a controlled one -- the 32B costs</a:t>
+            </a:r>
+          </a:p>
+          <a:p>
+            <a:r>
+              <a:t>much more to serve. What we can say is that the tuning route did not close the vendor gap and</a:t>
+            </a:r>
+          </a:p>
+          <a:p>
+            <a:r>
+              <a:t>made held-out accuracy worse on most models, while the size route at least moved in the right</a:t>
+            </a:r>
+          </a:p>
+          <a:p>
+            <a:r>
+              <a:t>direction on both regimes.</a:t>
             </a:r>
           </a:p>
         </p:txBody>
@@ -747,6 +747,134 @@
           <a:lstStyle/>
           <a:p>
             <a:r>
+              <a:t>Do not rush this slide, and do not apologise through it. Naming the limits is what makes the</a:t>
+            </a:r>
+          </a:p>
+          <a:p>
+            <a:r>
+              <a:t>recommendation on slide 3 credible.</a:t>
+            </a:r>
+          </a:p>
+          <a:p/>
+          <a:p>
+            <a:r>
+              <a:t>The first bullet is the most important and the most self-undermining, which is why it belongs</a:t>
+            </a:r>
+          </a:p>
+          <a:p>
+            <a:r>
+              <a:t>here: the underlying research finding is that guard rankings depend on the benchmark. We are</a:t>
+            </a:r>
+          </a:p>
+          <a:p>
+            <a:r>
+              <a:t>handing you a recommendation derived from one benchmark. It is external and expert-annotated,</a:t>
+            </a:r>
+          </a:p>
+          <a:p>
+            <a:r>
+              <a:t>which is the best tier available to us, but a different instrument could reorder the middle of</a:t>
+            </a:r>
+          </a:p>
+          <a:p>
+            <a:r>
+              <a:t>the table. It is unlikely to reverse a ten-point gap.</a:t>
+            </a:r>
+          </a:p>
+          <a:p/>
+          <a:p>
+            <a:r>
+              <a:t>The pinning point matters more than it sounds. A hosted model can change under a fixed</a:t>
+            </a:r>
+          </a:p>
+          <a:p>
+            <a:r>
+              <a:t>deployment; that is a change-control problem for a compliance control. Our own checkpoints are</a:t>
+            </a:r>
+          </a:p>
+          <a:p>
+            <a:r>
+              <a:t>pinned to a content hash and will reproduce in a year.</a:t>
+            </a:r>
+          </a:p>
+          <a:p/>
+          <a:p>
+            <a:r>
+              <a:t>Close on the final callout: the thing worth funding is the measuring instrument for our actual</a:t>
+            </a:r>
+          </a:p>
+          <a:p>
+            <a:r>
+              <a:t>domain, not more guard comparisons on general safety.</a:t>
+            </a:r>
+          </a:p>
+        </p:txBody>
+      </p:sp>
+      <p:sp>
+        <p:nvSpPr>
+          <p:cNvPr id="4" name="Slide Number Placeholder 3"/>
+          <p:cNvSpPr>
+            <a:spLocks noGrp="1"/>
+          </p:cNvSpPr>
+          <p:nvPr>
+            <p:ph type="sldNum" idx="5" sz="quarter"/>
+          </p:nvPr>
+        </p:nvSpPr>
+        <p:spPr/>
+      </p:sp>
+    </p:spTree>
+  </p:cSld>
+  <p:clrMapOvr>
+    <a:masterClrMapping/>
+  </p:clrMapOvr>
+</p:notes>
+</file>
+
+<file path=ppt/notesSlides/notesSlide12.xml><?xml version="1.0" encoding="utf-8"?>
+<p:notes xmlns:a="http://schemas.openxmlformats.org/drawingml/2006/main" xmlns:p="http://schemas.openxmlformats.org/presentationml/2006/main" xmlns:r="http://schemas.openxmlformats.org/officeDocument/2006/relationships">
+  <p:cSld>
+    <p:spTree>
+      <p:nvGrpSpPr>
+        <p:cNvPr id="1" name=""/>
+        <p:cNvGrpSpPr/>
+        <p:nvPr/>
+      </p:nvGrpSpPr>
+      <p:grpSpPr>
+        <a:xfrm>
+          <a:off x="0" y="0"/>
+          <a:ext cx="0" cy="0"/>
+          <a:chOff x="0" y="0"/>
+          <a:chExt cx="0" cy="0"/>
+        </a:xfrm>
+      </p:grpSpPr>
+      <p:sp>
+        <p:nvSpPr>
+          <p:cNvPr id="2" name="Slide Image Placeholder 1"/>
+          <p:cNvSpPr>
+            <a:spLocks noGrp="1"/>
+          </p:cNvSpPr>
+          <p:nvPr>
+            <p:ph type="sldImg" idx="2"/>
+          </p:nvPr>
+        </p:nvSpPr>
+        <p:spPr/>
+      </p:sp>
+      <p:sp>
+        <p:nvSpPr>
+          <p:cNvPr id="3" name="Notes Placeholder 2"/>
+          <p:cNvSpPr>
+            <a:spLocks noGrp="1"/>
+          </p:cNvSpPr>
+          <p:nvPr>
+            <p:ph type="body" idx="3" sz="quarter"/>
+          </p:nvPr>
+        </p:nvSpPr>
+        <p:spPr/>
+        <p:txBody>
+          <a:bodyPr/>
+          <a:lstStyle/>
+          <a:p>
+            <a:r>
               <a:t>Two minutes. The first two items need no budget. The third frees capacity. The fourth is the</a:t>
             </a:r>
           </a:p>
@@ -1652,71 +1780,96 @@
           <a:lstStyle/>
           <a:p>
             <a:r>
-              <a:t>Work down the table, then land on the two callouts, which are the non-obvious costs.</a:t>
+              <a:t>This slide exists because "just ensemble the small models" is the most common suggestion in the</a:t>
+            </a:r>
+          </a:p>
+          <a:p>
+            <a:r>
+              <a:t>room, and it deserves a measured answer rather than an opinion.</a:t>
             </a:r>
           </a:p>
           <a:p/>
           <a:p>
             <a:r>
-              <a:t>Latency: 1,553 ms median measured under load at high concurrency, so treat it as</a:t>
-            </a:r>
-          </a:p>
-          <a:p>
-            <a:r>
-              <a:t>an upper bound for a single request; the small-model figure is a batched GPU measurement. Even</a:t>
-            </a:r>
-          </a:p>
-          <a:p>
-            <a:r>
-              <a:t>allowing for that, the ratio is roughly 77x.</a:t>
+              <a:t>Row by row. Averaging the five tuning runs of a single guard is free -- the adapters already</a:t>
+            </a:r>
+          </a:p>
+          <a:p>
+            <a:r>
+              <a:t>exist -- and it reliably adds about +0.026. Do that regardless; it is also how the</a:t>
+            </a:r>
+          </a:p>
+          <a:p>
+            <a:r>
+              <a:t>tuned 32B recovers what fine-tuning cost it.</a:t>
             </a:r>
           </a:p>
           <a:p/>
           <a:p>
             <a:r>
-              <a:t>Cost: billed tokens at public list prices. It excludes the amortised GPU on the self-hosted</a:t>
-            </a:r>
-          </a:p>
-          <a:p>
-            <a:r>
-              <a:t>side, which is exactly why the comparison is about where to spend rather than a like-for-like</a:t>
-            </a:r>
-          </a:p>
-          <a:p>
-            <a:r>
-              <a:t>price.</a:t>
+              <a:t>Averaging all 18 guards equally is WORSE than just using the best one</a:t>
+            </a:r>
+          </a:p>
+          <a:p>
+            <a:r>
+              <a:t>(.791 against .834). With members that differ this much in</a:t>
+            </a:r>
+          </a:p>
+          <a:p>
+            <a:r>
+              <a:t>quality, equal weights dilute the strong ones. If someone proposes "ensemble everything", this</a:t>
+            </a:r>
+          </a:p>
+          <a:p>
+            <a:r>
+              <a:t>is the row to show them.</a:t>
             </a:r>
           </a:p>
           <a:p/>
           <a:p>
             <a:r>
-              <a:t>The refusal finding is the one to say slowly. We saw a set of prompts refused by the provider's</a:t>
-            </a:r>
-          </a:p>
-          <a:p>
-            <a:r>
-              <a:t>own input filter before the model ever saw them, and the refusals were not reproducible --</a:t>
-            </a:r>
-          </a:p>
-          <a:p>
-            <a:r>
-              <a:t>different runs, different outcomes, no row refused every time. For a control that has to be</a:t>
-            </a:r>
-          </a:p>
-          <a:p>
-            <a:r>
-              <a:t>auditable, "sometimes declines, for reasons we cannot inspect or appeal" is a compliance</a:t>
-            </a:r>
-          </a:p>
-          <a:p>
-            <a:r>
-              <a:t>property, not a technical footnote.</a:t>
+              <a:t>A fitted weighted blend does beat any single guard, reaching .850, about a quarter of</a:t>
+            </a:r>
+          </a:p>
+          <a:p>
+            <a:r>
+              <a:t>the way to hosted. Two costs are easy to miss: 18 forward passes per request, and</a:t>
+            </a:r>
+          </a:p>
+          <a:p>
+            <a:r>
+              <a:t>it needs LABELLED in-domain data to fit the weights -- which is usually the thing a team reaching</a:t>
+            </a:r>
+          </a:p>
+          <a:p>
+            <a:r>
+              <a:t>for an ensemble does not have. We scored it 5-fold out-of-fold so it is not</a:t>
+            </a:r>
+          </a:p>
+          <a:p>
+            <a:r>
+              <a:t>grading its own homework, and its fitted weights include a negative coefficient on one guard,</a:t>
+            </a:r>
+          </a:p>
+          <a:p>
+            <a:r>
+              <a:t>which means it is exploiting error structure that may not survive a change of traffic.</a:t>
             </a:r>
           </a:p>
           <a:p/>
           <a:p>
             <a:r>
-              <a:t>Close on the scoping sentence. The answer is a split, and this slide is why.</a:t>
+              <a:t>The last row is the point: escalating the uncertain fifth reaches 87%, beating the whole blend</a:t>
+            </a:r>
+          </a:p>
+          <a:p>
+            <a:r>
+              <a:t>at a fraction of the cost. So ensembling is not the route -- unless lane 1 applies and nothing</a:t>
+            </a:r>
+          </a:p>
+          <a:p>
+            <a:r>
+              <a:t>may leave, in which case it is the in-house ceiling and worth building.</a:t>
             </a:r>
           </a:p>
         </p:txBody>
@@ -1786,64 +1939,71 @@
           <a:lstStyle/>
           <a:p>
             <a:r>
-              <a:t>This slide did not exist in the plan. It fell out of the scale experiment and is probably the</a:t>
-            </a:r>
-          </a:p>
-          <a:p>
-            <a:r>
-              <a:t>most commercially useful thing in the deck.</a:t>
+              <a:t>Work down the table, then land on the two callouts, which are the non-obvious costs.</a:t>
             </a:r>
           </a:p>
           <a:p/>
           <a:p>
             <a:r>
-              <a:t>The mechanism: fine-tuning specialises. It buys accuracy on the sources you trained on and</a:t>
-            </a:r>
-          </a:p>
-          <a:p>
-            <a:r>
-              <a:t>withdraws it from sources you did not. A bigger base model arrives with broad competence</a:t>
-            </a:r>
-          </a:p>
-          <a:p>
-            <a:r>
-              <a:t>already and does not have to trade any of it away. For a guardrail, the traffic you did not</a:t>
-            </a:r>
-          </a:p>
-          <a:p>
-            <a:r>
-              <a:t>anticipate is precisely the traffic that matters, so a technique that trades away</a:t>
-            </a:r>
-          </a:p>
-          <a:p>
-            <a:r>
-              <a:t>unfamiliar-traffic accuracy is badly matched to the job.</a:t>
+              <a:t>Latency: 1,553 ms median measured under load at high concurrency, so treat it as</a:t>
+            </a:r>
+          </a:p>
+          <a:p>
+            <a:r>
+              <a:t>an upper bound for a single request; the small-model figure is a batched GPU measurement. Even</a:t>
+            </a:r>
+          </a:p>
+          <a:p>
+            <a:r>
+              <a:t>allowing for that, the ratio is roughly 77x.</a:t>
             </a:r>
           </a:p>
           <a:p/>
           <a:p>
             <a:r>
-              <a:t>Numbers are in the technical report; the honest caveat is on the slide. Comparing a 32B untuned</a:t>
-            </a:r>
-          </a:p>
-          <a:p>
-            <a:r>
-              <a:t>model to a tuned 4B is a deployment-choice comparison, not a controlled one -- the 32B costs</a:t>
-            </a:r>
-          </a:p>
-          <a:p>
-            <a:r>
-              <a:t>much more to serve. What we can say is that the tuning route did not close the vendor gap and</a:t>
-            </a:r>
-          </a:p>
-          <a:p>
-            <a:r>
-              <a:t>made held-out accuracy worse on most models, while the size route at least moved in the right</a:t>
-            </a:r>
-          </a:p>
-          <a:p>
-            <a:r>
-              <a:t>direction on both regimes.</a:t>
+              <a:t>Cost: billed tokens at public list prices. It excludes the amortised GPU on the self-hosted</a:t>
+            </a:r>
+          </a:p>
+          <a:p>
+            <a:r>
+              <a:t>side, which is exactly why the comparison is about where to spend rather than a like-for-like</a:t>
+            </a:r>
+          </a:p>
+          <a:p>
+            <a:r>
+              <a:t>price.</a:t>
+            </a:r>
+          </a:p>
+          <a:p/>
+          <a:p>
+            <a:r>
+              <a:t>The refusal finding is the one to say slowly. We saw a set of prompts refused by the provider's</a:t>
+            </a:r>
+          </a:p>
+          <a:p>
+            <a:r>
+              <a:t>own input filter before the model ever saw them, and the refusals were not reproducible --</a:t>
+            </a:r>
+          </a:p>
+          <a:p>
+            <a:r>
+              <a:t>different runs, different outcomes, no row refused every time. For a control that has to be</a:t>
+            </a:r>
+          </a:p>
+          <a:p>
+            <a:r>
+              <a:t>auditable, "sometimes declines, for reasons we cannot inspect or appeal" is a compliance</a:t>
+            </a:r>
+          </a:p>
+          <a:p>
+            <a:r>
+              <a:t>property, not a technical footnote.</a:t>
+            </a:r>
+          </a:p>
+          <a:p/>
+          <a:p>
+            <a:r>
+              <a:t>Close on the scoping sentence. The answer is a split, and this slide is why.</a:t>
             </a:r>
           </a:p>
         </p:txBody>
@@ -5378,7 +5538,7 @@
                 </a:solidFill>
                 <a:latin typeface="Arial"/>
               </a:rPr>
-              <a:t>CONFIDENCE AND LIMITS</a:t>
+              <a:t>THE USEFUL FINDING</a:t>
             </a:r>
           </a:p>
         </p:txBody>
@@ -5420,7 +5580,7 @@
                 </a:solidFill>
                 <a:latin typeface="Georgia"/>
               </a:rPr>
-              <a:t>What this does not tell you</a:t>
+              <a:t>If we must self-host, a bigger untuned model beats a tuned small one</a:t>
             </a:r>
           </a:p>
         </p:txBody>
@@ -5459,7 +5619,7 @@
                 </a:solidFill>
                 <a:latin typeface="Arial"/>
               </a:rPr>
-              <a:t>Stated plainly, so the recommendation can be trusted where it does apply</a:t>
+              <a:t>Because tuning's cost lands on exactly the traffic a guardrail exists to catch</a:t>
             </a:r>
           </a:p>
         </p:txBody>
@@ -5517,7 +5677,7 @@
         <p:spPr>
           <a:xfrm>
             <a:off x="777240" y="2212848"/>
-            <a:ext cx="10637215" cy="2926080"/>
+            <a:ext cx="5112867" cy="2651760"/>
           </a:xfrm>
           <a:prstGeom prst="rect">
             <a:avLst/>
@@ -5551,7 +5711,7 @@
                 </a:solidFill>
                 <a:latin typeface="Arial"/>
               </a:rPr>
-              <a:t>It is one benchmark. </a:t>
+              <a:t>Tuning a small model. </a:t>
             </a:r>
             <a:r>
               <a:rPr sz="1450" b="0" i="0">
@@ -5560,7 +5720,7 @@
                 </a:solidFill>
                 <a:latin typeface="Arial"/>
               </a:rPr>
-              <a:t>Expert-annotated finance, healthcare and law prompt safety. It is the strongest external evidence we have, and it is still a single instrument — and our own research shows guard rankings reorder when the benchmark changes.</a:t>
+              <a:t>Large gain on familiar traffic, and it gives back accuracy on unfamiliar traffic — which is where novel attacks arrive.</a:t>
             </a:r>
           </a:p>
           <a:p>
@@ -5585,7 +5745,7 @@
                 </a:solidFill>
                 <a:latin typeface="Arial"/>
               </a:rPr>
-              <a:t>It is prompt-only. </a:t>
+              <a:t>A bigger untuned model. </a:t>
             </a:r>
             <a:r>
               <a:rPr sz="1450" b="0" i="0">
@@ -5594,7 +5754,7 @@
                 </a:solidFill>
                 <a:latin typeface="Arial"/>
               </a:rPr>
-              <a:t>We judged incoming prompts, not the assistant's replies, and not the harder mortgage-compliance question of whether a specific answer breaks a specific rule.</a:t>
+              <a:t>Recovers most of that same gain on familiar traffic, and holds its accuracy on unfamiliar traffic.</a:t>
             </a:r>
           </a:p>
           <a:p>
@@ -5619,7 +5779,7 @@
                 </a:solidFill>
                 <a:latin typeface="Arial"/>
               </a:rPr>
-              <a:t>Vendor behaviour is a moving target. </a:t>
+              <a:t>So for a guardrail specifically. </a:t>
             </a:r>
             <a:r>
               <a:rPr sz="1450" b="0" i="0">
@@ -5628,41 +5788,7 @@
                 </a:solidFill>
                 <a:latin typeface="Arial"/>
               </a:rPr>
-              <a:t>Model versions change under you. The self-hosted side is pinned to an exact revision and reproduces indefinitely; the hosted side does not.</a:t>
-            </a:r>
-          </a:p>
-          <a:p>
-            <a:pPr algn="l">
-              <a:spcAft>
-                <a:spcPts val="1200"/>
-              </a:spcAft>
-            </a:pPr>
-            <a:r>
-              <a:rPr sz="1450" b="1" i="0">
-                <a:solidFill>
-                  <a:srgbClr val="A02128"/>
-                </a:solidFill>
-                <a:latin typeface="Arial"/>
-              </a:rPr>
-              <a:t>—  </a:t>
-            </a:r>
-            <a:r>
-              <a:rPr sz="1450" b="1" i="0">
-                <a:solidFill>
-                  <a:srgbClr val="12263A"/>
-                </a:solidFill>
-                <a:latin typeface="Arial"/>
-              </a:rPr>
-              <a:t>Prices are list, not invoices. </a:t>
-            </a:r>
-            <a:r>
-              <a:rPr sz="1450" b="0" i="0">
-                <a:solidFill>
-                  <a:srgbClr val="5A6B7C"/>
-                </a:solidFill>
-                <a:latin typeface="Arial"/>
-              </a:rPr>
-              <a:t>Cost figures are billed tokens at public rates and exclude the GPU cost on our own side.</a:t>
+              <a:t>Prefer spending on a stronger base model over spending on a tuning programme.</a:t>
             </a:r>
           </a:p>
         </p:txBody>
@@ -5675,14 +5801,14 @@
         </p:nvSpPr>
         <p:spPr>
           <a:xfrm>
-            <a:off x="777240" y="5221224"/>
-            <a:ext cx="10637215" cy="987552"/>
+            <a:off x="6301587" y="2212848"/>
+            <a:ext cx="5112867" cy="1554480"/>
           </a:xfrm>
           <a:prstGeom prst="roundRect">
             <a:avLst/>
           </a:prstGeom>
           <a:solidFill>
-            <a:srgbClr val="EFF4FE"/>
+            <a:srgbClr val="EFF7F1"/>
           </a:solidFill>
           <a:ln>
             <a:noFill/>
@@ -5719,14 +5845,14 @@
         </p:nvSpPr>
         <p:spPr>
           <a:xfrm>
-            <a:off x="777240" y="5221224"/>
-            <a:ext cx="50292" cy="987552"/>
+            <a:off x="6301587" y="2212848"/>
+            <a:ext cx="50292" cy="1554480"/>
           </a:xfrm>
           <a:prstGeom prst="rect">
             <a:avLst/>
           </a:prstGeom>
           <a:solidFill>
-            <a:srgbClr val="2563EB"/>
+            <a:srgbClr val="15803D"/>
           </a:solidFill>
           <a:ln>
             <a:noFill/>
@@ -5763,8 +5889,8 @@
         </p:nvSpPr>
         <p:spPr>
           <a:xfrm>
-            <a:off x="1014984" y="5385816"/>
-            <a:ext cx="10180015" cy="658368"/>
+            <a:off x="6539331" y="2377440"/>
+            <a:ext cx="4655667" cy="1225296"/>
           </a:xfrm>
           <a:prstGeom prst="rect">
             <a:avLst/>
@@ -5785,11 +5911,11 @@
             <a:r>
               <a:rPr sz="1100" b="1" i="0" spc="110">
                 <a:solidFill>
-                  <a:srgbClr val="2563EB"/>
-                </a:solidFill>
-                <a:latin typeface="Arial"/>
-              </a:rPr>
-              <a:t>WHAT WOULD CHANGE THE RECOMMENDATION</a:t>
+                  <a:srgbClr val="15803D"/>
+                </a:solidFill>
+                <a:latin typeface="Arial"/>
+              </a:rPr>
+              <a:t>WHY THIS IS WORTH MONEY</a:t>
             </a:r>
           </a:p>
           <a:p>
@@ -5808,7 +5934,153 @@
                 </a:solidFill>
                 <a:latin typeface="Arial"/>
               </a:rPr>
-              <a:t>A regulated-domain benchmark that scores whole answers against specific rules, with expert adjudication. That is the instrument we do not have, and building it is the highest-value next step.</a:t>
+              <a:t>It reverses the intuitive plan. Tuning looks like the cheap, targeted option; measured on held-out traffic it is the one that quietly costs you coverage.</a:t>
+            </a:r>
+          </a:p>
+        </p:txBody>
+      </p:sp>
+      <p:sp>
+        <p:nvSpPr>
+          <p:cNvPr id="13" name="Rounded Rectangle 12"/>
+          <p:cNvSpPr/>
+          <p:nvPr/>
+        </p:nvSpPr>
+        <p:spPr>
+          <a:xfrm>
+            <a:off x="6301587" y="3913632"/>
+            <a:ext cx="5112867" cy="1554480"/>
+          </a:xfrm>
+          <a:prstGeom prst="roundRect">
+            <a:avLst/>
+          </a:prstGeom>
+          <a:solidFill>
+            <a:srgbClr val="FDF7EC"/>
+          </a:solidFill>
+          <a:ln>
+            <a:noFill/>
+          </a:ln>
+          <a:effectLst/>
+        </p:spPr>
+        <p:style>
+          <a:lnRef idx="1">
+            <a:schemeClr val="accent1"/>
+          </a:lnRef>
+          <a:fillRef idx="3">
+            <a:schemeClr val="accent1"/>
+          </a:fillRef>
+          <a:effectRef idx="2">
+            <a:schemeClr val="accent1"/>
+          </a:effectRef>
+          <a:fontRef idx="minor">
+            <a:schemeClr val="lt1"/>
+          </a:fontRef>
+        </p:style>
+        <p:txBody>
+          <a:bodyPr rtlCol="0" anchor="ctr" wrap="square"/>
+          <a:lstStyle/>
+          <a:p>
+            <a:pPr algn="ctr"/>
+          </a:p>
+        </p:txBody>
+      </p:sp>
+      <p:sp>
+        <p:nvSpPr>
+          <p:cNvPr id="14" name="Rectangle 13"/>
+          <p:cNvSpPr/>
+          <p:nvPr/>
+        </p:nvSpPr>
+        <p:spPr>
+          <a:xfrm>
+            <a:off x="6301587" y="3913632"/>
+            <a:ext cx="50292" cy="1554480"/>
+          </a:xfrm>
+          <a:prstGeom prst="rect">
+            <a:avLst/>
+          </a:prstGeom>
+          <a:solidFill>
+            <a:srgbClr val="B7791F"/>
+          </a:solidFill>
+          <a:ln>
+            <a:noFill/>
+          </a:ln>
+          <a:effectLst/>
+        </p:spPr>
+        <p:style>
+          <a:lnRef idx="1">
+            <a:schemeClr val="accent1"/>
+          </a:lnRef>
+          <a:fillRef idx="3">
+            <a:schemeClr val="accent1"/>
+          </a:fillRef>
+          <a:effectRef idx="2">
+            <a:schemeClr val="accent1"/>
+          </a:effectRef>
+          <a:fontRef idx="minor">
+            <a:schemeClr val="lt1"/>
+          </a:fontRef>
+        </p:style>
+        <p:txBody>
+          <a:bodyPr rtlCol="0" anchor="ctr" wrap="square"/>
+          <a:lstStyle/>
+          <a:p>
+            <a:pPr algn="ctr"/>
+          </a:p>
+        </p:txBody>
+      </p:sp>
+      <p:sp>
+        <p:nvSpPr>
+          <p:cNvPr id="15" name="TextBox 14"/>
+          <p:cNvSpPr txBox="1"/>
+          <p:nvPr/>
+        </p:nvSpPr>
+        <p:spPr>
+          <a:xfrm>
+            <a:off x="6539331" y="4078224"/>
+            <a:ext cx="4655667" cy="1225296"/>
+          </a:xfrm>
+          <a:prstGeom prst="rect">
+            <a:avLst/>
+          </a:prstGeom>
+          <a:noFill/>
+        </p:spPr>
+        <p:txBody>
+          <a:bodyPr wrap="square" anchor="t" lIns="0" rIns="0" tIns="0" bIns="0">
+            <a:spAutoFit/>
+          </a:bodyPr>
+          <a:lstStyle/>
+          <a:p>
+            <a:pPr algn="l">
+              <a:spcAft>
+                <a:spcPts val="500"/>
+              </a:spcAft>
+            </a:pPr>
+            <a:r>
+              <a:rPr sz="1100" b="1" i="0" spc="110">
+                <a:solidFill>
+                  <a:srgbClr val="B7791F"/>
+                </a:solidFill>
+                <a:latin typeface="Arial"/>
+              </a:rPr>
+              <a:t>CONFIDENCE LEVEL</a:t>
+            </a:r>
+          </a:p>
+          <a:p>
+            <a:pPr algn="l">
+              <a:lnSpc>
+                <a:spcPct val="106000"/>
+              </a:lnSpc>
+              <a:spcAft>
+                <a:spcPts val="0"/>
+              </a:spcAft>
+            </a:pPr>
+            <a:r>
+              <a:rPr sz="1350" b="0" i="0">
+                <a:solidFill>
+                  <a:srgbClr val="12263A"/>
+                </a:solidFill>
+                <a:latin typeface="Arial"/>
+              </a:rPr>
+              <a:t>This is a comparison between different model sizes, not a controlled experiment at fixed size. Treat it as a strong steer on where to spend, not a proven law.</a:t>
             </a:r>
           </a:p>
         </p:txBody>
@@ -5987,6 +6259,615 @@
                 </a:solidFill>
                 <a:latin typeface="Arial"/>
               </a:rPr>
+              <a:t>CONFIDENCE AND LIMITS</a:t>
+            </a:r>
+          </a:p>
+        </p:txBody>
+      </p:sp>
+      <p:sp>
+        <p:nvSpPr>
+          <p:cNvPr id="6" name="TextBox 5"/>
+          <p:cNvSpPr txBox="1"/>
+          <p:nvPr/>
+        </p:nvSpPr>
+        <p:spPr>
+          <a:xfrm>
+            <a:off x="777240" y="713232"/>
+            <a:ext cx="10637215" cy="731520"/>
+          </a:xfrm>
+          <a:prstGeom prst="rect">
+            <a:avLst/>
+          </a:prstGeom>
+          <a:noFill/>
+        </p:spPr>
+        <p:txBody>
+          <a:bodyPr wrap="square" anchor="t" lIns="0" rIns="0" tIns="0" bIns="0">
+            <a:spAutoFit/>
+          </a:bodyPr>
+          <a:lstStyle/>
+          <a:p>
+            <a:pPr algn="l">
+              <a:lnSpc>
+                <a:spcPct val="102000"/>
+              </a:lnSpc>
+              <a:spcAft>
+                <a:spcPts val="0"/>
+              </a:spcAft>
+            </a:pPr>
+            <a:r>
+              <a:rPr sz="3000" b="1" i="0">
+                <a:solidFill>
+                  <a:srgbClr val="12263A"/>
+                </a:solidFill>
+                <a:latin typeface="Georgia"/>
+              </a:rPr>
+              <a:t>What this does not tell you</a:t>
+            </a:r>
+          </a:p>
+        </p:txBody>
+      </p:sp>
+      <p:sp>
+        <p:nvSpPr>
+          <p:cNvPr id="7" name="TextBox 6"/>
+          <p:cNvSpPr txBox="1"/>
+          <p:nvPr/>
+        </p:nvSpPr>
+        <p:spPr>
+          <a:xfrm>
+            <a:off x="777240" y="1481328"/>
+            <a:ext cx="10637215" cy="365760"/>
+          </a:xfrm>
+          <a:prstGeom prst="rect">
+            <a:avLst/>
+          </a:prstGeom>
+          <a:noFill/>
+        </p:spPr>
+        <p:txBody>
+          <a:bodyPr wrap="square" anchor="t" lIns="0" rIns="0" tIns="0" bIns="0">
+            <a:spAutoFit/>
+          </a:bodyPr>
+          <a:lstStyle/>
+          <a:p>
+            <a:pPr algn="l">
+              <a:spcAft>
+                <a:spcPts val="0"/>
+              </a:spcAft>
+            </a:pPr>
+            <a:r>
+              <a:rPr sz="1500" b="0" i="0">
+                <a:solidFill>
+                  <a:srgbClr val="5A6B7C"/>
+                </a:solidFill>
+                <a:latin typeface="Arial"/>
+              </a:rPr>
+              <a:t>Stated plainly, so the recommendation can be trusted where it does apply</a:t>
+            </a:r>
+          </a:p>
+        </p:txBody>
+      </p:sp>
+      <p:sp>
+        <p:nvSpPr>
+          <p:cNvPr id="8" name="Rectangle 7"/>
+          <p:cNvSpPr/>
+          <p:nvPr/>
+        </p:nvSpPr>
+        <p:spPr>
+          <a:xfrm>
+            <a:off x="777240" y="1920240"/>
+            <a:ext cx="10637215" cy="11430"/>
+          </a:xfrm>
+          <a:prstGeom prst="rect">
+            <a:avLst/>
+          </a:prstGeom>
+          <a:solidFill>
+            <a:srgbClr val="D8DEE4"/>
+          </a:solidFill>
+          <a:ln>
+            <a:noFill/>
+          </a:ln>
+          <a:effectLst/>
+        </p:spPr>
+        <p:style>
+          <a:lnRef idx="1">
+            <a:schemeClr val="accent1"/>
+          </a:lnRef>
+          <a:fillRef idx="3">
+            <a:schemeClr val="accent1"/>
+          </a:fillRef>
+          <a:effectRef idx="2">
+            <a:schemeClr val="accent1"/>
+          </a:effectRef>
+          <a:fontRef idx="minor">
+            <a:schemeClr val="lt1"/>
+          </a:fontRef>
+        </p:style>
+        <p:txBody>
+          <a:bodyPr rtlCol="0" anchor="ctr" wrap="square"/>
+          <a:lstStyle/>
+          <a:p>
+            <a:pPr algn="ctr"/>
+          </a:p>
+        </p:txBody>
+      </p:sp>
+      <p:sp>
+        <p:nvSpPr>
+          <p:cNvPr id="9" name="TextBox 8"/>
+          <p:cNvSpPr txBox="1"/>
+          <p:nvPr/>
+        </p:nvSpPr>
+        <p:spPr>
+          <a:xfrm>
+            <a:off x="777240" y="2212848"/>
+            <a:ext cx="10637215" cy="2926080"/>
+          </a:xfrm>
+          <a:prstGeom prst="rect">
+            <a:avLst/>
+          </a:prstGeom>
+          <a:noFill/>
+        </p:spPr>
+        <p:txBody>
+          <a:bodyPr wrap="square" anchor="t" lIns="0" rIns="0" tIns="0" bIns="0">
+            <a:spAutoFit/>
+          </a:bodyPr>
+          <a:lstStyle/>
+          <a:p>
+            <a:pPr algn="l">
+              <a:spcAft>
+                <a:spcPts val="1200"/>
+              </a:spcAft>
+            </a:pPr>
+            <a:r>
+              <a:rPr sz="1450" b="1" i="0">
+                <a:solidFill>
+                  <a:srgbClr val="A02128"/>
+                </a:solidFill>
+                <a:latin typeface="Arial"/>
+              </a:rPr>
+              <a:t>—  </a:t>
+            </a:r>
+            <a:r>
+              <a:rPr sz="1450" b="1" i="0">
+                <a:solidFill>
+                  <a:srgbClr val="12263A"/>
+                </a:solidFill>
+                <a:latin typeface="Arial"/>
+              </a:rPr>
+              <a:t>It is one benchmark. </a:t>
+            </a:r>
+            <a:r>
+              <a:rPr sz="1450" b="0" i="0">
+                <a:solidFill>
+                  <a:srgbClr val="5A6B7C"/>
+                </a:solidFill>
+                <a:latin typeface="Arial"/>
+              </a:rPr>
+              <a:t>Expert-annotated finance, healthcare and law prompt safety. It is the strongest external evidence we have, and it is still a single instrument — and our own research shows guard rankings reorder when the benchmark changes.</a:t>
+            </a:r>
+          </a:p>
+          <a:p>
+            <a:pPr algn="l">
+              <a:spcAft>
+                <a:spcPts val="1200"/>
+              </a:spcAft>
+            </a:pPr>
+            <a:r>
+              <a:rPr sz="1450" b="1" i="0">
+                <a:solidFill>
+                  <a:srgbClr val="A02128"/>
+                </a:solidFill>
+                <a:latin typeface="Arial"/>
+              </a:rPr>
+              <a:t>—  </a:t>
+            </a:r>
+            <a:r>
+              <a:rPr sz="1450" b="1" i="0">
+                <a:solidFill>
+                  <a:srgbClr val="12263A"/>
+                </a:solidFill>
+                <a:latin typeface="Arial"/>
+              </a:rPr>
+              <a:t>It is prompt-only. </a:t>
+            </a:r>
+            <a:r>
+              <a:rPr sz="1450" b="0" i="0">
+                <a:solidFill>
+                  <a:srgbClr val="5A6B7C"/>
+                </a:solidFill>
+                <a:latin typeface="Arial"/>
+              </a:rPr>
+              <a:t>We judged incoming prompts, not the assistant's replies, and not the harder mortgage-compliance question of whether a specific answer breaks a specific rule.</a:t>
+            </a:r>
+          </a:p>
+          <a:p>
+            <a:pPr algn="l">
+              <a:spcAft>
+                <a:spcPts val="1200"/>
+              </a:spcAft>
+            </a:pPr>
+            <a:r>
+              <a:rPr sz="1450" b="1" i="0">
+                <a:solidFill>
+                  <a:srgbClr val="A02128"/>
+                </a:solidFill>
+                <a:latin typeface="Arial"/>
+              </a:rPr>
+              <a:t>—  </a:t>
+            </a:r>
+            <a:r>
+              <a:rPr sz="1450" b="1" i="0">
+                <a:solidFill>
+                  <a:srgbClr val="12263A"/>
+                </a:solidFill>
+                <a:latin typeface="Arial"/>
+              </a:rPr>
+              <a:t>Vendor behaviour is a moving target. </a:t>
+            </a:r>
+            <a:r>
+              <a:rPr sz="1450" b="0" i="0">
+                <a:solidFill>
+                  <a:srgbClr val="5A6B7C"/>
+                </a:solidFill>
+                <a:latin typeface="Arial"/>
+              </a:rPr>
+              <a:t>Model versions change under you. The self-hosted side is pinned to an exact revision and reproduces indefinitely; the hosted side does not.</a:t>
+            </a:r>
+          </a:p>
+          <a:p>
+            <a:pPr algn="l">
+              <a:spcAft>
+                <a:spcPts val="1200"/>
+              </a:spcAft>
+            </a:pPr>
+            <a:r>
+              <a:rPr sz="1450" b="1" i="0">
+                <a:solidFill>
+                  <a:srgbClr val="A02128"/>
+                </a:solidFill>
+                <a:latin typeface="Arial"/>
+              </a:rPr>
+              <a:t>—  </a:t>
+            </a:r>
+            <a:r>
+              <a:rPr sz="1450" b="1" i="0">
+                <a:solidFill>
+                  <a:srgbClr val="12263A"/>
+                </a:solidFill>
+                <a:latin typeface="Arial"/>
+              </a:rPr>
+              <a:t>Prices are list, not invoices. </a:t>
+            </a:r>
+            <a:r>
+              <a:rPr sz="1450" b="0" i="0">
+                <a:solidFill>
+                  <a:srgbClr val="5A6B7C"/>
+                </a:solidFill>
+                <a:latin typeface="Arial"/>
+              </a:rPr>
+              <a:t>Cost figures are billed tokens at public rates and exclude the GPU cost on our own side.</a:t>
+            </a:r>
+          </a:p>
+        </p:txBody>
+      </p:sp>
+      <p:sp>
+        <p:nvSpPr>
+          <p:cNvPr id="10" name="Rounded Rectangle 9"/>
+          <p:cNvSpPr/>
+          <p:nvPr/>
+        </p:nvSpPr>
+        <p:spPr>
+          <a:xfrm>
+            <a:off x="777240" y="5221224"/>
+            <a:ext cx="10637215" cy="987552"/>
+          </a:xfrm>
+          <a:prstGeom prst="roundRect">
+            <a:avLst/>
+          </a:prstGeom>
+          <a:solidFill>
+            <a:srgbClr val="EFF4FE"/>
+          </a:solidFill>
+          <a:ln>
+            <a:noFill/>
+          </a:ln>
+          <a:effectLst/>
+        </p:spPr>
+        <p:style>
+          <a:lnRef idx="1">
+            <a:schemeClr val="accent1"/>
+          </a:lnRef>
+          <a:fillRef idx="3">
+            <a:schemeClr val="accent1"/>
+          </a:fillRef>
+          <a:effectRef idx="2">
+            <a:schemeClr val="accent1"/>
+          </a:effectRef>
+          <a:fontRef idx="minor">
+            <a:schemeClr val="lt1"/>
+          </a:fontRef>
+        </p:style>
+        <p:txBody>
+          <a:bodyPr rtlCol="0" anchor="ctr" wrap="square"/>
+          <a:lstStyle/>
+          <a:p>
+            <a:pPr algn="ctr"/>
+          </a:p>
+        </p:txBody>
+      </p:sp>
+      <p:sp>
+        <p:nvSpPr>
+          <p:cNvPr id="11" name="Rectangle 10"/>
+          <p:cNvSpPr/>
+          <p:nvPr/>
+        </p:nvSpPr>
+        <p:spPr>
+          <a:xfrm>
+            <a:off x="777240" y="5221224"/>
+            <a:ext cx="50292" cy="987552"/>
+          </a:xfrm>
+          <a:prstGeom prst="rect">
+            <a:avLst/>
+          </a:prstGeom>
+          <a:solidFill>
+            <a:srgbClr val="2563EB"/>
+          </a:solidFill>
+          <a:ln>
+            <a:noFill/>
+          </a:ln>
+          <a:effectLst/>
+        </p:spPr>
+        <p:style>
+          <a:lnRef idx="1">
+            <a:schemeClr val="accent1"/>
+          </a:lnRef>
+          <a:fillRef idx="3">
+            <a:schemeClr val="accent1"/>
+          </a:fillRef>
+          <a:effectRef idx="2">
+            <a:schemeClr val="accent1"/>
+          </a:effectRef>
+          <a:fontRef idx="minor">
+            <a:schemeClr val="lt1"/>
+          </a:fontRef>
+        </p:style>
+        <p:txBody>
+          <a:bodyPr rtlCol="0" anchor="ctr" wrap="square"/>
+          <a:lstStyle/>
+          <a:p>
+            <a:pPr algn="ctr"/>
+          </a:p>
+        </p:txBody>
+      </p:sp>
+      <p:sp>
+        <p:nvSpPr>
+          <p:cNvPr id="12" name="TextBox 11"/>
+          <p:cNvSpPr txBox="1"/>
+          <p:nvPr/>
+        </p:nvSpPr>
+        <p:spPr>
+          <a:xfrm>
+            <a:off x="1014984" y="5385816"/>
+            <a:ext cx="10180015" cy="658368"/>
+          </a:xfrm>
+          <a:prstGeom prst="rect">
+            <a:avLst/>
+          </a:prstGeom>
+          <a:noFill/>
+        </p:spPr>
+        <p:txBody>
+          <a:bodyPr wrap="square" anchor="t" lIns="0" rIns="0" tIns="0" bIns="0">
+            <a:spAutoFit/>
+          </a:bodyPr>
+          <a:lstStyle/>
+          <a:p>
+            <a:pPr algn="l">
+              <a:spcAft>
+                <a:spcPts val="500"/>
+              </a:spcAft>
+            </a:pPr>
+            <a:r>
+              <a:rPr sz="1100" b="1" i="0" spc="110">
+                <a:solidFill>
+                  <a:srgbClr val="2563EB"/>
+                </a:solidFill>
+                <a:latin typeface="Arial"/>
+              </a:rPr>
+              <a:t>WHAT WOULD CHANGE THE RECOMMENDATION</a:t>
+            </a:r>
+          </a:p>
+          <a:p>
+            <a:pPr algn="l">
+              <a:lnSpc>
+                <a:spcPct val="106000"/>
+              </a:lnSpc>
+              <a:spcAft>
+                <a:spcPts val="0"/>
+              </a:spcAft>
+            </a:pPr>
+            <a:r>
+              <a:rPr sz="1350" b="0" i="0">
+                <a:solidFill>
+                  <a:srgbClr val="12263A"/>
+                </a:solidFill>
+                <a:latin typeface="Arial"/>
+              </a:rPr>
+              <a:t>A regulated-domain benchmark that scores whole answers against specific rules, with expert adjudication. That is the instrument we do not have, and building it is the highest-value next step.</a:t>
+            </a:r>
+          </a:p>
+        </p:txBody>
+      </p:sp>
+    </p:spTree>
+  </p:cSld>
+  <p:clrMapOvr>
+    <a:masterClrMapping/>
+  </p:clrMapOvr>
+</p:sld>
+</file>
+
+<file path=ppt/slides/slide12.xml><?xml version="1.0" encoding="utf-8"?>
+<p:sld xmlns:a="http://schemas.openxmlformats.org/drawingml/2006/main" xmlns:p="http://schemas.openxmlformats.org/presentationml/2006/main" xmlns:r="http://schemas.openxmlformats.org/officeDocument/2006/relationships">
+  <p:cSld>
+    <p:spTree>
+      <p:nvGrpSpPr>
+        <p:cNvPr id="1" name=""/>
+        <p:cNvGrpSpPr/>
+        <p:nvPr/>
+      </p:nvGrpSpPr>
+      <p:grpSpPr/>
+      <p:sp>
+        <p:nvSpPr>
+          <p:cNvPr id="2" name="Rectangle 1"/>
+          <p:cNvSpPr/>
+          <p:nvPr/>
+        </p:nvSpPr>
+        <p:spPr>
+          <a:xfrm>
+            <a:off x="0" y="0"/>
+            <a:ext cx="12191695" cy="56692"/>
+          </a:xfrm>
+          <a:prstGeom prst="rect">
+            <a:avLst/>
+          </a:prstGeom>
+          <a:solidFill>
+            <a:srgbClr val="A02128"/>
+          </a:solidFill>
+          <a:ln>
+            <a:noFill/>
+          </a:ln>
+          <a:effectLst/>
+        </p:spPr>
+        <p:style>
+          <a:lnRef idx="1">
+            <a:schemeClr val="accent1"/>
+          </a:lnRef>
+          <a:fillRef idx="3">
+            <a:schemeClr val="accent1"/>
+          </a:fillRef>
+          <a:effectRef idx="2">
+            <a:schemeClr val="accent1"/>
+          </a:effectRef>
+          <a:fontRef idx="minor">
+            <a:schemeClr val="lt1"/>
+          </a:fontRef>
+        </p:style>
+        <p:txBody>
+          <a:bodyPr rtlCol="0" anchor="ctr" wrap="square"/>
+          <a:lstStyle/>
+          <a:p>
+            <a:pPr algn="ctr"/>
+          </a:p>
+        </p:txBody>
+      </p:sp>
+      <p:sp>
+        <p:nvSpPr>
+          <p:cNvPr id="3" name="TextBox 2"/>
+          <p:cNvSpPr txBox="1"/>
+          <p:nvPr/>
+        </p:nvSpPr>
+        <p:spPr>
+          <a:xfrm>
+            <a:off x="777240" y="6400800"/>
+            <a:ext cx="8686800" cy="256032"/>
+          </a:xfrm>
+          <a:prstGeom prst="rect">
+            <a:avLst/>
+          </a:prstGeom>
+          <a:noFill/>
+        </p:spPr>
+        <p:txBody>
+          <a:bodyPr wrap="square" anchor="t" lIns="0" rIns="0" tIns="0" bIns="0">
+            <a:spAutoFit/>
+          </a:bodyPr>
+          <a:lstStyle/>
+          <a:p>
+            <a:pPr algn="l">
+              <a:spcAft>
+                <a:spcPts val="0"/>
+              </a:spcAft>
+            </a:pPr>
+            <a:r>
+              <a:rPr sz="950" b="0" i="0">
+                <a:solidFill>
+                  <a:srgbClr val="8A97A5"/>
+                </a:solidFill>
+                <a:latin typeface="Arial"/>
+              </a:rPr>
+              <a:t>Guardrail sourcing · in-house inline, escalate the uncertain slice</a:t>
+            </a:r>
+          </a:p>
+        </p:txBody>
+      </p:sp>
+      <p:sp>
+        <p:nvSpPr>
+          <p:cNvPr id="4" name="TextBox 3"/>
+          <p:cNvSpPr txBox="1"/>
+          <p:nvPr/>
+        </p:nvSpPr>
+        <p:spPr>
+          <a:xfrm>
+            <a:off x="10317175" y="6400800"/>
+            <a:ext cx="1097280" cy="256032"/>
+          </a:xfrm>
+          <a:prstGeom prst="rect">
+            <a:avLst/>
+          </a:prstGeom>
+          <a:noFill/>
+        </p:spPr>
+        <p:txBody>
+          <a:bodyPr wrap="square" anchor="t" lIns="0" rIns="0" tIns="0" bIns="0">
+            <a:spAutoFit/>
+          </a:bodyPr>
+          <a:lstStyle/>
+          <a:p>
+            <a:pPr algn="r">
+              <a:spcAft>
+                <a:spcPts val="0"/>
+              </a:spcAft>
+            </a:pPr>
+            <a:r>
+              <a:rPr sz="1050" b="1" i="0" spc="60">
+                <a:solidFill>
+                  <a:srgbClr val="A02128"/>
+                </a:solidFill>
+                <a:latin typeface="Arial"/>
+              </a:rPr>
+              <a:t>11</a:t>
+            </a:r>
+          </a:p>
+        </p:txBody>
+      </p:sp>
+      <p:sp>
+        <p:nvSpPr>
+          <p:cNvPr id="5" name="TextBox 4"/>
+          <p:cNvSpPr txBox="1"/>
+          <p:nvPr/>
+        </p:nvSpPr>
+        <p:spPr>
+          <a:xfrm>
+            <a:off x="777240" y="384048"/>
+            <a:ext cx="10637215" cy="237744"/>
+          </a:xfrm>
+          <a:prstGeom prst="rect">
+            <a:avLst/>
+          </a:prstGeom>
+          <a:noFill/>
+        </p:spPr>
+        <p:txBody>
+          <a:bodyPr wrap="square" anchor="t" lIns="0" rIns="0" tIns="0" bIns="0">
+            <a:spAutoFit/>
+          </a:bodyPr>
+          <a:lstStyle/>
+          <a:p>
+            <a:pPr algn="l">
+              <a:spcAft>
+                <a:spcPts val="0"/>
+              </a:spcAft>
+            </a:pPr>
+            <a:r>
+              <a:rPr sz="1050" b="1" i="0" spc="140">
+                <a:solidFill>
+                  <a:srgbClr val="A02128"/>
+                </a:solidFill>
+                <a:latin typeface="Arial"/>
+              </a:rPr>
               <a:t>PROPOSAL</a:t>
             </a:r>
           </a:p>
@@ -11675,7 +12556,7 @@
                 </a:solidFill>
                 <a:latin typeface="Arial"/>
               </a:rPr>
-              <a:t>WHAT HOSTED COSTS</a:t>
+              <a:t>IF NOTHING MAY LEAVE</a:t>
             </a:r>
           </a:p>
         </p:txBody>
@@ -11717,7 +12598,7 @@
                 </a:solidFill>
                 <a:latin typeface="Georgia"/>
               </a:rPr>
-              <a:t>The accuracy is real. So is the bill, the latency, and the loss of control</a:t>
+              <a:t>Combining our own guards helps a little. It does not reach the hosted model</a:t>
             </a:r>
           </a:p>
         </p:txBody>
@@ -11756,7 +12637,7 @@
                 </a:solidFill>
                 <a:latin typeface="Arial"/>
               </a:rPr>
-              <a:t>Four costs, three of which do not appear on an invoice</a:t>
+              <a:t>Every option below priced against our strongest single in-house guard (83%), with what each costs per request</a:t>
             </a:r>
           </a:p>
         </p:txBody>
@@ -11813,8 +12694,8 @@
         </p:nvSpPr>
         <p:spPr>
           <a:xfrm>
-            <a:off x="777240" y="2249424"/>
-            <a:ext cx="5112867" cy="420624"/>
+            <a:off x="777240" y="2194560"/>
+            <a:ext cx="10637215" cy="512064"/>
           </a:xfrm>
           <a:prstGeom prst="rect">
             <a:avLst/>
@@ -11857,8 +12738,8 @@
         </p:nvSpPr>
         <p:spPr>
           <a:xfrm>
-            <a:off x="905256" y="2249424"/>
-            <a:ext cx="1993629" cy="420624"/>
+            <a:off x="905256" y="2194560"/>
+            <a:ext cx="3360621" cy="512064"/>
           </a:xfrm>
           <a:prstGeom prst="rect">
             <a:avLst/>
@@ -11883,7 +12764,7 @@
                 </a:solidFill>
                 <a:latin typeface="Arial"/>
               </a:rPr>
-              <a:t/>
+              <a:t>Option</a:t>
             </a:r>
           </a:p>
         </p:txBody>
@@ -11896,8 +12777,8 @@
         </p:nvSpPr>
         <p:spPr>
           <a:xfrm>
-            <a:off x="3154917" y="2249424"/>
-            <a:ext cx="1175570" cy="420624"/>
+            <a:off x="4521909" y="2194560"/>
+            <a:ext cx="1552294" cy="512064"/>
           </a:xfrm>
           <a:prstGeom prst="rect">
             <a:avLst/>
@@ -11922,7 +12803,7 @@
                 </a:solidFill>
                 <a:latin typeface="Arial"/>
               </a:rPr>
-              <a:t>Self-hosted small</a:t>
+              <a:t>Catch rate</a:t>
             </a:r>
           </a:p>
         </p:txBody>
@@ -11935,8 +12816,8 @@
         </p:nvSpPr>
         <p:spPr>
           <a:xfrm>
-            <a:off x="4586519" y="2249424"/>
-            <a:ext cx="1175570" cy="420624"/>
+            <a:off x="6330235" y="2194560"/>
+            <a:ext cx="2509643" cy="512064"/>
           </a:xfrm>
           <a:prstGeom prst="rect">
             <a:avLst/>
@@ -11961,21 +12842,60 @@
                 </a:solidFill>
                 <a:latin typeface="Arial"/>
               </a:rPr>
-              <a:t>Hosted frontier</a:t>
-            </a:r>
-          </a:p>
-        </p:txBody>
-      </p:sp>
-      <p:sp>
-        <p:nvSpPr>
-          <p:cNvPr id="13" name="Rectangle 12"/>
+              <a:t>Cost per request</a:t>
+            </a:r>
+          </a:p>
+        </p:txBody>
+      </p:sp>
+      <p:sp>
+        <p:nvSpPr>
+          <p:cNvPr id="13" name="TextBox 12"/>
+          <p:cNvSpPr txBox="1"/>
+          <p:nvPr/>
+        </p:nvSpPr>
+        <p:spPr>
+          <a:xfrm>
+            <a:off x="9095910" y="2194560"/>
+            <a:ext cx="2190527" cy="512064"/>
+          </a:xfrm>
+          <a:prstGeom prst="rect">
+            <a:avLst/>
+          </a:prstGeom>
+          <a:noFill/>
+        </p:spPr>
+        <p:txBody>
+          <a:bodyPr wrap="square" anchor="ctr" lIns="0" rIns="0" tIns="0" bIns="0">
+            <a:spAutoFit/>
+          </a:bodyPr>
+          <a:lstStyle/>
+          <a:p>
+            <a:pPr algn="ctr">
+              <a:spcAft>
+                <a:spcPts val="0"/>
+              </a:spcAft>
+            </a:pPr>
+            <a:r>
+              <a:rPr sz="1300" b="1" i="0">
+                <a:solidFill>
+                  <a:srgbClr val="FFFFFF"/>
+                </a:solidFill>
+                <a:latin typeface="Arial"/>
+              </a:rPr>
+              <a:t>Verdict</a:t>
+            </a:r>
+          </a:p>
+        </p:txBody>
+      </p:sp>
+      <p:sp>
+        <p:nvSpPr>
+          <p:cNvPr id="14" name="Rectangle 13"/>
           <p:cNvSpPr/>
           <p:nvPr/>
         </p:nvSpPr>
         <p:spPr>
           <a:xfrm>
-            <a:off x="777240" y="2670048"/>
-            <a:ext cx="5112867" cy="420624"/>
+            <a:off x="777240" y="2706624"/>
+            <a:ext cx="10637215" cy="512064"/>
           </a:xfrm>
           <a:prstGeom prst="rect">
             <a:avLst/>
@@ -12014,14 +12934,14 @@
       </p:sp>
       <p:sp>
         <p:nvSpPr>
-          <p:cNvPr id="14" name="TextBox 13"/>
+          <p:cNvPr id="15" name="TextBox 14"/>
           <p:cNvSpPr txBox="1"/>
           <p:nvPr/>
         </p:nvSpPr>
         <p:spPr>
           <a:xfrm>
-            <a:off x="905256" y="2670048"/>
-            <a:ext cx="1993629" cy="420624"/>
+            <a:off x="905256" y="2706624"/>
+            <a:ext cx="3360621" cy="512064"/>
           </a:xfrm>
           <a:prstGeom prst="rect">
             <a:avLst/>
@@ -12046,21 +12966,21 @@
                 </a:solidFill>
                 <a:latin typeface="Arial"/>
               </a:rPr>
-              <a:t>Median latency</a:t>
-            </a:r>
-          </a:p>
-        </p:txBody>
-      </p:sp>
-      <p:sp>
-        <p:nvSpPr>
-          <p:cNvPr id="15" name="TextBox 14"/>
+              <a:t>Best single in-house guard</a:t>
+            </a:r>
+          </a:p>
+        </p:txBody>
+      </p:sp>
+      <p:sp>
+        <p:nvSpPr>
+          <p:cNvPr id="16" name="TextBox 15"/>
           <p:cNvSpPr txBox="1"/>
           <p:nvPr/>
         </p:nvSpPr>
         <p:spPr>
           <a:xfrm>
-            <a:off x="3154917" y="2670048"/>
-            <a:ext cx="1175570" cy="420624"/>
+            <a:off x="4521909" y="2706624"/>
+            <a:ext cx="1552294" cy="512064"/>
           </a:xfrm>
           <a:prstGeom prst="rect">
             <a:avLst/>
@@ -12085,21 +13005,21 @@
                 </a:solidFill>
                 <a:latin typeface="Arial"/>
               </a:rPr>
-              <a:t>10–25 ms</a:t>
-            </a:r>
-          </a:p>
-        </p:txBody>
-      </p:sp>
-      <p:sp>
-        <p:nvSpPr>
-          <p:cNvPr id="16" name="TextBox 15"/>
+              <a:t>83%</a:t>
+            </a:r>
+          </a:p>
+        </p:txBody>
+      </p:sp>
+      <p:sp>
+        <p:nvSpPr>
+          <p:cNvPr id="17" name="TextBox 16"/>
           <p:cNvSpPr txBox="1"/>
           <p:nvPr/>
         </p:nvSpPr>
         <p:spPr>
           <a:xfrm>
-            <a:off x="4586519" y="2670048"/>
-            <a:ext cx="1175570" cy="420624"/>
+            <a:off x="6330235" y="2706624"/>
+            <a:ext cx="2509643" cy="512064"/>
           </a:xfrm>
           <a:prstGeom prst="rect">
             <a:avLst/>
@@ -12124,21 +13044,60 @@
                 </a:solidFill>
                 <a:latin typeface="Arial"/>
               </a:rPr>
-              <a:t>~1,553 ms</a:t>
-            </a:r>
-          </a:p>
-        </p:txBody>
-      </p:sp>
-      <p:sp>
-        <p:nvSpPr>
-          <p:cNvPr id="17" name="Rectangle 16"/>
+              <a:t>1 model call</a:t>
+            </a:r>
+          </a:p>
+        </p:txBody>
+      </p:sp>
+      <p:sp>
+        <p:nvSpPr>
+          <p:cNvPr id="18" name="TextBox 17"/>
+          <p:cNvSpPr txBox="1"/>
+          <p:nvPr/>
+        </p:nvSpPr>
+        <p:spPr>
+          <a:xfrm>
+            <a:off x="9095910" y="2706624"/>
+            <a:ext cx="2190527" cy="512064"/>
+          </a:xfrm>
+          <a:prstGeom prst="rect">
+            <a:avLst/>
+          </a:prstGeom>
+          <a:noFill/>
+        </p:spPr>
+        <p:txBody>
+          <a:bodyPr wrap="square" anchor="ctr" lIns="0" rIns="0" tIns="0" bIns="0">
+            <a:spAutoFit/>
+          </a:bodyPr>
+          <a:lstStyle/>
+          <a:p>
+            <a:pPr algn="ctr">
+              <a:spcAft>
+                <a:spcPts val="0"/>
+              </a:spcAft>
+            </a:pPr>
+            <a:r>
+              <a:rPr sz="1300" b="0" i="0">
+                <a:solidFill>
+                  <a:srgbClr val="5A6B7C"/>
+                </a:solidFill>
+                <a:latin typeface="Arial"/>
+              </a:rPr>
+              <a:t>the baseline</a:t>
+            </a:r>
+          </a:p>
+        </p:txBody>
+      </p:sp>
+      <p:sp>
+        <p:nvSpPr>
+          <p:cNvPr id="19" name="Rectangle 18"/>
           <p:cNvSpPr/>
           <p:nvPr/>
         </p:nvSpPr>
         <p:spPr>
           <a:xfrm>
-            <a:off x="777240" y="3090672"/>
-            <a:ext cx="5112867" cy="420624"/>
+            <a:off x="777240" y="3218688"/>
+            <a:ext cx="10637215" cy="512064"/>
           </a:xfrm>
           <a:prstGeom prst="rect">
             <a:avLst/>
@@ -12177,14 +13136,14 @@
       </p:sp>
       <p:sp>
         <p:nvSpPr>
-          <p:cNvPr id="18" name="TextBox 17"/>
+          <p:cNvPr id="20" name="TextBox 19"/>
           <p:cNvSpPr txBox="1"/>
           <p:nvPr/>
         </p:nvSpPr>
         <p:spPr>
           <a:xfrm>
-            <a:off x="905256" y="3090672"/>
-            <a:ext cx="1993629" cy="420624"/>
+            <a:off x="905256" y="3218688"/>
+            <a:ext cx="3360621" cy="512064"/>
           </a:xfrm>
           <a:prstGeom prst="rect">
             <a:avLst/>
@@ -12209,21 +13168,21 @@
                 </a:solidFill>
                 <a:latin typeface="Arial"/>
               </a:rPr>
-              <a:t>Cost per 1k prompts</a:t>
-            </a:r>
-          </a:p>
-        </p:txBody>
-      </p:sp>
-      <p:sp>
-        <p:nvSpPr>
-          <p:cNvPr id="19" name="TextBox 18"/>
+              <a:t>Average the 5 tuning runs of one guard</a:t>
+            </a:r>
+          </a:p>
+        </p:txBody>
+      </p:sp>
+      <p:sp>
+        <p:nvSpPr>
+          <p:cNvPr id="21" name="TextBox 20"/>
           <p:cNvSpPr txBox="1"/>
           <p:nvPr/>
         </p:nvSpPr>
         <p:spPr>
           <a:xfrm>
-            <a:off x="3154917" y="3090672"/>
-            <a:ext cx="1175570" cy="420624"/>
+            <a:off x="4521909" y="3218688"/>
+            <a:ext cx="1552294" cy="512064"/>
           </a:xfrm>
           <a:prstGeom prst="rect">
             <a:avLst/>
@@ -12248,21 +13207,21 @@
                 </a:solidFill>
                 <a:latin typeface="Arial"/>
               </a:rPr>
-              <a:t>GPU you own</a:t>
-            </a:r>
-          </a:p>
-        </p:txBody>
-      </p:sp>
-      <p:sp>
-        <p:nvSpPr>
-          <p:cNvPr id="20" name="TextBox 19"/>
+              <a:t>+0.026 on top</a:t>
+            </a:r>
+          </a:p>
+        </p:txBody>
+      </p:sp>
+      <p:sp>
+        <p:nvSpPr>
+          <p:cNvPr id="22" name="TextBox 21"/>
           <p:cNvSpPr txBox="1"/>
           <p:nvPr/>
         </p:nvSpPr>
         <p:spPr>
           <a:xfrm>
-            <a:off x="4586519" y="3090672"/>
-            <a:ext cx="1175570" cy="420624"/>
+            <a:off x="6330235" y="3218688"/>
+            <a:ext cx="2509643" cy="512064"/>
           </a:xfrm>
           <a:prstGeom prst="rect">
             <a:avLst/>
@@ -12287,21 +13246,60 @@
                 </a:solidFill>
                 <a:latin typeface="Arial"/>
               </a:rPr>
-              <a:t>$0.80</a:t>
-            </a:r>
-          </a:p>
-        </p:txBody>
-      </p:sp>
-      <p:sp>
-        <p:nvSpPr>
-          <p:cNvPr id="21" name="Rectangle 20"/>
+              <a:t>already paid for</a:t>
+            </a:r>
+          </a:p>
+        </p:txBody>
+      </p:sp>
+      <p:sp>
+        <p:nvSpPr>
+          <p:cNvPr id="23" name="TextBox 22"/>
+          <p:cNvSpPr txBox="1"/>
+          <p:nvPr/>
+        </p:nvSpPr>
+        <p:spPr>
+          <a:xfrm>
+            <a:off x="9095910" y="3218688"/>
+            <a:ext cx="2190527" cy="512064"/>
+          </a:xfrm>
+          <a:prstGeom prst="rect">
+            <a:avLst/>
+          </a:prstGeom>
+          <a:noFill/>
+        </p:spPr>
+        <p:txBody>
+          <a:bodyPr wrap="square" anchor="ctr" lIns="0" rIns="0" tIns="0" bIns="0">
+            <a:spAutoFit/>
+          </a:bodyPr>
+          <a:lstStyle/>
+          <a:p>
+            <a:pPr algn="ctr">
+              <a:spcAft>
+                <a:spcPts val="0"/>
+              </a:spcAft>
+            </a:pPr>
+            <a:r>
+              <a:rPr sz="1300" b="0" i="0">
+                <a:solidFill>
+                  <a:srgbClr val="15803D"/>
+                </a:solidFill>
+                <a:latin typeface="Arial"/>
+              </a:rPr>
+              <a:t>worth doing</a:t>
+            </a:r>
+          </a:p>
+        </p:txBody>
+      </p:sp>
+      <p:sp>
+        <p:nvSpPr>
+          <p:cNvPr id="24" name="Rectangle 23"/>
           <p:cNvSpPr/>
           <p:nvPr/>
         </p:nvSpPr>
         <p:spPr>
           <a:xfrm>
-            <a:off x="777240" y="3511296"/>
-            <a:ext cx="5112867" cy="420624"/>
+            <a:off x="777240" y="3730752"/>
+            <a:ext cx="10637215" cy="512064"/>
           </a:xfrm>
           <a:prstGeom prst="rect">
             <a:avLst/>
@@ -12340,14 +13338,14 @@
       </p:sp>
       <p:sp>
         <p:nvSpPr>
-          <p:cNvPr id="22" name="TextBox 21"/>
+          <p:cNvPr id="25" name="TextBox 24"/>
           <p:cNvSpPr txBox="1"/>
           <p:nvPr/>
         </p:nvSpPr>
         <p:spPr>
           <a:xfrm>
-            <a:off x="905256" y="3511296"/>
-            <a:ext cx="1993629" cy="420624"/>
+            <a:off x="905256" y="3730752"/>
+            <a:ext cx="3360621" cy="512064"/>
           </a:xfrm>
           <a:prstGeom prst="rect">
             <a:avLst/>
@@ -12372,21 +13370,21 @@
                 </a:solidFill>
                 <a:latin typeface="Arial"/>
               </a:rPr>
-              <a:t>Prompt leaves our network</a:t>
-            </a:r>
-          </a:p>
-        </p:txBody>
-      </p:sp>
-      <p:sp>
-        <p:nvSpPr>
-          <p:cNvPr id="23" name="TextBox 22"/>
+              <a:t>Average all 18 guards equally</a:t>
+            </a:r>
+          </a:p>
+        </p:txBody>
+      </p:sp>
+      <p:sp>
+        <p:nvSpPr>
+          <p:cNvPr id="26" name="TextBox 25"/>
           <p:cNvSpPr txBox="1"/>
           <p:nvPr/>
         </p:nvSpPr>
         <p:spPr>
           <a:xfrm>
-            <a:off x="3154917" y="3511296"/>
-            <a:ext cx="1175570" cy="420624"/>
+            <a:off x="4521909" y="3730752"/>
+            <a:ext cx="1552294" cy="512064"/>
           </a:xfrm>
           <a:prstGeom prst="rect">
             <a:avLst/>
@@ -12411,21 +13409,21 @@
                 </a:solidFill>
                 <a:latin typeface="Arial"/>
               </a:rPr>
-              <a:t>no</a:t>
-            </a:r>
-          </a:p>
-        </p:txBody>
-      </p:sp>
-      <p:sp>
-        <p:nvSpPr>
-          <p:cNvPr id="24" name="TextBox 23"/>
+              <a:t>79%</a:t>
+            </a:r>
+          </a:p>
+        </p:txBody>
+      </p:sp>
+      <p:sp>
+        <p:nvSpPr>
+          <p:cNvPr id="27" name="TextBox 26"/>
           <p:cNvSpPr txBox="1"/>
           <p:nvPr/>
         </p:nvSpPr>
         <p:spPr>
           <a:xfrm>
-            <a:off x="4586519" y="3511296"/>
-            <a:ext cx="1175570" cy="420624"/>
+            <a:off x="6330235" y="3730752"/>
+            <a:ext cx="2509643" cy="512064"/>
           </a:xfrm>
           <a:prstGeom prst="rect">
             <a:avLst/>
@@ -12450,21 +13448,60 @@
                 </a:solidFill>
                 <a:latin typeface="Arial"/>
               </a:rPr>
-              <a:t>yes</a:t>
-            </a:r>
-          </a:p>
-        </p:txBody>
-      </p:sp>
-      <p:sp>
-        <p:nvSpPr>
-          <p:cNvPr id="25" name="Rectangle 24"/>
+              <a:t>18 model calls</a:t>
+            </a:r>
+          </a:p>
+        </p:txBody>
+      </p:sp>
+      <p:sp>
+        <p:nvSpPr>
+          <p:cNvPr id="28" name="TextBox 27"/>
+          <p:cNvSpPr txBox="1"/>
+          <p:nvPr/>
+        </p:nvSpPr>
+        <p:spPr>
+          <a:xfrm>
+            <a:off x="9095910" y="3730752"/>
+            <a:ext cx="2190527" cy="512064"/>
+          </a:xfrm>
+          <a:prstGeom prst="rect">
+            <a:avLst/>
+          </a:prstGeom>
+          <a:noFill/>
+        </p:spPr>
+        <p:txBody>
+          <a:bodyPr wrap="square" anchor="ctr" lIns="0" rIns="0" tIns="0" bIns="0">
+            <a:spAutoFit/>
+          </a:bodyPr>
+          <a:lstStyle/>
+          <a:p>
+            <a:pPr algn="ctr">
+              <a:spcAft>
+                <a:spcPts val="0"/>
+              </a:spcAft>
+            </a:pPr>
+            <a:r>
+              <a:rPr sz="1300" b="0" i="0">
+                <a:solidFill>
+                  <a:srgbClr val="A02128"/>
+                </a:solidFill>
+                <a:latin typeface="Arial"/>
+              </a:rPr>
+              <a:t>worse than one</a:t>
+            </a:r>
+          </a:p>
+        </p:txBody>
+      </p:sp>
+      <p:sp>
+        <p:nvSpPr>
+          <p:cNvPr id="29" name="Rectangle 28"/>
           <p:cNvSpPr/>
           <p:nvPr/>
         </p:nvSpPr>
         <p:spPr>
           <a:xfrm>
-            <a:off x="777240" y="3931920"/>
-            <a:ext cx="5112867" cy="420624"/>
+            <a:off x="777240" y="4242816"/>
+            <a:ext cx="10637215" cy="512064"/>
           </a:xfrm>
           <a:prstGeom prst="rect">
             <a:avLst/>
@@ -12503,14 +13540,14 @@
       </p:sp>
       <p:sp>
         <p:nvSpPr>
-          <p:cNvPr id="26" name="TextBox 25"/>
+          <p:cNvPr id="30" name="TextBox 29"/>
           <p:cNvSpPr txBox="1"/>
           <p:nvPr/>
         </p:nvSpPr>
         <p:spPr>
           <a:xfrm>
-            <a:off x="905256" y="3931920"/>
-            <a:ext cx="1993629" cy="420624"/>
+            <a:off x="905256" y="4242816"/>
+            <a:ext cx="3360621" cy="512064"/>
           </a:xfrm>
           <a:prstGeom prst="rect">
             <a:avLst/>
@@ -12535,21 +13572,21 @@
                 </a:solidFill>
                 <a:latin typeface="Arial"/>
               </a:rPr>
-              <a:t>We choose the alarm rate</a:t>
-            </a:r>
-          </a:p>
-        </p:txBody>
-      </p:sp>
-      <p:sp>
-        <p:nvSpPr>
-          <p:cNvPr id="27" name="TextBox 26"/>
+              <a:t>Weighted blend of all 18</a:t>
+            </a:r>
+          </a:p>
+        </p:txBody>
+      </p:sp>
+      <p:sp>
+        <p:nvSpPr>
+          <p:cNvPr id="31" name="TextBox 30"/>
           <p:cNvSpPr txBox="1"/>
           <p:nvPr/>
         </p:nvSpPr>
         <p:spPr>
           <a:xfrm>
-            <a:off x="3154917" y="3931920"/>
-            <a:ext cx="1175570" cy="420624"/>
+            <a:off x="4521909" y="4242816"/>
+            <a:ext cx="1552294" cy="512064"/>
           </a:xfrm>
           <a:prstGeom prst="rect">
             <a:avLst/>
@@ -12574,21 +13611,21 @@
                 </a:solidFill>
                 <a:latin typeface="Arial"/>
               </a:rPr>
-              <a:t>exactly</a:t>
-            </a:r>
-          </a:p>
-        </p:txBody>
-      </p:sp>
-      <p:sp>
-        <p:nvSpPr>
-          <p:cNvPr id="28" name="TextBox 27"/>
+              <a:t>85%</a:t>
+            </a:r>
+          </a:p>
+        </p:txBody>
+      </p:sp>
+      <p:sp>
+        <p:nvSpPr>
+          <p:cNvPr id="32" name="TextBox 31"/>
           <p:cNvSpPr txBox="1"/>
           <p:nvPr/>
         </p:nvSpPr>
         <p:spPr>
           <a:xfrm>
-            <a:off x="4586519" y="3931920"/>
-            <a:ext cx="1175570" cy="420624"/>
+            <a:off x="6330235" y="4242816"/>
+            <a:ext cx="2509643" cy="512064"/>
           </a:xfrm>
           <a:prstGeom prst="rect">
             <a:avLst/>
@@ -12613,27 +13650,268 @@
                 </a:solidFill>
                 <a:latin typeface="Arial"/>
               </a:rPr>
-              <a:t>approximately</a:t>
-            </a:r>
-          </a:p>
-        </p:txBody>
-      </p:sp>
-      <p:sp>
-        <p:nvSpPr>
-          <p:cNvPr id="29" name="Rounded Rectangle 28"/>
+              <a:t>18 calls + labelled data</a:t>
+            </a:r>
+          </a:p>
+        </p:txBody>
+      </p:sp>
+      <p:sp>
+        <p:nvSpPr>
+          <p:cNvPr id="33" name="TextBox 32"/>
+          <p:cNvSpPr txBox="1"/>
+          <p:nvPr/>
+        </p:nvSpPr>
+        <p:spPr>
+          <a:xfrm>
+            <a:off x="9095910" y="4242816"/>
+            <a:ext cx="2190527" cy="512064"/>
+          </a:xfrm>
+          <a:prstGeom prst="rect">
+            <a:avLst/>
+          </a:prstGeom>
+          <a:noFill/>
+        </p:spPr>
+        <p:txBody>
+          <a:bodyPr wrap="square" anchor="ctr" lIns="0" rIns="0" tIns="0" bIns="0">
+            <a:spAutoFit/>
+          </a:bodyPr>
+          <a:lstStyle/>
+          <a:p>
+            <a:pPr algn="ctr">
+              <a:spcAft>
+                <a:spcPts val="0"/>
+              </a:spcAft>
+            </a:pPr>
+            <a:r>
+              <a:rPr sz="1300" b="0" i="0">
+                <a:solidFill>
+                  <a:srgbClr val="2563EB"/>
+                </a:solidFill>
+                <a:latin typeface="Arial"/>
+              </a:rPr>
+              <a:t>best in-house</a:t>
+            </a:r>
+          </a:p>
+        </p:txBody>
+      </p:sp>
+      <p:sp>
+        <p:nvSpPr>
+          <p:cNvPr id="34" name="Rectangle 33"/>
           <p:cNvSpPr/>
           <p:nvPr/>
         </p:nvSpPr>
         <p:spPr>
           <a:xfrm>
-            <a:off x="6301587" y="2249424"/>
-            <a:ext cx="5112867" cy="1481328"/>
+            <a:off x="777240" y="4754880"/>
+            <a:ext cx="10637215" cy="512064"/>
+          </a:xfrm>
+          <a:prstGeom prst="rect">
+            <a:avLst/>
+          </a:prstGeom>
+          <a:solidFill>
+            <a:srgbClr val="F7F9FA"/>
+          </a:solidFill>
+          <a:ln w="6350">
+            <a:solidFill>
+              <a:srgbClr val="D8DEE4"/>
+            </a:solidFill>
+          </a:ln>
+          <a:effectLst/>
+        </p:spPr>
+        <p:style>
+          <a:lnRef idx="1">
+            <a:schemeClr val="accent1"/>
+          </a:lnRef>
+          <a:fillRef idx="3">
+            <a:schemeClr val="accent1"/>
+          </a:fillRef>
+          <a:effectRef idx="2">
+            <a:schemeClr val="accent1"/>
+          </a:effectRef>
+          <a:fontRef idx="minor">
+            <a:schemeClr val="lt1"/>
+          </a:fontRef>
+        </p:style>
+        <p:txBody>
+          <a:bodyPr rtlCol="0" anchor="ctr" wrap="square"/>
+          <a:lstStyle/>
+          <a:p>
+            <a:pPr algn="ctr"/>
+          </a:p>
+        </p:txBody>
+      </p:sp>
+      <p:sp>
+        <p:nvSpPr>
+          <p:cNvPr id="35" name="TextBox 34"/>
+          <p:cNvSpPr txBox="1"/>
+          <p:nvPr/>
+        </p:nvSpPr>
+        <p:spPr>
+          <a:xfrm>
+            <a:off x="905256" y="4754880"/>
+            <a:ext cx="3360621" cy="512064"/>
+          </a:xfrm>
+          <a:prstGeom prst="rect">
+            <a:avLst/>
+          </a:prstGeom>
+          <a:noFill/>
+        </p:spPr>
+        <p:txBody>
+          <a:bodyPr wrap="square" anchor="ctr" lIns="0" rIns="0" tIns="0" bIns="0">
+            <a:spAutoFit/>
+          </a:bodyPr>
+          <a:lstStyle/>
+          <a:p>
+            <a:pPr algn="l">
+              <a:spcAft>
+                <a:spcPts val="0"/>
+              </a:spcAft>
+            </a:pPr>
+            <a:r>
+              <a:rPr sz="1300" b="1" i="0">
+                <a:solidFill>
+                  <a:srgbClr val="12263A"/>
+                </a:solidFill>
+                <a:latin typeface="Arial"/>
+              </a:rPr>
+              <a:t>Escalate the uncertain 20% instead</a:t>
+            </a:r>
+          </a:p>
+        </p:txBody>
+      </p:sp>
+      <p:sp>
+        <p:nvSpPr>
+          <p:cNvPr id="36" name="TextBox 35"/>
+          <p:cNvSpPr txBox="1"/>
+          <p:nvPr/>
+        </p:nvSpPr>
+        <p:spPr>
+          <a:xfrm>
+            <a:off x="4521909" y="4754880"/>
+            <a:ext cx="1552294" cy="512064"/>
+          </a:xfrm>
+          <a:prstGeom prst="rect">
+            <a:avLst/>
+          </a:prstGeom>
+          <a:noFill/>
+        </p:spPr>
+        <p:txBody>
+          <a:bodyPr wrap="square" anchor="ctr" lIns="0" rIns="0" tIns="0" bIns="0">
+            <a:spAutoFit/>
+          </a:bodyPr>
+          <a:lstStyle/>
+          <a:p>
+            <a:pPr algn="ctr">
+              <a:spcAft>
+                <a:spcPts val="0"/>
+              </a:spcAft>
+            </a:pPr>
+            <a:r>
+              <a:rPr sz="1300" b="0" i="0">
+                <a:solidFill>
+                  <a:srgbClr val="12263A"/>
+                </a:solidFill>
+                <a:latin typeface="Arial"/>
+              </a:rPr>
+              <a:t>87%</a:t>
+            </a:r>
+          </a:p>
+        </p:txBody>
+      </p:sp>
+      <p:sp>
+        <p:nvSpPr>
+          <p:cNvPr id="37" name="TextBox 36"/>
+          <p:cNvSpPr txBox="1"/>
+          <p:nvPr/>
+        </p:nvSpPr>
+        <p:spPr>
+          <a:xfrm>
+            <a:off x="6330235" y="4754880"/>
+            <a:ext cx="2509643" cy="512064"/>
+          </a:xfrm>
+          <a:prstGeom prst="rect">
+            <a:avLst/>
+          </a:prstGeom>
+          <a:noFill/>
+        </p:spPr>
+        <p:txBody>
+          <a:bodyPr wrap="square" anchor="ctr" lIns="0" rIns="0" tIns="0" bIns="0">
+            <a:spAutoFit/>
+          </a:bodyPr>
+          <a:lstStyle/>
+          <a:p>
+            <a:pPr algn="ctr">
+              <a:spcAft>
+                <a:spcPts val="0"/>
+              </a:spcAft>
+            </a:pPr>
+            <a:r>
+              <a:rPr sz="1300" b="0" i="0">
+                <a:solidFill>
+                  <a:srgbClr val="12263A"/>
+                </a:solidFill>
+                <a:latin typeface="Arial"/>
+              </a:rPr>
+              <a:t>1.2 model calls</a:t>
+            </a:r>
+          </a:p>
+        </p:txBody>
+      </p:sp>
+      <p:sp>
+        <p:nvSpPr>
+          <p:cNvPr id="38" name="TextBox 37"/>
+          <p:cNvSpPr txBox="1"/>
+          <p:nvPr/>
+        </p:nvSpPr>
+        <p:spPr>
+          <a:xfrm>
+            <a:off x="9095910" y="4754880"/>
+            <a:ext cx="2190527" cy="512064"/>
+          </a:xfrm>
+          <a:prstGeom prst="rect">
+            <a:avLst/>
+          </a:prstGeom>
+          <a:noFill/>
+        </p:spPr>
+        <p:txBody>
+          <a:bodyPr wrap="square" anchor="ctr" lIns="0" rIns="0" tIns="0" bIns="0">
+            <a:spAutoFit/>
+          </a:bodyPr>
+          <a:lstStyle/>
+          <a:p>
+            <a:pPr algn="ctr">
+              <a:spcAft>
+                <a:spcPts val="0"/>
+              </a:spcAft>
+            </a:pPr>
+            <a:r>
+              <a:rPr sz="1300" b="0" i="0">
+                <a:solidFill>
+                  <a:srgbClr val="A02128"/>
+                </a:solidFill>
+                <a:latin typeface="Arial"/>
+              </a:rPr>
+              <a:t>beats all of it</a:t>
+            </a:r>
+          </a:p>
+        </p:txBody>
+      </p:sp>
+      <p:sp>
+        <p:nvSpPr>
+          <p:cNvPr id="39" name="Rounded Rectangle 38"/>
+          <p:cNvSpPr/>
+          <p:nvPr/>
+        </p:nvSpPr>
+        <p:spPr>
+          <a:xfrm>
+            <a:off x="777240" y="5303520"/>
+            <a:ext cx="10637215" cy="914400"/>
           </a:xfrm>
           <a:prstGeom prst="roundRect">
             <a:avLst/>
           </a:prstGeom>
           <a:solidFill>
-            <a:srgbClr val="FAF0F0"/>
+            <a:srgbClr val="FDF7EC"/>
           </a:solidFill>
           <a:ln>
             <a:noFill/>
@@ -12664,20 +13942,20 @@
       </p:sp>
       <p:sp>
         <p:nvSpPr>
-          <p:cNvPr id="30" name="Rectangle 29"/>
+          <p:cNvPr id="40" name="Rectangle 39"/>
           <p:cNvSpPr/>
           <p:nvPr/>
         </p:nvSpPr>
         <p:spPr>
           <a:xfrm>
-            <a:off x="6301587" y="2249424"/>
-            <a:ext cx="50292" cy="1481328"/>
+            <a:off x="777240" y="5303520"/>
+            <a:ext cx="50292" cy="914400"/>
           </a:xfrm>
           <a:prstGeom prst="rect">
             <a:avLst/>
           </a:prstGeom>
           <a:solidFill>
-            <a:srgbClr val="A02128"/>
+            <a:srgbClr val="B7791F"/>
           </a:solidFill>
           <a:ln>
             <a:noFill/>
@@ -12708,14 +13986,14 @@
       </p:sp>
       <p:sp>
         <p:nvSpPr>
-          <p:cNvPr id="31" name="TextBox 30"/>
+          <p:cNvPr id="41" name="TextBox 40"/>
           <p:cNvSpPr txBox="1"/>
           <p:nvPr/>
         </p:nvSpPr>
         <p:spPr>
           <a:xfrm>
-            <a:off x="6539331" y="2414016"/>
-            <a:ext cx="4655667" cy="1152144"/>
+            <a:off x="1014984" y="5468112"/>
+            <a:ext cx="10180015" cy="585216"/>
           </a:xfrm>
           <a:prstGeom prst="rect">
             <a:avLst/>
@@ -12736,11 +14014,11 @@
             <a:r>
               <a:rPr sz="1100" b="1" i="0" spc="110">
                 <a:solidFill>
-                  <a:srgbClr val="A02128"/>
-                </a:solidFill>
-                <a:latin typeface="Arial"/>
-              </a:rPr>
-              <a:t>THE ONE WE DID NOT EXPECT</a:t>
+                  <a:srgbClr val="B7791F"/>
+                </a:solidFill>
+                <a:latin typeface="Arial"/>
+              </a:rPr>
+              <a:t>THE FINDING THAT MATTERS FOR PLANNING</a:t>
             </a:r>
           </a:p>
           <a:p>
@@ -12759,299 +14037,7 @@
                 </a:solidFill>
                 <a:latin typeface="Arial"/>
               </a:rPr>
-              <a:t>The provider refused to evaluate a subset of prompts outright, and did so inconsistently — the same prompt was refused on some runs and not others. A guardrail that intermittently declines to answer is itself an audit finding.</a:t>
-            </a:r>
-          </a:p>
-        </p:txBody>
-      </p:sp>
-      <p:sp>
-        <p:nvSpPr>
-          <p:cNvPr id="32" name="Rounded Rectangle 31"/>
-          <p:cNvSpPr/>
-          <p:nvPr/>
-        </p:nvSpPr>
-        <p:spPr>
-          <a:xfrm>
-            <a:off x="6301587" y="3858768"/>
-            <a:ext cx="5112867" cy="1371600"/>
-          </a:xfrm>
-          <a:prstGeom prst="roundRect">
-            <a:avLst/>
-          </a:prstGeom>
-          <a:solidFill>
-            <a:srgbClr val="EFF4FE"/>
-          </a:solidFill>
-          <a:ln>
-            <a:noFill/>
-          </a:ln>
-          <a:effectLst/>
-        </p:spPr>
-        <p:style>
-          <a:lnRef idx="1">
-            <a:schemeClr val="accent1"/>
-          </a:lnRef>
-          <a:fillRef idx="3">
-            <a:schemeClr val="accent1"/>
-          </a:fillRef>
-          <a:effectRef idx="2">
-            <a:schemeClr val="accent1"/>
-          </a:effectRef>
-          <a:fontRef idx="minor">
-            <a:schemeClr val="lt1"/>
-          </a:fontRef>
-        </p:style>
-        <p:txBody>
-          <a:bodyPr rtlCol="0" anchor="ctr" wrap="square"/>
-          <a:lstStyle/>
-          <a:p>
-            <a:pPr algn="ctr"/>
-          </a:p>
-        </p:txBody>
-      </p:sp>
-      <p:sp>
-        <p:nvSpPr>
-          <p:cNvPr id="33" name="Rectangle 32"/>
-          <p:cNvSpPr/>
-          <p:nvPr/>
-        </p:nvSpPr>
-        <p:spPr>
-          <a:xfrm>
-            <a:off x="6301587" y="3858768"/>
-            <a:ext cx="50292" cy="1371600"/>
-          </a:xfrm>
-          <a:prstGeom prst="rect">
-            <a:avLst/>
-          </a:prstGeom>
-          <a:solidFill>
-            <a:srgbClr val="2563EB"/>
-          </a:solidFill>
-          <a:ln>
-            <a:noFill/>
-          </a:ln>
-          <a:effectLst/>
-        </p:spPr>
-        <p:style>
-          <a:lnRef idx="1">
-            <a:schemeClr val="accent1"/>
-          </a:lnRef>
-          <a:fillRef idx="3">
-            <a:schemeClr val="accent1"/>
-          </a:fillRef>
-          <a:effectRef idx="2">
-            <a:schemeClr val="accent1"/>
-          </a:effectRef>
-          <a:fontRef idx="minor">
-            <a:schemeClr val="lt1"/>
-          </a:fontRef>
-        </p:style>
-        <p:txBody>
-          <a:bodyPr rtlCol="0" anchor="ctr" wrap="square"/>
-          <a:lstStyle/>
-          <a:p>
-            <a:pPr algn="ctr"/>
-          </a:p>
-        </p:txBody>
-      </p:sp>
-      <p:sp>
-        <p:nvSpPr>
-          <p:cNvPr id="34" name="TextBox 33"/>
-          <p:cNvSpPr txBox="1"/>
-          <p:nvPr/>
-        </p:nvSpPr>
-        <p:spPr>
-          <a:xfrm>
-            <a:off x="6539331" y="4023360"/>
-            <a:ext cx="4655667" cy="1042416"/>
-          </a:xfrm>
-          <a:prstGeom prst="rect">
-            <a:avLst/>
-          </a:prstGeom>
-          <a:noFill/>
-        </p:spPr>
-        <p:txBody>
-          <a:bodyPr wrap="square" anchor="t" lIns="0" rIns="0" tIns="0" bIns="0">
-            <a:spAutoFit/>
-          </a:bodyPr>
-          <a:lstStyle/>
-          <a:p>
-            <a:pPr algn="l">
-              <a:spcAft>
-                <a:spcPts val="500"/>
-              </a:spcAft>
-            </a:pPr>
-            <a:r>
-              <a:rPr sz="1100" b="1" i="0" spc="110">
-                <a:solidFill>
-                  <a:srgbClr val="2563EB"/>
-                </a:solidFill>
-                <a:latin typeface="Arial"/>
-              </a:rPr>
-              <a:t>CONTROL OVER THE ALARM RATE</a:t>
-            </a:r>
-          </a:p>
-          <a:p>
-            <a:pPr algn="l">
-              <a:lnSpc>
-                <a:spcPct val="106000"/>
-              </a:lnSpc>
-              <a:spcAft>
-                <a:spcPts val="0"/>
-              </a:spcAft>
-            </a:pPr>
-            <a:r>
-              <a:rPr sz="1350" b="0" i="0">
-                <a:solidFill>
-                  <a:srgbClr val="12263A"/>
-                </a:solidFill>
-                <a:latin typeface="Arial"/>
-              </a:rPr>
-              <a:t>Our own model exposes a continuous score, so we can set the false-alarm budget precisely. The hosted model reports a coarse 0–100 value, so we can only land near a target.</a:t>
-            </a:r>
-          </a:p>
-        </p:txBody>
-      </p:sp>
-      <p:sp>
-        <p:nvSpPr>
-          <p:cNvPr id="35" name="Rounded Rectangle 34"/>
-          <p:cNvSpPr/>
-          <p:nvPr/>
-        </p:nvSpPr>
-        <p:spPr>
-          <a:xfrm>
-            <a:off x="777240" y="5321808"/>
-            <a:ext cx="10637215" cy="969264"/>
-          </a:xfrm>
-          <a:prstGeom prst="roundRect">
-            <a:avLst/>
-          </a:prstGeom>
-          <a:solidFill>
-            <a:srgbClr val="EFF7F1"/>
-          </a:solidFill>
-          <a:ln>
-            <a:noFill/>
-          </a:ln>
-          <a:effectLst/>
-        </p:spPr>
-        <p:style>
-          <a:lnRef idx="1">
-            <a:schemeClr val="accent1"/>
-          </a:lnRef>
-          <a:fillRef idx="3">
-            <a:schemeClr val="accent1"/>
-          </a:fillRef>
-          <a:effectRef idx="2">
-            <a:schemeClr val="accent1"/>
-          </a:effectRef>
-          <a:fontRef idx="minor">
-            <a:schemeClr val="lt1"/>
-          </a:fontRef>
-        </p:style>
-        <p:txBody>
-          <a:bodyPr rtlCol="0" anchor="ctr" wrap="square"/>
-          <a:lstStyle/>
-          <a:p>
-            <a:pPr algn="ctr"/>
-          </a:p>
-        </p:txBody>
-      </p:sp>
-      <p:sp>
-        <p:nvSpPr>
-          <p:cNvPr id="36" name="Rectangle 35"/>
-          <p:cNvSpPr/>
-          <p:nvPr/>
-        </p:nvSpPr>
-        <p:spPr>
-          <a:xfrm>
-            <a:off x="777240" y="5321808"/>
-            <a:ext cx="50292" cy="969264"/>
-          </a:xfrm>
-          <a:prstGeom prst="rect">
-            <a:avLst/>
-          </a:prstGeom>
-          <a:solidFill>
-            <a:srgbClr val="15803D"/>
-          </a:solidFill>
-          <a:ln>
-            <a:noFill/>
-          </a:ln>
-          <a:effectLst/>
-        </p:spPr>
-        <p:style>
-          <a:lnRef idx="1">
-            <a:schemeClr val="accent1"/>
-          </a:lnRef>
-          <a:fillRef idx="3">
-            <a:schemeClr val="accent1"/>
-          </a:fillRef>
-          <a:effectRef idx="2">
-            <a:schemeClr val="accent1"/>
-          </a:effectRef>
-          <a:fontRef idx="minor">
-            <a:schemeClr val="lt1"/>
-          </a:fontRef>
-        </p:style>
-        <p:txBody>
-          <a:bodyPr rtlCol="0" anchor="ctr" wrap="square"/>
-          <a:lstStyle/>
-          <a:p>
-            <a:pPr algn="ctr"/>
-          </a:p>
-        </p:txBody>
-      </p:sp>
-      <p:sp>
-        <p:nvSpPr>
-          <p:cNvPr id="37" name="TextBox 36"/>
-          <p:cNvSpPr txBox="1"/>
-          <p:nvPr/>
-        </p:nvSpPr>
-        <p:spPr>
-          <a:xfrm>
-            <a:off x="1014984" y="5486400"/>
-            <a:ext cx="10180015" cy="640080"/>
-          </a:xfrm>
-          <a:prstGeom prst="rect">
-            <a:avLst/>
-          </a:prstGeom>
-          <a:noFill/>
-        </p:spPr>
-        <p:txBody>
-          <a:bodyPr wrap="square" anchor="t" lIns="0" rIns="0" tIns="0" bIns="0">
-            <a:spAutoFit/>
-          </a:bodyPr>
-          <a:lstStyle/>
-          <a:p>
-            <a:pPr algn="l">
-              <a:spcAft>
-                <a:spcPts val="500"/>
-              </a:spcAft>
-            </a:pPr>
-            <a:r>
-              <a:rPr sz="1100" b="1" i="0" spc="110">
-                <a:solidFill>
-                  <a:srgbClr val="15803D"/>
-                </a:solidFill>
-                <a:latin typeface="Arial"/>
-              </a:rPr>
-              <a:t>NOT A REASON TO REFUSE HOSTED</a:t>
-            </a:r>
-          </a:p>
-          <a:p>
-            <a:pPr algn="l">
-              <a:lnSpc>
-                <a:spcPct val="106000"/>
-              </a:lnSpc>
-              <a:spcAft>
-                <a:spcPts val="0"/>
-              </a:spcAft>
-            </a:pPr>
-            <a:r>
-              <a:rPr sz="1350" b="0" i="0">
-                <a:solidFill>
-                  <a:srgbClr val="12263A"/>
-                </a:solidFill>
-                <a:latin typeface="Arial"/>
-              </a:rPr>
-              <a:t>It is a reason to scope it: hosted on traffic where the prompt may leave and latency is not critical; self-hosted on the regulated, latency-sensitive path.</a:t>
+              <a:t>Escalating one request in five beats a 18-model blend — at a sixteenth of the compute and with no labelled data to collect. Ensembling is the right answer only when nothing may leave at all; then it is worth about a quarter of the gap.</a:t>
             </a:r>
           </a:p>
         </p:txBody>
@@ -13230,7 +14216,7 @@
                 </a:solidFill>
                 <a:latin typeface="Arial"/>
               </a:rPr>
-              <a:t>THE USEFUL FINDING</a:t>
+              <a:t>WHAT HOSTED COSTS</a:t>
             </a:r>
           </a:p>
         </p:txBody>
@@ -13272,7 +14258,7 @@
                 </a:solidFill>
                 <a:latin typeface="Georgia"/>
               </a:rPr>
-              <a:t>If we must self-host, a bigger untuned model beats a tuned small one</a:t>
+              <a:t>The accuracy is real. So is the bill, the latency, and the loss of control</a:t>
             </a:r>
           </a:p>
         </p:txBody>
@@ -13311,7 +14297,7 @@
                 </a:solidFill>
                 <a:latin typeface="Arial"/>
               </a:rPr>
-              <a:t>Because tuning's cost lands on exactly the traffic a guardrail exists to catch</a:t>
+              <a:t>Four costs, three of which do not appear on an invoice</a:t>
             </a:r>
           </a:p>
         </p:txBody>
@@ -13362,14 +14348,915 @@
       </p:sp>
       <p:sp>
         <p:nvSpPr>
-          <p:cNvPr id="9" name="TextBox 8"/>
+          <p:cNvPr id="9" name="Rectangle 8"/>
+          <p:cNvSpPr/>
+          <p:nvPr/>
+        </p:nvSpPr>
+        <p:spPr>
+          <a:xfrm>
+            <a:off x="777240" y="2249424"/>
+            <a:ext cx="5112867" cy="420624"/>
+          </a:xfrm>
+          <a:prstGeom prst="rect">
+            <a:avLst/>
+          </a:prstGeom>
+          <a:solidFill>
+            <a:srgbClr val="12263A"/>
+          </a:solidFill>
+          <a:ln>
+            <a:noFill/>
+          </a:ln>
+          <a:effectLst/>
+        </p:spPr>
+        <p:style>
+          <a:lnRef idx="1">
+            <a:schemeClr val="accent1"/>
+          </a:lnRef>
+          <a:fillRef idx="3">
+            <a:schemeClr val="accent1"/>
+          </a:fillRef>
+          <a:effectRef idx="2">
+            <a:schemeClr val="accent1"/>
+          </a:effectRef>
+          <a:fontRef idx="minor">
+            <a:schemeClr val="lt1"/>
+          </a:fontRef>
+        </p:style>
+        <p:txBody>
+          <a:bodyPr rtlCol="0" anchor="ctr" wrap="square"/>
+          <a:lstStyle/>
+          <a:p>
+            <a:pPr algn="ctr"/>
+          </a:p>
+        </p:txBody>
+      </p:sp>
+      <p:sp>
+        <p:nvSpPr>
+          <p:cNvPr id="10" name="TextBox 9"/>
           <p:cNvSpPr txBox="1"/>
           <p:nvPr/>
         </p:nvSpPr>
         <p:spPr>
           <a:xfrm>
-            <a:off x="777240" y="2212848"/>
-            <a:ext cx="5112867" cy="2651760"/>
+            <a:off x="905256" y="2249424"/>
+            <a:ext cx="1993629" cy="420624"/>
+          </a:xfrm>
+          <a:prstGeom prst="rect">
+            <a:avLst/>
+          </a:prstGeom>
+          <a:noFill/>
+        </p:spPr>
+        <p:txBody>
+          <a:bodyPr wrap="square" anchor="ctr" lIns="0" rIns="0" tIns="0" bIns="0">
+            <a:spAutoFit/>
+          </a:bodyPr>
+          <a:lstStyle/>
+          <a:p>
+            <a:pPr algn="l">
+              <a:spcAft>
+                <a:spcPts val="0"/>
+              </a:spcAft>
+            </a:pPr>
+            <a:r>
+              <a:rPr sz="1300" b="1" i="0">
+                <a:solidFill>
+                  <a:srgbClr val="FFFFFF"/>
+                </a:solidFill>
+                <a:latin typeface="Arial"/>
+              </a:rPr>
+              <a:t/>
+            </a:r>
+          </a:p>
+        </p:txBody>
+      </p:sp>
+      <p:sp>
+        <p:nvSpPr>
+          <p:cNvPr id="11" name="TextBox 10"/>
+          <p:cNvSpPr txBox="1"/>
+          <p:nvPr/>
+        </p:nvSpPr>
+        <p:spPr>
+          <a:xfrm>
+            <a:off x="3154917" y="2249424"/>
+            <a:ext cx="1175570" cy="420624"/>
+          </a:xfrm>
+          <a:prstGeom prst="rect">
+            <a:avLst/>
+          </a:prstGeom>
+          <a:noFill/>
+        </p:spPr>
+        <p:txBody>
+          <a:bodyPr wrap="square" anchor="ctr" lIns="0" rIns="0" tIns="0" bIns="0">
+            <a:spAutoFit/>
+          </a:bodyPr>
+          <a:lstStyle/>
+          <a:p>
+            <a:pPr algn="ctr">
+              <a:spcAft>
+                <a:spcPts val="0"/>
+              </a:spcAft>
+            </a:pPr>
+            <a:r>
+              <a:rPr sz="1300" b="1" i="0">
+                <a:solidFill>
+                  <a:srgbClr val="FFFFFF"/>
+                </a:solidFill>
+                <a:latin typeface="Arial"/>
+              </a:rPr>
+              <a:t>Self-hosted small</a:t>
+            </a:r>
+          </a:p>
+        </p:txBody>
+      </p:sp>
+      <p:sp>
+        <p:nvSpPr>
+          <p:cNvPr id="12" name="TextBox 11"/>
+          <p:cNvSpPr txBox="1"/>
+          <p:nvPr/>
+        </p:nvSpPr>
+        <p:spPr>
+          <a:xfrm>
+            <a:off x="4586519" y="2249424"/>
+            <a:ext cx="1175570" cy="420624"/>
+          </a:xfrm>
+          <a:prstGeom prst="rect">
+            <a:avLst/>
+          </a:prstGeom>
+          <a:noFill/>
+        </p:spPr>
+        <p:txBody>
+          <a:bodyPr wrap="square" anchor="ctr" lIns="0" rIns="0" tIns="0" bIns="0">
+            <a:spAutoFit/>
+          </a:bodyPr>
+          <a:lstStyle/>
+          <a:p>
+            <a:pPr algn="ctr">
+              <a:spcAft>
+                <a:spcPts val="0"/>
+              </a:spcAft>
+            </a:pPr>
+            <a:r>
+              <a:rPr sz="1300" b="1" i="0">
+                <a:solidFill>
+                  <a:srgbClr val="FFFFFF"/>
+                </a:solidFill>
+                <a:latin typeface="Arial"/>
+              </a:rPr>
+              <a:t>Hosted frontier</a:t>
+            </a:r>
+          </a:p>
+        </p:txBody>
+      </p:sp>
+      <p:sp>
+        <p:nvSpPr>
+          <p:cNvPr id="13" name="Rectangle 12"/>
+          <p:cNvSpPr/>
+          <p:nvPr/>
+        </p:nvSpPr>
+        <p:spPr>
+          <a:xfrm>
+            <a:off x="777240" y="2670048"/>
+            <a:ext cx="5112867" cy="420624"/>
+          </a:xfrm>
+          <a:prstGeom prst="rect">
+            <a:avLst/>
+          </a:prstGeom>
+          <a:solidFill>
+            <a:srgbClr val="F7F9FA"/>
+          </a:solidFill>
+          <a:ln w="6350">
+            <a:solidFill>
+              <a:srgbClr val="D8DEE4"/>
+            </a:solidFill>
+          </a:ln>
+          <a:effectLst/>
+        </p:spPr>
+        <p:style>
+          <a:lnRef idx="1">
+            <a:schemeClr val="accent1"/>
+          </a:lnRef>
+          <a:fillRef idx="3">
+            <a:schemeClr val="accent1"/>
+          </a:fillRef>
+          <a:effectRef idx="2">
+            <a:schemeClr val="accent1"/>
+          </a:effectRef>
+          <a:fontRef idx="minor">
+            <a:schemeClr val="lt1"/>
+          </a:fontRef>
+        </p:style>
+        <p:txBody>
+          <a:bodyPr rtlCol="0" anchor="ctr" wrap="square"/>
+          <a:lstStyle/>
+          <a:p>
+            <a:pPr algn="ctr"/>
+          </a:p>
+        </p:txBody>
+      </p:sp>
+      <p:sp>
+        <p:nvSpPr>
+          <p:cNvPr id="14" name="TextBox 13"/>
+          <p:cNvSpPr txBox="1"/>
+          <p:nvPr/>
+        </p:nvSpPr>
+        <p:spPr>
+          <a:xfrm>
+            <a:off x="905256" y="2670048"/>
+            <a:ext cx="1993629" cy="420624"/>
+          </a:xfrm>
+          <a:prstGeom prst="rect">
+            <a:avLst/>
+          </a:prstGeom>
+          <a:noFill/>
+        </p:spPr>
+        <p:txBody>
+          <a:bodyPr wrap="square" anchor="ctr" lIns="0" rIns="0" tIns="0" bIns="0">
+            <a:spAutoFit/>
+          </a:bodyPr>
+          <a:lstStyle/>
+          <a:p>
+            <a:pPr algn="l">
+              <a:spcAft>
+                <a:spcPts val="0"/>
+              </a:spcAft>
+            </a:pPr>
+            <a:r>
+              <a:rPr sz="1300" b="1" i="0">
+                <a:solidFill>
+                  <a:srgbClr val="12263A"/>
+                </a:solidFill>
+                <a:latin typeface="Arial"/>
+              </a:rPr>
+              <a:t>Median latency</a:t>
+            </a:r>
+          </a:p>
+        </p:txBody>
+      </p:sp>
+      <p:sp>
+        <p:nvSpPr>
+          <p:cNvPr id="15" name="TextBox 14"/>
+          <p:cNvSpPr txBox="1"/>
+          <p:nvPr/>
+        </p:nvSpPr>
+        <p:spPr>
+          <a:xfrm>
+            <a:off x="3154917" y="2670048"/>
+            <a:ext cx="1175570" cy="420624"/>
+          </a:xfrm>
+          <a:prstGeom prst="rect">
+            <a:avLst/>
+          </a:prstGeom>
+          <a:noFill/>
+        </p:spPr>
+        <p:txBody>
+          <a:bodyPr wrap="square" anchor="ctr" lIns="0" rIns="0" tIns="0" bIns="0">
+            <a:spAutoFit/>
+          </a:bodyPr>
+          <a:lstStyle/>
+          <a:p>
+            <a:pPr algn="ctr">
+              <a:spcAft>
+                <a:spcPts val="0"/>
+              </a:spcAft>
+            </a:pPr>
+            <a:r>
+              <a:rPr sz="1300" b="0" i="0">
+                <a:solidFill>
+                  <a:srgbClr val="12263A"/>
+                </a:solidFill>
+                <a:latin typeface="Arial"/>
+              </a:rPr>
+              <a:t>10–25 ms</a:t>
+            </a:r>
+          </a:p>
+        </p:txBody>
+      </p:sp>
+      <p:sp>
+        <p:nvSpPr>
+          <p:cNvPr id="16" name="TextBox 15"/>
+          <p:cNvSpPr txBox="1"/>
+          <p:nvPr/>
+        </p:nvSpPr>
+        <p:spPr>
+          <a:xfrm>
+            <a:off x="4586519" y="2670048"/>
+            <a:ext cx="1175570" cy="420624"/>
+          </a:xfrm>
+          <a:prstGeom prst="rect">
+            <a:avLst/>
+          </a:prstGeom>
+          <a:noFill/>
+        </p:spPr>
+        <p:txBody>
+          <a:bodyPr wrap="square" anchor="ctr" lIns="0" rIns="0" tIns="0" bIns="0">
+            <a:spAutoFit/>
+          </a:bodyPr>
+          <a:lstStyle/>
+          <a:p>
+            <a:pPr algn="ctr">
+              <a:spcAft>
+                <a:spcPts val="0"/>
+              </a:spcAft>
+            </a:pPr>
+            <a:r>
+              <a:rPr sz="1300" b="0" i="0">
+                <a:solidFill>
+                  <a:srgbClr val="12263A"/>
+                </a:solidFill>
+                <a:latin typeface="Arial"/>
+              </a:rPr>
+              <a:t>~1,553 ms</a:t>
+            </a:r>
+          </a:p>
+        </p:txBody>
+      </p:sp>
+      <p:sp>
+        <p:nvSpPr>
+          <p:cNvPr id="17" name="Rectangle 16"/>
+          <p:cNvSpPr/>
+          <p:nvPr/>
+        </p:nvSpPr>
+        <p:spPr>
+          <a:xfrm>
+            <a:off x="777240" y="3090672"/>
+            <a:ext cx="5112867" cy="420624"/>
+          </a:xfrm>
+          <a:prstGeom prst="rect">
+            <a:avLst/>
+          </a:prstGeom>
+          <a:solidFill>
+            <a:srgbClr val="FFFFFF"/>
+          </a:solidFill>
+          <a:ln w="6350">
+            <a:solidFill>
+              <a:srgbClr val="D8DEE4"/>
+            </a:solidFill>
+          </a:ln>
+          <a:effectLst/>
+        </p:spPr>
+        <p:style>
+          <a:lnRef idx="1">
+            <a:schemeClr val="accent1"/>
+          </a:lnRef>
+          <a:fillRef idx="3">
+            <a:schemeClr val="accent1"/>
+          </a:fillRef>
+          <a:effectRef idx="2">
+            <a:schemeClr val="accent1"/>
+          </a:effectRef>
+          <a:fontRef idx="minor">
+            <a:schemeClr val="lt1"/>
+          </a:fontRef>
+        </p:style>
+        <p:txBody>
+          <a:bodyPr rtlCol="0" anchor="ctr" wrap="square"/>
+          <a:lstStyle/>
+          <a:p>
+            <a:pPr algn="ctr"/>
+          </a:p>
+        </p:txBody>
+      </p:sp>
+      <p:sp>
+        <p:nvSpPr>
+          <p:cNvPr id="18" name="TextBox 17"/>
+          <p:cNvSpPr txBox="1"/>
+          <p:nvPr/>
+        </p:nvSpPr>
+        <p:spPr>
+          <a:xfrm>
+            <a:off x="905256" y="3090672"/>
+            <a:ext cx="1993629" cy="420624"/>
+          </a:xfrm>
+          <a:prstGeom prst="rect">
+            <a:avLst/>
+          </a:prstGeom>
+          <a:noFill/>
+        </p:spPr>
+        <p:txBody>
+          <a:bodyPr wrap="square" anchor="ctr" lIns="0" rIns="0" tIns="0" bIns="0">
+            <a:spAutoFit/>
+          </a:bodyPr>
+          <a:lstStyle/>
+          <a:p>
+            <a:pPr algn="l">
+              <a:spcAft>
+                <a:spcPts val="0"/>
+              </a:spcAft>
+            </a:pPr>
+            <a:r>
+              <a:rPr sz="1300" b="1" i="0">
+                <a:solidFill>
+                  <a:srgbClr val="12263A"/>
+                </a:solidFill>
+                <a:latin typeface="Arial"/>
+              </a:rPr>
+              <a:t>Cost per 1k prompts</a:t>
+            </a:r>
+          </a:p>
+        </p:txBody>
+      </p:sp>
+      <p:sp>
+        <p:nvSpPr>
+          <p:cNvPr id="19" name="TextBox 18"/>
+          <p:cNvSpPr txBox="1"/>
+          <p:nvPr/>
+        </p:nvSpPr>
+        <p:spPr>
+          <a:xfrm>
+            <a:off x="3154917" y="3090672"/>
+            <a:ext cx="1175570" cy="420624"/>
+          </a:xfrm>
+          <a:prstGeom prst="rect">
+            <a:avLst/>
+          </a:prstGeom>
+          <a:noFill/>
+        </p:spPr>
+        <p:txBody>
+          <a:bodyPr wrap="square" anchor="ctr" lIns="0" rIns="0" tIns="0" bIns="0">
+            <a:spAutoFit/>
+          </a:bodyPr>
+          <a:lstStyle/>
+          <a:p>
+            <a:pPr algn="ctr">
+              <a:spcAft>
+                <a:spcPts val="0"/>
+              </a:spcAft>
+            </a:pPr>
+            <a:r>
+              <a:rPr sz="1300" b="0" i="0">
+                <a:solidFill>
+                  <a:srgbClr val="12263A"/>
+                </a:solidFill>
+                <a:latin typeface="Arial"/>
+              </a:rPr>
+              <a:t>GPU you own</a:t>
+            </a:r>
+          </a:p>
+        </p:txBody>
+      </p:sp>
+      <p:sp>
+        <p:nvSpPr>
+          <p:cNvPr id="20" name="TextBox 19"/>
+          <p:cNvSpPr txBox="1"/>
+          <p:nvPr/>
+        </p:nvSpPr>
+        <p:spPr>
+          <a:xfrm>
+            <a:off x="4586519" y="3090672"/>
+            <a:ext cx="1175570" cy="420624"/>
+          </a:xfrm>
+          <a:prstGeom prst="rect">
+            <a:avLst/>
+          </a:prstGeom>
+          <a:noFill/>
+        </p:spPr>
+        <p:txBody>
+          <a:bodyPr wrap="square" anchor="ctr" lIns="0" rIns="0" tIns="0" bIns="0">
+            <a:spAutoFit/>
+          </a:bodyPr>
+          <a:lstStyle/>
+          <a:p>
+            <a:pPr algn="ctr">
+              <a:spcAft>
+                <a:spcPts val="0"/>
+              </a:spcAft>
+            </a:pPr>
+            <a:r>
+              <a:rPr sz="1300" b="0" i="0">
+                <a:solidFill>
+                  <a:srgbClr val="12263A"/>
+                </a:solidFill>
+                <a:latin typeface="Arial"/>
+              </a:rPr>
+              <a:t>$0.80</a:t>
+            </a:r>
+          </a:p>
+        </p:txBody>
+      </p:sp>
+      <p:sp>
+        <p:nvSpPr>
+          <p:cNvPr id="21" name="Rectangle 20"/>
+          <p:cNvSpPr/>
+          <p:nvPr/>
+        </p:nvSpPr>
+        <p:spPr>
+          <a:xfrm>
+            <a:off x="777240" y="3511296"/>
+            <a:ext cx="5112867" cy="420624"/>
+          </a:xfrm>
+          <a:prstGeom prst="rect">
+            <a:avLst/>
+          </a:prstGeom>
+          <a:solidFill>
+            <a:srgbClr val="F7F9FA"/>
+          </a:solidFill>
+          <a:ln w="6350">
+            <a:solidFill>
+              <a:srgbClr val="D8DEE4"/>
+            </a:solidFill>
+          </a:ln>
+          <a:effectLst/>
+        </p:spPr>
+        <p:style>
+          <a:lnRef idx="1">
+            <a:schemeClr val="accent1"/>
+          </a:lnRef>
+          <a:fillRef idx="3">
+            <a:schemeClr val="accent1"/>
+          </a:fillRef>
+          <a:effectRef idx="2">
+            <a:schemeClr val="accent1"/>
+          </a:effectRef>
+          <a:fontRef idx="minor">
+            <a:schemeClr val="lt1"/>
+          </a:fontRef>
+        </p:style>
+        <p:txBody>
+          <a:bodyPr rtlCol="0" anchor="ctr" wrap="square"/>
+          <a:lstStyle/>
+          <a:p>
+            <a:pPr algn="ctr"/>
+          </a:p>
+        </p:txBody>
+      </p:sp>
+      <p:sp>
+        <p:nvSpPr>
+          <p:cNvPr id="22" name="TextBox 21"/>
+          <p:cNvSpPr txBox="1"/>
+          <p:nvPr/>
+        </p:nvSpPr>
+        <p:spPr>
+          <a:xfrm>
+            <a:off x="905256" y="3511296"/>
+            <a:ext cx="1993629" cy="420624"/>
+          </a:xfrm>
+          <a:prstGeom prst="rect">
+            <a:avLst/>
+          </a:prstGeom>
+          <a:noFill/>
+        </p:spPr>
+        <p:txBody>
+          <a:bodyPr wrap="square" anchor="ctr" lIns="0" rIns="0" tIns="0" bIns="0">
+            <a:spAutoFit/>
+          </a:bodyPr>
+          <a:lstStyle/>
+          <a:p>
+            <a:pPr algn="l">
+              <a:spcAft>
+                <a:spcPts val="0"/>
+              </a:spcAft>
+            </a:pPr>
+            <a:r>
+              <a:rPr sz="1300" b="1" i="0">
+                <a:solidFill>
+                  <a:srgbClr val="12263A"/>
+                </a:solidFill>
+                <a:latin typeface="Arial"/>
+              </a:rPr>
+              <a:t>Prompt leaves our network</a:t>
+            </a:r>
+          </a:p>
+        </p:txBody>
+      </p:sp>
+      <p:sp>
+        <p:nvSpPr>
+          <p:cNvPr id="23" name="TextBox 22"/>
+          <p:cNvSpPr txBox="1"/>
+          <p:nvPr/>
+        </p:nvSpPr>
+        <p:spPr>
+          <a:xfrm>
+            <a:off x="3154917" y="3511296"/>
+            <a:ext cx="1175570" cy="420624"/>
+          </a:xfrm>
+          <a:prstGeom prst="rect">
+            <a:avLst/>
+          </a:prstGeom>
+          <a:noFill/>
+        </p:spPr>
+        <p:txBody>
+          <a:bodyPr wrap="square" anchor="ctr" lIns="0" rIns="0" tIns="0" bIns="0">
+            <a:spAutoFit/>
+          </a:bodyPr>
+          <a:lstStyle/>
+          <a:p>
+            <a:pPr algn="ctr">
+              <a:spcAft>
+                <a:spcPts val="0"/>
+              </a:spcAft>
+            </a:pPr>
+            <a:r>
+              <a:rPr sz="1300" b="0" i="0">
+                <a:solidFill>
+                  <a:srgbClr val="12263A"/>
+                </a:solidFill>
+                <a:latin typeface="Arial"/>
+              </a:rPr>
+              <a:t>no</a:t>
+            </a:r>
+          </a:p>
+        </p:txBody>
+      </p:sp>
+      <p:sp>
+        <p:nvSpPr>
+          <p:cNvPr id="24" name="TextBox 23"/>
+          <p:cNvSpPr txBox="1"/>
+          <p:nvPr/>
+        </p:nvSpPr>
+        <p:spPr>
+          <a:xfrm>
+            <a:off x="4586519" y="3511296"/>
+            <a:ext cx="1175570" cy="420624"/>
+          </a:xfrm>
+          <a:prstGeom prst="rect">
+            <a:avLst/>
+          </a:prstGeom>
+          <a:noFill/>
+        </p:spPr>
+        <p:txBody>
+          <a:bodyPr wrap="square" anchor="ctr" lIns="0" rIns="0" tIns="0" bIns="0">
+            <a:spAutoFit/>
+          </a:bodyPr>
+          <a:lstStyle/>
+          <a:p>
+            <a:pPr algn="ctr">
+              <a:spcAft>
+                <a:spcPts val="0"/>
+              </a:spcAft>
+            </a:pPr>
+            <a:r>
+              <a:rPr sz="1300" b="0" i="0">
+                <a:solidFill>
+                  <a:srgbClr val="12263A"/>
+                </a:solidFill>
+                <a:latin typeface="Arial"/>
+              </a:rPr>
+              <a:t>yes</a:t>
+            </a:r>
+          </a:p>
+        </p:txBody>
+      </p:sp>
+      <p:sp>
+        <p:nvSpPr>
+          <p:cNvPr id="25" name="Rectangle 24"/>
+          <p:cNvSpPr/>
+          <p:nvPr/>
+        </p:nvSpPr>
+        <p:spPr>
+          <a:xfrm>
+            <a:off x="777240" y="3931920"/>
+            <a:ext cx="5112867" cy="420624"/>
+          </a:xfrm>
+          <a:prstGeom prst="rect">
+            <a:avLst/>
+          </a:prstGeom>
+          <a:solidFill>
+            <a:srgbClr val="FFFFFF"/>
+          </a:solidFill>
+          <a:ln w="6350">
+            <a:solidFill>
+              <a:srgbClr val="D8DEE4"/>
+            </a:solidFill>
+          </a:ln>
+          <a:effectLst/>
+        </p:spPr>
+        <p:style>
+          <a:lnRef idx="1">
+            <a:schemeClr val="accent1"/>
+          </a:lnRef>
+          <a:fillRef idx="3">
+            <a:schemeClr val="accent1"/>
+          </a:fillRef>
+          <a:effectRef idx="2">
+            <a:schemeClr val="accent1"/>
+          </a:effectRef>
+          <a:fontRef idx="minor">
+            <a:schemeClr val="lt1"/>
+          </a:fontRef>
+        </p:style>
+        <p:txBody>
+          <a:bodyPr rtlCol="0" anchor="ctr" wrap="square"/>
+          <a:lstStyle/>
+          <a:p>
+            <a:pPr algn="ctr"/>
+          </a:p>
+        </p:txBody>
+      </p:sp>
+      <p:sp>
+        <p:nvSpPr>
+          <p:cNvPr id="26" name="TextBox 25"/>
+          <p:cNvSpPr txBox="1"/>
+          <p:nvPr/>
+        </p:nvSpPr>
+        <p:spPr>
+          <a:xfrm>
+            <a:off x="905256" y="3931920"/>
+            <a:ext cx="1993629" cy="420624"/>
+          </a:xfrm>
+          <a:prstGeom prst="rect">
+            <a:avLst/>
+          </a:prstGeom>
+          <a:noFill/>
+        </p:spPr>
+        <p:txBody>
+          <a:bodyPr wrap="square" anchor="ctr" lIns="0" rIns="0" tIns="0" bIns="0">
+            <a:spAutoFit/>
+          </a:bodyPr>
+          <a:lstStyle/>
+          <a:p>
+            <a:pPr algn="l">
+              <a:spcAft>
+                <a:spcPts val="0"/>
+              </a:spcAft>
+            </a:pPr>
+            <a:r>
+              <a:rPr sz="1300" b="1" i="0">
+                <a:solidFill>
+                  <a:srgbClr val="12263A"/>
+                </a:solidFill>
+                <a:latin typeface="Arial"/>
+              </a:rPr>
+              <a:t>We choose the alarm rate</a:t>
+            </a:r>
+          </a:p>
+        </p:txBody>
+      </p:sp>
+      <p:sp>
+        <p:nvSpPr>
+          <p:cNvPr id="27" name="TextBox 26"/>
+          <p:cNvSpPr txBox="1"/>
+          <p:nvPr/>
+        </p:nvSpPr>
+        <p:spPr>
+          <a:xfrm>
+            <a:off x="3154917" y="3931920"/>
+            <a:ext cx="1175570" cy="420624"/>
+          </a:xfrm>
+          <a:prstGeom prst="rect">
+            <a:avLst/>
+          </a:prstGeom>
+          <a:noFill/>
+        </p:spPr>
+        <p:txBody>
+          <a:bodyPr wrap="square" anchor="ctr" lIns="0" rIns="0" tIns="0" bIns="0">
+            <a:spAutoFit/>
+          </a:bodyPr>
+          <a:lstStyle/>
+          <a:p>
+            <a:pPr algn="ctr">
+              <a:spcAft>
+                <a:spcPts val="0"/>
+              </a:spcAft>
+            </a:pPr>
+            <a:r>
+              <a:rPr sz="1300" b="0" i="0">
+                <a:solidFill>
+                  <a:srgbClr val="12263A"/>
+                </a:solidFill>
+                <a:latin typeface="Arial"/>
+              </a:rPr>
+              <a:t>exactly</a:t>
+            </a:r>
+          </a:p>
+        </p:txBody>
+      </p:sp>
+      <p:sp>
+        <p:nvSpPr>
+          <p:cNvPr id="28" name="TextBox 27"/>
+          <p:cNvSpPr txBox="1"/>
+          <p:nvPr/>
+        </p:nvSpPr>
+        <p:spPr>
+          <a:xfrm>
+            <a:off x="4586519" y="3931920"/>
+            <a:ext cx="1175570" cy="420624"/>
+          </a:xfrm>
+          <a:prstGeom prst="rect">
+            <a:avLst/>
+          </a:prstGeom>
+          <a:noFill/>
+        </p:spPr>
+        <p:txBody>
+          <a:bodyPr wrap="square" anchor="ctr" lIns="0" rIns="0" tIns="0" bIns="0">
+            <a:spAutoFit/>
+          </a:bodyPr>
+          <a:lstStyle/>
+          <a:p>
+            <a:pPr algn="ctr">
+              <a:spcAft>
+                <a:spcPts val="0"/>
+              </a:spcAft>
+            </a:pPr>
+            <a:r>
+              <a:rPr sz="1300" b="0" i="0">
+                <a:solidFill>
+                  <a:srgbClr val="12263A"/>
+                </a:solidFill>
+                <a:latin typeface="Arial"/>
+              </a:rPr>
+              <a:t>approximately</a:t>
+            </a:r>
+          </a:p>
+        </p:txBody>
+      </p:sp>
+      <p:sp>
+        <p:nvSpPr>
+          <p:cNvPr id="29" name="Rounded Rectangle 28"/>
+          <p:cNvSpPr/>
+          <p:nvPr/>
+        </p:nvSpPr>
+        <p:spPr>
+          <a:xfrm>
+            <a:off x="6301587" y="2249424"/>
+            <a:ext cx="5112867" cy="1481328"/>
+          </a:xfrm>
+          <a:prstGeom prst="roundRect">
+            <a:avLst/>
+          </a:prstGeom>
+          <a:solidFill>
+            <a:srgbClr val="FAF0F0"/>
+          </a:solidFill>
+          <a:ln>
+            <a:noFill/>
+          </a:ln>
+          <a:effectLst/>
+        </p:spPr>
+        <p:style>
+          <a:lnRef idx="1">
+            <a:schemeClr val="accent1"/>
+          </a:lnRef>
+          <a:fillRef idx="3">
+            <a:schemeClr val="accent1"/>
+          </a:fillRef>
+          <a:effectRef idx="2">
+            <a:schemeClr val="accent1"/>
+          </a:effectRef>
+          <a:fontRef idx="minor">
+            <a:schemeClr val="lt1"/>
+          </a:fontRef>
+        </p:style>
+        <p:txBody>
+          <a:bodyPr rtlCol="0" anchor="ctr" wrap="square"/>
+          <a:lstStyle/>
+          <a:p>
+            <a:pPr algn="ctr"/>
+          </a:p>
+        </p:txBody>
+      </p:sp>
+      <p:sp>
+        <p:nvSpPr>
+          <p:cNvPr id="30" name="Rectangle 29"/>
+          <p:cNvSpPr/>
+          <p:nvPr/>
+        </p:nvSpPr>
+        <p:spPr>
+          <a:xfrm>
+            <a:off x="6301587" y="2249424"/>
+            <a:ext cx="50292" cy="1481328"/>
+          </a:xfrm>
+          <a:prstGeom prst="rect">
+            <a:avLst/>
+          </a:prstGeom>
+          <a:solidFill>
+            <a:srgbClr val="A02128"/>
+          </a:solidFill>
+          <a:ln>
+            <a:noFill/>
+          </a:ln>
+          <a:effectLst/>
+        </p:spPr>
+        <p:style>
+          <a:lnRef idx="1">
+            <a:schemeClr val="accent1"/>
+          </a:lnRef>
+          <a:fillRef idx="3">
+            <a:schemeClr val="accent1"/>
+          </a:fillRef>
+          <a:effectRef idx="2">
+            <a:schemeClr val="accent1"/>
+          </a:effectRef>
+          <a:fontRef idx="minor">
+            <a:schemeClr val="lt1"/>
+          </a:fontRef>
+        </p:style>
+        <p:txBody>
+          <a:bodyPr rtlCol="0" anchor="ctr" wrap="square"/>
+          <a:lstStyle/>
+          <a:p>
+            <a:pPr algn="ctr"/>
+          </a:p>
+        </p:txBody>
+      </p:sp>
+      <p:sp>
+        <p:nvSpPr>
+          <p:cNvPr id="31" name="TextBox 30"/>
+          <p:cNvSpPr txBox="1"/>
+          <p:nvPr/>
+        </p:nvSpPr>
+        <p:spPr>
+          <a:xfrm>
+            <a:off x="6539331" y="2414016"/>
+            <a:ext cx="4655667" cy="1152144"/>
           </a:xfrm>
           <a:prstGeom prst="rect">
             <a:avLst/>
@@ -13384,117 +15271,196 @@
           <a:p>
             <a:pPr algn="l">
               <a:spcAft>
-                <a:spcPts val="1200"/>
-              </a:spcAft>
-            </a:pPr>
-            <a:r>
-              <a:rPr sz="1450" b="1" i="0">
+                <a:spcPts val="500"/>
+              </a:spcAft>
+            </a:pPr>
+            <a:r>
+              <a:rPr sz="1100" b="1" i="0" spc="110">
                 <a:solidFill>
                   <a:srgbClr val="A02128"/>
                 </a:solidFill>
                 <a:latin typeface="Arial"/>
               </a:rPr>
-              <a:t>—  </a:t>
-            </a:r>
-            <a:r>
-              <a:rPr sz="1450" b="1" i="0">
+              <a:t>THE ONE WE DID NOT EXPECT</a:t>
+            </a:r>
+          </a:p>
+          <a:p>
+            <a:pPr algn="l">
+              <a:lnSpc>
+                <a:spcPct val="106000"/>
+              </a:lnSpc>
+              <a:spcAft>
+                <a:spcPts val="0"/>
+              </a:spcAft>
+            </a:pPr>
+            <a:r>
+              <a:rPr sz="1350" b="0" i="0">
                 <a:solidFill>
                   <a:srgbClr val="12263A"/>
                 </a:solidFill>
                 <a:latin typeface="Arial"/>
               </a:rPr>
-              <a:t>Tuning a small model. </a:t>
-            </a:r>
-            <a:r>
-              <a:rPr sz="1450" b="0" i="0">
-                <a:solidFill>
-                  <a:srgbClr val="5A6B7C"/>
-                </a:solidFill>
-                <a:latin typeface="Arial"/>
-              </a:rPr>
-              <a:t>Large gain on familiar traffic, and it gives back accuracy on unfamiliar traffic — which is where novel attacks arrive.</a:t>
-            </a:r>
-          </a:p>
+              <a:t>The provider refused to evaluate a subset of prompts outright, and did so inconsistently — the same prompt was refused on some runs and not others. A guardrail that intermittently declines to answer is itself an audit finding.</a:t>
+            </a:r>
+          </a:p>
+        </p:txBody>
+      </p:sp>
+      <p:sp>
+        <p:nvSpPr>
+          <p:cNvPr id="32" name="Rounded Rectangle 31"/>
+          <p:cNvSpPr/>
+          <p:nvPr/>
+        </p:nvSpPr>
+        <p:spPr>
+          <a:xfrm>
+            <a:off x="6301587" y="3858768"/>
+            <a:ext cx="5112867" cy="1371600"/>
+          </a:xfrm>
+          <a:prstGeom prst="roundRect">
+            <a:avLst/>
+          </a:prstGeom>
+          <a:solidFill>
+            <a:srgbClr val="EFF4FE"/>
+          </a:solidFill>
+          <a:ln>
+            <a:noFill/>
+          </a:ln>
+          <a:effectLst/>
+        </p:spPr>
+        <p:style>
+          <a:lnRef idx="1">
+            <a:schemeClr val="accent1"/>
+          </a:lnRef>
+          <a:fillRef idx="3">
+            <a:schemeClr val="accent1"/>
+          </a:fillRef>
+          <a:effectRef idx="2">
+            <a:schemeClr val="accent1"/>
+          </a:effectRef>
+          <a:fontRef idx="minor">
+            <a:schemeClr val="lt1"/>
+          </a:fontRef>
+        </p:style>
+        <p:txBody>
+          <a:bodyPr rtlCol="0" anchor="ctr" wrap="square"/>
+          <a:lstStyle/>
+          <a:p>
+            <a:pPr algn="ctr"/>
+          </a:p>
+        </p:txBody>
+      </p:sp>
+      <p:sp>
+        <p:nvSpPr>
+          <p:cNvPr id="33" name="Rectangle 32"/>
+          <p:cNvSpPr/>
+          <p:nvPr/>
+        </p:nvSpPr>
+        <p:spPr>
+          <a:xfrm>
+            <a:off x="6301587" y="3858768"/>
+            <a:ext cx="50292" cy="1371600"/>
+          </a:xfrm>
+          <a:prstGeom prst="rect">
+            <a:avLst/>
+          </a:prstGeom>
+          <a:solidFill>
+            <a:srgbClr val="2563EB"/>
+          </a:solidFill>
+          <a:ln>
+            <a:noFill/>
+          </a:ln>
+          <a:effectLst/>
+        </p:spPr>
+        <p:style>
+          <a:lnRef idx="1">
+            <a:schemeClr val="accent1"/>
+          </a:lnRef>
+          <a:fillRef idx="3">
+            <a:schemeClr val="accent1"/>
+          </a:fillRef>
+          <a:effectRef idx="2">
+            <a:schemeClr val="accent1"/>
+          </a:effectRef>
+          <a:fontRef idx="minor">
+            <a:schemeClr val="lt1"/>
+          </a:fontRef>
+        </p:style>
+        <p:txBody>
+          <a:bodyPr rtlCol="0" anchor="ctr" wrap="square"/>
+          <a:lstStyle/>
+          <a:p>
+            <a:pPr algn="ctr"/>
+          </a:p>
+        </p:txBody>
+      </p:sp>
+      <p:sp>
+        <p:nvSpPr>
+          <p:cNvPr id="34" name="TextBox 33"/>
+          <p:cNvSpPr txBox="1"/>
+          <p:nvPr/>
+        </p:nvSpPr>
+        <p:spPr>
+          <a:xfrm>
+            <a:off x="6539331" y="4023360"/>
+            <a:ext cx="4655667" cy="1042416"/>
+          </a:xfrm>
+          <a:prstGeom prst="rect">
+            <a:avLst/>
+          </a:prstGeom>
+          <a:noFill/>
+        </p:spPr>
+        <p:txBody>
+          <a:bodyPr wrap="square" anchor="t" lIns="0" rIns="0" tIns="0" bIns="0">
+            <a:spAutoFit/>
+          </a:bodyPr>
+          <a:lstStyle/>
           <a:p>
             <a:pPr algn="l">
               <a:spcAft>
-                <a:spcPts val="1200"/>
-              </a:spcAft>
-            </a:pPr>
-            <a:r>
-              <a:rPr sz="1450" b="1" i="0">
-                <a:solidFill>
-                  <a:srgbClr val="A02128"/>
-                </a:solidFill>
-                <a:latin typeface="Arial"/>
-              </a:rPr>
-              <a:t>—  </a:t>
-            </a:r>
-            <a:r>
-              <a:rPr sz="1450" b="1" i="0">
+                <a:spcPts val="500"/>
+              </a:spcAft>
+            </a:pPr>
+            <a:r>
+              <a:rPr sz="1100" b="1" i="0" spc="110">
+                <a:solidFill>
+                  <a:srgbClr val="2563EB"/>
+                </a:solidFill>
+                <a:latin typeface="Arial"/>
+              </a:rPr>
+              <a:t>CONTROL OVER THE ALARM RATE</a:t>
+            </a:r>
+          </a:p>
+          <a:p>
+            <a:pPr algn="l">
+              <a:lnSpc>
+                <a:spcPct val="106000"/>
+              </a:lnSpc>
+              <a:spcAft>
+                <a:spcPts val="0"/>
+              </a:spcAft>
+            </a:pPr>
+            <a:r>
+              <a:rPr sz="1350" b="0" i="0">
                 <a:solidFill>
                   <a:srgbClr val="12263A"/>
                 </a:solidFill>
                 <a:latin typeface="Arial"/>
               </a:rPr>
-              <a:t>A bigger untuned model. </a:t>
-            </a:r>
-            <a:r>
-              <a:rPr sz="1450" b="0" i="0">
-                <a:solidFill>
-                  <a:srgbClr val="5A6B7C"/>
-                </a:solidFill>
-                <a:latin typeface="Arial"/>
-              </a:rPr>
-              <a:t>Recovers most of that same gain on familiar traffic, and holds its accuracy on unfamiliar traffic.</a:t>
-            </a:r>
-          </a:p>
-          <a:p>
-            <a:pPr algn="l">
-              <a:spcAft>
-                <a:spcPts val="1200"/>
-              </a:spcAft>
-            </a:pPr>
-            <a:r>
-              <a:rPr sz="1450" b="1" i="0">
-                <a:solidFill>
-                  <a:srgbClr val="A02128"/>
-                </a:solidFill>
-                <a:latin typeface="Arial"/>
-              </a:rPr>
-              <a:t>—  </a:t>
-            </a:r>
-            <a:r>
-              <a:rPr sz="1450" b="1" i="0">
-                <a:solidFill>
-                  <a:srgbClr val="12263A"/>
-                </a:solidFill>
-                <a:latin typeface="Arial"/>
-              </a:rPr>
-              <a:t>So for a guardrail specifically. </a:t>
-            </a:r>
-            <a:r>
-              <a:rPr sz="1450" b="0" i="0">
-                <a:solidFill>
-                  <a:srgbClr val="5A6B7C"/>
-                </a:solidFill>
-                <a:latin typeface="Arial"/>
-              </a:rPr>
-              <a:t>Prefer spending on a stronger base model over spending on a tuning programme.</a:t>
-            </a:r>
-          </a:p>
-        </p:txBody>
-      </p:sp>
-      <p:sp>
-        <p:nvSpPr>
-          <p:cNvPr id="10" name="Rounded Rectangle 9"/>
+              <a:t>Our own model exposes a continuous score, so we can set the false-alarm budget precisely. The hosted model reports a coarse 0–100 value, so we can only land near a target.</a:t>
+            </a:r>
+          </a:p>
+        </p:txBody>
+      </p:sp>
+      <p:sp>
+        <p:nvSpPr>
+          <p:cNvPr id="35" name="Rounded Rectangle 34"/>
           <p:cNvSpPr/>
           <p:nvPr/>
         </p:nvSpPr>
         <p:spPr>
           <a:xfrm>
-            <a:off x="6301587" y="2212848"/>
-            <a:ext cx="5112867" cy="1554480"/>
+            <a:off x="777240" y="5321808"/>
+            <a:ext cx="10637215" cy="969264"/>
           </a:xfrm>
           <a:prstGeom prst="roundRect">
             <a:avLst/>
@@ -13531,14 +15497,14 @@
       </p:sp>
       <p:sp>
         <p:nvSpPr>
-          <p:cNvPr id="11" name="Rectangle 10"/>
+          <p:cNvPr id="36" name="Rectangle 35"/>
           <p:cNvSpPr/>
           <p:nvPr/>
         </p:nvSpPr>
         <p:spPr>
           <a:xfrm>
-            <a:off x="6301587" y="2212848"/>
-            <a:ext cx="50292" cy="1554480"/>
+            <a:off x="777240" y="5321808"/>
+            <a:ext cx="50292" cy="969264"/>
           </a:xfrm>
           <a:prstGeom prst="rect">
             <a:avLst/>
@@ -13575,14 +15541,14 @@
       </p:sp>
       <p:sp>
         <p:nvSpPr>
-          <p:cNvPr id="12" name="TextBox 11"/>
+          <p:cNvPr id="37" name="TextBox 36"/>
           <p:cNvSpPr txBox="1"/>
           <p:nvPr/>
         </p:nvSpPr>
         <p:spPr>
           <a:xfrm>
-            <a:off x="6539331" y="2377440"/>
-            <a:ext cx="4655667" cy="1225296"/>
+            <a:off x="1014984" y="5486400"/>
+            <a:ext cx="10180015" cy="640080"/>
           </a:xfrm>
           <a:prstGeom prst="rect">
             <a:avLst/>
@@ -13607,7 +15573,7 @@
                 </a:solidFill>
                 <a:latin typeface="Arial"/>
               </a:rPr>
-              <a:t>WHY THIS IS WORTH MONEY</a:t>
+              <a:t>NOT A REASON TO REFUSE HOSTED</a:t>
             </a:r>
           </a:p>
           <a:p>
@@ -13626,153 +15592,7 @@
                 </a:solidFill>
                 <a:latin typeface="Arial"/>
               </a:rPr>
-              <a:t>It reverses the intuitive plan. Tuning looks like the cheap, targeted option; measured on held-out traffic it is the one that quietly costs you coverage.</a:t>
-            </a:r>
-          </a:p>
-        </p:txBody>
-      </p:sp>
-      <p:sp>
-        <p:nvSpPr>
-          <p:cNvPr id="13" name="Rounded Rectangle 12"/>
-          <p:cNvSpPr/>
-          <p:nvPr/>
-        </p:nvSpPr>
-        <p:spPr>
-          <a:xfrm>
-            <a:off x="6301587" y="3913632"/>
-            <a:ext cx="5112867" cy="1554480"/>
-          </a:xfrm>
-          <a:prstGeom prst="roundRect">
-            <a:avLst/>
-          </a:prstGeom>
-          <a:solidFill>
-            <a:srgbClr val="FDF7EC"/>
-          </a:solidFill>
-          <a:ln>
-            <a:noFill/>
-          </a:ln>
-          <a:effectLst/>
-        </p:spPr>
-        <p:style>
-          <a:lnRef idx="1">
-            <a:schemeClr val="accent1"/>
-          </a:lnRef>
-          <a:fillRef idx="3">
-            <a:schemeClr val="accent1"/>
-          </a:fillRef>
-          <a:effectRef idx="2">
-            <a:schemeClr val="accent1"/>
-          </a:effectRef>
-          <a:fontRef idx="minor">
-            <a:schemeClr val="lt1"/>
-          </a:fontRef>
-        </p:style>
-        <p:txBody>
-          <a:bodyPr rtlCol="0" anchor="ctr" wrap="square"/>
-          <a:lstStyle/>
-          <a:p>
-            <a:pPr algn="ctr"/>
-          </a:p>
-        </p:txBody>
-      </p:sp>
-      <p:sp>
-        <p:nvSpPr>
-          <p:cNvPr id="14" name="Rectangle 13"/>
-          <p:cNvSpPr/>
-          <p:nvPr/>
-        </p:nvSpPr>
-        <p:spPr>
-          <a:xfrm>
-            <a:off x="6301587" y="3913632"/>
-            <a:ext cx="50292" cy="1554480"/>
-          </a:xfrm>
-          <a:prstGeom prst="rect">
-            <a:avLst/>
-          </a:prstGeom>
-          <a:solidFill>
-            <a:srgbClr val="B7791F"/>
-          </a:solidFill>
-          <a:ln>
-            <a:noFill/>
-          </a:ln>
-          <a:effectLst/>
-        </p:spPr>
-        <p:style>
-          <a:lnRef idx="1">
-            <a:schemeClr val="accent1"/>
-          </a:lnRef>
-          <a:fillRef idx="3">
-            <a:schemeClr val="accent1"/>
-          </a:fillRef>
-          <a:effectRef idx="2">
-            <a:schemeClr val="accent1"/>
-          </a:effectRef>
-          <a:fontRef idx="minor">
-            <a:schemeClr val="lt1"/>
-          </a:fontRef>
-        </p:style>
-        <p:txBody>
-          <a:bodyPr rtlCol="0" anchor="ctr" wrap="square"/>
-          <a:lstStyle/>
-          <a:p>
-            <a:pPr algn="ctr"/>
-          </a:p>
-        </p:txBody>
-      </p:sp>
-      <p:sp>
-        <p:nvSpPr>
-          <p:cNvPr id="15" name="TextBox 14"/>
-          <p:cNvSpPr txBox="1"/>
-          <p:nvPr/>
-        </p:nvSpPr>
-        <p:spPr>
-          <a:xfrm>
-            <a:off x="6539331" y="4078224"/>
-            <a:ext cx="4655667" cy="1225296"/>
-          </a:xfrm>
-          <a:prstGeom prst="rect">
-            <a:avLst/>
-          </a:prstGeom>
-          <a:noFill/>
-        </p:spPr>
-        <p:txBody>
-          <a:bodyPr wrap="square" anchor="t" lIns="0" rIns="0" tIns="0" bIns="0">
-            <a:spAutoFit/>
-          </a:bodyPr>
-          <a:lstStyle/>
-          <a:p>
-            <a:pPr algn="l">
-              <a:spcAft>
-                <a:spcPts val="500"/>
-              </a:spcAft>
-            </a:pPr>
-            <a:r>
-              <a:rPr sz="1100" b="1" i="0" spc="110">
-                <a:solidFill>
-                  <a:srgbClr val="B7791F"/>
-                </a:solidFill>
-                <a:latin typeface="Arial"/>
-              </a:rPr>
-              <a:t>CONFIDENCE LEVEL</a:t>
-            </a:r>
-          </a:p>
-          <a:p>
-            <a:pPr algn="l">
-              <a:lnSpc>
-                <a:spcPct val="106000"/>
-              </a:lnSpc>
-              <a:spcAft>
-                <a:spcPts val="0"/>
-              </a:spcAft>
-            </a:pPr>
-            <a:r>
-              <a:rPr sz="1350" b="0" i="0">
-                <a:solidFill>
-                  <a:srgbClr val="12263A"/>
-                </a:solidFill>
-                <a:latin typeface="Arial"/>
-              </a:rPr>
-              <a:t>This is a comparison between different model sizes, not a controlled experiment at fixed size. Treat it as a strong steer on where to spend, not a proven law.</a:t>
+              <a:t>It is a reason to scope it: hosted on traffic where the prompt may leave and latency is not critical; self-hosted on the regulated, latency-sensitive path.</a:t>
             </a:r>
           </a:p>
         </p:txBody>

--- a/papers/unified-report/slides/safety_guard_exec_deck.pptx
+++ b/papers/unified-report/slides/safety_guard_exec_deck.pptx
@@ -17,6 +17,7 @@
     <p:sldId id="265" r:id="rId17"/>
     <p:sldId id="266" r:id="rId18"/>
     <p:sldId id="267" r:id="rId19"/>
+    <p:sldId id="268" r:id="rId20"/>
   </p:sldIdLst>
   <p:sldSz cx="12191695" cy="6858000" type="screen4x3"/>
   <p:notesSz cx="6858000" cy="9144000"/>
@@ -620,64 +621,71 @@
           <a:lstStyle/>
           <a:p>
             <a:r>
-              <a:t>This slide did not exist in the plan. It fell out of the scale experiment and is probably the</a:t>
-            </a:r>
-          </a:p>
-          <a:p>
-            <a:r>
-              <a:t>most commercially useful thing in the deck.</a:t>
+              <a:t>Work down the table, then land on the two callouts, which are the non-obvious costs.</a:t>
             </a:r>
           </a:p>
           <a:p/>
           <a:p>
             <a:r>
-              <a:t>The mechanism: fine-tuning specialises. It buys accuracy on the sources you trained on and</a:t>
-            </a:r>
-          </a:p>
-          <a:p>
-            <a:r>
-              <a:t>withdraws it from sources you did not. A bigger base model arrives with broad competence</a:t>
-            </a:r>
-          </a:p>
-          <a:p>
-            <a:r>
-              <a:t>already and does not have to trade any of it away. For a guardrail, the traffic you did not</a:t>
-            </a:r>
-          </a:p>
-          <a:p>
-            <a:r>
-              <a:t>anticipate is precisely the traffic that matters, so a technique that trades away</a:t>
-            </a:r>
-          </a:p>
-          <a:p>
-            <a:r>
-              <a:t>unfamiliar-traffic accuracy is badly matched to the job.</a:t>
+              <a:t>Latency: 1,553 ms median measured under load at high concurrency, so treat it as</a:t>
+            </a:r>
+          </a:p>
+          <a:p>
+            <a:r>
+              <a:t>an upper bound for a single request; the small-model figure is a batched GPU measurement. Even</a:t>
+            </a:r>
+          </a:p>
+          <a:p>
+            <a:r>
+              <a:t>allowing for that, the ratio is roughly 77x.</a:t>
             </a:r>
           </a:p>
           <a:p/>
           <a:p>
             <a:r>
-              <a:t>Numbers are in the technical report; the honest caveat is on the slide. Comparing a 32B untuned</a:t>
-            </a:r>
-          </a:p>
-          <a:p>
-            <a:r>
-              <a:t>model to a tuned 4B is a deployment-choice comparison, not a controlled one -- the 32B costs</a:t>
-            </a:r>
-          </a:p>
-          <a:p>
-            <a:r>
-              <a:t>much more to serve. What we can say is that the tuning route did not close the vendor gap and</a:t>
-            </a:r>
-          </a:p>
-          <a:p>
-            <a:r>
-              <a:t>made held-out accuracy worse on most models, while the size route at least moved in the right</a:t>
-            </a:r>
-          </a:p>
-          <a:p>
-            <a:r>
-              <a:t>direction on both regimes.</a:t>
+              <a:t>Cost: billed tokens at public list prices. It excludes the amortised GPU on the self-hosted</a:t>
+            </a:r>
+          </a:p>
+          <a:p>
+            <a:r>
+              <a:t>side, which is exactly why the comparison is about where to spend rather than a like-for-like</a:t>
+            </a:r>
+          </a:p>
+          <a:p>
+            <a:r>
+              <a:t>price.</a:t>
+            </a:r>
+          </a:p>
+          <a:p/>
+          <a:p>
+            <a:r>
+              <a:t>The refusal finding is the one to say slowly. We saw a set of prompts refused by the provider's</a:t>
+            </a:r>
+          </a:p>
+          <a:p>
+            <a:r>
+              <a:t>own input filter before the model ever saw them, and the refusals were not reproducible --</a:t>
+            </a:r>
+          </a:p>
+          <a:p>
+            <a:r>
+              <a:t>different runs, different outcomes, no row refused every time. For a control that has to be</a:t>
+            </a:r>
+          </a:p>
+          <a:p>
+            <a:r>
+              <a:t>auditable, "sometimes declines, for reasons we cannot inspect or appeal" is a compliance</a:t>
+            </a:r>
+          </a:p>
+          <a:p>
+            <a:r>
+              <a:t>property, not a technical footnote.</a:t>
+            </a:r>
+          </a:p>
+          <a:p/>
+          <a:p>
+            <a:r>
+              <a:t>Close on the scoping sentence. The answer is a split, and this slide is why.</a:t>
             </a:r>
           </a:p>
         </p:txBody>
@@ -747,65 +755,64 @@
           <a:lstStyle/>
           <a:p>
             <a:r>
-              <a:t>Do not rush this slide, and do not apologise through it. Naming the limits is what makes the</a:t>
-            </a:r>
-          </a:p>
-          <a:p>
-            <a:r>
-              <a:t>recommendation on slide 3 credible.</a:t>
+              <a:t>This slide did not exist in the plan. It fell out of the scale experiment and is probably the</a:t>
+            </a:r>
+          </a:p>
+          <a:p>
+            <a:r>
+              <a:t>most commercially useful thing in the deck.</a:t>
             </a:r>
           </a:p>
           <a:p/>
           <a:p>
             <a:r>
-              <a:t>The first bullet is the most important and the most self-undermining, which is why it belongs</a:t>
-            </a:r>
-          </a:p>
-          <a:p>
-            <a:r>
-              <a:t>here: the underlying research finding is that guard rankings depend on the benchmark. We are</a:t>
-            </a:r>
-          </a:p>
-          <a:p>
-            <a:r>
-              <a:t>handing you a recommendation derived from one benchmark. It is external and expert-annotated,</a:t>
-            </a:r>
-          </a:p>
-          <a:p>
-            <a:r>
-              <a:t>which is the best tier available to us, but a different instrument could reorder the middle of</a:t>
-            </a:r>
-          </a:p>
-          <a:p>
-            <a:r>
-              <a:t>the table. It is unlikely to reverse a ten-point gap.</a:t>
+              <a:t>The mechanism: fine-tuning specialises. It buys accuracy on the sources you trained on and</a:t>
+            </a:r>
+          </a:p>
+          <a:p>
+            <a:r>
+              <a:t>withdraws it from sources you did not. A bigger base model arrives with broad competence</a:t>
+            </a:r>
+          </a:p>
+          <a:p>
+            <a:r>
+              <a:t>already and does not have to trade any of it away. For a guardrail, the traffic you did not</a:t>
+            </a:r>
+          </a:p>
+          <a:p>
+            <a:r>
+              <a:t>anticipate is precisely the traffic that matters, so a technique that trades away</a:t>
+            </a:r>
+          </a:p>
+          <a:p>
+            <a:r>
+              <a:t>unfamiliar-traffic accuracy is badly matched to the job.</a:t>
             </a:r>
           </a:p>
           <a:p/>
           <a:p>
             <a:r>
-              <a:t>The pinning point matters more than it sounds. A hosted model can change under a fixed</a:t>
-            </a:r>
-          </a:p>
-          <a:p>
-            <a:r>
-              <a:t>deployment; that is a change-control problem for a compliance control. Our own checkpoints are</a:t>
-            </a:r>
-          </a:p>
-          <a:p>
-            <a:r>
-              <a:t>pinned to a content hash and will reproduce in a year.</a:t>
-            </a:r>
-          </a:p>
-          <a:p/>
-          <a:p>
-            <a:r>
-              <a:t>Close on the final callout: the thing worth funding is the measuring instrument for our actual</a:t>
-            </a:r>
-          </a:p>
-          <a:p>
-            <a:r>
-              <a:t>domain, not more guard comparisons on general safety.</a:t>
+              <a:t>Numbers are in the technical report; the honest caveat is on the slide. Comparing a 32B untuned</a:t>
+            </a:r>
+          </a:p>
+          <a:p>
+            <a:r>
+              <a:t>model to a tuned 4B is a deployment-choice comparison, not a controlled one -- the 32B costs</a:t>
+            </a:r>
+          </a:p>
+          <a:p>
+            <a:r>
+              <a:t>much more to serve. What we can say is that the tuning route did not close the vendor gap and</a:t>
+            </a:r>
+          </a:p>
+          <a:p>
+            <a:r>
+              <a:t>made held-out accuracy worse on most models, while the size route at least moved in the right</a:t>
+            </a:r>
+          </a:p>
+          <a:p>
+            <a:r>
+              <a:t>direction on both regimes.</a:t>
             </a:r>
           </a:p>
         </p:txBody>
@@ -875,6 +882,134 @@
           <a:lstStyle/>
           <a:p>
             <a:r>
+              <a:t>Do not rush this slide, and do not apologise through it. Naming the limits is what makes the</a:t>
+            </a:r>
+          </a:p>
+          <a:p>
+            <a:r>
+              <a:t>recommendation on slide 3 credible.</a:t>
+            </a:r>
+          </a:p>
+          <a:p/>
+          <a:p>
+            <a:r>
+              <a:t>The first bullet is the most important and the most self-undermining, which is why it belongs</a:t>
+            </a:r>
+          </a:p>
+          <a:p>
+            <a:r>
+              <a:t>here: the underlying research finding is that guard rankings depend on the benchmark. We are</a:t>
+            </a:r>
+          </a:p>
+          <a:p>
+            <a:r>
+              <a:t>handing you a recommendation derived from one benchmark. It is external and expert-annotated,</a:t>
+            </a:r>
+          </a:p>
+          <a:p>
+            <a:r>
+              <a:t>which is the best tier available to us, but a different instrument could reorder the middle of</a:t>
+            </a:r>
+          </a:p>
+          <a:p>
+            <a:r>
+              <a:t>the table. It is unlikely to reverse a ten-point gap.</a:t>
+            </a:r>
+          </a:p>
+          <a:p/>
+          <a:p>
+            <a:r>
+              <a:t>The pinning point matters more than it sounds. A hosted model can change under a fixed</a:t>
+            </a:r>
+          </a:p>
+          <a:p>
+            <a:r>
+              <a:t>deployment; that is a change-control problem for a compliance control. Our own checkpoints are</a:t>
+            </a:r>
+          </a:p>
+          <a:p>
+            <a:r>
+              <a:t>pinned to a content hash and will reproduce in a year.</a:t>
+            </a:r>
+          </a:p>
+          <a:p/>
+          <a:p>
+            <a:r>
+              <a:t>Close on the final callout: the thing worth funding is the measuring instrument for our actual</a:t>
+            </a:r>
+          </a:p>
+          <a:p>
+            <a:r>
+              <a:t>domain, not more guard comparisons on general safety.</a:t>
+            </a:r>
+          </a:p>
+        </p:txBody>
+      </p:sp>
+      <p:sp>
+        <p:nvSpPr>
+          <p:cNvPr id="4" name="Slide Number Placeholder 3"/>
+          <p:cNvSpPr>
+            <a:spLocks noGrp="1"/>
+          </p:cNvSpPr>
+          <p:nvPr>
+            <p:ph type="sldNum" idx="5" sz="quarter"/>
+          </p:nvPr>
+        </p:nvSpPr>
+        <p:spPr/>
+      </p:sp>
+    </p:spTree>
+  </p:cSld>
+  <p:clrMapOvr>
+    <a:masterClrMapping/>
+  </p:clrMapOvr>
+</p:notes>
+</file>
+
+<file path=ppt/notesSlides/notesSlide13.xml><?xml version="1.0" encoding="utf-8"?>
+<p:notes xmlns:a="http://schemas.openxmlformats.org/drawingml/2006/main" xmlns:p="http://schemas.openxmlformats.org/presentationml/2006/main" xmlns:r="http://schemas.openxmlformats.org/officeDocument/2006/relationships">
+  <p:cSld>
+    <p:spTree>
+      <p:nvGrpSpPr>
+        <p:cNvPr id="1" name=""/>
+        <p:cNvGrpSpPr/>
+        <p:nvPr/>
+      </p:nvGrpSpPr>
+      <p:grpSpPr>
+        <a:xfrm>
+          <a:off x="0" y="0"/>
+          <a:ext cx="0" cy="0"/>
+          <a:chOff x="0" y="0"/>
+          <a:chExt cx="0" cy="0"/>
+        </a:xfrm>
+      </p:grpSpPr>
+      <p:sp>
+        <p:nvSpPr>
+          <p:cNvPr id="2" name="Slide Image Placeholder 1"/>
+          <p:cNvSpPr>
+            <a:spLocks noGrp="1"/>
+          </p:cNvSpPr>
+          <p:nvPr>
+            <p:ph type="sldImg" idx="2"/>
+          </p:nvPr>
+        </p:nvSpPr>
+        <p:spPr/>
+      </p:sp>
+      <p:sp>
+        <p:nvSpPr>
+          <p:cNvPr id="3" name="Notes Placeholder 2"/>
+          <p:cNvSpPr>
+            <a:spLocks noGrp="1"/>
+          </p:cNvSpPr>
+          <p:nvPr>
+            <p:ph type="body" idx="3" sz="quarter"/>
+          </p:nvPr>
+        </p:nvSpPr>
+        <p:spPr/>
+        <p:txBody>
+          <a:bodyPr/>
+          <a:lstStyle/>
+          <a:p>
+            <a:r>
               <a:t>Two minutes. The first two items need no budget. The third frees capacity. The fourth is the</a:t>
             </a:r>
           </a:p>
@@ -1391,70 +1526,91 @@
           <a:lstStyle/>
           <a:p>
             <a:r>
-              <a:t>The headline is the sign split, not the average. If you quote only the mean change</a:t>
-            </a:r>
-          </a:p>
-          <a:p>
-            <a:r>
-              <a:t>(+0.005) you will mislead the room -- it is a small number sitting on top of</a:t>
-            </a:r>
-          </a:p>
-          <a:p>
-            <a:r>
-              <a:t>swings from -0.059 to +0.122.</a:t>
+              <a:t>This is the slide that changes the recommendation, so do not rush it.</a:t>
             </a:r>
           </a:p>
           <a:p/>
           <a:p>
             <a:r>
-              <a:t>Mechanism, in plain terms: fine-tuning on a fixed set of sources specialises the model to</a:t>
-            </a:r>
-          </a:p>
-          <a:p>
-            <a:r>
-              <a:t>those sources. It buys a lot of accuracy on traffic that looks like the training data and</a:t>
-            </a:r>
-          </a:p>
-          <a:p>
-            <a:r>
-              <a:t>gives some back on traffic that does not. Our measurements say the trade gets worse as the</a:t>
-            </a:r>
-          </a:p>
-          <a:p>
-            <a:r>
-              <a:t>starting model gets stronger -- the strongest model we tuned gained the least and lost the</a:t>
-            </a:r>
-          </a:p>
-          <a:p>
-            <a:r>
-              <a:t>most.</a:t>
+              <a:t>Slide 4 said hosted is about ten points better. True -- on prompts nobody anticipated. This</a:t>
+            </a:r>
+          </a:p>
+          <a:p>
+            <a:r>
+              <a:t>slide says that on sources we can enumerate in a training manifest the ordering inverts, and a</a:t>
+            </a:r>
+          </a:p>
+          <a:p>
+            <a:r>
+              <a:t>Qwen2.5-1.5B model beats the hosted one outright: .948 against</a:t>
+            </a:r>
+          </a:p>
+          <a:p>
+            <a:r>
+              <a:t>.741, difference +0.185 with 95% interval</a:t>
+            </a:r>
+          </a:p>
+          <a:p>
+            <a:r>
+              <a:t>[+0.065, +0.423]. It is a ranking win, not a threshold placement -- AUROC</a:t>
+            </a:r>
+          </a:p>
+          <a:p>
+            <a:r>
+              <a:t>0.9928 against 0.8731 -- and 5 of</a:t>
+            </a:r>
+          </a:p>
+          <a:p>
+            <a:r>
+              <a:t>12 represented cells clear zero at the 95% level.</a:t>
             </a:r>
           </a:p>
           <a:p/>
           <a:p>
             <a:r>
-              <a:t>This is the central finding of the underlying research, reproduced here on external</a:t>
-            </a:r>
-          </a:p>
-          <a:p>
-            <a:r>
-              <a:t>expert-annotated data rather than on our own panel, which is a harder test.</a:t>
+              <a:t>Represented sources here are jailbreak_classification, prompt_injections, toxicchat. Held-out sources are the ones we never</a:t>
+            </a:r>
+          </a:p>
+          <a:p>
+            <a:r>
+              <a:t>trained on, and there the hosted model leads.</a:t>
             </a:r>
           </a:p>
           <a:p/>
           <a:p>
             <a:r>
-              <a:t>If asked "did you tune it badly": five independent training runs per model, one recipe, and</a:t>
-            </a:r>
-          </a:p>
-          <a:p>
-            <a:r>
-              <a:t>the same recipe that produces large gains on in-distribution traffic. The gains are real; they</a:t>
-            </a:r>
-          </a:p>
-          <a:p>
-            <a:r>
-              <a:t>just do not transfer.</a:t>
+              <a:t>Two honest caveats, offered before they are asked. Per-source samples are small (67 to 451</a:t>
+            </a:r>
+          </a:p>
+          <a:p>
+            <a:r>
+              <a:t>rows), so read the direction rather than the exact margin. And this is retrospective analysis</a:t>
+            </a:r>
+          </a:p>
+          <a:p>
+            <a:r>
+              <a:t>on a panel we inspected while building the method -- it is a strong signal, not a sealed</a:t>
+            </a:r>
+          </a:p>
+          <a:p>
+            <a:r>
+              <a:t>confirmatory result.</a:t>
+            </a:r>
+          </a:p>
+          <a:p/>
+          <a:p>
+            <a:r>
+              <a:t>The business consequence: we do not need to beat the frontier everywhere to stop paying per</a:t>
+            </a:r>
+          </a:p>
+          <a:p>
+            <a:r>
+              <a:t>prompt. We need to know which slice of traffic we can characterise, self-host that, and buy</a:t>
+            </a:r>
+          </a:p>
+          <a:p>
+            <a:r>
+              <a:t>hosted capacity only for the rest.</a:t>
             </a:r>
           </a:p>
         </p:txBody>
@@ -1524,60 +1680,70 @@
           <a:lstStyle/>
           <a:p>
             <a:r>
-              <a:t>One claim: scale is not the escape hatch either.</a:t>
+              <a:t>The headline is the sign split, not the average. If you quote only the mean change</a:t>
+            </a:r>
+          </a:p>
+          <a:p>
+            <a:r>
+              <a:t>(+0.005) you will mislead the room -- it is a small number sitting on top of</a:t>
+            </a:r>
+          </a:p>
+          <a:p>
+            <a:r>
+              <a:t>swings from -0.059 to +0.122.</a:t>
             </a:r>
           </a:p>
           <a:p/>
           <a:p>
             <a:r>
-              <a:t>Exact numbers: 4B to 32B is +0.062, interval [+0.039, +0.084]. The remaining gap</a:t>
-            </a:r>
-          </a:p>
-          <a:p>
-            <a:r>
-              <a:t>to hosted from 32B is +0.066, interval [+0.043, +0.089]. So an eightfold</a:t>
-            </a:r>
-          </a:p>
-          <a:p>
-            <a:r>
-              <a:t>parameter increase bought slightly less than what was still missing.</a:t>
+              <a:t>Mechanism, in plain terms: fine-tuning on a fixed set of sources specialises the model to</a:t>
+            </a:r>
+          </a:p>
+          <a:p>
+            <a:r>
+              <a:t>those sources. It buys a lot of accuracy on traffic that looks like the training data and</a:t>
+            </a:r>
+          </a:p>
+          <a:p>
+            <a:r>
+              <a:t>gives some back on traffic that does not. Our measurements say the trade gets worse as the</a:t>
+            </a:r>
+          </a:p>
+          <a:p>
+            <a:r>
+              <a:t>starting model gets stronger -- the strongest model we tuned gained the least and lost the</a:t>
+            </a:r>
+          </a:p>
+          <a:p>
+            <a:r>
+              <a:t>most.</a:t>
             </a:r>
           </a:p>
           <a:p/>
           <a:p>
             <a:r>
-              <a:t>The 8B row is worth flagging honestly: it came out below 4B, but the interval</a:t>
-            </a:r>
-          </a:p>
-          <a:p>
-            <a:r>
-              <a:t>([-0.050, +0.001]) includes zero, so the correct statement is "no gain", not "worse".</a:t>
-            </a:r>
-          </a:p>
-          <a:p>
-            <a:r>
-              <a:t>Do not oversell it -- but do use it to make the point that size and guard quality are not</a:t>
-            </a:r>
-          </a:p>
-          <a:p>
-            <a:r>
-              <a:t>tightly coupled.</a:t>
+              <a:t>This is the central finding of the underlying research, reproduced here on external</a:t>
+            </a:r>
+          </a:p>
+          <a:p>
+            <a:r>
+              <a:t>expert-annotated data rather than on our own panel, which is a harder test.</a:t>
             </a:r>
           </a:p>
           <a:p/>
           <a:p>
             <a:r>
-              <a:t>The build-plan consequence is the part an executive audience should leave with. A 32B guard on</a:t>
-            </a:r>
-          </a:p>
-          <a:p>
-            <a:r>
-              <a:t>every inbound request is a serving cost close to the thing we were trying to avoid. If we are</a:t>
-            </a:r>
-          </a:p>
-          <a:p>
-            <a:r>
-              <a:t>paying that, the hosted option deserves another look on cost grounds alone.</a:t>
+              <a:t>If asked "did you tune it badly": five independent training runs per model, one recipe, and</a:t>
+            </a:r>
+          </a:p>
+          <a:p>
+            <a:r>
+              <a:t>the same recipe that produces large gains on in-distribution traffic. The gains are real; they</a:t>
+            </a:r>
+          </a:p>
+          <a:p>
+            <a:r>
+              <a:t>just do not transfer.</a:t>
             </a:r>
           </a:p>
         </p:txBody>
@@ -1647,70 +1813,60 @@
           <a:lstStyle/>
           <a:p>
             <a:r>
-              <a:t>This is the evidence slide for the rule on slide 3. One claim: the relationship is smooth and</a:t>
-            </a:r>
-          </a:p>
-          <a:p>
-            <a:r>
-              <a:t>steep early, so escalation is a dial rather than an architecture decision.</a:t>
+              <a:t>One claim: scale is not the escape hatch either.</a:t>
             </a:r>
           </a:p>
           <a:p/>
           <a:p>
             <a:r>
-              <a:t>Mechanism, and it is why this works at all: the requests chosen for escalation are the ones</a:t>
-            </a:r>
-          </a:p>
-          <a:p>
-            <a:r>
-              <a:t>nearest the in-house guard's own decision line -- exactly the cases where a second opinion can</a:t>
-            </a:r>
-          </a:p>
-          <a:p>
-            <a:r>
-              <a:t>change the answer. Escalating confident rows adds cost and no accuracy.</a:t>
+              <a:t>Exact numbers: 4B to 32B is +0.062, interval [+0.039, +0.084]. The remaining gap</a:t>
+            </a:r>
+          </a:p>
+          <a:p>
+            <a:r>
+              <a:t>to hosted from 32B is +0.066, interval [+0.043, +0.089]. So an eightfold</a:t>
+            </a:r>
+          </a:p>
+          <a:p>
+            <a:r>
+              <a:t>parameter increase bought slightly less than what was still missing.</a:t>
             </a:r>
           </a:p>
           <a:p/>
           <a:p>
             <a:r>
-              <a:t>Method, if challenged. One global false-alarm budget across the whole curve, so every point is</a:t>
-            </a:r>
-          </a:p>
-          <a:p>
-            <a:r>
-              <a:t>comparable and we are not buying recall by alarming more. The two guards are fused on RANK, not</a:t>
-            </a:r>
-          </a:p>
-          <a:p>
-            <a:r>
-              <a:t>raw score, because a logit margin and a self-reported 0-100 risk are not on the same scale. We</a:t>
-            </a:r>
-          </a:p>
-          <a:p>
-            <a:r>
-              <a:t>tried a per-band threshold first and rejected it: with a small escalated slice there are too few</a:t>
-            </a:r>
-          </a:p>
-          <a:p>
-            <a:r>
-              <a:t>deferred negatives to place a stable threshold, and the curve went non-monotone for purely</a:t>
-            </a:r>
-          </a:p>
-          <a:p>
-            <a:r>
-              <a:t>numerical reasons. The figure stops at 50% because past that you have outsourced the majority;</a:t>
-            </a:r>
-          </a:p>
-          <a:p>
-            <a:r>
-              <a:t>the upper rule shows where full escalation lands.</a:t>
+              <a:t>The 8B row is worth flagging honestly: it came out below 4B, but the interval</a:t>
+            </a:r>
+          </a:p>
+          <a:p>
+            <a:r>
+              <a:t>([-0.050, +0.001]) includes zero, so the correct statement is "no gain", not "worse".</a:t>
+            </a:r>
+          </a:p>
+          <a:p>
+            <a:r>
+              <a:t>Do not oversell it -- but do use it to make the point that size and guard quality are not</a:t>
+            </a:r>
+          </a:p>
+          <a:p>
+            <a:r>
+              <a:t>tightly coupled.</a:t>
             </a:r>
           </a:p>
           <a:p/>
           <a:p>
             <a:r>
-              <a:t>Cost is linear in the escalated share, so a fifth of the traffic is a fifth of the bill.</a:t>
+              <a:t>The build-plan consequence is the part an executive audience should leave with. A 32B guard on</a:t>
+            </a:r>
+          </a:p>
+          <a:p>
+            <a:r>
+              <a:t>every inbound request is a serving cost close to the thing we were trying to avoid. If we are</a:t>
+            </a:r>
+          </a:p>
+          <a:p>
+            <a:r>
+              <a:t>paying that, the hosted option deserves another look on cost grounds alone.</a:t>
             </a:r>
           </a:p>
         </p:txBody>
@@ -1780,96 +1936,70 @@
           <a:lstStyle/>
           <a:p>
             <a:r>
-              <a:t>This slide exists because "just ensemble the small models" is the most common suggestion in the</a:t>
-            </a:r>
-          </a:p>
-          <a:p>
-            <a:r>
-              <a:t>room, and it deserves a measured answer rather than an opinion.</a:t>
+              <a:t>This is the evidence slide for the rule on slide 3. One claim: the relationship is smooth and</a:t>
+            </a:r>
+          </a:p>
+          <a:p>
+            <a:r>
+              <a:t>steep early, so escalation is a dial rather than an architecture decision.</a:t>
             </a:r>
           </a:p>
           <a:p/>
           <a:p>
             <a:r>
-              <a:t>Row by row. Averaging the five tuning runs of a single guard is free -- the adapters already</a:t>
-            </a:r>
-          </a:p>
-          <a:p>
-            <a:r>
-              <a:t>exist -- and it reliably adds about +0.026. Do that regardless; it is also how the</a:t>
-            </a:r>
-          </a:p>
-          <a:p>
-            <a:r>
-              <a:t>tuned 32B recovers what fine-tuning cost it.</a:t>
+              <a:t>Mechanism, and it is why this works at all: the requests chosen for escalation are the ones</a:t>
+            </a:r>
+          </a:p>
+          <a:p>
+            <a:r>
+              <a:t>nearest the in-house guard's own decision line -- exactly the cases where a second opinion can</a:t>
+            </a:r>
+          </a:p>
+          <a:p>
+            <a:r>
+              <a:t>change the answer. Escalating confident rows adds cost and no accuracy.</a:t>
             </a:r>
           </a:p>
           <a:p/>
           <a:p>
             <a:r>
-              <a:t>Averaging all 18 guards equally is WORSE than just using the best one</a:t>
-            </a:r>
-          </a:p>
-          <a:p>
-            <a:r>
-              <a:t>(.791 against .834). With members that differ this much in</a:t>
-            </a:r>
-          </a:p>
-          <a:p>
-            <a:r>
-              <a:t>quality, equal weights dilute the strong ones. If someone proposes "ensemble everything", this</a:t>
-            </a:r>
-          </a:p>
-          <a:p>
-            <a:r>
-              <a:t>is the row to show them.</a:t>
+              <a:t>Method, if challenged. One global false-alarm budget across the whole curve, so every point is</a:t>
+            </a:r>
+          </a:p>
+          <a:p>
+            <a:r>
+              <a:t>comparable and we are not buying recall by alarming more. The two guards are fused on RANK, not</a:t>
+            </a:r>
+          </a:p>
+          <a:p>
+            <a:r>
+              <a:t>raw score, because a logit margin and a self-reported 0-100 risk are not on the same scale. We</a:t>
+            </a:r>
+          </a:p>
+          <a:p>
+            <a:r>
+              <a:t>tried a per-band threshold first and rejected it: with a small escalated slice there are too few</a:t>
+            </a:r>
+          </a:p>
+          <a:p>
+            <a:r>
+              <a:t>deferred negatives to place a stable threshold, and the curve went non-monotone for purely</a:t>
+            </a:r>
+          </a:p>
+          <a:p>
+            <a:r>
+              <a:t>numerical reasons. The figure stops at 50% because past that you have outsourced the majority;</a:t>
+            </a:r>
+          </a:p>
+          <a:p>
+            <a:r>
+              <a:t>the upper rule shows where full escalation lands.</a:t>
             </a:r>
           </a:p>
           <a:p/>
           <a:p>
             <a:r>
-              <a:t>A fitted weighted blend does beat any single guard, reaching .850, about a quarter of</a:t>
-            </a:r>
-          </a:p>
-          <a:p>
-            <a:r>
-              <a:t>the way to hosted. Two costs are easy to miss: 18 forward passes per request, and</a:t>
-            </a:r>
-          </a:p>
-          <a:p>
-            <a:r>
-              <a:t>it needs LABELLED in-domain data to fit the weights -- which is usually the thing a team reaching</a:t>
-            </a:r>
-          </a:p>
-          <a:p>
-            <a:r>
-              <a:t>for an ensemble does not have. We scored it 5-fold out-of-fold so it is not</a:t>
-            </a:r>
-          </a:p>
-          <a:p>
-            <a:r>
-              <a:t>grading its own homework, and its fitted weights include a negative coefficient on one guard,</a:t>
-            </a:r>
-          </a:p>
-          <a:p>
-            <a:r>
-              <a:t>which means it is exploiting error structure that may not survive a change of traffic.</a:t>
-            </a:r>
-          </a:p>
-          <a:p/>
-          <a:p>
-            <a:r>
-              <a:t>The last row is the point: escalating the uncertain fifth reaches 87%, beating the whole blend</a:t>
-            </a:r>
-          </a:p>
-          <a:p>
-            <a:r>
-              <a:t>at a fraction of the cost. So ensembling is not the route -- unless lane 1 applies and nothing</a:t>
-            </a:r>
-          </a:p>
-          <a:p>
-            <a:r>
-              <a:t>may leave, in which case it is the in-house ceiling and worth building.</a:t>
+              <a:t>Cost is linear in the escalated share, so a fifth of the traffic is a fifth of the bill.</a:t>
             </a:r>
           </a:p>
         </p:txBody>
@@ -1939,71 +2069,96 @@
           <a:lstStyle/>
           <a:p>
             <a:r>
-              <a:t>Work down the table, then land on the two callouts, which are the non-obvious costs.</a:t>
+              <a:t>This slide exists because "just ensemble the small models" is the most common suggestion in the</a:t>
+            </a:r>
+          </a:p>
+          <a:p>
+            <a:r>
+              <a:t>room, and it deserves a measured answer rather than an opinion.</a:t>
             </a:r>
           </a:p>
           <a:p/>
           <a:p>
             <a:r>
-              <a:t>Latency: 1,553 ms median measured under load at high concurrency, so treat it as</a:t>
-            </a:r>
-          </a:p>
-          <a:p>
-            <a:r>
-              <a:t>an upper bound for a single request; the small-model figure is a batched GPU measurement. Even</a:t>
-            </a:r>
-          </a:p>
-          <a:p>
-            <a:r>
-              <a:t>allowing for that, the ratio is roughly 77x.</a:t>
+              <a:t>Row by row. Averaging the five tuning runs of a single guard is free -- the adapters already</a:t>
+            </a:r>
+          </a:p>
+          <a:p>
+            <a:r>
+              <a:t>exist -- and it reliably adds about +0.026. Do that regardless; it is also how the</a:t>
+            </a:r>
+          </a:p>
+          <a:p>
+            <a:r>
+              <a:t>tuned 32B recovers what fine-tuning cost it.</a:t>
             </a:r>
           </a:p>
           <a:p/>
           <a:p>
             <a:r>
-              <a:t>Cost: billed tokens at public list prices. It excludes the amortised GPU on the self-hosted</a:t>
-            </a:r>
-          </a:p>
-          <a:p>
-            <a:r>
-              <a:t>side, which is exactly why the comparison is about where to spend rather than a like-for-like</a:t>
-            </a:r>
-          </a:p>
-          <a:p>
-            <a:r>
-              <a:t>price.</a:t>
+              <a:t>Averaging all 18 guards equally is WORSE than just using the best one</a:t>
+            </a:r>
+          </a:p>
+          <a:p>
+            <a:r>
+              <a:t>(.791 against .834). With members that differ this much in</a:t>
+            </a:r>
+          </a:p>
+          <a:p>
+            <a:r>
+              <a:t>quality, equal weights dilute the strong ones. If someone proposes "ensemble everything", this</a:t>
+            </a:r>
+          </a:p>
+          <a:p>
+            <a:r>
+              <a:t>is the row to show them.</a:t>
             </a:r>
           </a:p>
           <a:p/>
           <a:p>
             <a:r>
-              <a:t>The refusal finding is the one to say slowly. We saw a set of prompts refused by the provider's</a:t>
-            </a:r>
-          </a:p>
-          <a:p>
-            <a:r>
-              <a:t>own input filter before the model ever saw them, and the refusals were not reproducible --</a:t>
-            </a:r>
-          </a:p>
-          <a:p>
-            <a:r>
-              <a:t>different runs, different outcomes, no row refused every time. For a control that has to be</a:t>
-            </a:r>
-          </a:p>
-          <a:p>
-            <a:r>
-              <a:t>auditable, "sometimes declines, for reasons we cannot inspect or appeal" is a compliance</a:t>
-            </a:r>
-          </a:p>
-          <a:p>
-            <a:r>
-              <a:t>property, not a technical footnote.</a:t>
+              <a:t>A fitted weighted blend does beat any single guard, reaching .850, about a quarter of</a:t>
+            </a:r>
+          </a:p>
+          <a:p>
+            <a:r>
+              <a:t>the way to hosted. Two costs are easy to miss: 18 forward passes per request, and</a:t>
+            </a:r>
+          </a:p>
+          <a:p>
+            <a:r>
+              <a:t>it needs LABELLED in-domain data to fit the weights -- which is usually the thing a team reaching</a:t>
+            </a:r>
+          </a:p>
+          <a:p>
+            <a:r>
+              <a:t>for an ensemble does not have. We scored it 5-fold out-of-fold so it is not</a:t>
+            </a:r>
+          </a:p>
+          <a:p>
+            <a:r>
+              <a:t>grading its own homework, and its fitted weights include a negative coefficient on one guard,</a:t>
+            </a:r>
+          </a:p>
+          <a:p>
+            <a:r>
+              <a:t>which means it is exploiting error structure that may not survive a change of traffic.</a:t>
             </a:r>
           </a:p>
           <a:p/>
           <a:p>
             <a:r>
-              <a:t>Close on the scoping sentence. The answer is a split, and this slide is why.</a:t>
+              <a:t>The last row is the point: escalating the uncertain fifth reaches 87%, beating the whole blend</a:t>
+            </a:r>
+          </a:p>
+          <a:p>
+            <a:r>
+              <a:t>at a fraction of the cost. So ensembling is not the route -- unless lane 1 applies and nothing</a:t>
+            </a:r>
+          </a:p>
+          <a:p>
+            <a:r>
+              <a:t>may leave, in which case it is the in-house ceiling and worth building.</a:t>
             </a:r>
           </a:p>
         </p:txBody>
@@ -5533,7 +5688,7 @@
                 </a:solidFill>
                 <a:latin typeface="Calibri"/>
               </a:rPr>
-              <a:t>THE USEFUL FINDING</a:t>
+              <a:t>WHAT HOSTED COSTS</a:t>
             </a:r>
           </a:p>
         </p:txBody>
@@ -5575,7 +5730,7 @@
                 </a:solidFill>
                 <a:latin typeface="Cambria"/>
               </a:rPr>
-              <a:t>If we must self-host, a bigger untuned model beats a tuned small one</a:t>
+              <a:t>The accuracy is real. So is the bill, the latency, and the loss of control</a:t>
             </a:r>
           </a:p>
         </p:txBody>
@@ -5614,146 +5769,21 @@
                 </a:solidFill>
                 <a:latin typeface="Calibri"/>
               </a:rPr>
-              <a:t>Because tuning's cost lands on exactly the traffic a guardrail exists to catch</a:t>
-            </a:r>
-          </a:p>
-        </p:txBody>
-      </p:sp>
-      <p:sp>
-        <p:nvSpPr>
-          <p:cNvPr id="7" name="TextBox 6"/>
-          <p:cNvSpPr txBox="1"/>
-          <p:nvPr/>
-        </p:nvSpPr>
-        <p:spPr>
-          <a:xfrm>
-            <a:off x="777240" y="2295144"/>
-            <a:ext cx="5112867" cy="2651760"/>
-          </a:xfrm>
-          <a:prstGeom prst="rect">
-            <a:avLst/>
-          </a:prstGeom>
-          <a:noFill/>
-        </p:spPr>
-        <p:txBody>
-          <a:bodyPr wrap="square" anchor="t" lIns="0" rIns="0" tIns="0" bIns="0">
-            <a:spAutoFit/>
-          </a:bodyPr>
-          <a:lstStyle/>
-          <a:p>
-            <a:pPr algn="l">
-              <a:spcAft>
-                <a:spcPts val="1200"/>
-              </a:spcAft>
-            </a:pPr>
-            <a:r>
-              <a:rPr sz="1450" b="1" i="0">
-                <a:solidFill>
-                  <a:srgbClr val="E0564F"/>
-                </a:solidFill>
-                <a:latin typeface="Calibri"/>
-              </a:rPr>
-              <a:t>—  </a:t>
-            </a:r>
-            <a:r>
-              <a:rPr sz="1450" b="1" i="0">
-                <a:solidFill>
-                  <a:srgbClr val="EEF2F8"/>
-                </a:solidFill>
-                <a:latin typeface="Calibri"/>
-              </a:rPr>
-              <a:t>Tuning a small model. </a:t>
-            </a:r>
-            <a:r>
-              <a:rPr sz="1450" b="0" i="0">
-                <a:solidFill>
-                  <a:srgbClr val="9DAFC7"/>
-                </a:solidFill>
-                <a:latin typeface="Calibri"/>
-              </a:rPr>
-              <a:t>Large gain on familiar traffic, and it gives back accuracy on unfamiliar traffic — which is where novel attacks arrive.</a:t>
-            </a:r>
-          </a:p>
-          <a:p>
-            <a:pPr algn="l">
-              <a:spcAft>
-                <a:spcPts val="1200"/>
-              </a:spcAft>
-            </a:pPr>
-            <a:r>
-              <a:rPr sz="1450" b="1" i="0">
-                <a:solidFill>
-                  <a:srgbClr val="E0564F"/>
-                </a:solidFill>
-                <a:latin typeface="Calibri"/>
-              </a:rPr>
-              <a:t>—  </a:t>
-            </a:r>
-            <a:r>
-              <a:rPr sz="1450" b="1" i="0">
-                <a:solidFill>
-                  <a:srgbClr val="EEF2F8"/>
-                </a:solidFill>
-                <a:latin typeface="Calibri"/>
-              </a:rPr>
-              <a:t>A bigger untuned model. </a:t>
-            </a:r>
-            <a:r>
-              <a:rPr sz="1450" b="0" i="0">
-                <a:solidFill>
-                  <a:srgbClr val="9DAFC7"/>
-                </a:solidFill>
-                <a:latin typeface="Calibri"/>
-              </a:rPr>
-              <a:t>Recovers most of that same gain on familiar traffic, and holds its accuracy on unfamiliar traffic.</a:t>
-            </a:r>
-          </a:p>
-          <a:p>
-            <a:pPr algn="l">
-              <a:spcAft>
-                <a:spcPts val="1200"/>
-              </a:spcAft>
-            </a:pPr>
-            <a:r>
-              <a:rPr sz="1450" b="1" i="0">
-                <a:solidFill>
-                  <a:srgbClr val="E0564F"/>
-                </a:solidFill>
-                <a:latin typeface="Calibri"/>
-              </a:rPr>
-              <a:t>—  </a:t>
-            </a:r>
-            <a:r>
-              <a:rPr sz="1450" b="1" i="0">
-                <a:solidFill>
-                  <a:srgbClr val="EEF2F8"/>
-                </a:solidFill>
-                <a:latin typeface="Calibri"/>
-              </a:rPr>
-              <a:t>So for a guardrail specifically. </a:t>
-            </a:r>
-            <a:r>
-              <a:rPr sz="1450" b="0" i="0">
-                <a:solidFill>
-                  <a:srgbClr val="9DAFC7"/>
-                </a:solidFill>
-                <a:latin typeface="Calibri"/>
-              </a:rPr>
-              <a:t>Prefer spending on a stronger base model over spending on a tuning programme.</a:t>
-            </a:r>
-          </a:p>
-        </p:txBody>
-      </p:sp>
-      <p:sp>
-        <p:nvSpPr>
-          <p:cNvPr id="8" name="Rectangle 7"/>
+              <a:t>Four costs, three of which do not appear on an invoice</a:t>
+            </a:r>
+          </a:p>
+        </p:txBody>
+      </p:sp>
+      <p:sp>
+        <p:nvSpPr>
+          <p:cNvPr id="7" name="Rectangle 6"/>
           <p:cNvSpPr/>
           <p:nvPr/>
         </p:nvSpPr>
         <p:spPr>
           <a:xfrm>
-            <a:off x="6301587" y="2295144"/>
-            <a:ext cx="5112867" cy="1554480"/>
+            <a:off x="777240" y="2331720"/>
+            <a:ext cx="5112867" cy="420624"/>
           </a:xfrm>
           <a:prstGeom prst="rect">
             <a:avLst/>
@@ -5792,78 +5822,137 @@
       </p:sp>
       <p:sp>
         <p:nvSpPr>
+          <p:cNvPr id="8" name="TextBox 7"/>
+          <p:cNvSpPr txBox="1"/>
+          <p:nvPr/>
+        </p:nvSpPr>
+        <p:spPr>
+          <a:xfrm>
+            <a:off x="905256" y="2331720"/>
+            <a:ext cx="1993629" cy="420624"/>
+          </a:xfrm>
+          <a:prstGeom prst="rect">
+            <a:avLst/>
+          </a:prstGeom>
+          <a:noFill/>
+        </p:spPr>
+        <p:txBody>
+          <a:bodyPr wrap="square" anchor="ctr" lIns="0" rIns="0" tIns="0" bIns="0">
+            <a:spAutoFit/>
+          </a:bodyPr>
+          <a:lstStyle/>
+          <a:p>
+            <a:pPr algn="l">
+              <a:spcAft>
+                <a:spcPts val="0"/>
+              </a:spcAft>
+            </a:pPr>
+            <a:r>
+              <a:rPr sz="960" b="1" i="0">
+                <a:solidFill>
+                  <a:srgbClr val="BFD8F5"/>
+                </a:solidFill>
+                <a:latin typeface="Calibri"/>
+              </a:rPr>
+              <a:t/>
+            </a:r>
+          </a:p>
+        </p:txBody>
+      </p:sp>
+      <p:sp>
+        <p:nvSpPr>
           <p:cNvPr id="9" name="TextBox 8"/>
           <p:cNvSpPr txBox="1"/>
           <p:nvPr/>
         </p:nvSpPr>
         <p:spPr>
           <a:xfrm>
-            <a:off x="6539331" y="2441448"/>
-            <a:ext cx="4637379" cy="1261872"/>
-          </a:xfrm>
-          <a:prstGeom prst="rect">
-            <a:avLst/>
-          </a:prstGeom>
-          <a:noFill/>
-        </p:spPr>
-        <p:txBody>
-          <a:bodyPr wrap="square" anchor="t" lIns="0" rIns="0" tIns="0" bIns="0">
+            <a:off x="3154917" y="2331720"/>
+            <a:ext cx="1175570" cy="420624"/>
+          </a:xfrm>
+          <a:prstGeom prst="rect">
+            <a:avLst/>
+          </a:prstGeom>
+          <a:noFill/>
+        </p:spPr>
+        <p:txBody>
+          <a:bodyPr wrap="square" anchor="ctr" lIns="0" rIns="0" tIns="0" bIns="0">
             <a:spAutoFit/>
           </a:bodyPr>
           <a:lstStyle/>
           <a:p>
-            <a:pPr algn="l">
-              <a:spcAft>
-                <a:spcPts val="500"/>
-              </a:spcAft>
-            </a:pPr>
-            <a:r>
-              <a:rPr sz="980" b="1" i="0" spc="110">
-                <a:solidFill>
-                  <a:srgbClr val="8FD3B6"/>
-                </a:solidFill>
-                <a:latin typeface="Calibri"/>
-              </a:rPr>
-              <a:t>WHY THIS IS WORTH MONEY</a:t>
-            </a:r>
-          </a:p>
-          <a:p>
-            <a:pPr algn="l">
-              <a:lnSpc>
-                <a:spcPct val="106000"/>
-              </a:lnSpc>
+            <a:pPr algn="ctr">
               <a:spcAft>
                 <a:spcPts val="0"/>
               </a:spcAft>
             </a:pPr>
             <a:r>
-              <a:rPr sz="1100" b="0" i="0">
-                <a:solidFill>
-                  <a:srgbClr val="9DAFC7"/>
-                </a:solidFill>
-                <a:latin typeface="Calibri"/>
-              </a:rPr>
-              <a:t>It reverses the intuitive plan. Tuning looks like the cheap, targeted option; measured on held-out traffic it is the one that quietly costs you coverage.</a:t>
-            </a:r>
-          </a:p>
-        </p:txBody>
-      </p:sp>
-      <p:sp>
-        <p:nvSpPr>
-          <p:cNvPr id="10" name="Rectangle 9"/>
+              <a:rPr sz="960" b="1" i="0">
+                <a:solidFill>
+                  <a:srgbClr val="BFD8F5"/>
+                </a:solidFill>
+                <a:latin typeface="Calibri"/>
+              </a:rPr>
+              <a:t>Self-hosted small</a:t>
+            </a:r>
+          </a:p>
+        </p:txBody>
+      </p:sp>
+      <p:sp>
+        <p:nvSpPr>
+          <p:cNvPr id="10" name="TextBox 9"/>
+          <p:cNvSpPr txBox="1"/>
+          <p:nvPr/>
+        </p:nvSpPr>
+        <p:spPr>
+          <a:xfrm>
+            <a:off x="4586519" y="2331720"/>
+            <a:ext cx="1175570" cy="420624"/>
+          </a:xfrm>
+          <a:prstGeom prst="rect">
+            <a:avLst/>
+          </a:prstGeom>
+          <a:noFill/>
+        </p:spPr>
+        <p:txBody>
+          <a:bodyPr wrap="square" anchor="ctr" lIns="0" rIns="0" tIns="0" bIns="0">
+            <a:spAutoFit/>
+          </a:bodyPr>
+          <a:lstStyle/>
+          <a:p>
+            <a:pPr algn="ctr">
+              <a:spcAft>
+                <a:spcPts val="0"/>
+              </a:spcAft>
+            </a:pPr>
+            <a:r>
+              <a:rPr sz="960" b="1" i="0">
+                <a:solidFill>
+                  <a:srgbClr val="BFD8F5"/>
+                </a:solidFill>
+                <a:latin typeface="Calibri"/>
+              </a:rPr>
+              <a:t>Hosted frontier</a:t>
+            </a:r>
+          </a:p>
+        </p:txBody>
+      </p:sp>
+      <p:sp>
+        <p:nvSpPr>
+          <p:cNvPr id="11" name="Rectangle 10"/>
           <p:cNvSpPr/>
           <p:nvPr/>
         </p:nvSpPr>
         <p:spPr>
           <a:xfrm>
-            <a:off x="6301587" y="3995928"/>
-            <a:ext cx="5112867" cy="1554480"/>
+            <a:off x="777240" y="2752344"/>
+            <a:ext cx="5112867" cy="420624"/>
           </a:xfrm>
           <a:prstGeom prst="rect">
             <a:avLst/>
           </a:prstGeom>
           <a:solidFill>
-            <a:srgbClr val="18263D"/>
+            <a:srgbClr val="0C1424"/>
           </a:solidFill>
           <a:ln w="9525">
             <a:solidFill>
@@ -5896,14 +5985,666 @@
       </p:sp>
       <p:sp>
         <p:nvSpPr>
-          <p:cNvPr id="11" name="TextBox 10"/>
+          <p:cNvPr id="12" name="TextBox 11"/>
           <p:cNvSpPr txBox="1"/>
           <p:nvPr/>
         </p:nvSpPr>
         <p:spPr>
           <a:xfrm>
-            <a:off x="6539331" y="4142232"/>
-            <a:ext cx="4637379" cy="1261872"/>
+            <a:off x="905256" y="2752344"/>
+            <a:ext cx="1993629" cy="420624"/>
+          </a:xfrm>
+          <a:prstGeom prst="rect">
+            <a:avLst/>
+          </a:prstGeom>
+          <a:noFill/>
+        </p:spPr>
+        <p:txBody>
+          <a:bodyPr wrap="square" anchor="ctr" lIns="0" rIns="0" tIns="0" bIns="0">
+            <a:spAutoFit/>
+          </a:bodyPr>
+          <a:lstStyle/>
+          <a:p>
+            <a:pPr algn="l">
+              <a:spcAft>
+                <a:spcPts val="0"/>
+              </a:spcAft>
+            </a:pPr>
+            <a:r>
+              <a:rPr sz="960" b="1" i="0">
+                <a:solidFill>
+                  <a:srgbClr val="9DAFC7"/>
+                </a:solidFill>
+                <a:latin typeface="Calibri"/>
+              </a:rPr>
+              <a:t>Median latency</a:t>
+            </a:r>
+          </a:p>
+        </p:txBody>
+      </p:sp>
+      <p:sp>
+        <p:nvSpPr>
+          <p:cNvPr id="13" name="TextBox 12"/>
+          <p:cNvSpPr txBox="1"/>
+          <p:nvPr/>
+        </p:nvSpPr>
+        <p:spPr>
+          <a:xfrm>
+            <a:off x="3154917" y="2752344"/>
+            <a:ext cx="1175570" cy="420624"/>
+          </a:xfrm>
+          <a:prstGeom prst="rect">
+            <a:avLst/>
+          </a:prstGeom>
+          <a:noFill/>
+        </p:spPr>
+        <p:txBody>
+          <a:bodyPr wrap="square" anchor="ctr" lIns="0" rIns="0" tIns="0" bIns="0">
+            <a:spAutoFit/>
+          </a:bodyPr>
+          <a:lstStyle/>
+          <a:p>
+            <a:pPr algn="ctr">
+              <a:spcAft>
+                <a:spcPts val="0"/>
+              </a:spcAft>
+            </a:pPr>
+            <a:r>
+              <a:rPr sz="960" b="0" i="0">
+                <a:solidFill>
+                  <a:srgbClr val="9DAFC7"/>
+                </a:solidFill>
+                <a:latin typeface="Calibri"/>
+              </a:rPr>
+              <a:t>10–25 ms</a:t>
+            </a:r>
+          </a:p>
+        </p:txBody>
+      </p:sp>
+      <p:sp>
+        <p:nvSpPr>
+          <p:cNvPr id="14" name="TextBox 13"/>
+          <p:cNvSpPr txBox="1"/>
+          <p:nvPr/>
+        </p:nvSpPr>
+        <p:spPr>
+          <a:xfrm>
+            <a:off x="4586519" y="2752344"/>
+            <a:ext cx="1175570" cy="420624"/>
+          </a:xfrm>
+          <a:prstGeom prst="rect">
+            <a:avLst/>
+          </a:prstGeom>
+          <a:noFill/>
+        </p:spPr>
+        <p:txBody>
+          <a:bodyPr wrap="square" anchor="ctr" lIns="0" rIns="0" tIns="0" bIns="0">
+            <a:spAutoFit/>
+          </a:bodyPr>
+          <a:lstStyle/>
+          <a:p>
+            <a:pPr algn="ctr">
+              <a:spcAft>
+                <a:spcPts val="0"/>
+              </a:spcAft>
+            </a:pPr>
+            <a:r>
+              <a:rPr sz="960" b="0" i="0">
+                <a:solidFill>
+                  <a:srgbClr val="9DAFC7"/>
+                </a:solidFill>
+                <a:latin typeface="Calibri"/>
+              </a:rPr>
+              <a:t>~1,553 ms</a:t>
+            </a:r>
+          </a:p>
+        </p:txBody>
+      </p:sp>
+      <p:sp>
+        <p:nvSpPr>
+          <p:cNvPr id="15" name="Rectangle 14"/>
+          <p:cNvSpPr/>
+          <p:nvPr/>
+        </p:nvSpPr>
+        <p:spPr>
+          <a:xfrm>
+            <a:off x="777240" y="3172968"/>
+            <a:ext cx="5112867" cy="420624"/>
+          </a:xfrm>
+          <a:prstGeom prst="rect">
+            <a:avLst/>
+          </a:prstGeom>
+          <a:solidFill>
+            <a:srgbClr val="18263D"/>
+          </a:solidFill>
+          <a:ln w="9525">
+            <a:solidFill>
+              <a:srgbClr val="1E3050"/>
+            </a:solidFill>
+          </a:ln>
+          <a:effectLst/>
+        </p:spPr>
+        <p:style>
+          <a:lnRef idx="1">
+            <a:schemeClr val="accent1"/>
+          </a:lnRef>
+          <a:fillRef idx="3">
+            <a:schemeClr val="accent1"/>
+          </a:fillRef>
+          <a:effectRef idx="2">
+            <a:schemeClr val="accent1"/>
+          </a:effectRef>
+          <a:fontRef idx="minor">
+            <a:schemeClr val="lt1"/>
+          </a:fontRef>
+        </p:style>
+        <p:txBody>
+          <a:bodyPr rtlCol="0" anchor="ctr" wrap="square"/>
+          <a:lstStyle/>
+          <a:p>
+            <a:pPr algn="ctr"/>
+          </a:p>
+        </p:txBody>
+      </p:sp>
+      <p:sp>
+        <p:nvSpPr>
+          <p:cNvPr id="16" name="TextBox 15"/>
+          <p:cNvSpPr txBox="1"/>
+          <p:nvPr/>
+        </p:nvSpPr>
+        <p:spPr>
+          <a:xfrm>
+            <a:off x="905256" y="3172968"/>
+            <a:ext cx="1993629" cy="420624"/>
+          </a:xfrm>
+          <a:prstGeom prst="rect">
+            <a:avLst/>
+          </a:prstGeom>
+          <a:noFill/>
+        </p:spPr>
+        <p:txBody>
+          <a:bodyPr wrap="square" anchor="ctr" lIns="0" rIns="0" tIns="0" bIns="0">
+            <a:spAutoFit/>
+          </a:bodyPr>
+          <a:lstStyle/>
+          <a:p>
+            <a:pPr algn="l">
+              <a:spcAft>
+                <a:spcPts val="0"/>
+              </a:spcAft>
+            </a:pPr>
+            <a:r>
+              <a:rPr sz="960" b="1" i="0">
+                <a:solidFill>
+                  <a:srgbClr val="9DAFC7"/>
+                </a:solidFill>
+                <a:latin typeface="Calibri"/>
+              </a:rPr>
+              <a:t>Cost per 1k prompts</a:t>
+            </a:r>
+          </a:p>
+        </p:txBody>
+      </p:sp>
+      <p:sp>
+        <p:nvSpPr>
+          <p:cNvPr id="17" name="TextBox 16"/>
+          <p:cNvSpPr txBox="1"/>
+          <p:nvPr/>
+        </p:nvSpPr>
+        <p:spPr>
+          <a:xfrm>
+            <a:off x="3154917" y="3172968"/>
+            <a:ext cx="1175570" cy="420624"/>
+          </a:xfrm>
+          <a:prstGeom prst="rect">
+            <a:avLst/>
+          </a:prstGeom>
+          <a:noFill/>
+        </p:spPr>
+        <p:txBody>
+          <a:bodyPr wrap="square" anchor="ctr" lIns="0" rIns="0" tIns="0" bIns="0">
+            <a:spAutoFit/>
+          </a:bodyPr>
+          <a:lstStyle/>
+          <a:p>
+            <a:pPr algn="ctr">
+              <a:spcAft>
+                <a:spcPts val="0"/>
+              </a:spcAft>
+            </a:pPr>
+            <a:r>
+              <a:rPr sz="960" b="0" i="0">
+                <a:solidFill>
+                  <a:srgbClr val="9DAFC7"/>
+                </a:solidFill>
+                <a:latin typeface="Calibri"/>
+              </a:rPr>
+              <a:t>GPU you own</a:t>
+            </a:r>
+          </a:p>
+        </p:txBody>
+      </p:sp>
+      <p:sp>
+        <p:nvSpPr>
+          <p:cNvPr id="18" name="TextBox 17"/>
+          <p:cNvSpPr txBox="1"/>
+          <p:nvPr/>
+        </p:nvSpPr>
+        <p:spPr>
+          <a:xfrm>
+            <a:off x="4586519" y="3172968"/>
+            <a:ext cx="1175570" cy="420624"/>
+          </a:xfrm>
+          <a:prstGeom prst="rect">
+            <a:avLst/>
+          </a:prstGeom>
+          <a:noFill/>
+        </p:spPr>
+        <p:txBody>
+          <a:bodyPr wrap="square" anchor="ctr" lIns="0" rIns="0" tIns="0" bIns="0">
+            <a:spAutoFit/>
+          </a:bodyPr>
+          <a:lstStyle/>
+          <a:p>
+            <a:pPr algn="ctr">
+              <a:spcAft>
+                <a:spcPts val="0"/>
+              </a:spcAft>
+            </a:pPr>
+            <a:r>
+              <a:rPr sz="960" b="0" i="0">
+                <a:solidFill>
+                  <a:srgbClr val="9DAFC7"/>
+                </a:solidFill>
+                <a:latin typeface="Calibri"/>
+              </a:rPr>
+              <a:t>$0.80</a:t>
+            </a:r>
+          </a:p>
+        </p:txBody>
+      </p:sp>
+      <p:sp>
+        <p:nvSpPr>
+          <p:cNvPr id="19" name="Rectangle 18"/>
+          <p:cNvSpPr/>
+          <p:nvPr/>
+        </p:nvSpPr>
+        <p:spPr>
+          <a:xfrm>
+            <a:off x="777240" y="3593592"/>
+            <a:ext cx="5112867" cy="420624"/>
+          </a:xfrm>
+          <a:prstGeom prst="rect">
+            <a:avLst/>
+          </a:prstGeom>
+          <a:solidFill>
+            <a:srgbClr val="0C1424"/>
+          </a:solidFill>
+          <a:ln w="9525">
+            <a:solidFill>
+              <a:srgbClr val="1E3050"/>
+            </a:solidFill>
+          </a:ln>
+          <a:effectLst/>
+        </p:spPr>
+        <p:style>
+          <a:lnRef idx="1">
+            <a:schemeClr val="accent1"/>
+          </a:lnRef>
+          <a:fillRef idx="3">
+            <a:schemeClr val="accent1"/>
+          </a:fillRef>
+          <a:effectRef idx="2">
+            <a:schemeClr val="accent1"/>
+          </a:effectRef>
+          <a:fontRef idx="minor">
+            <a:schemeClr val="lt1"/>
+          </a:fontRef>
+        </p:style>
+        <p:txBody>
+          <a:bodyPr rtlCol="0" anchor="ctr" wrap="square"/>
+          <a:lstStyle/>
+          <a:p>
+            <a:pPr algn="ctr"/>
+          </a:p>
+        </p:txBody>
+      </p:sp>
+      <p:sp>
+        <p:nvSpPr>
+          <p:cNvPr id="20" name="TextBox 19"/>
+          <p:cNvSpPr txBox="1"/>
+          <p:nvPr/>
+        </p:nvSpPr>
+        <p:spPr>
+          <a:xfrm>
+            <a:off x="905256" y="3593592"/>
+            <a:ext cx="1993629" cy="420624"/>
+          </a:xfrm>
+          <a:prstGeom prst="rect">
+            <a:avLst/>
+          </a:prstGeom>
+          <a:noFill/>
+        </p:spPr>
+        <p:txBody>
+          <a:bodyPr wrap="square" anchor="ctr" lIns="0" rIns="0" tIns="0" bIns="0">
+            <a:spAutoFit/>
+          </a:bodyPr>
+          <a:lstStyle/>
+          <a:p>
+            <a:pPr algn="l">
+              <a:spcAft>
+                <a:spcPts val="0"/>
+              </a:spcAft>
+            </a:pPr>
+            <a:r>
+              <a:rPr sz="960" b="1" i="0">
+                <a:solidFill>
+                  <a:srgbClr val="9DAFC7"/>
+                </a:solidFill>
+                <a:latin typeface="Calibri"/>
+              </a:rPr>
+              <a:t>Prompt leaves our network</a:t>
+            </a:r>
+          </a:p>
+        </p:txBody>
+      </p:sp>
+      <p:sp>
+        <p:nvSpPr>
+          <p:cNvPr id="21" name="TextBox 20"/>
+          <p:cNvSpPr txBox="1"/>
+          <p:nvPr/>
+        </p:nvSpPr>
+        <p:spPr>
+          <a:xfrm>
+            <a:off x="3154917" y="3593592"/>
+            <a:ext cx="1175570" cy="420624"/>
+          </a:xfrm>
+          <a:prstGeom prst="rect">
+            <a:avLst/>
+          </a:prstGeom>
+          <a:noFill/>
+        </p:spPr>
+        <p:txBody>
+          <a:bodyPr wrap="square" anchor="ctr" lIns="0" rIns="0" tIns="0" bIns="0">
+            <a:spAutoFit/>
+          </a:bodyPr>
+          <a:lstStyle/>
+          <a:p>
+            <a:pPr algn="ctr">
+              <a:spcAft>
+                <a:spcPts val="0"/>
+              </a:spcAft>
+            </a:pPr>
+            <a:r>
+              <a:rPr sz="960" b="0" i="0">
+                <a:solidFill>
+                  <a:srgbClr val="9DAFC7"/>
+                </a:solidFill>
+                <a:latin typeface="Calibri"/>
+              </a:rPr>
+              <a:t>no</a:t>
+            </a:r>
+          </a:p>
+        </p:txBody>
+      </p:sp>
+      <p:sp>
+        <p:nvSpPr>
+          <p:cNvPr id="22" name="TextBox 21"/>
+          <p:cNvSpPr txBox="1"/>
+          <p:nvPr/>
+        </p:nvSpPr>
+        <p:spPr>
+          <a:xfrm>
+            <a:off x="4586519" y="3593592"/>
+            <a:ext cx="1175570" cy="420624"/>
+          </a:xfrm>
+          <a:prstGeom prst="rect">
+            <a:avLst/>
+          </a:prstGeom>
+          <a:noFill/>
+        </p:spPr>
+        <p:txBody>
+          <a:bodyPr wrap="square" anchor="ctr" lIns="0" rIns="0" tIns="0" bIns="0">
+            <a:spAutoFit/>
+          </a:bodyPr>
+          <a:lstStyle/>
+          <a:p>
+            <a:pPr algn="ctr">
+              <a:spcAft>
+                <a:spcPts val="0"/>
+              </a:spcAft>
+            </a:pPr>
+            <a:r>
+              <a:rPr sz="960" b="0" i="0">
+                <a:solidFill>
+                  <a:srgbClr val="9DAFC7"/>
+                </a:solidFill>
+                <a:latin typeface="Calibri"/>
+              </a:rPr>
+              <a:t>yes</a:t>
+            </a:r>
+          </a:p>
+        </p:txBody>
+      </p:sp>
+      <p:sp>
+        <p:nvSpPr>
+          <p:cNvPr id="23" name="Rectangle 22"/>
+          <p:cNvSpPr/>
+          <p:nvPr/>
+        </p:nvSpPr>
+        <p:spPr>
+          <a:xfrm>
+            <a:off x="777240" y="4014216"/>
+            <a:ext cx="5112867" cy="420624"/>
+          </a:xfrm>
+          <a:prstGeom prst="rect">
+            <a:avLst/>
+          </a:prstGeom>
+          <a:solidFill>
+            <a:srgbClr val="18263D"/>
+          </a:solidFill>
+          <a:ln w="9525">
+            <a:solidFill>
+              <a:srgbClr val="1E3050"/>
+            </a:solidFill>
+          </a:ln>
+          <a:effectLst/>
+        </p:spPr>
+        <p:style>
+          <a:lnRef idx="1">
+            <a:schemeClr val="accent1"/>
+          </a:lnRef>
+          <a:fillRef idx="3">
+            <a:schemeClr val="accent1"/>
+          </a:fillRef>
+          <a:effectRef idx="2">
+            <a:schemeClr val="accent1"/>
+          </a:effectRef>
+          <a:fontRef idx="minor">
+            <a:schemeClr val="lt1"/>
+          </a:fontRef>
+        </p:style>
+        <p:txBody>
+          <a:bodyPr rtlCol="0" anchor="ctr" wrap="square"/>
+          <a:lstStyle/>
+          <a:p>
+            <a:pPr algn="ctr"/>
+          </a:p>
+        </p:txBody>
+      </p:sp>
+      <p:sp>
+        <p:nvSpPr>
+          <p:cNvPr id="24" name="TextBox 23"/>
+          <p:cNvSpPr txBox="1"/>
+          <p:nvPr/>
+        </p:nvSpPr>
+        <p:spPr>
+          <a:xfrm>
+            <a:off x="905256" y="4014216"/>
+            <a:ext cx="1993629" cy="420624"/>
+          </a:xfrm>
+          <a:prstGeom prst="rect">
+            <a:avLst/>
+          </a:prstGeom>
+          <a:noFill/>
+        </p:spPr>
+        <p:txBody>
+          <a:bodyPr wrap="square" anchor="ctr" lIns="0" rIns="0" tIns="0" bIns="0">
+            <a:spAutoFit/>
+          </a:bodyPr>
+          <a:lstStyle/>
+          <a:p>
+            <a:pPr algn="l">
+              <a:spcAft>
+                <a:spcPts val="0"/>
+              </a:spcAft>
+            </a:pPr>
+            <a:r>
+              <a:rPr sz="960" b="1" i="0">
+                <a:solidFill>
+                  <a:srgbClr val="9DAFC7"/>
+                </a:solidFill>
+                <a:latin typeface="Calibri"/>
+              </a:rPr>
+              <a:t>We choose the alarm rate</a:t>
+            </a:r>
+          </a:p>
+        </p:txBody>
+      </p:sp>
+      <p:sp>
+        <p:nvSpPr>
+          <p:cNvPr id="25" name="TextBox 24"/>
+          <p:cNvSpPr txBox="1"/>
+          <p:nvPr/>
+        </p:nvSpPr>
+        <p:spPr>
+          <a:xfrm>
+            <a:off x="3154917" y="4014216"/>
+            <a:ext cx="1175570" cy="420624"/>
+          </a:xfrm>
+          <a:prstGeom prst="rect">
+            <a:avLst/>
+          </a:prstGeom>
+          <a:noFill/>
+        </p:spPr>
+        <p:txBody>
+          <a:bodyPr wrap="square" anchor="ctr" lIns="0" rIns="0" tIns="0" bIns="0">
+            <a:spAutoFit/>
+          </a:bodyPr>
+          <a:lstStyle/>
+          <a:p>
+            <a:pPr algn="ctr">
+              <a:spcAft>
+                <a:spcPts val="0"/>
+              </a:spcAft>
+            </a:pPr>
+            <a:r>
+              <a:rPr sz="960" b="0" i="0">
+                <a:solidFill>
+                  <a:srgbClr val="9DAFC7"/>
+                </a:solidFill>
+                <a:latin typeface="Calibri"/>
+              </a:rPr>
+              <a:t>exactly</a:t>
+            </a:r>
+          </a:p>
+        </p:txBody>
+      </p:sp>
+      <p:sp>
+        <p:nvSpPr>
+          <p:cNvPr id="26" name="TextBox 25"/>
+          <p:cNvSpPr txBox="1"/>
+          <p:nvPr/>
+        </p:nvSpPr>
+        <p:spPr>
+          <a:xfrm>
+            <a:off x="4586519" y="4014216"/>
+            <a:ext cx="1175570" cy="420624"/>
+          </a:xfrm>
+          <a:prstGeom prst="rect">
+            <a:avLst/>
+          </a:prstGeom>
+          <a:noFill/>
+        </p:spPr>
+        <p:txBody>
+          <a:bodyPr wrap="square" anchor="ctr" lIns="0" rIns="0" tIns="0" bIns="0">
+            <a:spAutoFit/>
+          </a:bodyPr>
+          <a:lstStyle/>
+          <a:p>
+            <a:pPr algn="ctr">
+              <a:spcAft>
+                <a:spcPts val="0"/>
+              </a:spcAft>
+            </a:pPr>
+            <a:r>
+              <a:rPr sz="960" b="0" i="0">
+                <a:solidFill>
+                  <a:srgbClr val="9DAFC7"/>
+                </a:solidFill>
+                <a:latin typeface="Calibri"/>
+              </a:rPr>
+              <a:t>approximately</a:t>
+            </a:r>
+          </a:p>
+        </p:txBody>
+      </p:sp>
+      <p:sp>
+        <p:nvSpPr>
+          <p:cNvPr id="27" name="Rectangle 26"/>
+          <p:cNvSpPr/>
+          <p:nvPr/>
+        </p:nvSpPr>
+        <p:spPr>
+          <a:xfrm>
+            <a:off x="6301587" y="2331720"/>
+            <a:ext cx="5112867" cy="1481328"/>
+          </a:xfrm>
+          <a:prstGeom prst="rect">
+            <a:avLst/>
+          </a:prstGeom>
+          <a:solidFill>
+            <a:srgbClr val="331A1C"/>
+          </a:solidFill>
+          <a:ln w="9525">
+            <a:solidFill>
+              <a:srgbClr val="4A2427"/>
+            </a:solidFill>
+          </a:ln>
+          <a:effectLst/>
+        </p:spPr>
+        <p:style>
+          <a:lnRef idx="1">
+            <a:schemeClr val="accent1"/>
+          </a:lnRef>
+          <a:fillRef idx="3">
+            <a:schemeClr val="accent1"/>
+          </a:fillRef>
+          <a:effectRef idx="2">
+            <a:schemeClr val="accent1"/>
+          </a:effectRef>
+          <a:fontRef idx="minor">
+            <a:schemeClr val="lt1"/>
+          </a:fontRef>
+        </p:style>
+        <p:txBody>
+          <a:bodyPr rtlCol="0" anchor="ctr" wrap="square"/>
+          <a:lstStyle/>
+          <a:p>
+            <a:pPr algn="ctr"/>
+          </a:p>
+        </p:txBody>
+      </p:sp>
+      <p:sp>
+        <p:nvSpPr>
+          <p:cNvPr id="28" name="TextBox 27"/>
+          <p:cNvSpPr txBox="1"/>
+          <p:nvPr/>
+        </p:nvSpPr>
+        <p:spPr>
+          <a:xfrm>
+            <a:off x="6539331" y="2478024"/>
+            <a:ext cx="4637379" cy="1188720"/>
           </a:xfrm>
           <a:prstGeom prst="rect">
             <a:avLst/>
@@ -5924,11 +6665,11 @@
             <a:r>
               <a:rPr sz="980" b="1" i="0" spc="110">
                 <a:solidFill>
-                  <a:srgbClr val="E3C285"/>
-                </a:solidFill>
-                <a:latin typeface="Calibri"/>
-              </a:rPr>
-              <a:t>CONFIDENCE LEVEL</a:t>
+                  <a:srgbClr val="F08A7F"/>
+                </a:solidFill>
+                <a:latin typeface="Calibri"/>
+              </a:rPr>
+              <a:t>THE ONE WE DID NOT EXPECT</a:t>
             </a:r>
           </a:p>
           <a:p>
@@ -5947,7 +6688,215 @@
                 </a:solidFill>
                 <a:latin typeface="Calibri"/>
               </a:rPr>
-              <a:t>This is a comparison between different model sizes, not a controlled experiment at fixed size. Treat it as a strong steer on where to spend, not a proven law.</a:t>
+              <a:t>The provider refused to evaluate a subset of prompts outright, and did so inconsistently — the same prompt was refused on some runs and not others. A guardrail that intermittently declines to answer is itself an audit finding.</a:t>
+            </a:r>
+          </a:p>
+        </p:txBody>
+      </p:sp>
+      <p:sp>
+        <p:nvSpPr>
+          <p:cNvPr id="29" name="Rectangle 28"/>
+          <p:cNvSpPr/>
+          <p:nvPr/>
+        </p:nvSpPr>
+        <p:spPr>
+          <a:xfrm>
+            <a:off x="6301587" y="3941064"/>
+            <a:ext cx="5112867" cy="1371600"/>
+          </a:xfrm>
+          <a:prstGeom prst="rect">
+            <a:avLst/>
+          </a:prstGeom>
+          <a:solidFill>
+            <a:srgbClr val="18263D"/>
+          </a:solidFill>
+          <a:ln w="9525">
+            <a:solidFill>
+              <a:srgbClr val="1E3050"/>
+            </a:solidFill>
+          </a:ln>
+          <a:effectLst/>
+        </p:spPr>
+        <p:style>
+          <a:lnRef idx="1">
+            <a:schemeClr val="accent1"/>
+          </a:lnRef>
+          <a:fillRef idx="3">
+            <a:schemeClr val="accent1"/>
+          </a:fillRef>
+          <a:effectRef idx="2">
+            <a:schemeClr val="accent1"/>
+          </a:effectRef>
+          <a:fontRef idx="minor">
+            <a:schemeClr val="lt1"/>
+          </a:fontRef>
+        </p:style>
+        <p:txBody>
+          <a:bodyPr rtlCol="0" anchor="ctr" wrap="square"/>
+          <a:lstStyle/>
+          <a:p>
+            <a:pPr algn="ctr"/>
+          </a:p>
+        </p:txBody>
+      </p:sp>
+      <p:sp>
+        <p:nvSpPr>
+          <p:cNvPr id="30" name="TextBox 29"/>
+          <p:cNvSpPr txBox="1"/>
+          <p:nvPr/>
+        </p:nvSpPr>
+        <p:spPr>
+          <a:xfrm>
+            <a:off x="6539331" y="4087368"/>
+            <a:ext cx="4637379" cy="1078992"/>
+          </a:xfrm>
+          <a:prstGeom prst="rect">
+            <a:avLst/>
+          </a:prstGeom>
+          <a:noFill/>
+        </p:spPr>
+        <p:txBody>
+          <a:bodyPr wrap="square" anchor="t" lIns="0" rIns="0" tIns="0" bIns="0">
+            <a:spAutoFit/>
+          </a:bodyPr>
+          <a:lstStyle/>
+          <a:p>
+            <a:pPr algn="l">
+              <a:spcAft>
+                <a:spcPts val="500"/>
+              </a:spcAft>
+            </a:pPr>
+            <a:r>
+              <a:rPr sz="980" b="1" i="0" spc="110">
+                <a:solidFill>
+                  <a:srgbClr val="BFD8F5"/>
+                </a:solidFill>
+                <a:latin typeface="Calibri"/>
+              </a:rPr>
+              <a:t>CONTROL OVER THE ALARM RATE</a:t>
+            </a:r>
+          </a:p>
+          <a:p>
+            <a:pPr algn="l">
+              <a:lnSpc>
+                <a:spcPct val="106000"/>
+              </a:lnSpc>
+              <a:spcAft>
+                <a:spcPts val="0"/>
+              </a:spcAft>
+            </a:pPr>
+            <a:r>
+              <a:rPr sz="1100" b="0" i="0">
+                <a:solidFill>
+                  <a:srgbClr val="9DAFC7"/>
+                </a:solidFill>
+                <a:latin typeface="Calibri"/>
+              </a:rPr>
+              <a:t>Our own model exposes a continuous score, so we can set the false-alarm budget precisely. The hosted model reports a coarse 0–100 value, so we can only land near a target.</a:t>
+            </a:r>
+          </a:p>
+        </p:txBody>
+      </p:sp>
+      <p:sp>
+        <p:nvSpPr>
+          <p:cNvPr id="31" name="Rectangle 30"/>
+          <p:cNvSpPr/>
+          <p:nvPr/>
+        </p:nvSpPr>
+        <p:spPr>
+          <a:xfrm>
+            <a:off x="777240" y="5404104"/>
+            <a:ext cx="10637215" cy="969264"/>
+          </a:xfrm>
+          <a:prstGeom prst="rect">
+            <a:avLst/>
+          </a:prstGeom>
+          <a:solidFill>
+            <a:srgbClr val="18263D"/>
+          </a:solidFill>
+          <a:ln w="9525">
+            <a:solidFill>
+              <a:srgbClr val="1E3050"/>
+            </a:solidFill>
+          </a:ln>
+          <a:effectLst/>
+        </p:spPr>
+        <p:style>
+          <a:lnRef idx="1">
+            <a:schemeClr val="accent1"/>
+          </a:lnRef>
+          <a:fillRef idx="3">
+            <a:schemeClr val="accent1"/>
+          </a:fillRef>
+          <a:effectRef idx="2">
+            <a:schemeClr val="accent1"/>
+          </a:effectRef>
+          <a:fontRef idx="minor">
+            <a:schemeClr val="lt1"/>
+          </a:fontRef>
+        </p:style>
+        <p:txBody>
+          <a:bodyPr rtlCol="0" anchor="ctr" wrap="square"/>
+          <a:lstStyle/>
+          <a:p>
+            <a:pPr algn="ctr"/>
+          </a:p>
+        </p:txBody>
+      </p:sp>
+      <p:sp>
+        <p:nvSpPr>
+          <p:cNvPr id="32" name="TextBox 31"/>
+          <p:cNvSpPr txBox="1"/>
+          <p:nvPr/>
+        </p:nvSpPr>
+        <p:spPr>
+          <a:xfrm>
+            <a:off x="1014984" y="5550408"/>
+            <a:ext cx="10161727" cy="676656"/>
+          </a:xfrm>
+          <a:prstGeom prst="rect">
+            <a:avLst/>
+          </a:prstGeom>
+          <a:noFill/>
+        </p:spPr>
+        <p:txBody>
+          <a:bodyPr wrap="square" anchor="t" lIns="0" rIns="0" tIns="0" bIns="0">
+            <a:spAutoFit/>
+          </a:bodyPr>
+          <a:lstStyle/>
+          <a:p>
+            <a:pPr algn="l">
+              <a:spcAft>
+                <a:spcPts val="500"/>
+              </a:spcAft>
+            </a:pPr>
+            <a:r>
+              <a:rPr sz="980" b="1" i="0" spc="110">
+                <a:solidFill>
+                  <a:srgbClr val="8FD3B6"/>
+                </a:solidFill>
+                <a:latin typeface="Calibri"/>
+              </a:rPr>
+              <a:t>NOT A REASON TO REFUSE HOSTED</a:t>
+            </a:r>
+          </a:p>
+          <a:p>
+            <a:pPr algn="l">
+              <a:lnSpc>
+                <a:spcPct val="106000"/>
+              </a:lnSpc>
+              <a:spcAft>
+                <a:spcPts val="0"/>
+              </a:spcAft>
+            </a:pPr>
+            <a:r>
+              <a:rPr sz="1100" b="0" i="0">
+                <a:solidFill>
+                  <a:srgbClr val="9DAFC7"/>
+                </a:solidFill>
+                <a:latin typeface="Calibri"/>
+              </a:rPr>
+              <a:t>It is a reason to scope it: hosted on traffic where the prompt may leave and latency is not critical; self-hosted on the regulated, latency-sensitive path.</a:t>
             </a:r>
           </a:p>
         </p:txBody>
@@ -6090,7 +7039,7 @@
                 </a:solidFill>
                 <a:latin typeface="Calibri"/>
               </a:rPr>
-              <a:t>CONFIDENCE AND LIMITS</a:t>
+              <a:t>THE USEFUL FINDING</a:t>
             </a:r>
           </a:p>
         </p:txBody>
@@ -6132,7 +7081,7 @@
                 </a:solidFill>
                 <a:latin typeface="Cambria"/>
               </a:rPr>
-              <a:t>What this does not tell you</a:t>
+              <a:t>If we must self-host, a bigger untuned model beats a tuned small one</a:t>
             </a:r>
           </a:p>
         </p:txBody>
@@ -6171,7 +7120,7 @@
                 </a:solidFill>
                 <a:latin typeface="Calibri"/>
               </a:rPr>
-              <a:t>Stated plainly, so the recommendation can be trusted where it does apply</a:t>
+              <a:t>Because tuning's cost lands on exactly the traffic a guardrail exists to catch</a:t>
             </a:r>
           </a:p>
         </p:txBody>
@@ -6185,7 +7134,7 @@
         <p:spPr>
           <a:xfrm>
             <a:off x="777240" y="2295144"/>
-            <a:ext cx="10637215" cy="2926080"/>
+            <a:ext cx="5112867" cy="2651760"/>
           </a:xfrm>
           <a:prstGeom prst="rect">
             <a:avLst/>
@@ -6219,7 +7168,7 @@
                 </a:solidFill>
                 <a:latin typeface="Calibri"/>
               </a:rPr>
-              <a:t>It is one benchmark. </a:t>
+              <a:t>Tuning a small model. </a:t>
             </a:r>
             <a:r>
               <a:rPr sz="1450" b="0" i="0">
@@ -6228,7 +7177,7 @@
                 </a:solidFill>
                 <a:latin typeface="Calibri"/>
               </a:rPr>
-              <a:t>Expert-annotated finance, healthcare and law prompt safety. It is the strongest external evidence we have, and it is still a single instrument — and our own research shows guard rankings reorder when the benchmark changes.</a:t>
+              <a:t>Large gain on familiar traffic, and it gives back accuracy on unfamiliar traffic — which is where novel attacks arrive.</a:t>
             </a:r>
           </a:p>
           <a:p>
@@ -6253,7 +7202,7 @@
                 </a:solidFill>
                 <a:latin typeface="Calibri"/>
               </a:rPr>
-              <a:t>It is prompt-only. </a:t>
+              <a:t>A bigger untuned model. </a:t>
             </a:r>
             <a:r>
               <a:rPr sz="1450" b="0" i="0">
@@ -6262,7 +7211,7 @@
                 </a:solidFill>
                 <a:latin typeface="Calibri"/>
               </a:rPr>
-              <a:t>We judged incoming prompts, not the assistant's replies, and not the harder mortgage-compliance question of whether a specific answer breaks a specific rule.</a:t>
+              <a:t>Recovers most of that same gain on familiar traffic, and holds its accuracy on unfamiliar traffic.</a:t>
             </a:r>
           </a:p>
           <a:p>
@@ -6287,7 +7236,7 @@
                 </a:solidFill>
                 <a:latin typeface="Calibri"/>
               </a:rPr>
-              <a:t>Vendor behaviour is a moving target. </a:t>
+              <a:t>So for a guardrail specifically. </a:t>
             </a:r>
             <a:r>
               <a:rPr sz="1450" b="0" i="0">
@@ -6296,41 +7245,7 @@
                 </a:solidFill>
                 <a:latin typeface="Calibri"/>
               </a:rPr>
-              <a:t>Model versions change under you. The self-hosted side is pinned to an exact revision and reproduces indefinitely; the hosted side does not.</a:t>
-            </a:r>
-          </a:p>
-          <a:p>
-            <a:pPr algn="l">
-              <a:spcAft>
-                <a:spcPts val="1200"/>
-              </a:spcAft>
-            </a:pPr>
-            <a:r>
-              <a:rPr sz="1450" b="1" i="0">
-                <a:solidFill>
-                  <a:srgbClr val="E0564F"/>
-                </a:solidFill>
-                <a:latin typeface="Calibri"/>
-              </a:rPr>
-              <a:t>—  </a:t>
-            </a:r>
-            <a:r>
-              <a:rPr sz="1450" b="1" i="0">
-                <a:solidFill>
-                  <a:srgbClr val="EEF2F8"/>
-                </a:solidFill>
-                <a:latin typeface="Calibri"/>
-              </a:rPr>
-              <a:t>Prices are list, not invoices. </a:t>
-            </a:r>
-            <a:r>
-              <a:rPr sz="1450" b="0" i="0">
-                <a:solidFill>
-                  <a:srgbClr val="9DAFC7"/>
-                </a:solidFill>
-                <a:latin typeface="Calibri"/>
-              </a:rPr>
-              <a:t>Cost figures are billed tokens at public rates and exclude the GPU cost on our own side.</a:t>
+              <a:t>Prefer spending on a stronger base model over spending on a tuning programme.</a:t>
             </a:r>
           </a:p>
         </p:txBody>
@@ -6343,8 +7258,8 @@
         </p:nvSpPr>
         <p:spPr>
           <a:xfrm>
-            <a:off x="777240" y="5303520"/>
-            <a:ext cx="10637215" cy="987552"/>
+            <a:off x="6301587" y="2295144"/>
+            <a:ext cx="5112867" cy="1554480"/>
           </a:xfrm>
           <a:prstGeom prst="rect">
             <a:avLst/>
@@ -6389,8 +7304,8 @@
         </p:nvSpPr>
         <p:spPr>
           <a:xfrm>
-            <a:off x="1014984" y="5449824"/>
-            <a:ext cx="10161727" cy="694944"/>
+            <a:off x="6539331" y="2441448"/>
+            <a:ext cx="4637379" cy="1261872"/>
           </a:xfrm>
           <a:prstGeom prst="rect">
             <a:avLst/>
@@ -6411,11 +7326,11 @@
             <a:r>
               <a:rPr sz="980" b="1" i="0" spc="110">
                 <a:solidFill>
-                  <a:srgbClr val="BFD8F5"/>
-                </a:solidFill>
-                <a:latin typeface="Calibri"/>
-              </a:rPr>
-              <a:t>WHAT WOULD CHANGE THE RECOMMENDATION</a:t>
+                  <a:srgbClr val="8FD3B6"/>
+                </a:solidFill>
+                <a:latin typeface="Calibri"/>
+              </a:rPr>
+              <a:t>WHY THIS IS WORTH MONEY</a:t>
             </a:r>
           </a:p>
           <a:p>
@@ -6434,7 +7349,111 @@
                 </a:solidFill>
                 <a:latin typeface="Calibri"/>
               </a:rPr>
-              <a:t>A regulated-domain benchmark that scores whole answers against specific rules, with expert adjudication. That is the instrument we do not have, and building it is the highest-value next step.</a:t>
+              <a:t>It reverses the intuitive plan. Tuning looks like the cheap, targeted option; measured on held-out traffic it is the one that quietly costs you coverage.</a:t>
+            </a:r>
+          </a:p>
+        </p:txBody>
+      </p:sp>
+      <p:sp>
+        <p:nvSpPr>
+          <p:cNvPr id="10" name="Rectangle 9"/>
+          <p:cNvSpPr/>
+          <p:nvPr/>
+        </p:nvSpPr>
+        <p:spPr>
+          <a:xfrm>
+            <a:off x="6301587" y="3995928"/>
+            <a:ext cx="5112867" cy="1554480"/>
+          </a:xfrm>
+          <a:prstGeom prst="rect">
+            <a:avLst/>
+          </a:prstGeom>
+          <a:solidFill>
+            <a:srgbClr val="18263D"/>
+          </a:solidFill>
+          <a:ln w="9525">
+            <a:solidFill>
+              <a:srgbClr val="1E3050"/>
+            </a:solidFill>
+          </a:ln>
+          <a:effectLst/>
+        </p:spPr>
+        <p:style>
+          <a:lnRef idx="1">
+            <a:schemeClr val="accent1"/>
+          </a:lnRef>
+          <a:fillRef idx="3">
+            <a:schemeClr val="accent1"/>
+          </a:fillRef>
+          <a:effectRef idx="2">
+            <a:schemeClr val="accent1"/>
+          </a:effectRef>
+          <a:fontRef idx="minor">
+            <a:schemeClr val="lt1"/>
+          </a:fontRef>
+        </p:style>
+        <p:txBody>
+          <a:bodyPr rtlCol="0" anchor="ctr" wrap="square"/>
+          <a:lstStyle/>
+          <a:p>
+            <a:pPr algn="ctr"/>
+          </a:p>
+        </p:txBody>
+      </p:sp>
+      <p:sp>
+        <p:nvSpPr>
+          <p:cNvPr id="11" name="TextBox 10"/>
+          <p:cNvSpPr txBox="1"/>
+          <p:nvPr/>
+        </p:nvSpPr>
+        <p:spPr>
+          <a:xfrm>
+            <a:off x="6539331" y="4142232"/>
+            <a:ext cx="4637379" cy="1261872"/>
+          </a:xfrm>
+          <a:prstGeom prst="rect">
+            <a:avLst/>
+          </a:prstGeom>
+          <a:noFill/>
+        </p:spPr>
+        <p:txBody>
+          <a:bodyPr wrap="square" anchor="t" lIns="0" rIns="0" tIns="0" bIns="0">
+            <a:spAutoFit/>
+          </a:bodyPr>
+          <a:lstStyle/>
+          <a:p>
+            <a:pPr algn="l">
+              <a:spcAft>
+                <a:spcPts val="500"/>
+              </a:spcAft>
+            </a:pPr>
+            <a:r>
+              <a:rPr sz="980" b="1" i="0" spc="110">
+                <a:solidFill>
+                  <a:srgbClr val="E3C285"/>
+                </a:solidFill>
+                <a:latin typeface="Calibri"/>
+              </a:rPr>
+              <a:t>CONFIDENCE LEVEL</a:t>
+            </a:r>
+          </a:p>
+          <a:p>
+            <a:pPr algn="l">
+              <a:lnSpc>
+                <a:spcPct val="106000"/>
+              </a:lnSpc>
+              <a:spcAft>
+                <a:spcPts val="0"/>
+              </a:spcAft>
+            </a:pPr>
+            <a:r>
+              <a:rPr sz="1100" b="0" i="0">
+                <a:solidFill>
+                  <a:srgbClr val="9DAFC7"/>
+                </a:solidFill>
+                <a:latin typeface="Calibri"/>
+              </a:rPr>
+              <a:t>This is a comparison between different model sizes, not a controlled experiment at fixed size. Treat it as a strong steer on where to spend, not a proven law.</a:t>
             </a:r>
           </a:p>
         </p:txBody>
@@ -6448,6 +7467,493 @@
 </file>
 
 <file path=ppt/slides/slide12.xml><?xml version="1.0" encoding="utf-8"?>
+<p:sld xmlns:a="http://schemas.openxmlformats.org/drawingml/2006/main" xmlns:p="http://schemas.openxmlformats.org/presentationml/2006/main" xmlns:r="http://schemas.openxmlformats.org/officeDocument/2006/relationships">
+  <p:cSld>
+    <p:bg>
+      <p:bgPr>
+        <a:solidFill>
+          <a:srgbClr val="0C1424"/>
+        </a:solidFill>
+        <a:effectLst/>
+      </p:bgPr>
+    </p:bg>
+    <p:spTree>
+      <p:nvGrpSpPr>
+        <p:cNvPr id="1" name=""/>
+        <p:cNvGrpSpPr/>
+        <p:nvPr/>
+      </p:nvGrpSpPr>
+      <p:grpSpPr/>
+      <p:sp>
+        <p:nvSpPr>
+          <p:cNvPr id="2" name="TextBox 1"/>
+          <p:cNvSpPr txBox="1"/>
+          <p:nvPr/>
+        </p:nvSpPr>
+        <p:spPr>
+          <a:xfrm>
+            <a:off x="777240" y="6400800"/>
+            <a:ext cx="8686800" cy="256032"/>
+          </a:xfrm>
+          <a:prstGeom prst="rect">
+            <a:avLst/>
+          </a:prstGeom>
+          <a:noFill/>
+        </p:spPr>
+        <p:txBody>
+          <a:bodyPr wrap="square" anchor="t" lIns="0" rIns="0" tIns="0" bIns="0">
+            <a:spAutoFit/>
+          </a:bodyPr>
+          <a:lstStyle/>
+          <a:p>
+            <a:pPr algn="l">
+              <a:spcAft>
+                <a:spcPts val="0"/>
+              </a:spcAft>
+            </a:pPr>
+            <a:r>
+              <a:rPr sz="860" b="0" i="0">
+                <a:solidFill>
+                  <a:srgbClr val="7488A8"/>
+                </a:solidFill>
+                <a:latin typeface="Calibri"/>
+              </a:rPr>
+              <a:t>Guardrail sourcing · in-house inline, escalate the uncertain slice</a:t>
+            </a:r>
+          </a:p>
+        </p:txBody>
+      </p:sp>
+      <p:sp>
+        <p:nvSpPr>
+          <p:cNvPr id="3" name="TextBox 2"/>
+          <p:cNvSpPr txBox="1"/>
+          <p:nvPr/>
+        </p:nvSpPr>
+        <p:spPr>
+          <a:xfrm>
+            <a:off x="10317175" y="6400800"/>
+            <a:ext cx="1097280" cy="256032"/>
+          </a:xfrm>
+          <a:prstGeom prst="rect">
+            <a:avLst/>
+          </a:prstGeom>
+          <a:noFill/>
+        </p:spPr>
+        <p:txBody>
+          <a:bodyPr wrap="square" anchor="t" lIns="0" rIns="0" tIns="0" bIns="0">
+            <a:spAutoFit/>
+          </a:bodyPr>
+          <a:lstStyle/>
+          <a:p>
+            <a:pPr algn="r">
+              <a:spcAft>
+                <a:spcPts val="0"/>
+              </a:spcAft>
+            </a:pPr>
+            <a:r>
+              <a:rPr sz="950" b="1" i="0" spc="60">
+                <a:solidFill>
+                  <a:srgbClr val="E0564F"/>
+                </a:solidFill>
+                <a:latin typeface="Calibri"/>
+              </a:rPr>
+              <a:t>11</a:t>
+            </a:r>
+          </a:p>
+        </p:txBody>
+      </p:sp>
+      <p:sp>
+        <p:nvSpPr>
+          <p:cNvPr id="4" name="TextBox 3"/>
+          <p:cNvSpPr txBox="1"/>
+          <p:nvPr/>
+        </p:nvSpPr>
+        <p:spPr>
+          <a:xfrm>
+            <a:off x="777240" y="365760"/>
+            <a:ext cx="10637215" cy="256032"/>
+          </a:xfrm>
+          <a:prstGeom prst="rect">
+            <a:avLst/>
+          </a:prstGeom>
+          <a:noFill/>
+        </p:spPr>
+        <p:txBody>
+          <a:bodyPr wrap="square" anchor="t" lIns="0" rIns="0" tIns="0" bIns="0">
+            <a:spAutoFit/>
+          </a:bodyPr>
+          <a:lstStyle/>
+          <a:p>
+            <a:pPr algn="l">
+              <a:spcAft>
+                <a:spcPts val="0"/>
+              </a:spcAft>
+            </a:pPr>
+            <a:r>
+              <a:rPr sz="1050" b="1" i="0" spc="140">
+                <a:solidFill>
+                  <a:srgbClr val="E0564F"/>
+                </a:solidFill>
+                <a:latin typeface="Calibri"/>
+              </a:rPr>
+              <a:t>CONFIDENCE AND LIMITS</a:t>
+            </a:r>
+          </a:p>
+        </p:txBody>
+      </p:sp>
+      <p:sp>
+        <p:nvSpPr>
+          <p:cNvPr id="5" name="TextBox 4"/>
+          <p:cNvSpPr txBox="1"/>
+          <p:nvPr/>
+        </p:nvSpPr>
+        <p:spPr>
+          <a:xfrm>
+            <a:off x="777240" y="658368"/>
+            <a:ext cx="10637215" cy="932688"/>
+          </a:xfrm>
+          <a:prstGeom prst="rect">
+            <a:avLst/>
+          </a:prstGeom>
+          <a:noFill/>
+        </p:spPr>
+        <p:txBody>
+          <a:bodyPr wrap="square" anchor="t" lIns="0" rIns="0" tIns="0" bIns="0">
+            <a:spAutoFit/>
+          </a:bodyPr>
+          <a:lstStyle/>
+          <a:p>
+            <a:pPr algn="l">
+              <a:lnSpc>
+                <a:spcPct val="102000"/>
+              </a:lnSpc>
+              <a:spcAft>
+                <a:spcPts val="0"/>
+              </a:spcAft>
+            </a:pPr>
+            <a:r>
+              <a:rPr sz="2500" b="1" i="0">
+                <a:solidFill>
+                  <a:srgbClr val="EEF2F8"/>
+                </a:solidFill>
+                <a:latin typeface="Cambria"/>
+              </a:rPr>
+              <a:t>What this does not tell you</a:t>
+            </a:r>
+          </a:p>
+        </p:txBody>
+      </p:sp>
+      <p:sp>
+        <p:nvSpPr>
+          <p:cNvPr id="6" name="TextBox 5"/>
+          <p:cNvSpPr txBox="1"/>
+          <p:nvPr/>
+        </p:nvSpPr>
+        <p:spPr>
+          <a:xfrm>
+            <a:off x="777240" y="1700784"/>
+            <a:ext cx="10637215" cy="310896"/>
+          </a:xfrm>
+          <a:prstGeom prst="rect">
+            <a:avLst/>
+          </a:prstGeom>
+          <a:noFill/>
+        </p:spPr>
+        <p:txBody>
+          <a:bodyPr wrap="square" anchor="t" lIns="0" rIns="0" tIns="0" bIns="0">
+            <a:spAutoFit/>
+          </a:bodyPr>
+          <a:lstStyle/>
+          <a:p>
+            <a:pPr algn="l">
+              <a:spcAft>
+                <a:spcPts val="0"/>
+              </a:spcAft>
+            </a:pPr>
+            <a:r>
+              <a:rPr sz="1250" b="0" i="0">
+                <a:solidFill>
+                  <a:srgbClr val="6B7F9F"/>
+                </a:solidFill>
+                <a:latin typeface="Calibri"/>
+              </a:rPr>
+              <a:t>Stated plainly, so the recommendation can be trusted where it does apply</a:t>
+            </a:r>
+          </a:p>
+        </p:txBody>
+      </p:sp>
+      <p:sp>
+        <p:nvSpPr>
+          <p:cNvPr id="7" name="TextBox 6"/>
+          <p:cNvSpPr txBox="1"/>
+          <p:nvPr/>
+        </p:nvSpPr>
+        <p:spPr>
+          <a:xfrm>
+            <a:off x="777240" y="2295144"/>
+            <a:ext cx="10637215" cy="2926080"/>
+          </a:xfrm>
+          <a:prstGeom prst="rect">
+            <a:avLst/>
+          </a:prstGeom>
+          <a:noFill/>
+        </p:spPr>
+        <p:txBody>
+          <a:bodyPr wrap="square" anchor="t" lIns="0" rIns="0" tIns="0" bIns="0">
+            <a:spAutoFit/>
+          </a:bodyPr>
+          <a:lstStyle/>
+          <a:p>
+            <a:pPr algn="l">
+              <a:spcAft>
+                <a:spcPts val="1200"/>
+              </a:spcAft>
+            </a:pPr>
+            <a:r>
+              <a:rPr sz="1450" b="1" i="0">
+                <a:solidFill>
+                  <a:srgbClr val="E0564F"/>
+                </a:solidFill>
+                <a:latin typeface="Calibri"/>
+              </a:rPr>
+              <a:t>—  </a:t>
+            </a:r>
+            <a:r>
+              <a:rPr sz="1450" b="1" i="0">
+                <a:solidFill>
+                  <a:srgbClr val="EEF2F8"/>
+                </a:solidFill>
+                <a:latin typeface="Calibri"/>
+              </a:rPr>
+              <a:t>It is one benchmark. </a:t>
+            </a:r>
+            <a:r>
+              <a:rPr sz="1450" b="0" i="0">
+                <a:solidFill>
+                  <a:srgbClr val="9DAFC7"/>
+                </a:solidFill>
+                <a:latin typeface="Calibri"/>
+              </a:rPr>
+              <a:t>Expert-annotated finance, healthcare and law prompt safety. It is the strongest external evidence we have, and it is still a single instrument — and our own research shows guard rankings reorder when the benchmark changes.</a:t>
+            </a:r>
+          </a:p>
+          <a:p>
+            <a:pPr algn="l">
+              <a:spcAft>
+                <a:spcPts val="1200"/>
+              </a:spcAft>
+            </a:pPr>
+            <a:r>
+              <a:rPr sz="1450" b="1" i="0">
+                <a:solidFill>
+                  <a:srgbClr val="E0564F"/>
+                </a:solidFill>
+                <a:latin typeface="Calibri"/>
+              </a:rPr>
+              <a:t>—  </a:t>
+            </a:r>
+            <a:r>
+              <a:rPr sz="1450" b="1" i="0">
+                <a:solidFill>
+                  <a:srgbClr val="EEF2F8"/>
+                </a:solidFill>
+                <a:latin typeface="Calibri"/>
+              </a:rPr>
+              <a:t>It is prompt-only. </a:t>
+            </a:r>
+            <a:r>
+              <a:rPr sz="1450" b="0" i="0">
+                <a:solidFill>
+                  <a:srgbClr val="9DAFC7"/>
+                </a:solidFill>
+                <a:latin typeface="Calibri"/>
+              </a:rPr>
+              <a:t>We judged incoming prompts, not the assistant's replies, and not the harder mortgage-compliance question of whether a specific answer breaks a specific rule.</a:t>
+            </a:r>
+          </a:p>
+          <a:p>
+            <a:pPr algn="l">
+              <a:spcAft>
+                <a:spcPts val="1200"/>
+              </a:spcAft>
+            </a:pPr>
+            <a:r>
+              <a:rPr sz="1450" b="1" i="0">
+                <a:solidFill>
+                  <a:srgbClr val="E0564F"/>
+                </a:solidFill>
+                <a:latin typeface="Calibri"/>
+              </a:rPr>
+              <a:t>—  </a:t>
+            </a:r>
+            <a:r>
+              <a:rPr sz="1450" b="1" i="0">
+                <a:solidFill>
+                  <a:srgbClr val="EEF2F8"/>
+                </a:solidFill>
+                <a:latin typeface="Calibri"/>
+              </a:rPr>
+              <a:t>Vendor behaviour is a moving target. </a:t>
+            </a:r>
+            <a:r>
+              <a:rPr sz="1450" b="0" i="0">
+                <a:solidFill>
+                  <a:srgbClr val="9DAFC7"/>
+                </a:solidFill>
+                <a:latin typeface="Calibri"/>
+              </a:rPr>
+              <a:t>Model versions change under you. The self-hosted side is pinned to an exact revision and reproduces indefinitely; the hosted side does not.</a:t>
+            </a:r>
+          </a:p>
+          <a:p>
+            <a:pPr algn="l">
+              <a:spcAft>
+                <a:spcPts val="1200"/>
+              </a:spcAft>
+            </a:pPr>
+            <a:r>
+              <a:rPr sz="1450" b="1" i="0">
+                <a:solidFill>
+                  <a:srgbClr val="E0564F"/>
+                </a:solidFill>
+                <a:latin typeface="Calibri"/>
+              </a:rPr>
+              <a:t>—  </a:t>
+            </a:r>
+            <a:r>
+              <a:rPr sz="1450" b="1" i="0">
+                <a:solidFill>
+                  <a:srgbClr val="EEF2F8"/>
+                </a:solidFill>
+                <a:latin typeface="Calibri"/>
+              </a:rPr>
+              <a:t>Prices are list, not invoices. </a:t>
+            </a:r>
+            <a:r>
+              <a:rPr sz="1450" b="0" i="0">
+                <a:solidFill>
+                  <a:srgbClr val="9DAFC7"/>
+                </a:solidFill>
+                <a:latin typeface="Calibri"/>
+              </a:rPr>
+              <a:t>Cost figures are billed tokens at public rates and exclude the GPU cost on our own side.</a:t>
+            </a:r>
+          </a:p>
+        </p:txBody>
+      </p:sp>
+      <p:sp>
+        <p:nvSpPr>
+          <p:cNvPr id="8" name="Rectangle 7"/>
+          <p:cNvSpPr/>
+          <p:nvPr/>
+        </p:nvSpPr>
+        <p:spPr>
+          <a:xfrm>
+            <a:off x="777240" y="5303520"/>
+            <a:ext cx="10637215" cy="987552"/>
+          </a:xfrm>
+          <a:prstGeom prst="rect">
+            <a:avLst/>
+          </a:prstGeom>
+          <a:solidFill>
+            <a:srgbClr val="18263D"/>
+          </a:solidFill>
+          <a:ln w="9525">
+            <a:solidFill>
+              <a:srgbClr val="1E3050"/>
+            </a:solidFill>
+          </a:ln>
+          <a:effectLst/>
+        </p:spPr>
+        <p:style>
+          <a:lnRef idx="1">
+            <a:schemeClr val="accent1"/>
+          </a:lnRef>
+          <a:fillRef idx="3">
+            <a:schemeClr val="accent1"/>
+          </a:fillRef>
+          <a:effectRef idx="2">
+            <a:schemeClr val="accent1"/>
+          </a:effectRef>
+          <a:fontRef idx="minor">
+            <a:schemeClr val="lt1"/>
+          </a:fontRef>
+        </p:style>
+        <p:txBody>
+          <a:bodyPr rtlCol="0" anchor="ctr" wrap="square"/>
+          <a:lstStyle/>
+          <a:p>
+            <a:pPr algn="ctr"/>
+          </a:p>
+        </p:txBody>
+      </p:sp>
+      <p:sp>
+        <p:nvSpPr>
+          <p:cNvPr id="9" name="TextBox 8"/>
+          <p:cNvSpPr txBox="1"/>
+          <p:nvPr/>
+        </p:nvSpPr>
+        <p:spPr>
+          <a:xfrm>
+            <a:off x="1014984" y="5449824"/>
+            <a:ext cx="10161727" cy="694944"/>
+          </a:xfrm>
+          <a:prstGeom prst="rect">
+            <a:avLst/>
+          </a:prstGeom>
+          <a:noFill/>
+        </p:spPr>
+        <p:txBody>
+          <a:bodyPr wrap="square" anchor="t" lIns="0" rIns="0" tIns="0" bIns="0">
+            <a:spAutoFit/>
+          </a:bodyPr>
+          <a:lstStyle/>
+          <a:p>
+            <a:pPr algn="l">
+              <a:spcAft>
+                <a:spcPts val="500"/>
+              </a:spcAft>
+            </a:pPr>
+            <a:r>
+              <a:rPr sz="980" b="1" i="0" spc="110">
+                <a:solidFill>
+                  <a:srgbClr val="BFD8F5"/>
+                </a:solidFill>
+                <a:latin typeface="Calibri"/>
+              </a:rPr>
+              <a:t>WHAT WOULD CHANGE THE RECOMMENDATION</a:t>
+            </a:r>
+          </a:p>
+          <a:p>
+            <a:pPr algn="l">
+              <a:lnSpc>
+                <a:spcPct val="106000"/>
+              </a:lnSpc>
+              <a:spcAft>
+                <a:spcPts val="0"/>
+              </a:spcAft>
+            </a:pPr>
+            <a:r>
+              <a:rPr sz="1100" b="0" i="0">
+                <a:solidFill>
+                  <a:srgbClr val="9DAFC7"/>
+                </a:solidFill>
+                <a:latin typeface="Calibri"/>
+              </a:rPr>
+              <a:t>A regulated-domain benchmark that scores whole answers against specific rules, with expert adjudication. That is the instrument we do not have, and building it is the highest-value next step.</a:t>
+            </a:r>
+          </a:p>
+        </p:txBody>
+      </p:sp>
+    </p:spTree>
+  </p:cSld>
+  <p:clrMapOvr>
+    <a:masterClrMapping/>
+  </p:clrMapOvr>
+</p:sld>
+</file>
+
+<file path=ppt/slides/slide13.xml><?xml version="1.0" encoding="utf-8"?>
 <p:sld xmlns:a="http://schemas.openxmlformats.org/drawingml/2006/main" xmlns:p="http://schemas.openxmlformats.org/presentationml/2006/main" xmlns:r="http://schemas.openxmlformats.org/officeDocument/2006/relationships">
   <p:cSld>
     <p:bg>
@@ -6538,7 +8044,7 @@
                 </a:solidFill>
                 <a:latin typeface="Calibri"/>
               </a:rPr>
-              <a:t>11</a:t>
+              <a:t>12</a:t>
             </a:r>
           </a:p>
         </p:txBody>
@@ -9584,7 +11090,7 @@
                 </a:solidFill>
                 <a:latin typeface="Calibri"/>
               </a:rPr>
-              <a:t>ROUTE ONE: FINE-TUNE OURS</a:t>
+              <a:t>BUT BETTER AT WHAT</a:t>
             </a:r>
           </a:p>
         </p:txBody>
@@ -9626,7 +11132,7 @@
                 </a:solidFill>
                 <a:latin typeface="Cambria"/>
               </a:rPr>
-              <a:t>Fine-tuning did not close the gap, and on unfamiliar traffic it usually made things worse</a:t>
+              <a:t>On traffic we can describe in advance, our own guard already wins</a:t>
             </a:r>
           </a:p>
         </p:txBody>
@@ -9665,55 +11171,31 @@
                 </a:solidFill>
                 <a:latin typeface="Calibri"/>
               </a:rPr>
-              <a:t>Change in catch rate after fine-tuning, across 6 models · 5 training runs each</a:t>
-            </a:r>
-          </a:p>
-        </p:txBody>
-      </p:sp>
-      <p:pic>
-        <p:nvPicPr>
-          <p:cNvPr id="7" name="Picture 6" descr="exec_tax.png"/>
-          <p:cNvPicPr>
-            <a:picLocks noChangeAspect="1"/>
-          </p:cNvPicPr>
-          <p:nvPr/>
-        </p:nvPicPr>
-        <p:blipFill>
-          <a:blip r:embed="rId2"/>
-          <a:stretch>
-            <a:fillRect/>
-          </a:stretch>
-        </p:blipFill>
-        <p:spPr>
-          <a:xfrm>
-            <a:off x="777240" y="2185416"/>
-            <a:ext cx="6953290" cy="3840480"/>
-          </a:xfrm>
-          <a:prstGeom prst="rect">
-            <a:avLst/>
-          </a:prstGeom>
-        </p:spPr>
-      </p:pic>
-      <p:sp>
-        <p:nvSpPr>
-          <p:cNvPr id="8" name="Rectangle 7"/>
+              <a:t>Same five corpora, same 5% false-alarm budget, split by whether the source was in our training manifest</a:t>
+            </a:r>
+          </a:p>
+        </p:txBody>
+      </p:sp>
+      <p:sp>
+        <p:nvSpPr>
+          <p:cNvPr id="7" name="Rectangle 6"/>
           <p:cNvSpPr/>
           <p:nvPr/>
         </p:nvSpPr>
         <p:spPr>
           <a:xfrm>
-            <a:off x="8503919" y="2258568"/>
-            <a:ext cx="2910536" cy="1828800"/>
+            <a:off x="777240" y="2331720"/>
+            <a:ext cx="5135727" cy="1481328"/>
           </a:xfrm>
           <a:prstGeom prst="rect">
             <a:avLst/>
           </a:prstGeom>
           <a:solidFill>
-            <a:srgbClr val="331A1C"/>
+            <a:srgbClr val="18263D"/>
           </a:solidFill>
           <a:ln w="9525">
             <a:solidFill>
-              <a:srgbClr val="4A2427"/>
+              <a:srgbClr val="1E3050"/>
             </a:solidFill>
           </a:ln>
           <a:effectLst/>
@@ -9742,14 +11224,14 @@
       </p:sp>
       <p:sp>
         <p:nvSpPr>
-          <p:cNvPr id="9" name="TextBox 8"/>
+          <p:cNvPr id="8" name="TextBox 7"/>
           <p:cNvSpPr txBox="1"/>
           <p:nvPr/>
         </p:nvSpPr>
         <p:spPr>
           <a:xfrm>
-            <a:off x="8741663" y="2404872"/>
-            <a:ext cx="2435048" cy="1536192"/>
+            <a:off x="1014984" y="2478024"/>
+            <a:ext cx="4660239" cy="1188720"/>
           </a:xfrm>
           <a:prstGeom prst="rect">
             <a:avLst/>
@@ -9764,60 +11246,57 @@
           <a:p>
             <a:pPr algn="l">
               <a:spcAft>
-                <a:spcPts val="500"/>
-              </a:spcAft>
-            </a:pPr>
-            <a:r>
-              <a:rPr sz="980" b="1" i="0" spc="110">
-                <a:solidFill>
-                  <a:srgbClr val="F08A7F"/>
-                </a:solidFill>
-                <a:latin typeface="Calibri"/>
-              </a:rPr>
-              <a:t>THE PATTERN BEHIND IT</a:t>
+                <a:spcPts val="400"/>
+              </a:spcAft>
+            </a:pPr>
+            <a:r>
+              <a:rPr sz="2200" b="1" i="0">
+                <a:solidFill>
+                  <a:srgbClr val="BFD8F5"/>
+                </a:solidFill>
+                <a:latin typeface="Cambria"/>
+              </a:rPr>
+              <a:t>.948  vs  .741</a:t>
             </a:r>
           </a:p>
           <a:p>
             <a:pPr algn="l">
-              <a:lnSpc>
-                <a:spcPct val="106000"/>
-              </a:lnSpc>
               <a:spcAft>
                 <a:spcPts val="0"/>
               </a:spcAft>
             </a:pPr>
             <a:r>
-              <a:rPr sz="1100" b="0" i="0">
+              <a:rPr sz="1019" b="0" i="0">
                 <a:solidFill>
                   <a:srgbClr val="9DAFC7"/>
                 </a:solidFill>
                 <a:latin typeface="Calibri"/>
               </a:rPr>
-              <a:t>Fine-tuning teaches a model the traffic you trained it on and costs it accuracy on traffic you did not. Read the chart downward: the blue gain shrinks and the red cost grows as the starting model gets stronger.</a:t>
-            </a:r>
-          </a:p>
-        </p:txBody>
-      </p:sp>
-      <p:sp>
-        <p:nvSpPr>
-          <p:cNvPr id="10" name="Rectangle 9"/>
+              <a:t>Catch rate on prompt_injections -- a Qwen2.5-1.5B guard against the hosted model. Difference +0.185 [+0.065, +0.423], and a ranking win, not a threshold trick.</a:t>
+            </a:r>
+          </a:p>
+        </p:txBody>
+      </p:sp>
+      <p:sp>
+        <p:nvSpPr>
+          <p:cNvPr id="9" name="Rectangle 8"/>
           <p:cNvSpPr/>
           <p:nvPr/>
         </p:nvSpPr>
         <p:spPr>
           <a:xfrm>
-            <a:off x="8503919" y="4251960"/>
-            <a:ext cx="2910536" cy="1572768"/>
+            <a:off x="6278727" y="2331720"/>
+            <a:ext cx="5135727" cy="1481328"/>
           </a:xfrm>
           <a:prstGeom prst="rect">
             <a:avLst/>
           </a:prstGeom>
           <a:solidFill>
-            <a:srgbClr val="18263D"/>
+            <a:srgbClr val="331A1C"/>
           </a:solidFill>
           <a:ln w="9525">
             <a:solidFill>
-              <a:srgbClr val="1E3050"/>
+              <a:srgbClr val="4A2427"/>
             </a:solidFill>
           </a:ln>
           <a:effectLst/>
@@ -9846,14 +11325,14 @@
       </p:sp>
       <p:sp>
         <p:nvSpPr>
-          <p:cNvPr id="11" name="TextBox 10"/>
+          <p:cNvPr id="10" name="TextBox 9"/>
           <p:cNvSpPr txBox="1"/>
           <p:nvPr/>
         </p:nvSpPr>
         <p:spPr>
           <a:xfrm>
-            <a:off x="8741663" y="4398264"/>
-            <a:ext cx="2435048" cy="1280160"/>
+            <a:off x="6516471" y="2478024"/>
+            <a:ext cx="4660239" cy="1188720"/>
           </a:xfrm>
           <a:prstGeom prst="rect">
             <a:avLst/>
@@ -9868,17 +11347,118 @@
           <a:p>
             <a:pPr algn="l">
               <a:spcAft>
+                <a:spcPts val="400"/>
+              </a:spcAft>
+            </a:pPr>
+            <a:r>
+              <a:rPr sz="2200" b="1" i="0">
+                <a:solidFill>
+                  <a:srgbClr val="E0564F"/>
+                </a:solidFill>
+                <a:latin typeface="Cambria"/>
+              </a:rPr>
+              <a:t>.967  vs  .917</a:t>
+            </a:r>
+          </a:p>
+          <a:p>
+            <a:pPr algn="l">
+              <a:spcAft>
+                <a:spcPts val="0"/>
+              </a:spcAft>
+            </a:pPr>
+            <a:r>
+              <a:rPr sz="1019" b="0" i="0">
+                <a:solidFill>
+                  <a:srgbClr val="9DAFC7"/>
+                </a:solidFill>
+                <a:latin typeface="Calibri"/>
+              </a:rPr>
+              <a:t>The same comparison on a source we did NOT train on. Hosted leads, and our best guard there is an UNTUNED base -- tuning is what costs us the position.</a:t>
+            </a:r>
+          </a:p>
+        </p:txBody>
+      </p:sp>
+      <p:sp>
+        <p:nvSpPr>
+          <p:cNvPr id="11" name="Rectangle 10"/>
+          <p:cNvSpPr/>
+          <p:nvPr/>
+        </p:nvSpPr>
+        <p:spPr>
+          <a:xfrm>
+            <a:off x="777240" y="3995928"/>
+            <a:ext cx="10637215" cy="1097280"/>
+          </a:xfrm>
+          <a:prstGeom prst="rect">
+            <a:avLst/>
+          </a:prstGeom>
+          <a:solidFill>
+            <a:srgbClr val="18263D"/>
+          </a:solidFill>
+          <a:ln w="9525">
+            <a:solidFill>
+              <a:srgbClr val="1E3050"/>
+            </a:solidFill>
+          </a:ln>
+          <a:effectLst/>
+        </p:spPr>
+        <p:style>
+          <a:lnRef idx="1">
+            <a:schemeClr val="accent1"/>
+          </a:lnRef>
+          <a:fillRef idx="3">
+            <a:schemeClr val="accent1"/>
+          </a:fillRef>
+          <a:effectRef idx="2">
+            <a:schemeClr val="accent1"/>
+          </a:effectRef>
+          <a:fontRef idx="minor">
+            <a:schemeClr val="lt1"/>
+          </a:fontRef>
+        </p:style>
+        <p:txBody>
+          <a:bodyPr rtlCol="0" anchor="ctr" wrap="square"/>
+          <a:lstStyle/>
+          <a:p>
+            <a:pPr algn="ctr"/>
+          </a:p>
+        </p:txBody>
+      </p:sp>
+      <p:sp>
+        <p:nvSpPr>
+          <p:cNvPr id="12" name="TextBox 11"/>
+          <p:cNvSpPr txBox="1"/>
+          <p:nvPr/>
+        </p:nvSpPr>
+        <p:spPr>
+          <a:xfrm>
+            <a:off x="1014984" y="4142232"/>
+            <a:ext cx="10161727" cy="804672"/>
+          </a:xfrm>
+          <a:prstGeom prst="rect">
+            <a:avLst/>
+          </a:prstGeom>
+          <a:noFill/>
+        </p:spPr>
+        <p:txBody>
+          <a:bodyPr wrap="square" anchor="t" lIns="0" rIns="0" tIns="0" bIns="0">
+            <a:spAutoFit/>
+          </a:bodyPr>
+          <a:lstStyle/>
+          <a:p>
+            <a:pPr algn="l">
+              <a:spcAft>
                 <a:spcPts val="500"/>
               </a:spcAft>
             </a:pPr>
             <a:r>
               <a:rPr sz="980" b="1" i="0" spc="110">
                 <a:solidFill>
-                  <a:srgbClr val="E3C285"/>
-                </a:solidFill>
-                <a:latin typeface="Calibri"/>
-              </a:rPr>
-              <a:t>PLANNING CONSEQUENCE</a:t>
+                  <a:srgbClr val="8FD3B6"/>
+                </a:solidFill>
+                <a:latin typeface="Calibri"/>
+              </a:rPr>
+              <a:t>THE SOURCING RULE THIS IMPLIES</a:t>
             </a:r>
           </a:p>
           <a:p>
@@ -9897,7 +11477,7 @@
                 </a:solidFill>
                 <a:latin typeface="Calibri"/>
               </a:rPr>
-              <a:t>Budgeting a tuning project to close a vendor gap is not supported here. The best tuned result anywhere (81%) still loses to hosted (90%).</a:t>
+              <a:t>The gap is not a ceiling a bigger local model would break through -- it is the price of the regime. So the question is not “can a small guard match the frontier” but “what share of our traffic can we describe in a training manifest”. Self-host that share; escalate on UNFAMILIARITY, not on how unsure the local guard sounds, because margin-based routing spends the hosted budget exactly where we are already right.</a:t>
             </a:r>
           </a:p>
         </p:txBody>
@@ -10040,7 +11620,7 @@
                 </a:solidFill>
                 <a:latin typeface="Calibri"/>
               </a:rPr>
-              <a:t>ROUTE TWO: BUY A BIGGER ONE</a:t>
+              <a:t>ROUTE ONE: FINE-TUNE OURS</a:t>
             </a:r>
           </a:p>
         </p:txBody>
@@ -10082,7 +11662,7 @@
                 </a:solidFill>
                 <a:latin typeface="Cambria"/>
               </a:rPr>
-              <a:t>Eight times the parameters bought less than the gap that was left</a:t>
+              <a:t>Fine-tuning did not close the gap, and on unfamiliar traffic it usually made things worse</a:t>
             </a:r>
           </a:p>
         </p:txBody>
@@ -10121,14 +11701,14 @@
                 </a:solidFill>
                 <a:latin typeface="Calibri"/>
               </a:rPr>
-              <a:t>Catch rate against model size, same family, same prompt, same rows</a:t>
+              <a:t>Change in catch rate after fine-tuning, across 6 models · 5 training runs each</a:t>
             </a:r>
           </a:p>
         </p:txBody>
       </p:sp>
       <p:pic>
         <p:nvPicPr>
-          <p:cNvPr id="7" name="Picture 6" descr="exec_scale.png"/>
+          <p:cNvPr id="7" name="Picture 6" descr="exec_tax.png"/>
           <p:cNvPicPr>
             <a:picLocks noChangeAspect="1"/>
           </p:cNvPicPr>
@@ -10142,8 +11722,8 @@
         </p:blipFill>
         <p:spPr>
           <a:xfrm>
-            <a:off x="777240" y="2148840"/>
-            <a:ext cx="5864232" cy="2788920"/>
+            <a:off x="777240" y="2185416"/>
+            <a:ext cx="6953290" cy="3840480"/>
           </a:xfrm>
           <a:prstGeom prst="rect">
             <a:avLst/>
@@ -10152,139 +11732,14 @@
       </p:pic>
       <p:sp>
         <p:nvSpPr>
-          <p:cNvPr id="8" name="TextBox 7"/>
-          <p:cNvSpPr txBox="1"/>
-          <p:nvPr/>
-        </p:nvSpPr>
-        <p:spPr>
-          <a:xfrm>
-            <a:off x="8458200" y="2276856"/>
-            <a:ext cx="2956255" cy="2743200"/>
-          </a:xfrm>
-          <a:prstGeom prst="rect">
-            <a:avLst/>
-          </a:prstGeom>
-          <a:noFill/>
-        </p:spPr>
-        <p:txBody>
-          <a:bodyPr wrap="square" anchor="t" lIns="0" rIns="0" tIns="0" bIns="0">
-            <a:spAutoFit/>
-          </a:bodyPr>
-          <a:lstStyle/>
-          <a:p>
-            <a:pPr algn="l">
-              <a:spcAft>
-                <a:spcPts val="1100"/>
-              </a:spcAft>
-            </a:pPr>
-            <a:r>
-              <a:rPr sz="1350" b="1" i="0">
-                <a:solidFill>
-                  <a:srgbClr val="E0564F"/>
-                </a:solidFill>
-                <a:latin typeface="Calibri"/>
-              </a:rPr>
-              <a:t>—  </a:t>
-            </a:r>
-            <a:r>
-              <a:rPr sz="1350" b="1" i="0">
-                <a:solidFill>
-                  <a:srgbClr val="EEF2F8"/>
-                </a:solidFill>
-                <a:latin typeface="Calibri"/>
-              </a:rPr>
-              <a:t>8× the parameters bought +6 pts. </a:t>
-            </a:r>
-            <a:r>
-              <a:rPr sz="1350" b="0" i="0">
-                <a:solidFill>
-                  <a:srgbClr val="9DAFC7"/>
-                </a:solidFill>
-                <a:latin typeface="Calibri"/>
-              </a:rPr>
-              <a:t>Going from 4B to 32B.</a:t>
-            </a:r>
-          </a:p>
-          <a:p>
-            <a:pPr algn="l">
-              <a:spcAft>
-                <a:spcPts val="1100"/>
-              </a:spcAft>
-            </a:pPr>
-            <a:r>
-              <a:rPr sz="1350" b="1" i="0">
-                <a:solidFill>
-                  <a:srgbClr val="E0564F"/>
-                </a:solidFill>
-                <a:latin typeface="Calibri"/>
-              </a:rPr>
-              <a:t>—  </a:t>
-            </a:r>
-            <a:r>
-              <a:rPr sz="1350" b="1" i="0">
-                <a:solidFill>
-                  <a:srgbClr val="EEF2F8"/>
-                </a:solidFill>
-                <a:latin typeface="Calibri"/>
-              </a:rPr>
-              <a:t>The gap left is +7 pts. </a:t>
-            </a:r>
-            <a:r>
-              <a:rPr sz="1350" b="0" i="0">
-                <a:solidFill>
-                  <a:srgbClr val="9DAFC7"/>
-                </a:solidFill>
-                <a:latin typeface="Calibri"/>
-              </a:rPr>
-              <a:t>Slightly larger than everything that scaling bought.</a:t>
-            </a:r>
-          </a:p>
-          <a:p>
-            <a:pPr algn="l">
-              <a:spcAft>
-                <a:spcPts val="1100"/>
-              </a:spcAft>
-            </a:pPr>
-            <a:r>
-              <a:rPr sz="1350" b="1" i="0">
-                <a:solidFill>
-                  <a:srgbClr val="E0564F"/>
-                </a:solidFill>
-                <a:latin typeface="Calibri"/>
-              </a:rPr>
-              <a:t>—  </a:t>
-            </a:r>
-            <a:r>
-              <a:rPr sz="1350" b="1" i="0">
-                <a:solidFill>
-                  <a:srgbClr val="EEF2F8"/>
-                </a:solidFill>
-                <a:latin typeface="Calibri"/>
-              </a:rPr>
-              <a:t>4B to 8B bought nothing. </a:t>
-            </a:r>
-            <a:r>
-              <a:rPr sz="1350" b="0" i="0">
-                <a:solidFill>
-                  <a:srgbClr val="9DAFC7"/>
-                </a:solidFill>
-                <a:latin typeface="Calibri"/>
-              </a:rPr>
-              <a:t>Size does not buy guard accuracy smoothly.</a:t>
-            </a:r>
-          </a:p>
-        </p:txBody>
-      </p:sp>
-      <p:sp>
-        <p:nvSpPr>
-          <p:cNvPr id="9" name="Rectangle 8"/>
+          <p:cNvPr id="8" name="Rectangle 7"/>
           <p:cNvSpPr/>
           <p:nvPr/>
         </p:nvSpPr>
         <p:spPr>
           <a:xfrm>
-            <a:off x="777240" y="5074920"/>
-            <a:ext cx="10637215" cy="896112"/>
+            <a:off x="8503919" y="2258568"/>
+            <a:ext cx="2910536" cy="1828800"/>
           </a:xfrm>
           <a:prstGeom prst="rect">
             <a:avLst/>
@@ -10323,14 +11778,14 @@
       </p:sp>
       <p:sp>
         <p:nvSpPr>
-          <p:cNvPr id="10" name="TextBox 9"/>
+          <p:cNvPr id="9" name="TextBox 8"/>
           <p:cNvSpPr txBox="1"/>
           <p:nvPr/>
         </p:nvSpPr>
         <p:spPr>
           <a:xfrm>
-            <a:off x="1014984" y="5221224"/>
-            <a:ext cx="10161727" cy="603504"/>
+            <a:off x="8741663" y="2404872"/>
+            <a:ext cx="2435048" cy="1536192"/>
           </a:xfrm>
           <a:prstGeom prst="rect">
             <a:avLst/>
@@ -10355,7 +11810,7 @@
                 </a:solidFill>
                 <a:latin typeface="Calibri"/>
               </a:rPr>
-              <a:t>WHAT THIS IMPLIES FOR A BUILD PLAN</a:t>
+              <a:t>THE PATTERN BEHIND IT</a:t>
             </a:r>
           </a:p>
           <a:p>
@@ -10374,7 +11829,111 @@
                 </a:solidFill>
                 <a:latin typeface="Calibri"/>
               </a:rPr>
-              <a:t>Closing the remaining gap by size alone would take at least another order of magnitude — and 32B is already past the point where a guard is cheap to run on every request, which was the reason to self-host in the first place.</a:t>
+              <a:t>Fine-tuning teaches a model the traffic you trained it on and costs it accuracy on traffic you did not. Read the chart downward: the blue gain shrinks and the red cost grows as the starting model gets stronger.</a:t>
+            </a:r>
+          </a:p>
+        </p:txBody>
+      </p:sp>
+      <p:sp>
+        <p:nvSpPr>
+          <p:cNvPr id="10" name="Rectangle 9"/>
+          <p:cNvSpPr/>
+          <p:nvPr/>
+        </p:nvSpPr>
+        <p:spPr>
+          <a:xfrm>
+            <a:off x="8503919" y="4251960"/>
+            <a:ext cx="2910536" cy="1572768"/>
+          </a:xfrm>
+          <a:prstGeom prst="rect">
+            <a:avLst/>
+          </a:prstGeom>
+          <a:solidFill>
+            <a:srgbClr val="18263D"/>
+          </a:solidFill>
+          <a:ln w="9525">
+            <a:solidFill>
+              <a:srgbClr val="1E3050"/>
+            </a:solidFill>
+          </a:ln>
+          <a:effectLst/>
+        </p:spPr>
+        <p:style>
+          <a:lnRef idx="1">
+            <a:schemeClr val="accent1"/>
+          </a:lnRef>
+          <a:fillRef idx="3">
+            <a:schemeClr val="accent1"/>
+          </a:fillRef>
+          <a:effectRef idx="2">
+            <a:schemeClr val="accent1"/>
+          </a:effectRef>
+          <a:fontRef idx="minor">
+            <a:schemeClr val="lt1"/>
+          </a:fontRef>
+        </p:style>
+        <p:txBody>
+          <a:bodyPr rtlCol="0" anchor="ctr" wrap="square"/>
+          <a:lstStyle/>
+          <a:p>
+            <a:pPr algn="ctr"/>
+          </a:p>
+        </p:txBody>
+      </p:sp>
+      <p:sp>
+        <p:nvSpPr>
+          <p:cNvPr id="11" name="TextBox 10"/>
+          <p:cNvSpPr txBox="1"/>
+          <p:nvPr/>
+        </p:nvSpPr>
+        <p:spPr>
+          <a:xfrm>
+            <a:off x="8741663" y="4398264"/>
+            <a:ext cx="2435048" cy="1280160"/>
+          </a:xfrm>
+          <a:prstGeom prst="rect">
+            <a:avLst/>
+          </a:prstGeom>
+          <a:noFill/>
+        </p:spPr>
+        <p:txBody>
+          <a:bodyPr wrap="square" anchor="t" lIns="0" rIns="0" tIns="0" bIns="0">
+            <a:spAutoFit/>
+          </a:bodyPr>
+          <a:lstStyle/>
+          <a:p>
+            <a:pPr algn="l">
+              <a:spcAft>
+                <a:spcPts val="500"/>
+              </a:spcAft>
+            </a:pPr>
+            <a:r>
+              <a:rPr sz="980" b="1" i="0" spc="110">
+                <a:solidFill>
+                  <a:srgbClr val="E3C285"/>
+                </a:solidFill>
+                <a:latin typeface="Calibri"/>
+              </a:rPr>
+              <a:t>PLANNING CONSEQUENCE</a:t>
+            </a:r>
+          </a:p>
+          <a:p>
+            <a:pPr algn="l">
+              <a:lnSpc>
+                <a:spcPct val="106000"/>
+              </a:lnSpc>
+              <a:spcAft>
+                <a:spcPts val="0"/>
+              </a:spcAft>
+            </a:pPr>
+            <a:r>
+              <a:rPr sz="1100" b="0" i="0">
+                <a:solidFill>
+                  <a:srgbClr val="9DAFC7"/>
+                </a:solidFill>
+                <a:latin typeface="Calibri"/>
+              </a:rPr>
+              <a:t>Budgeting a tuning project to close a vendor gap is not supported here. The best tuned result anywhere (81%) still loses to hosted (90%).</a:t>
             </a:r>
           </a:p>
         </p:txBody>
@@ -10517,7 +12076,7 @@
                 </a:solidFill>
                 <a:latin typeface="Calibri"/>
               </a:rPr>
-              <a:t>WHY THE RULE WORKS</a:t>
+              <a:t>ROUTE TWO: BUY A BIGGER ONE</a:t>
             </a:r>
           </a:p>
         </p:txBody>
@@ -10559,7 +12118,7 @@
                 </a:solidFill>
                 <a:latin typeface="Cambria"/>
               </a:rPr>
-              <a:t>You do not have to choose. Escalating the uncertain fifth buys half the difference</a:t>
+              <a:t>Eight times the parameters bought less than the gap that was left</a:t>
             </a:r>
           </a:p>
         </p:txBody>
@@ -10598,14 +12157,14 @@
                 </a:solidFill>
                 <a:latin typeface="Calibri"/>
               </a:rPr>
-              <a:t>Recall against the share of requests sent out, at a fixed 5% false-alarm budget</a:t>
+              <a:t>Catch rate against model size, same family, same prompt, same rows</a:t>
             </a:r>
           </a:p>
         </p:txBody>
       </p:sp>
       <p:pic>
         <p:nvPicPr>
-          <p:cNvPr id="7" name="Picture 6" descr="exec_cascade.png"/>
+          <p:cNvPr id="7" name="Picture 6" descr="exec_scale.png"/>
           <p:cNvPicPr>
             <a:picLocks noChangeAspect="1"/>
           </p:cNvPicPr>
@@ -10619,8 +12178,8 @@
         </p:blipFill>
         <p:spPr>
           <a:xfrm>
-            <a:off x="777240" y="2167128"/>
-            <a:ext cx="5610201" cy="3108960"/>
+            <a:off x="777240" y="2148840"/>
+            <a:ext cx="5864232" cy="2788920"/>
           </a:xfrm>
           <a:prstGeom prst="rect">
             <a:avLst/>
@@ -10629,24 +12188,149 @@
       </p:pic>
       <p:sp>
         <p:nvSpPr>
-          <p:cNvPr id="8" name="Rectangle 7"/>
+          <p:cNvPr id="8" name="TextBox 7"/>
+          <p:cNvSpPr txBox="1"/>
+          <p:nvPr/>
+        </p:nvSpPr>
+        <p:spPr>
+          <a:xfrm>
+            <a:off x="8458200" y="2276856"/>
+            <a:ext cx="2956255" cy="2743200"/>
+          </a:xfrm>
+          <a:prstGeom prst="rect">
+            <a:avLst/>
+          </a:prstGeom>
+          <a:noFill/>
+        </p:spPr>
+        <p:txBody>
+          <a:bodyPr wrap="square" anchor="t" lIns="0" rIns="0" tIns="0" bIns="0">
+            <a:spAutoFit/>
+          </a:bodyPr>
+          <a:lstStyle/>
+          <a:p>
+            <a:pPr algn="l">
+              <a:spcAft>
+                <a:spcPts val="1100"/>
+              </a:spcAft>
+            </a:pPr>
+            <a:r>
+              <a:rPr sz="1350" b="1" i="0">
+                <a:solidFill>
+                  <a:srgbClr val="E0564F"/>
+                </a:solidFill>
+                <a:latin typeface="Calibri"/>
+              </a:rPr>
+              <a:t>—  </a:t>
+            </a:r>
+            <a:r>
+              <a:rPr sz="1350" b="1" i="0">
+                <a:solidFill>
+                  <a:srgbClr val="EEF2F8"/>
+                </a:solidFill>
+                <a:latin typeface="Calibri"/>
+              </a:rPr>
+              <a:t>8× the parameters bought +6 pts. </a:t>
+            </a:r>
+            <a:r>
+              <a:rPr sz="1350" b="0" i="0">
+                <a:solidFill>
+                  <a:srgbClr val="9DAFC7"/>
+                </a:solidFill>
+                <a:latin typeface="Calibri"/>
+              </a:rPr>
+              <a:t>Going from 4B to 32B.</a:t>
+            </a:r>
+          </a:p>
+          <a:p>
+            <a:pPr algn="l">
+              <a:spcAft>
+                <a:spcPts val="1100"/>
+              </a:spcAft>
+            </a:pPr>
+            <a:r>
+              <a:rPr sz="1350" b="1" i="0">
+                <a:solidFill>
+                  <a:srgbClr val="E0564F"/>
+                </a:solidFill>
+                <a:latin typeface="Calibri"/>
+              </a:rPr>
+              <a:t>—  </a:t>
+            </a:r>
+            <a:r>
+              <a:rPr sz="1350" b="1" i="0">
+                <a:solidFill>
+                  <a:srgbClr val="EEF2F8"/>
+                </a:solidFill>
+                <a:latin typeface="Calibri"/>
+              </a:rPr>
+              <a:t>The gap left is +7 pts. </a:t>
+            </a:r>
+            <a:r>
+              <a:rPr sz="1350" b="0" i="0">
+                <a:solidFill>
+                  <a:srgbClr val="9DAFC7"/>
+                </a:solidFill>
+                <a:latin typeface="Calibri"/>
+              </a:rPr>
+              <a:t>Slightly larger than everything that scaling bought.</a:t>
+            </a:r>
+          </a:p>
+          <a:p>
+            <a:pPr algn="l">
+              <a:spcAft>
+                <a:spcPts val="1100"/>
+              </a:spcAft>
+            </a:pPr>
+            <a:r>
+              <a:rPr sz="1350" b="1" i="0">
+                <a:solidFill>
+                  <a:srgbClr val="E0564F"/>
+                </a:solidFill>
+                <a:latin typeface="Calibri"/>
+              </a:rPr>
+              <a:t>—  </a:t>
+            </a:r>
+            <a:r>
+              <a:rPr sz="1350" b="1" i="0">
+                <a:solidFill>
+                  <a:srgbClr val="EEF2F8"/>
+                </a:solidFill>
+                <a:latin typeface="Calibri"/>
+              </a:rPr>
+              <a:t>4B to 8B bought nothing. </a:t>
+            </a:r>
+            <a:r>
+              <a:rPr sz="1350" b="0" i="0">
+                <a:solidFill>
+                  <a:srgbClr val="9DAFC7"/>
+                </a:solidFill>
+                <a:latin typeface="Calibri"/>
+              </a:rPr>
+              <a:t>Size does not buy guard accuracy smoothly.</a:t>
+            </a:r>
+          </a:p>
+        </p:txBody>
+      </p:sp>
+      <p:sp>
+        <p:nvSpPr>
+          <p:cNvPr id="9" name="Rectangle 8"/>
           <p:cNvSpPr/>
           <p:nvPr/>
         </p:nvSpPr>
         <p:spPr>
           <a:xfrm>
-            <a:off x="8641080" y="2240280"/>
-            <a:ext cx="2773375" cy="1572768"/>
+            <a:off x="777240" y="5074920"/>
+            <a:ext cx="10637215" cy="896112"/>
           </a:xfrm>
           <a:prstGeom prst="rect">
             <a:avLst/>
           </a:prstGeom>
           <a:solidFill>
-            <a:srgbClr val="18263D"/>
+            <a:srgbClr val="331A1C"/>
           </a:solidFill>
           <a:ln w="9525">
             <a:solidFill>
-              <a:srgbClr val="1E3050"/>
+              <a:srgbClr val="4A2427"/>
             </a:solidFill>
           </a:ln>
           <a:effectLst/>
@@ -10675,14 +12359,14 @@
       </p:sp>
       <p:sp>
         <p:nvSpPr>
-          <p:cNvPr id="9" name="TextBox 8"/>
+          <p:cNvPr id="10" name="TextBox 9"/>
           <p:cNvSpPr txBox="1"/>
           <p:nvPr/>
         </p:nvSpPr>
         <p:spPr>
           <a:xfrm>
-            <a:off x="8878824" y="2386584"/>
-            <a:ext cx="2297887" cy="1280160"/>
+            <a:off x="1014984" y="5221224"/>
+            <a:ext cx="10161727" cy="603504"/>
           </a:xfrm>
           <a:prstGeom prst="rect">
             <a:avLst/>
@@ -10703,11 +12387,11 @@
             <a:r>
               <a:rPr sz="980" b="1" i="0" spc="110">
                 <a:solidFill>
-                  <a:srgbClr val="BFD8F5"/>
-                </a:solidFill>
-                <a:latin typeface="Calibri"/>
-              </a:rPr>
-              <a:t>THE CURVE IS STEEP EARLY</a:t>
+                  <a:srgbClr val="F08A7F"/>
+                </a:solidFill>
+                <a:latin typeface="Calibri"/>
+              </a:rPr>
+              <a:t>WHAT THIS IMPLIES FOR A BUILD PLAN</a:t>
             </a:r>
           </a:p>
           <a:p>
@@ -10726,215 +12410,7 @@
                 </a:solidFill>
                 <a:latin typeface="Calibri"/>
               </a:rPr>
-              <a:t>The first requests escalated are the ones the in-house guard is least sure about, so they carry the most information. Value per escalated request falls as the share rises — which is why a fifth buys half.</a:t>
-            </a:r>
-          </a:p>
-        </p:txBody>
-      </p:sp>
-      <p:sp>
-        <p:nvSpPr>
-          <p:cNvPr id="10" name="Rectangle 9"/>
-          <p:cNvSpPr/>
-          <p:nvPr/>
-        </p:nvSpPr>
-        <p:spPr>
-          <a:xfrm>
-            <a:off x="8641080" y="3977640"/>
-            <a:ext cx="2773375" cy="1371600"/>
-          </a:xfrm>
-          <a:prstGeom prst="rect">
-            <a:avLst/>
-          </a:prstGeom>
-          <a:solidFill>
-            <a:srgbClr val="18263D"/>
-          </a:solidFill>
-          <a:ln w="9525">
-            <a:solidFill>
-              <a:srgbClr val="1E3050"/>
-            </a:solidFill>
-          </a:ln>
-          <a:effectLst/>
-        </p:spPr>
-        <p:style>
-          <a:lnRef idx="1">
-            <a:schemeClr val="accent1"/>
-          </a:lnRef>
-          <a:fillRef idx="3">
-            <a:schemeClr val="accent1"/>
-          </a:fillRef>
-          <a:effectRef idx="2">
-            <a:schemeClr val="accent1"/>
-          </a:effectRef>
-          <a:fontRef idx="minor">
-            <a:schemeClr val="lt1"/>
-          </a:fontRef>
-        </p:style>
-        <p:txBody>
-          <a:bodyPr rtlCol="0" anchor="ctr" wrap="square"/>
-          <a:lstStyle/>
-          <a:p>
-            <a:pPr algn="ctr"/>
-          </a:p>
-        </p:txBody>
-      </p:sp>
-      <p:sp>
-        <p:nvSpPr>
-          <p:cNvPr id="11" name="TextBox 10"/>
-          <p:cNvSpPr txBox="1"/>
-          <p:nvPr/>
-        </p:nvSpPr>
-        <p:spPr>
-          <a:xfrm>
-            <a:off x="8878824" y="4123944"/>
-            <a:ext cx="2297887" cy="1078992"/>
-          </a:xfrm>
-          <a:prstGeom prst="rect">
-            <a:avLst/>
-          </a:prstGeom>
-          <a:noFill/>
-        </p:spPr>
-        <p:txBody>
-          <a:bodyPr wrap="square" anchor="t" lIns="0" rIns="0" tIns="0" bIns="0">
-            <a:spAutoFit/>
-          </a:bodyPr>
-          <a:lstStyle/>
-          <a:p>
-            <a:pPr algn="l">
-              <a:spcAft>
-                <a:spcPts val="500"/>
-              </a:spcAft>
-            </a:pPr>
-            <a:r>
-              <a:rPr sz="980" b="1" i="0" spc="110">
-                <a:solidFill>
-                  <a:srgbClr val="8FD3B6"/>
-                </a:solidFill>
-                <a:latin typeface="Calibri"/>
-              </a:rPr>
-              <a:t>IT IS A DIAL, NOT A SWITCH</a:t>
-            </a:r>
-          </a:p>
-          <a:p>
-            <a:pPr algn="l">
-              <a:lnSpc>
-                <a:spcPct val="106000"/>
-              </a:lnSpc>
-              <a:spcAft>
-                <a:spcPts val="0"/>
-              </a:spcAft>
-            </a:pPr>
-            <a:r>
-              <a:rPr sz="1100" b="0" i="0">
-                <a:solidFill>
-                  <a:srgbClr val="9DAFC7"/>
-                </a:solidFill>
-                <a:latin typeface="Calibri"/>
-              </a:rPr>
-              <a:t>Legal sets the ceiling on what may leave; budget sets the rest. Pick a point on the curve — the architecture does not change.</a:t>
-            </a:r>
-          </a:p>
-        </p:txBody>
-      </p:sp>
-      <p:sp>
-        <p:nvSpPr>
-          <p:cNvPr id="12" name="Rectangle 11"/>
-          <p:cNvSpPr/>
-          <p:nvPr/>
-        </p:nvSpPr>
-        <p:spPr>
-          <a:xfrm>
-            <a:off x="777240" y="5458968"/>
-            <a:ext cx="10637215" cy="841248"/>
-          </a:xfrm>
-          <a:prstGeom prst="rect">
-            <a:avLst/>
-          </a:prstGeom>
-          <a:solidFill>
-            <a:srgbClr val="18263D"/>
-          </a:solidFill>
-          <a:ln w="9525">
-            <a:solidFill>
-              <a:srgbClr val="1E3050"/>
-            </a:solidFill>
-          </a:ln>
-          <a:effectLst/>
-        </p:spPr>
-        <p:style>
-          <a:lnRef idx="1">
-            <a:schemeClr val="accent1"/>
-          </a:lnRef>
-          <a:fillRef idx="3">
-            <a:schemeClr val="accent1"/>
-          </a:fillRef>
-          <a:effectRef idx="2">
-            <a:schemeClr val="accent1"/>
-          </a:effectRef>
-          <a:fontRef idx="minor">
-            <a:schemeClr val="lt1"/>
-          </a:fontRef>
-        </p:style>
-        <p:txBody>
-          <a:bodyPr rtlCol="0" anchor="ctr" wrap="square"/>
-          <a:lstStyle/>
-          <a:p>
-            <a:pPr algn="ctr"/>
-          </a:p>
-        </p:txBody>
-      </p:sp>
-      <p:sp>
-        <p:nvSpPr>
-          <p:cNvPr id="13" name="TextBox 12"/>
-          <p:cNvSpPr txBox="1"/>
-          <p:nvPr/>
-        </p:nvSpPr>
-        <p:spPr>
-          <a:xfrm>
-            <a:off x="1014984" y="5605272"/>
-            <a:ext cx="10161727" cy="548640"/>
-          </a:xfrm>
-          <a:prstGeom prst="rect">
-            <a:avLst/>
-          </a:prstGeom>
-          <a:noFill/>
-        </p:spPr>
-        <p:txBody>
-          <a:bodyPr wrap="square" anchor="t" lIns="0" rIns="0" tIns="0" bIns="0">
-            <a:spAutoFit/>
-          </a:bodyPr>
-          <a:lstStyle/>
-          <a:p>
-            <a:pPr algn="l">
-              <a:spcAft>
-                <a:spcPts val="500"/>
-              </a:spcAft>
-            </a:pPr>
-            <a:r>
-              <a:rPr sz="980" b="1" i="0" spc="110">
-                <a:solidFill>
-                  <a:srgbClr val="E3C285"/>
-                </a:solidFill>
-                <a:latin typeface="Calibri"/>
-              </a:rPr>
-              <a:t>WHAT THIS COSTS</a:t>
-            </a:r>
-          </a:p>
-          <a:p>
-            <a:pPr algn="l">
-              <a:lnSpc>
-                <a:spcPct val="106000"/>
-              </a:lnSpc>
-              <a:spcAft>
-                <a:spcPts val="0"/>
-              </a:spcAft>
-            </a:pPr>
-            <a:r>
-              <a:rPr sz="1100" b="0" i="0">
-                <a:solidFill>
-                  <a:srgbClr val="9DAFC7"/>
-                </a:solidFill>
-                <a:latin typeface="Calibri"/>
-              </a:rPr>
-              <a:t>At a 20% escalated share: about $0.16 per thousand requests instead of $0.80, and the 1,553 ms hosted round-trip lands on one request in five rather than on all of them.</a:t>
+              <a:t>Closing the remaining gap by size alone would take at least another order of magnitude — and 32B is already past the point where a guard is cheap to run on every request, which was the reason to self-host in the first place.</a:t>
             </a:r>
           </a:p>
         </p:txBody>
@@ -11077,7 +12553,7 @@
                 </a:solidFill>
                 <a:latin typeface="Calibri"/>
               </a:rPr>
-              <a:t>IF NOTHING MAY LEAVE</a:t>
+              <a:t>WHY THE RULE WORKS</a:t>
             </a:r>
           </a:p>
         </p:txBody>
@@ -11119,7 +12595,7 @@
                 </a:solidFill>
                 <a:latin typeface="Cambria"/>
               </a:rPr>
-              <a:t>Combining our own guards helps a little. It does not reach the hosted model</a:t>
+              <a:t>You do not have to choose. Escalating the uncertain fifth buys half the difference</a:t>
             </a:r>
           </a:p>
         </p:txBody>
@@ -11158,21 +12634,45 @@
                 </a:solidFill>
                 <a:latin typeface="Calibri"/>
               </a:rPr>
-              <a:t>Every option below priced against our strongest single in-house guard (83%), with what each costs per request</a:t>
-            </a:r>
-          </a:p>
-        </p:txBody>
-      </p:sp>
-      <p:sp>
-        <p:nvSpPr>
-          <p:cNvPr id="7" name="Rectangle 6"/>
+              <a:t>Recall against the share of requests sent out, at a fixed 5% false-alarm budget</a:t>
+            </a:r>
+          </a:p>
+        </p:txBody>
+      </p:sp>
+      <p:pic>
+        <p:nvPicPr>
+          <p:cNvPr id="7" name="Picture 6" descr="exec_cascade.png"/>
+          <p:cNvPicPr>
+            <a:picLocks noChangeAspect="1"/>
+          </p:cNvPicPr>
+          <p:nvPr/>
+        </p:nvPicPr>
+        <p:blipFill>
+          <a:blip r:embed="rId2"/>
+          <a:stretch>
+            <a:fillRect/>
+          </a:stretch>
+        </p:blipFill>
+        <p:spPr>
+          <a:xfrm>
+            <a:off x="777240" y="2167128"/>
+            <a:ext cx="5610201" cy="3108960"/>
+          </a:xfrm>
+          <a:prstGeom prst="rect">
+            <a:avLst/>
+          </a:prstGeom>
+        </p:spPr>
+      </p:pic>
+      <p:sp>
+        <p:nvSpPr>
+          <p:cNvPr id="8" name="Rectangle 7"/>
           <p:cNvSpPr/>
           <p:nvPr/>
         </p:nvSpPr>
         <p:spPr>
           <a:xfrm>
-            <a:off x="777240" y="2276856"/>
-            <a:ext cx="10637215" cy="512064"/>
+            <a:off x="8641080" y="2240280"/>
+            <a:ext cx="2773375" cy="1572768"/>
           </a:xfrm>
           <a:prstGeom prst="rect">
             <a:avLst/>
@@ -11211,176 +12711,78 @@
       </p:sp>
       <p:sp>
         <p:nvSpPr>
-          <p:cNvPr id="8" name="TextBox 7"/>
+          <p:cNvPr id="9" name="TextBox 8"/>
           <p:cNvSpPr txBox="1"/>
           <p:nvPr/>
         </p:nvSpPr>
         <p:spPr>
           <a:xfrm>
-            <a:off x="905256" y="2276856"/>
-            <a:ext cx="3360621" cy="512064"/>
-          </a:xfrm>
-          <a:prstGeom prst="rect">
-            <a:avLst/>
-          </a:prstGeom>
-          <a:noFill/>
-        </p:spPr>
-        <p:txBody>
-          <a:bodyPr wrap="square" anchor="ctr" lIns="0" rIns="0" tIns="0" bIns="0">
+            <a:off x="8878824" y="2386584"/>
+            <a:ext cx="2297887" cy="1280160"/>
+          </a:xfrm>
+          <a:prstGeom prst="rect">
+            <a:avLst/>
+          </a:prstGeom>
+          <a:noFill/>
+        </p:spPr>
+        <p:txBody>
+          <a:bodyPr wrap="square" anchor="t" lIns="0" rIns="0" tIns="0" bIns="0">
             <a:spAutoFit/>
           </a:bodyPr>
           <a:lstStyle/>
           <a:p>
             <a:pPr algn="l">
               <a:spcAft>
+                <a:spcPts val="500"/>
+              </a:spcAft>
+            </a:pPr>
+            <a:r>
+              <a:rPr sz="980" b="1" i="0" spc="110">
+                <a:solidFill>
+                  <a:srgbClr val="BFD8F5"/>
+                </a:solidFill>
+                <a:latin typeface="Calibri"/>
+              </a:rPr>
+              <a:t>THE CURVE IS STEEP EARLY</a:t>
+            </a:r>
+          </a:p>
+          <a:p>
+            <a:pPr algn="l">
+              <a:lnSpc>
+                <a:spcPct val="106000"/>
+              </a:lnSpc>
+              <a:spcAft>
                 <a:spcPts val="0"/>
               </a:spcAft>
             </a:pPr>
             <a:r>
-              <a:rPr sz="960" b="1" i="0">
-                <a:solidFill>
-                  <a:srgbClr val="BFD8F5"/>
-                </a:solidFill>
-                <a:latin typeface="Calibri"/>
-              </a:rPr>
-              <a:t>Option</a:t>
-            </a:r>
-          </a:p>
-        </p:txBody>
-      </p:sp>
-      <p:sp>
-        <p:nvSpPr>
-          <p:cNvPr id="9" name="TextBox 8"/>
-          <p:cNvSpPr txBox="1"/>
-          <p:nvPr/>
-        </p:nvSpPr>
-        <p:spPr>
-          <a:xfrm>
-            <a:off x="4521909" y="2276856"/>
-            <a:ext cx="1552294" cy="512064"/>
-          </a:xfrm>
-          <a:prstGeom prst="rect">
-            <a:avLst/>
-          </a:prstGeom>
-          <a:noFill/>
-        </p:spPr>
-        <p:txBody>
-          <a:bodyPr wrap="square" anchor="ctr" lIns="0" rIns="0" tIns="0" bIns="0">
-            <a:spAutoFit/>
-          </a:bodyPr>
-          <a:lstStyle/>
-          <a:p>
-            <a:pPr algn="ctr">
-              <a:spcAft>
-                <a:spcPts val="0"/>
-              </a:spcAft>
-            </a:pPr>
-            <a:r>
-              <a:rPr sz="960" b="1" i="0">
-                <a:solidFill>
-                  <a:srgbClr val="BFD8F5"/>
-                </a:solidFill>
-                <a:latin typeface="Calibri"/>
-              </a:rPr>
-              <a:t>Catch rate</a:t>
-            </a:r>
-          </a:p>
-        </p:txBody>
-      </p:sp>
-      <p:sp>
-        <p:nvSpPr>
-          <p:cNvPr id="10" name="TextBox 9"/>
-          <p:cNvSpPr txBox="1"/>
-          <p:nvPr/>
-        </p:nvSpPr>
-        <p:spPr>
-          <a:xfrm>
-            <a:off x="6330235" y="2276856"/>
-            <a:ext cx="2509643" cy="512064"/>
-          </a:xfrm>
-          <a:prstGeom prst="rect">
-            <a:avLst/>
-          </a:prstGeom>
-          <a:noFill/>
-        </p:spPr>
-        <p:txBody>
-          <a:bodyPr wrap="square" anchor="ctr" lIns="0" rIns="0" tIns="0" bIns="0">
-            <a:spAutoFit/>
-          </a:bodyPr>
-          <a:lstStyle/>
-          <a:p>
-            <a:pPr algn="ctr">
-              <a:spcAft>
-                <a:spcPts val="0"/>
-              </a:spcAft>
-            </a:pPr>
-            <a:r>
-              <a:rPr sz="960" b="1" i="0">
-                <a:solidFill>
-                  <a:srgbClr val="BFD8F5"/>
-                </a:solidFill>
-                <a:latin typeface="Calibri"/>
-              </a:rPr>
-              <a:t>Cost per request</a:t>
-            </a:r>
-          </a:p>
-        </p:txBody>
-      </p:sp>
-      <p:sp>
-        <p:nvSpPr>
-          <p:cNvPr id="11" name="TextBox 10"/>
-          <p:cNvSpPr txBox="1"/>
-          <p:nvPr/>
-        </p:nvSpPr>
-        <p:spPr>
-          <a:xfrm>
-            <a:off x="9095910" y="2276856"/>
-            <a:ext cx="2190527" cy="512064"/>
-          </a:xfrm>
-          <a:prstGeom prst="rect">
-            <a:avLst/>
-          </a:prstGeom>
-          <a:noFill/>
-        </p:spPr>
-        <p:txBody>
-          <a:bodyPr wrap="square" anchor="ctr" lIns="0" rIns="0" tIns="0" bIns="0">
-            <a:spAutoFit/>
-          </a:bodyPr>
-          <a:lstStyle/>
-          <a:p>
-            <a:pPr algn="ctr">
-              <a:spcAft>
-                <a:spcPts val="0"/>
-              </a:spcAft>
-            </a:pPr>
-            <a:r>
-              <a:rPr sz="960" b="1" i="0">
-                <a:solidFill>
-                  <a:srgbClr val="BFD8F5"/>
-                </a:solidFill>
-                <a:latin typeface="Calibri"/>
-              </a:rPr>
-              <a:t>Verdict</a:t>
-            </a:r>
-          </a:p>
-        </p:txBody>
-      </p:sp>
-      <p:sp>
-        <p:nvSpPr>
-          <p:cNvPr id="12" name="Rectangle 11"/>
+              <a:rPr sz="1100" b="0" i="0">
+                <a:solidFill>
+                  <a:srgbClr val="9DAFC7"/>
+                </a:solidFill>
+                <a:latin typeface="Calibri"/>
+              </a:rPr>
+              <a:t>The first requests escalated are the ones the in-house guard is least sure about, so they carry the most information. Value per escalated request falls as the share rises — which is why a fifth buys half.</a:t>
+            </a:r>
+          </a:p>
+        </p:txBody>
+      </p:sp>
+      <p:sp>
+        <p:nvSpPr>
+          <p:cNvPr id="10" name="Rectangle 9"/>
           <p:cNvSpPr/>
           <p:nvPr/>
         </p:nvSpPr>
         <p:spPr>
           <a:xfrm>
-            <a:off x="777240" y="2788920"/>
-            <a:ext cx="10637215" cy="512064"/>
+            <a:off x="8641080" y="3977640"/>
+            <a:ext cx="2773375" cy="1371600"/>
           </a:xfrm>
           <a:prstGeom prst="rect">
             <a:avLst/>
           </a:prstGeom>
           <a:solidFill>
-            <a:srgbClr val="0C1424"/>
+            <a:srgbClr val="18263D"/>
           </a:solidFill>
           <a:ln w="9525">
             <a:solidFill>
@@ -11413,170 +12815,72 @@
       </p:sp>
       <p:sp>
         <p:nvSpPr>
-          <p:cNvPr id="13" name="TextBox 12"/>
+          <p:cNvPr id="11" name="TextBox 10"/>
           <p:cNvSpPr txBox="1"/>
           <p:nvPr/>
         </p:nvSpPr>
         <p:spPr>
           <a:xfrm>
-            <a:off x="905256" y="2788920"/>
-            <a:ext cx="3360621" cy="512064"/>
-          </a:xfrm>
-          <a:prstGeom prst="rect">
-            <a:avLst/>
-          </a:prstGeom>
-          <a:noFill/>
-        </p:spPr>
-        <p:txBody>
-          <a:bodyPr wrap="square" anchor="ctr" lIns="0" rIns="0" tIns="0" bIns="0">
+            <a:off x="8878824" y="4123944"/>
+            <a:ext cx="2297887" cy="1078992"/>
+          </a:xfrm>
+          <a:prstGeom prst="rect">
+            <a:avLst/>
+          </a:prstGeom>
+          <a:noFill/>
+        </p:spPr>
+        <p:txBody>
+          <a:bodyPr wrap="square" anchor="t" lIns="0" rIns="0" tIns="0" bIns="0">
             <a:spAutoFit/>
           </a:bodyPr>
           <a:lstStyle/>
           <a:p>
             <a:pPr algn="l">
               <a:spcAft>
+                <a:spcPts val="500"/>
+              </a:spcAft>
+            </a:pPr>
+            <a:r>
+              <a:rPr sz="980" b="1" i="0" spc="110">
+                <a:solidFill>
+                  <a:srgbClr val="8FD3B6"/>
+                </a:solidFill>
+                <a:latin typeface="Calibri"/>
+              </a:rPr>
+              <a:t>IT IS A DIAL, NOT A SWITCH</a:t>
+            </a:r>
+          </a:p>
+          <a:p>
+            <a:pPr algn="l">
+              <a:lnSpc>
+                <a:spcPct val="106000"/>
+              </a:lnSpc>
+              <a:spcAft>
                 <a:spcPts val="0"/>
               </a:spcAft>
             </a:pPr>
             <a:r>
-              <a:rPr sz="960" b="1" i="0">
+              <a:rPr sz="1100" b="0" i="0">
                 <a:solidFill>
                   <a:srgbClr val="9DAFC7"/>
                 </a:solidFill>
                 <a:latin typeface="Calibri"/>
               </a:rPr>
-              <a:t>Best single in-house guard</a:t>
-            </a:r>
-          </a:p>
-        </p:txBody>
-      </p:sp>
-      <p:sp>
-        <p:nvSpPr>
-          <p:cNvPr id="14" name="TextBox 13"/>
-          <p:cNvSpPr txBox="1"/>
-          <p:nvPr/>
-        </p:nvSpPr>
-        <p:spPr>
-          <a:xfrm>
-            <a:off x="4521909" y="2788920"/>
-            <a:ext cx="1552294" cy="512064"/>
-          </a:xfrm>
-          <a:prstGeom prst="rect">
-            <a:avLst/>
-          </a:prstGeom>
-          <a:noFill/>
-        </p:spPr>
-        <p:txBody>
-          <a:bodyPr wrap="square" anchor="ctr" lIns="0" rIns="0" tIns="0" bIns="0">
-            <a:spAutoFit/>
-          </a:bodyPr>
-          <a:lstStyle/>
-          <a:p>
-            <a:pPr algn="ctr">
-              <a:spcAft>
-                <a:spcPts val="0"/>
-              </a:spcAft>
-            </a:pPr>
-            <a:r>
-              <a:rPr sz="960" b="0" i="0">
-                <a:solidFill>
-                  <a:srgbClr val="9DAFC7"/>
-                </a:solidFill>
-                <a:latin typeface="Calibri"/>
-              </a:rPr>
-              <a:t>83%</a:t>
-            </a:r>
-          </a:p>
-        </p:txBody>
-      </p:sp>
-      <p:sp>
-        <p:nvSpPr>
-          <p:cNvPr id="15" name="TextBox 14"/>
-          <p:cNvSpPr txBox="1"/>
-          <p:nvPr/>
-        </p:nvSpPr>
-        <p:spPr>
-          <a:xfrm>
-            <a:off x="6330235" y="2788920"/>
-            <a:ext cx="2509643" cy="512064"/>
-          </a:xfrm>
-          <a:prstGeom prst="rect">
-            <a:avLst/>
-          </a:prstGeom>
-          <a:noFill/>
-        </p:spPr>
-        <p:txBody>
-          <a:bodyPr wrap="square" anchor="ctr" lIns="0" rIns="0" tIns="0" bIns="0">
-            <a:spAutoFit/>
-          </a:bodyPr>
-          <a:lstStyle/>
-          <a:p>
-            <a:pPr algn="ctr">
-              <a:spcAft>
-                <a:spcPts val="0"/>
-              </a:spcAft>
-            </a:pPr>
-            <a:r>
-              <a:rPr sz="960" b="0" i="0">
-                <a:solidFill>
-                  <a:srgbClr val="9DAFC7"/>
-                </a:solidFill>
-                <a:latin typeface="Calibri"/>
-              </a:rPr>
-              <a:t>1 model call</a:t>
-            </a:r>
-          </a:p>
-        </p:txBody>
-      </p:sp>
-      <p:sp>
-        <p:nvSpPr>
-          <p:cNvPr id="16" name="TextBox 15"/>
-          <p:cNvSpPr txBox="1"/>
-          <p:nvPr/>
-        </p:nvSpPr>
-        <p:spPr>
-          <a:xfrm>
-            <a:off x="9095910" y="2788920"/>
-            <a:ext cx="2190527" cy="512064"/>
-          </a:xfrm>
-          <a:prstGeom prst="rect">
-            <a:avLst/>
-          </a:prstGeom>
-          <a:noFill/>
-        </p:spPr>
-        <p:txBody>
-          <a:bodyPr wrap="square" anchor="ctr" lIns="0" rIns="0" tIns="0" bIns="0">
-            <a:spAutoFit/>
-          </a:bodyPr>
-          <a:lstStyle/>
-          <a:p>
-            <a:pPr algn="ctr">
-              <a:spcAft>
-                <a:spcPts val="0"/>
-              </a:spcAft>
-            </a:pPr>
-            <a:r>
-              <a:rPr sz="960" b="0" i="0">
-                <a:solidFill>
-                  <a:srgbClr val="6B7F9F"/>
-                </a:solidFill>
-                <a:latin typeface="Calibri"/>
-              </a:rPr>
-              <a:t>the baseline</a:t>
-            </a:r>
-          </a:p>
-        </p:txBody>
-      </p:sp>
-      <p:sp>
-        <p:nvSpPr>
-          <p:cNvPr id="17" name="Rectangle 16"/>
+              <a:t>Legal sets the ceiling on what may leave; budget sets the rest. Pick a point on the curve — the architecture does not change.</a:t>
+            </a:r>
+          </a:p>
+        </p:txBody>
+      </p:sp>
+      <p:sp>
+        <p:nvSpPr>
+          <p:cNvPr id="12" name="Rectangle 11"/>
           <p:cNvSpPr/>
           <p:nvPr/>
         </p:nvSpPr>
         <p:spPr>
           <a:xfrm>
-            <a:off x="777240" y="3300984"/>
-            <a:ext cx="10637215" cy="512064"/>
+            <a:off x="777240" y="5458968"/>
+            <a:ext cx="10637215" cy="841248"/>
           </a:xfrm>
           <a:prstGeom prst="rect">
             <a:avLst/>
@@ -11615,822 +12919,14 @@
       </p:sp>
       <p:sp>
         <p:nvSpPr>
-          <p:cNvPr id="18" name="TextBox 17"/>
+          <p:cNvPr id="13" name="TextBox 12"/>
           <p:cNvSpPr txBox="1"/>
           <p:nvPr/>
         </p:nvSpPr>
         <p:spPr>
           <a:xfrm>
-            <a:off x="905256" y="3300984"/>
-            <a:ext cx="3360621" cy="512064"/>
-          </a:xfrm>
-          <a:prstGeom prst="rect">
-            <a:avLst/>
-          </a:prstGeom>
-          <a:noFill/>
-        </p:spPr>
-        <p:txBody>
-          <a:bodyPr wrap="square" anchor="ctr" lIns="0" rIns="0" tIns="0" bIns="0">
-            <a:spAutoFit/>
-          </a:bodyPr>
-          <a:lstStyle/>
-          <a:p>
-            <a:pPr algn="l">
-              <a:spcAft>
-                <a:spcPts val="0"/>
-              </a:spcAft>
-            </a:pPr>
-            <a:r>
-              <a:rPr sz="960" b="1" i="0">
-                <a:solidFill>
-                  <a:srgbClr val="9DAFC7"/>
-                </a:solidFill>
-                <a:latin typeface="Calibri"/>
-              </a:rPr>
-              <a:t>Average the 5 tuning runs of one guard</a:t>
-            </a:r>
-          </a:p>
-        </p:txBody>
-      </p:sp>
-      <p:sp>
-        <p:nvSpPr>
-          <p:cNvPr id="19" name="TextBox 18"/>
-          <p:cNvSpPr txBox="1"/>
-          <p:nvPr/>
-        </p:nvSpPr>
-        <p:spPr>
-          <a:xfrm>
-            <a:off x="4521909" y="3300984"/>
-            <a:ext cx="1552294" cy="512064"/>
-          </a:xfrm>
-          <a:prstGeom prst="rect">
-            <a:avLst/>
-          </a:prstGeom>
-          <a:noFill/>
-        </p:spPr>
-        <p:txBody>
-          <a:bodyPr wrap="square" anchor="ctr" lIns="0" rIns="0" tIns="0" bIns="0">
-            <a:spAutoFit/>
-          </a:bodyPr>
-          <a:lstStyle/>
-          <a:p>
-            <a:pPr algn="ctr">
-              <a:spcAft>
-                <a:spcPts val="0"/>
-              </a:spcAft>
-            </a:pPr>
-            <a:r>
-              <a:rPr sz="960" b="0" i="0">
-                <a:solidFill>
-                  <a:srgbClr val="9DAFC7"/>
-                </a:solidFill>
-                <a:latin typeface="Calibri"/>
-              </a:rPr>
-              <a:t>+0.026 on top</a:t>
-            </a:r>
-          </a:p>
-        </p:txBody>
-      </p:sp>
-      <p:sp>
-        <p:nvSpPr>
-          <p:cNvPr id="20" name="TextBox 19"/>
-          <p:cNvSpPr txBox="1"/>
-          <p:nvPr/>
-        </p:nvSpPr>
-        <p:spPr>
-          <a:xfrm>
-            <a:off x="6330235" y="3300984"/>
-            <a:ext cx="2509643" cy="512064"/>
-          </a:xfrm>
-          <a:prstGeom prst="rect">
-            <a:avLst/>
-          </a:prstGeom>
-          <a:noFill/>
-        </p:spPr>
-        <p:txBody>
-          <a:bodyPr wrap="square" anchor="ctr" lIns="0" rIns="0" tIns="0" bIns="0">
-            <a:spAutoFit/>
-          </a:bodyPr>
-          <a:lstStyle/>
-          <a:p>
-            <a:pPr algn="ctr">
-              <a:spcAft>
-                <a:spcPts val="0"/>
-              </a:spcAft>
-            </a:pPr>
-            <a:r>
-              <a:rPr sz="960" b="0" i="0">
-                <a:solidFill>
-                  <a:srgbClr val="9DAFC7"/>
-                </a:solidFill>
-                <a:latin typeface="Calibri"/>
-              </a:rPr>
-              <a:t>already paid for</a:t>
-            </a:r>
-          </a:p>
-        </p:txBody>
-      </p:sp>
-      <p:sp>
-        <p:nvSpPr>
-          <p:cNvPr id="21" name="TextBox 20"/>
-          <p:cNvSpPr txBox="1"/>
-          <p:nvPr/>
-        </p:nvSpPr>
-        <p:spPr>
-          <a:xfrm>
-            <a:off x="9095910" y="3300984"/>
-            <a:ext cx="2190527" cy="512064"/>
-          </a:xfrm>
-          <a:prstGeom prst="rect">
-            <a:avLst/>
-          </a:prstGeom>
-          <a:noFill/>
-        </p:spPr>
-        <p:txBody>
-          <a:bodyPr wrap="square" anchor="ctr" lIns="0" rIns="0" tIns="0" bIns="0">
-            <a:spAutoFit/>
-          </a:bodyPr>
-          <a:lstStyle/>
-          <a:p>
-            <a:pPr algn="ctr">
-              <a:spcAft>
-                <a:spcPts val="0"/>
-              </a:spcAft>
-            </a:pPr>
-            <a:r>
-              <a:rPr sz="960" b="0" i="0">
-                <a:solidFill>
-                  <a:srgbClr val="8FD3B6"/>
-                </a:solidFill>
-                <a:latin typeface="Calibri"/>
-              </a:rPr>
-              <a:t>worth doing</a:t>
-            </a:r>
-          </a:p>
-        </p:txBody>
-      </p:sp>
-      <p:sp>
-        <p:nvSpPr>
-          <p:cNvPr id="22" name="Rectangle 21"/>
-          <p:cNvSpPr/>
-          <p:nvPr/>
-        </p:nvSpPr>
-        <p:spPr>
-          <a:xfrm>
-            <a:off x="777240" y="3813048"/>
-            <a:ext cx="10637215" cy="512064"/>
-          </a:xfrm>
-          <a:prstGeom prst="rect">
-            <a:avLst/>
-          </a:prstGeom>
-          <a:solidFill>
-            <a:srgbClr val="0C1424"/>
-          </a:solidFill>
-          <a:ln w="9525">
-            <a:solidFill>
-              <a:srgbClr val="1E3050"/>
-            </a:solidFill>
-          </a:ln>
-          <a:effectLst/>
-        </p:spPr>
-        <p:style>
-          <a:lnRef idx="1">
-            <a:schemeClr val="accent1"/>
-          </a:lnRef>
-          <a:fillRef idx="3">
-            <a:schemeClr val="accent1"/>
-          </a:fillRef>
-          <a:effectRef idx="2">
-            <a:schemeClr val="accent1"/>
-          </a:effectRef>
-          <a:fontRef idx="minor">
-            <a:schemeClr val="lt1"/>
-          </a:fontRef>
-        </p:style>
-        <p:txBody>
-          <a:bodyPr rtlCol="0" anchor="ctr" wrap="square"/>
-          <a:lstStyle/>
-          <a:p>
-            <a:pPr algn="ctr"/>
-          </a:p>
-        </p:txBody>
-      </p:sp>
-      <p:sp>
-        <p:nvSpPr>
-          <p:cNvPr id="23" name="TextBox 22"/>
-          <p:cNvSpPr txBox="1"/>
-          <p:nvPr/>
-        </p:nvSpPr>
-        <p:spPr>
-          <a:xfrm>
-            <a:off x="905256" y="3813048"/>
-            <a:ext cx="3360621" cy="512064"/>
-          </a:xfrm>
-          <a:prstGeom prst="rect">
-            <a:avLst/>
-          </a:prstGeom>
-          <a:noFill/>
-        </p:spPr>
-        <p:txBody>
-          <a:bodyPr wrap="square" anchor="ctr" lIns="0" rIns="0" tIns="0" bIns="0">
-            <a:spAutoFit/>
-          </a:bodyPr>
-          <a:lstStyle/>
-          <a:p>
-            <a:pPr algn="l">
-              <a:spcAft>
-                <a:spcPts val="0"/>
-              </a:spcAft>
-            </a:pPr>
-            <a:r>
-              <a:rPr sz="960" b="1" i="0">
-                <a:solidFill>
-                  <a:srgbClr val="9DAFC7"/>
-                </a:solidFill>
-                <a:latin typeface="Calibri"/>
-              </a:rPr>
-              <a:t>Average all 18 guards equally</a:t>
-            </a:r>
-          </a:p>
-        </p:txBody>
-      </p:sp>
-      <p:sp>
-        <p:nvSpPr>
-          <p:cNvPr id="24" name="TextBox 23"/>
-          <p:cNvSpPr txBox="1"/>
-          <p:nvPr/>
-        </p:nvSpPr>
-        <p:spPr>
-          <a:xfrm>
-            <a:off x="4521909" y="3813048"/>
-            <a:ext cx="1552294" cy="512064"/>
-          </a:xfrm>
-          <a:prstGeom prst="rect">
-            <a:avLst/>
-          </a:prstGeom>
-          <a:noFill/>
-        </p:spPr>
-        <p:txBody>
-          <a:bodyPr wrap="square" anchor="ctr" lIns="0" rIns="0" tIns="0" bIns="0">
-            <a:spAutoFit/>
-          </a:bodyPr>
-          <a:lstStyle/>
-          <a:p>
-            <a:pPr algn="ctr">
-              <a:spcAft>
-                <a:spcPts val="0"/>
-              </a:spcAft>
-            </a:pPr>
-            <a:r>
-              <a:rPr sz="960" b="0" i="0">
-                <a:solidFill>
-                  <a:srgbClr val="9DAFC7"/>
-                </a:solidFill>
-                <a:latin typeface="Calibri"/>
-              </a:rPr>
-              <a:t>79%</a:t>
-            </a:r>
-          </a:p>
-        </p:txBody>
-      </p:sp>
-      <p:sp>
-        <p:nvSpPr>
-          <p:cNvPr id="25" name="TextBox 24"/>
-          <p:cNvSpPr txBox="1"/>
-          <p:nvPr/>
-        </p:nvSpPr>
-        <p:spPr>
-          <a:xfrm>
-            <a:off x="6330235" y="3813048"/>
-            <a:ext cx="2509643" cy="512064"/>
-          </a:xfrm>
-          <a:prstGeom prst="rect">
-            <a:avLst/>
-          </a:prstGeom>
-          <a:noFill/>
-        </p:spPr>
-        <p:txBody>
-          <a:bodyPr wrap="square" anchor="ctr" lIns="0" rIns="0" tIns="0" bIns="0">
-            <a:spAutoFit/>
-          </a:bodyPr>
-          <a:lstStyle/>
-          <a:p>
-            <a:pPr algn="ctr">
-              <a:spcAft>
-                <a:spcPts val="0"/>
-              </a:spcAft>
-            </a:pPr>
-            <a:r>
-              <a:rPr sz="960" b="0" i="0">
-                <a:solidFill>
-                  <a:srgbClr val="9DAFC7"/>
-                </a:solidFill>
-                <a:latin typeface="Calibri"/>
-              </a:rPr>
-              <a:t>18 model calls</a:t>
-            </a:r>
-          </a:p>
-        </p:txBody>
-      </p:sp>
-      <p:sp>
-        <p:nvSpPr>
-          <p:cNvPr id="26" name="TextBox 25"/>
-          <p:cNvSpPr txBox="1"/>
-          <p:nvPr/>
-        </p:nvSpPr>
-        <p:spPr>
-          <a:xfrm>
-            <a:off x="9095910" y="3813048"/>
-            <a:ext cx="2190527" cy="512064"/>
-          </a:xfrm>
-          <a:prstGeom prst="rect">
-            <a:avLst/>
-          </a:prstGeom>
-          <a:noFill/>
-        </p:spPr>
-        <p:txBody>
-          <a:bodyPr wrap="square" anchor="ctr" lIns="0" rIns="0" tIns="0" bIns="0">
-            <a:spAutoFit/>
-          </a:bodyPr>
-          <a:lstStyle/>
-          <a:p>
-            <a:pPr algn="ctr">
-              <a:spcAft>
-                <a:spcPts val="0"/>
-              </a:spcAft>
-            </a:pPr>
-            <a:r>
-              <a:rPr sz="960" b="0" i="0">
-                <a:solidFill>
-                  <a:srgbClr val="E0564F"/>
-                </a:solidFill>
-                <a:latin typeface="Calibri"/>
-              </a:rPr>
-              <a:t>worse than one</a:t>
-            </a:r>
-          </a:p>
-        </p:txBody>
-      </p:sp>
-      <p:sp>
-        <p:nvSpPr>
-          <p:cNvPr id="27" name="Rectangle 26"/>
-          <p:cNvSpPr/>
-          <p:nvPr/>
-        </p:nvSpPr>
-        <p:spPr>
-          <a:xfrm>
-            <a:off x="777240" y="4325112"/>
-            <a:ext cx="10637215" cy="512064"/>
-          </a:xfrm>
-          <a:prstGeom prst="rect">
-            <a:avLst/>
-          </a:prstGeom>
-          <a:solidFill>
-            <a:srgbClr val="18263D"/>
-          </a:solidFill>
-          <a:ln w="9525">
-            <a:solidFill>
-              <a:srgbClr val="1E3050"/>
-            </a:solidFill>
-          </a:ln>
-          <a:effectLst/>
-        </p:spPr>
-        <p:style>
-          <a:lnRef idx="1">
-            <a:schemeClr val="accent1"/>
-          </a:lnRef>
-          <a:fillRef idx="3">
-            <a:schemeClr val="accent1"/>
-          </a:fillRef>
-          <a:effectRef idx="2">
-            <a:schemeClr val="accent1"/>
-          </a:effectRef>
-          <a:fontRef idx="minor">
-            <a:schemeClr val="lt1"/>
-          </a:fontRef>
-        </p:style>
-        <p:txBody>
-          <a:bodyPr rtlCol="0" anchor="ctr" wrap="square"/>
-          <a:lstStyle/>
-          <a:p>
-            <a:pPr algn="ctr"/>
-          </a:p>
-        </p:txBody>
-      </p:sp>
-      <p:sp>
-        <p:nvSpPr>
-          <p:cNvPr id="28" name="TextBox 27"/>
-          <p:cNvSpPr txBox="1"/>
-          <p:nvPr/>
-        </p:nvSpPr>
-        <p:spPr>
-          <a:xfrm>
-            <a:off x="905256" y="4325112"/>
-            <a:ext cx="3360621" cy="512064"/>
-          </a:xfrm>
-          <a:prstGeom prst="rect">
-            <a:avLst/>
-          </a:prstGeom>
-          <a:noFill/>
-        </p:spPr>
-        <p:txBody>
-          <a:bodyPr wrap="square" anchor="ctr" lIns="0" rIns="0" tIns="0" bIns="0">
-            <a:spAutoFit/>
-          </a:bodyPr>
-          <a:lstStyle/>
-          <a:p>
-            <a:pPr algn="l">
-              <a:spcAft>
-                <a:spcPts val="0"/>
-              </a:spcAft>
-            </a:pPr>
-            <a:r>
-              <a:rPr sz="960" b="1" i="0">
-                <a:solidFill>
-                  <a:srgbClr val="9DAFC7"/>
-                </a:solidFill>
-                <a:latin typeface="Calibri"/>
-              </a:rPr>
-              <a:t>Weighted blend of all 18</a:t>
-            </a:r>
-          </a:p>
-        </p:txBody>
-      </p:sp>
-      <p:sp>
-        <p:nvSpPr>
-          <p:cNvPr id="29" name="TextBox 28"/>
-          <p:cNvSpPr txBox="1"/>
-          <p:nvPr/>
-        </p:nvSpPr>
-        <p:spPr>
-          <a:xfrm>
-            <a:off x="4521909" y="4325112"/>
-            <a:ext cx="1552294" cy="512064"/>
-          </a:xfrm>
-          <a:prstGeom prst="rect">
-            <a:avLst/>
-          </a:prstGeom>
-          <a:noFill/>
-        </p:spPr>
-        <p:txBody>
-          <a:bodyPr wrap="square" anchor="ctr" lIns="0" rIns="0" tIns="0" bIns="0">
-            <a:spAutoFit/>
-          </a:bodyPr>
-          <a:lstStyle/>
-          <a:p>
-            <a:pPr algn="ctr">
-              <a:spcAft>
-                <a:spcPts val="0"/>
-              </a:spcAft>
-            </a:pPr>
-            <a:r>
-              <a:rPr sz="960" b="0" i="0">
-                <a:solidFill>
-                  <a:srgbClr val="9DAFC7"/>
-                </a:solidFill>
-                <a:latin typeface="Calibri"/>
-              </a:rPr>
-              <a:t>85%</a:t>
-            </a:r>
-          </a:p>
-        </p:txBody>
-      </p:sp>
-      <p:sp>
-        <p:nvSpPr>
-          <p:cNvPr id="30" name="TextBox 29"/>
-          <p:cNvSpPr txBox="1"/>
-          <p:nvPr/>
-        </p:nvSpPr>
-        <p:spPr>
-          <a:xfrm>
-            <a:off x="6330235" y="4325112"/>
-            <a:ext cx="2509643" cy="512064"/>
-          </a:xfrm>
-          <a:prstGeom prst="rect">
-            <a:avLst/>
-          </a:prstGeom>
-          <a:noFill/>
-        </p:spPr>
-        <p:txBody>
-          <a:bodyPr wrap="square" anchor="ctr" lIns="0" rIns="0" tIns="0" bIns="0">
-            <a:spAutoFit/>
-          </a:bodyPr>
-          <a:lstStyle/>
-          <a:p>
-            <a:pPr algn="ctr">
-              <a:spcAft>
-                <a:spcPts val="0"/>
-              </a:spcAft>
-            </a:pPr>
-            <a:r>
-              <a:rPr sz="960" b="0" i="0">
-                <a:solidFill>
-                  <a:srgbClr val="9DAFC7"/>
-                </a:solidFill>
-                <a:latin typeface="Calibri"/>
-              </a:rPr>
-              <a:t>18 calls + labelled data</a:t>
-            </a:r>
-          </a:p>
-        </p:txBody>
-      </p:sp>
-      <p:sp>
-        <p:nvSpPr>
-          <p:cNvPr id="31" name="TextBox 30"/>
-          <p:cNvSpPr txBox="1"/>
-          <p:nvPr/>
-        </p:nvSpPr>
-        <p:spPr>
-          <a:xfrm>
-            <a:off x="9095910" y="4325112"/>
-            <a:ext cx="2190527" cy="512064"/>
-          </a:xfrm>
-          <a:prstGeom prst="rect">
-            <a:avLst/>
-          </a:prstGeom>
-          <a:noFill/>
-        </p:spPr>
-        <p:txBody>
-          <a:bodyPr wrap="square" anchor="ctr" lIns="0" rIns="0" tIns="0" bIns="0">
-            <a:spAutoFit/>
-          </a:bodyPr>
-          <a:lstStyle/>
-          <a:p>
-            <a:pPr algn="ctr">
-              <a:spcAft>
-                <a:spcPts val="0"/>
-              </a:spcAft>
-            </a:pPr>
-            <a:r>
-              <a:rPr sz="960" b="0" i="0">
-                <a:solidFill>
-                  <a:srgbClr val="BFD8F5"/>
-                </a:solidFill>
-                <a:latin typeface="Calibri"/>
-              </a:rPr>
-              <a:t>best in-house</a:t>
-            </a:r>
-          </a:p>
-        </p:txBody>
-      </p:sp>
-      <p:sp>
-        <p:nvSpPr>
-          <p:cNvPr id="32" name="Rectangle 31"/>
-          <p:cNvSpPr/>
-          <p:nvPr/>
-        </p:nvSpPr>
-        <p:spPr>
-          <a:xfrm>
-            <a:off x="777240" y="4837176"/>
-            <a:ext cx="10637215" cy="512064"/>
-          </a:xfrm>
-          <a:prstGeom prst="rect">
-            <a:avLst/>
-          </a:prstGeom>
-          <a:solidFill>
-            <a:srgbClr val="0C1424"/>
-          </a:solidFill>
-          <a:ln w="9525">
-            <a:solidFill>
-              <a:srgbClr val="1E3050"/>
-            </a:solidFill>
-          </a:ln>
-          <a:effectLst/>
-        </p:spPr>
-        <p:style>
-          <a:lnRef idx="1">
-            <a:schemeClr val="accent1"/>
-          </a:lnRef>
-          <a:fillRef idx="3">
-            <a:schemeClr val="accent1"/>
-          </a:fillRef>
-          <a:effectRef idx="2">
-            <a:schemeClr val="accent1"/>
-          </a:effectRef>
-          <a:fontRef idx="minor">
-            <a:schemeClr val="lt1"/>
-          </a:fontRef>
-        </p:style>
-        <p:txBody>
-          <a:bodyPr rtlCol="0" anchor="ctr" wrap="square"/>
-          <a:lstStyle/>
-          <a:p>
-            <a:pPr algn="ctr"/>
-          </a:p>
-        </p:txBody>
-      </p:sp>
-      <p:sp>
-        <p:nvSpPr>
-          <p:cNvPr id="33" name="TextBox 32"/>
-          <p:cNvSpPr txBox="1"/>
-          <p:nvPr/>
-        </p:nvSpPr>
-        <p:spPr>
-          <a:xfrm>
-            <a:off x="905256" y="4837176"/>
-            <a:ext cx="3360621" cy="512064"/>
-          </a:xfrm>
-          <a:prstGeom prst="rect">
-            <a:avLst/>
-          </a:prstGeom>
-          <a:noFill/>
-        </p:spPr>
-        <p:txBody>
-          <a:bodyPr wrap="square" anchor="ctr" lIns="0" rIns="0" tIns="0" bIns="0">
-            <a:spAutoFit/>
-          </a:bodyPr>
-          <a:lstStyle/>
-          <a:p>
-            <a:pPr algn="l">
-              <a:spcAft>
-                <a:spcPts val="0"/>
-              </a:spcAft>
-            </a:pPr>
-            <a:r>
-              <a:rPr sz="960" b="1" i="0">
-                <a:solidFill>
-                  <a:srgbClr val="9DAFC7"/>
-                </a:solidFill>
-                <a:latin typeface="Calibri"/>
-              </a:rPr>
-              <a:t>Escalate the uncertain 20% instead</a:t>
-            </a:r>
-          </a:p>
-        </p:txBody>
-      </p:sp>
-      <p:sp>
-        <p:nvSpPr>
-          <p:cNvPr id="34" name="TextBox 33"/>
-          <p:cNvSpPr txBox="1"/>
-          <p:nvPr/>
-        </p:nvSpPr>
-        <p:spPr>
-          <a:xfrm>
-            <a:off x="4521909" y="4837176"/>
-            <a:ext cx="1552294" cy="512064"/>
-          </a:xfrm>
-          <a:prstGeom prst="rect">
-            <a:avLst/>
-          </a:prstGeom>
-          <a:noFill/>
-        </p:spPr>
-        <p:txBody>
-          <a:bodyPr wrap="square" anchor="ctr" lIns="0" rIns="0" tIns="0" bIns="0">
-            <a:spAutoFit/>
-          </a:bodyPr>
-          <a:lstStyle/>
-          <a:p>
-            <a:pPr algn="ctr">
-              <a:spcAft>
-                <a:spcPts val="0"/>
-              </a:spcAft>
-            </a:pPr>
-            <a:r>
-              <a:rPr sz="960" b="0" i="0">
-                <a:solidFill>
-                  <a:srgbClr val="9DAFC7"/>
-                </a:solidFill>
-                <a:latin typeface="Calibri"/>
-              </a:rPr>
-              <a:t>87%</a:t>
-            </a:r>
-          </a:p>
-        </p:txBody>
-      </p:sp>
-      <p:sp>
-        <p:nvSpPr>
-          <p:cNvPr id="35" name="TextBox 34"/>
-          <p:cNvSpPr txBox="1"/>
-          <p:nvPr/>
-        </p:nvSpPr>
-        <p:spPr>
-          <a:xfrm>
-            <a:off x="6330235" y="4837176"/>
-            <a:ext cx="2509643" cy="512064"/>
-          </a:xfrm>
-          <a:prstGeom prst="rect">
-            <a:avLst/>
-          </a:prstGeom>
-          <a:noFill/>
-        </p:spPr>
-        <p:txBody>
-          <a:bodyPr wrap="square" anchor="ctr" lIns="0" rIns="0" tIns="0" bIns="0">
-            <a:spAutoFit/>
-          </a:bodyPr>
-          <a:lstStyle/>
-          <a:p>
-            <a:pPr algn="ctr">
-              <a:spcAft>
-                <a:spcPts val="0"/>
-              </a:spcAft>
-            </a:pPr>
-            <a:r>
-              <a:rPr sz="960" b="0" i="0">
-                <a:solidFill>
-                  <a:srgbClr val="9DAFC7"/>
-                </a:solidFill>
-                <a:latin typeface="Calibri"/>
-              </a:rPr>
-              <a:t>1.2 model calls</a:t>
-            </a:r>
-          </a:p>
-        </p:txBody>
-      </p:sp>
-      <p:sp>
-        <p:nvSpPr>
-          <p:cNvPr id="36" name="TextBox 35"/>
-          <p:cNvSpPr txBox="1"/>
-          <p:nvPr/>
-        </p:nvSpPr>
-        <p:spPr>
-          <a:xfrm>
-            <a:off x="9095910" y="4837176"/>
-            <a:ext cx="2190527" cy="512064"/>
-          </a:xfrm>
-          <a:prstGeom prst="rect">
-            <a:avLst/>
-          </a:prstGeom>
-          <a:noFill/>
-        </p:spPr>
-        <p:txBody>
-          <a:bodyPr wrap="square" anchor="ctr" lIns="0" rIns="0" tIns="0" bIns="0">
-            <a:spAutoFit/>
-          </a:bodyPr>
-          <a:lstStyle/>
-          <a:p>
-            <a:pPr algn="ctr">
-              <a:spcAft>
-                <a:spcPts val="0"/>
-              </a:spcAft>
-            </a:pPr>
-            <a:r>
-              <a:rPr sz="960" b="0" i="0">
-                <a:solidFill>
-                  <a:srgbClr val="E0564F"/>
-                </a:solidFill>
-                <a:latin typeface="Calibri"/>
-              </a:rPr>
-              <a:t>beats all of it</a:t>
-            </a:r>
-          </a:p>
-        </p:txBody>
-      </p:sp>
-      <p:sp>
-        <p:nvSpPr>
-          <p:cNvPr id="37" name="Rectangle 36"/>
-          <p:cNvSpPr/>
-          <p:nvPr/>
-        </p:nvSpPr>
-        <p:spPr>
-          <a:xfrm>
-            <a:off x="777240" y="5385816"/>
-            <a:ext cx="10637215" cy="914400"/>
-          </a:xfrm>
-          <a:prstGeom prst="rect">
-            <a:avLst/>
-          </a:prstGeom>
-          <a:solidFill>
-            <a:srgbClr val="18263D"/>
-          </a:solidFill>
-          <a:ln w="9525">
-            <a:solidFill>
-              <a:srgbClr val="1E3050"/>
-            </a:solidFill>
-          </a:ln>
-          <a:effectLst/>
-        </p:spPr>
-        <p:style>
-          <a:lnRef idx="1">
-            <a:schemeClr val="accent1"/>
-          </a:lnRef>
-          <a:fillRef idx="3">
-            <a:schemeClr val="accent1"/>
-          </a:fillRef>
-          <a:effectRef idx="2">
-            <a:schemeClr val="accent1"/>
-          </a:effectRef>
-          <a:fontRef idx="minor">
-            <a:schemeClr val="lt1"/>
-          </a:fontRef>
-        </p:style>
-        <p:txBody>
-          <a:bodyPr rtlCol="0" anchor="ctr" wrap="square"/>
-          <a:lstStyle/>
-          <a:p>
-            <a:pPr algn="ctr"/>
-          </a:p>
-        </p:txBody>
-      </p:sp>
-      <p:sp>
-        <p:nvSpPr>
-          <p:cNvPr id="38" name="TextBox 37"/>
-          <p:cNvSpPr txBox="1"/>
-          <p:nvPr/>
-        </p:nvSpPr>
-        <p:spPr>
-          <a:xfrm>
-            <a:off x="1014984" y="5532120"/>
-            <a:ext cx="10161727" cy="621792"/>
+            <a:off x="1014984" y="5605272"/>
+            <a:ext cx="10161727" cy="548640"/>
           </a:xfrm>
           <a:prstGeom prst="rect">
             <a:avLst/>
@@ -12455,7 +12951,7 @@
                 </a:solidFill>
                 <a:latin typeface="Calibri"/>
               </a:rPr>
-              <a:t>THE FINDING THAT MATTERS FOR PLANNING</a:t>
+              <a:t>WHAT THIS COSTS</a:t>
             </a:r>
           </a:p>
           <a:p>
@@ -12474,7 +12970,7 @@
                 </a:solidFill>
                 <a:latin typeface="Calibri"/>
               </a:rPr>
-              <a:t>Escalating one request in five beats a 18-model blend — at a sixteenth of the compute and with no labelled data to collect. Ensembling is the right answer only when nothing may leave at all; then it is worth about a quarter of the gap.</a:t>
+              <a:t>At a 20% escalated share: about $0.16 per thousand requests instead of $0.80, and the 1,553 ms hosted round-trip lands on one request in five rather than on all of them.</a:t>
             </a:r>
           </a:p>
         </p:txBody>
@@ -12617,7 +13113,7 @@
                 </a:solidFill>
                 <a:latin typeface="Calibri"/>
               </a:rPr>
-              <a:t>WHAT HOSTED COSTS</a:t>
+              <a:t>IF NOTHING MAY LEAVE</a:t>
             </a:r>
           </a:p>
         </p:txBody>
@@ -12659,7 +13155,7 @@
                 </a:solidFill>
                 <a:latin typeface="Cambria"/>
               </a:rPr>
-              <a:t>The accuracy is real. So is the bill, the latency, and the loss of control</a:t>
+              <a:t>Combining our own guards helps a little. It does not reach the hosted model</a:t>
             </a:r>
           </a:p>
         </p:txBody>
@@ -12698,7 +13194,7 @@
                 </a:solidFill>
                 <a:latin typeface="Calibri"/>
               </a:rPr>
-              <a:t>Four costs, three of which do not appear on an invoice</a:t>
+              <a:t>Every option below priced against our strongest single in-house guard (83%), with what each costs per request</a:t>
             </a:r>
           </a:p>
         </p:txBody>
@@ -12711,8 +13207,8 @@
         </p:nvSpPr>
         <p:spPr>
           <a:xfrm>
-            <a:off x="777240" y="2331720"/>
-            <a:ext cx="5112867" cy="420624"/>
+            <a:off x="777240" y="2276856"/>
+            <a:ext cx="10637215" cy="512064"/>
           </a:xfrm>
           <a:prstGeom prst="rect">
             <a:avLst/>
@@ -12757,8 +13253,8 @@
         </p:nvSpPr>
         <p:spPr>
           <a:xfrm>
-            <a:off x="905256" y="2331720"/>
-            <a:ext cx="1993629" cy="420624"/>
+            <a:off x="905256" y="2276856"/>
+            <a:ext cx="3360621" cy="512064"/>
           </a:xfrm>
           <a:prstGeom prst="rect">
             <a:avLst/>
@@ -12783,7 +13279,7 @@
                 </a:solidFill>
                 <a:latin typeface="Calibri"/>
               </a:rPr>
-              <a:t/>
+              <a:t>Option</a:t>
             </a:r>
           </a:p>
         </p:txBody>
@@ -12796,8 +13292,8 @@
         </p:nvSpPr>
         <p:spPr>
           <a:xfrm>
-            <a:off x="3154917" y="2331720"/>
-            <a:ext cx="1175570" cy="420624"/>
+            <a:off x="4521909" y="2276856"/>
+            <a:ext cx="1552294" cy="512064"/>
           </a:xfrm>
           <a:prstGeom prst="rect">
             <a:avLst/>
@@ -12822,7 +13318,7 @@
                 </a:solidFill>
                 <a:latin typeface="Calibri"/>
               </a:rPr>
-              <a:t>Self-hosted small</a:t>
+              <a:t>Catch rate</a:t>
             </a:r>
           </a:p>
         </p:txBody>
@@ -12835,8 +13331,8 @@
         </p:nvSpPr>
         <p:spPr>
           <a:xfrm>
-            <a:off x="4586519" y="2331720"/>
-            <a:ext cx="1175570" cy="420624"/>
+            <a:off x="6330235" y="2276856"/>
+            <a:ext cx="2509643" cy="512064"/>
           </a:xfrm>
           <a:prstGeom prst="rect">
             <a:avLst/>
@@ -12861,21 +13357,60 @@
                 </a:solidFill>
                 <a:latin typeface="Calibri"/>
               </a:rPr>
-              <a:t>Hosted frontier</a:t>
-            </a:r>
-          </a:p>
-        </p:txBody>
-      </p:sp>
-      <p:sp>
-        <p:nvSpPr>
-          <p:cNvPr id="11" name="Rectangle 10"/>
+              <a:t>Cost per request</a:t>
+            </a:r>
+          </a:p>
+        </p:txBody>
+      </p:sp>
+      <p:sp>
+        <p:nvSpPr>
+          <p:cNvPr id="11" name="TextBox 10"/>
+          <p:cNvSpPr txBox="1"/>
+          <p:nvPr/>
+        </p:nvSpPr>
+        <p:spPr>
+          <a:xfrm>
+            <a:off x="9095910" y="2276856"/>
+            <a:ext cx="2190527" cy="512064"/>
+          </a:xfrm>
+          <a:prstGeom prst="rect">
+            <a:avLst/>
+          </a:prstGeom>
+          <a:noFill/>
+        </p:spPr>
+        <p:txBody>
+          <a:bodyPr wrap="square" anchor="ctr" lIns="0" rIns="0" tIns="0" bIns="0">
+            <a:spAutoFit/>
+          </a:bodyPr>
+          <a:lstStyle/>
+          <a:p>
+            <a:pPr algn="ctr">
+              <a:spcAft>
+                <a:spcPts val="0"/>
+              </a:spcAft>
+            </a:pPr>
+            <a:r>
+              <a:rPr sz="960" b="1" i="0">
+                <a:solidFill>
+                  <a:srgbClr val="BFD8F5"/>
+                </a:solidFill>
+                <a:latin typeface="Calibri"/>
+              </a:rPr>
+              <a:t>Verdict</a:t>
+            </a:r>
+          </a:p>
+        </p:txBody>
+      </p:sp>
+      <p:sp>
+        <p:nvSpPr>
+          <p:cNvPr id="12" name="Rectangle 11"/>
           <p:cNvSpPr/>
           <p:nvPr/>
         </p:nvSpPr>
         <p:spPr>
           <a:xfrm>
-            <a:off x="777240" y="2752344"/>
-            <a:ext cx="5112867" cy="420624"/>
+            <a:off x="777240" y="2788920"/>
+            <a:ext cx="10637215" cy="512064"/>
           </a:xfrm>
           <a:prstGeom prst="rect">
             <a:avLst/>
@@ -12914,14 +13449,14 @@
       </p:sp>
       <p:sp>
         <p:nvSpPr>
-          <p:cNvPr id="12" name="TextBox 11"/>
+          <p:cNvPr id="13" name="TextBox 12"/>
           <p:cNvSpPr txBox="1"/>
           <p:nvPr/>
         </p:nvSpPr>
         <p:spPr>
           <a:xfrm>
-            <a:off x="905256" y="2752344"/>
-            <a:ext cx="1993629" cy="420624"/>
+            <a:off x="905256" y="2788920"/>
+            <a:ext cx="3360621" cy="512064"/>
           </a:xfrm>
           <a:prstGeom prst="rect">
             <a:avLst/>
@@ -12946,21 +13481,21 @@
                 </a:solidFill>
                 <a:latin typeface="Calibri"/>
               </a:rPr>
-              <a:t>Median latency</a:t>
-            </a:r>
-          </a:p>
-        </p:txBody>
-      </p:sp>
-      <p:sp>
-        <p:nvSpPr>
-          <p:cNvPr id="13" name="TextBox 12"/>
+              <a:t>Best single in-house guard</a:t>
+            </a:r>
+          </a:p>
+        </p:txBody>
+      </p:sp>
+      <p:sp>
+        <p:nvSpPr>
+          <p:cNvPr id="14" name="TextBox 13"/>
           <p:cNvSpPr txBox="1"/>
           <p:nvPr/>
         </p:nvSpPr>
         <p:spPr>
           <a:xfrm>
-            <a:off x="3154917" y="2752344"/>
-            <a:ext cx="1175570" cy="420624"/>
+            <a:off x="4521909" y="2788920"/>
+            <a:ext cx="1552294" cy="512064"/>
           </a:xfrm>
           <a:prstGeom prst="rect">
             <a:avLst/>
@@ -12985,21 +13520,21 @@
                 </a:solidFill>
                 <a:latin typeface="Calibri"/>
               </a:rPr>
-              <a:t>10–25 ms</a:t>
-            </a:r>
-          </a:p>
-        </p:txBody>
-      </p:sp>
-      <p:sp>
-        <p:nvSpPr>
-          <p:cNvPr id="14" name="TextBox 13"/>
+              <a:t>83%</a:t>
+            </a:r>
+          </a:p>
+        </p:txBody>
+      </p:sp>
+      <p:sp>
+        <p:nvSpPr>
+          <p:cNvPr id="15" name="TextBox 14"/>
           <p:cNvSpPr txBox="1"/>
           <p:nvPr/>
         </p:nvSpPr>
         <p:spPr>
           <a:xfrm>
-            <a:off x="4586519" y="2752344"/>
-            <a:ext cx="1175570" cy="420624"/>
+            <a:off x="6330235" y="2788920"/>
+            <a:ext cx="2509643" cy="512064"/>
           </a:xfrm>
           <a:prstGeom prst="rect">
             <a:avLst/>
@@ -13024,21 +13559,60 @@
                 </a:solidFill>
                 <a:latin typeface="Calibri"/>
               </a:rPr>
-              <a:t>~1,553 ms</a:t>
-            </a:r>
-          </a:p>
-        </p:txBody>
-      </p:sp>
-      <p:sp>
-        <p:nvSpPr>
-          <p:cNvPr id="15" name="Rectangle 14"/>
+              <a:t>1 model call</a:t>
+            </a:r>
+          </a:p>
+        </p:txBody>
+      </p:sp>
+      <p:sp>
+        <p:nvSpPr>
+          <p:cNvPr id="16" name="TextBox 15"/>
+          <p:cNvSpPr txBox="1"/>
+          <p:nvPr/>
+        </p:nvSpPr>
+        <p:spPr>
+          <a:xfrm>
+            <a:off x="9095910" y="2788920"/>
+            <a:ext cx="2190527" cy="512064"/>
+          </a:xfrm>
+          <a:prstGeom prst="rect">
+            <a:avLst/>
+          </a:prstGeom>
+          <a:noFill/>
+        </p:spPr>
+        <p:txBody>
+          <a:bodyPr wrap="square" anchor="ctr" lIns="0" rIns="0" tIns="0" bIns="0">
+            <a:spAutoFit/>
+          </a:bodyPr>
+          <a:lstStyle/>
+          <a:p>
+            <a:pPr algn="ctr">
+              <a:spcAft>
+                <a:spcPts val="0"/>
+              </a:spcAft>
+            </a:pPr>
+            <a:r>
+              <a:rPr sz="960" b="0" i="0">
+                <a:solidFill>
+                  <a:srgbClr val="6B7F9F"/>
+                </a:solidFill>
+                <a:latin typeface="Calibri"/>
+              </a:rPr>
+              <a:t>the baseline</a:t>
+            </a:r>
+          </a:p>
+        </p:txBody>
+      </p:sp>
+      <p:sp>
+        <p:nvSpPr>
+          <p:cNvPr id="17" name="Rectangle 16"/>
           <p:cNvSpPr/>
           <p:nvPr/>
         </p:nvSpPr>
         <p:spPr>
           <a:xfrm>
-            <a:off x="777240" y="3172968"/>
-            <a:ext cx="5112867" cy="420624"/>
+            <a:off x="777240" y="3300984"/>
+            <a:ext cx="10637215" cy="512064"/>
           </a:xfrm>
           <a:prstGeom prst="rect">
             <a:avLst/>
@@ -13077,14 +13651,14 @@
       </p:sp>
       <p:sp>
         <p:nvSpPr>
-          <p:cNvPr id="16" name="TextBox 15"/>
+          <p:cNvPr id="18" name="TextBox 17"/>
           <p:cNvSpPr txBox="1"/>
           <p:nvPr/>
         </p:nvSpPr>
         <p:spPr>
           <a:xfrm>
-            <a:off x="905256" y="3172968"/>
-            <a:ext cx="1993629" cy="420624"/>
+            <a:off x="905256" y="3300984"/>
+            <a:ext cx="3360621" cy="512064"/>
           </a:xfrm>
           <a:prstGeom prst="rect">
             <a:avLst/>
@@ -13109,21 +13683,21 @@
                 </a:solidFill>
                 <a:latin typeface="Calibri"/>
               </a:rPr>
-              <a:t>Cost per 1k prompts</a:t>
-            </a:r>
-          </a:p>
-        </p:txBody>
-      </p:sp>
-      <p:sp>
-        <p:nvSpPr>
-          <p:cNvPr id="17" name="TextBox 16"/>
+              <a:t>Average the 5 tuning runs of one guard</a:t>
+            </a:r>
+          </a:p>
+        </p:txBody>
+      </p:sp>
+      <p:sp>
+        <p:nvSpPr>
+          <p:cNvPr id="19" name="TextBox 18"/>
           <p:cNvSpPr txBox="1"/>
           <p:nvPr/>
         </p:nvSpPr>
         <p:spPr>
           <a:xfrm>
-            <a:off x="3154917" y="3172968"/>
-            <a:ext cx="1175570" cy="420624"/>
+            <a:off x="4521909" y="3300984"/>
+            <a:ext cx="1552294" cy="512064"/>
           </a:xfrm>
           <a:prstGeom prst="rect">
             <a:avLst/>
@@ -13148,21 +13722,21 @@
                 </a:solidFill>
                 <a:latin typeface="Calibri"/>
               </a:rPr>
-              <a:t>GPU you own</a:t>
-            </a:r>
-          </a:p>
-        </p:txBody>
-      </p:sp>
-      <p:sp>
-        <p:nvSpPr>
-          <p:cNvPr id="18" name="TextBox 17"/>
+              <a:t>+0.026 on top</a:t>
+            </a:r>
+          </a:p>
+        </p:txBody>
+      </p:sp>
+      <p:sp>
+        <p:nvSpPr>
+          <p:cNvPr id="20" name="TextBox 19"/>
           <p:cNvSpPr txBox="1"/>
           <p:nvPr/>
         </p:nvSpPr>
         <p:spPr>
           <a:xfrm>
-            <a:off x="4586519" y="3172968"/>
-            <a:ext cx="1175570" cy="420624"/>
+            <a:off x="6330235" y="3300984"/>
+            <a:ext cx="2509643" cy="512064"/>
           </a:xfrm>
           <a:prstGeom prst="rect">
             <a:avLst/>
@@ -13187,21 +13761,60 @@
                 </a:solidFill>
                 <a:latin typeface="Calibri"/>
               </a:rPr>
-              <a:t>$0.80</a:t>
-            </a:r>
-          </a:p>
-        </p:txBody>
-      </p:sp>
-      <p:sp>
-        <p:nvSpPr>
-          <p:cNvPr id="19" name="Rectangle 18"/>
+              <a:t>already paid for</a:t>
+            </a:r>
+          </a:p>
+        </p:txBody>
+      </p:sp>
+      <p:sp>
+        <p:nvSpPr>
+          <p:cNvPr id="21" name="TextBox 20"/>
+          <p:cNvSpPr txBox="1"/>
+          <p:nvPr/>
+        </p:nvSpPr>
+        <p:spPr>
+          <a:xfrm>
+            <a:off x="9095910" y="3300984"/>
+            <a:ext cx="2190527" cy="512064"/>
+          </a:xfrm>
+          <a:prstGeom prst="rect">
+            <a:avLst/>
+          </a:prstGeom>
+          <a:noFill/>
+        </p:spPr>
+        <p:txBody>
+          <a:bodyPr wrap="square" anchor="ctr" lIns="0" rIns="0" tIns="0" bIns="0">
+            <a:spAutoFit/>
+          </a:bodyPr>
+          <a:lstStyle/>
+          <a:p>
+            <a:pPr algn="ctr">
+              <a:spcAft>
+                <a:spcPts val="0"/>
+              </a:spcAft>
+            </a:pPr>
+            <a:r>
+              <a:rPr sz="960" b="0" i="0">
+                <a:solidFill>
+                  <a:srgbClr val="8FD3B6"/>
+                </a:solidFill>
+                <a:latin typeface="Calibri"/>
+              </a:rPr>
+              <a:t>worth doing</a:t>
+            </a:r>
+          </a:p>
+        </p:txBody>
+      </p:sp>
+      <p:sp>
+        <p:nvSpPr>
+          <p:cNvPr id="22" name="Rectangle 21"/>
           <p:cNvSpPr/>
           <p:nvPr/>
         </p:nvSpPr>
         <p:spPr>
           <a:xfrm>
-            <a:off x="777240" y="3593592"/>
-            <a:ext cx="5112867" cy="420624"/>
+            <a:off x="777240" y="3813048"/>
+            <a:ext cx="10637215" cy="512064"/>
           </a:xfrm>
           <a:prstGeom prst="rect">
             <a:avLst/>
@@ -13240,14 +13853,14 @@
       </p:sp>
       <p:sp>
         <p:nvSpPr>
-          <p:cNvPr id="20" name="TextBox 19"/>
+          <p:cNvPr id="23" name="TextBox 22"/>
           <p:cNvSpPr txBox="1"/>
           <p:nvPr/>
         </p:nvSpPr>
         <p:spPr>
           <a:xfrm>
-            <a:off x="905256" y="3593592"/>
-            <a:ext cx="1993629" cy="420624"/>
+            <a:off x="905256" y="3813048"/>
+            <a:ext cx="3360621" cy="512064"/>
           </a:xfrm>
           <a:prstGeom prst="rect">
             <a:avLst/>
@@ -13272,21 +13885,21 @@
                 </a:solidFill>
                 <a:latin typeface="Calibri"/>
               </a:rPr>
-              <a:t>Prompt leaves our network</a:t>
-            </a:r>
-          </a:p>
-        </p:txBody>
-      </p:sp>
-      <p:sp>
-        <p:nvSpPr>
-          <p:cNvPr id="21" name="TextBox 20"/>
+              <a:t>Average all 18 guards equally</a:t>
+            </a:r>
+          </a:p>
+        </p:txBody>
+      </p:sp>
+      <p:sp>
+        <p:nvSpPr>
+          <p:cNvPr id="24" name="TextBox 23"/>
           <p:cNvSpPr txBox="1"/>
           <p:nvPr/>
         </p:nvSpPr>
         <p:spPr>
           <a:xfrm>
-            <a:off x="3154917" y="3593592"/>
-            <a:ext cx="1175570" cy="420624"/>
+            <a:off x="4521909" y="3813048"/>
+            <a:ext cx="1552294" cy="512064"/>
           </a:xfrm>
           <a:prstGeom prst="rect">
             <a:avLst/>
@@ -13311,21 +13924,21 @@
                 </a:solidFill>
                 <a:latin typeface="Calibri"/>
               </a:rPr>
-              <a:t>no</a:t>
-            </a:r>
-          </a:p>
-        </p:txBody>
-      </p:sp>
-      <p:sp>
-        <p:nvSpPr>
-          <p:cNvPr id="22" name="TextBox 21"/>
+              <a:t>79%</a:t>
+            </a:r>
+          </a:p>
+        </p:txBody>
+      </p:sp>
+      <p:sp>
+        <p:nvSpPr>
+          <p:cNvPr id="25" name="TextBox 24"/>
           <p:cNvSpPr txBox="1"/>
           <p:nvPr/>
         </p:nvSpPr>
         <p:spPr>
           <a:xfrm>
-            <a:off x="4586519" y="3593592"/>
-            <a:ext cx="1175570" cy="420624"/>
+            <a:off x="6330235" y="3813048"/>
+            <a:ext cx="2509643" cy="512064"/>
           </a:xfrm>
           <a:prstGeom prst="rect">
             <a:avLst/>
@@ -13350,21 +13963,60 @@
                 </a:solidFill>
                 <a:latin typeface="Calibri"/>
               </a:rPr>
-              <a:t>yes</a:t>
-            </a:r>
-          </a:p>
-        </p:txBody>
-      </p:sp>
-      <p:sp>
-        <p:nvSpPr>
-          <p:cNvPr id="23" name="Rectangle 22"/>
+              <a:t>18 model calls</a:t>
+            </a:r>
+          </a:p>
+        </p:txBody>
+      </p:sp>
+      <p:sp>
+        <p:nvSpPr>
+          <p:cNvPr id="26" name="TextBox 25"/>
+          <p:cNvSpPr txBox="1"/>
+          <p:nvPr/>
+        </p:nvSpPr>
+        <p:spPr>
+          <a:xfrm>
+            <a:off x="9095910" y="3813048"/>
+            <a:ext cx="2190527" cy="512064"/>
+          </a:xfrm>
+          <a:prstGeom prst="rect">
+            <a:avLst/>
+          </a:prstGeom>
+          <a:noFill/>
+        </p:spPr>
+        <p:txBody>
+          <a:bodyPr wrap="square" anchor="ctr" lIns="0" rIns="0" tIns="0" bIns="0">
+            <a:spAutoFit/>
+          </a:bodyPr>
+          <a:lstStyle/>
+          <a:p>
+            <a:pPr algn="ctr">
+              <a:spcAft>
+                <a:spcPts val="0"/>
+              </a:spcAft>
+            </a:pPr>
+            <a:r>
+              <a:rPr sz="960" b="0" i="0">
+                <a:solidFill>
+                  <a:srgbClr val="E0564F"/>
+                </a:solidFill>
+                <a:latin typeface="Calibri"/>
+              </a:rPr>
+              <a:t>worse than one</a:t>
+            </a:r>
+          </a:p>
+        </p:txBody>
+      </p:sp>
+      <p:sp>
+        <p:nvSpPr>
+          <p:cNvPr id="27" name="Rectangle 26"/>
           <p:cNvSpPr/>
           <p:nvPr/>
         </p:nvSpPr>
         <p:spPr>
           <a:xfrm>
-            <a:off x="777240" y="4014216"/>
-            <a:ext cx="5112867" cy="420624"/>
+            <a:off x="777240" y="4325112"/>
+            <a:ext cx="10637215" cy="512064"/>
           </a:xfrm>
           <a:prstGeom prst="rect">
             <a:avLst/>
@@ -13403,14 +14055,14 @@
       </p:sp>
       <p:sp>
         <p:nvSpPr>
-          <p:cNvPr id="24" name="TextBox 23"/>
+          <p:cNvPr id="28" name="TextBox 27"/>
           <p:cNvSpPr txBox="1"/>
           <p:nvPr/>
         </p:nvSpPr>
         <p:spPr>
           <a:xfrm>
-            <a:off x="905256" y="4014216"/>
-            <a:ext cx="1993629" cy="420624"/>
+            <a:off x="905256" y="4325112"/>
+            <a:ext cx="3360621" cy="512064"/>
           </a:xfrm>
           <a:prstGeom prst="rect">
             <a:avLst/>
@@ -13435,21 +14087,21 @@
                 </a:solidFill>
                 <a:latin typeface="Calibri"/>
               </a:rPr>
-              <a:t>We choose the alarm rate</a:t>
-            </a:r>
-          </a:p>
-        </p:txBody>
-      </p:sp>
-      <p:sp>
-        <p:nvSpPr>
-          <p:cNvPr id="25" name="TextBox 24"/>
+              <a:t>Weighted blend of all 18</a:t>
+            </a:r>
+          </a:p>
+        </p:txBody>
+      </p:sp>
+      <p:sp>
+        <p:nvSpPr>
+          <p:cNvPr id="29" name="TextBox 28"/>
           <p:cNvSpPr txBox="1"/>
           <p:nvPr/>
         </p:nvSpPr>
         <p:spPr>
           <a:xfrm>
-            <a:off x="3154917" y="4014216"/>
-            <a:ext cx="1175570" cy="420624"/>
+            <a:off x="4521909" y="4325112"/>
+            <a:ext cx="1552294" cy="512064"/>
           </a:xfrm>
           <a:prstGeom prst="rect">
             <a:avLst/>
@@ -13474,21 +14126,21 @@
                 </a:solidFill>
                 <a:latin typeface="Calibri"/>
               </a:rPr>
-              <a:t>exactly</a:t>
-            </a:r>
-          </a:p>
-        </p:txBody>
-      </p:sp>
-      <p:sp>
-        <p:nvSpPr>
-          <p:cNvPr id="26" name="TextBox 25"/>
+              <a:t>85%</a:t>
+            </a:r>
+          </a:p>
+        </p:txBody>
+      </p:sp>
+      <p:sp>
+        <p:nvSpPr>
+          <p:cNvPr id="30" name="TextBox 29"/>
           <p:cNvSpPr txBox="1"/>
           <p:nvPr/>
         </p:nvSpPr>
         <p:spPr>
           <a:xfrm>
-            <a:off x="4586519" y="4014216"/>
-            <a:ext cx="1175570" cy="420624"/>
+            <a:off x="6330235" y="4325112"/>
+            <a:ext cx="2509643" cy="512064"/>
           </a:xfrm>
           <a:prstGeom prst="rect">
             <a:avLst/>
@@ -13513,31 +14165,70 @@
                 </a:solidFill>
                 <a:latin typeface="Calibri"/>
               </a:rPr>
-              <a:t>approximately</a:t>
-            </a:r>
-          </a:p>
-        </p:txBody>
-      </p:sp>
-      <p:sp>
-        <p:nvSpPr>
-          <p:cNvPr id="27" name="Rectangle 26"/>
+              <a:t>18 calls + labelled data</a:t>
+            </a:r>
+          </a:p>
+        </p:txBody>
+      </p:sp>
+      <p:sp>
+        <p:nvSpPr>
+          <p:cNvPr id="31" name="TextBox 30"/>
+          <p:cNvSpPr txBox="1"/>
+          <p:nvPr/>
+        </p:nvSpPr>
+        <p:spPr>
+          <a:xfrm>
+            <a:off x="9095910" y="4325112"/>
+            <a:ext cx="2190527" cy="512064"/>
+          </a:xfrm>
+          <a:prstGeom prst="rect">
+            <a:avLst/>
+          </a:prstGeom>
+          <a:noFill/>
+        </p:spPr>
+        <p:txBody>
+          <a:bodyPr wrap="square" anchor="ctr" lIns="0" rIns="0" tIns="0" bIns="0">
+            <a:spAutoFit/>
+          </a:bodyPr>
+          <a:lstStyle/>
+          <a:p>
+            <a:pPr algn="ctr">
+              <a:spcAft>
+                <a:spcPts val="0"/>
+              </a:spcAft>
+            </a:pPr>
+            <a:r>
+              <a:rPr sz="960" b="0" i="0">
+                <a:solidFill>
+                  <a:srgbClr val="BFD8F5"/>
+                </a:solidFill>
+                <a:latin typeface="Calibri"/>
+              </a:rPr>
+              <a:t>best in-house</a:t>
+            </a:r>
+          </a:p>
+        </p:txBody>
+      </p:sp>
+      <p:sp>
+        <p:nvSpPr>
+          <p:cNvPr id="32" name="Rectangle 31"/>
           <p:cNvSpPr/>
           <p:nvPr/>
         </p:nvSpPr>
         <p:spPr>
           <a:xfrm>
-            <a:off x="6301587" y="2331720"/>
-            <a:ext cx="5112867" cy="1481328"/>
+            <a:off x="777240" y="4837176"/>
+            <a:ext cx="10637215" cy="512064"/>
           </a:xfrm>
           <a:prstGeom prst="rect">
             <a:avLst/>
           </a:prstGeom>
           <a:solidFill>
-            <a:srgbClr val="331A1C"/>
+            <a:srgbClr val="0C1424"/>
           </a:solidFill>
           <a:ln w="9525">
             <a:solidFill>
-              <a:srgbClr val="4A2427"/>
+              <a:srgbClr val="1E3050"/>
             </a:solidFill>
           </a:ln>
           <a:effectLst/>
@@ -13566,72 +14257,170 @@
       </p:sp>
       <p:sp>
         <p:nvSpPr>
-          <p:cNvPr id="28" name="TextBox 27"/>
+          <p:cNvPr id="33" name="TextBox 32"/>
           <p:cNvSpPr txBox="1"/>
           <p:nvPr/>
         </p:nvSpPr>
         <p:spPr>
           <a:xfrm>
-            <a:off x="6539331" y="2478024"/>
-            <a:ext cx="4637379" cy="1188720"/>
-          </a:xfrm>
-          <a:prstGeom prst="rect">
-            <a:avLst/>
-          </a:prstGeom>
-          <a:noFill/>
-        </p:spPr>
-        <p:txBody>
-          <a:bodyPr wrap="square" anchor="t" lIns="0" rIns="0" tIns="0" bIns="0">
+            <a:off x="905256" y="4837176"/>
+            <a:ext cx="3360621" cy="512064"/>
+          </a:xfrm>
+          <a:prstGeom prst="rect">
+            <a:avLst/>
+          </a:prstGeom>
+          <a:noFill/>
+        </p:spPr>
+        <p:txBody>
+          <a:bodyPr wrap="square" anchor="ctr" lIns="0" rIns="0" tIns="0" bIns="0">
             <a:spAutoFit/>
           </a:bodyPr>
           <a:lstStyle/>
           <a:p>
             <a:pPr algn="l">
               <a:spcAft>
-                <a:spcPts val="500"/>
-              </a:spcAft>
-            </a:pPr>
-            <a:r>
-              <a:rPr sz="980" b="1" i="0" spc="110">
-                <a:solidFill>
-                  <a:srgbClr val="F08A7F"/>
-                </a:solidFill>
-                <a:latin typeface="Calibri"/>
-              </a:rPr>
-              <a:t>THE ONE WE DID NOT EXPECT</a:t>
-            </a:r>
-          </a:p>
-          <a:p>
-            <a:pPr algn="l">
-              <a:lnSpc>
-                <a:spcPct val="106000"/>
-              </a:lnSpc>
-              <a:spcAft>
                 <a:spcPts val="0"/>
               </a:spcAft>
             </a:pPr>
             <a:r>
-              <a:rPr sz="1100" b="0" i="0">
+              <a:rPr sz="960" b="1" i="0">
                 <a:solidFill>
                   <a:srgbClr val="9DAFC7"/>
                 </a:solidFill>
                 <a:latin typeface="Calibri"/>
               </a:rPr>
-              <a:t>The provider refused to evaluate a subset of prompts outright, and did so inconsistently — the same prompt was refused on some runs and not others. A guardrail that intermittently declines to answer is itself an audit finding.</a:t>
-            </a:r>
-          </a:p>
-        </p:txBody>
-      </p:sp>
-      <p:sp>
-        <p:nvSpPr>
-          <p:cNvPr id="29" name="Rectangle 28"/>
+              <a:t>Escalate the uncertain 20% instead</a:t>
+            </a:r>
+          </a:p>
+        </p:txBody>
+      </p:sp>
+      <p:sp>
+        <p:nvSpPr>
+          <p:cNvPr id="34" name="TextBox 33"/>
+          <p:cNvSpPr txBox="1"/>
+          <p:nvPr/>
+        </p:nvSpPr>
+        <p:spPr>
+          <a:xfrm>
+            <a:off x="4521909" y="4837176"/>
+            <a:ext cx="1552294" cy="512064"/>
+          </a:xfrm>
+          <a:prstGeom prst="rect">
+            <a:avLst/>
+          </a:prstGeom>
+          <a:noFill/>
+        </p:spPr>
+        <p:txBody>
+          <a:bodyPr wrap="square" anchor="ctr" lIns="0" rIns="0" tIns="0" bIns="0">
+            <a:spAutoFit/>
+          </a:bodyPr>
+          <a:lstStyle/>
+          <a:p>
+            <a:pPr algn="ctr">
+              <a:spcAft>
+                <a:spcPts val="0"/>
+              </a:spcAft>
+            </a:pPr>
+            <a:r>
+              <a:rPr sz="960" b="0" i="0">
+                <a:solidFill>
+                  <a:srgbClr val="9DAFC7"/>
+                </a:solidFill>
+                <a:latin typeface="Calibri"/>
+              </a:rPr>
+              <a:t>87%</a:t>
+            </a:r>
+          </a:p>
+        </p:txBody>
+      </p:sp>
+      <p:sp>
+        <p:nvSpPr>
+          <p:cNvPr id="35" name="TextBox 34"/>
+          <p:cNvSpPr txBox="1"/>
+          <p:nvPr/>
+        </p:nvSpPr>
+        <p:spPr>
+          <a:xfrm>
+            <a:off x="6330235" y="4837176"/>
+            <a:ext cx="2509643" cy="512064"/>
+          </a:xfrm>
+          <a:prstGeom prst="rect">
+            <a:avLst/>
+          </a:prstGeom>
+          <a:noFill/>
+        </p:spPr>
+        <p:txBody>
+          <a:bodyPr wrap="square" anchor="ctr" lIns="0" rIns="0" tIns="0" bIns="0">
+            <a:spAutoFit/>
+          </a:bodyPr>
+          <a:lstStyle/>
+          <a:p>
+            <a:pPr algn="ctr">
+              <a:spcAft>
+                <a:spcPts val="0"/>
+              </a:spcAft>
+            </a:pPr>
+            <a:r>
+              <a:rPr sz="960" b="0" i="0">
+                <a:solidFill>
+                  <a:srgbClr val="9DAFC7"/>
+                </a:solidFill>
+                <a:latin typeface="Calibri"/>
+              </a:rPr>
+              <a:t>1.2 model calls</a:t>
+            </a:r>
+          </a:p>
+        </p:txBody>
+      </p:sp>
+      <p:sp>
+        <p:nvSpPr>
+          <p:cNvPr id="36" name="TextBox 35"/>
+          <p:cNvSpPr txBox="1"/>
+          <p:nvPr/>
+        </p:nvSpPr>
+        <p:spPr>
+          <a:xfrm>
+            <a:off x="9095910" y="4837176"/>
+            <a:ext cx="2190527" cy="512064"/>
+          </a:xfrm>
+          <a:prstGeom prst="rect">
+            <a:avLst/>
+          </a:prstGeom>
+          <a:noFill/>
+        </p:spPr>
+        <p:txBody>
+          <a:bodyPr wrap="square" anchor="ctr" lIns="0" rIns="0" tIns="0" bIns="0">
+            <a:spAutoFit/>
+          </a:bodyPr>
+          <a:lstStyle/>
+          <a:p>
+            <a:pPr algn="ctr">
+              <a:spcAft>
+                <a:spcPts val="0"/>
+              </a:spcAft>
+            </a:pPr>
+            <a:r>
+              <a:rPr sz="960" b="0" i="0">
+                <a:solidFill>
+                  <a:srgbClr val="E0564F"/>
+                </a:solidFill>
+                <a:latin typeface="Calibri"/>
+              </a:rPr>
+              <a:t>beats all of it</a:t>
+            </a:r>
+          </a:p>
+        </p:txBody>
+      </p:sp>
+      <p:sp>
+        <p:nvSpPr>
+          <p:cNvPr id="37" name="Rectangle 36"/>
           <p:cNvSpPr/>
           <p:nvPr/>
         </p:nvSpPr>
         <p:spPr>
           <a:xfrm>
-            <a:off x="6301587" y="3941064"/>
-            <a:ext cx="5112867" cy="1371600"/>
+            <a:off x="777240" y="5385816"/>
+            <a:ext cx="10637215" cy="914400"/>
           </a:xfrm>
           <a:prstGeom prst="rect">
             <a:avLst/>
@@ -13670,14 +14459,14 @@
       </p:sp>
       <p:sp>
         <p:nvSpPr>
-          <p:cNvPr id="30" name="TextBox 29"/>
+          <p:cNvPr id="38" name="TextBox 37"/>
           <p:cNvSpPr txBox="1"/>
           <p:nvPr/>
         </p:nvSpPr>
         <p:spPr>
           <a:xfrm>
-            <a:off x="6539331" y="4087368"/>
-            <a:ext cx="4637379" cy="1078992"/>
+            <a:off x="1014984" y="5532120"/>
+            <a:ext cx="10161727" cy="621792"/>
           </a:xfrm>
           <a:prstGeom prst="rect">
             <a:avLst/>
@@ -13698,11 +14487,11 @@
             <a:r>
               <a:rPr sz="980" b="1" i="0" spc="110">
                 <a:solidFill>
-                  <a:srgbClr val="BFD8F5"/>
-                </a:solidFill>
-                <a:latin typeface="Calibri"/>
-              </a:rPr>
-              <a:t>CONTROL OVER THE ALARM RATE</a:t>
+                  <a:srgbClr val="E3C285"/>
+                </a:solidFill>
+                <a:latin typeface="Calibri"/>
+              </a:rPr>
+              <a:t>THE FINDING THAT MATTERS FOR PLANNING</a:t>
             </a:r>
           </a:p>
           <a:p>
@@ -13721,111 +14510,7 @@
                 </a:solidFill>
                 <a:latin typeface="Calibri"/>
               </a:rPr>
-              <a:t>Our own model exposes a continuous score, so we can set the false-alarm budget precisely. The hosted model reports a coarse 0–100 value, so we can only land near a target.</a:t>
-            </a:r>
-          </a:p>
-        </p:txBody>
-      </p:sp>
-      <p:sp>
-        <p:nvSpPr>
-          <p:cNvPr id="31" name="Rectangle 30"/>
-          <p:cNvSpPr/>
-          <p:nvPr/>
-        </p:nvSpPr>
-        <p:spPr>
-          <a:xfrm>
-            <a:off x="777240" y="5404104"/>
-            <a:ext cx="10637215" cy="969264"/>
-          </a:xfrm>
-          <a:prstGeom prst="rect">
-            <a:avLst/>
-          </a:prstGeom>
-          <a:solidFill>
-            <a:srgbClr val="18263D"/>
-          </a:solidFill>
-          <a:ln w="9525">
-            <a:solidFill>
-              <a:srgbClr val="1E3050"/>
-            </a:solidFill>
-          </a:ln>
-          <a:effectLst/>
-        </p:spPr>
-        <p:style>
-          <a:lnRef idx="1">
-            <a:schemeClr val="accent1"/>
-          </a:lnRef>
-          <a:fillRef idx="3">
-            <a:schemeClr val="accent1"/>
-          </a:fillRef>
-          <a:effectRef idx="2">
-            <a:schemeClr val="accent1"/>
-          </a:effectRef>
-          <a:fontRef idx="minor">
-            <a:schemeClr val="lt1"/>
-          </a:fontRef>
-        </p:style>
-        <p:txBody>
-          <a:bodyPr rtlCol="0" anchor="ctr" wrap="square"/>
-          <a:lstStyle/>
-          <a:p>
-            <a:pPr algn="ctr"/>
-          </a:p>
-        </p:txBody>
-      </p:sp>
-      <p:sp>
-        <p:nvSpPr>
-          <p:cNvPr id="32" name="TextBox 31"/>
-          <p:cNvSpPr txBox="1"/>
-          <p:nvPr/>
-        </p:nvSpPr>
-        <p:spPr>
-          <a:xfrm>
-            <a:off x="1014984" y="5550408"/>
-            <a:ext cx="10161727" cy="676656"/>
-          </a:xfrm>
-          <a:prstGeom prst="rect">
-            <a:avLst/>
-          </a:prstGeom>
-          <a:noFill/>
-        </p:spPr>
-        <p:txBody>
-          <a:bodyPr wrap="square" anchor="t" lIns="0" rIns="0" tIns="0" bIns="0">
-            <a:spAutoFit/>
-          </a:bodyPr>
-          <a:lstStyle/>
-          <a:p>
-            <a:pPr algn="l">
-              <a:spcAft>
-                <a:spcPts val="500"/>
-              </a:spcAft>
-            </a:pPr>
-            <a:r>
-              <a:rPr sz="980" b="1" i="0" spc="110">
-                <a:solidFill>
-                  <a:srgbClr val="8FD3B6"/>
-                </a:solidFill>
-                <a:latin typeface="Calibri"/>
-              </a:rPr>
-              <a:t>NOT A REASON TO REFUSE HOSTED</a:t>
-            </a:r>
-          </a:p>
-          <a:p>
-            <a:pPr algn="l">
-              <a:lnSpc>
-                <a:spcPct val="106000"/>
-              </a:lnSpc>
-              <a:spcAft>
-                <a:spcPts val="0"/>
-              </a:spcAft>
-            </a:pPr>
-            <a:r>
-              <a:rPr sz="1100" b="0" i="0">
-                <a:solidFill>
-                  <a:srgbClr val="9DAFC7"/>
-                </a:solidFill>
-                <a:latin typeface="Calibri"/>
-              </a:rPr>
-              <a:t>It is a reason to scope it: hosted on traffic where the prompt may leave and latency is not critical; self-hosted on the regulated, latency-sensitive path.</a:t>
+              <a:t>Escalating one request in five beats a 18-model blend — at a sixteenth of the compute and with no labelled data to collect. Ensembling is the right answer only when nothing may leave at all; then it is worth about a quarter of the gap.</a:t>
             </a:r>
           </a:p>
         </p:txBody>

--- a/papers/unified-report/slides/safety_guard_exec_deck.pptx
+++ b/papers/unified-report/slides/safety_guard_exec_deck.pptx
@@ -1542,27 +1542,48 @@
           </a:p>
           <a:p>
             <a:r>
-              <a:t>Qwen2.5-1.5B model beats the hosted one outright: .948 against</a:t>
-            </a:r>
-          </a:p>
-          <a:p>
-            <a:r>
-              <a:t>.741, difference +0.185 with 95% interval</a:t>
-            </a:r>
-          </a:p>
-          <a:p>
-            <a:r>
-              <a:t>[+0.065, +0.423]. It is a ranking win, not a threshold placement -- AUROC</a:t>
-            </a:r>
-          </a:p>
-          <a:p>
-            <a:r>
-              <a:t>0.9928 against 0.8731 -- and 5 of</a:t>
-            </a:r>
-          </a:p>
-          <a:p>
-            <a:r>
-              <a:t>12 represented cells clear zero at the 95% level.</a:t>
+              <a:t>our tuned guards rank BETTER on average: the equal-source mean difference is</a:t>
+            </a:r>
+          </a:p>
+          <a:p>
+            <a:r>
+              <a:t>+0.083, 95% interval [+0.008, +0.163], which excludes zero. In AP it is</a:t>
+            </a:r>
+          </a:p>
+          <a:p>
+            <a:r>
+              <a:t>+0.039 [+0.014, +0.072].</a:t>
+            </a:r>
+          </a:p>
+          <a:p/>
+          <a:p>
+            <a:r>
+              <a:t>Be careful with single benchmarks here, and say this before anyone asks. The most eye-catching</a:t>
+            </a:r>
+          </a:p>
+          <a:p>
+            <a:r>
+              <a:t>cell is a Qwen2.5-1.5B guard at .948 against .741 on</a:t>
+            </a:r>
+          </a:p>
+          <a:p>
+            <a:r>
+              <a:t>prompt_injections. That cell is the largest of 12, so quoting its own interval</a:t>
+            </a:r>
+          </a:p>
+          <a:p>
+            <a:r>
+              <a:t>overstates it: 4 of 12 cells clear zero on their own, and</a:t>
+            </a:r>
+          </a:p>
+          <a:p>
+            <a:r>
+              <a:t>0 survive a familywise correction. The average is the number to defend, not</a:t>
+            </a:r>
+          </a:p>
+          <a:p>
+            <a:r>
+              <a:t>the best cell.</a:t>
             </a:r>
           </a:p>
           <a:p/>
@@ -2148,12 +2169,32 @@
           <a:p/>
           <a:p>
             <a:r>
-              <a:t>The last row is the point: escalating the uncertain fifth reaches 87%, beating the whole blend</a:t>
-            </a:r>
-          </a:p>
-          <a:p>
-            <a:r>
-              <a:t>at a fraction of the cost. So ensembling is not the route -- unless lane 1 applies and nothing</a:t>
+              <a:t>The last row is the point: escalating the uncertain fifth reaches 84% against the</a:t>
+            </a:r>
+          </a:p>
+          <a:p>
+            <a:r>
+              <a:t>blend's 85% -- it does NOT beat the blend, it very nearly matches it for a</a:t>
+            </a:r>
+          </a:p>
+          <a:p>
+            <a:r>
+              <a:t>sixteenth of the compute and no labelled data. If challenged on this, the honest line is that</a:t>
+            </a:r>
+          </a:p>
+          <a:p>
+            <a:r>
+              <a:t>the blend is still the in-house ceiling; escalation is the cheaper route to almost the same place.</a:t>
+            </a:r>
+          </a:p>
+          <a:p>
+            <a:r>
+              <a:t>An earlier version of this slide printed 87% here and claimed escalation beat the blend, which</a:t>
+            </a:r>
+          </a:p>
+          <a:p>
+            <a:r>
+              <a:t>reversed the ordering. So ensembling is not the route -- unless lane 1 applies and nothing</a:t>
             </a:r>
           </a:p>
           <a:p>
@@ -11256,7 +11297,7 @@
                 </a:solidFill>
                 <a:latin typeface="Cambria"/>
               </a:rPr>
-              <a:t>.948  vs  .741</a:t>
+              <a:t>+0.083 catch rate</a:t>
             </a:r>
           </a:p>
           <a:p>
@@ -11272,7 +11313,7 @@
                 </a:solidFill>
                 <a:latin typeface="Calibri"/>
               </a:rPr>
-              <a:t>Catch rate on prompt_injections -- a Qwen2.5-1.5B guard against the hosted model. Difference +0.185 [+0.065, +0.423], and a ranking win, not a threshold trick.</a:t>
+              <a:t>Averaged across every source we can describe in advance, our tuned guards rank BETTER than the hosted model at the same alarm budget. 95% interval [+0.008, +0.163] -- it excludes zero.</a:t>
             </a:r>
           </a:p>
         </p:txBody>
@@ -14328,7 +14369,7 @@
                 </a:solidFill>
                 <a:latin typeface="Calibri"/>
               </a:rPr>
-              <a:t>87%</a:t>
+              <a:t>84%</a:t>
             </a:r>
           </a:p>
         </p:txBody>
@@ -14402,11 +14443,11 @@
             <a:r>
               <a:rPr sz="960" b="0" i="0">
                 <a:solidFill>
-                  <a:srgbClr val="E0564F"/>
-                </a:solidFill>
-                <a:latin typeface="Calibri"/>
-              </a:rPr>
-              <a:t>beats all of it</a:t>
+                  <a:srgbClr val="BFD8F5"/>
+                </a:solidFill>
+                <a:latin typeface="Calibri"/>
+              </a:rPr>
+              <a:t>nearly matches, far cheaper</a:t>
             </a:r>
           </a:p>
         </p:txBody>
@@ -14510,7 +14551,7 @@
                 </a:solidFill>
                 <a:latin typeface="Calibri"/>
               </a:rPr>
-              <a:t>Escalating one request in five beats a 18-model blend — at a sixteenth of the compute and with no labelled data to collect. Ensembling is the right answer only when nothing may leave at all; then it is worth about a quarter of the gap.</a:t>
+              <a:t>Escalating one request in five gets within about a point of the 18-model blend (84% vs 85%) at a sixteenth of the compute and with no labelled data to collect. Ensembling is the right answer only when nothing may leave at all; then it is the in-house ceiling, worth about a quarter of the gap.</a:t>
             </a:r>
           </a:p>
         </p:txBody>

--- a/papers/unified-report/slides/safety_guard_exec_deck.pptx
+++ b/papers/unified-report/slides/safety_guard_exec_deck.pptx
@@ -1547,12 +1547,12 @@
           </a:p>
           <a:p>
             <a:r>
-              <a:t>+0.083, 95% interval [+0.008, +0.163], which excludes zero. In AP it is</a:t>
-            </a:r>
-          </a:p>
-          <a:p>
-            <a:r>
-              <a:t>+0.039 [+0.014, +0.072].</a:t>
+              <a:t>+0.083, 95% interval [+0.013, +0.157], which excludes zero. In AP it is</a:t>
+            </a:r>
+          </a:p>
+          <a:p>
+            <a:r>
+              <a:t>+0.039 [+0.015, +0.072].</a:t>
             </a:r>
           </a:p>
           <a:p/>
@@ -1573,7 +1573,7 @@
           </a:p>
           <a:p>
             <a:r>
-              <a:t>overstates it: 4 of 12 cells clear zero on their own, and</a:t>
+              <a:t>overstates it: 3 of 12 cells clear zero on their own, and</a:t>
             </a:r>
           </a:p>
           <a:p>
@@ -5586,7 +5586,7 @@
                 </a:solidFill>
                 <a:latin typeface="Calibri"/>
               </a:rPr>
-              <a:t>Full method, intervals and limitations: the technical report and research deck</a:t>
+              <a:t>Full method, intervals and limitations: “Benchmark Gains Do Not Guarantee Transfer: Fine-Tuning Small Language Model Safety Guards” — the technical report and research deck</a:t>
             </a:r>
           </a:p>
         </p:txBody>
@@ -11313,7 +11313,7 @@
                 </a:solidFill>
                 <a:latin typeface="Calibri"/>
               </a:rPr>
-              <a:t>Averaged across every source we can describe in advance, our tuned guards rank BETTER than the hosted model at the same alarm budget. 95% interval [+0.008, +0.163] -- it excludes zero.</a:t>
+              <a:t>Averaged across every source we can describe in advance, our tuned guards rank BETTER than the hosted model at the same alarm budget. 95% interval [+0.013, +0.157] -- it excludes zero.</a:t>
             </a:r>
           </a:p>
         </p:txBody>
@@ -11518,7 +11518,7 @@
                 </a:solidFill>
                 <a:latin typeface="Calibri"/>
               </a:rPr>
-              <a:t>The gap is not a ceiling a bigger local model would break through -- it is the price of the regime. So the question is not “can a small guard match the frontier” but “what share of our traffic can we describe in a training manifest”. Self-host that share; escalate on UNFAMILIARITY, not on how unsure the local guard sounds, because margin-based routing spends the hosted budget exactly where we are already right.</a:t>
+              <a:t>The gap is not a ceiling a bigger local model would break through -- it is the price of the regime. So the question is not “can a small guard match the frontier” but “what share of our traffic can we describe in a training manifest”. Self-host that share and escalate the rest by how near the local guard sits to its own decision line -- the router we measured. Routing on UNFAMILIARITY instead is the more attractive idea and we did not test it: treat it as the next experiment, not as the plan.</a:t>
             </a:r>
           </a:p>
         </p:txBody>

--- a/papers/unified-report/slides/safety_guard_exec_deck.pptx
+++ b/papers/unified-report/slides/safety_guard_exec_deck.pptx
@@ -5465,8 +5465,17 @@
                 </a:solidFill>
                 <a:latin typeface="Cambria"/>
               </a:rPr>
-              <a:t>Do we buy a hosted guardrail,
-or run our own?</a:t>
+              <a:t>Do we buy a hosted guardrail,</a:t>
+            </a:r>
+            <a:br/>
+            <a:r>
+              <a:rPr sz="4000" b="1" i="0">
+                <a:solidFill>
+                  <a:srgbClr val="EEF2F8"/>
+                </a:solidFill>
+                <a:latin typeface="Cambria"/>
+              </a:rPr>
+              <a:t>or run our own?</a:t>
             </a:r>
           </a:p>
         </p:txBody>
@@ -5508,7 +5517,7 @@
                 </a:solidFill>
                 <a:latin typeface="Calibri"/>
               </a:rPr>
-              <a:t>Measured on 2,275 expert-annotated finance, healthcare and law prompts. Eight guard configurations, identical rows, identical false-alarm budget.</a:t>
+              <a:t>Measured on 2,275 expert-annotated finance, healthcare and law prompts. Twenty-four guard configurations, identical rows, identical false-alarm budget.</a:t>
             </a:r>
           </a:p>
         </p:txBody>
@@ -7751,7 +7760,7 @@
               </a:spcAft>
             </a:pPr>
             <a:r>
-              <a:rPr sz="1450" b="1" i="0">
+              <a:rPr sz="1350" b="1" i="0">
                 <a:solidFill>
                   <a:srgbClr val="E0564F"/>
                 </a:solidFill>
@@ -7760,7 +7769,7 @@
               <a:t>—  </a:t>
             </a:r>
             <a:r>
-              <a:rPr sz="1450" b="1" i="0">
+              <a:rPr sz="1350" b="1" i="0">
                 <a:solidFill>
                   <a:srgbClr val="EEF2F8"/>
                 </a:solidFill>
@@ -7769,7 +7778,7 @@
               <a:t>It is one benchmark. </a:t>
             </a:r>
             <a:r>
-              <a:rPr sz="1450" b="0" i="0">
+              <a:rPr sz="1350" b="0" i="0">
                 <a:solidFill>
                   <a:srgbClr val="9DAFC7"/>
                 </a:solidFill>
@@ -7785,7 +7794,7 @@
               </a:spcAft>
             </a:pPr>
             <a:r>
-              <a:rPr sz="1450" b="1" i="0">
+              <a:rPr sz="1350" b="1" i="0">
                 <a:solidFill>
                   <a:srgbClr val="E0564F"/>
                 </a:solidFill>
@@ -7794,7 +7803,7 @@
               <a:t>—  </a:t>
             </a:r>
             <a:r>
-              <a:rPr sz="1450" b="1" i="0">
+              <a:rPr sz="1350" b="1" i="0">
                 <a:solidFill>
                   <a:srgbClr val="EEF2F8"/>
                 </a:solidFill>
@@ -7803,7 +7812,7 @@
               <a:t>It is prompt-only. </a:t>
             </a:r>
             <a:r>
-              <a:rPr sz="1450" b="0" i="0">
+              <a:rPr sz="1350" b="0" i="0">
                 <a:solidFill>
                   <a:srgbClr val="9DAFC7"/>
                 </a:solidFill>
@@ -7819,7 +7828,7 @@
               </a:spcAft>
             </a:pPr>
             <a:r>
-              <a:rPr sz="1450" b="1" i="0">
+              <a:rPr sz="1350" b="1" i="0">
                 <a:solidFill>
                   <a:srgbClr val="E0564F"/>
                 </a:solidFill>
@@ -7828,7 +7837,7 @@
               <a:t>—  </a:t>
             </a:r>
             <a:r>
-              <a:rPr sz="1450" b="1" i="0">
+              <a:rPr sz="1350" b="1" i="0">
                 <a:solidFill>
                   <a:srgbClr val="EEF2F8"/>
                 </a:solidFill>
@@ -7837,7 +7846,7 @@
               <a:t>Vendor behaviour is a moving target. </a:t>
             </a:r>
             <a:r>
-              <a:rPr sz="1450" b="0" i="0">
+              <a:rPr sz="1350" b="0" i="0">
                 <a:solidFill>
                   <a:srgbClr val="9DAFC7"/>
                 </a:solidFill>
@@ -7853,7 +7862,7 @@
               </a:spcAft>
             </a:pPr>
             <a:r>
-              <a:rPr sz="1450" b="1" i="0">
+              <a:rPr sz="1350" b="1" i="0">
                 <a:solidFill>
                   <a:srgbClr val="E0564F"/>
                 </a:solidFill>
@@ -7862,7 +7871,7 @@
               <a:t>—  </a:t>
             </a:r>
             <a:r>
-              <a:rPr sz="1450" b="1" i="0">
+              <a:rPr sz="1350" b="1" i="0">
                 <a:solidFill>
                   <a:srgbClr val="EEF2F8"/>
                 </a:solidFill>
@@ -7871,13 +7880,47 @@
               <a:t>Prices are list, not invoices. </a:t>
             </a:r>
             <a:r>
-              <a:rPr sz="1450" b="0" i="0">
+              <a:rPr sz="1350" b="0" i="0">
                 <a:solidFill>
                   <a:srgbClr val="9DAFC7"/>
                 </a:solidFill>
                 <a:latin typeface="Calibri"/>
               </a:rPr>
               <a:t>Cost figures are billed tokens at public rates and exclude the GPU cost on our own side.</a:t>
+            </a:r>
+          </a:p>
+          <a:p>
+            <a:pPr algn="l">
+              <a:spcAft>
+                <a:spcPts val="1200"/>
+              </a:spcAft>
+            </a:pPr>
+            <a:r>
+              <a:rPr sz="1350" b="1" i="0">
+                <a:solidFill>
+                  <a:srgbClr val="E0564F"/>
+                </a:solidFill>
+                <a:latin typeface="Calibri"/>
+              </a:rPr>
+              <a:t>—  </a:t>
+            </a:r>
+            <a:r>
+              <a:rPr sz="1350" b="1" i="0">
+                <a:solidFill>
+                  <a:srgbClr val="EEF2F8"/>
+                </a:solidFill>
+                <a:latin typeface="Calibri"/>
+              </a:rPr>
+              <a:t>The escalation curve is optimistically tuned. </a:t>
+            </a:r>
+            <a:r>
+              <a:rPr sz="1350" b="0" i="0">
+                <a:solidFill>
+                  <a:srgbClr val="9DAFC7"/>
+                </a:solidFill>
+                <a:latin typeface="Calibri"/>
+              </a:rPr>
+              <a:t>Its decision line and its global 5% budget are both chosen on the same rows it is then scored on, so a live deployment should expect to close somewhat less than 51% of the gap at a fifth escalated.</a:t>
             </a:r>
           </a:p>
         </p:txBody>
@@ -10717,7 +10760,7 @@
                 </a:solidFill>
                 <a:latin typeface="Cambria"/>
               </a:rPr>
-              <a:t>At the same false-alarm rate, the hosted model catches roughly one in ten of the prompts our own guards miss</a:t>
+              <a:t>At the same false-alarm rate, the hosted model catches about half of the unsafe prompts our own guards miss</a:t>
             </a:r>
           </a:p>
         </p:txBody>
@@ -10865,7 +10908,7 @@
                 </a:solidFill>
                 <a:latin typeface="Calibri"/>
               </a:rPr>
-              <a:t>READ THIS AS A FLOOR, NOT A CEILING</a:t>
+              <a:t>READ THIS AS COARSELY RESOLVED</a:t>
             </a:r>
           </a:p>
           <a:p>
@@ -10884,7 +10927,7 @@
                 </a:solidFill>
                 <a:latin typeface="Calibri"/>
               </a:rPr>
-              <a:t>The hosted model reports only a coarse 0-100 confidence, which limits how finely we can rank its answers. That handicaps it in this comparison, so the true gap is if anything wider.</a:t>
+              <a:t>The hosted model reports only a coarse 0-100 confidence, which limits how finely we can rank its answers. That bounds precision without fixing a direction — a finer score could order a tied block either way — so do not read the gap as conservative.</a:t>
             </a:r>
           </a:p>
         </p:txBody>
@@ -12451,7 +12494,7 @@
                 </a:solidFill>
                 <a:latin typeface="Calibri"/>
               </a:rPr>
-              <a:t>Closing the remaining gap by size alone would take at least another order of magnitude — and 32B is already past the point where a guard is cheap to run on every request, which was the reason to self-host in the first place.</a:t>
+              <a:t>Over the range we measured, size does not close the gap — and 32B is already past the point where a guard is cheap to run on every request, which was the reason to self-host in the first place. Three points, one of them non-monotonic, identify no scaling law, so we do not extrapolate a size that would close it.</a:t>
             </a:r>
           </a:p>
         </p:txBody>
@@ -14551,7 +14594,7 @@
                 </a:solidFill>
                 <a:latin typeface="Calibri"/>
               </a:rPr>
-              <a:t>Escalating one request in five gets within about a point of the 18-model blend (84% vs 85%) at a sixteenth of the compute and with no labelled data to collect. Ensembling is the right answer only when nothing may leave at all; then it is the in-house ceiling, worth about a quarter of the gap.</a:t>
+              <a:t>Escalating one request in five gets within about a point of the 18-model blend (84% vs 85%) at a fifteenth of the compute and with no labelled data to collect. Ensembling is the right answer only when nothing may leave at all; then it is the in-house ceiling, worth about a quarter of the gap.</a:t>
             </a:r>
           </a:p>
         </p:txBody>

--- a/papers/unified-report/slides/safety_guard_exec_deck.pptx
+++ b/papers/unified-report/slides/safety_guard_exec_deck.pptx
@@ -5595,7 +5595,7 @@
                 </a:solidFill>
                 <a:latin typeface="Calibri"/>
               </a:rPr>
-              <a:t>Full method, intervals and limitations: “Benchmark Gains Do Not Guarantee Transfer: Fine-Tuning Small Language Model Safety Guards” — the technical report and research deck</a:t>
+              <a:t>Full method, intervals and limitations: “Safety Benchmark Gains Do Not Guarantee Safety Transfer: A Comprehensive Study of Fine-Tuning Small Language Model Safety Guards for High-Compliance and General Safety Domains” — the technical report and research deck</a:t>
             </a:r>
           </a:p>
         </p:txBody>
@@ -7760,7 +7760,7 @@
               </a:spcAft>
             </a:pPr>
             <a:r>
-              <a:rPr sz="1350" b="1" i="0">
+              <a:rPr sz="1250" b="1" i="0">
                 <a:solidFill>
                   <a:srgbClr val="E0564F"/>
                 </a:solidFill>
@@ -7769,7 +7769,7 @@
               <a:t>—  </a:t>
             </a:r>
             <a:r>
-              <a:rPr sz="1350" b="1" i="0">
+              <a:rPr sz="1250" b="1" i="0">
                 <a:solidFill>
                   <a:srgbClr val="EEF2F8"/>
                 </a:solidFill>
@@ -7778,7 +7778,7 @@
               <a:t>It is one benchmark. </a:t>
             </a:r>
             <a:r>
-              <a:rPr sz="1350" b="0" i="0">
+              <a:rPr sz="1250" b="0" i="0">
                 <a:solidFill>
                   <a:srgbClr val="9DAFC7"/>
                 </a:solidFill>
@@ -7794,7 +7794,7 @@
               </a:spcAft>
             </a:pPr>
             <a:r>
-              <a:rPr sz="1350" b="1" i="0">
+              <a:rPr sz="1250" b="1" i="0">
                 <a:solidFill>
                   <a:srgbClr val="E0564F"/>
                 </a:solidFill>
@@ -7803,7 +7803,7 @@
               <a:t>—  </a:t>
             </a:r>
             <a:r>
-              <a:rPr sz="1350" b="1" i="0">
+              <a:rPr sz="1250" b="1" i="0">
                 <a:solidFill>
                   <a:srgbClr val="EEF2F8"/>
                 </a:solidFill>
@@ -7812,7 +7812,7 @@
               <a:t>It is prompt-only. </a:t>
             </a:r>
             <a:r>
-              <a:rPr sz="1350" b="0" i="0">
+              <a:rPr sz="1250" b="0" i="0">
                 <a:solidFill>
                   <a:srgbClr val="9DAFC7"/>
                 </a:solidFill>
@@ -7828,7 +7828,7 @@
               </a:spcAft>
             </a:pPr>
             <a:r>
-              <a:rPr sz="1350" b="1" i="0">
+              <a:rPr sz="1250" b="1" i="0">
                 <a:solidFill>
                   <a:srgbClr val="E0564F"/>
                 </a:solidFill>
@@ -7837,7 +7837,7 @@
               <a:t>—  </a:t>
             </a:r>
             <a:r>
-              <a:rPr sz="1350" b="1" i="0">
+              <a:rPr sz="1250" b="1" i="0">
                 <a:solidFill>
                   <a:srgbClr val="EEF2F8"/>
                 </a:solidFill>
@@ -7846,7 +7846,7 @@
               <a:t>Vendor behaviour is a moving target. </a:t>
             </a:r>
             <a:r>
-              <a:rPr sz="1350" b="0" i="0">
+              <a:rPr sz="1250" b="0" i="0">
                 <a:solidFill>
                   <a:srgbClr val="9DAFC7"/>
                 </a:solidFill>
@@ -7862,7 +7862,7 @@
               </a:spcAft>
             </a:pPr>
             <a:r>
-              <a:rPr sz="1350" b="1" i="0">
+              <a:rPr sz="1250" b="1" i="0">
                 <a:solidFill>
                   <a:srgbClr val="E0564F"/>
                 </a:solidFill>
@@ -7871,7 +7871,7 @@
               <a:t>—  </a:t>
             </a:r>
             <a:r>
-              <a:rPr sz="1350" b="1" i="0">
+              <a:rPr sz="1250" b="1" i="0">
                 <a:solidFill>
                   <a:srgbClr val="EEF2F8"/>
                 </a:solidFill>
@@ -7880,7 +7880,7 @@
               <a:t>Prices are list, not invoices. </a:t>
             </a:r>
             <a:r>
-              <a:rPr sz="1350" b="0" i="0">
+              <a:rPr sz="1250" b="0" i="0">
                 <a:solidFill>
                   <a:srgbClr val="9DAFC7"/>
                 </a:solidFill>
@@ -7896,7 +7896,7 @@
               </a:spcAft>
             </a:pPr>
             <a:r>
-              <a:rPr sz="1350" b="1" i="0">
+              <a:rPr sz="1250" b="1" i="0">
                 <a:solidFill>
                   <a:srgbClr val="E0564F"/>
                 </a:solidFill>
@@ -7905,7 +7905,7 @@
               <a:t>—  </a:t>
             </a:r>
             <a:r>
-              <a:rPr sz="1350" b="1" i="0">
+              <a:rPr sz="1250" b="1" i="0">
                 <a:solidFill>
                   <a:srgbClr val="EEF2F8"/>
                 </a:solidFill>
@@ -7914,13 +7914,47 @@
               <a:t>The escalation curve is optimistically tuned. </a:t>
             </a:r>
             <a:r>
-              <a:rPr sz="1350" b="0" i="0">
+              <a:rPr sz="1250" b="0" i="0">
                 <a:solidFill>
                   <a:srgbClr val="9DAFC7"/>
                 </a:solidFill>
                 <a:latin typeface="Calibri"/>
               </a:rPr>
               <a:t>Its decision line and its global 5% budget are both chosen on the same rows it is then scored on, so a live deployment should expect to close somewhat less than 51% of the gap at a fifth escalated.</a:t>
+            </a:r>
+          </a:p>
+          <a:p>
+            <a:pPr algn="l">
+              <a:spcAft>
+                <a:spcPts val="1200"/>
+              </a:spcAft>
+            </a:pPr>
+            <a:r>
+              <a:rPr sz="1250" b="1" i="0">
+                <a:solidFill>
+                  <a:srgbClr val="E0564F"/>
+                </a:solidFill>
+                <a:latin typeface="Calibri"/>
+              </a:rPr>
+              <a:t>—  </a:t>
+            </a:r>
+            <a:r>
+              <a:rPr sz="1250" b="1" i="0">
+                <a:solidFill>
+                  <a:srgbClr val="EEF2F8"/>
+                </a:solidFill>
+                <a:latin typeface="Calibri"/>
+              </a:rPr>
+              <a:t>Averages hide the operating point. </a:t>
+            </a:r>
+            <a:r>
+              <a:rPr sz="1250" b="0" i="0">
+                <a:solidFill>
+                  <a:srgbClr val="9DAFC7"/>
+                </a:solidFill>
+                <a:latin typeface="Calibri"/>
+              </a:rPr>
+              <a:t>Every catch rate here is already at a 5% false-alarm budget, but the underlying fine-tuning research reports an average over the whole score ranking. Re-scored inside the budget the direction is unchanged and the effect is 3.0x larger — so treat average-metric results from elsewhere as understating what you would see in production.</a:t>
             </a:r>
           </a:p>
         </p:txBody>
@@ -12017,7 +12051,7 @@
                 </a:solidFill>
                 <a:latin typeface="Calibri"/>
               </a:rPr>
-              <a:t>Budgeting a tuning project to close a vendor gap is not supported here. The best tuned result anywhere (81%) still loses to hosted (90%).</a:t>
+              <a:t>Budgeting a tuning project to close a vendor gap is not supported here. The best tuned result anywhere (81%) still loses to hosted (90%). And the cost is larger than the average metric shows: scored only inside the 5% false-alarm budget we would actually run at, the held-out loss is about 3.0x bigger.</a:t>
             </a:r>
           </a:p>
         </p:txBody>

--- a/papers/unified-report/slides/safety_guard_exec_deck.pptx
+++ b/papers/unified-report/slides/safety_guard_exec_deck.pptx
@@ -1589,6 +1589,47 @@
           <a:p/>
           <a:p>
             <a:r>
+              <a:t>And be precise about what the average is an average OVER, because it bounds the sourcing rule.</a:t>
+            </a:r>
+          </a:p>
+          <a:p>
+            <a:r>
+              <a:t>The interval is conditional on these three corpora: it resamples rows within a fixed source set,</a:t>
+            </a:r>
+          </a:p>
+          <a:p>
+            <a:r>
+              <a:t>because three sources we picked do not sample a population of sources. Drawing sources with</a:t>
+            </a:r>
+          </a:p>
+          <a:p>
+            <a:r>
+              <a:t>replacement instead widens it to [-0.019, +0.220], which INCLUDES zero. Read that as</a:t>
+            </a:r>
+          </a:p>
+          <a:p>
+            <a:r>
+              <a:t>the honest scope of the claim -- it says our tuned guards rank better on traffic that looks like</a:t>
+            </a:r>
+          </a:p>
+          <a:p>
+            <a:r>
+              <a:t>these three manifests, not that they would on any manifest we might write next. It is a reason</a:t>
+            </a:r>
+          </a:p>
+          <a:p>
+            <a:r>
+              <a:t>to characterise our own traffic before assuming the advantage transfers to it, not a reason to</a:t>
+            </a:r>
+          </a:p>
+          <a:p>
+            <a:r>
+              <a:t>discount the split recommendation, which also rests on residency and cost.</a:t>
+            </a:r>
+          </a:p>
+          <a:p/>
+          <a:p>
+            <a:r>
               <a:t>Represented sources here are jailbreak_classification, prompt_injections, toxicchat. Held-out sources are the ones we never</a:t>
             </a:r>
           </a:p>
@@ -1727,17 +1768,53 @@
           </a:p>
           <a:p>
             <a:r>
-              <a:t>gives some back on traffic that does not. Our measurements say the trade gets worse as the</a:t>
-            </a:r>
-          </a:p>
-          <a:p>
-            <a:r>
-              <a:t>starting model gets stronger -- the strongest model we tuned gained the least and lost the</a:t>
-            </a:r>
-          </a:p>
-          <a:p>
-            <a:r>
-              <a:t>most.</a:t>
+              <a:t>gives some back on traffic that does not. The strongest model we tuned gained the least --</a:t>
+            </a:r>
+          </a:p>
+          <a:p>
+            <a:r>
+              <a:t>that part is orderly, all the way down the chart.</a:t>
+            </a:r>
+          </a:p>
+          <a:p/>
+          <a:p>
+            <a:r>
+              <a:t>Do not go one step further and say it also lost the most, which an earlier version of this</a:t>
+            </a:r>
+          </a:p>
+          <a:p>
+            <a:r>
+              <a:t>slide did. The loss is not ordered by starting strength: the 4B model gave back the most</a:t>
+            </a:r>
+          </a:p>
+          <a:p>
+            <a:r>
+              <a:t>(-0.150) from a weaker starting point than either the 8B (-0.101) or the 32B (-0.117). What</a:t>
+            </a:r>
+          </a:p>
+          <a:p>
+            <a:r>
+              <a:t>is orderly is where they all END UP -- every tuned model lands on roughly the same</a:t>
+            </a:r>
+          </a:p>
+          <a:p>
+            <a:r>
+              <a:t>unfamiliar-traffic accuracy whatever it started from, so the cost is the distance it had to</a:t>
+            </a:r>
+          </a:p>
+          <a:p>
+            <a:r>
+              <a:t>fall, not evidence that better models specialise harder. The planning consequence is the same</a:t>
+            </a:r>
+          </a:p>
+          <a:p>
+            <a:r>
+              <a:t>either way: above a strong starting point, tuning buys very little and still charges close to</a:t>
+            </a:r>
+          </a:p>
+          <a:p>
+            <a:r>
+              <a:t>full price.</a:t>
             </a:r>
           </a:p>
           <a:p/>
@@ -11390,7 +11467,7 @@
                 </a:solidFill>
                 <a:latin typeface="Calibri"/>
               </a:rPr>
-              <a:t>Averaged across every source we can describe in advance, our tuned guards rank BETTER than the hosted model at the same alarm budget. 95% interval [+0.013, +0.157] -- it excludes zero.</a:t>
+              <a:t>Averaged across every source we can describe in advance, our tuned guards rank BETTER than the hosted model at the same alarm budget. 95% interval [+0.013, +0.157] -- excludes zero across these three sources; treat them as a sample of future manifests and it widens to [-0.019, +0.220].</a:t>
             </a:r>
           </a:p>
         </p:txBody>
@@ -11947,7 +12024,7 @@
                 </a:solidFill>
                 <a:latin typeface="Calibri"/>
               </a:rPr>
-              <a:t>Fine-tuning teaches a model the traffic you trained it on and costs it accuracy on traffic you did not. Read the chart downward: the blue gain shrinks and the red cost grows as the starting model gets stronger.</a:t>
+              <a:t>Fine-tuning teaches a model the traffic you trained it on and costs it accuracy on traffic you did not. Read the chart downward: the blue gain shrinks steadily as the starting model gets stronger. The red cost is not as orderly — it turns from a gain into a loss and stays there, because every tuned model lands on much the same finishing accuracy.</a:t>
             </a:r>
           </a:p>
         </p:txBody>

--- a/papers/unified-report/slides/safety_guard_exec_deck.pptx
+++ b/papers/unified-report/slides/safety_guard_exec_deck.pptx
@@ -18,6 +18,7 @@
     <p:sldId id="266" r:id="rId18"/>
     <p:sldId id="267" r:id="rId19"/>
     <p:sldId id="268" r:id="rId20"/>
+    <p:sldId id="269" r:id="rId21"/>
   </p:sldIdLst>
   <p:sldSz cx="12191695" cy="6858000" type="screen4x3"/>
   <p:notesSz cx="6858000" cy="9144000"/>
@@ -621,71 +622,110 @@
           <a:lstStyle/>
           <a:p>
             <a:r>
-              <a:t>Work down the table, then land on the two callouts, which are the non-obvious costs.</a:t>
+              <a:t>Do not skip this slide to save time, and do not let it be discovered in Q&amp;A instead. The whole</a:t>
+            </a:r>
+          </a:p>
+          <a:p>
+            <a:r>
+              <a:t>architecture is built around lane 1, lane 1 is the lane where escalation is unavailable by</a:t>
+            </a:r>
+          </a:p>
+          <a:p>
+            <a:r>
+              <a:t>construction, and this is the only evidence we have about how the in-house guard behaves there.</a:t>
             </a:r>
           </a:p>
           <a:p/>
           <a:p>
             <a:r>
-              <a:t>Latency: 1,553 ms median measured under load at high concurrency, so treat it as</a:t>
-            </a:r>
-          </a:p>
-          <a:p>
-            <a:r>
-              <a:t>an upper bound for a single request; the small-model figure is a batched GPU measurement. Even</a:t>
-            </a:r>
-          </a:p>
-          <a:p>
-            <a:r>
-              <a:t>allowing for that, the ratio is roughly 77x.</a:t>
+              <a:t>The four facts, in the order they land hardest. The G0/D1 stratum -- reads safe to a general</a:t>
+            </a:r>
+          </a:p>
+          <a:p>
+            <a:r>
+              <a:t>guard, is a mortgage-policy violation -- is 502 of 994 rows, which is the point of the</a:t>
+            </a:r>
+          </a:p>
+          <a:p>
+            <a:r>
+              <a:t>benchmark rather than an accident of sampling. Threshold-free ranking of those violations tops</a:t>
+            </a:r>
+          </a:p>
+          <a:p>
+            <a:r>
+              <a:t>out at 0.85 against a 0.555 chance floor set by the split's own base rate (81 of 146 rows are</a:t>
+            </a:r>
+          </a:p>
+          <a:p>
+            <a:r>
+              <a:t>policy-positive), so the observed band is 0.12 to 0.30 above chance, not 0.85 worth of skill.</a:t>
+            </a:r>
+          </a:p>
+          <a:p>
+            <a:r>
+              <a:t>On the worked row, all four zero-shot guards rank a coded redlining-by-proxy request below the</a:t>
+            </a:r>
+          </a:p>
+          <a:p>
+            <a:r>
+              <a:t>median benign mortgage inquiry in the same split, and one of them ranks it below all 65. And</a:t>
+            </a:r>
+          </a:p>
+          <a:p>
+            <a:r>
+              <a:t>the fixed operating point is deliberately not tabulated, because its catch count moved by more</a:t>
+            </a:r>
+          </a:p>
+          <a:p>
+            <a:r>
+              <a:t>than 50 rows across library versions of a quantile routine -- knife-edge on clustered scores.</a:t>
             </a:r>
           </a:p>
           <a:p/>
           <a:p>
             <a:r>
-              <a:t>Cost: billed tokens at public list prices. It excludes the amortised GPU on the self-hosted</a:t>
-            </a:r>
-          </a:p>
-          <a:p>
-            <a:r>
-              <a:t>side, which is exactly why the comparison is about where to spend rather than a like-for-like</a:t>
-            </a:r>
-          </a:p>
-          <a:p>
-            <a:r>
-              <a:t>price.</a:t>
+              <a:t>The tone to take: this is the instrument working. We built a measuring stick for the traffic we</a:t>
+            </a:r>
+          </a:p>
+          <a:p>
+            <a:r>
+              <a:t>care most about, held it to the same standard as the guards, and it says the guards miss the</a:t>
+            </a:r>
+          </a:p>
+          <a:p>
+            <a:r>
+              <a:t>payload. That is a reason to fund the instrument, not a reason to distrust the recommendation --</a:t>
+            </a:r>
+          </a:p>
+          <a:p>
+            <a:r>
+              <a:t>there is no lawful alternative for prompts carrying borrower data, so the choice on that lane</a:t>
+            </a:r>
+          </a:p>
+          <a:p>
+            <a:r>
+              <a:t>was never between a good option and a better one.</a:t>
             </a:r>
           </a:p>
           <a:p/>
           <a:p>
             <a:r>
-              <a:t>The refusal finding is the one to say slowly. We saw a set of prompts refused by the provider's</a:t>
-            </a:r>
-          </a:p>
-          <a:p>
-            <a:r>
-              <a:t>own input filter before the model ever saw them, and the refusals were not reproducible --</a:t>
-            </a:r>
-          </a:p>
-          <a:p>
-            <a:r>
-              <a:t>different runs, different outcomes, no row refused every time. For a control that has to be</a:t>
-            </a:r>
-          </a:p>
-          <a:p>
-            <a:r>
-              <a:t>auditable, "sometimes declines, for reasons we cannot inspect or appeal" is a compliance</a:t>
-            </a:r>
-          </a:p>
-          <a:p>
-            <a:r>
-              <a:t>property, not a technical footnote.</a:t>
-            </a:r>
-          </a:p>
-          <a:p/>
-          <a:p>
-            <a:r>
-              <a:t>Close on the scoping sentence. The answer is a split, and this slide is why.</a:t>
+              <a:t>Scope it honestly if a compliance function is in the room: these labels are LLM-judge against</a:t>
+            </a:r>
+          </a:p>
+          <a:p>
+            <a:r>
+              <a:t>written policy cards with self-consistency checks, no subject-matter-expert adjudication, no</a:t>
+            </a:r>
+          </a:p>
+          <a:p>
+            <a:r>
+              <a:t>human agreement statistic, and the public-test split is a single 146-row set. It surfaces guard</a:t>
+            </a:r>
+          </a:p>
+          <a:p>
+            <a:r>
+              <a:t>behaviour. It certifies nothing, and it licenses no fair-lending conclusion.</a:t>
             </a:r>
           </a:p>
         </p:txBody>
@@ -755,64 +795,102 @@
           <a:lstStyle/>
           <a:p>
             <a:r>
-              <a:t>This slide did not exist in the plan. It fell out of the scale experiment and is probably the</a:t>
-            </a:r>
-          </a:p>
-          <a:p>
-            <a:r>
-              <a:t>most commercially useful thing in the deck.</a:t>
+              <a:t>Work down the table, then land on the two callouts, which are the non-obvious costs.</a:t>
             </a:r>
           </a:p>
           <a:p/>
           <a:p>
             <a:r>
-              <a:t>The mechanism: fine-tuning specialises. It buys accuracy on the sources you trained on and</a:t>
-            </a:r>
-          </a:p>
-          <a:p>
-            <a:r>
-              <a:t>withdraws it from sources you did not. A bigger base model arrives with broad competence</a:t>
-            </a:r>
-          </a:p>
-          <a:p>
-            <a:r>
-              <a:t>already and does not have to trade any of it away. For a guardrail, the traffic you did not</a:t>
-            </a:r>
-          </a:p>
-          <a:p>
-            <a:r>
-              <a:t>anticipate is precisely the traffic that matters, so a technique that trades away</a:t>
-            </a:r>
-          </a:p>
-          <a:p>
-            <a:r>
-              <a:t>unfamiliar-traffic accuracy is badly matched to the job.</a:t>
+              <a:t>Latency: 1,553 ms median measured under load at high concurrency, so treat it as</a:t>
+            </a:r>
+          </a:p>
+          <a:p>
+            <a:r>
+              <a:t>an upper bound for a single request; the small-model figure is a batched GPU measurement. Even</a:t>
+            </a:r>
+          </a:p>
+          <a:p>
+            <a:r>
+              <a:t>allowing for that, the ratio is roughly 77x.</a:t>
             </a:r>
           </a:p>
           <a:p/>
           <a:p>
             <a:r>
-              <a:t>Numbers are in the technical report; the honest caveat is on the slide. Comparing a 32B untuned</a:t>
-            </a:r>
-          </a:p>
-          <a:p>
-            <a:r>
-              <a:t>model to a tuned 4B is a deployment-choice comparison, not a controlled one -- the 32B costs</a:t>
-            </a:r>
-          </a:p>
-          <a:p>
-            <a:r>
-              <a:t>much more to serve. What we can say is that the tuning route did not close the vendor gap and</a:t>
-            </a:r>
-          </a:p>
-          <a:p>
-            <a:r>
-              <a:t>made held-out accuracy worse on most models, while the size route at least moved in the right</a:t>
-            </a:r>
-          </a:p>
-          <a:p>
-            <a:r>
-              <a:t>direction on both regimes.</a:t>
+              <a:t>Cost: billed tokens at public list prices. It excludes the amortised GPU on the self-hosted</a:t>
+            </a:r>
+          </a:p>
+          <a:p>
+            <a:r>
+              <a:t>side, which is exactly why the comparison is about where to spend rather than a like-for-like</a:t>
+            </a:r>
+          </a:p>
+          <a:p>
+            <a:r>
+              <a:t>price.</a:t>
+            </a:r>
+          </a:p>
+          <a:p/>
+          <a:p>
+            <a:r>
+              <a:t>Somebody will ask "so what does OURS cost per thousand?" -- have the honest answer ready rather</a:t>
+            </a:r>
+          </a:p>
+          <a:p>
+            <a:r>
+              <a:t>than improvising one. We have not amortised it. What we can quote is the physical measurement</a:t>
+            </a:r>
+          </a:p>
+          <a:p>
+            <a:r>
+              <a:t>behind it: batched per-row inference at batch 16 on a single A100, 10-25 ms per call at P50, so</a:t>
+            </a:r>
+          </a:p>
+          <a:p>
+            <a:r>
+              <a:t>a thousand prompts is on the order of tens of seconds of one GPU. Turning that into a unit</a:t>
+            </a:r>
+          </a:p>
+          <a:p>
+            <a:r>
+              <a:t>price needs a utilisation assumption and a capital-recovery period that finance owns, not us.</a:t>
+            </a:r>
+          </a:p>
+          <a:p>
+            <a:r>
+              <a:t>Offer to come back with a number rather than inventing one at the table.</a:t>
+            </a:r>
+          </a:p>
+          <a:p/>
+          <a:p>
+            <a:r>
+              <a:t>The refusal finding is the one to say slowly, and it is now the headline of this slide. We saw a set of prompts refused by the provider's</a:t>
+            </a:r>
+          </a:p>
+          <a:p>
+            <a:r>
+              <a:t>own input filter before the model ever saw them, and the refusals were not reproducible --</a:t>
+            </a:r>
+          </a:p>
+          <a:p>
+            <a:r>
+              <a:t>different runs, different outcomes, no row refused every time. For a control that has to be</a:t>
+            </a:r>
+          </a:p>
+          <a:p>
+            <a:r>
+              <a:t>auditable, "sometimes declines, for reasons we cannot inspect or appeal" is a compliance</a:t>
+            </a:r>
+          </a:p>
+          <a:p>
+            <a:r>
+              <a:t>property, not a technical footnote.</a:t>
+            </a:r>
+          </a:p>
+          <a:p/>
+          <a:p>
+            <a:r>
+              <a:t>Close on the scoping sentence. The answer is a split, and this slide is why.</a:t>
             </a:r>
           </a:p>
         </p:txBody>
@@ -882,65 +960,64 @@
           <a:lstStyle/>
           <a:p>
             <a:r>
-              <a:t>Do not rush this slide, and do not apologise through it. Naming the limits is what makes the</a:t>
-            </a:r>
-          </a:p>
-          <a:p>
-            <a:r>
-              <a:t>recommendation on slide 3 credible.</a:t>
+              <a:t>This slide did not exist in the plan. It fell out of the scale experiment and is probably the</a:t>
+            </a:r>
+          </a:p>
+          <a:p>
+            <a:r>
+              <a:t>most commercially useful thing in the deck.</a:t>
             </a:r>
           </a:p>
           <a:p/>
           <a:p>
             <a:r>
-              <a:t>The first bullet is the most important and the most self-undermining, which is why it belongs</a:t>
-            </a:r>
-          </a:p>
-          <a:p>
-            <a:r>
-              <a:t>here: the underlying research finding is that guard rankings depend on the benchmark. We are</a:t>
-            </a:r>
-          </a:p>
-          <a:p>
-            <a:r>
-              <a:t>handing you a recommendation derived from one benchmark. It is external and expert-annotated,</a:t>
-            </a:r>
-          </a:p>
-          <a:p>
-            <a:r>
-              <a:t>which is the best tier available to us, but a different instrument could reorder the middle of</a:t>
-            </a:r>
-          </a:p>
-          <a:p>
-            <a:r>
-              <a:t>the table. It is unlikely to reverse a ten-point gap.</a:t>
+              <a:t>The mechanism: fine-tuning specialises. It buys accuracy on the sources you trained on and</a:t>
+            </a:r>
+          </a:p>
+          <a:p>
+            <a:r>
+              <a:t>withdraws it from sources you did not. A bigger base model arrives with broad competence</a:t>
+            </a:r>
+          </a:p>
+          <a:p>
+            <a:r>
+              <a:t>already and does not have to trade any of it away. For a guardrail, the traffic you did not</a:t>
+            </a:r>
+          </a:p>
+          <a:p>
+            <a:r>
+              <a:t>anticipate is precisely the traffic that matters, so a technique that trades away</a:t>
+            </a:r>
+          </a:p>
+          <a:p>
+            <a:r>
+              <a:t>unfamiliar-traffic accuracy is badly matched to the job.</a:t>
             </a:r>
           </a:p>
           <a:p/>
           <a:p>
             <a:r>
-              <a:t>The pinning point matters more than it sounds. A hosted model can change under a fixed</a:t>
-            </a:r>
-          </a:p>
-          <a:p>
-            <a:r>
-              <a:t>deployment; that is a change-control problem for a compliance control. Our own checkpoints are</a:t>
-            </a:r>
-          </a:p>
-          <a:p>
-            <a:r>
-              <a:t>pinned to a content hash and will reproduce in a year.</a:t>
-            </a:r>
-          </a:p>
-          <a:p/>
-          <a:p>
-            <a:r>
-              <a:t>Close on the final callout: the thing worth funding is the measuring instrument for our actual</a:t>
-            </a:r>
-          </a:p>
-          <a:p>
-            <a:r>
-              <a:t>domain, not more guard comparisons on general safety.</a:t>
+              <a:t>Numbers are in the technical report; the honest caveat is on the slide. Comparing a 32B untuned</a:t>
+            </a:r>
+          </a:p>
+          <a:p>
+            <a:r>
+              <a:t>model to a tuned 4B is a deployment-choice comparison, not a controlled one -- the 32B costs</a:t>
+            </a:r>
+          </a:p>
+          <a:p>
+            <a:r>
+              <a:t>much more to serve. What we can say is that the tuning route did not close the vendor gap and</a:t>
+            </a:r>
+          </a:p>
+          <a:p>
+            <a:r>
+              <a:t>made held-out accuracy worse on most models, while the size route at least moved in the right</a:t>
+            </a:r>
+          </a:p>
+          <a:p>
+            <a:r>
+              <a:t>direction on both regimes.</a:t>
             </a:r>
           </a:p>
         </p:txBody>
@@ -1010,6 +1087,134 @@
           <a:lstStyle/>
           <a:p>
             <a:r>
+              <a:t>Do not rush this slide, and do not apologise through it. Naming the limits is what makes the</a:t>
+            </a:r>
+          </a:p>
+          <a:p>
+            <a:r>
+              <a:t>recommendation on slide 3 credible.</a:t>
+            </a:r>
+          </a:p>
+          <a:p/>
+          <a:p>
+            <a:r>
+              <a:t>The first bullet is the most important and the most self-undermining, which is why it belongs</a:t>
+            </a:r>
+          </a:p>
+          <a:p>
+            <a:r>
+              <a:t>here: the underlying research finding is that guard rankings depend on the benchmark. We are</a:t>
+            </a:r>
+          </a:p>
+          <a:p>
+            <a:r>
+              <a:t>handing you a recommendation derived from one benchmark. It is external and expert-annotated,</a:t>
+            </a:r>
+          </a:p>
+          <a:p>
+            <a:r>
+              <a:t>which is the best tier available to us, but a different instrument could reorder the middle of</a:t>
+            </a:r>
+          </a:p>
+          <a:p>
+            <a:r>
+              <a:t>the table. It is unlikely to reverse a ten-point gap.</a:t>
+            </a:r>
+          </a:p>
+          <a:p/>
+          <a:p>
+            <a:r>
+              <a:t>The pinning point matters more than it sounds. A hosted model can change under a fixed</a:t>
+            </a:r>
+          </a:p>
+          <a:p>
+            <a:r>
+              <a:t>deployment; that is a change-control problem for a compliance control. Our own checkpoints are</a:t>
+            </a:r>
+          </a:p>
+          <a:p>
+            <a:r>
+              <a:t>pinned to a content hash and will reproduce in a year.</a:t>
+            </a:r>
+          </a:p>
+          <a:p/>
+          <a:p>
+            <a:r>
+              <a:t>Close on the final callout: the thing worth funding is the measuring instrument for our actual</a:t>
+            </a:r>
+          </a:p>
+          <a:p>
+            <a:r>
+              <a:t>domain, not more guard comparisons on general safety.</a:t>
+            </a:r>
+          </a:p>
+        </p:txBody>
+      </p:sp>
+      <p:sp>
+        <p:nvSpPr>
+          <p:cNvPr id="4" name="Slide Number Placeholder 3"/>
+          <p:cNvSpPr>
+            <a:spLocks noGrp="1"/>
+          </p:cNvSpPr>
+          <p:nvPr>
+            <p:ph type="sldNum" idx="5" sz="quarter"/>
+          </p:nvPr>
+        </p:nvSpPr>
+        <p:spPr/>
+      </p:sp>
+    </p:spTree>
+  </p:cSld>
+  <p:clrMapOvr>
+    <a:masterClrMapping/>
+  </p:clrMapOvr>
+</p:notes>
+</file>
+
+<file path=ppt/notesSlides/notesSlide14.xml><?xml version="1.0" encoding="utf-8"?>
+<p:notes xmlns:a="http://schemas.openxmlformats.org/drawingml/2006/main" xmlns:p="http://schemas.openxmlformats.org/presentationml/2006/main" xmlns:r="http://schemas.openxmlformats.org/officeDocument/2006/relationships">
+  <p:cSld>
+    <p:spTree>
+      <p:nvGrpSpPr>
+        <p:cNvPr id="1" name=""/>
+        <p:cNvGrpSpPr/>
+        <p:nvPr/>
+      </p:nvGrpSpPr>
+      <p:grpSpPr>
+        <a:xfrm>
+          <a:off x="0" y="0"/>
+          <a:ext cx="0" cy="0"/>
+          <a:chOff x="0" y="0"/>
+          <a:chExt cx="0" cy="0"/>
+        </a:xfrm>
+      </p:grpSpPr>
+      <p:sp>
+        <p:nvSpPr>
+          <p:cNvPr id="2" name="Slide Image Placeholder 1"/>
+          <p:cNvSpPr>
+            <a:spLocks noGrp="1"/>
+          </p:cNvSpPr>
+          <p:nvPr>
+            <p:ph type="sldImg" idx="2"/>
+          </p:nvPr>
+        </p:nvSpPr>
+        <p:spPr/>
+      </p:sp>
+      <p:sp>
+        <p:nvSpPr>
+          <p:cNvPr id="3" name="Notes Placeholder 2"/>
+          <p:cNvSpPr>
+            <a:spLocks noGrp="1"/>
+          </p:cNvSpPr>
+          <p:nvPr>
+            <p:ph type="body" idx="3" sz="quarter"/>
+          </p:nvPr>
+        </p:nvSpPr>
+        <p:spPr/>
+        <p:txBody>
+          <a:bodyPr/>
+          <a:lstStyle/>
+          <a:p>
+            <a:r>
               <a:t>Two minutes. The first two items need no budget. The third frees capacity. The fourth is the</a:t>
             </a:r>
           </a:p>
@@ -1021,17 +1226,37 @@
           <a:p/>
           <a:p>
             <a:r>
-              <a:t>Push for a decision on the right-hand callout before the meeting ends -- whether prompts</a:t>
-            </a:r>
-          </a:p>
-          <a:p>
-            <a:r>
-              <a:t>containing borrower information may go to a third-party API. Everything about the split</a:t>
-            </a:r>
-          </a:p>
-          <a:p>
-            <a:r>
-              <a:t>architecture depends on that answer, and it is not ours to make.</a:t>
+              <a:t>Push for BOTH decisions before the meeting ends. The first is whether prompts containing</a:t>
+            </a:r>
+          </a:p>
+          <a:p>
+            <a:r>
+              <a:t>borrower information may go to a third-party API; everything about the split architecture</a:t>
+            </a:r>
+          </a:p>
+          <a:p>
+            <a:r>
+              <a:t>depends on that answer, and it is not ours to make. The second is who owns the escalation dial</a:t>
+            </a:r>
+          </a:p>
+          <a:p>
+            <a:r>
+              <a:t>once it exists -- slide 8 shows the escalated share is a smooth tradeoff between the legal</a:t>
+            </a:r>
+          </a:p>
+          <a:p>
+            <a:r>
+              <a:t>ceiling and the budget, which means it is a standing decision with a standing owner rather than</a:t>
+            </a:r>
+          </a:p>
+          <a:p>
+            <a:r>
+              <a:t>an architecture we choose once and forget. If nobody owns it, it will sit at whatever we set on</a:t>
+            </a:r>
+          </a:p>
+          <a:p>
+            <a:r>
+              <a:t>day one until an incident moves it.</a:t>
             </a:r>
           </a:p>
           <a:p/>
@@ -1195,7 +1420,33 @@
           </a:p>
           <a:p>
             <a:r>
-              <a:t>changes -- that is the report's title finding.</a:t>
+              <a:t>changes. Name that correctly if you quote it: the report's TITLE finding is that a gain on a</a:t>
+            </a:r>
+          </a:p>
+          <a:p>
+            <a:r>
+              <a:t>represented benchmark does not establish transfer. The ranking reorder across benchmarks is</a:t>
+            </a:r>
+          </a:p>
+          <a:p>
+            <a:r>
+              <a:t>the corollary, and it is the one that bears on a sourcing decision.</a:t>
+            </a:r>
+          </a:p>
+          <a:p/>
+          <a:p>
+            <a:r>
+              <a:t>Be exact about "our own terms" if anyone in legal or risk pushes on the second callout. The</a:t>
+            </a:r>
+          </a:p>
+          <a:p>
+            <a:r>
+              <a:t>evaluation ran on a third-party, expert-annotated set. No company traffic, no borrower data,</a:t>
+            </a:r>
+          </a:p>
+          <a:p>
+            <a:r>
+              <a:t>and no labels we produced ourselves left this building or entered the benchmark.</a:t>
             </a:r>
           </a:p>
         </p:txBody>
@@ -1265,23 +1516,121 @@
           <a:lstStyle/>
           <a:p>
             <a:r>
-              <a:t>This is the slide to spend time on. Everything after it is evidence.</a:t>
+              <a:t>This is the slide. If they remember one thing, it is that the question was posed wrongly: it</a:t>
+            </a:r>
+          </a:p>
+          <a:p>
+            <a:r>
+              <a:t>is not in-house versus outsource, it is which requests go out.</a:t>
             </a:r>
           </a:p>
           <a:p/>
           <a:p>
             <a:r>
-              <a:t>The three numbers, precisely, for anyone who asks:</a:t>
-            </a:r>
-          </a:p>
-          <a:p>
-            <a:r>
-              <a:t>  - catch-rate gap +0.066 at a matched 5% false-alarm rate, 95% interval</a:t>
-            </a:r>
-          </a:p>
-          <a:p>
-            <a:r>
-              <a:t>    [+0.043, +0.089] -- the interval excludes zero, so this is not noise.</a:t>
+              <a:t>Walk the three lanes in order. Lane 1 is a legal constraint, not a technical choice -- if the</a:t>
+            </a:r>
+          </a:p>
+          <a:p>
+            <a:r>
+              <a:t>prompt carries borrower or patient data it stays in, full stop. Lane 3 is the cheap majority:</a:t>
+            </a:r>
+          </a:p>
+          <a:p>
+            <a:r>
+              <a:t>when the in-house guard is confident, a second opinion changes nothing, so paying for one is</a:t>
+            </a:r>
+          </a:p>
+          <a:p>
+            <a:r>
+              <a:t>waste. Lane 2 is the whole game -- the band around the in-house guard's decision line, where it</a:t>
+            </a:r>
+          </a:p>
+          <a:p>
+            <a:r>
+              <a:t>is genuinely unsure, and where the hosted model's advantage actually lives.</a:t>
+            </a:r>
+          </a:p>
+          <a:p/>
+          <a:p>
+            <a:r>
+              <a:t>WHERE THE THREE NUMBERS COME FROM, because they are one measurement and not three, and because</a:t>
+            </a:r>
+          </a:p>
+          <a:p>
+            <a:r>
+              <a:t>the obvious interval to quote is the wrong one:</a:t>
+            </a:r>
+          </a:p>
+          <a:p>
+            <a:r>
+              <a:t>  - 51% = (.842 - .787) / (.896 - .787),</a:t>
+            </a:r>
+          </a:p>
+          <a:p>
+            <a:r>
+              <a:t>    i.e. the SmolLM3-3B inline guard against gpt-5.4 (low) at a matched 5% budget, with the</a:t>
+            </a:r>
+          </a:p>
+          <a:p>
+            <a:r>
+              <a:t>    least-confident fifth escalated. The gap being closed is +0.109 -- that pair.</a:t>
+            </a:r>
+          </a:p>
+          <a:p>
+            <a:r>
+              <a:t>    Computed on the underlying scores that is 51.1%; do the same sum with the three-decimal</a:t>
+            </a:r>
+          </a:p>
+          <a:p>
+            <a:r>
+              <a:t>    published values and you get 50.5%. Rounding, not a discrepancy -- same for the 64% on</a:t>
+            </a:r>
+          </a:p>
+          <a:p>
+            <a:r>
+              <a:t>    slide 8.</a:t>
+            </a:r>
+          </a:p>
+          <a:p>
+            <a:r>
+              <a:t>  - The +0.066 [+0.043, +0.089] figure is a DIFFERENT pair (hosted against</a:t>
+            </a:r>
+          </a:p>
+          <a:p>
+            <a:r>
+              <a:t>    Qwen3-32B, our strongest open guard) and belongs on the next slide. Do not quote</a:t>
+            </a:r>
+          </a:p>
+          <a:p>
+            <a:r>
+              <a:t>    it as the interval behind 51%.</a:t>
+            </a:r>
+          </a:p>
+          <a:p>
+            <a:r>
+              <a:t>  - 20% and 80% are the same dial read two ways: escalate one request in five, four in five</a:t>
+            </a:r>
+          </a:p>
+          <a:p>
+            <a:r>
+              <a:t>    never leave the network.</a:t>
+            </a:r>
+          </a:p>
+          <a:p/>
+          <a:p>
+            <a:r>
+              <a:t>Slide 8 has the curve, and it is smooth -- you can dial the escalated share to whatever your</a:t>
+            </a:r>
+          </a:p>
+          <a:p>
+            <a:r>
+              <a:t>legal and budget constraints allow rather than choosing an architecture.</a:t>
+            </a:r>
+          </a:p>
+          <a:p/>
+          <a:p>
+            <a:r>
+              <a:t>The other figures, precisely, for anyone who asks:</a:t>
             </a:r>
           </a:p>
           <a:p>
@@ -1306,12 +1655,49 @@
           </a:p>
           <a:p>
             <a:r>
-              <a:t>    invoice.</a:t>
+              <a:t>    invoice. We have not amortised our own side; say so rather than improvising a number.</a:t>
             </a:r>
           </a:p>
           <a:p/>
           <a:p>
             <a:r>
+              <a:t>If asked "why not escalate everything": you would get the full 90%, and you</a:t>
+            </a:r>
+          </a:p>
+          <a:p>
+            <a:r>
+              <a:t>would also send every borrower prompt to a third party, pay $0.80 per thousand, and</a:t>
+            </a:r>
+          </a:p>
+          <a:p>
+            <a:r>
+              <a:t>put 1,553 ms on every request. Lane 1 forbids it anyway for the traffic we care</a:t>
+            </a:r>
+          </a:p>
+          <a:p>
+            <a:r>
+              <a:t>most about.</a:t>
+            </a:r>
+          </a:p>
+          <a:p/>
+          <a:p>
+            <a:r>
+              <a:t>If asked "why not escalate nothing": that is the 79% floor for the</a:t>
+            </a:r>
+          </a:p>
+          <a:p>
+            <a:r>
+              <a:t>inline 3B guard, and it means knowingly missing about one unsafe prompt in ten that we could</a:t>
+            </a:r>
+          </a:p>
+          <a:p>
+            <a:r>
+              <a:t>have caught.</a:t>
+            </a:r>
+          </a:p>
+          <a:p/>
+          <a:p>
+            <a:r>
               <a:t>The recommendation is deliberately a split, not a winner. If pushed for one answer: hosted,</a:t>
             </a:r>
           </a:p>
@@ -1333,12 +1719,12 @@
           <a:p/>
           <a:p>
             <a:r>
-              <a:t>Third bullet matters for planning. Someone will propose "just fine-tune ours" or "just use a</a:t>
-            </a:r>
-          </a:p>
-          <a:p>
-            <a:r>
-              <a:t>bigger one". Both were tested. Neither worked. Slides 5 and 6.</a:t>
+              <a:t>Someone will propose "just fine-tune ours" or "just use a bigger one". Both were tested.</a:t>
+            </a:r>
+          </a:p>
+          <a:p>
+            <a:r>
+              <a:t>Neither worked. Slides 6 and 7.</a:t>
             </a:r>
           </a:p>
         </p:txBody>
@@ -1630,6 +2016,57 @@
           <a:p/>
           <a:p>
             <a:r>
+              <a:t>The report tabulates four defensible weightings of these twelve cells and only two of them</a:t>
+            </a:r>
+          </a:p>
+          <a:p>
+            <a:r>
+              <a:t>support a positive advantage at all. Weighting sources by row count roughly halves it, to</a:t>
+            </a:r>
+          </a:p>
+          <a:p>
+            <a:r>
+              <a:t>+0.049 [-0.031, +0.112], which straddles zero. And the one on the red</a:t>
+            </a:r>
+          </a:p>
+          <a:p>
+            <a:r>
+              <a:t>callout is the one to keep in view: include the BASE arms alongside the tuned ones and the</a:t>
+            </a:r>
+          </a:p>
+          <a:p>
+            <a:r>
+              <a:t>aggregate becomes -0.264 [-0.321, -0.179], excluding zero in the</a:t>
+            </a:r>
+          </a:p>
+          <a:p>
+            <a:r>
+              <a:t>opposite direction. That is not a statistical footnote, it is a budget consequence. The</a:t>
+            </a:r>
+          </a:p>
+          <a:p>
+            <a:r>
+              <a:t>represented-source advantage is a property of TUNED guards specifically -- the specialization</a:t>
+            </a:r>
+          </a:p>
+          <a:p>
+            <a:r>
+              <a:t>finding from slide 6 seen from the other side -- so lane 1 is "run a small guard we have tuned</a:t>
+            </a:r>
+          </a:p>
+          <a:p>
+            <a:r>
+              <a:t>on a manifest of our own traffic, and keep tuning it", which is a funded workstream with a</a:t>
+            </a:r>
+          </a:p>
+          <a:p>
+            <a:r>
+              <a:t>maintenance burden. Price that before approving lane 1.</a:t>
+            </a:r>
+          </a:p>
+          <a:p/>
+          <a:p>
+            <a:r>
               <a:t>Represented sources here are jailbreak_classification, prompt_injections, toxicchat. Held-out sources are the ones we never</a:t>
             </a:r>
           </a:p>
@@ -1742,22 +2179,79 @@
           <a:lstStyle/>
           <a:p>
             <a:r>
-              <a:t>The headline is the sign split, not the average. If you quote only the mean change</a:t>
-            </a:r>
-          </a:p>
-          <a:p>
-            <a:r>
-              <a:t>(+0.005) you will mislead the room -- it is a small number sitting on top of</a:t>
-            </a:r>
-          </a:p>
-          <a:p>
-            <a:r>
-              <a:t>swings from -0.059 to +0.122.</a:t>
+              <a:t>KEEP THE TWO MEASUREMENTS APART, because this slide carries both and the report never pools</a:t>
+            </a:r>
+          </a:p>
+          <a:p>
+            <a:r>
+              <a:t>them. The CHART is macro-AP -- average ranking quality over the whole score list -- measured on</a:t>
+            </a:r>
+          </a:p>
+          <a:p>
+            <a:r>
+              <a:t>our own internal 6-checkpoint panel, the same panel the research was run on.</a:t>
+            </a:r>
+          </a:p>
+          <a:p>
+            <a:r>
+              <a:t>The blue callout is a different instrument: catch rate at a matched 5% false-alarm budget on</a:t>
+            </a:r>
+          </a:p>
+          <a:p>
+            <a:r>
+              <a:t>the EXTERNAL expert-annotated prompts. Both say fine-tuning does not close the gap. Neither is</a:t>
+            </a:r>
+          </a:p>
+          <a:p>
+            <a:r>
+              <a:t>a restatement of the other, and averaging them would be a mistake.</a:t>
             </a:r>
           </a:p>
           <a:p/>
           <a:p>
             <a:r>
+              <a:t>On the external measurement the headline is the sign split, not the average. If you quote only</a:t>
+            </a:r>
+          </a:p>
+          <a:p>
+            <a:r>
+              <a:t>the mean change (+0.005) you will mislead the room -- it is a small number sitting</a:t>
+            </a:r>
+          </a:p>
+          <a:p>
+            <a:r>
+              <a:t>on top of swings from -0.059 to +0.122, and</a:t>
+            </a:r>
+          </a:p>
+          <a:p>
+            <a:r>
+              <a:t>4 of 6 checkpoints moved the wrong way.</a:t>
+            </a:r>
+          </a:p>
+          <a:p/>
+          <a:p>
+            <a:r>
+              <a:t>One more number for this slide if the room asks how much worse it is where we would actually</a:t>
+            </a:r>
+          </a:p>
+          <a:p>
+            <a:r>
+              <a:t>run: read only inside the 5% false-alarm budget, the held-out loss on the internal panel is</a:t>
+            </a:r>
+          </a:p>
+          <a:p>
+            <a:r>
+              <a:t>about 3.0x bigger than the average metric shows. That is</a:t>
+            </a:r>
+          </a:p>
+          <a:p>
+            <a:r>
+              <a:t>the internal panel again, not the external set.</a:t>
+            </a:r>
+          </a:p>
+          <a:p/>
+          <a:p>
+            <a:r>
               <a:t>Mechanism, in plain terms: fine-tuning on a fixed set of sources specialises the model to</a:t>
             </a:r>
           </a:p>
@@ -1820,12 +2314,22 @@
           <a:p/>
           <a:p>
             <a:r>
-              <a:t>This is the central finding of the underlying research, reproduced here on external</a:t>
-            </a:r>
-          </a:p>
-          <a:p>
-            <a:r>
-              <a:t>expert-annotated data rather than on our own panel, which is a harder test.</a:t>
+              <a:t>This is the central finding of the underlying research. The chart is that finding on the panel</a:t>
+            </a:r>
+          </a:p>
+          <a:p>
+            <a:r>
+              <a:t>it was measured on; the blue callout is the same pattern recurring on external expert-annotated</a:t>
+            </a:r>
+          </a:p>
+          <a:p>
+            <a:r>
+              <a:t>data, which is the harder test. Say which one you are quoting -- an earlier version of this</a:t>
+            </a:r>
+          </a:p>
+          <a:p>
+            <a:r>
+              <a:t>slide described the chart itself as the external result, and it is not.</a:t>
             </a:r>
           </a:p>
           <a:p/>
@@ -2100,6 +2604,37 @@
               <a:t>Cost is linear in the escalated share, so a fifth of the traffic is a fifth of the bill.</a:t>
             </a:r>
           </a:p>
+          <a:p/>
+          <a:p>
+            <a:r>
+              <a:t>One rounding note, in case someone has the technical report open beside this. The chart</a:t>
+            </a:r>
+          </a:p>
+          <a:p>
+            <a:r>
+              <a:t>computes "% of the gap closed" from the raw cascade curve; the report's own gap-ladder figure</a:t>
+            </a:r>
+          </a:p>
+          <a:p>
+            <a:r>
+              <a:t>computes it from the committed three-decimal values (.856, .787, .896) and therefore prints</a:t>
+            </a:r>
+          </a:p>
+          <a:p>
+            <a:r>
+              <a:t>+63% at the 30% point where this chart prints 64%. Same measurement, 63.3% against 63.5%, and</a:t>
+            </a:r>
+          </a:p>
+          <a:p>
+            <a:r>
+              <a:t>the difference is which side of the rounding the inputs sit on. Say that rather than</a:t>
+            </a:r>
+          </a:p>
+          <a:p>
+            <a:r>
+              <a:t>improvising -- the three annotated points here are internally consistent with each other.</a:t>
+            </a:r>
+          </a:p>
         </p:txBody>
       </p:sp>
       <p:sp>
@@ -2178,22 +2713,73 @@
           <a:p/>
           <a:p>
             <a:r>
-              <a:t>Row by row. Averaging the five tuning runs of a single guard is free -- the adapters already</a:t>
-            </a:r>
-          </a:p>
-          <a:p>
-            <a:r>
-              <a:t>exist -- and it reliably adds about +0.026. Do that regardless; it is also how the</a:t>
-            </a:r>
-          </a:p>
-          <a:p>
-            <a:r>
-              <a:t>tuned 32B recovers what fine-tuning cost it.</a:t>
+              <a:t>Two things about the top two rows, because they are easy to misread and an earlier version of</a:t>
+            </a:r>
+          </a:p>
+          <a:p>
+            <a:r>
+              <a:t>this table invited exactly that. First, the 83% baseline is NOT a</a:t>
+            </a:r>
+          </a:p>
+          <a:p>
+            <a:r>
+              <a:t>single forward pass: the strongest single open configuration we hold is the Qwen3-32B</a:t>
+            </a:r>
+          </a:p>
+          <a:p>
+            <a:r>
+              <a:t>with its five tuned adapters averaged, so it is five model calls. Second, row 2's</a:t>
+            </a:r>
+          </a:p>
+          <a:p>
+            <a:r>
+              <a:t>+0.026 is measured against a SINGLE TUNED SEED of the same checkpoint, and it is</a:t>
+            </a:r>
+          </a:p>
+          <a:p>
+            <a:r>
+              <a:t>what produced row 1 -- it is not a gain to add on top of it. Concretely on the</a:t>
+            </a:r>
+          </a:p>
+          <a:p>
+            <a:r>
+              <a:t>Qwen3-32B: .834 for the seed ensemble against 0.830 for its own</a:t>
+            </a:r>
+          </a:p>
+          <a:p>
+            <a:r>
+              <a:t>untuned base, i.e. +0.004 over the base and about +0.026 over one of its own tuned seeds.</a:t>
+            </a:r>
+          </a:p>
+          <a:p>
+            <a:r>
+              <a:t>Adding +0.026 to 83% would produce a number that beats the</a:t>
+            </a:r>
+          </a:p>
+          <a:p>
+            <a:r>
+              <a:t>fitted 18-guard stack and appears nowhere in the report.</a:t>
             </a:r>
           </a:p>
           <a:p/>
           <a:p>
             <a:r>
+              <a:t>"No new training" is the honest cost entry for row 2: the adapters already exist, so it costs</a:t>
+            </a:r>
+          </a:p>
+          <a:p>
+            <a:r>
+              <a:t>no GPU time to CREATE. It is not free to RUN -- averaging five adapters is five forward passes</a:t>
+            </a:r>
+          </a:p>
+          <a:p>
+            <a:r>
+              <a:t>per request, in a deck whose whole argument is per-request latency and cost.</a:t>
+            </a:r>
+          </a:p>
+          <a:p/>
+          <a:p>
+            <a:r>
               <a:t>Averaging all 18 guards equally is WORSE than just using the best one</a:t>
             </a:r>
           </a:p>
@@ -2256,27 +2842,94 @@
           </a:p>
           <a:p>
             <a:r>
-              <a:t>sixteenth of the compute and no labelled data. If challenged on this, the honest line is that</a:t>
-            </a:r>
-          </a:p>
-          <a:p>
-            <a:r>
-              <a:t>the blend is still the in-house ceiling; escalation is the cheaper route to almost the same place.</a:t>
-            </a:r>
-          </a:p>
-          <a:p>
-            <a:r>
-              <a:t>An earlier version of this slide printed 87% here and claimed escalation beat the blend, which</a:t>
-            </a:r>
-          </a:p>
-          <a:p>
-            <a:r>
-              <a:t>reversed the ordering. So ensembling is not the route -- unless lane 1 applies and nothing</a:t>
-            </a:r>
-          </a:p>
-          <a:p>
-            <a:r>
-              <a:t>may leave, in which case it is the in-house ceiling and worth building.</a:t>
+              <a:t>fifteenth of the compute (18 calls against 1.2) and no labelled data. If</a:t>
+            </a:r>
+          </a:p>
+          <a:p>
+            <a:r>
+              <a:t>challenged on this, the honest line is that the blend is still the in-house ceiling; escalation</a:t>
+            </a:r>
+          </a:p>
+          <a:p>
+            <a:r>
+              <a:t>is the cheaper route to almost the same place. An earlier version of this slide printed 87%</a:t>
+            </a:r>
+          </a:p>
+          <a:p>
+            <a:r>
+              <a:t>here and claimed escalation beat the blend, which reversed the ordering. So ensembling is not</a:t>
+            </a:r>
+          </a:p>
+          <a:p>
+            <a:r>
+              <a:t>the route -- unless lane 1 applies and nothing may leave, in which case it is the in-house</a:t>
+            </a:r>
+          </a:p>
+          <a:p>
+            <a:r>
+              <a:t>ceiling and worth building.</a:t>
+            </a:r>
+          </a:p>
+          <a:p/>
+          <a:p>
+            <a:r>
+              <a:t>Be precise about what that last row was measured ON TOP OF, because the table would otherwise</a:t>
+            </a:r>
+          </a:p>
+          <a:p>
+            <a:r>
+              <a:t>read as "escalation adds one point to our best in-house guard". It does not. It was measured</a:t>
+            </a:r>
+          </a:p>
+          <a:p>
+            <a:r>
+              <a:t>with the SmolLM3-3B inline guard underneath it, moving .787 to</a:t>
+            </a:r>
+          </a:p>
+          <a:p>
+            <a:r>
+              <a:t>.842 -- five points, not one. A cascade sitting on top of a 32B inline guard is a</a:t>
+            </a:r>
+          </a:p>
+          <a:p>
+            <a:r>
+              <a:t>combination that does not exist anywhere in the report, and an engineer who plans around</a:t>
+            </a:r>
+          </a:p>
+          <a:p>
+            <a:r>
+              <a:t>"83% to 84%" will build something we never measured.</a:t>
+            </a:r>
+          </a:p>
+          <a:p/>
+          <a:p>
+            <a:r>
+              <a:t>One in-house repair the table cannot carry, if someone asks whether there is anything else:</a:t>
+            </a:r>
+          </a:p>
+          <a:p>
+            <a:r>
+              <a:t>averaging a base with its own adapter recovers +0.076 of transfer ranking for one extra pass</a:t>
+            </a:r>
+          </a:p>
+          <a:p>
+            <a:r>
+              <a:t>and no retraining. That is the cheapest in-house repair in the research -- but it is measured</a:t>
+            </a:r>
+          </a:p>
+          <a:p>
+            <a:r>
+              <a:t>in macro-AP on the internal panel, not as catch rate at a matched budget on these rows, so it</a:t>
+            </a:r>
+          </a:p>
+          <a:p>
+            <a:r>
+              <a:t>cannot be dropped into this table without breaking the same-rows, same-budget premise that</a:t>
+            </a:r>
+          </a:p>
+          <a:p>
+            <a:r>
+              <a:t>makes the table comparable at all. Offer it as a next measurement, not as a fifth row.</a:t>
             </a:r>
           </a:p>
         </p:txBody>
@@ -5815,7 +6468,7 @@
                 </a:solidFill>
                 <a:latin typeface="Calibri"/>
               </a:rPr>
-              <a:t>WHAT HOSTED COSTS</a:t>
+              <a:t>THE LANE WE CANNOT ESCALATE</a:t>
             </a:r>
           </a:p>
         </p:txBody>
@@ -5857,7 +6510,7 @@
                 </a:solidFill>
                 <a:latin typeface="Cambria"/>
               </a:rPr>
-              <a:t>The accuracy is real. So is the bill, the latency, and the loss of control</a:t>
+              <a:t>On the one lane where nothing may leave, we have the least evidence our guard works</a:t>
             </a:r>
           </a:p>
         </p:txBody>
@@ -5896,7 +6549,7 @@
                 </a:solidFill>
                 <a:latin typeface="Calibri"/>
               </a:rPr>
-              <a:t>Four costs, three of which do not appear on an invoice</a:t>
+              <a:t>Measured on the instrument we built for exactly that traffic: 994 dual-labelled mortgage rows, scored zero-shot</a:t>
             </a:r>
           </a:p>
         </p:txBody>
@@ -5909,18 +6562,18 @@
         </p:nvSpPr>
         <p:spPr>
           <a:xfrm>
-            <a:off x="777240" y="2331720"/>
-            <a:ext cx="5112867" cy="420624"/>
+            <a:off x="777240" y="2295144"/>
+            <a:ext cx="3362858" cy="1481328"/>
           </a:xfrm>
           <a:prstGeom prst="rect">
             <a:avLst/>
           </a:prstGeom>
           <a:solidFill>
-            <a:srgbClr val="18263D"/>
+            <a:srgbClr val="331A1C"/>
           </a:solidFill>
           <a:ln w="9525">
             <a:solidFill>
-              <a:srgbClr val="1E3050"/>
+              <a:srgbClr val="4A2427"/>
             </a:solidFill>
           </a:ln>
           <a:effectLst/>
@@ -5955,8 +6608,8 @@
         </p:nvSpPr>
         <p:spPr>
           <a:xfrm>
-            <a:off x="905256" y="2331720"/>
-            <a:ext cx="1993629" cy="420624"/>
+            <a:off x="1014984" y="2441448"/>
+            <a:ext cx="2887370" cy="1188720"/>
           </a:xfrm>
           <a:prstGeom prst="rect">
             <a:avLst/>
@@ -5964,126 +6617,64 @@
           <a:noFill/>
         </p:spPr>
         <p:txBody>
-          <a:bodyPr wrap="square" anchor="ctr" lIns="0" rIns="0" tIns="0" bIns="0">
+          <a:bodyPr wrap="square" anchor="t" lIns="0" rIns="0" tIns="0" bIns="0">
             <a:spAutoFit/>
           </a:bodyPr>
           <a:lstStyle/>
           <a:p>
             <a:pPr algn="l">
               <a:spcAft>
+                <a:spcPts val="400"/>
+              </a:spcAft>
+            </a:pPr>
+            <a:r>
+              <a:rPr sz="2100" b="1" i="0">
+                <a:solidFill>
+                  <a:srgbClr val="E0564F"/>
+                </a:solidFill>
+                <a:latin typeface="Cambria"/>
+              </a:rPr>
+              <a:t>502 of 994</a:t>
+            </a:r>
+          </a:p>
+          <a:p>
+            <a:pPr algn="l">
+              <a:spcAft>
                 <a:spcPts val="0"/>
               </a:spcAft>
             </a:pPr>
             <a:r>
-              <a:rPr sz="960" b="1" i="0">
-                <a:solidFill>
-                  <a:srgbClr val="BFD8F5"/>
-                </a:solidFill>
-                <a:latin typeface="Calibri"/>
-              </a:rPr>
-              <a:t/>
-            </a:r>
-          </a:p>
-        </p:txBody>
-      </p:sp>
-      <p:sp>
-        <p:nvSpPr>
-          <p:cNvPr id="9" name="TextBox 8"/>
-          <p:cNvSpPr txBox="1"/>
-          <p:nvPr/>
-        </p:nvSpPr>
-        <p:spPr>
-          <a:xfrm>
-            <a:off x="3154917" y="2331720"/>
-            <a:ext cx="1175570" cy="420624"/>
-          </a:xfrm>
-          <a:prstGeom prst="rect">
-            <a:avLst/>
-          </a:prstGeom>
-          <a:noFill/>
-        </p:spPr>
-        <p:txBody>
-          <a:bodyPr wrap="square" anchor="ctr" lIns="0" rIns="0" tIns="0" bIns="0">
-            <a:spAutoFit/>
-          </a:bodyPr>
-          <a:lstStyle/>
-          <a:p>
-            <a:pPr algn="ctr">
-              <a:spcAft>
-                <a:spcPts val="0"/>
-              </a:spcAft>
-            </a:pPr>
-            <a:r>
-              <a:rPr sz="960" b="1" i="0">
-                <a:solidFill>
-                  <a:srgbClr val="BFD8F5"/>
-                </a:solidFill>
-                <a:latin typeface="Calibri"/>
-              </a:rPr>
-              <a:t>Self-hosted small</a:t>
-            </a:r>
-          </a:p>
-        </p:txBody>
-      </p:sp>
-      <p:sp>
-        <p:nvSpPr>
-          <p:cNvPr id="10" name="TextBox 9"/>
-          <p:cNvSpPr txBox="1"/>
-          <p:nvPr/>
-        </p:nvSpPr>
-        <p:spPr>
-          <a:xfrm>
-            <a:off x="4586519" y="2331720"/>
-            <a:ext cx="1175570" cy="420624"/>
-          </a:xfrm>
-          <a:prstGeom prst="rect">
-            <a:avLst/>
-          </a:prstGeom>
-          <a:noFill/>
-        </p:spPr>
-        <p:txBody>
-          <a:bodyPr wrap="square" anchor="ctr" lIns="0" rIns="0" tIns="0" bIns="0">
-            <a:spAutoFit/>
-          </a:bodyPr>
-          <a:lstStyle/>
-          <a:p>
-            <a:pPr algn="ctr">
-              <a:spcAft>
-                <a:spcPts val="0"/>
-              </a:spcAft>
-            </a:pPr>
-            <a:r>
-              <a:rPr sz="960" b="1" i="0">
-                <a:solidFill>
-                  <a:srgbClr val="BFD8F5"/>
-                </a:solidFill>
-                <a:latin typeface="Calibri"/>
-              </a:rPr>
-              <a:t>Hosted frontier</a:t>
-            </a:r>
-          </a:p>
-        </p:txBody>
-      </p:sp>
-      <p:sp>
-        <p:nvSpPr>
-          <p:cNvPr id="11" name="Rectangle 10"/>
+              <a:rPr sz="1019" b="0" i="0">
+                <a:solidFill>
+                  <a:srgbClr val="9DAFC7"/>
+                </a:solidFill>
+                <a:latin typeface="Calibri"/>
+              </a:rPr>
+              <a:t>rows that read safe to a general safety guard and still solicit a compliance violation. The largest non-benign block, by design — this is the payload.</a:t>
+            </a:r>
+          </a:p>
+        </p:txBody>
+      </p:sp>
+      <p:sp>
+        <p:nvSpPr>
+          <p:cNvPr id="9" name="Rectangle 8"/>
           <p:cNvSpPr/>
           <p:nvPr/>
         </p:nvSpPr>
         <p:spPr>
           <a:xfrm>
-            <a:off x="777240" y="2752344"/>
-            <a:ext cx="5112867" cy="420624"/>
+            <a:off x="4414418" y="2295144"/>
+            <a:ext cx="3362858" cy="1481328"/>
           </a:xfrm>
           <a:prstGeom prst="rect">
             <a:avLst/>
           </a:prstGeom>
           <a:solidFill>
-            <a:srgbClr val="0C1424"/>
+            <a:srgbClr val="331A1C"/>
           </a:solidFill>
           <a:ln w="9525">
             <a:solidFill>
-              <a:srgbClr val="1E3050"/>
+              <a:srgbClr val="4A2427"/>
             </a:solidFill>
           </a:ln>
           <a:effectLst/>
@@ -6112,14 +6703,14 @@
       </p:sp>
       <p:sp>
         <p:nvSpPr>
-          <p:cNvPr id="12" name="TextBox 11"/>
+          <p:cNvPr id="10" name="TextBox 9"/>
           <p:cNvSpPr txBox="1"/>
           <p:nvPr/>
         </p:nvSpPr>
         <p:spPr>
           <a:xfrm>
-            <a:off x="905256" y="2752344"/>
-            <a:ext cx="1993629" cy="420624"/>
+            <a:off x="4652162" y="2441448"/>
+            <a:ext cx="2887370" cy="1188720"/>
           </a:xfrm>
           <a:prstGeom prst="rect">
             <a:avLst/>
@@ -6127,126 +6718,64 @@
           <a:noFill/>
         </p:spPr>
         <p:txBody>
-          <a:bodyPr wrap="square" anchor="ctr" lIns="0" rIns="0" tIns="0" bIns="0">
+          <a:bodyPr wrap="square" anchor="t" lIns="0" rIns="0" tIns="0" bIns="0">
             <a:spAutoFit/>
           </a:bodyPr>
           <a:lstStyle/>
           <a:p>
             <a:pPr algn="l">
               <a:spcAft>
+                <a:spcPts val="400"/>
+              </a:spcAft>
+            </a:pPr>
+            <a:r>
+              <a:rPr sz="2100" b="1" i="0">
+                <a:solidFill>
+                  <a:srgbClr val="E0564F"/>
+                </a:solidFill>
+                <a:latin typeface="Cambria"/>
+              </a:rPr>
+              <a:t>0.85  vs  0.555</a:t>
+            </a:r>
+          </a:p>
+          <a:p>
+            <a:pPr algn="l">
+              <a:spcAft>
                 <a:spcPts val="0"/>
               </a:spcAft>
             </a:pPr>
             <a:r>
-              <a:rPr sz="960" b="1" i="0">
+              <a:rPr sz="1019" b="0" i="0">
                 <a:solidFill>
                   <a:srgbClr val="9DAFC7"/>
                 </a:solidFill>
                 <a:latin typeface="Calibri"/>
               </a:rPr>
-              <a:t>Median latency</a:t>
-            </a:r>
-          </a:p>
-        </p:txBody>
-      </p:sp>
-      <p:sp>
-        <p:nvSpPr>
-          <p:cNvPr id="13" name="TextBox 12"/>
-          <p:cNvSpPr txBox="1"/>
-          <p:nvPr/>
-        </p:nvSpPr>
-        <p:spPr>
-          <a:xfrm>
-            <a:off x="3154917" y="2752344"/>
-            <a:ext cx="1175570" cy="420624"/>
-          </a:xfrm>
-          <a:prstGeom prst="rect">
-            <a:avLst/>
-          </a:prstGeom>
-          <a:noFill/>
-        </p:spPr>
-        <p:txBody>
-          <a:bodyPr wrap="square" anchor="ctr" lIns="0" rIns="0" tIns="0" bIns="0">
-            <a:spAutoFit/>
-          </a:bodyPr>
-          <a:lstStyle/>
-          <a:p>
-            <a:pPr algn="ctr">
-              <a:spcAft>
-                <a:spcPts val="0"/>
-              </a:spcAft>
-            </a:pPr>
-            <a:r>
-              <a:rPr sz="960" b="0" i="0">
-                <a:solidFill>
-                  <a:srgbClr val="9DAFC7"/>
-                </a:solidFill>
-                <a:latin typeface="Calibri"/>
-              </a:rPr>
-              <a:t>10–25 ms</a:t>
-            </a:r>
-          </a:p>
-        </p:txBody>
-      </p:sp>
-      <p:sp>
-        <p:nvSpPr>
-          <p:cNvPr id="14" name="TextBox 13"/>
-          <p:cNvSpPr txBox="1"/>
-          <p:nvPr/>
-        </p:nvSpPr>
-        <p:spPr>
-          <a:xfrm>
-            <a:off x="4586519" y="2752344"/>
-            <a:ext cx="1175570" cy="420624"/>
-          </a:xfrm>
-          <a:prstGeom prst="rect">
-            <a:avLst/>
-          </a:prstGeom>
-          <a:noFill/>
-        </p:spPr>
-        <p:txBody>
-          <a:bodyPr wrap="square" anchor="ctr" lIns="0" rIns="0" tIns="0" bIns="0">
-            <a:spAutoFit/>
-          </a:bodyPr>
-          <a:lstStyle/>
-          <a:p>
-            <a:pPr algn="ctr">
-              <a:spcAft>
-                <a:spcPts val="0"/>
-              </a:spcAft>
-            </a:pPr>
-            <a:r>
-              <a:rPr sz="960" b="0" i="0">
-                <a:solidFill>
-                  <a:srgbClr val="9DAFC7"/>
-                </a:solidFill>
-                <a:latin typeface="Calibri"/>
-              </a:rPr>
-              <a:t>~1,553 ms</a:t>
-            </a:r>
-          </a:p>
-        </p:txBody>
-      </p:sp>
-      <p:sp>
-        <p:nvSpPr>
-          <p:cNvPr id="15" name="Rectangle 14"/>
+              <a:t>best zero-shot ranking of policy violations, against the chance floor a coin flip already scores. The whole band is 0.12–0.30 above chance.</a:t>
+            </a:r>
+          </a:p>
+        </p:txBody>
+      </p:sp>
+      <p:sp>
+        <p:nvSpPr>
+          <p:cNvPr id="11" name="Rectangle 10"/>
           <p:cNvSpPr/>
           <p:nvPr/>
         </p:nvSpPr>
         <p:spPr>
           <a:xfrm>
-            <a:off x="777240" y="3172968"/>
-            <a:ext cx="5112867" cy="420624"/>
+            <a:off x="8051596" y="2295144"/>
+            <a:ext cx="3362858" cy="1481328"/>
           </a:xfrm>
           <a:prstGeom prst="rect">
             <a:avLst/>
           </a:prstGeom>
           <a:solidFill>
-            <a:srgbClr val="18263D"/>
+            <a:srgbClr val="331A1C"/>
           </a:solidFill>
           <a:ln w="9525">
             <a:solidFill>
-              <a:srgbClr val="1E3050"/>
+              <a:srgbClr val="4A2427"/>
             </a:solidFill>
           </a:ln>
           <a:effectLst/>
@@ -6275,14 +6804,14 @@
       </p:sp>
       <p:sp>
         <p:nvSpPr>
-          <p:cNvPr id="16" name="TextBox 15"/>
+          <p:cNvPr id="12" name="TextBox 11"/>
           <p:cNvSpPr txBox="1"/>
           <p:nvPr/>
         </p:nvSpPr>
         <p:spPr>
           <a:xfrm>
-            <a:off x="905256" y="3172968"/>
-            <a:ext cx="1993629" cy="420624"/>
+            <a:off x="8289340" y="2441448"/>
+            <a:ext cx="2887370" cy="1188720"/>
           </a:xfrm>
           <a:prstGeom prst="rect">
             <a:avLst/>
@@ -6290,126 +6819,64 @@
           <a:noFill/>
         </p:spPr>
         <p:txBody>
-          <a:bodyPr wrap="square" anchor="ctr" lIns="0" rIns="0" tIns="0" bIns="0">
+          <a:bodyPr wrap="square" anchor="t" lIns="0" rIns="0" tIns="0" bIns="0">
             <a:spAutoFit/>
           </a:bodyPr>
           <a:lstStyle/>
           <a:p>
             <a:pPr algn="l">
               <a:spcAft>
+                <a:spcPts val="400"/>
+              </a:spcAft>
+            </a:pPr>
+            <a:r>
+              <a:rPr sz="2100" b="1" i="0">
+                <a:solidFill>
+                  <a:srgbClr val="E0564F"/>
+                </a:solidFill>
+                <a:latin typeface="Cambria"/>
+              </a:rPr>
+              <a:t>below the median</a:t>
+            </a:r>
+          </a:p>
+          <a:p>
+            <a:pPr algn="l">
+              <a:spcAft>
                 <a:spcPts val="0"/>
               </a:spcAft>
             </a:pPr>
             <a:r>
-              <a:rPr sz="960" b="1" i="0">
+              <a:rPr sz="1019" b="0" i="0">
                 <a:solidFill>
                   <a:srgbClr val="9DAFC7"/>
                 </a:solidFill>
                 <a:latin typeface="Calibri"/>
               </a:rPr>
-              <a:t>Cost per 1k prompts</a:t>
-            </a:r>
-          </a:p>
-        </p:txBody>
-      </p:sp>
-      <p:sp>
-        <p:nvSpPr>
-          <p:cNvPr id="17" name="TextBox 16"/>
-          <p:cNvSpPr txBox="1"/>
-          <p:nvPr/>
-        </p:nvSpPr>
-        <p:spPr>
-          <a:xfrm>
-            <a:off x="3154917" y="3172968"/>
-            <a:ext cx="1175570" cy="420624"/>
-          </a:xfrm>
-          <a:prstGeom prst="rect">
-            <a:avLst/>
-          </a:prstGeom>
-          <a:noFill/>
-        </p:spPr>
-        <p:txBody>
-          <a:bodyPr wrap="square" anchor="ctr" lIns="0" rIns="0" tIns="0" bIns="0">
-            <a:spAutoFit/>
-          </a:bodyPr>
-          <a:lstStyle/>
-          <a:p>
-            <a:pPr algn="ctr">
-              <a:spcAft>
-                <a:spcPts val="0"/>
-              </a:spcAft>
-            </a:pPr>
-            <a:r>
-              <a:rPr sz="960" b="0" i="0">
-                <a:solidFill>
-                  <a:srgbClr val="9DAFC7"/>
-                </a:solidFill>
-                <a:latin typeface="Calibri"/>
-              </a:rPr>
-              <a:t>GPU you own</a:t>
-            </a:r>
-          </a:p>
-        </p:txBody>
-      </p:sp>
-      <p:sp>
-        <p:nvSpPr>
-          <p:cNvPr id="18" name="TextBox 17"/>
-          <p:cNvSpPr txBox="1"/>
-          <p:nvPr/>
-        </p:nvSpPr>
-        <p:spPr>
-          <a:xfrm>
-            <a:off x="4586519" y="3172968"/>
-            <a:ext cx="1175570" cy="420624"/>
-          </a:xfrm>
-          <a:prstGeom prst="rect">
-            <a:avLst/>
-          </a:prstGeom>
-          <a:noFill/>
-        </p:spPr>
-        <p:txBody>
-          <a:bodyPr wrap="square" anchor="ctr" lIns="0" rIns="0" tIns="0" bIns="0">
-            <a:spAutoFit/>
-          </a:bodyPr>
-          <a:lstStyle/>
-          <a:p>
-            <a:pPr algn="ctr">
-              <a:spcAft>
-                <a:spcPts val="0"/>
-              </a:spcAft>
-            </a:pPr>
-            <a:r>
-              <a:rPr sz="960" b="0" i="0">
-                <a:solidFill>
-                  <a:srgbClr val="9DAFC7"/>
-                </a:solidFill>
-                <a:latin typeface="Calibri"/>
-              </a:rPr>
-              <a:t>$0.80</a:t>
-            </a:r>
-          </a:p>
-        </p:txBody>
-      </p:sp>
-      <p:sp>
-        <p:nvSpPr>
-          <p:cNvPr id="19" name="Rectangle 18"/>
+              <a:t>where all four guards rank the worked violation, against the benign inquiries in its own split. One of them ranks it below every single one.</a:t>
+            </a:r>
+          </a:p>
+        </p:txBody>
+      </p:sp>
+      <p:sp>
+        <p:nvSpPr>
+          <p:cNvPr id="13" name="Rectangle 12"/>
           <p:cNvSpPr/>
           <p:nvPr/>
         </p:nvSpPr>
         <p:spPr>
           <a:xfrm>
-            <a:off x="777240" y="3593592"/>
-            <a:ext cx="5112867" cy="420624"/>
+            <a:off x="777240" y="3941064"/>
+            <a:ext cx="5112867" cy="1517904"/>
           </a:xfrm>
           <a:prstGeom prst="rect">
             <a:avLst/>
           </a:prstGeom>
           <a:solidFill>
-            <a:srgbClr val="0C1424"/>
+            <a:srgbClr val="331A1C"/>
           </a:solidFill>
           <a:ln w="9525">
             <a:solidFill>
-              <a:srgbClr val="1E3050"/>
+              <a:srgbClr val="4A2427"/>
             </a:solidFill>
           </a:ln>
           <a:effectLst/>
@@ -6438,14 +6905,14 @@
       </p:sp>
       <p:sp>
         <p:nvSpPr>
-          <p:cNvPr id="20" name="TextBox 19"/>
+          <p:cNvPr id="14" name="TextBox 13"/>
           <p:cNvSpPr txBox="1"/>
           <p:nvPr/>
         </p:nvSpPr>
         <p:spPr>
           <a:xfrm>
-            <a:off x="905256" y="3593592"/>
-            <a:ext cx="1993629" cy="420624"/>
+            <a:off x="1014984" y="4087368"/>
+            <a:ext cx="4637379" cy="1225296"/>
           </a:xfrm>
           <a:prstGeom prst="rect">
             <a:avLst/>
@@ -6453,116 +6920,57 @@
           <a:noFill/>
         </p:spPr>
         <p:txBody>
-          <a:bodyPr wrap="square" anchor="ctr" lIns="0" rIns="0" tIns="0" bIns="0">
+          <a:bodyPr wrap="square" anchor="t" lIns="0" rIns="0" tIns="0" bIns="0">
             <a:spAutoFit/>
           </a:bodyPr>
           <a:lstStyle/>
           <a:p>
             <a:pPr algn="l">
               <a:spcAft>
+                <a:spcPts val="500"/>
+              </a:spcAft>
+            </a:pPr>
+            <a:r>
+              <a:rPr sz="980" b="1" i="0" spc="110">
+                <a:solidFill>
+                  <a:srgbClr val="F08A7F"/>
+                </a:solidFill>
+                <a:latin typeface="Calibri"/>
+              </a:rPr>
+              <a:t>AND WE CANNOT EVEN GIVE YOU AN OPERATING POINT</a:t>
+            </a:r>
+          </a:p>
+          <a:p>
+            <a:pPr algn="l">
+              <a:lnSpc>
+                <a:spcPct val="106000"/>
+              </a:lnSpc>
+              <a:spcAft>
                 <a:spcPts val="0"/>
               </a:spcAft>
             </a:pPr>
             <a:r>
-              <a:rPr sz="960" b="1" i="0">
+              <a:rPr sz="1100" b="0" i="0">
                 <a:solidFill>
                   <a:srgbClr val="9DAFC7"/>
                 </a:solidFill>
                 <a:latin typeface="Calibri"/>
               </a:rPr>
-              <a:t>Prompt leaves our network</a:t>
-            </a:r>
-          </a:p>
-        </p:txBody>
-      </p:sp>
-      <p:sp>
-        <p:nvSpPr>
-          <p:cNvPr id="21" name="TextBox 20"/>
-          <p:cNvSpPr txBox="1"/>
-          <p:nvPr/>
-        </p:nvSpPr>
-        <p:spPr>
-          <a:xfrm>
-            <a:off x="3154917" y="3593592"/>
-            <a:ext cx="1175570" cy="420624"/>
-          </a:xfrm>
-          <a:prstGeom prst="rect">
-            <a:avLst/>
-          </a:prstGeom>
-          <a:noFill/>
-        </p:spPr>
-        <p:txBody>
-          <a:bodyPr wrap="square" anchor="ctr" lIns="0" rIns="0" tIns="0" bIns="0">
-            <a:spAutoFit/>
-          </a:bodyPr>
-          <a:lstStyle/>
-          <a:p>
-            <a:pPr algn="ctr">
-              <a:spcAft>
-                <a:spcPts val="0"/>
-              </a:spcAft>
-            </a:pPr>
-            <a:r>
-              <a:rPr sz="960" b="0" i="0">
-                <a:solidFill>
-                  <a:srgbClr val="9DAFC7"/>
-                </a:solidFill>
-                <a:latin typeface="Calibri"/>
-              </a:rPr>
-              <a:t>no</a:t>
-            </a:r>
-          </a:p>
-        </p:txBody>
-      </p:sp>
-      <p:sp>
-        <p:nvSpPr>
-          <p:cNvPr id="22" name="TextBox 21"/>
-          <p:cNvSpPr txBox="1"/>
-          <p:nvPr/>
-        </p:nvSpPr>
-        <p:spPr>
-          <a:xfrm>
-            <a:off x="4586519" y="3593592"/>
-            <a:ext cx="1175570" cy="420624"/>
-          </a:xfrm>
-          <a:prstGeom prst="rect">
-            <a:avLst/>
-          </a:prstGeom>
-          <a:noFill/>
-        </p:spPr>
-        <p:txBody>
-          <a:bodyPr wrap="square" anchor="ctr" lIns="0" rIns="0" tIns="0" bIns="0">
-            <a:spAutoFit/>
-          </a:bodyPr>
-          <a:lstStyle/>
-          <a:p>
-            <a:pPr algn="ctr">
-              <a:spcAft>
-                <a:spcPts val="0"/>
-              </a:spcAft>
-            </a:pPr>
-            <a:r>
-              <a:rPr sz="960" b="0" i="0">
-                <a:solidFill>
-                  <a:srgbClr val="9DAFC7"/>
-                </a:solidFill>
-                <a:latin typeface="Calibri"/>
-              </a:rPr>
-              <a:t>yes</a:t>
-            </a:r>
-          </a:p>
-        </p:txBody>
-      </p:sp>
-      <p:sp>
-        <p:nvSpPr>
-          <p:cNvPr id="23" name="Rectangle 22"/>
+              <a:t>The fixed 5%-false-alarm threshold on this benchmark is not reportable: its count of caught violations swung by more than 50 rows across library versions of one quantile routine. That is itself a finding about threshold transfer in this domain — but it means there is no number here to plan a deployment against.</a:t>
+            </a:r>
+          </a:p>
+        </p:txBody>
+      </p:sp>
+      <p:sp>
+        <p:nvSpPr>
+          <p:cNvPr id="15" name="Rectangle 14"/>
           <p:cNvSpPr/>
           <p:nvPr/>
         </p:nvSpPr>
         <p:spPr>
           <a:xfrm>
-            <a:off x="777240" y="4014216"/>
-            <a:ext cx="5112867" cy="420624"/>
+            <a:off x="6301587" y="3941064"/>
+            <a:ext cx="5112867" cy="1517904"/>
           </a:xfrm>
           <a:prstGeom prst="rect">
             <a:avLst/>
@@ -6601,177 +7009,14 @@
       </p:sp>
       <p:sp>
         <p:nvSpPr>
-          <p:cNvPr id="24" name="TextBox 23"/>
+          <p:cNvPr id="16" name="TextBox 15"/>
           <p:cNvSpPr txBox="1"/>
           <p:nvPr/>
         </p:nvSpPr>
         <p:spPr>
           <a:xfrm>
-            <a:off x="905256" y="4014216"/>
-            <a:ext cx="1993629" cy="420624"/>
-          </a:xfrm>
-          <a:prstGeom prst="rect">
-            <a:avLst/>
-          </a:prstGeom>
-          <a:noFill/>
-        </p:spPr>
-        <p:txBody>
-          <a:bodyPr wrap="square" anchor="ctr" lIns="0" rIns="0" tIns="0" bIns="0">
-            <a:spAutoFit/>
-          </a:bodyPr>
-          <a:lstStyle/>
-          <a:p>
-            <a:pPr algn="l">
-              <a:spcAft>
-                <a:spcPts val="0"/>
-              </a:spcAft>
-            </a:pPr>
-            <a:r>
-              <a:rPr sz="960" b="1" i="0">
-                <a:solidFill>
-                  <a:srgbClr val="9DAFC7"/>
-                </a:solidFill>
-                <a:latin typeface="Calibri"/>
-              </a:rPr>
-              <a:t>We choose the alarm rate</a:t>
-            </a:r>
-          </a:p>
-        </p:txBody>
-      </p:sp>
-      <p:sp>
-        <p:nvSpPr>
-          <p:cNvPr id="25" name="TextBox 24"/>
-          <p:cNvSpPr txBox="1"/>
-          <p:nvPr/>
-        </p:nvSpPr>
-        <p:spPr>
-          <a:xfrm>
-            <a:off x="3154917" y="4014216"/>
-            <a:ext cx="1175570" cy="420624"/>
-          </a:xfrm>
-          <a:prstGeom prst="rect">
-            <a:avLst/>
-          </a:prstGeom>
-          <a:noFill/>
-        </p:spPr>
-        <p:txBody>
-          <a:bodyPr wrap="square" anchor="ctr" lIns="0" rIns="0" tIns="0" bIns="0">
-            <a:spAutoFit/>
-          </a:bodyPr>
-          <a:lstStyle/>
-          <a:p>
-            <a:pPr algn="ctr">
-              <a:spcAft>
-                <a:spcPts val="0"/>
-              </a:spcAft>
-            </a:pPr>
-            <a:r>
-              <a:rPr sz="960" b="0" i="0">
-                <a:solidFill>
-                  <a:srgbClr val="9DAFC7"/>
-                </a:solidFill>
-                <a:latin typeface="Calibri"/>
-              </a:rPr>
-              <a:t>exactly</a:t>
-            </a:r>
-          </a:p>
-        </p:txBody>
-      </p:sp>
-      <p:sp>
-        <p:nvSpPr>
-          <p:cNvPr id="26" name="TextBox 25"/>
-          <p:cNvSpPr txBox="1"/>
-          <p:nvPr/>
-        </p:nvSpPr>
-        <p:spPr>
-          <a:xfrm>
-            <a:off x="4586519" y="4014216"/>
-            <a:ext cx="1175570" cy="420624"/>
-          </a:xfrm>
-          <a:prstGeom prst="rect">
-            <a:avLst/>
-          </a:prstGeom>
-          <a:noFill/>
-        </p:spPr>
-        <p:txBody>
-          <a:bodyPr wrap="square" anchor="ctr" lIns="0" rIns="0" tIns="0" bIns="0">
-            <a:spAutoFit/>
-          </a:bodyPr>
-          <a:lstStyle/>
-          <a:p>
-            <a:pPr algn="ctr">
-              <a:spcAft>
-                <a:spcPts val="0"/>
-              </a:spcAft>
-            </a:pPr>
-            <a:r>
-              <a:rPr sz="960" b="0" i="0">
-                <a:solidFill>
-                  <a:srgbClr val="9DAFC7"/>
-                </a:solidFill>
-                <a:latin typeface="Calibri"/>
-              </a:rPr>
-              <a:t>approximately</a:t>
-            </a:r>
-          </a:p>
-        </p:txBody>
-      </p:sp>
-      <p:sp>
-        <p:nvSpPr>
-          <p:cNvPr id="27" name="Rectangle 26"/>
-          <p:cNvSpPr/>
-          <p:nvPr/>
-        </p:nvSpPr>
-        <p:spPr>
-          <a:xfrm>
-            <a:off x="6301587" y="2331720"/>
-            <a:ext cx="5112867" cy="1481328"/>
-          </a:xfrm>
-          <a:prstGeom prst="rect">
-            <a:avLst/>
-          </a:prstGeom>
-          <a:solidFill>
-            <a:srgbClr val="331A1C"/>
-          </a:solidFill>
-          <a:ln w="9525">
-            <a:solidFill>
-              <a:srgbClr val="4A2427"/>
-            </a:solidFill>
-          </a:ln>
-          <a:effectLst/>
-        </p:spPr>
-        <p:style>
-          <a:lnRef idx="1">
-            <a:schemeClr val="accent1"/>
-          </a:lnRef>
-          <a:fillRef idx="3">
-            <a:schemeClr val="accent1"/>
-          </a:fillRef>
-          <a:effectRef idx="2">
-            <a:schemeClr val="accent1"/>
-          </a:effectRef>
-          <a:fontRef idx="minor">
-            <a:schemeClr val="lt1"/>
-          </a:fontRef>
-        </p:style>
-        <p:txBody>
-          <a:bodyPr rtlCol="0" anchor="ctr" wrap="square"/>
-          <a:lstStyle/>
-          <a:p>
-            <a:pPr algn="ctr"/>
-          </a:p>
-        </p:txBody>
-      </p:sp>
-      <p:sp>
-        <p:nvSpPr>
-          <p:cNvPr id="28" name="TextBox 27"/>
-          <p:cNvSpPr txBox="1"/>
-          <p:nvPr/>
-        </p:nvSpPr>
-        <p:spPr>
-          <a:xfrm>
-            <a:off x="6539331" y="2478024"/>
-            <a:ext cx="4637379" cy="1188720"/>
+            <a:off x="6539331" y="4087368"/>
+            <a:ext cx="4637379" cy="1225296"/>
           </a:xfrm>
           <a:prstGeom prst="rect">
             <a:avLst/>
@@ -6792,11 +7037,11 @@
             <a:r>
               <a:rPr sz="980" b="1" i="0" spc="110">
                 <a:solidFill>
-                  <a:srgbClr val="F08A7F"/>
-                </a:solidFill>
-                <a:latin typeface="Calibri"/>
-              </a:rPr>
-              <a:t>THE ONE WE DID NOT EXPECT</a:t>
+                  <a:srgbClr val="8FD3B6"/>
+                </a:solidFill>
+                <a:latin typeface="Calibri"/>
+              </a:rPr>
+              <a:t>THIS DOES NOT CHANGE THE RECOMMENDATION — IT PRICES IT</a:t>
             </a:r>
           </a:p>
           <a:p>
@@ -6815,215 +7060,7 @@
                 </a:solidFill>
                 <a:latin typeface="Calibri"/>
               </a:rPr>
-              <a:t>The provider refused to evaluate a subset of prompts outright, and did so inconsistently — the same prompt was refused on some runs and not others. A guardrail that intermittently declines to answer is itself an audit finding.</a:t>
-            </a:r>
-          </a:p>
-        </p:txBody>
-      </p:sp>
-      <p:sp>
-        <p:nvSpPr>
-          <p:cNvPr id="29" name="Rectangle 28"/>
-          <p:cNvSpPr/>
-          <p:nvPr/>
-        </p:nvSpPr>
-        <p:spPr>
-          <a:xfrm>
-            <a:off x="6301587" y="3941064"/>
-            <a:ext cx="5112867" cy="1371600"/>
-          </a:xfrm>
-          <a:prstGeom prst="rect">
-            <a:avLst/>
-          </a:prstGeom>
-          <a:solidFill>
-            <a:srgbClr val="18263D"/>
-          </a:solidFill>
-          <a:ln w="9525">
-            <a:solidFill>
-              <a:srgbClr val="1E3050"/>
-            </a:solidFill>
-          </a:ln>
-          <a:effectLst/>
-        </p:spPr>
-        <p:style>
-          <a:lnRef idx="1">
-            <a:schemeClr val="accent1"/>
-          </a:lnRef>
-          <a:fillRef idx="3">
-            <a:schemeClr val="accent1"/>
-          </a:fillRef>
-          <a:effectRef idx="2">
-            <a:schemeClr val="accent1"/>
-          </a:effectRef>
-          <a:fontRef idx="minor">
-            <a:schemeClr val="lt1"/>
-          </a:fontRef>
-        </p:style>
-        <p:txBody>
-          <a:bodyPr rtlCol="0" anchor="ctr" wrap="square"/>
-          <a:lstStyle/>
-          <a:p>
-            <a:pPr algn="ctr"/>
-          </a:p>
-        </p:txBody>
-      </p:sp>
-      <p:sp>
-        <p:nvSpPr>
-          <p:cNvPr id="30" name="TextBox 29"/>
-          <p:cNvSpPr txBox="1"/>
-          <p:nvPr/>
-        </p:nvSpPr>
-        <p:spPr>
-          <a:xfrm>
-            <a:off x="6539331" y="4087368"/>
-            <a:ext cx="4637379" cy="1078992"/>
-          </a:xfrm>
-          <a:prstGeom prst="rect">
-            <a:avLst/>
-          </a:prstGeom>
-          <a:noFill/>
-        </p:spPr>
-        <p:txBody>
-          <a:bodyPr wrap="square" anchor="t" lIns="0" rIns="0" tIns="0" bIns="0">
-            <a:spAutoFit/>
-          </a:bodyPr>
-          <a:lstStyle/>
-          <a:p>
-            <a:pPr algn="l">
-              <a:spcAft>
-                <a:spcPts val="500"/>
-              </a:spcAft>
-            </a:pPr>
-            <a:r>
-              <a:rPr sz="980" b="1" i="0" spc="110">
-                <a:solidFill>
-                  <a:srgbClr val="BFD8F5"/>
-                </a:solidFill>
-                <a:latin typeface="Calibri"/>
-              </a:rPr>
-              <a:t>CONTROL OVER THE ALARM RATE</a:t>
-            </a:r>
-          </a:p>
-          <a:p>
-            <a:pPr algn="l">
-              <a:lnSpc>
-                <a:spcPct val="106000"/>
-              </a:lnSpc>
-              <a:spcAft>
-                <a:spcPts val="0"/>
-              </a:spcAft>
-            </a:pPr>
-            <a:r>
-              <a:rPr sz="1100" b="0" i="0">
-                <a:solidFill>
-                  <a:srgbClr val="9DAFC7"/>
-                </a:solidFill>
-                <a:latin typeface="Calibri"/>
-              </a:rPr>
-              <a:t>Our own model exposes a continuous score, so we can set the false-alarm budget precisely. The hosted model reports a coarse 0–100 value, so we can only land near a target.</a:t>
-            </a:r>
-          </a:p>
-        </p:txBody>
-      </p:sp>
-      <p:sp>
-        <p:nvSpPr>
-          <p:cNvPr id="31" name="Rectangle 30"/>
-          <p:cNvSpPr/>
-          <p:nvPr/>
-        </p:nvSpPr>
-        <p:spPr>
-          <a:xfrm>
-            <a:off x="777240" y="5404104"/>
-            <a:ext cx="10637215" cy="969264"/>
-          </a:xfrm>
-          <a:prstGeom prst="rect">
-            <a:avLst/>
-          </a:prstGeom>
-          <a:solidFill>
-            <a:srgbClr val="18263D"/>
-          </a:solidFill>
-          <a:ln w="9525">
-            <a:solidFill>
-              <a:srgbClr val="1E3050"/>
-            </a:solidFill>
-          </a:ln>
-          <a:effectLst/>
-        </p:spPr>
-        <p:style>
-          <a:lnRef idx="1">
-            <a:schemeClr val="accent1"/>
-          </a:lnRef>
-          <a:fillRef idx="3">
-            <a:schemeClr val="accent1"/>
-          </a:fillRef>
-          <a:effectRef idx="2">
-            <a:schemeClr val="accent1"/>
-          </a:effectRef>
-          <a:fontRef idx="minor">
-            <a:schemeClr val="lt1"/>
-          </a:fontRef>
-        </p:style>
-        <p:txBody>
-          <a:bodyPr rtlCol="0" anchor="ctr" wrap="square"/>
-          <a:lstStyle/>
-          <a:p>
-            <a:pPr algn="ctr"/>
-          </a:p>
-        </p:txBody>
-      </p:sp>
-      <p:sp>
-        <p:nvSpPr>
-          <p:cNvPr id="32" name="TextBox 31"/>
-          <p:cNvSpPr txBox="1"/>
-          <p:nvPr/>
-        </p:nvSpPr>
-        <p:spPr>
-          <a:xfrm>
-            <a:off x="1014984" y="5550408"/>
-            <a:ext cx="10161727" cy="676656"/>
-          </a:xfrm>
-          <a:prstGeom prst="rect">
-            <a:avLst/>
-          </a:prstGeom>
-          <a:noFill/>
-        </p:spPr>
-        <p:txBody>
-          <a:bodyPr wrap="square" anchor="t" lIns="0" rIns="0" tIns="0" bIns="0">
-            <a:spAutoFit/>
-          </a:bodyPr>
-          <a:lstStyle/>
-          <a:p>
-            <a:pPr algn="l">
-              <a:spcAft>
-                <a:spcPts val="500"/>
-              </a:spcAft>
-            </a:pPr>
-            <a:r>
-              <a:rPr sz="980" b="1" i="0" spc="110">
-                <a:solidFill>
-                  <a:srgbClr val="8FD3B6"/>
-                </a:solidFill>
-                <a:latin typeface="Calibri"/>
-              </a:rPr>
-              <a:t>NOT A REASON TO REFUSE HOSTED</a:t>
-            </a:r>
-          </a:p>
-          <a:p>
-            <a:pPr algn="l">
-              <a:lnSpc>
-                <a:spcPct val="106000"/>
-              </a:lnSpc>
-              <a:spcAft>
-                <a:spcPts val="0"/>
-              </a:spcAft>
-            </a:pPr>
-            <a:r>
-              <a:rPr sz="1100" b="0" i="0">
-                <a:solidFill>
-                  <a:srgbClr val="9DAFC7"/>
-                </a:solidFill>
-                <a:latin typeface="Calibri"/>
-              </a:rPr>
-              <a:t>It is a reason to scope it: hosted on traffic where the prompt may leave and latency is not critical; self-hosted on the regulated, latency-sensitive path.</a:t>
+              <a:t>There is no lawful alternative for borrower-bearing traffic, so lane 1 stands. What changes is what we owe it: the domain instrument on the last slide stops being a nice-to-have and becomes the direct consequence of a measurement we already have. Labels here are LLM-judge against written policy cards, not counsel-reviewed.</a:t>
             </a:r>
           </a:p>
         </p:txBody>
@@ -7166,7 +7203,7 @@
                 </a:solidFill>
                 <a:latin typeface="Calibri"/>
               </a:rPr>
-              <a:t>THE USEFUL FINDING</a:t>
+              <a:t>WHAT HOSTED COSTS</a:t>
             </a:r>
           </a:p>
         </p:txBody>
@@ -7208,7 +7245,7 @@
                 </a:solidFill>
                 <a:latin typeface="Cambria"/>
               </a:rPr>
-              <a:t>If we must self-host, a bigger untuned model beats a tuned small one</a:t>
+              <a:t>The bill and the latency are the easy part. The control sometimes declines to answer</a:t>
             </a:r>
           </a:p>
         </p:txBody>
@@ -7247,146 +7284,21 @@
                 </a:solidFill>
                 <a:latin typeface="Calibri"/>
               </a:rPr>
-              <a:t>Because tuning's cost lands on exactly the traffic a guardrail exists to catch</a:t>
-            </a:r>
-          </a:p>
-        </p:txBody>
-      </p:sp>
-      <p:sp>
-        <p:nvSpPr>
-          <p:cNvPr id="7" name="TextBox 6"/>
-          <p:cNvSpPr txBox="1"/>
-          <p:nvPr/>
-        </p:nvSpPr>
-        <p:spPr>
-          <a:xfrm>
-            <a:off x="777240" y="2295144"/>
-            <a:ext cx="5112867" cy="2651760"/>
-          </a:xfrm>
-          <a:prstGeom prst="rect">
-            <a:avLst/>
-          </a:prstGeom>
-          <a:noFill/>
-        </p:spPr>
-        <p:txBody>
-          <a:bodyPr wrap="square" anchor="t" lIns="0" rIns="0" tIns="0" bIns="0">
-            <a:spAutoFit/>
-          </a:bodyPr>
-          <a:lstStyle/>
-          <a:p>
-            <a:pPr algn="l">
-              <a:spcAft>
-                <a:spcPts val="1200"/>
-              </a:spcAft>
-            </a:pPr>
-            <a:r>
-              <a:rPr sz="1450" b="1" i="0">
-                <a:solidFill>
-                  <a:srgbClr val="E0564F"/>
-                </a:solidFill>
-                <a:latin typeface="Calibri"/>
-              </a:rPr>
-              <a:t>—  </a:t>
-            </a:r>
-            <a:r>
-              <a:rPr sz="1450" b="1" i="0">
-                <a:solidFill>
-                  <a:srgbClr val="EEF2F8"/>
-                </a:solidFill>
-                <a:latin typeface="Calibri"/>
-              </a:rPr>
-              <a:t>Tuning a small model. </a:t>
-            </a:r>
-            <a:r>
-              <a:rPr sz="1450" b="0" i="0">
-                <a:solidFill>
-                  <a:srgbClr val="9DAFC7"/>
-                </a:solidFill>
-                <a:latin typeface="Calibri"/>
-              </a:rPr>
-              <a:t>Large gain on familiar traffic, and it gives back accuracy on unfamiliar traffic — which is where novel attacks arrive.</a:t>
-            </a:r>
-          </a:p>
-          <a:p>
-            <a:pPr algn="l">
-              <a:spcAft>
-                <a:spcPts val="1200"/>
-              </a:spcAft>
-            </a:pPr>
-            <a:r>
-              <a:rPr sz="1450" b="1" i="0">
-                <a:solidFill>
-                  <a:srgbClr val="E0564F"/>
-                </a:solidFill>
-                <a:latin typeface="Calibri"/>
-              </a:rPr>
-              <a:t>—  </a:t>
-            </a:r>
-            <a:r>
-              <a:rPr sz="1450" b="1" i="0">
-                <a:solidFill>
-                  <a:srgbClr val="EEF2F8"/>
-                </a:solidFill>
-                <a:latin typeface="Calibri"/>
-              </a:rPr>
-              <a:t>A bigger untuned model. </a:t>
-            </a:r>
-            <a:r>
-              <a:rPr sz="1450" b="0" i="0">
-                <a:solidFill>
-                  <a:srgbClr val="9DAFC7"/>
-                </a:solidFill>
-                <a:latin typeface="Calibri"/>
-              </a:rPr>
-              <a:t>Recovers most of that same gain on familiar traffic, and holds its accuracy on unfamiliar traffic.</a:t>
-            </a:r>
-          </a:p>
-          <a:p>
-            <a:pPr algn="l">
-              <a:spcAft>
-                <a:spcPts val="1200"/>
-              </a:spcAft>
-            </a:pPr>
-            <a:r>
-              <a:rPr sz="1450" b="1" i="0">
-                <a:solidFill>
-                  <a:srgbClr val="E0564F"/>
-                </a:solidFill>
-                <a:latin typeface="Calibri"/>
-              </a:rPr>
-              <a:t>—  </a:t>
-            </a:r>
-            <a:r>
-              <a:rPr sz="1450" b="1" i="0">
-                <a:solidFill>
-                  <a:srgbClr val="EEF2F8"/>
-                </a:solidFill>
-                <a:latin typeface="Calibri"/>
-              </a:rPr>
-              <a:t>So for a guardrail specifically. </a:t>
-            </a:r>
-            <a:r>
-              <a:rPr sz="1450" b="0" i="0">
-                <a:solidFill>
-                  <a:srgbClr val="9DAFC7"/>
-                </a:solidFill>
-                <a:latin typeface="Calibri"/>
-              </a:rPr>
-              <a:t>Prefer spending on a stronger base model over spending on a tuning programme.</a:t>
-            </a:r>
-          </a:p>
-        </p:txBody>
-      </p:sp>
-      <p:sp>
-        <p:nvSpPr>
-          <p:cNvPr id="8" name="Rectangle 7"/>
+              <a:t>Four costs, three of which do not appear on an invoice</a:t>
+            </a:r>
+          </a:p>
+        </p:txBody>
+      </p:sp>
+      <p:sp>
+        <p:nvSpPr>
+          <p:cNvPr id="7" name="Rectangle 6"/>
           <p:cNvSpPr/>
           <p:nvPr/>
         </p:nvSpPr>
         <p:spPr>
           <a:xfrm>
-            <a:off x="6301587" y="2295144"/>
-            <a:ext cx="5112867" cy="1554480"/>
+            <a:off x="777240" y="2331720"/>
+            <a:ext cx="5112867" cy="420624"/>
           </a:xfrm>
           <a:prstGeom prst="rect">
             <a:avLst/>
@@ -7425,14 +7337,53 @@
       </p:sp>
       <p:sp>
         <p:nvSpPr>
+          <p:cNvPr id="8" name="TextBox 7"/>
+          <p:cNvSpPr txBox="1"/>
+          <p:nvPr/>
+        </p:nvSpPr>
+        <p:spPr>
+          <a:xfrm>
+            <a:off x="905256" y="2331720"/>
+            <a:ext cx="1993629" cy="420624"/>
+          </a:xfrm>
+          <a:prstGeom prst="rect">
+            <a:avLst/>
+          </a:prstGeom>
+          <a:noFill/>
+        </p:spPr>
+        <p:txBody>
+          <a:bodyPr wrap="square" anchor="ctr" lIns="0" rIns="0" tIns="0" bIns="0">
+            <a:spAutoFit/>
+          </a:bodyPr>
+          <a:lstStyle/>
+          <a:p>
+            <a:pPr algn="l">
+              <a:spcAft>
+                <a:spcPts val="0"/>
+              </a:spcAft>
+            </a:pPr>
+            <a:r>
+              <a:rPr sz="960" b="1" i="0">
+                <a:solidFill>
+                  <a:srgbClr val="BFD8F5"/>
+                </a:solidFill>
+                <a:latin typeface="Calibri"/>
+              </a:rPr>
+              <a:t/>
+            </a:r>
+          </a:p>
+        </p:txBody>
+      </p:sp>
+      <p:sp>
+        <p:nvSpPr>
           <p:cNvPr id="9" name="TextBox 8"/>
           <p:cNvSpPr txBox="1"/>
           <p:nvPr/>
         </p:nvSpPr>
         <p:spPr>
           <a:xfrm>
-            <a:off x="6539331" y="2441448"/>
-            <a:ext cx="4637379" cy="1261872"/>
+            <a:off x="3154917" y="2331720"/>
+            <a:ext cx="1175570" cy="420624"/>
           </a:xfrm>
           <a:prstGeom prst="rect">
             <a:avLst/>
@@ -7440,63 +7391,83 @@
           <a:noFill/>
         </p:spPr>
         <p:txBody>
-          <a:bodyPr wrap="square" anchor="t" lIns="0" rIns="0" tIns="0" bIns="0">
+          <a:bodyPr wrap="square" anchor="ctr" lIns="0" rIns="0" tIns="0" bIns="0">
             <a:spAutoFit/>
           </a:bodyPr>
           <a:lstStyle/>
           <a:p>
-            <a:pPr algn="l">
-              <a:spcAft>
-                <a:spcPts val="500"/>
-              </a:spcAft>
-            </a:pPr>
-            <a:r>
-              <a:rPr sz="980" b="1" i="0" spc="110">
-                <a:solidFill>
-                  <a:srgbClr val="8FD3B6"/>
-                </a:solidFill>
-                <a:latin typeface="Calibri"/>
-              </a:rPr>
-              <a:t>WHY THIS IS WORTH MONEY</a:t>
-            </a:r>
-          </a:p>
-          <a:p>
-            <a:pPr algn="l">
-              <a:lnSpc>
-                <a:spcPct val="106000"/>
-              </a:lnSpc>
+            <a:pPr algn="ctr">
               <a:spcAft>
                 <a:spcPts val="0"/>
               </a:spcAft>
             </a:pPr>
             <a:r>
-              <a:rPr sz="1100" b="0" i="0">
-                <a:solidFill>
-                  <a:srgbClr val="9DAFC7"/>
-                </a:solidFill>
-                <a:latin typeface="Calibri"/>
-              </a:rPr>
-              <a:t>It reverses the intuitive plan. Tuning looks like the cheap, targeted option; measured on held-out traffic it is the one that quietly costs you coverage.</a:t>
-            </a:r>
-          </a:p>
-        </p:txBody>
-      </p:sp>
-      <p:sp>
-        <p:nvSpPr>
-          <p:cNvPr id="10" name="Rectangle 9"/>
+              <a:rPr sz="960" b="1" i="0">
+                <a:solidFill>
+                  <a:srgbClr val="BFD8F5"/>
+                </a:solidFill>
+                <a:latin typeface="Calibri"/>
+              </a:rPr>
+              <a:t>Self-hosted small</a:t>
+            </a:r>
+          </a:p>
+        </p:txBody>
+      </p:sp>
+      <p:sp>
+        <p:nvSpPr>
+          <p:cNvPr id="10" name="TextBox 9"/>
+          <p:cNvSpPr txBox="1"/>
+          <p:nvPr/>
+        </p:nvSpPr>
+        <p:spPr>
+          <a:xfrm>
+            <a:off x="4586519" y="2331720"/>
+            <a:ext cx="1175570" cy="420624"/>
+          </a:xfrm>
+          <a:prstGeom prst="rect">
+            <a:avLst/>
+          </a:prstGeom>
+          <a:noFill/>
+        </p:spPr>
+        <p:txBody>
+          <a:bodyPr wrap="square" anchor="ctr" lIns="0" rIns="0" tIns="0" bIns="0">
+            <a:spAutoFit/>
+          </a:bodyPr>
+          <a:lstStyle/>
+          <a:p>
+            <a:pPr algn="ctr">
+              <a:spcAft>
+                <a:spcPts val="0"/>
+              </a:spcAft>
+            </a:pPr>
+            <a:r>
+              <a:rPr sz="960" b="1" i="0">
+                <a:solidFill>
+                  <a:srgbClr val="BFD8F5"/>
+                </a:solidFill>
+                <a:latin typeface="Calibri"/>
+              </a:rPr>
+              <a:t>Hosted frontier</a:t>
+            </a:r>
+          </a:p>
+        </p:txBody>
+      </p:sp>
+      <p:sp>
+        <p:nvSpPr>
+          <p:cNvPr id="11" name="Rectangle 10"/>
           <p:cNvSpPr/>
           <p:nvPr/>
         </p:nvSpPr>
         <p:spPr>
           <a:xfrm>
-            <a:off x="6301587" y="3995928"/>
-            <a:ext cx="5112867" cy="1554480"/>
+            <a:off x="777240" y="2752344"/>
+            <a:ext cx="5112867" cy="420624"/>
           </a:xfrm>
           <a:prstGeom prst="rect">
             <a:avLst/>
           </a:prstGeom>
           <a:solidFill>
-            <a:srgbClr val="18263D"/>
+            <a:srgbClr val="0C1424"/>
           </a:solidFill>
           <a:ln w="9525">
             <a:solidFill>
@@ -7529,14 +7500,666 @@
       </p:sp>
       <p:sp>
         <p:nvSpPr>
-          <p:cNvPr id="11" name="TextBox 10"/>
+          <p:cNvPr id="12" name="TextBox 11"/>
           <p:cNvSpPr txBox="1"/>
           <p:nvPr/>
         </p:nvSpPr>
         <p:spPr>
           <a:xfrm>
-            <a:off x="6539331" y="4142232"/>
-            <a:ext cx="4637379" cy="1261872"/>
+            <a:off x="905256" y="2752344"/>
+            <a:ext cx="1993629" cy="420624"/>
+          </a:xfrm>
+          <a:prstGeom prst="rect">
+            <a:avLst/>
+          </a:prstGeom>
+          <a:noFill/>
+        </p:spPr>
+        <p:txBody>
+          <a:bodyPr wrap="square" anchor="ctr" lIns="0" rIns="0" tIns="0" bIns="0">
+            <a:spAutoFit/>
+          </a:bodyPr>
+          <a:lstStyle/>
+          <a:p>
+            <a:pPr algn="l">
+              <a:spcAft>
+                <a:spcPts val="0"/>
+              </a:spcAft>
+            </a:pPr>
+            <a:r>
+              <a:rPr sz="960" b="1" i="0">
+                <a:solidFill>
+                  <a:srgbClr val="9DAFC7"/>
+                </a:solidFill>
+                <a:latin typeface="Calibri"/>
+              </a:rPr>
+              <a:t>Median latency</a:t>
+            </a:r>
+          </a:p>
+        </p:txBody>
+      </p:sp>
+      <p:sp>
+        <p:nvSpPr>
+          <p:cNvPr id="13" name="TextBox 12"/>
+          <p:cNvSpPr txBox="1"/>
+          <p:nvPr/>
+        </p:nvSpPr>
+        <p:spPr>
+          <a:xfrm>
+            <a:off x="3154917" y="2752344"/>
+            <a:ext cx="1175570" cy="420624"/>
+          </a:xfrm>
+          <a:prstGeom prst="rect">
+            <a:avLst/>
+          </a:prstGeom>
+          <a:noFill/>
+        </p:spPr>
+        <p:txBody>
+          <a:bodyPr wrap="square" anchor="ctr" lIns="0" rIns="0" tIns="0" bIns="0">
+            <a:spAutoFit/>
+          </a:bodyPr>
+          <a:lstStyle/>
+          <a:p>
+            <a:pPr algn="ctr">
+              <a:spcAft>
+                <a:spcPts val="0"/>
+              </a:spcAft>
+            </a:pPr>
+            <a:r>
+              <a:rPr sz="960" b="0" i="0">
+                <a:solidFill>
+                  <a:srgbClr val="9DAFC7"/>
+                </a:solidFill>
+                <a:latin typeface="Calibri"/>
+              </a:rPr>
+              <a:t>10–25 ms</a:t>
+            </a:r>
+          </a:p>
+        </p:txBody>
+      </p:sp>
+      <p:sp>
+        <p:nvSpPr>
+          <p:cNvPr id="14" name="TextBox 13"/>
+          <p:cNvSpPr txBox="1"/>
+          <p:nvPr/>
+        </p:nvSpPr>
+        <p:spPr>
+          <a:xfrm>
+            <a:off x="4586519" y="2752344"/>
+            <a:ext cx="1175570" cy="420624"/>
+          </a:xfrm>
+          <a:prstGeom prst="rect">
+            <a:avLst/>
+          </a:prstGeom>
+          <a:noFill/>
+        </p:spPr>
+        <p:txBody>
+          <a:bodyPr wrap="square" anchor="ctr" lIns="0" rIns="0" tIns="0" bIns="0">
+            <a:spAutoFit/>
+          </a:bodyPr>
+          <a:lstStyle/>
+          <a:p>
+            <a:pPr algn="ctr">
+              <a:spcAft>
+                <a:spcPts val="0"/>
+              </a:spcAft>
+            </a:pPr>
+            <a:r>
+              <a:rPr sz="960" b="0" i="0">
+                <a:solidFill>
+                  <a:srgbClr val="9DAFC7"/>
+                </a:solidFill>
+                <a:latin typeface="Calibri"/>
+              </a:rPr>
+              <a:t>~1,553 ms</a:t>
+            </a:r>
+          </a:p>
+        </p:txBody>
+      </p:sp>
+      <p:sp>
+        <p:nvSpPr>
+          <p:cNvPr id="15" name="Rectangle 14"/>
+          <p:cNvSpPr/>
+          <p:nvPr/>
+        </p:nvSpPr>
+        <p:spPr>
+          <a:xfrm>
+            <a:off x="777240" y="3172968"/>
+            <a:ext cx="5112867" cy="420624"/>
+          </a:xfrm>
+          <a:prstGeom prst="rect">
+            <a:avLst/>
+          </a:prstGeom>
+          <a:solidFill>
+            <a:srgbClr val="18263D"/>
+          </a:solidFill>
+          <a:ln w="9525">
+            <a:solidFill>
+              <a:srgbClr val="1E3050"/>
+            </a:solidFill>
+          </a:ln>
+          <a:effectLst/>
+        </p:spPr>
+        <p:style>
+          <a:lnRef idx="1">
+            <a:schemeClr val="accent1"/>
+          </a:lnRef>
+          <a:fillRef idx="3">
+            <a:schemeClr val="accent1"/>
+          </a:fillRef>
+          <a:effectRef idx="2">
+            <a:schemeClr val="accent1"/>
+          </a:effectRef>
+          <a:fontRef idx="minor">
+            <a:schemeClr val="lt1"/>
+          </a:fontRef>
+        </p:style>
+        <p:txBody>
+          <a:bodyPr rtlCol="0" anchor="ctr" wrap="square"/>
+          <a:lstStyle/>
+          <a:p>
+            <a:pPr algn="ctr"/>
+          </a:p>
+        </p:txBody>
+      </p:sp>
+      <p:sp>
+        <p:nvSpPr>
+          <p:cNvPr id="16" name="TextBox 15"/>
+          <p:cNvSpPr txBox="1"/>
+          <p:nvPr/>
+        </p:nvSpPr>
+        <p:spPr>
+          <a:xfrm>
+            <a:off x="905256" y="3172968"/>
+            <a:ext cx="1993629" cy="420624"/>
+          </a:xfrm>
+          <a:prstGeom prst="rect">
+            <a:avLst/>
+          </a:prstGeom>
+          <a:noFill/>
+        </p:spPr>
+        <p:txBody>
+          <a:bodyPr wrap="square" anchor="ctr" lIns="0" rIns="0" tIns="0" bIns="0">
+            <a:spAutoFit/>
+          </a:bodyPr>
+          <a:lstStyle/>
+          <a:p>
+            <a:pPr algn="l">
+              <a:spcAft>
+                <a:spcPts val="0"/>
+              </a:spcAft>
+            </a:pPr>
+            <a:r>
+              <a:rPr sz="960" b="1" i="0">
+                <a:solidFill>
+                  <a:srgbClr val="9DAFC7"/>
+                </a:solidFill>
+                <a:latin typeface="Calibri"/>
+              </a:rPr>
+              <a:t>Cost per 1k prompts</a:t>
+            </a:r>
+          </a:p>
+        </p:txBody>
+      </p:sp>
+      <p:sp>
+        <p:nvSpPr>
+          <p:cNvPr id="17" name="TextBox 16"/>
+          <p:cNvSpPr txBox="1"/>
+          <p:nvPr/>
+        </p:nvSpPr>
+        <p:spPr>
+          <a:xfrm>
+            <a:off x="3154917" y="3172968"/>
+            <a:ext cx="1175570" cy="420624"/>
+          </a:xfrm>
+          <a:prstGeom prst="rect">
+            <a:avLst/>
+          </a:prstGeom>
+          <a:noFill/>
+        </p:spPr>
+        <p:txBody>
+          <a:bodyPr wrap="square" anchor="ctr" lIns="0" rIns="0" tIns="0" bIns="0">
+            <a:spAutoFit/>
+          </a:bodyPr>
+          <a:lstStyle/>
+          <a:p>
+            <a:pPr algn="ctr">
+              <a:spcAft>
+                <a:spcPts val="0"/>
+              </a:spcAft>
+            </a:pPr>
+            <a:r>
+              <a:rPr sz="960" b="0" i="0">
+                <a:solidFill>
+                  <a:srgbClr val="9DAFC7"/>
+                </a:solidFill>
+                <a:latin typeface="Calibri"/>
+              </a:rPr>
+              <a:t>GPU you own — not amortised</a:t>
+            </a:r>
+          </a:p>
+        </p:txBody>
+      </p:sp>
+      <p:sp>
+        <p:nvSpPr>
+          <p:cNvPr id="18" name="TextBox 17"/>
+          <p:cNvSpPr txBox="1"/>
+          <p:nvPr/>
+        </p:nvSpPr>
+        <p:spPr>
+          <a:xfrm>
+            <a:off x="4586519" y="3172968"/>
+            <a:ext cx="1175570" cy="420624"/>
+          </a:xfrm>
+          <a:prstGeom prst="rect">
+            <a:avLst/>
+          </a:prstGeom>
+          <a:noFill/>
+        </p:spPr>
+        <p:txBody>
+          <a:bodyPr wrap="square" anchor="ctr" lIns="0" rIns="0" tIns="0" bIns="0">
+            <a:spAutoFit/>
+          </a:bodyPr>
+          <a:lstStyle/>
+          <a:p>
+            <a:pPr algn="ctr">
+              <a:spcAft>
+                <a:spcPts val="0"/>
+              </a:spcAft>
+            </a:pPr>
+            <a:r>
+              <a:rPr sz="960" b="0" i="0">
+                <a:solidFill>
+                  <a:srgbClr val="9DAFC7"/>
+                </a:solidFill>
+                <a:latin typeface="Calibri"/>
+              </a:rPr>
+              <a:t>$0.80 list</a:t>
+            </a:r>
+          </a:p>
+        </p:txBody>
+      </p:sp>
+      <p:sp>
+        <p:nvSpPr>
+          <p:cNvPr id="19" name="Rectangle 18"/>
+          <p:cNvSpPr/>
+          <p:nvPr/>
+        </p:nvSpPr>
+        <p:spPr>
+          <a:xfrm>
+            <a:off x="777240" y="3593592"/>
+            <a:ext cx="5112867" cy="420624"/>
+          </a:xfrm>
+          <a:prstGeom prst="rect">
+            <a:avLst/>
+          </a:prstGeom>
+          <a:solidFill>
+            <a:srgbClr val="0C1424"/>
+          </a:solidFill>
+          <a:ln w="9525">
+            <a:solidFill>
+              <a:srgbClr val="1E3050"/>
+            </a:solidFill>
+          </a:ln>
+          <a:effectLst/>
+        </p:spPr>
+        <p:style>
+          <a:lnRef idx="1">
+            <a:schemeClr val="accent1"/>
+          </a:lnRef>
+          <a:fillRef idx="3">
+            <a:schemeClr val="accent1"/>
+          </a:fillRef>
+          <a:effectRef idx="2">
+            <a:schemeClr val="accent1"/>
+          </a:effectRef>
+          <a:fontRef idx="minor">
+            <a:schemeClr val="lt1"/>
+          </a:fontRef>
+        </p:style>
+        <p:txBody>
+          <a:bodyPr rtlCol="0" anchor="ctr" wrap="square"/>
+          <a:lstStyle/>
+          <a:p>
+            <a:pPr algn="ctr"/>
+          </a:p>
+        </p:txBody>
+      </p:sp>
+      <p:sp>
+        <p:nvSpPr>
+          <p:cNvPr id="20" name="TextBox 19"/>
+          <p:cNvSpPr txBox="1"/>
+          <p:nvPr/>
+        </p:nvSpPr>
+        <p:spPr>
+          <a:xfrm>
+            <a:off x="905256" y="3593592"/>
+            <a:ext cx="1993629" cy="420624"/>
+          </a:xfrm>
+          <a:prstGeom prst="rect">
+            <a:avLst/>
+          </a:prstGeom>
+          <a:noFill/>
+        </p:spPr>
+        <p:txBody>
+          <a:bodyPr wrap="square" anchor="ctr" lIns="0" rIns="0" tIns="0" bIns="0">
+            <a:spAutoFit/>
+          </a:bodyPr>
+          <a:lstStyle/>
+          <a:p>
+            <a:pPr algn="l">
+              <a:spcAft>
+                <a:spcPts val="0"/>
+              </a:spcAft>
+            </a:pPr>
+            <a:r>
+              <a:rPr sz="960" b="1" i="0">
+                <a:solidFill>
+                  <a:srgbClr val="9DAFC7"/>
+                </a:solidFill>
+                <a:latin typeface="Calibri"/>
+              </a:rPr>
+              <a:t>Prompt leaves our network</a:t>
+            </a:r>
+          </a:p>
+        </p:txBody>
+      </p:sp>
+      <p:sp>
+        <p:nvSpPr>
+          <p:cNvPr id="21" name="TextBox 20"/>
+          <p:cNvSpPr txBox="1"/>
+          <p:nvPr/>
+        </p:nvSpPr>
+        <p:spPr>
+          <a:xfrm>
+            <a:off x="3154917" y="3593592"/>
+            <a:ext cx="1175570" cy="420624"/>
+          </a:xfrm>
+          <a:prstGeom prst="rect">
+            <a:avLst/>
+          </a:prstGeom>
+          <a:noFill/>
+        </p:spPr>
+        <p:txBody>
+          <a:bodyPr wrap="square" anchor="ctr" lIns="0" rIns="0" tIns="0" bIns="0">
+            <a:spAutoFit/>
+          </a:bodyPr>
+          <a:lstStyle/>
+          <a:p>
+            <a:pPr algn="ctr">
+              <a:spcAft>
+                <a:spcPts val="0"/>
+              </a:spcAft>
+            </a:pPr>
+            <a:r>
+              <a:rPr sz="960" b="0" i="0">
+                <a:solidFill>
+                  <a:srgbClr val="9DAFC7"/>
+                </a:solidFill>
+                <a:latin typeface="Calibri"/>
+              </a:rPr>
+              <a:t>no</a:t>
+            </a:r>
+          </a:p>
+        </p:txBody>
+      </p:sp>
+      <p:sp>
+        <p:nvSpPr>
+          <p:cNvPr id="22" name="TextBox 21"/>
+          <p:cNvSpPr txBox="1"/>
+          <p:nvPr/>
+        </p:nvSpPr>
+        <p:spPr>
+          <a:xfrm>
+            <a:off x="4586519" y="3593592"/>
+            <a:ext cx="1175570" cy="420624"/>
+          </a:xfrm>
+          <a:prstGeom prst="rect">
+            <a:avLst/>
+          </a:prstGeom>
+          <a:noFill/>
+        </p:spPr>
+        <p:txBody>
+          <a:bodyPr wrap="square" anchor="ctr" lIns="0" rIns="0" tIns="0" bIns="0">
+            <a:spAutoFit/>
+          </a:bodyPr>
+          <a:lstStyle/>
+          <a:p>
+            <a:pPr algn="ctr">
+              <a:spcAft>
+                <a:spcPts val="0"/>
+              </a:spcAft>
+            </a:pPr>
+            <a:r>
+              <a:rPr sz="960" b="0" i="0">
+                <a:solidFill>
+                  <a:srgbClr val="9DAFC7"/>
+                </a:solidFill>
+                <a:latin typeface="Calibri"/>
+              </a:rPr>
+              <a:t>yes</a:t>
+            </a:r>
+          </a:p>
+        </p:txBody>
+      </p:sp>
+      <p:sp>
+        <p:nvSpPr>
+          <p:cNvPr id="23" name="Rectangle 22"/>
+          <p:cNvSpPr/>
+          <p:nvPr/>
+        </p:nvSpPr>
+        <p:spPr>
+          <a:xfrm>
+            <a:off x="777240" y="4014216"/>
+            <a:ext cx="5112867" cy="420624"/>
+          </a:xfrm>
+          <a:prstGeom prst="rect">
+            <a:avLst/>
+          </a:prstGeom>
+          <a:solidFill>
+            <a:srgbClr val="18263D"/>
+          </a:solidFill>
+          <a:ln w="9525">
+            <a:solidFill>
+              <a:srgbClr val="1E3050"/>
+            </a:solidFill>
+          </a:ln>
+          <a:effectLst/>
+        </p:spPr>
+        <p:style>
+          <a:lnRef idx="1">
+            <a:schemeClr val="accent1"/>
+          </a:lnRef>
+          <a:fillRef idx="3">
+            <a:schemeClr val="accent1"/>
+          </a:fillRef>
+          <a:effectRef idx="2">
+            <a:schemeClr val="accent1"/>
+          </a:effectRef>
+          <a:fontRef idx="minor">
+            <a:schemeClr val="lt1"/>
+          </a:fontRef>
+        </p:style>
+        <p:txBody>
+          <a:bodyPr rtlCol="0" anchor="ctr" wrap="square"/>
+          <a:lstStyle/>
+          <a:p>
+            <a:pPr algn="ctr"/>
+          </a:p>
+        </p:txBody>
+      </p:sp>
+      <p:sp>
+        <p:nvSpPr>
+          <p:cNvPr id="24" name="TextBox 23"/>
+          <p:cNvSpPr txBox="1"/>
+          <p:nvPr/>
+        </p:nvSpPr>
+        <p:spPr>
+          <a:xfrm>
+            <a:off x="905256" y="4014216"/>
+            <a:ext cx="1993629" cy="420624"/>
+          </a:xfrm>
+          <a:prstGeom prst="rect">
+            <a:avLst/>
+          </a:prstGeom>
+          <a:noFill/>
+        </p:spPr>
+        <p:txBody>
+          <a:bodyPr wrap="square" anchor="ctr" lIns="0" rIns="0" tIns="0" bIns="0">
+            <a:spAutoFit/>
+          </a:bodyPr>
+          <a:lstStyle/>
+          <a:p>
+            <a:pPr algn="l">
+              <a:spcAft>
+                <a:spcPts val="0"/>
+              </a:spcAft>
+            </a:pPr>
+            <a:r>
+              <a:rPr sz="960" b="1" i="0">
+                <a:solidFill>
+                  <a:srgbClr val="9DAFC7"/>
+                </a:solidFill>
+                <a:latin typeface="Calibri"/>
+              </a:rPr>
+              <a:t>We choose the alarm rate</a:t>
+            </a:r>
+          </a:p>
+        </p:txBody>
+      </p:sp>
+      <p:sp>
+        <p:nvSpPr>
+          <p:cNvPr id="25" name="TextBox 24"/>
+          <p:cNvSpPr txBox="1"/>
+          <p:nvPr/>
+        </p:nvSpPr>
+        <p:spPr>
+          <a:xfrm>
+            <a:off x="3154917" y="4014216"/>
+            <a:ext cx="1175570" cy="420624"/>
+          </a:xfrm>
+          <a:prstGeom prst="rect">
+            <a:avLst/>
+          </a:prstGeom>
+          <a:noFill/>
+        </p:spPr>
+        <p:txBody>
+          <a:bodyPr wrap="square" anchor="ctr" lIns="0" rIns="0" tIns="0" bIns="0">
+            <a:spAutoFit/>
+          </a:bodyPr>
+          <a:lstStyle/>
+          <a:p>
+            <a:pPr algn="ctr">
+              <a:spcAft>
+                <a:spcPts val="0"/>
+              </a:spcAft>
+            </a:pPr>
+            <a:r>
+              <a:rPr sz="960" b="0" i="0">
+                <a:solidFill>
+                  <a:srgbClr val="9DAFC7"/>
+                </a:solidFill>
+                <a:latin typeface="Calibri"/>
+              </a:rPr>
+              <a:t>exactly</a:t>
+            </a:r>
+          </a:p>
+        </p:txBody>
+      </p:sp>
+      <p:sp>
+        <p:nvSpPr>
+          <p:cNvPr id="26" name="TextBox 25"/>
+          <p:cNvSpPr txBox="1"/>
+          <p:nvPr/>
+        </p:nvSpPr>
+        <p:spPr>
+          <a:xfrm>
+            <a:off x="4586519" y="4014216"/>
+            <a:ext cx="1175570" cy="420624"/>
+          </a:xfrm>
+          <a:prstGeom prst="rect">
+            <a:avLst/>
+          </a:prstGeom>
+          <a:noFill/>
+        </p:spPr>
+        <p:txBody>
+          <a:bodyPr wrap="square" anchor="ctr" lIns="0" rIns="0" tIns="0" bIns="0">
+            <a:spAutoFit/>
+          </a:bodyPr>
+          <a:lstStyle/>
+          <a:p>
+            <a:pPr algn="ctr">
+              <a:spcAft>
+                <a:spcPts val="0"/>
+              </a:spcAft>
+            </a:pPr>
+            <a:r>
+              <a:rPr sz="960" b="0" i="0">
+                <a:solidFill>
+                  <a:srgbClr val="9DAFC7"/>
+                </a:solidFill>
+                <a:latin typeface="Calibri"/>
+              </a:rPr>
+              <a:t>approximately</a:t>
+            </a:r>
+          </a:p>
+        </p:txBody>
+      </p:sp>
+      <p:sp>
+        <p:nvSpPr>
+          <p:cNvPr id="27" name="Rectangle 26"/>
+          <p:cNvSpPr/>
+          <p:nvPr/>
+        </p:nvSpPr>
+        <p:spPr>
+          <a:xfrm>
+            <a:off x="6301587" y="2331720"/>
+            <a:ext cx="5112867" cy="1481328"/>
+          </a:xfrm>
+          <a:prstGeom prst="rect">
+            <a:avLst/>
+          </a:prstGeom>
+          <a:solidFill>
+            <a:srgbClr val="331A1C"/>
+          </a:solidFill>
+          <a:ln w="9525">
+            <a:solidFill>
+              <a:srgbClr val="4A2427"/>
+            </a:solidFill>
+          </a:ln>
+          <a:effectLst/>
+        </p:spPr>
+        <p:style>
+          <a:lnRef idx="1">
+            <a:schemeClr val="accent1"/>
+          </a:lnRef>
+          <a:fillRef idx="3">
+            <a:schemeClr val="accent1"/>
+          </a:fillRef>
+          <a:effectRef idx="2">
+            <a:schemeClr val="accent1"/>
+          </a:effectRef>
+          <a:fontRef idx="minor">
+            <a:schemeClr val="lt1"/>
+          </a:fontRef>
+        </p:style>
+        <p:txBody>
+          <a:bodyPr rtlCol="0" anchor="ctr" wrap="square"/>
+          <a:lstStyle/>
+          <a:p>
+            <a:pPr algn="ctr"/>
+          </a:p>
+        </p:txBody>
+      </p:sp>
+      <p:sp>
+        <p:nvSpPr>
+          <p:cNvPr id="28" name="TextBox 27"/>
+          <p:cNvSpPr txBox="1"/>
+          <p:nvPr/>
+        </p:nvSpPr>
+        <p:spPr>
+          <a:xfrm>
+            <a:off x="6539331" y="2478024"/>
+            <a:ext cx="4637379" cy="1188720"/>
           </a:xfrm>
           <a:prstGeom prst="rect">
             <a:avLst/>
@@ -7557,11 +8180,11 @@
             <a:r>
               <a:rPr sz="980" b="1" i="0" spc="110">
                 <a:solidFill>
-                  <a:srgbClr val="E3C285"/>
-                </a:solidFill>
-                <a:latin typeface="Calibri"/>
-              </a:rPr>
-              <a:t>CONFIDENCE LEVEL</a:t>
+                  <a:srgbClr val="F08A7F"/>
+                </a:solidFill>
+                <a:latin typeface="Calibri"/>
+              </a:rPr>
+              <a:t>THE ONE WE DID NOT EXPECT</a:t>
             </a:r>
           </a:p>
           <a:p>
@@ -7580,7 +8203,215 @@
                 </a:solidFill>
                 <a:latin typeface="Calibri"/>
               </a:rPr>
-              <a:t>This is a comparison between different model sizes, not a controlled experiment at fixed size. Treat it as a strong steer on where to spend, not a proven law.</a:t>
+              <a:t>The provider refused to evaluate a subset of prompts outright, and did so inconsistently — the same prompt was refused on some runs and not others. A guardrail that intermittently declines to answer is itself an audit finding.</a:t>
+            </a:r>
+          </a:p>
+        </p:txBody>
+      </p:sp>
+      <p:sp>
+        <p:nvSpPr>
+          <p:cNvPr id="29" name="Rectangle 28"/>
+          <p:cNvSpPr/>
+          <p:nvPr/>
+        </p:nvSpPr>
+        <p:spPr>
+          <a:xfrm>
+            <a:off x="6301587" y="3941064"/>
+            <a:ext cx="5112867" cy="1371600"/>
+          </a:xfrm>
+          <a:prstGeom prst="rect">
+            <a:avLst/>
+          </a:prstGeom>
+          <a:solidFill>
+            <a:srgbClr val="18263D"/>
+          </a:solidFill>
+          <a:ln w="9525">
+            <a:solidFill>
+              <a:srgbClr val="1E3050"/>
+            </a:solidFill>
+          </a:ln>
+          <a:effectLst/>
+        </p:spPr>
+        <p:style>
+          <a:lnRef idx="1">
+            <a:schemeClr val="accent1"/>
+          </a:lnRef>
+          <a:fillRef idx="3">
+            <a:schemeClr val="accent1"/>
+          </a:fillRef>
+          <a:effectRef idx="2">
+            <a:schemeClr val="accent1"/>
+          </a:effectRef>
+          <a:fontRef idx="minor">
+            <a:schemeClr val="lt1"/>
+          </a:fontRef>
+        </p:style>
+        <p:txBody>
+          <a:bodyPr rtlCol="0" anchor="ctr" wrap="square"/>
+          <a:lstStyle/>
+          <a:p>
+            <a:pPr algn="ctr"/>
+          </a:p>
+        </p:txBody>
+      </p:sp>
+      <p:sp>
+        <p:nvSpPr>
+          <p:cNvPr id="30" name="TextBox 29"/>
+          <p:cNvSpPr txBox="1"/>
+          <p:nvPr/>
+        </p:nvSpPr>
+        <p:spPr>
+          <a:xfrm>
+            <a:off x="6539331" y="4087368"/>
+            <a:ext cx="4637379" cy="1078992"/>
+          </a:xfrm>
+          <a:prstGeom prst="rect">
+            <a:avLst/>
+          </a:prstGeom>
+          <a:noFill/>
+        </p:spPr>
+        <p:txBody>
+          <a:bodyPr wrap="square" anchor="t" lIns="0" rIns="0" tIns="0" bIns="0">
+            <a:spAutoFit/>
+          </a:bodyPr>
+          <a:lstStyle/>
+          <a:p>
+            <a:pPr algn="l">
+              <a:spcAft>
+                <a:spcPts val="500"/>
+              </a:spcAft>
+            </a:pPr>
+            <a:r>
+              <a:rPr sz="980" b="1" i="0" spc="110">
+                <a:solidFill>
+                  <a:srgbClr val="BFD8F5"/>
+                </a:solidFill>
+                <a:latin typeface="Calibri"/>
+              </a:rPr>
+              <a:t>CONTROL OVER THE ALARM RATE</a:t>
+            </a:r>
+          </a:p>
+          <a:p>
+            <a:pPr algn="l">
+              <a:lnSpc>
+                <a:spcPct val="106000"/>
+              </a:lnSpc>
+              <a:spcAft>
+                <a:spcPts val="0"/>
+              </a:spcAft>
+            </a:pPr>
+            <a:r>
+              <a:rPr sz="1100" b="0" i="0">
+                <a:solidFill>
+                  <a:srgbClr val="9DAFC7"/>
+                </a:solidFill>
+                <a:latin typeface="Calibri"/>
+              </a:rPr>
+              <a:t>Our own model exposes a continuous score, so we can set the false-alarm budget precisely. The hosted model reports a coarse 0–100 value, so we can only land near a target.</a:t>
+            </a:r>
+          </a:p>
+        </p:txBody>
+      </p:sp>
+      <p:sp>
+        <p:nvSpPr>
+          <p:cNvPr id="31" name="Rectangle 30"/>
+          <p:cNvSpPr/>
+          <p:nvPr/>
+        </p:nvSpPr>
+        <p:spPr>
+          <a:xfrm>
+            <a:off x="777240" y="5404104"/>
+            <a:ext cx="10637215" cy="969264"/>
+          </a:xfrm>
+          <a:prstGeom prst="rect">
+            <a:avLst/>
+          </a:prstGeom>
+          <a:solidFill>
+            <a:srgbClr val="18263D"/>
+          </a:solidFill>
+          <a:ln w="9525">
+            <a:solidFill>
+              <a:srgbClr val="1E3050"/>
+            </a:solidFill>
+          </a:ln>
+          <a:effectLst/>
+        </p:spPr>
+        <p:style>
+          <a:lnRef idx="1">
+            <a:schemeClr val="accent1"/>
+          </a:lnRef>
+          <a:fillRef idx="3">
+            <a:schemeClr val="accent1"/>
+          </a:fillRef>
+          <a:effectRef idx="2">
+            <a:schemeClr val="accent1"/>
+          </a:effectRef>
+          <a:fontRef idx="minor">
+            <a:schemeClr val="lt1"/>
+          </a:fontRef>
+        </p:style>
+        <p:txBody>
+          <a:bodyPr rtlCol="0" anchor="ctr" wrap="square"/>
+          <a:lstStyle/>
+          <a:p>
+            <a:pPr algn="ctr"/>
+          </a:p>
+        </p:txBody>
+      </p:sp>
+      <p:sp>
+        <p:nvSpPr>
+          <p:cNvPr id="32" name="TextBox 31"/>
+          <p:cNvSpPr txBox="1"/>
+          <p:nvPr/>
+        </p:nvSpPr>
+        <p:spPr>
+          <a:xfrm>
+            <a:off x="1014984" y="5550408"/>
+            <a:ext cx="10161727" cy="676656"/>
+          </a:xfrm>
+          <a:prstGeom prst="rect">
+            <a:avLst/>
+          </a:prstGeom>
+          <a:noFill/>
+        </p:spPr>
+        <p:txBody>
+          <a:bodyPr wrap="square" anchor="t" lIns="0" rIns="0" tIns="0" bIns="0">
+            <a:spAutoFit/>
+          </a:bodyPr>
+          <a:lstStyle/>
+          <a:p>
+            <a:pPr algn="l">
+              <a:spcAft>
+                <a:spcPts val="500"/>
+              </a:spcAft>
+            </a:pPr>
+            <a:r>
+              <a:rPr sz="980" b="1" i="0" spc="110">
+                <a:solidFill>
+                  <a:srgbClr val="8FD3B6"/>
+                </a:solidFill>
+                <a:latin typeface="Calibri"/>
+              </a:rPr>
+              <a:t>NOT A REASON TO REFUSE HOSTED</a:t>
+            </a:r>
+          </a:p>
+          <a:p>
+            <a:pPr algn="l">
+              <a:lnSpc>
+                <a:spcPct val="106000"/>
+              </a:lnSpc>
+              <a:spcAft>
+                <a:spcPts val="0"/>
+              </a:spcAft>
+            </a:pPr>
+            <a:r>
+              <a:rPr sz="1100" b="0" i="0">
+                <a:solidFill>
+                  <a:srgbClr val="9DAFC7"/>
+                </a:solidFill>
+                <a:latin typeface="Calibri"/>
+              </a:rPr>
+              <a:t>It is a reason to scope it: hosted on traffic where the prompt may leave and latency is not critical; self-hosted on the regulated, latency-sensitive path.</a:t>
             </a:r>
           </a:p>
         </p:txBody>
@@ -7723,7 +8554,7 @@
                 </a:solidFill>
                 <a:latin typeface="Calibri"/>
               </a:rPr>
-              <a:t>CONFIDENCE AND LIMITS</a:t>
+              <a:t>THE USEFUL FINDING</a:t>
             </a:r>
           </a:p>
         </p:txBody>
@@ -7765,7 +8596,7 @@
                 </a:solidFill>
                 <a:latin typeface="Cambria"/>
               </a:rPr>
-              <a:t>What this does not tell you</a:t>
+              <a:t>If we must self-host, a bigger untuned model beats a tuned small one</a:t>
             </a:r>
           </a:p>
         </p:txBody>
@@ -7804,7 +8635,7 @@
                 </a:solidFill>
                 <a:latin typeface="Calibri"/>
               </a:rPr>
-              <a:t>Stated plainly, so the recommendation can be trusted where it does apply</a:t>
+              <a:t>Because tuning's cost lands on exactly the traffic a guardrail exists to catch</a:t>
             </a:r>
           </a:p>
         </p:txBody>
@@ -7818,7 +8649,7 @@
         <p:spPr>
           <a:xfrm>
             <a:off x="777240" y="2295144"/>
-            <a:ext cx="10637215" cy="2926080"/>
+            <a:ext cx="5112867" cy="2651760"/>
           </a:xfrm>
           <a:prstGeom prst="rect">
             <a:avLst/>
@@ -7837,7 +8668,7 @@
               </a:spcAft>
             </a:pPr>
             <a:r>
-              <a:rPr sz="1250" b="1" i="0">
+              <a:rPr sz="1450" b="1" i="0">
                 <a:solidFill>
                   <a:srgbClr val="E0564F"/>
                 </a:solidFill>
@@ -7846,22 +8677,22 @@
               <a:t>—  </a:t>
             </a:r>
             <a:r>
-              <a:rPr sz="1250" b="1" i="0">
+              <a:rPr sz="1450" b="1" i="0">
                 <a:solidFill>
                   <a:srgbClr val="EEF2F8"/>
                 </a:solidFill>
                 <a:latin typeface="Calibri"/>
               </a:rPr>
-              <a:t>It is one benchmark. </a:t>
-            </a:r>
-            <a:r>
-              <a:rPr sz="1250" b="0" i="0">
+              <a:t>Tuning a small model. </a:t>
+            </a:r>
+            <a:r>
+              <a:rPr sz="1450" b="0" i="0">
                 <a:solidFill>
                   <a:srgbClr val="9DAFC7"/>
                 </a:solidFill>
                 <a:latin typeface="Calibri"/>
               </a:rPr>
-              <a:t>Expert-annotated finance, healthcare and law prompt safety. It is the strongest external evidence we have, and it is still a single instrument — and our own research shows guard rankings reorder when the benchmark changes.</a:t>
+              <a:t>Large gain on familiar traffic, and it gives back accuracy on unfamiliar traffic — which is where novel attacks arrive.</a:t>
             </a:r>
           </a:p>
           <a:p>
@@ -7871,7 +8702,7 @@
               </a:spcAft>
             </a:pPr>
             <a:r>
-              <a:rPr sz="1250" b="1" i="0">
+              <a:rPr sz="1450" b="1" i="0">
                 <a:solidFill>
                   <a:srgbClr val="E0564F"/>
                 </a:solidFill>
@@ -7880,22 +8711,22 @@
               <a:t>—  </a:t>
             </a:r>
             <a:r>
-              <a:rPr sz="1250" b="1" i="0">
+              <a:rPr sz="1450" b="1" i="0">
                 <a:solidFill>
                   <a:srgbClr val="EEF2F8"/>
                 </a:solidFill>
                 <a:latin typeface="Calibri"/>
               </a:rPr>
-              <a:t>It is prompt-only. </a:t>
-            </a:r>
-            <a:r>
-              <a:rPr sz="1250" b="0" i="0">
+              <a:t>A bigger untuned model. </a:t>
+            </a:r>
+            <a:r>
+              <a:rPr sz="1450" b="0" i="0">
                 <a:solidFill>
                   <a:srgbClr val="9DAFC7"/>
                 </a:solidFill>
                 <a:latin typeface="Calibri"/>
               </a:rPr>
-              <a:t>We judged incoming prompts, not the assistant's replies, and not the harder mortgage-compliance question of whether a specific answer breaks a specific rule.</a:t>
+              <a:t>Recovers most of that same gain on familiar traffic, and holds its accuracy on unfamiliar traffic.</a:t>
             </a:r>
           </a:p>
           <a:p>
@@ -7905,7 +8736,7 @@
               </a:spcAft>
             </a:pPr>
             <a:r>
-              <a:rPr sz="1250" b="1" i="0">
+              <a:rPr sz="1450" b="1" i="0">
                 <a:solidFill>
                   <a:srgbClr val="E0564F"/>
                 </a:solidFill>
@@ -7914,124 +8745,22 @@
               <a:t>—  </a:t>
             </a:r>
             <a:r>
-              <a:rPr sz="1250" b="1" i="0">
+              <a:rPr sz="1450" b="1" i="0">
                 <a:solidFill>
                   <a:srgbClr val="EEF2F8"/>
                 </a:solidFill>
                 <a:latin typeface="Calibri"/>
               </a:rPr>
-              <a:t>Vendor behaviour is a moving target. </a:t>
-            </a:r>
-            <a:r>
-              <a:rPr sz="1250" b="0" i="0">
+              <a:t>So for a guardrail specifically. </a:t>
+            </a:r>
+            <a:r>
+              <a:rPr sz="1450" b="0" i="0">
                 <a:solidFill>
                   <a:srgbClr val="9DAFC7"/>
                 </a:solidFill>
                 <a:latin typeface="Calibri"/>
               </a:rPr>
-              <a:t>Model versions change under you. The self-hosted side is pinned to an exact revision and reproduces indefinitely; the hosted side does not.</a:t>
-            </a:r>
-          </a:p>
-          <a:p>
-            <a:pPr algn="l">
-              <a:spcAft>
-                <a:spcPts val="1200"/>
-              </a:spcAft>
-            </a:pPr>
-            <a:r>
-              <a:rPr sz="1250" b="1" i="0">
-                <a:solidFill>
-                  <a:srgbClr val="E0564F"/>
-                </a:solidFill>
-                <a:latin typeface="Calibri"/>
-              </a:rPr>
-              <a:t>—  </a:t>
-            </a:r>
-            <a:r>
-              <a:rPr sz="1250" b="1" i="0">
-                <a:solidFill>
-                  <a:srgbClr val="EEF2F8"/>
-                </a:solidFill>
-                <a:latin typeface="Calibri"/>
-              </a:rPr>
-              <a:t>Prices are list, not invoices. </a:t>
-            </a:r>
-            <a:r>
-              <a:rPr sz="1250" b="0" i="0">
-                <a:solidFill>
-                  <a:srgbClr val="9DAFC7"/>
-                </a:solidFill>
-                <a:latin typeface="Calibri"/>
-              </a:rPr>
-              <a:t>Cost figures are billed tokens at public rates and exclude the GPU cost on our own side.</a:t>
-            </a:r>
-          </a:p>
-          <a:p>
-            <a:pPr algn="l">
-              <a:spcAft>
-                <a:spcPts val="1200"/>
-              </a:spcAft>
-            </a:pPr>
-            <a:r>
-              <a:rPr sz="1250" b="1" i="0">
-                <a:solidFill>
-                  <a:srgbClr val="E0564F"/>
-                </a:solidFill>
-                <a:latin typeface="Calibri"/>
-              </a:rPr>
-              <a:t>—  </a:t>
-            </a:r>
-            <a:r>
-              <a:rPr sz="1250" b="1" i="0">
-                <a:solidFill>
-                  <a:srgbClr val="EEF2F8"/>
-                </a:solidFill>
-                <a:latin typeface="Calibri"/>
-              </a:rPr>
-              <a:t>The escalation curve is optimistically tuned. </a:t>
-            </a:r>
-            <a:r>
-              <a:rPr sz="1250" b="0" i="0">
-                <a:solidFill>
-                  <a:srgbClr val="9DAFC7"/>
-                </a:solidFill>
-                <a:latin typeface="Calibri"/>
-              </a:rPr>
-              <a:t>Its decision line and its global 5% budget are both chosen on the same rows it is then scored on, so a live deployment should expect to close somewhat less than 51% of the gap at a fifth escalated.</a:t>
-            </a:r>
-          </a:p>
-          <a:p>
-            <a:pPr algn="l">
-              <a:spcAft>
-                <a:spcPts val="1200"/>
-              </a:spcAft>
-            </a:pPr>
-            <a:r>
-              <a:rPr sz="1250" b="1" i="0">
-                <a:solidFill>
-                  <a:srgbClr val="E0564F"/>
-                </a:solidFill>
-                <a:latin typeface="Calibri"/>
-              </a:rPr>
-              <a:t>—  </a:t>
-            </a:r>
-            <a:r>
-              <a:rPr sz="1250" b="1" i="0">
-                <a:solidFill>
-                  <a:srgbClr val="EEF2F8"/>
-                </a:solidFill>
-                <a:latin typeface="Calibri"/>
-              </a:rPr>
-              <a:t>Averages hide the operating point. </a:t>
-            </a:r>
-            <a:r>
-              <a:rPr sz="1250" b="0" i="0">
-                <a:solidFill>
-                  <a:srgbClr val="9DAFC7"/>
-                </a:solidFill>
-                <a:latin typeface="Calibri"/>
-              </a:rPr>
-              <a:t>Every catch rate here is already at a 5% false-alarm budget, but the underlying fine-tuning research reports an average over the whole score ranking. Re-scored inside the budget the direction is unchanged and the effect is 3.0x larger — so treat average-metric results from elsewhere as understating what you would see in production.</a:t>
+              <a:t>Prefer spending on a stronger base model over spending on a tuning programme.</a:t>
             </a:r>
           </a:p>
         </p:txBody>
@@ -8044,8 +8773,8 @@
         </p:nvSpPr>
         <p:spPr>
           <a:xfrm>
-            <a:off x="777240" y="5303520"/>
-            <a:ext cx="10637215" cy="987552"/>
+            <a:off x="6301587" y="2295144"/>
+            <a:ext cx="5112867" cy="1554480"/>
           </a:xfrm>
           <a:prstGeom prst="rect">
             <a:avLst/>
@@ -8090,8 +8819,8 @@
         </p:nvSpPr>
         <p:spPr>
           <a:xfrm>
-            <a:off x="1014984" y="5449824"/>
-            <a:ext cx="10161727" cy="694944"/>
+            <a:off x="6539331" y="2441448"/>
+            <a:ext cx="4637379" cy="1261872"/>
           </a:xfrm>
           <a:prstGeom prst="rect">
             <a:avLst/>
@@ -8112,11 +8841,11 @@
             <a:r>
               <a:rPr sz="980" b="1" i="0" spc="110">
                 <a:solidFill>
-                  <a:srgbClr val="BFD8F5"/>
-                </a:solidFill>
-                <a:latin typeface="Calibri"/>
-              </a:rPr>
-              <a:t>WHAT WOULD CHANGE THE RECOMMENDATION</a:t>
+                  <a:srgbClr val="8FD3B6"/>
+                </a:solidFill>
+                <a:latin typeface="Calibri"/>
+              </a:rPr>
+              <a:t>WHY THIS IS WORTH MONEY</a:t>
             </a:r>
           </a:p>
           <a:p>
@@ -8135,7 +8864,111 @@
                 </a:solidFill>
                 <a:latin typeface="Calibri"/>
               </a:rPr>
-              <a:t>A regulated-domain benchmark that scores whole answers against specific rules, with expert adjudication. That is the instrument we do not have, and building it is the highest-value next step.</a:t>
+              <a:t>It reverses the intuitive plan. Tuning looks like the cheap, targeted option; measured on held-out traffic it is the one that quietly costs you coverage.</a:t>
+            </a:r>
+          </a:p>
+        </p:txBody>
+      </p:sp>
+      <p:sp>
+        <p:nvSpPr>
+          <p:cNvPr id="10" name="Rectangle 9"/>
+          <p:cNvSpPr/>
+          <p:nvPr/>
+        </p:nvSpPr>
+        <p:spPr>
+          <a:xfrm>
+            <a:off x="6301587" y="3995928"/>
+            <a:ext cx="5112867" cy="1554480"/>
+          </a:xfrm>
+          <a:prstGeom prst="rect">
+            <a:avLst/>
+          </a:prstGeom>
+          <a:solidFill>
+            <a:srgbClr val="18263D"/>
+          </a:solidFill>
+          <a:ln w="9525">
+            <a:solidFill>
+              <a:srgbClr val="1E3050"/>
+            </a:solidFill>
+          </a:ln>
+          <a:effectLst/>
+        </p:spPr>
+        <p:style>
+          <a:lnRef idx="1">
+            <a:schemeClr val="accent1"/>
+          </a:lnRef>
+          <a:fillRef idx="3">
+            <a:schemeClr val="accent1"/>
+          </a:fillRef>
+          <a:effectRef idx="2">
+            <a:schemeClr val="accent1"/>
+          </a:effectRef>
+          <a:fontRef idx="minor">
+            <a:schemeClr val="lt1"/>
+          </a:fontRef>
+        </p:style>
+        <p:txBody>
+          <a:bodyPr rtlCol="0" anchor="ctr" wrap="square"/>
+          <a:lstStyle/>
+          <a:p>
+            <a:pPr algn="ctr"/>
+          </a:p>
+        </p:txBody>
+      </p:sp>
+      <p:sp>
+        <p:nvSpPr>
+          <p:cNvPr id="11" name="TextBox 10"/>
+          <p:cNvSpPr txBox="1"/>
+          <p:nvPr/>
+        </p:nvSpPr>
+        <p:spPr>
+          <a:xfrm>
+            <a:off x="6539331" y="4142232"/>
+            <a:ext cx="4637379" cy="1261872"/>
+          </a:xfrm>
+          <a:prstGeom prst="rect">
+            <a:avLst/>
+          </a:prstGeom>
+          <a:noFill/>
+        </p:spPr>
+        <p:txBody>
+          <a:bodyPr wrap="square" anchor="t" lIns="0" rIns="0" tIns="0" bIns="0">
+            <a:spAutoFit/>
+          </a:bodyPr>
+          <a:lstStyle/>
+          <a:p>
+            <a:pPr algn="l">
+              <a:spcAft>
+                <a:spcPts val="500"/>
+              </a:spcAft>
+            </a:pPr>
+            <a:r>
+              <a:rPr sz="980" b="1" i="0" spc="110">
+                <a:solidFill>
+                  <a:srgbClr val="E3C285"/>
+                </a:solidFill>
+                <a:latin typeface="Calibri"/>
+              </a:rPr>
+              <a:t>CONFIDENCE LEVEL</a:t>
+            </a:r>
+          </a:p>
+          <a:p>
+            <a:pPr algn="l">
+              <a:lnSpc>
+                <a:spcPct val="106000"/>
+              </a:lnSpc>
+              <a:spcAft>
+                <a:spcPts val="0"/>
+              </a:spcAft>
+            </a:pPr>
+            <a:r>
+              <a:rPr sz="1100" b="0" i="0">
+                <a:solidFill>
+                  <a:srgbClr val="9DAFC7"/>
+                </a:solidFill>
+                <a:latin typeface="Calibri"/>
+              </a:rPr>
+              <a:t>This is a comparison between different model sizes, not a controlled experiment at fixed size. Treat it as a strong steer on where to spend, not a proven law.</a:t>
             </a:r>
           </a:p>
         </p:txBody>
@@ -8149,6 +8982,561 @@
 </file>
 
 <file path=ppt/slides/slide13.xml><?xml version="1.0" encoding="utf-8"?>
+<p:sld xmlns:a="http://schemas.openxmlformats.org/drawingml/2006/main" xmlns:p="http://schemas.openxmlformats.org/presentationml/2006/main" xmlns:r="http://schemas.openxmlformats.org/officeDocument/2006/relationships">
+  <p:cSld>
+    <p:bg>
+      <p:bgPr>
+        <a:solidFill>
+          <a:srgbClr val="0C1424"/>
+        </a:solidFill>
+        <a:effectLst/>
+      </p:bgPr>
+    </p:bg>
+    <p:spTree>
+      <p:nvGrpSpPr>
+        <p:cNvPr id="1" name=""/>
+        <p:cNvGrpSpPr/>
+        <p:nvPr/>
+      </p:nvGrpSpPr>
+      <p:grpSpPr/>
+      <p:sp>
+        <p:nvSpPr>
+          <p:cNvPr id="2" name="TextBox 1"/>
+          <p:cNvSpPr txBox="1"/>
+          <p:nvPr/>
+        </p:nvSpPr>
+        <p:spPr>
+          <a:xfrm>
+            <a:off x="777240" y="6400800"/>
+            <a:ext cx="8686800" cy="256032"/>
+          </a:xfrm>
+          <a:prstGeom prst="rect">
+            <a:avLst/>
+          </a:prstGeom>
+          <a:noFill/>
+        </p:spPr>
+        <p:txBody>
+          <a:bodyPr wrap="square" anchor="t" lIns="0" rIns="0" tIns="0" bIns="0">
+            <a:spAutoFit/>
+          </a:bodyPr>
+          <a:lstStyle/>
+          <a:p>
+            <a:pPr algn="l">
+              <a:spcAft>
+                <a:spcPts val="0"/>
+              </a:spcAft>
+            </a:pPr>
+            <a:r>
+              <a:rPr sz="860" b="0" i="0">
+                <a:solidFill>
+                  <a:srgbClr val="7488A8"/>
+                </a:solidFill>
+                <a:latin typeface="Calibri"/>
+              </a:rPr>
+              <a:t>Guardrail sourcing · in-house inline, escalate the uncertain slice</a:t>
+            </a:r>
+          </a:p>
+        </p:txBody>
+      </p:sp>
+      <p:sp>
+        <p:nvSpPr>
+          <p:cNvPr id="3" name="TextBox 2"/>
+          <p:cNvSpPr txBox="1"/>
+          <p:nvPr/>
+        </p:nvSpPr>
+        <p:spPr>
+          <a:xfrm>
+            <a:off x="10317175" y="6400800"/>
+            <a:ext cx="1097280" cy="256032"/>
+          </a:xfrm>
+          <a:prstGeom prst="rect">
+            <a:avLst/>
+          </a:prstGeom>
+          <a:noFill/>
+        </p:spPr>
+        <p:txBody>
+          <a:bodyPr wrap="square" anchor="t" lIns="0" rIns="0" tIns="0" bIns="0">
+            <a:spAutoFit/>
+          </a:bodyPr>
+          <a:lstStyle/>
+          <a:p>
+            <a:pPr algn="r">
+              <a:spcAft>
+                <a:spcPts val="0"/>
+              </a:spcAft>
+            </a:pPr>
+            <a:r>
+              <a:rPr sz="950" b="1" i="0" spc="60">
+                <a:solidFill>
+                  <a:srgbClr val="E0564F"/>
+                </a:solidFill>
+                <a:latin typeface="Calibri"/>
+              </a:rPr>
+              <a:t>12</a:t>
+            </a:r>
+          </a:p>
+        </p:txBody>
+      </p:sp>
+      <p:sp>
+        <p:nvSpPr>
+          <p:cNvPr id="4" name="TextBox 3"/>
+          <p:cNvSpPr txBox="1"/>
+          <p:nvPr/>
+        </p:nvSpPr>
+        <p:spPr>
+          <a:xfrm>
+            <a:off x="777240" y="365760"/>
+            <a:ext cx="10637215" cy="256032"/>
+          </a:xfrm>
+          <a:prstGeom prst="rect">
+            <a:avLst/>
+          </a:prstGeom>
+          <a:noFill/>
+        </p:spPr>
+        <p:txBody>
+          <a:bodyPr wrap="square" anchor="t" lIns="0" rIns="0" tIns="0" bIns="0">
+            <a:spAutoFit/>
+          </a:bodyPr>
+          <a:lstStyle/>
+          <a:p>
+            <a:pPr algn="l">
+              <a:spcAft>
+                <a:spcPts val="0"/>
+              </a:spcAft>
+            </a:pPr>
+            <a:r>
+              <a:rPr sz="1050" b="1" i="0" spc="140">
+                <a:solidFill>
+                  <a:srgbClr val="E0564F"/>
+                </a:solidFill>
+                <a:latin typeface="Calibri"/>
+              </a:rPr>
+              <a:t>CONFIDENCE AND LIMITS</a:t>
+            </a:r>
+          </a:p>
+        </p:txBody>
+      </p:sp>
+      <p:sp>
+        <p:nvSpPr>
+          <p:cNvPr id="5" name="TextBox 4"/>
+          <p:cNvSpPr txBox="1"/>
+          <p:nvPr/>
+        </p:nvSpPr>
+        <p:spPr>
+          <a:xfrm>
+            <a:off x="777240" y="658368"/>
+            <a:ext cx="10637215" cy="932688"/>
+          </a:xfrm>
+          <a:prstGeom prst="rect">
+            <a:avLst/>
+          </a:prstGeom>
+          <a:noFill/>
+        </p:spPr>
+        <p:txBody>
+          <a:bodyPr wrap="square" anchor="t" lIns="0" rIns="0" tIns="0" bIns="0">
+            <a:spAutoFit/>
+          </a:bodyPr>
+          <a:lstStyle/>
+          <a:p>
+            <a:pPr algn="l">
+              <a:lnSpc>
+                <a:spcPct val="102000"/>
+              </a:lnSpc>
+              <a:spcAft>
+                <a:spcPts val="0"/>
+              </a:spcAft>
+            </a:pPr>
+            <a:r>
+              <a:rPr sz="2500" b="1" i="0">
+                <a:solidFill>
+                  <a:srgbClr val="EEF2F8"/>
+                </a:solidFill>
+                <a:latin typeface="Cambria"/>
+              </a:rPr>
+              <a:t>What this does not tell you</a:t>
+            </a:r>
+          </a:p>
+        </p:txBody>
+      </p:sp>
+      <p:sp>
+        <p:nvSpPr>
+          <p:cNvPr id="6" name="TextBox 5"/>
+          <p:cNvSpPr txBox="1"/>
+          <p:nvPr/>
+        </p:nvSpPr>
+        <p:spPr>
+          <a:xfrm>
+            <a:off x="777240" y="1700784"/>
+            <a:ext cx="10637215" cy="310896"/>
+          </a:xfrm>
+          <a:prstGeom prst="rect">
+            <a:avLst/>
+          </a:prstGeom>
+          <a:noFill/>
+        </p:spPr>
+        <p:txBody>
+          <a:bodyPr wrap="square" anchor="t" lIns="0" rIns="0" tIns="0" bIns="0">
+            <a:spAutoFit/>
+          </a:bodyPr>
+          <a:lstStyle/>
+          <a:p>
+            <a:pPr algn="l">
+              <a:spcAft>
+                <a:spcPts val="0"/>
+              </a:spcAft>
+            </a:pPr>
+            <a:r>
+              <a:rPr sz="1250" b="0" i="0">
+                <a:solidFill>
+                  <a:srgbClr val="6B7F9F"/>
+                </a:solidFill>
+                <a:latin typeface="Calibri"/>
+              </a:rPr>
+              <a:t>Stated plainly, so the recommendation can be trusted where it does apply</a:t>
+            </a:r>
+          </a:p>
+        </p:txBody>
+      </p:sp>
+      <p:sp>
+        <p:nvSpPr>
+          <p:cNvPr id="7" name="TextBox 6"/>
+          <p:cNvSpPr txBox="1"/>
+          <p:nvPr/>
+        </p:nvSpPr>
+        <p:spPr>
+          <a:xfrm>
+            <a:off x="777240" y="2295144"/>
+            <a:ext cx="10637215" cy="2926080"/>
+          </a:xfrm>
+          <a:prstGeom prst="rect">
+            <a:avLst/>
+          </a:prstGeom>
+          <a:noFill/>
+        </p:spPr>
+        <p:txBody>
+          <a:bodyPr wrap="square" anchor="t" lIns="0" rIns="0" tIns="0" bIns="0">
+            <a:spAutoFit/>
+          </a:bodyPr>
+          <a:lstStyle/>
+          <a:p>
+            <a:pPr algn="l">
+              <a:spcAft>
+                <a:spcPts val="800"/>
+              </a:spcAft>
+            </a:pPr>
+            <a:r>
+              <a:rPr sz="1220" b="1" i="0">
+                <a:solidFill>
+                  <a:srgbClr val="E0564F"/>
+                </a:solidFill>
+                <a:latin typeface="Calibri"/>
+              </a:rPr>
+              <a:t>—  </a:t>
+            </a:r>
+            <a:r>
+              <a:rPr sz="1220" b="1" i="0">
+                <a:solidFill>
+                  <a:srgbClr val="EEF2F8"/>
+                </a:solidFill>
+                <a:latin typeface="Calibri"/>
+              </a:rPr>
+              <a:t>It is one benchmark. </a:t>
+            </a:r>
+            <a:r>
+              <a:rPr sz="1220" b="0" i="0">
+                <a:solidFill>
+                  <a:srgbClr val="9DAFC7"/>
+                </a:solidFill>
+                <a:latin typeface="Calibri"/>
+              </a:rPr>
+              <a:t>Expert-annotated finance, healthcare and law prompt safety. It is the strongest external evidence we have, and it is still a single instrument — and our own research shows guard rankings reorder when the benchmark changes.</a:t>
+            </a:r>
+          </a:p>
+          <a:p>
+            <a:pPr algn="l">
+              <a:spcAft>
+                <a:spcPts val="800"/>
+              </a:spcAft>
+            </a:pPr>
+            <a:r>
+              <a:rPr sz="1220" b="1" i="0">
+                <a:solidFill>
+                  <a:srgbClr val="E0564F"/>
+                </a:solidFill>
+                <a:latin typeface="Calibri"/>
+              </a:rPr>
+              <a:t>—  </a:t>
+            </a:r>
+            <a:r>
+              <a:rPr sz="1220" b="1" i="0">
+                <a:solidFill>
+                  <a:srgbClr val="EEF2F8"/>
+                </a:solidFill>
+                <a:latin typeface="Calibri"/>
+              </a:rPr>
+              <a:t>It is prompt-only. </a:t>
+            </a:r>
+            <a:r>
+              <a:rPr sz="1220" b="0" i="0">
+                <a:solidFill>
+                  <a:srgbClr val="9DAFC7"/>
+                </a:solidFill>
+                <a:latin typeface="Calibri"/>
+              </a:rPr>
+              <a:t>We judged incoming prompts, not the assistant's replies, and not the harder mortgage-compliance question of whether a specific answer breaks a specific rule — which, as slide 10 shows, is the lane where our own instrument says the guards miss the payload.</a:t>
+            </a:r>
+          </a:p>
+          <a:p>
+            <a:pPr algn="l">
+              <a:spcAft>
+                <a:spcPts val="800"/>
+              </a:spcAft>
+            </a:pPr>
+            <a:r>
+              <a:rPr sz="1220" b="1" i="0">
+                <a:solidFill>
+                  <a:srgbClr val="E0564F"/>
+                </a:solidFill>
+                <a:latin typeface="Calibri"/>
+              </a:rPr>
+              <a:t>—  </a:t>
+            </a:r>
+            <a:r>
+              <a:rPr sz="1220" b="1" i="0">
+                <a:solidFill>
+                  <a:srgbClr val="EEF2F8"/>
+                </a:solidFill>
+                <a:latin typeface="Calibri"/>
+              </a:rPr>
+              <a:t>Vendor behaviour is a moving target. </a:t>
+            </a:r>
+            <a:r>
+              <a:rPr sz="1220" b="0" i="0">
+                <a:solidFill>
+                  <a:srgbClr val="9DAFC7"/>
+                </a:solidFill>
+                <a:latin typeface="Calibri"/>
+              </a:rPr>
+              <a:t>Model versions change under you. The self-hosted side is pinned to an exact revision and reproduces indefinitely; the hosted side does not.</a:t>
+            </a:r>
+          </a:p>
+          <a:p>
+            <a:pPr algn="l">
+              <a:spcAft>
+                <a:spcPts val="800"/>
+              </a:spcAft>
+            </a:pPr>
+            <a:r>
+              <a:rPr sz="1220" b="1" i="0">
+                <a:solidFill>
+                  <a:srgbClr val="E0564F"/>
+                </a:solidFill>
+                <a:latin typeface="Calibri"/>
+              </a:rPr>
+              <a:t>—  </a:t>
+            </a:r>
+            <a:r>
+              <a:rPr sz="1220" b="1" i="0">
+                <a:solidFill>
+                  <a:srgbClr val="EEF2F8"/>
+                </a:solidFill>
+                <a:latin typeface="Calibri"/>
+              </a:rPr>
+              <a:t>Prices are list, not invoices. </a:t>
+            </a:r>
+            <a:r>
+              <a:rPr sz="1220" b="0" i="0">
+                <a:solidFill>
+                  <a:srgbClr val="9DAFC7"/>
+                </a:solidFill>
+                <a:latin typeface="Calibri"/>
+              </a:rPr>
+              <a:t>Cost figures are billed tokens at public rates and exclude the GPU cost on our own side.</a:t>
+            </a:r>
+          </a:p>
+          <a:p>
+            <a:pPr algn="l">
+              <a:spcAft>
+                <a:spcPts val="800"/>
+              </a:spcAft>
+            </a:pPr>
+            <a:r>
+              <a:rPr sz="1220" b="1" i="0">
+                <a:solidFill>
+                  <a:srgbClr val="E0564F"/>
+                </a:solidFill>
+                <a:latin typeface="Calibri"/>
+              </a:rPr>
+              <a:t>—  </a:t>
+            </a:r>
+            <a:r>
+              <a:rPr sz="1220" b="1" i="0">
+                <a:solidFill>
+                  <a:srgbClr val="EEF2F8"/>
+                </a:solidFill>
+                <a:latin typeface="Calibri"/>
+              </a:rPr>
+              <a:t>The escalation curve is optimistically tuned. </a:t>
+            </a:r>
+            <a:r>
+              <a:rPr sz="1220" b="0" i="0">
+                <a:solidFill>
+                  <a:srgbClr val="9DAFC7"/>
+                </a:solidFill>
+                <a:latin typeface="Calibri"/>
+              </a:rPr>
+              <a:t>Its decision line and its global 5% budget are both chosen on the same rows it is then scored on, so a live deployment should expect to close somewhat less than 51% of the gap at a fifth escalated.</a:t>
+            </a:r>
+          </a:p>
+          <a:p>
+            <a:pPr algn="l">
+              <a:spcAft>
+                <a:spcPts val="800"/>
+              </a:spcAft>
+            </a:pPr>
+            <a:r>
+              <a:rPr sz="1220" b="1" i="0">
+                <a:solidFill>
+                  <a:srgbClr val="E0564F"/>
+                </a:solidFill>
+                <a:latin typeface="Calibri"/>
+              </a:rPr>
+              <a:t>—  </a:t>
+            </a:r>
+            <a:r>
+              <a:rPr sz="1220" b="1" i="0">
+                <a:solidFill>
+                  <a:srgbClr val="EEF2F8"/>
+                </a:solidFill>
+                <a:latin typeface="Calibri"/>
+              </a:rPr>
+              <a:t>Averages hide the operating point. </a:t>
+            </a:r>
+            <a:r>
+              <a:rPr sz="1220" b="0" i="0">
+                <a:solidFill>
+                  <a:srgbClr val="9DAFC7"/>
+                </a:solidFill>
+                <a:latin typeface="Calibri"/>
+              </a:rPr>
+              <a:t>Every catch rate here is already at a 5% false-alarm budget, but the underlying fine-tuning research reports an average over the whole score ranking. Re-scored inside the budget the direction is unchanged and the effect is 3.0x larger — so treat average-metric results from elsewhere as understating what you would see in production.</a:t>
+            </a:r>
+          </a:p>
+        </p:txBody>
+      </p:sp>
+      <p:sp>
+        <p:nvSpPr>
+          <p:cNvPr id="8" name="Rectangle 7"/>
+          <p:cNvSpPr/>
+          <p:nvPr/>
+        </p:nvSpPr>
+        <p:spPr>
+          <a:xfrm>
+            <a:off x="777240" y="5303520"/>
+            <a:ext cx="10637215" cy="987552"/>
+          </a:xfrm>
+          <a:prstGeom prst="rect">
+            <a:avLst/>
+          </a:prstGeom>
+          <a:solidFill>
+            <a:srgbClr val="18263D"/>
+          </a:solidFill>
+          <a:ln w="9525">
+            <a:solidFill>
+              <a:srgbClr val="1E3050"/>
+            </a:solidFill>
+          </a:ln>
+          <a:effectLst/>
+        </p:spPr>
+        <p:style>
+          <a:lnRef idx="1">
+            <a:schemeClr val="accent1"/>
+          </a:lnRef>
+          <a:fillRef idx="3">
+            <a:schemeClr val="accent1"/>
+          </a:fillRef>
+          <a:effectRef idx="2">
+            <a:schemeClr val="accent1"/>
+          </a:effectRef>
+          <a:fontRef idx="minor">
+            <a:schemeClr val="lt1"/>
+          </a:fontRef>
+        </p:style>
+        <p:txBody>
+          <a:bodyPr rtlCol="0" anchor="ctr" wrap="square"/>
+          <a:lstStyle/>
+          <a:p>
+            <a:pPr algn="ctr"/>
+          </a:p>
+        </p:txBody>
+      </p:sp>
+      <p:sp>
+        <p:nvSpPr>
+          <p:cNvPr id="9" name="TextBox 8"/>
+          <p:cNvSpPr txBox="1"/>
+          <p:nvPr/>
+        </p:nvSpPr>
+        <p:spPr>
+          <a:xfrm>
+            <a:off x="1014984" y="5449824"/>
+            <a:ext cx="10161727" cy="694944"/>
+          </a:xfrm>
+          <a:prstGeom prst="rect">
+            <a:avLst/>
+          </a:prstGeom>
+          <a:noFill/>
+        </p:spPr>
+        <p:txBody>
+          <a:bodyPr wrap="square" anchor="t" lIns="0" rIns="0" tIns="0" bIns="0">
+            <a:spAutoFit/>
+          </a:bodyPr>
+          <a:lstStyle/>
+          <a:p>
+            <a:pPr algn="l">
+              <a:spcAft>
+                <a:spcPts val="500"/>
+              </a:spcAft>
+            </a:pPr>
+            <a:r>
+              <a:rPr sz="980" b="1" i="0" spc="110">
+                <a:solidFill>
+                  <a:srgbClr val="BFD8F5"/>
+                </a:solidFill>
+                <a:latin typeface="Calibri"/>
+              </a:rPr>
+              <a:t>WHAT WOULD CHANGE THE RECOMMENDATION</a:t>
+            </a:r>
+          </a:p>
+          <a:p>
+            <a:pPr algn="l">
+              <a:lnSpc>
+                <a:spcPct val="106000"/>
+              </a:lnSpc>
+              <a:spcAft>
+                <a:spcPts val="0"/>
+              </a:spcAft>
+            </a:pPr>
+            <a:r>
+              <a:rPr sz="1100" b="0" i="0">
+                <a:solidFill>
+                  <a:srgbClr val="9DAFC7"/>
+                </a:solidFill>
+                <a:latin typeface="Calibri"/>
+              </a:rPr>
+              <a:t>A regulated-domain benchmark that scores whole answers against specific rules, with expert adjudication. That is the instrument we do not have, and building it is the highest-value next step.</a:t>
+            </a:r>
+          </a:p>
+        </p:txBody>
+      </p:sp>
+    </p:spTree>
+  </p:cSld>
+  <p:clrMapOvr>
+    <a:masterClrMapping/>
+  </p:clrMapOvr>
+</p:sld>
+</file>
+
+<file path=ppt/slides/slide14.xml><?xml version="1.0" encoding="utf-8"?>
 <p:sld xmlns:a="http://schemas.openxmlformats.org/drawingml/2006/main" xmlns:p="http://schemas.openxmlformats.org/presentationml/2006/main" xmlns:r="http://schemas.openxmlformats.org/officeDocument/2006/relationships">
   <p:cSld>
     <p:bg>
@@ -8239,7 +9627,7 @@
                 </a:solidFill>
                 <a:latin typeface="Calibri"/>
               </a:rPr>
-              <a:t>12</a:t>
+              <a:t>13</a:t>
             </a:r>
           </a:p>
         </p:txBody>
@@ -8552,7 +9940,7 @@
                 </a:solidFill>
                 <a:latin typeface="Calibri"/>
               </a:rPr>
-              <a:t>A mortgage-compliance benchmark that scores whole answers against specific rules, with expert adjudication.</a:t>
+              <a:t>A mortgage-compliance benchmark that scores whole answers against specific rules, with expert adjudication. Slide 10 is why: on the lane we cannot escalate, the instrument we have says the guards miss the payload.</a:t>
             </a:r>
           </a:p>
         </p:txBody>
@@ -8566,7 +9954,7 @@
         <p:spPr>
           <a:xfrm>
             <a:off x="6301587" y="2295144"/>
-            <a:ext cx="5112867" cy="1417320"/>
+            <a:ext cx="5112867" cy="1097280"/>
           </a:xfrm>
           <a:prstGeom prst="rect">
             <a:avLst/>
@@ -8612,7 +10000,7 @@
         <p:spPr>
           <a:xfrm>
             <a:off x="6539331" y="2441448"/>
-            <a:ext cx="4637379" cy="1124712"/>
+            <a:ext cx="4637379" cy="804672"/>
           </a:xfrm>
           <a:prstGeom prst="rect">
             <a:avLst/>
@@ -8669,8 +10057,8 @@
         </p:nvSpPr>
         <p:spPr>
           <a:xfrm>
-            <a:off x="6301587" y="3877056"/>
-            <a:ext cx="5112867" cy="1691640"/>
+            <a:off x="6301587" y="3483864"/>
+            <a:ext cx="5112867" cy="1207008"/>
           </a:xfrm>
           <a:prstGeom prst="rect">
             <a:avLst/>
@@ -8715,8 +10103,8 @@
         </p:nvSpPr>
         <p:spPr>
           <a:xfrm>
-            <a:off x="6539331" y="4023360"/>
-            <a:ext cx="4637379" cy="1399032"/>
+            <a:off x="6539331" y="3630168"/>
+            <a:ext cx="4637379" cy="914400"/>
           </a:xfrm>
           <a:prstGeom prst="rect">
             <a:avLst/>
@@ -8741,7 +10129,7 @@
                 </a:solidFill>
                 <a:latin typeface="Calibri"/>
               </a:rPr>
-              <a:t>THE ONE THAT NEEDS A DECISION FROM THIS ROOM</a:t>
+              <a:t>DECISION ONE — A LEGAL CALL, NOT A TECHNICAL ONE</a:t>
             </a:r>
           </a:p>
           <a:p>
@@ -8760,7 +10148,111 @@
                 </a:solidFill>
                 <a:latin typeface="Calibri"/>
               </a:rPr>
-              <a:t>Whether borrower-bearing prompts may leave our network at all. That single answer decides how much of our traffic can use the more accurate option, and it is a legal call rather than a technical one.</a:t>
+              <a:t>Whether borrower-bearing prompts may leave our network at all. That single answer decides how much of our traffic can use the more accurate option.</a:t>
+            </a:r>
+          </a:p>
+        </p:txBody>
+      </p:sp>
+      <p:sp>
+        <p:nvSpPr>
+          <p:cNvPr id="12" name="Rectangle 11"/>
+          <p:cNvSpPr/>
+          <p:nvPr/>
+        </p:nvSpPr>
+        <p:spPr>
+          <a:xfrm>
+            <a:off x="6301587" y="4837176"/>
+            <a:ext cx="5112867" cy="1207008"/>
+          </a:xfrm>
+          <a:prstGeom prst="rect">
+            <a:avLst/>
+          </a:prstGeom>
+          <a:solidFill>
+            <a:srgbClr val="331A1C"/>
+          </a:solidFill>
+          <a:ln w="9525">
+            <a:solidFill>
+              <a:srgbClr val="4A2427"/>
+            </a:solidFill>
+          </a:ln>
+          <a:effectLst/>
+        </p:spPr>
+        <p:style>
+          <a:lnRef idx="1">
+            <a:schemeClr val="accent1"/>
+          </a:lnRef>
+          <a:fillRef idx="3">
+            <a:schemeClr val="accent1"/>
+          </a:fillRef>
+          <a:effectRef idx="2">
+            <a:schemeClr val="accent1"/>
+          </a:effectRef>
+          <a:fontRef idx="minor">
+            <a:schemeClr val="lt1"/>
+          </a:fontRef>
+        </p:style>
+        <p:txBody>
+          <a:bodyPr rtlCol="0" anchor="ctr" wrap="square"/>
+          <a:lstStyle/>
+          <a:p>
+            <a:pPr algn="ctr"/>
+          </a:p>
+        </p:txBody>
+      </p:sp>
+      <p:sp>
+        <p:nvSpPr>
+          <p:cNvPr id="13" name="TextBox 12"/>
+          <p:cNvSpPr txBox="1"/>
+          <p:nvPr/>
+        </p:nvSpPr>
+        <p:spPr>
+          <a:xfrm>
+            <a:off x="6539331" y="4983480"/>
+            <a:ext cx="4637379" cy="914400"/>
+          </a:xfrm>
+          <a:prstGeom prst="rect">
+            <a:avLst/>
+          </a:prstGeom>
+          <a:noFill/>
+        </p:spPr>
+        <p:txBody>
+          <a:bodyPr wrap="square" anchor="t" lIns="0" rIns="0" tIns="0" bIns="0">
+            <a:spAutoFit/>
+          </a:bodyPr>
+          <a:lstStyle/>
+          <a:p>
+            <a:pPr algn="l">
+              <a:spcAft>
+                <a:spcPts val="500"/>
+              </a:spcAft>
+            </a:pPr>
+            <a:r>
+              <a:rPr sz="980" b="1" i="0" spc="110">
+                <a:solidFill>
+                  <a:srgbClr val="F08A7F"/>
+                </a:solidFill>
+                <a:latin typeface="Calibri"/>
+              </a:rPr>
+              <a:t>DECISION TWO — WHO OWNS THE DIAL</a:t>
+            </a:r>
+          </a:p>
+          <a:p>
+            <a:pPr algn="l">
+              <a:lnSpc>
+                <a:spcPct val="106000"/>
+              </a:lnSpc>
+              <a:spcAft>
+                <a:spcPts val="0"/>
+              </a:spcAft>
+            </a:pPr>
+            <a:r>
+              <a:rPr sz="1100" b="0" i="0">
+                <a:solidFill>
+                  <a:srgbClr val="9DAFC7"/>
+                </a:solidFill>
+                <a:latin typeface="Calibri"/>
+              </a:rPr>
+              <a:t>The escalated share is not set once. Someone has to own moving it as the legal ceiling and the budget move, and to review it on a schedule.</a:t>
             </a:r>
           </a:p>
         </p:txBody>
@@ -9332,7 +10824,7 @@
                 </a:solidFill>
                 <a:latin typeface="Calibri"/>
               </a:rPr>
-              <a:t>SO WE MEASURED ON OUR OWN TERMS</a:t>
+              <a:t>SO WE MEASURED ON EXTERNAL, EXPERT-ANNOTATED PROMPTS</a:t>
             </a:r>
           </a:p>
           <a:p>
@@ -9351,7 +10843,7 @@
                 </a:solidFill>
                 <a:latin typeface="Calibri"/>
               </a:rPr>
-              <a:t>Expert-annotated finance, healthcare and law prompts; every guard scored on identical rows; catch rates compared only at a matched 5% false-alarm budget.</a:t>
+              <a:t>Third-party expert-annotated finance, healthcare and law prompts — not our own traffic and not our own labels; every guard scored on identical rows; catch rates compared only at a matched 5% false-alarm budget.</a:t>
             </a:r>
           </a:p>
         </p:txBody>
@@ -11327,7 +12819,7 @@
                 </a:solidFill>
                 <a:latin typeface="Cambria"/>
               </a:rPr>
-              <a:t>On traffic we can describe in advance, our own guard already wins</a:t>
+              <a:t>On traffic we can describe in advance, our own tuned guards already win</a:t>
             </a:r>
           </a:p>
         </p:txBody>
@@ -11581,8 +13073,8 @@
         </p:nvSpPr>
         <p:spPr>
           <a:xfrm>
-            <a:off x="777240" y="3995928"/>
-            <a:ext cx="10637215" cy="1097280"/>
+            <a:off x="777240" y="3941064"/>
+            <a:ext cx="10637215" cy="1042415"/>
           </a:xfrm>
           <a:prstGeom prst="rect">
             <a:avLst/>
@@ -11627,8 +13119,8 @@
         </p:nvSpPr>
         <p:spPr>
           <a:xfrm>
-            <a:off x="1014984" y="4142232"/>
-            <a:ext cx="10161727" cy="804672"/>
+            <a:off x="1014984" y="4087368"/>
+            <a:ext cx="10161727" cy="749807"/>
           </a:xfrm>
           <a:prstGeom prst="rect">
             <a:avLst/>
@@ -11673,6 +13165,110 @@
                 <a:latin typeface="Calibri"/>
               </a:rPr>
               <a:t>The gap is not a ceiling a bigger local model would break through -- it is the price of the regime. So the question is not “can a small guard match the frontier” but “what share of our traffic can we describe in a training manifest”. Self-host that share and escalate the rest by how near the local guard sits to its own decision line -- the router we measured. Routing on UNFAMILIARITY instead is the more attractive idea and we did not test it: treat it as the next experiment, not as the plan.</a:t>
+            </a:r>
+          </a:p>
+        </p:txBody>
+      </p:sp>
+      <p:sp>
+        <p:nvSpPr>
+          <p:cNvPr id="13" name="Rectangle 12"/>
+          <p:cNvSpPr/>
+          <p:nvPr/>
+        </p:nvSpPr>
+        <p:spPr>
+          <a:xfrm>
+            <a:off x="777240" y="5074920"/>
+            <a:ext cx="10637215" cy="859536"/>
+          </a:xfrm>
+          <a:prstGeom prst="rect">
+            <a:avLst/>
+          </a:prstGeom>
+          <a:solidFill>
+            <a:srgbClr val="331A1C"/>
+          </a:solidFill>
+          <a:ln w="9525">
+            <a:solidFill>
+              <a:srgbClr val="4A2427"/>
+            </a:solidFill>
+          </a:ln>
+          <a:effectLst/>
+        </p:spPr>
+        <p:style>
+          <a:lnRef idx="1">
+            <a:schemeClr val="accent1"/>
+          </a:lnRef>
+          <a:fillRef idx="3">
+            <a:schemeClr val="accent1"/>
+          </a:fillRef>
+          <a:effectRef idx="2">
+            <a:schemeClr val="accent1"/>
+          </a:effectRef>
+          <a:fontRef idx="minor">
+            <a:schemeClr val="lt1"/>
+          </a:fontRef>
+        </p:style>
+        <p:txBody>
+          <a:bodyPr rtlCol="0" anchor="ctr" wrap="square"/>
+          <a:lstStyle/>
+          <a:p>
+            <a:pPr algn="ctr"/>
+          </a:p>
+        </p:txBody>
+      </p:sp>
+      <p:sp>
+        <p:nvSpPr>
+          <p:cNvPr id="14" name="TextBox 13"/>
+          <p:cNvSpPr txBox="1"/>
+          <p:nvPr/>
+        </p:nvSpPr>
+        <p:spPr>
+          <a:xfrm>
+            <a:off x="1014984" y="5221224"/>
+            <a:ext cx="10161727" cy="566928"/>
+          </a:xfrm>
+          <a:prstGeom prst="rect">
+            <a:avLst/>
+          </a:prstGeom>
+          <a:noFill/>
+        </p:spPr>
+        <p:txBody>
+          <a:bodyPr wrap="square" anchor="t" lIns="0" rIns="0" tIns="0" bIns="0">
+            <a:spAutoFit/>
+          </a:bodyPr>
+          <a:lstStyle/>
+          <a:p>
+            <a:pPr algn="l">
+              <a:spcAft>
+                <a:spcPts val="500"/>
+              </a:spcAft>
+            </a:pPr>
+            <a:r>
+              <a:rPr sz="980" b="1" i="0" spc="110">
+                <a:solidFill>
+                  <a:srgbClr val="F08A7F"/>
+                </a:solidFill>
+                <a:latin typeface="Calibri"/>
+              </a:rPr>
+              <a:t>WHAT THE ADVANTAGE IS A PROPERTY OF</a:t>
+            </a:r>
+          </a:p>
+          <a:p>
+            <a:pPr algn="l">
+              <a:lnSpc>
+                <a:spcPct val="106000"/>
+              </a:lnSpc>
+              <a:spcAft>
+                <a:spcPts val="0"/>
+              </a:spcAft>
+            </a:pPr>
+            <a:r>
+              <a:rPr sz="1100" b="0" i="0">
+                <a:solidFill>
+                  <a:srgbClr val="9DAFC7"/>
+                </a:solidFill>
+                <a:latin typeface="Calibri"/>
+              </a:rPr>
+              <a:t>Include the untuned base arms in the same average and it reverses to -0.264 [-0.321, -0.179] — excluding zero in the OPPOSITE direction. So this is not “small guards beat hosted models”; it is “guards we have tuned on a manifest of that traffic do”. Lane 1 is therefore a standing tuning programme, not a default configuration.</a:t>
             </a:r>
           </a:p>
         </p:txBody>
@@ -11896,7 +13492,7 @@
                 </a:solidFill>
                 <a:latin typeface="Calibri"/>
               </a:rPr>
-              <a:t>Change in catch rate after fine-tuning, across 6 models · 5 training runs each</a:t>
+              <a:t>Change in ranking accuracy after fine-tuning (macro-AP), on our own internal 6-checkpoint panel · 5 training runs each</a:t>
             </a:r>
           </a:p>
         </p:txBody>
@@ -11934,7 +13530,7 @@
         <p:spPr>
           <a:xfrm>
             <a:off x="8503919" y="2258568"/>
-            <a:ext cx="2910536" cy="1828800"/>
+            <a:ext cx="2910536" cy="1993392"/>
           </a:xfrm>
           <a:prstGeom prst="rect">
             <a:avLst/>
@@ -11980,7 +13576,7 @@
         <p:spPr>
           <a:xfrm>
             <a:off x="8741663" y="2404872"/>
-            <a:ext cx="2435048" cy="1536192"/>
+            <a:ext cx="2435048" cy="1700784"/>
           </a:xfrm>
           <a:prstGeom prst="rect">
             <a:avLst/>
@@ -12024,7 +13620,7 @@
                 </a:solidFill>
                 <a:latin typeface="Calibri"/>
               </a:rPr>
-              <a:t>Fine-tuning teaches a model the traffic you trained it on and costs it accuracy on traffic you did not. Read the chart downward: the blue gain shrinks steadily as the starting model gets stronger. The red cost is not as orderly — it turns from a gain into a loss and stays there, because every tuned model lands on much the same finishing accuracy.</a:t>
+              <a:t>Fine-tuning teaches a model the traffic you trained on and costs it accuracy on traffic you did not. Read downward: the blue gain shrinks steadily as the base gets stronger. The red cost is less orderly — it turns from a gain into a loss and stays there, because every tuned model lands on much the same finishing accuracy.</a:t>
             </a:r>
           </a:p>
         </p:txBody>
@@ -12037,8 +13633,8 @@
         </p:nvSpPr>
         <p:spPr>
           <a:xfrm>
-            <a:off x="8503919" y="4251960"/>
-            <a:ext cx="2910536" cy="1572768"/>
+            <a:off x="8503919" y="4379976"/>
+            <a:ext cx="2910536" cy="1938528"/>
           </a:xfrm>
           <a:prstGeom prst="rect">
             <a:avLst/>
@@ -12083,8 +13679,8 @@
         </p:nvSpPr>
         <p:spPr>
           <a:xfrm>
-            <a:off x="8741663" y="4398264"/>
-            <a:ext cx="2435048" cy="1280160"/>
+            <a:off x="8741663" y="4526280"/>
+            <a:ext cx="2435048" cy="1645920"/>
           </a:xfrm>
           <a:prstGeom prst="rect">
             <a:avLst/>
@@ -12109,7 +13705,7 @@
                 </a:solidFill>
                 <a:latin typeface="Calibri"/>
               </a:rPr>
-              <a:t>PLANNING CONSEQUENCE</a:t>
+              <a:t>DIFFERENT MEASUREMENT, SAME VERDICT</a:t>
             </a:r>
           </a:p>
           <a:p>
@@ -12128,7 +13724,7 @@
                 </a:solidFill>
                 <a:latin typeface="Calibri"/>
               </a:rPr>
-              <a:t>Budgeting a tuning project to close a vendor gap is not supported here. The best tuned result anywhere (81%) still loses to hosted (90%). And the cost is larger than the average metric shows: scored only inside the 5% false-alarm budget we would actually run at, the held-out loss is about 3.0x bigger.</a:t>
+              <a:t>On the external expert-annotated prompts — catch rate at a matched 5% budget, never pooled with the chart — 4 of 6 checkpoints got worse. So budgeting a tuning project to close the vendor gap is not supported: the best tuned result anywhere (81%) still loses to hosted (90%).</a:t>
             </a:r>
           </a:p>
         </p:txBody>
@@ -13389,7 +14985,7 @@
                 </a:solidFill>
                 <a:latin typeface="Calibri"/>
               </a:rPr>
-              <a:t>Every option below priced against our strongest single in-house guard (83%), with what each costs per request</a:t>
+              <a:t>Priced against our strongest single in-house guard (83%) — which is itself a five-seed average — with what each costs per request</a:t>
             </a:r>
           </a:p>
         </p:txBody>
@@ -13403,7 +14999,7 @@
         <p:spPr>
           <a:xfrm>
             <a:off x="777240" y="2276856"/>
-            <a:ext cx="10637215" cy="512064"/>
+            <a:ext cx="10637215" cy="493776"/>
           </a:xfrm>
           <a:prstGeom prst="rect">
             <a:avLst/>
@@ -13449,7 +15045,7 @@
         <p:spPr>
           <a:xfrm>
             <a:off x="905256" y="2276856"/>
-            <a:ext cx="3360621" cy="512064"/>
+            <a:ext cx="3466993" cy="493776"/>
           </a:xfrm>
           <a:prstGeom prst="rect">
             <a:avLst/>
@@ -13487,8 +15083,8 @@
         </p:nvSpPr>
         <p:spPr>
           <a:xfrm>
-            <a:off x="4521909" y="2276856"/>
-            <a:ext cx="1552294" cy="512064"/>
+            <a:off x="4628281" y="2276856"/>
+            <a:ext cx="1765038" cy="493776"/>
           </a:xfrm>
           <a:prstGeom prst="rect">
             <a:avLst/>
@@ -13526,8 +15122,8 @@
         </p:nvSpPr>
         <p:spPr>
           <a:xfrm>
-            <a:off x="6330235" y="2276856"/>
-            <a:ext cx="2509643" cy="512064"/>
+            <a:off x="6649351" y="2276856"/>
+            <a:ext cx="2190527" cy="493776"/>
           </a:xfrm>
           <a:prstGeom prst="rect">
             <a:avLst/>
@@ -13566,7 +15162,7 @@
         <p:spPr>
           <a:xfrm>
             <a:off x="9095910" y="2276856"/>
-            <a:ext cx="2190527" cy="512064"/>
+            <a:ext cx="2190527" cy="493776"/>
           </a:xfrm>
           <a:prstGeom prst="rect">
             <a:avLst/>
@@ -13604,8 +15200,8 @@
         </p:nvSpPr>
         <p:spPr>
           <a:xfrm>
-            <a:off x="777240" y="2788920"/>
-            <a:ext cx="10637215" cy="512064"/>
+            <a:off x="777240" y="2770632"/>
+            <a:ext cx="10637215" cy="493776"/>
           </a:xfrm>
           <a:prstGeom prst="rect">
             <a:avLst/>
@@ -13650,8 +15246,8 @@
         </p:nvSpPr>
         <p:spPr>
           <a:xfrm>
-            <a:off x="905256" y="2788920"/>
-            <a:ext cx="3360621" cy="512064"/>
+            <a:off x="905256" y="2770632"/>
+            <a:ext cx="3466993" cy="493776"/>
           </a:xfrm>
           <a:prstGeom prst="rect">
             <a:avLst/>
@@ -13676,7 +15272,7 @@
                 </a:solidFill>
                 <a:latin typeface="Calibri"/>
               </a:rPr>
-              <a:t>Best single in-house guard</a:t>
+              <a:t>Best single in-house guard — the Qwen3-32B's 5 tuned adapters, averaged</a:t>
             </a:r>
           </a:p>
         </p:txBody>
@@ -13689,8 +15285,8 @@
         </p:nvSpPr>
         <p:spPr>
           <a:xfrm>
-            <a:off x="4521909" y="2788920"/>
-            <a:ext cx="1552294" cy="512064"/>
+            <a:off x="4628281" y="2770632"/>
+            <a:ext cx="1765038" cy="493776"/>
           </a:xfrm>
           <a:prstGeom prst="rect">
             <a:avLst/>
@@ -13728,8 +15324,8 @@
         </p:nvSpPr>
         <p:spPr>
           <a:xfrm>
-            <a:off x="6330235" y="2788920"/>
-            <a:ext cx="2509643" cy="512064"/>
+            <a:off x="6649351" y="2770632"/>
+            <a:ext cx="2190527" cy="493776"/>
           </a:xfrm>
           <a:prstGeom prst="rect">
             <a:avLst/>
@@ -13754,7 +15350,7 @@
                 </a:solidFill>
                 <a:latin typeface="Calibri"/>
               </a:rPr>
-              <a:t>1 model call</a:t>
+              <a:t>5 model calls</a:t>
             </a:r>
           </a:p>
         </p:txBody>
@@ -13767,8 +15363,8 @@
         </p:nvSpPr>
         <p:spPr>
           <a:xfrm>
-            <a:off x="9095910" y="2788920"/>
-            <a:ext cx="2190527" cy="512064"/>
+            <a:off x="9095910" y="2770632"/>
+            <a:ext cx="2190527" cy="493776"/>
           </a:xfrm>
           <a:prstGeom prst="rect">
             <a:avLst/>
@@ -13793,7 +15389,7 @@
                 </a:solidFill>
                 <a:latin typeface="Calibri"/>
               </a:rPr>
-              <a:t>the baseline</a:t>
+              <a:t>the baseline below</a:t>
             </a:r>
           </a:p>
         </p:txBody>
@@ -13806,8 +15402,8 @@
         </p:nvSpPr>
         <p:spPr>
           <a:xfrm>
-            <a:off x="777240" y="3300984"/>
-            <a:ext cx="10637215" cy="512064"/>
+            <a:off x="777240" y="3264408"/>
+            <a:ext cx="10637215" cy="493776"/>
           </a:xfrm>
           <a:prstGeom prst="rect">
             <a:avLst/>
@@ -13852,8 +15448,8 @@
         </p:nvSpPr>
         <p:spPr>
           <a:xfrm>
-            <a:off x="905256" y="3300984"/>
-            <a:ext cx="3360621" cy="512064"/>
+            <a:off x="905256" y="3264408"/>
+            <a:ext cx="3466993" cy="493776"/>
           </a:xfrm>
           <a:prstGeom prst="rect">
             <a:avLst/>
@@ -13878,7 +15474,7 @@
                 </a:solidFill>
                 <a:latin typeface="Calibri"/>
               </a:rPr>
-              <a:t>Average the 5 tuning runs of one guard</a:t>
+              <a:t>Seed-averaging — the mechanism behind that row, not an addition to it</a:t>
             </a:r>
           </a:p>
         </p:txBody>
@@ -13891,8 +15487,8 @@
         </p:nvSpPr>
         <p:spPr>
           <a:xfrm>
-            <a:off x="4521909" y="3300984"/>
-            <a:ext cx="1552294" cy="512064"/>
+            <a:off x="4628281" y="3264408"/>
+            <a:ext cx="1765038" cy="493776"/>
           </a:xfrm>
           <a:prstGeom prst="rect">
             <a:avLst/>
@@ -13917,7 +15513,7 @@
                 </a:solidFill>
                 <a:latin typeface="Calibri"/>
               </a:rPr>
-              <a:t>+0.026 on top</a:t>
+              <a:t>+0.026 over one tuned seed</a:t>
             </a:r>
           </a:p>
         </p:txBody>
@@ -13930,8 +15526,8 @@
         </p:nvSpPr>
         <p:spPr>
           <a:xfrm>
-            <a:off x="6330235" y="3300984"/>
-            <a:ext cx="2509643" cy="512064"/>
+            <a:off x="6649351" y="3264408"/>
+            <a:ext cx="2190527" cy="493776"/>
           </a:xfrm>
           <a:prstGeom prst="rect">
             <a:avLst/>
@@ -13956,7 +15552,7 @@
                 </a:solidFill>
                 <a:latin typeface="Calibri"/>
               </a:rPr>
-              <a:t>already paid for</a:t>
+              <a:t>no new training</a:t>
             </a:r>
           </a:p>
         </p:txBody>
@@ -13969,8 +15565,8 @@
         </p:nvSpPr>
         <p:spPr>
           <a:xfrm>
-            <a:off x="9095910" y="3300984"/>
-            <a:ext cx="2190527" cy="512064"/>
+            <a:off x="9095910" y="3264408"/>
+            <a:ext cx="2190527" cy="493776"/>
           </a:xfrm>
           <a:prstGeom prst="rect">
             <a:avLst/>
@@ -14008,8 +15604,8 @@
         </p:nvSpPr>
         <p:spPr>
           <a:xfrm>
-            <a:off x="777240" y="3813048"/>
-            <a:ext cx="10637215" cy="512064"/>
+            <a:off x="777240" y="3758184"/>
+            <a:ext cx="10637215" cy="493776"/>
           </a:xfrm>
           <a:prstGeom prst="rect">
             <a:avLst/>
@@ -14054,8 +15650,8 @@
         </p:nvSpPr>
         <p:spPr>
           <a:xfrm>
-            <a:off x="905256" y="3813048"/>
-            <a:ext cx="3360621" cy="512064"/>
+            <a:off x="905256" y="3758184"/>
+            <a:ext cx="3466993" cy="493776"/>
           </a:xfrm>
           <a:prstGeom prst="rect">
             <a:avLst/>
@@ -14093,8 +15689,8 @@
         </p:nvSpPr>
         <p:spPr>
           <a:xfrm>
-            <a:off x="4521909" y="3813048"/>
-            <a:ext cx="1552294" cy="512064"/>
+            <a:off x="4628281" y="3758184"/>
+            <a:ext cx="1765038" cy="493776"/>
           </a:xfrm>
           <a:prstGeom prst="rect">
             <a:avLst/>
@@ -14132,8 +15728,8 @@
         </p:nvSpPr>
         <p:spPr>
           <a:xfrm>
-            <a:off x="6330235" y="3813048"/>
-            <a:ext cx="2509643" cy="512064"/>
+            <a:off x="6649351" y="3758184"/>
+            <a:ext cx="2190527" cy="493776"/>
           </a:xfrm>
           <a:prstGeom prst="rect">
             <a:avLst/>
@@ -14171,8 +15767,8 @@
         </p:nvSpPr>
         <p:spPr>
           <a:xfrm>
-            <a:off x="9095910" y="3813048"/>
-            <a:ext cx="2190527" cy="512064"/>
+            <a:off x="9095910" y="3758184"/>
+            <a:ext cx="2190527" cy="493776"/>
           </a:xfrm>
           <a:prstGeom prst="rect">
             <a:avLst/>
@@ -14210,8 +15806,8 @@
         </p:nvSpPr>
         <p:spPr>
           <a:xfrm>
-            <a:off x="777240" y="4325112"/>
-            <a:ext cx="10637215" cy="512064"/>
+            <a:off x="777240" y="4251960"/>
+            <a:ext cx="10637215" cy="493776"/>
           </a:xfrm>
           <a:prstGeom prst="rect">
             <a:avLst/>
@@ -14256,8 +15852,8 @@
         </p:nvSpPr>
         <p:spPr>
           <a:xfrm>
-            <a:off x="905256" y="4325112"/>
-            <a:ext cx="3360621" cy="512064"/>
+            <a:off x="905256" y="4251960"/>
+            <a:ext cx="3466993" cy="493776"/>
           </a:xfrm>
           <a:prstGeom prst="rect">
             <a:avLst/>
@@ -14295,8 +15891,8 @@
         </p:nvSpPr>
         <p:spPr>
           <a:xfrm>
-            <a:off x="4521909" y="4325112"/>
-            <a:ext cx="1552294" cy="512064"/>
+            <a:off x="4628281" y="4251960"/>
+            <a:ext cx="1765038" cy="493776"/>
           </a:xfrm>
           <a:prstGeom prst="rect">
             <a:avLst/>
@@ -14334,8 +15930,8 @@
         </p:nvSpPr>
         <p:spPr>
           <a:xfrm>
-            <a:off x="6330235" y="4325112"/>
-            <a:ext cx="2509643" cy="512064"/>
+            <a:off x="6649351" y="4251960"/>
+            <a:ext cx="2190527" cy="493776"/>
           </a:xfrm>
           <a:prstGeom prst="rect">
             <a:avLst/>
@@ -14373,8 +15969,8 @@
         </p:nvSpPr>
         <p:spPr>
           <a:xfrm>
-            <a:off x="9095910" y="4325112"/>
-            <a:ext cx="2190527" cy="512064"/>
+            <a:off x="9095910" y="4251960"/>
+            <a:ext cx="2190527" cy="493776"/>
           </a:xfrm>
           <a:prstGeom prst="rect">
             <a:avLst/>
@@ -14412,8 +16008,8 @@
         </p:nvSpPr>
         <p:spPr>
           <a:xfrm>
-            <a:off x="777240" y="4837176"/>
-            <a:ext cx="10637215" cy="512064"/>
+            <a:off x="777240" y="4745736"/>
+            <a:ext cx="10637215" cy="493776"/>
           </a:xfrm>
           <a:prstGeom prst="rect">
             <a:avLst/>
@@ -14458,8 +16054,8 @@
         </p:nvSpPr>
         <p:spPr>
           <a:xfrm>
-            <a:off x="905256" y="4837176"/>
-            <a:ext cx="3360621" cy="512064"/>
+            <a:off x="905256" y="4745736"/>
+            <a:ext cx="3466993" cy="493776"/>
           </a:xfrm>
           <a:prstGeom prst="rect">
             <a:avLst/>
@@ -14484,7 +16080,7 @@
                 </a:solidFill>
                 <a:latin typeface="Calibri"/>
               </a:rPr>
-              <a:t>Escalate the uncertain 20% instead</a:t>
+              <a:t>Escalate the uncertain 20% — from the 3B inline guard</a:t>
             </a:r>
           </a:p>
         </p:txBody>
@@ -14497,8 +16093,8 @@
         </p:nvSpPr>
         <p:spPr>
           <a:xfrm>
-            <a:off x="4521909" y="4837176"/>
-            <a:ext cx="1552294" cy="512064"/>
+            <a:off x="4628281" y="4745736"/>
+            <a:ext cx="1765038" cy="493776"/>
           </a:xfrm>
           <a:prstGeom prst="rect">
             <a:avLst/>
@@ -14523,7 +16119,7 @@
                 </a:solidFill>
                 <a:latin typeface="Calibri"/>
               </a:rPr>
-              <a:t>84%</a:t>
+              <a:t>79% → 84%</a:t>
             </a:r>
           </a:p>
         </p:txBody>
@@ -14536,8 +16132,8 @@
         </p:nvSpPr>
         <p:spPr>
           <a:xfrm>
-            <a:off x="6330235" y="4837176"/>
-            <a:ext cx="2509643" cy="512064"/>
+            <a:off x="6649351" y="4745736"/>
+            <a:ext cx="2190527" cy="493776"/>
           </a:xfrm>
           <a:prstGeom prst="rect">
             <a:avLst/>
@@ -14575,8 +16171,8 @@
         </p:nvSpPr>
         <p:spPr>
           <a:xfrm>
-            <a:off x="9095910" y="4837176"/>
-            <a:ext cx="2190527" cy="512064"/>
+            <a:off x="9095910" y="4745736"/>
+            <a:ext cx="2190527" cy="493776"/>
           </a:xfrm>
           <a:prstGeom prst="rect">
             <a:avLst/>
@@ -14614,8 +16210,8 @@
         </p:nvSpPr>
         <p:spPr>
           <a:xfrm>
-            <a:off x="777240" y="5385816"/>
-            <a:ext cx="10637215" cy="914400"/>
+            <a:off x="777240" y="5276088"/>
+            <a:ext cx="10637215" cy="1060704"/>
           </a:xfrm>
           <a:prstGeom prst="rect">
             <a:avLst/>
@@ -14660,8 +16256,8 @@
         </p:nvSpPr>
         <p:spPr>
           <a:xfrm>
-            <a:off x="1014984" y="5532120"/>
-            <a:ext cx="10161727" cy="621792"/>
+            <a:off x="1014984" y="5422392"/>
+            <a:ext cx="10161727" cy="768096"/>
           </a:xfrm>
           <a:prstGeom prst="rect">
             <a:avLst/>
@@ -14705,7 +16301,7 @@
                 </a:solidFill>
                 <a:latin typeface="Calibri"/>
               </a:rPr>
-              <a:t>Escalating one request in five gets within about a point of the 18-model blend (84% vs 85%) at a fifteenth of the compute and with no labelled data to collect. Ensembling is the right answer only when nothing may leave at all; then it is the in-house ceiling, worth about a quarter of the gap.</a:t>
+              <a:t>Escalating one request in five gets within about a point of the 18-model blend (84% vs 85%) at a fifteenth of the compute and with no labelled data to collect — measured on top of the 3B inline guard; a cascade over a larger inline guard was never measured. Ensembling is the right answer only when nothing may leave at all; then it is the in-house ceiling, worth about a quarter of the gap.</a:t>
             </a:r>
           </a:p>
         </p:txBody>
